--- a/downloads/presentations/modules/com-200.pptx
+++ b/downloads/presentations/modules/com-200.pptx
@@ -3619,13 +3619,11 @@
             </a:avLst>
           </a:prstGeom>
           <a:solidFill>
-            <a:srgbClr val="FFFFFF">
-              <a:alpha val="88000"/>
-            </a:srgbClr>
+            <a:srgbClr val="FFFFFF"/>
           </a:solidFill>
           <a:ln w="12700">
             <a:solidFill>
-              <a:srgbClr val="D6E8F2"/>
+              <a:srgbClr val="B9D7E6"/>
             </a:solidFill>
             <a:prstDash val="solid"/>
           </a:ln>
@@ -3633,261 +3631,98 @@
       </p:sp>
       <p:sp>
         <p:nvSpPr>
-          <p:cNvPr id="14" name="Shape 12"/>
-          <p:cNvSpPr/>
-          <p:nvPr/>
-        </p:nvSpPr>
-        <p:spPr>
-          <a:xfrm>
-            <a:off x="8138160" y="3291840"/>
-            <a:ext cx="329184" cy="329184"/>
-          </a:xfrm>
-          <a:prstGeom prst="ellipse">
-            <a:avLst/>
-          </a:prstGeom>
-          <a:solidFill>
-            <a:srgbClr val="0068B7"/>
-          </a:solidFill>
-          <a:ln w="12700">
-            <a:solidFill>
-              <a:srgbClr val="0068B7"/>
-            </a:solidFill>
-            <a:prstDash val="solid"/>
-          </a:ln>
-        </p:spPr>
-      </p:sp>
-      <p:sp>
-        <p:nvSpPr>
-          <p:cNvPr id="15" name="Shape 13"/>
-          <p:cNvSpPr/>
-          <p:nvPr/>
-        </p:nvSpPr>
-        <p:spPr>
-          <a:xfrm>
-            <a:off x="10332720" y="3383280"/>
-            <a:ext cx="329184" cy="329184"/>
-          </a:xfrm>
-          <a:prstGeom prst="ellipse">
-            <a:avLst/>
-          </a:prstGeom>
-          <a:solidFill>
-            <a:srgbClr val="2F8A28"/>
-          </a:solidFill>
-          <a:ln w="12700">
-            <a:solidFill>
-              <a:srgbClr val="2F8A28"/>
-            </a:solidFill>
-            <a:prstDash val="solid"/>
-          </a:ln>
-        </p:spPr>
+          <p:cNvPr id="14" name="Text 12"/>
+          <p:cNvSpPr/>
+          <p:nvPr/>
+        </p:nvSpPr>
+        <p:spPr>
+          <a:xfrm>
+            <a:off x="7799832" y="2935224"/>
+            <a:ext cx="3145536" cy="256032"/>
+          </a:xfrm>
+          <a:prstGeom prst="rect">
+            <a:avLst/>
+          </a:prstGeom>
+          <a:noFill/>
+          <a:ln/>
+        </p:spPr>
+        <p:txBody>
+          <a:bodyPr wrap="square" lIns="0" tIns="0" rIns="0" bIns="0" rtlCol="0" anchor="ctr"/>
+          <a:lstStyle/>
+          <a:p>
+            <a:pPr indent="0" marL="0">
+              <a:buNone/>
+            </a:pPr>
+            <a:r>
+              <a:rPr lang="en-US" sz="1300" b="1" dirty="0">
+                <a:solidFill>
+                  <a:srgbClr val="0068B7"/>
+                </a:solidFill>
+                <a:latin typeface="Aptos" pitchFamily="34" charset="0"/>
+                <a:ea typeface="Aptos" pitchFamily="34" charset="-122"/>
+                <a:cs typeface="Aptos" pitchFamily="34" charset="-120"/>
+              </a:rPr>
+              <a:t>Concept checkpoints</a:t>
+            </a:r>
+            <a:endParaRPr lang="en-US" sz="1300" dirty="0"/>
+          </a:p>
+        </p:txBody>
+      </p:sp>
+      <p:sp>
+        <p:nvSpPr>
+          <p:cNvPr id="15" name="Text 13"/>
+          <p:cNvSpPr/>
+          <p:nvPr/>
+        </p:nvSpPr>
+        <p:spPr>
+          <a:xfrm>
+            <a:off x="7818120" y="3300984"/>
+            <a:ext cx="3090672" cy="877824"/>
+          </a:xfrm>
+          <a:prstGeom prst="rect">
+            <a:avLst/>
+          </a:prstGeom>
+          <a:noFill/>
+          <a:ln/>
+        </p:spPr>
+        <p:txBody>
+          <a:bodyPr wrap="square" lIns="254" tIns="254" rIns="254" bIns="254" rtlCol="0" anchor="t">
+            <a:normAutofit/>
+          </a:bodyPr>
+          <a:lstStyle/>
+          <a:p>
+            <a:r>
+              <a:rPr lang="en-US" sz="1380" dirty="0">
+                <a:solidFill>
+                  <a:srgbClr val="17364A"/>
+                </a:solidFill>
+                <a:latin typeface="Aptos" pitchFamily="34" charset="0"/>
+                <a:ea typeface="Aptos" pitchFamily="34" charset="-122"/>
+                <a:cs typeface="Aptos" pitchFamily="34" charset="-120"/>
+              </a:rPr>
+              <a:t>A communications workflow should define who checks technical accuracy, who reviews equity.</a:t>
+            </a:r>
+            <a:endParaRPr lang="en-US" sz="1380" dirty="0"/>
+          </a:p>
+          <a:p>
+            <a:r>
+              <a:rPr lang="en-US" sz="1380" dirty="0">
+                <a:solidFill>
+                  <a:srgbClr val="17364A"/>
+                </a:solidFill>
+                <a:latin typeface="Aptos" pitchFamily="34" charset="0"/>
+                <a:ea typeface="Aptos" pitchFamily="34" charset="-122"/>
+                <a:cs typeface="Aptos" pitchFamily="34" charset="-120"/>
+              </a:rPr>
+              <a:t>For urgent communications, the workflow should include expedited review rules that still.</a:t>
+            </a:r>
+            <a:endParaRPr lang="en-US" sz="1380" dirty="0"/>
+          </a:p>
+        </p:txBody>
       </p:sp>
       <p:sp>
         <p:nvSpPr>
           <p:cNvPr id="16" name="Shape 14"/>
-          <p:cNvSpPr/>
-          <p:nvPr/>
-        </p:nvSpPr>
-        <p:spPr>
-          <a:xfrm>
-            <a:off x="9235440" y="3502152"/>
-            <a:ext cx="329184" cy="329184"/>
-          </a:xfrm>
-          <a:prstGeom prst="ellipse">
-            <a:avLst/>
-          </a:prstGeom>
-          <a:solidFill>
-            <a:srgbClr val="D69A2D"/>
-          </a:solidFill>
-          <a:ln w="12700">
-            <a:solidFill>
-              <a:srgbClr val="D69A2D"/>
-            </a:solidFill>
-            <a:prstDash val="solid"/>
-          </a:ln>
-        </p:spPr>
-      </p:sp>
-      <p:sp>
-        <p:nvSpPr>
-          <p:cNvPr id="17" name="Shape 15"/>
-          <p:cNvSpPr/>
-          <p:nvPr/>
-        </p:nvSpPr>
-        <p:spPr>
-          <a:xfrm>
-            <a:off x="9235440" y="3657600"/>
-            <a:ext cx="329184" cy="329184"/>
-          </a:xfrm>
-          <a:prstGeom prst="ellipse">
-            <a:avLst/>
-          </a:prstGeom>
-          <a:solidFill>
-            <a:srgbClr val="6A4CA3"/>
-          </a:solidFill>
-          <a:ln w="12700">
-            <a:solidFill>
-              <a:srgbClr val="6A4CA3"/>
-            </a:solidFill>
-            <a:prstDash val="solid"/>
-          </a:ln>
-        </p:spPr>
-      </p:sp>
-      <p:sp>
-        <p:nvSpPr>
-          <p:cNvPr id="18" name="Shape 16"/>
-          <p:cNvSpPr/>
-          <p:nvPr/>
-        </p:nvSpPr>
-        <p:spPr>
-          <a:xfrm>
-            <a:off x="8302752" y="3456432"/>
-            <a:ext cx="1097280" cy="365760"/>
-          </a:xfrm>
-          <a:prstGeom prst="line">
-            <a:avLst/>
-          </a:prstGeom>
-          <a:noFill/>
-          <a:ln w="19050">
-            <a:solidFill>
-              <a:srgbClr val="8ABBD8"/>
-            </a:solidFill>
-            <a:prstDash val="solid"/>
-          </a:ln>
-        </p:spPr>
-      </p:sp>
-      <p:sp>
-        <p:nvSpPr>
-          <p:cNvPr id="19" name="Shape 17"/>
-          <p:cNvSpPr/>
-          <p:nvPr/>
-        </p:nvSpPr>
-        <p:spPr>
-          <a:xfrm>
-            <a:off x="10497312" y="3547872"/>
-            <a:ext cx="-1097280" cy="274320"/>
-          </a:xfrm>
-          <a:prstGeom prst="line">
-            <a:avLst/>
-          </a:prstGeom>
-          <a:noFill/>
-          <a:ln w="19050">
-            <a:solidFill>
-              <a:srgbClr val="8ABBD8"/>
-            </a:solidFill>
-            <a:prstDash val="solid"/>
-          </a:ln>
-        </p:spPr>
-      </p:sp>
-      <p:sp>
-        <p:nvSpPr>
-          <p:cNvPr id="20" name="Shape 18"/>
-          <p:cNvSpPr/>
-          <p:nvPr/>
-        </p:nvSpPr>
-        <p:spPr>
-          <a:xfrm>
-            <a:off x="9400032" y="3666744"/>
-            <a:ext cx="0" cy="155448"/>
-          </a:xfrm>
-          <a:prstGeom prst="line">
-            <a:avLst/>
-          </a:prstGeom>
-          <a:noFill/>
-          <a:ln w="19050">
-            <a:solidFill>
-              <a:srgbClr val="8ABBD8"/>
-            </a:solidFill>
-            <a:prstDash val="solid"/>
-          </a:ln>
-        </p:spPr>
-      </p:sp>
-      <p:sp>
-        <p:nvSpPr>
-          <p:cNvPr id="21" name="Shape 19"/>
-          <p:cNvSpPr/>
-          <p:nvPr/>
-        </p:nvSpPr>
-        <p:spPr>
-          <a:xfrm>
-            <a:off x="8302752" y="3456432"/>
-            <a:ext cx="1097280" cy="210312"/>
-          </a:xfrm>
-          <a:prstGeom prst="line">
-            <a:avLst/>
-          </a:prstGeom>
-          <a:noFill/>
-          <a:ln w="19050">
-            <a:solidFill>
-              <a:srgbClr val="8ABBD8"/>
-            </a:solidFill>
-            <a:prstDash val="solid"/>
-          </a:ln>
-        </p:spPr>
-      </p:sp>
-      <p:sp>
-        <p:nvSpPr>
-          <p:cNvPr id="22" name="Shape 20"/>
-          <p:cNvSpPr/>
-          <p:nvPr/>
-        </p:nvSpPr>
-        <p:spPr>
-          <a:xfrm>
-            <a:off x="10497312" y="3547872"/>
-            <a:ext cx="-1097280" cy="118872"/>
-          </a:xfrm>
-          <a:prstGeom prst="line">
-            <a:avLst/>
-          </a:prstGeom>
-          <a:noFill/>
-          <a:ln w="19050">
-            <a:solidFill>
-              <a:srgbClr val="8ABBD8"/>
-            </a:solidFill>
-            <a:prstDash val="solid"/>
-          </a:ln>
-        </p:spPr>
-      </p:sp>
-      <p:sp>
-        <p:nvSpPr>
-          <p:cNvPr id="23" name="Text 21"/>
-          <p:cNvSpPr/>
-          <p:nvPr/>
-        </p:nvSpPr>
-        <p:spPr>
-          <a:xfrm>
-            <a:off x="7909560" y="3977640"/>
-            <a:ext cx="2926080" cy="182880"/>
-          </a:xfrm>
-          <a:prstGeom prst="rect">
-            <a:avLst/>
-          </a:prstGeom>
-          <a:noFill/>
-          <a:ln/>
-        </p:spPr>
-        <p:txBody>
-          <a:bodyPr wrap="square" lIns="0" tIns="0" rIns="0" bIns="0" rtlCol="0" anchor="ctr"/>
-          <a:lstStyle/>
-          <a:p>
-            <a:pPr algn="ctr" indent="0" marL="0">
-              <a:buNone/>
-            </a:pPr>
-            <a:r>
-              <a:rPr lang="en-US" sz="1000" dirty="0">
-                <a:solidFill>
-                  <a:srgbClr val="003A63"/>
-                </a:solidFill>
-                <a:latin typeface="Aptos" pitchFamily="34" charset="0"/>
-                <a:ea typeface="Aptos" pitchFamily="34" charset="-122"/>
-                <a:cs typeface="Aptos" pitchFamily="34" charset="-120"/>
-              </a:rPr>
-              <a:t>People and trust</a:t>
-            </a:r>
-            <a:endParaRPr lang="en-US" sz="1000" dirty="0"/>
-          </a:p>
-        </p:txBody>
-      </p:sp>
-      <p:sp>
-        <p:nvSpPr>
-          <p:cNvPr id="24" name="Shape 22"/>
           <p:cNvSpPr/>
           <p:nvPr/>
         </p:nvSpPr>
@@ -3914,7 +3749,7 @@
       </p:sp>
       <p:sp>
         <p:nvSpPr>
-          <p:cNvPr id="25" name="Text 23"/>
+          <p:cNvPr id="17" name="Text 15"/>
           <p:cNvSpPr/>
           <p:nvPr/>
         </p:nvSpPr>
@@ -3953,7 +3788,7 @@
       </p:sp>
       <p:sp>
         <p:nvSpPr>
-          <p:cNvPr id="26" name="Text 24"/>
+          <p:cNvPr id="18" name="Text 16"/>
           <p:cNvSpPr/>
           <p:nvPr/>
         </p:nvSpPr>
@@ -4461,13 +4296,11 @@
             </a:avLst>
           </a:prstGeom>
           <a:solidFill>
-            <a:srgbClr val="FFFFFF">
-              <a:alpha val="88000"/>
-            </a:srgbClr>
+            <a:srgbClr val="FFFFFF"/>
           </a:solidFill>
           <a:ln w="12700">
             <a:solidFill>
-              <a:srgbClr val="D6E8F2"/>
+              <a:srgbClr val="B9D7E6"/>
             </a:solidFill>
             <a:prstDash val="solid"/>
           </a:ln>
@@ -4475,26 +4308,42 @@
       </p:sp>
       <p:sp>
         <p:nvSpPr>
-          <p:cNvPr id="14" name="Shape 12"/>
-          <p:cNvSpPr/>
-          <p:nvPr/>
-        </p:nvSpPr>
-        <p:spPr>
-          <a:xfrm>
-            <a:off x="8046720" y="3108960"/>
-            <a:ext cx="2651760" cy="896112"/>
-          </a:xfrm>
-          <a:prstGeom prst="arc">
-            <a:avLst/>
-          </a:prstGeom>
-          <a:noFill/>
-          <a:ln w="25400">
-            <a:solidFill>
-              <a:srgbClr val="0068B7"/>
-            </a:solidFill>
-            <a:prstDash val="solid"/>
-          </a:ln>
-        </p:spPr>
+          <p:cNvPr id="14" name="Text 12"/>
+          <p:cNvSpPr/>
+          <p:nvPr/>
+        </p:nvSpPr>
+        <p:spPr>
+          <a:xfrm>
+            <a:off x="7799832" y="2935224"/>
+            <a:ext cx="3145536" cy="256032"/>
+          </a:xfrm>
+          <a:prstGeom prst="rect">
+            <a:avLst/>
+          </a:prstGeom>
+          <a:noFill/>
+          <a:ln/>
+        </p:spPr>
+        <p:txBody>
+          <a:bodyPr wrap="square" lIns="0" tIns="0" rIns="0" bIns="0" rtlCol="0" anchor="ctr"/>
+          <a:lstStyle/>
+          <a:p>
+            <a:pPr indent="0" marL="0">
+              <a:buNone/>
+            </a:pPr>
+            <a:r>
+              <a:rPr lang="en-US" sz="1300" b="1" dirty="0">
+                <a:solidFill>
+                  <a:srgbClr val="0068B7"/>
+                </a:solidFill>
+                <a:latin typeface="Aptos" pitchFamily="34" charset="0"/>
+                <a:ea typeface="Aptos" pitchFamily="34" charset="-122"/>
+                <a:cs typeface="Aptos" pitchFamily="34" charset="-120"/>
+              </a:rPr>
+              <a:t>Concept checkpoints</a:t>
+            </a:r>
+            <a:endParaRPr lang="en-US" sz="1300" dirty="0"/>
+          </a:p>
+        </p:txBody>
       </p:sp>
       <p:sp>
         <p:nvSpPr>
@@ -4504,102 +4353,67 @@
         </p:nvSpPr>
         <p:spPr>
           <a:xfrm>
-            <a:off x="7909560" y="3099816"/>
-            <a:ext cx="2926080" cy="256032"/>
-          </a:xfrm>
-          <a:prstGeom prst="rect">
-            <a:avLst/>
-          </a:prstGeom>
-          <a:noFill/>
-          <a:ln/>
-        </p:spPr>
-        <p:txBody>
-          <a:bodyPr wrap="square" lIns="0" tIns="0" rIns="0" bIns="0" rtlCol="0" anchor="ctr"/>
-          <a:lstStyle/>
-          <a:p>
-            <a:pPr algn="ctr" indent="0" marL="0">
-              <a:buNone/>
-            </a:pPr>
-            <a:r>
-              <a:rPr lang="en-US" sz="1500" b="1" dirty="0">
-                <a:solidFill>
-                  <a:srgbClr val="003A63"/>
-                </a:solidFill>
-                <a:latin typeface="Aptos" pitchFamily="34" charset="0"/>
-                <a:ea typeface="Aptos" pitchFamily="34" charset="-122"/>
-                <a:cs typeface="Aptos" pitchFamily="34" charset="-120"/>
-              </a:rPr>
-              <a:t>Risk</a:t>
-            </a:r>
-            <a:endParaRPr lang="en-US" sz="1500" dirty="0"/>
+            <a:off x="7818120" y="3300984"/>
+            <a:ext cx="3090672" cy="877824"/>
+          </a:xfrm>
+          <a:prstGeom prst="rect">
+            <a:avLst/>
+          </a:prstGeom>
+          <a:noFill/>
+          <a:ln/>
+        </p:spPr>
+        <p:txBody>
+          <a:bodyPr wrap="square" lIns="254" tIns="254" rIns="254" bIns="254" rtlCol="0" anchor="t">
+            <a:normAutofit/>
+          </a:bodyPr>
+          <a:lstStyle/>
+          <a:p>
+            <a:r>
+              <a:rPr lang="en-US" sz="1380" dirty="0">
+                <a:solidFill>
+                  <a:srgbClr val="17364A"/>
+                </a:solidFill>
+                <a:latin typeface="Aptos" pitchFamily="34" charset="0"/>
+                <a:ea typeface="Aptos" pitchFamily="34" charset="-122"/>
+                <a:cs typeface="Aptos" pitchFamily="34" charset="-120"/>
+              </a:rPr>
+              <a:t>Risks and failure modes include the following:</a:t>
+            </a:r>
+            <a:endParaRPr lang="en-US" sz="1380" dirty="0"/>
+          </a:p>
+          <a:p>
+            <a:r>
+              <a:rPr lang="en-US" sz="1380" dirty="0">
+                <a:solidFill>
+                  <a:srgbClr val="17364A"/>
+                </a:solidFill>
+                <a:latin typeface="Aptos" pitchFamily="34" charset="0"/>
+                <a:ea typeface="Aptos" pitchFamily="34" charset="-122"/>
+                <a:cs typeface="Aptos" pitchFamily="34" charset="-120"/>
+              </a:rPr>
+              <a:t>AI-generated messages overstating evidence or omitting uncertainty.</a:t>
+            </a:r>
+            <a:endParaRPr lang="en-US" sz="1380" dirty="0"/>
+          </a:p>
+          <a:p>
+            <a:r>
+              <a:rPr lang="en-US" sz="1380" dirty="0">
+                <a:solidFill>
+                  <a:srgbClr val="17364A"/>
+                </a:solidFill>
+                <a:latin typeface="Aptos" pitchFamily="34" charset="0"/>
+                <a:ea typeface="Aptos" pitchFamily="34" charset="-122"/>
+                <a:cs typeface="Aptos" pitchFamily="34" charset="-120"/>
+              </a:rPr>
+              <a:t>Use of stigmatizing, blaming, or culturally inappropriate language.</a:t>
+            </a:r>
+            <a:endParaRPr lang="en-US" sz="1380" dirty="0"/>
           </a:p>
         </p:txBody>
       </p:sp>
       <p:sp>
         <p:nvSpPr>
           <p:cNvPr id="16" name="Shape 14"/>
-          <p:cNvSpPr/>
-          <p:nvPr/>
-        </p:nvSpPr>
-        <p:spPr>
-          <a:xfrm>
-            <a:off x="8366760" y="3639312"/>
-            <a:ext cx="2011680" cy="0"/>
-          </a:xfrm>
-          <a:prstGeom prst="line">
-            <a:avLst/>
-          </a:prstGeom>
-          <a:noFill/>
-          <a:ln w="63500">
-            <a:solidFill>
-              <a:srgbClr val="2F8A28"/>
-            </a:solidFill>
-            <a:prstDash val="solid"/>
-          </a:ln>
-        </p:spPr>
-      </p:sp>
-      <p:sp>
-        <p:nvSpPr>
-          <p:cNvPr id="17" name="Text 15"/>
-          <p:cNvSpPr/>
-          <p:nvPr/>
-        </p:nvSpPr>
-        <p:spPr>
-          <a:xfrm>
-            <a:off x="7909560" y="3849624"/>
-            <a:ext cx="2926080" cy="164592"/>
-          </a:xfrm>
-          <a:prstGeom prst="rect">
-            <a:avLst/>
-          </a:prstGeom>
-          <a:noFill/>
-          <a:ln/>
-        </p:spPr>
-        <p:txBody>
-          <a:bodyPr wrap="square" lIns="0" tIns="0" rIns="0" bIns="0" rtlCol="0" anchor="ctr"/>
-          <a:lstStyle/>
-          <a:p>
-            <a:pPr algn="ctr" indent="0" marL="0">
-              <a:buNone/>
-            </a:pPr>
-            <a:r>
-              <a:rPr lang="en-US" sz="900" dirty="0">
-                <a:solidFill>
-                  <a:srgbClr val="003A63"/>
-                </a:solidFill>
-                <a:latin typeface="Aptos" pitchFamily="34" charset="0"/>
-                <a:ea typeface="Aptos" pitchFamily="34" charset="-122"/>
-                <a:cs typeface="Aptos" pitchFamily="34" charset="-120"/>
-              </a:rPr>
-              <a:t>Human review</a:t>
-            </a:r>
-            <a:endParaRPr lang="en-US" sz="900" dirty="0"/>
-          </a:p>
-        </p:txBody>
-      </p:sp>
-      <p:sp>
-        <p:nvSpPr>
-          <p:cNvPr id="18" name="Shape 16"/>
           <p:cNvSpPr/>
           <p:nvPr/>
         </p:nvSpPr>
@@ -4626,7 +4440,7 @@
       </p:sp>
       <p:sp>
         <p:nvSpPr>
-          <p:cNvPr id="19" name="Text 17"/>
+          <p:cNvPr id="17" name="Text 15"/>
           <p:cNvSpPr/>
           <p:nvPr/>
         </p:nvSpPr>
@@ -4665,7 +4479,7 @@
       </p:sp>
       <p:sp>
         <p:nvSpPr>
-          <p:cNvPr id="20" name="Text 18"/>
+          <p:cNvPr id="18" name="Text 16"/>
           <p:cNvSpPr/>
           <p:nvPr/>
         </p:nvSpPr>
@@ -5173,13 +4987,11 @@
             </a:avLst>
           </a:prstGeom>
           <a:solidFill>
-            <a:srgbClr val="FFFFFF">
-              <a:alpha val="88000"/>
-            </a:srgbClr>
+            <a:srgbClr val="FFFFFF"/>
           </a:solidFill>
           <a:ln w="12700">
             <a:solidFill>
-              <a:srgbClr val="D6E8F2"/>
+              <a:srgbClr val="B9D7E6"/>
             </a:solidFill>
             <a:prstDash val="solid"/>
           </a:ln>
@@ -5187,26 +4999,42 @@
       </p:sp>
       <p:sp>
         <p:nvSpPr>
-          <p:cNvPr id="14" name="Shape 12"/>
-          <p:cNvSpPr/>
-          <p:nvPr/>
-        </p:nvSpPr>
-        <p:spPr>
-          <a:xfrm>
-            <a:off x="8046720" y="3108960"/>
-            <a:ext cx="2651760" cy="896112"/>
-          </a:xfrm>
-          <a:prstGeom prst="arc">
-            <a:avLst/>
-          </a:prstGeom>
-          <a:noFill/>
-          <a:ln w="25400">
-            <a:solidFill>
-              <a:srgbClr val="0068B7"/>
-            </a:solidFill>
-            <a:prstDash val="solid"/>
-          </a:ln>
-        </p:spPr>
+          <p:cNvPr id="14" name="Text 12"/>
+          <p:cNvSpPr/>
+          <p:nvPr/>
+        </p:nvSpPr>
+        <p:spPr>
+          <a:xfrm>
+            <a:off x="7799832" y="2935224"/>
+            <a:ext cx="3145536" cy="256032"/>
+          </a:xfrm>
+          <a:prstGeom prst="rect">
+            <a:avLst/>
+          </a:prstGeom>
+          <a:noFill/>
+          <a:ln/>
+        </p:spPr>
+        <p:txBody>
+          <a:bodyPr wrap="square" lIns="0" tIns="0" rIns="0" bIns="0" rtlCol="0" anchor="ctr"/>
+          <a:lstStyle/>
+          <a:p>
+            <a:pPr indent="0" marL="0">
+              <a:buNone/>
+            </a:pPr>
+            <a:r>
+              <a:rPr lang="en-US" sz="1300" b="1" dirty="0">
+                <a:solidFill>
+                  <a:srgbClr val="0068B7"/>
+                </a:solidFill>
+                <a:latin typeface="Aptos" pitchFamily="34" charset="0"/>
+                <a:ea typeface="Aptos" pitchFamily="34" charset="-122"/>
+                <a:cs typeface="Aptos" pitchFamily="34" charset="-120"/>
+              </a:rPr>
+              <a:t>Concept checkpoints</a:t>
+            </a:r>
+            <a:endParaRPr lang="en-US" sz="1300" dirty="0"/>
+          </a:p>
+        </p:txBody>
       </p:sp>
       <p:sp>
         <p:nvSpPr>
@@ -5216,102 +5044,67 @@
         </p:nvSpPr>
         <p:spPr>
           <a:xfrm>
-            <a:off x="7909560" y="3099816"/>
-            <a:ext cx="2926080" cy="256032"/>
-          </a:xfrm>
-          <a:prstGeom prst="rect">
-            <a:avLst/>
-          </a:prstGeom>
-          <a:noFill/>
-          <a:ln/>
-        </p:spPr>
-        <p:txBody>
-          <a:bodyPr wrap="square" lIns="0" tIns="0" rIns="0" bIns="0" rtlCol="0" anchor="ctr"/>
-          <a:lstStyle/>
-          <a:p>
-            <a:pPr algn="ctr" indent="0" marL="0">
-              <a:buNone/>
-            </a:pPr>
-            <a:r>
-              <a:rPr lang="en-US" sz="1500" b="1" dirty="0">
-                <a:solidFill>
-                  <a:srgbClr val="003A63"/>
-                </a:solidFill>
-                <a:latin typeface="Aptos" pitchFamily="34" charset="0"/>
-                <a:ea typeface="Aptos" pitchFamily="34" charset="-122"/>
-                <a:cs typeface="Aptos" pitchFamily="34" charset="-120"/>
-              </a:rPr>
-              <a:t>Risk</a:t>
-            </a:r>
-            <a:endParaRPr lang="en-US" sz="1500" dirty="0"/>
+            <a:off x="7818120" y="3300984"/>
+            <a:ext cx="3090672" cy="877824"/>
+          </a:xfrm>
+          <a:prstGeom prst="rect">
+            <a:avLst/>
+          </a:prstGeom>
+          <a:noFill/>
+          <a:ln/>
+        </p:spPr>
+        <p:txBody>
+          <a:bodyPr wrap="square" lIns="254" tIns="254" rIns="254" bIns="254" rtlCol="0" anchor="t">
+            <a:normAutofit/>
+          </a:bodyPr>
+          <a:lstStyle/>
+          <a:p>
+            <a:r>
+              <a:rPr lang="en-US" sz="1380" dirty="0">
+                <a:solidFill>
+                  <a:srgbClr val="17364A"/>
+                </a:solidFill>
+                <a:latin typeface="Aptos" pitchFamily="34" charset="0"/>
+                <a:ea typeface="Aptos" pitchFamily="34" charset="-122"/>
+                <a:cs typeface="Aptos" pitchFamily="34" charset="-120"/>
+              </a:rPr>
+              <a:t>Unverified translations or readability changes that alter meaning.</a:t>
+            </a:r>
+            <a:endParaRPr lang="en-US" sz="1380" dirty="0"/>
+          </a:p>
+          <a:p>
+            <a:r>
+              <a:rPr lang="en-US" sz="1380" dirty="0">
+                <a:solidFill>
+                  <a:srgbClr val="17364A"/>
+                </a:solidFill>
+                <a:latin typeface="Aptos" pitchFamily="34" charset="0"/>
+                <a:ea typeface="Aptos" pitchFamily="34" charset="-122"/>
+                <a:cs typeface="Aptos" pitchFamily="34" charset="-120"/>
+              </a:rPr>
+              <a:t>Public-facing content being released without required subject matter or leadership review.</a:t>
+            </a:r>
+            <a:endParaRPr lang="en-US" sz="1380" dirty="0"/>
+          </a:p>
+          <a:p>
+            <a:r>
+              <a:rPr lang="en-US" sz="1380" dirty="0">
+                <a:solidFill>
+                  <a:srgbClr val="17364A"/>
+                </a:solidFill>
+                <a:latin typeface="Aptos" pitchFamily="34" charset="0"/>
+                <a:ea typeface="Aptos" pitchFamily="34" charset="-122"/>
+                <a:cs typeface="Aptos" pitchFamily="34" charset="-120"/>
+              </a:rPr>
+              <a:t>Messages that assume access to resources, technology, transportation, or healthcare that.</a:t>
+            </a:r>
+            <a:endParaRPr lang="en-US" sz="1380" dirty="0"/>
           </a:p>
         </p:txBody>
       </p:sp>
       <p:sp>
         <p:nvSpPr>
           <p:cNvPr id="16" name="Shape 14"/>
-          <p:cNvSpPr/>
-          <p:nvPr/>
-        </p:nvSpPr>
-        <p:spPr>
-          <a:xfrm>
-            <a:off x="8366760" y="3639312"/>
-            <a:ext cx="2011680" cy="0"/>
-          </a:xfrm>
-          <a:prstGeom prst="line">
-            <a:avLst/>
-          </a:prstGeom>
-          <a:noFill/>
-          <a:ln w="63500">
-            <a:solidFill>
-              <a:srgbClr val="2F8A28"/>
-            </a:solidFill>
-            <a:prstDash val="solid"/>
-          </a:ln>
-        </p:spPr>
-      </p:sp>
-      <p:sp>
-        <p:nvSpPr>
-          <p:cNvPr id="17" name="Text 15"/>
-          <p:cNvSpPr/>
-          <p:nvPr/>
-        </p:nvSpPr>
-        <p:spPr>
-          <a:xfrm>
-            <a:off x="7909560" y="3849624"/>
-            <a:ext cx="2926080" cy="164592"/>
-          </a:xfrm>
-          <a:prstGeom prst="rect">
-            <a:avLst/>
-          </a:prstGeom>
-          <a:noFill/>
-          <a:ln/>
-        </p:spPr>
-        <p:txBody>
-          <a:bodyPr wrap="square" lIns="0" tIns="0" rIns="0" bIns="0" rtlCol="0" anchor="ctr"/>
-          <a:lstStyle/>
-          <a:p>
-            <a:pPr algn="ctr" indent="0" marL="0">
-              <a:buNone/>
-            </a:pPr>
-            <a:r>
-              <a:rPr lang="en-US" sz="900" dirty="0">
-                <a:solidFill>
-                  <a:srgbClr val="003A63"/>
-                </a:solidFill>
-                <a:latin typeface="Aptos" pitchFamily="34" charset="0"/>
-                <a:ea typeface="Aptos" pitchFamily="34" charset="-122"/>
-                <a:cs typeface="Aptos" pitchFamily="34" charset="-120"/>
-              </a:rPr>
-              <a:t>Human review</a:t>
-            </a:r>
-            <a:endParaRPr lang="en-US" sz="900" dirty="0"/>
-          </a:p>
-        </p:txBody>
-      </p:sp>
-      <p:sp>
-        <p:nvSpPr>
-          <p:cNvPr id="18" name="Shape 16"/>
           <p:cNvSpPr/>
           <p:nvPr/>
         </p:nvSpPr>
@@ -5338,7 +5131,7 @@
       </p:sp>
       <p:sp>
         <p:nvSpPr>
-          <p:cNvPr id="19" name="Text 17"/>
+          <p:cNvPr id="17" name="Text 15"/>
           <p:cNvSpPr/>
           <p:nvPr/>
         </p:nvSpPr>
@@ -5377,7 +5170,7 @@
       </p:sp>
       <p:sp>
         <p:nvSpPr>
-          <p:cNvPr id="20" name="Text 18"/>
+          <p:cNvPr id="18" name="Text 16"/>
           <p:cNvSpPr/>
           <p:nvPr/>
         </p:nvSpPr>
@@ -5885,13 +5678,11 @@
             </a:avLst>
           </a:prstGeom>
           <a:solidFill>
-            <a:srgbClr val="FFFFFF">
-              <a:alpha val="88000"/>
-            </a:srgbClr>
+            <a:srgbClr val="FFFFFF"/>
           </a:solidFill>
           <a:ln w="12700">
             <a:solidFill>
-              <a:srgbClr val="D6E8F2"/>
+              <a:srgbClr val="B9D7E6"/>
             </a:solidFill>
             <a:prstDash val="solid"/>
           </a:ln>
@@ -5899,26 +5690,42 @@
       </p:sp>
       <p:sp>
         <p:nvSpPr>
-          <p:cNvPr id="14" name="Shape 12"/>
-          <p:cNvSpPr/>
-          <p:nvPr/>
-        </p:nvSpPr>
-        <p:spPr>
-          <a:xfrm>
-            <a:off x="8046720" y="3108960"/>
-            <a:ext cx="2651760" cy="896112"/>
-          </a:xfrm>
-          <a:prstGeom prst="arc">
-            <a:avLst/>
-          </a:prstGeom>
-          <a:noFill/>
-          <a:ln w="25400">
-            <a:solidFill>
-              <a:srgbClr val="0068B7"/>
-            </a:solidFill>
-            <a:prstDash val="solid"/>
-          </a:ln>
-        </p:spPr>
+          <p:cNvPr id="14" name="Text 12"/>
+          <p:cNvSpPr/>
+          <p:nvPr/>
+        </p:nvSpPr>
+        <p:spPr>
+          <a:xfrm>
+            <a:off x="7799832" y="2935224"/>
+            <a:ext cx="3145536" cy="256032"/>
+          </a:xfrm>
+          <a:prstGeom prst="rect">
+            <a:avLst/>
+          </a:prstGeom>
+          <a:noFill/>
+          <a:ln/>
+        </p:spPr>
+        <p:txBody>
+          <a:bodyPr wrap="square" lIns="0" tIns="0" rIns="0" bIns="0" rtlCol="0" anchor="ctr"/>
+          <a:lstStyle/>
+          <a:p>
+            <a:pPr indent="0" marL="0">
+              <a:buNone/>
+            </a:pPr>
+            <a:r>
+              <a:rPr lang="en-US" sz="1300" b="1" dirty="0">
+                <a:solidFill>
+                  <a:srgbClr val="0068B7"/>
+                </a:solidFill>
+                <a:latin typeface="Aptos" pitchFamily="34" charset="0"/>
+                <a:ea typeface="Aptos" pitchFamily="34" charset="-122"/>
+                <a:cs typeface="Aptos" pitchFamily="34" charset="-120"/>
+              </a:rPr>
+              <a:t>Concept checkpoints</a:t>
+            </a:r>
+            <a:endParaRPr lang="en-US" sz="1300" dirty="0"/>
+          </a:p>
+        </p:txBody>
       </p:sp>
       <p:sp>
         <p:nvSpPr>
@@ -5928,102 +5735,67 @@
         </p:nvSpPr>
         <p:spPr>
           <a:xfrm>
-            <a:off x="7909560" y="3099816"/>
-            <a:ext cx="2926080" cy="256032"/>
-          </a:xfrm>
-          <a:prstGeom prst="rect">
-            <a:avLst/>
-          </a:prstGeom>
-          <a:noFill/>
-          <a:ln/>
-        </p:spPr>
-        <p:txBody>
-          <a:bodyPr wrap="square" lIns="0" tIns="0" rIns="0" bIns="0" rtlCol="0" anchor="ctr"/>
-          <a:lstStyle/>
-          <a:p>
-            <a:pPr algn="ctr" indent="0" marL="0">
-              <a:buNone/>
-            </a:pPr>
-            <a:r>
-              <a:rPr lang="en-US" sz="1500" b="1" dirty="0">
-                <a:solidFill>
-                  <a:srgbClr val="003A63"/>
-                </a:solidFill>
-                <a:latin typeface="Aptos" pitchFamily="34" charset="0"/>
-                <a:ea typeface="Aptos" pitchFamily="34" charset="-122"/>
-                <a:cs typeface="Aptos" pitchFamily="34" charset="-120"/>
-              </a:rPr>
-              <a:t>Risk</a:t>
-            </a:r>
-            <a:endParaRPr lang="en-US" sz="1500" dirty="0"/>
+            <a:off x="7818120" y="3300984"/>
+            <a:ext cx="3090672" cy="877824"/>
+          </a:xfrm>
+          <a:prstGeom prst="rect">
+            <a:avLst/>
+          </a:prstGeom>
+          <a:noFill/>
+          <a:ln/>
+        </p:spPr>
+        <p:txBody>
+          <a:bodyPr wrap="square" lIns="254" tIns="254" rIns="254" bIns="254" rtlCol="0" anchor="t">
+            <a:normAutofit/>
+          </a:bodyPr>
+          <a:lstStyle/>
+          <a:p>
+            <a:r>
+              <a:rPr lang="en-US" sz="1380" dirty="0">
+                <a:solidFill>
+                  <a:srgbClr val="17364A"/>
+                </a:solidFill>
+                <a:latin typeface="Aptos" pitchFamily="34" charset="0"/>
+                <a:ea typeface="Aptos" pitchFamily="34" charset="-122"/>
+                <a:cs typeface="Aptos" pitchFamily="34" charset="-120"/>
+              </a:rPr>
+              <a:t>Recommended guardrails include the following:</a:t>
+            </a:r>
+            <a:endParaRPr lang="en-US" sz="1380" dirty="0"/>
+          </a:p>
+          <a:p>
+            <a:r>
+              <a:rPr lang="en-US" sz="1380" dirty="0">
+                <a:solidFill>
+                  <a:srgbClr val="17364A"/>
+                </a:solidFill>
+                <a:latin typeface="Aptos" pitchFamily="34" charset="0"/>
+                <a:ea typeface="Aptos" pitchFamily="34" charset="-122"/>
+                <a:cs typeface="Aptos" pitchFamily="34" charset="-120"/>
+              </a:rPr>
+              <a:t>Use only approved tools and approved source material for public health communications.</a:t>
+            </a:r>
+            <a:endParaRPr lang="en-US" sz="1380" dirty="0"/>
+          </a:p>
+          <a:p>
+            <a:r>
+              <a:rPr lang="en-US" sz="1380" dirty="0">
+                <a:solidFill>
+                  <a:srgbClr val="17364A"/>
+                </a:solidFill>
+                <a:latin typeface="Aptos" pitchFamily="34" charset="0"/>
+                <a:ea typeface="Aptos" pitchFamily="34" charset="-122"/>
+                <a:cs typeface="Aptos" pitchFamily="34" charset="-120"/>
+              </a:rPr>
+              <a:t>Require human review for accuracy, plain language, accessibility, equity, and tone.</a:t>
+            </a:r>
+            <a:endParaRPr lang="en-US" sz="1380" dirty="0"/>
           </a:p>
         </p:txBody>
       </p:sp>
       <p:sp>
         <p:nvSpPr>
           <p:cNvPr id="16" name="Shape 14"/>
-          <p:cNvSpPr/>
-          <p:nvPr/>
-        </p:nvSpPr>
-        <p:spPr>
-          <a:xfrm>
-            <a:off x="8366760" y="3639312"/>
-            <a:ext cx="2011680" cy="0"/>
-          </a:xfrm>
-          <a:prstGeom prst="line">
-            <a:avLst/>
-          </a:prstGeom>
-          <a:noFill/>
-          <a:ln w="63500">
-            <a:solidFill>
-              <a:srgbClr val="2F8A28"/>
-            </a:solidFill>
-            <a:prstDash val="solid"/>
-          </a:ln>
-        </p:spPr>
-      </p:sp>
-      <p:sp>
-        <p:nvSpPr>
-          <p:cNvPr id="17" name="Text 15"/>
-          <p:cNvSpPr/>
-          <p:nvPr/>
-        </p:nvSpPr>
-        <p:spPr>
-          <a:xfrm>
-            <a:off x="7909560" y="3849624"/>
-            <a:ext cx="2926080" cy="164592"/>
-          </a:xfrm>
-          <a:prstGeom prst="rect">
-            <a:avLst/>
-          </a:prstGeom>
-          <a:noFill/>
-          <a:ln/>
-        </p:spPr>
-        <p:txBody>
-          <a:bodyPr wrap="square" lIns="0" tIns="0" rIns="0" bIns="0" rtlCol="0" anchor="ctr"/>
-          <a:lstStyle/>
-          <a:p>
-            <a:pPr algn="ctr" indent="0" marL="0">
-              <a:buNone/>
-            </a:pPr>
-            <a:r>
-              <a:rPr lang="en-US" sz="900" dirty="0">
-                <a:solidFill>
-                  <a:srgbClr val="003A63"/>
-                </a:solidFill>
-                <a:latin typeface="Aptos" pitchFamily="34" charset="0"/>
-                <a:ea typeface="Aptos" pitchFamily="34" charset="-122"/>
-                <a:cs typeface="Aptos" pitchFamily="34" charset="-120"/>
-              </a:rPr>
-              <a:t>Human review</a:t>
-            </a:r>
-            <a:endParaRPr lang="en-US" sz="900" dirty="0"/>
-          </a:p>
-        </p:txBody>
-      </p:sp>
-      <p:sp>
-        <p:nvSpPr>
-          <p:cNvPr id="18" name="Shape 16"/>
           <p:cNvSpPr/>
           <p:nvPr/>
         </p:nvSpPr>
@@ -6050,7 +5822,7 @@
       </p:sp>
       <p:sp>
         <p:nvSpPr>
-          <p:cNvPr id="19" name="Text 17"/>
+          <p:cNvPr id="17" name="Text 15"/>
           <p:cNvSpPr/>
           <p:nvPr/>
         </p:nvSpPr>
@@ -6089,7 +5861,7 @@
       </p:sp>
       <p:sp>
         <p:nvSpPr>
-          <p:cNvPr id="20" name="Text 18"/>
+          <p:cNvPr id="18" name="Text 16"/>
           <p:cNvSpPr/>
           <p:nvPr/>
         </p:nvSpPr>
@@ -6597,13 +6369,11 @@
             </a:avLst>
           </a:prstGeom>
           <a:solidFill>
-            <a:srgbClr val="FFFFFF">
-              <a:alpha val="88000"/>
-            </a:srgbClr>
+            <a:srgbClr val="FFFFFF"/>
           </a:solidFill>
           <a:ln w="12700">
             <a:solidFill>
-              <a:srgbClr val="D6E8F2"/>
+              <a:srgbClr val="B9D7E6"/>
             </a:solidFill>
             <a:prstDash val="solid"/>
           </a:ln>
@@ -6611,26 +6381,42 @@
       </p:sp>
       <p:sp>
         <p:nvSpPr>
-          <p:cNvPr id="14" name="Shape 12"/>
-          <p:cNvSpPr/>
-          <p:nvPr/>
-        </p:nvSpPr>
-        <p:spPr>
-          <a:xfrm>
-            <a:off x="8046720" y="3108960"/>
-            <a:ext cx="2651760" cy="896112"/>
-          </a:xfrm>
-          <a:prstGeom prst="arc">
-            <a:avLst/>
-          </a:prstGeom>
-          <a:noFill/>
-          <a:ln w="25400">
-            <a:solidFill>
-              <a:srgbClr val="0068B7"/>
-            </a:solidFill>
-            <a:prstDash val="solid"/>
-          </a:ln>
-        </p:spPr>
+          <p:cNvPr id="14" name="Text 12"/>
+          <p:cNvSpPr/>
+          <p:nvPr/>
+        </p:nvSpPr>
+        <p:spPr>
+          <a:xfrm>
+            <a:off x="7799832" y="2935224"/>
+            <a:ext cx="3145536" cy="256032"/>
+          </a:xfrm>
+          <a:prstGeom prst="rect">
+            <a:avLst/>
+          </a:prstGeom>
+          <a:noFill/>
+          <a:ln/>
+        </p:spPr>
+        <p:txBody>
+          <a:bodyPr wrap="square" lIns="0" tIns="0" rIns="0" bIns="0" rtlCol="0" anchor="ctr"/>
+          <a:lstStyle/>
+          <a:p>
+            <a:pPr indent="0" marL="0">
+              <a:buNone/>
+            </a:pPr>
+            <a:r>
+              <a:rPr lang="en-US" sz="1300" b="1" dirty="0">
+                <a:solidFill>
+                  <a:srgbClr val="0068B7"/>
+                </a:solidFill>
+                <a:latin typeface="Aptos" pitchFamily="34" charset="0"/>
+                <a:ea typeface="Aptos" pitchFamily="34" charset="-122"/>
+                <a:cs typeface="Aptos" pitchFamily="34" charset="-120"/>
+              </a:rPr>
+              <a:t>Concept checkpoints</a:t>
+            </a:r>
+            <a:endParaRPr lang="en-US" sz="1300" dirty="0"/>
+          </a:p>
+        </p:txBody>
       </p:sp>
       <p:sp>
         <p:nvSpPr>
@@ -6640,102 +6426,67 @@
         </p:nvSpPr>
         <p:spPr>
           <a:xfrm>
-            <a:off x="7909560" y="3099816"/>
-            <a:ext cx="2926080" cy="256032"/>
-          </a:xfrm>
-          <a:prstGeom prst="rect">
-            <a:avLst/>
-          </a:prstGeom>
-          <a:noFill/>
-          <a:ln/>
-        </p:spPr>
-        <p:txBody>
-          <a:bodyPr wrap="square" lIns="0" tIns="0" rIns="0" bIns="0" rtlCol="0" anchor="ctr"/>
-          <a:lstStyle/>
-          <a:p>
-            <a:pPr algn="ctr" indent="0" marL="0">
-              <a:buNone/>
-            </a:pPr>
-            <a:r>
-              <a:rPr lang="en-US" sz="1500" b="1" dirty="0">
-                <a:solidFill>
-                  <a:srgbClr val="003A63"/>
-                </a:solidFill>
-                <a:latin typeface="Aptos" pitchFamily="34" charset="0"/>
-                <a:ea typeface="Aptos" pitchFamily="34" charset="-122"/>
-                <a:cs typeface="Aptos" pitchFamily="34" charset="-120"/>
-              </a:rPr>
-              <a:t>Risk</a:t>
-            </a:r>
-            <a:endParaRPr lang="en-US" sz="1500" dirty="0"/>
+            <a:off x="7818120" y="3300984"/>
+            <a:ext cx="3090672" cy="877824"/>
+          </a:xfrm>
+          <a:prstGeom prst="rect">
+            <a:avLst/>
+          </a:prstGeom>
+          <a:noFill/>
+          <a:ln/>
+        </p:spPr>
+        <p:txBody>
+          <a:bodyPr wrap="square" lIns="254" tIns="254" rIns="254" bIns="254" rtlCol="0" anchor="t">
+            <a:normAutofit/>
+          </a:bodyPr>
+          <a:lstStyle/>
+          <a:p>
+            <a:r>
+              <a:rPr lang="en-US" sz="1380" dirty="0">
+                <a:solidFill>
+                  <a:srgbClr val="17364A"/>
+                </a:solidFill>
+                <a:latin typeface="Aptos" pitchFamily="34" charset="0"/>
+                <a:ea typeface="Aptos" pitchFamily="34" charset="-122"/>
+                <a:cs typeface="Aptos" pitchFamily="34" charset="-120"/>
+              </a:rPr>
+              <a:t>Document source material used for public-facing claims.</a:t>
+            </a:r>
+            <a:endParaRPr lang="en-US" sz="1380" dirty="0"/>
+          </a:p>
+          <a:p>
+            <a:r>
+              <a:rPr lang="en-US" sz="1380" dirty="0">
+                <a:solidFill>
+                  <a:srgbClr val="17364A"/>
+                </a:solidFill>
+                <a:latin typeface="Aptos" pitchFamily="34" charset="0"/>
+                <a:ea typeface="Aptos" pitchFamily="34" charset="-122"/>
+                <a:cs typeface="Aptos" pitchFamily="34" charset="-120"/>
+              </a:rPr>
+              <a:t>Use qualified review for translation and language access needs.</a:t>
+            </a:r>
+            <a:endParaRPr lang="en-US" sz="1380" dirty="0"/>
+          </a:p>
+          <a:p>
+            <a:r>
+              <a:rPr lang="en-US" sz="1380" dirty="0">
+                <a:solidFill>
+                  <a:srgbClr val="17364A"/>
+                </a:solidFill>
+                <a:latin typeface="Aptos" pitchFamily="34" charset="0"/>
+                <a:ea typeface="Aptos" pitchFamily="34" charset="-122"/>
+                <a:cs typeface="Aptos" pitchFamily="34" charset="-120"/>
+              </a:rPr>
+              <a:t>Route public-facing materials through the agency approval process before release.</a:t>
+            </a:r>
+            <a:endParaRPr lang="en-US" sz="1380" dirty="0"/>
           </a:p>
         </p:txBody>
       </p:sp>
       <p:sp>
         <p:nvSpPr>
           <p:cNvPr id="16" name="Shape 14"/>
-          <p:cNvSpPr/>
-          <p:nvPr/>
-        </p:nvSpPr>
-        <p:spPr>
-          <a:xfrm>
-            <a:off x="8366760" y="3639312"/>
-            <a:ext cx="2011680" cy="0"/>
-          </a:xfrm>
-          <a:prstGeom prst="line">
-            <a:avLst/>
-          </a:prstGeom>
-          <a:noFill/>
-          <a:ln w="63500">
-            <a:solidFill>
-              <a:srgbClr val="2F8A28"/>
-            </a:solidFill>
-            <a:prstDash val="solid"/>
-          </a:ln>
-        </p:spPr>
-      </p:sp>
-      <p:sp>
-        <p:nvSpPr>
-          <p:cNvPr id="17" name="Text 15"/>
-          <p:cNvSpPr/>
-          <p:nvPr/>
-        </p:nvSpPr>
-        <p:spPr>
-          <a:xfrm>
-            <a:off x="7909560" y="3849624"/>
-            <a:ext cx="2926080" cy="164592"/>
-          </a:xfrm>
-          <a:prstGeom prst="rect">
-            <a:avLst/>
-          </a:prstGeom>
-          <a:noFill/>
-          <a:ln/>
-        </p:spPr>
-        <p:txBody>
-          <a:bodyPr wrap="square" lIns="0" tIns="0" rIns="0" bIns="0" rtlCol="0" anchor="ctr"/>
-          <a:lstStyle/>
-          <a:p>
-            <a:pPr algn="ctr" indent="0" marL="0">
-              <a:buNone/>
-            </a:pPr>
-            <a:r>
-              <a:rPr lang="en-US" sz="900" dirty="0">
-                <a:solidFill>
-                  <a:srgbClr val="003A63"/>
-                </a:solidFill>
-                <a:latin typeface="Aptos" pitchFamily="34" charset="0"/>
-                <a:ea typeface="Aptos" pitchFamily="34" charset="-122"/>
-                <a:cs typeface="Aptos" pitchFamily="34" charset="-120"/>
-              </a:rPr>
-              <a:t>Human review</a:t>
-            </a:r>
-            <a:endParaRPr lang="en-US" sz="900" dirty="0"/>
-          </a:p>
-        </p:txBody>
-      </p:sp>
-      <p:sp>
-        <p:nvSpPr>
-          <p:cNvPr id="18" name="Shape 16"/>
           <p:cNvSpPr/>
           <p:nvPr/>
         </p:nvSpPr>
@@ -6762,7 +6513,7 @@
       </p:sp>
       <p:sp>
         <p:nvSpPr>
-          <p:cNvPr id="19" name="Text 17"/>
+          <p:cNvPr id="17" name="Text 15"/>
           <p:cNvSpPr/>
           <p:nvPr/>
         </p:nvSpPr>
@@ -6801,7 +6552,7 @@
       </p:sp>
       <p:sp>
         <p:nvSpPr>
-          <p:cNvPr id="20" name="Text 18"/>
+          <p:cNvPr id="18" name="Text 16"/>
           <p:cNvSpPr/>
           <p:nvPr/>
         </p:nvSpPr>
@@ -7309,13 +7060,11 @@
             </a:avLst>
           </a:prstGeom>
           <a:solidFill>
-            <a:srgbClr val="FFFFFF">
-              <a:alpha val="88000"/>
-            </a:srgbClr>
+            <a:srgbClr val="FFFFFF"/>
           </a:solidFill>
           <a:ln w="12700">
             <a:solidFill>
-              <a:srgbClr val="D6E8F2"/>
+              <a:srgbClr val="B9D7E6"/>
             </a:solidFill>
             <a:prstDash val="solid"/>
           </a:ln>
@@ -7323,261 +7072,112 @@
       </p:sp>
       <p:sp>
         <p:nvSpPr>
-          <p:cNvPr id="14" name="Shape 12"/>
-          <p:cNvSpPr/>
-          <p:nvPr/>
-        </p:nvSpPr>
-        <p:spPr>
-          <a:xfrm>
-            <a:off x="8138160" y="3291840"/>
-            <a:ext cx="329184" cy="329184"/>
-          </a:xfrm>
-          <a:prstGeom prst="ellipse">
-            <a:avLst/>
-          </a:prstGeom>
-          <a:solidFill>
-            <a:srgbClr val="0068B7"/>
-          </a:solidFill>
-          <a:ln w="12700">
-            <a:solidFill>
-              <a:srgbClr val="0068B7"/>
-            </a:solidFill>
-            <a:prstDash val="solid"/>
-          </a:ln>
-        </p:spPr>
-      </p:sp>
-      <p:sp>
-        <p:nvSpPr>
-          <p:cNvPr id="15" name="Shape 13"/>
-          <p:cNvSpPr/>
-          <p:nvPr/>
-        </p:nvSpPr>
-        <p:spPr>
-          <a:xfrm>
-            <a:off x="10332720" y="3383280"/>
-            <a:ext cx="329184" cy="329184"/>
-          </a:xfrm>
-          <a:prstGeom prst="ellipse">
-            <a:avLst/>
-          </a:prstGeom>
-          <a:solidFill>
-            <a:srgbClr val="2F8A28"/>
-          </a:solidFill>
-          <a:ln w="12700">
-            <a:solidFill>
-              <a:srgbClr val="2F8A28"/>
-            </a:solidFill>
-            <a:prstDash val="solid"/>
-          </a:ln>
-        </p:spPr>
+          <p:cNvPr id="14" name="Text 12"/>
+          <p:cNvSpPr/>
+          <p:nvPr/>
+        </p:nvSpPr>
+        <p:spPr>
+          <a:xfrm>
+            <a:off x="7799832" y="2935224"/>
+            <a:ext cx="3145536" cy="256032"/>
+          </a:xfrm>
+          <a:prstGeom prst="rect">
+            <a:avLst/>
+          </a:prstGeom>
+          <a:noFill/>
+          <a:ln/>
+        </p:spPr>
+        <p:txBody>
+          <a:bodyPr wrap="square" lIns="0" tIns="0" rIns="0" bIns="0" rtlCol="0" anchor="ctr"/>
+          <a:lstStyle/>
+          <a:p>
+            <a:pPr indent="0" marL="0">
+              <a:buNone/>
+            </a:pPr>
+            <a:r>
+              <a:rPr lang="en-US" sz="1300" b="1" dirty="0">
+                <a:solidFill>
+                  <a:srgbClr val="0068B7"/>
+                </a:solidFill>
+                <a:latin typeface="Aptos" pitchFamily="34" charset="0"/>
+                <a:ea typeface="Aptos" pitchFamily="34" charset="-122"/>
+                <a:cs typeface="Aptos" pitchFamily="34" charset="-120"/>
+              </a:rPr>
+              <a:t>Concept checkpoints</a:t>
+            </a:r>
+            <a:endParaRPr lang="en-US" sz="1300" dirty="0"/>
+          </a:p>
+        </p:txBody>
+      </p:sp>
+      <p:sp>
+        <p:nvSpPr>
+          <p:cNvPr id="15" name="Text 13"/>
+          <p:cNvSpPr/>
+          <p:nvPr/>
+        </p:nvSpPr>
+        <p:spPr>
+          <a:xfrm>
+            <a:off x="7818120" y="3300984"/>
+            <a:ext cx="3090672" cy="877824"/>
+          </a:xfrm>
+          <a:prstGeom prst="rect">
+            <a:avLst/>
+          </a:prstGeom>
+          <a:noFill/>
+          <a:ln/>
+        </p:spPr>
+        <p:txBody>
+          <a:bodyPr wrap="square" lIns="254" tIns="254" rIns="254" bIns="254" rtlCol="0" anchor="t">
+            <a:normAutofit/>
+          </a:bodyPr>
+          <a:lstStyle/>
+          <a:p>
+            <a:r>
+              <a:rPr lang="en-US" sz="1380" dirty="0">
+                <a:solidFill>
+                  <a:srgbClr val="17364A"/>
+                </a:solidFill>
+                <a:latin typeface="Aptos" pitchFamily="34" charset="0"/>
+                <a:ea typeface="Aptos" pitchFamily="34" charset="-122"/>
+                <a:cs typeface="Aptos" pitchFamily="34" charset="-120"/>
+              </a:rPr>
+              <a:t>Where does this topic appear in your agency, program, or workflow?</a:t>
+            </a:r>
+            <a:endParaRPr lang="en-US" sz="1380" dirty="0"/>
+          </a:p>
+          <a:p>
+            <a:r>
+              <a:rPr lang="en-US" sz="1380" dirty="0">
+                <a:solidFill>
+                  <a:srgbClr val="17364A"/>
+                </a:solidFill>
+                <a:latin typeface="Aptos" pitchFamily="34" charset="0"/>
+                <a:ea typeface="Aptos" pitchFamily="34" charset="-122"/>
+                <a:cs typeface="Aptos" pitchFamily="34" charset="-120"/>
+              </a:rPr>
+              <a:t>Which staff roles would need to understand or apply this concept before AI use is approved?</a:t>
+            </a:r>
+            <a:endParaRPr lang="en-US" sz="1380" dirty="0"/>
+          </a:p>
+          <a:p>
+            <a:r>
+              <a:rPr lang="en-US" sz="1380" dirty="0">
+                <a:solidFill>
+                  <a:srgbClr val="17364A"/>
+                </a:solidFill>
+                <a:latin typeface="Aptos" pitchFamily="34" charset="0"/>
+                <a:ea typeface="Aptos" pitchFamily="34" charset="-122"/>
+                <a:cs typeface="Aptos" pitchFamily="34" charset="-120"/>
+              </a:rPr>
+              <a:t>What could go wrong if this topic is not addressed before implementation?</a:t>
+            </a:r>
+            <a:endParaRPr lang="en-US" sz="1380" dirty="0"/>
+          </a:p>
+        </p:txBody>
       </p:sp>
       <p:sp>
         <p:nvSpPr>
           <p:cNvPr id="16" name="Shape 14"/>
-          <p:cNvSpPr/>
-          <p:nvPr/>
-        </p:nvSpPr>
-        <p:spPr>
-          <a:xfrm>
-            <a:off x="9235440" y="3502152"/>
-            <a:ext cx="329184" cy="329184"/>
-          </a:xfrm>
-          <a:prstGeom prst="ellipse">
-            <a:avLst/>
-          </a:prstGeom>
-          <a:solidFill>
-            <a:srgbClr val="D69A2D"/>
-          </a:solidFill>
-          <a:ln w="12700">
-            <a:solidFill>
-              <a:srgbClr val="D69A2D"/>
-            </a:solidFill>
-            <a:prstDash val="solid"/>
-          </a:ln>
-        </p:spPr>
-      </p:sp>
-      <p:sp>
-        <p:nvSpPr>
-          <p:cNvPr id="17" name="Shape 15"/>
-          <p:cNvSpPr/>
-          <p:nvPr/>
-        </p:nvSpPr>
-        <p:spPr>
-          <a:xfrm>
-            <a:off x="9235440" y="3657600"/>
-            <a:ext cx="329184" cy="329184"/>
-          </a:xfrm>
-          <a:prstGeom prst="ellipse">
-            <a:avLst/>
-          </a:prstGeom>
-          <a:solidFill>
-            <a:srgbClr val="6A4CA3"/>
-          </a:solidFill>
-          <a:ln w="12700">
-            <a:solidFill>
-              <a:srgbClr val="6A4CA3"/>
-            </a:solidFill>
-            <a:prstDash val="solid"/>
-          </a:ln>
-        </p:spPr>
-      </p:sp>
-      <p:sp>
-        <p:nvSpPr>
-          <p:cNvPr id="18" name="Shape 16"/>
-          <p:cNvSpPr/>
-          <p:nvPr/>
-        </p:nvSpPr>
-        <p:spPr>
-          <a:xfrm>
-            <a:off x="8302752" y="3456432"/>
-            <a:ext cx="1097280" cy="365760"/>
-          </a:xfrm>
-          <a:prstGeom prst="line">
-            <a:avLst/>
-          </a:prstGeom>
-          <a:noFill/>
-          <a:ln w="19050">
-            <a:solidFill>
-              <a:srgbClr val="8ABBD8"/>
-            </a:solidFill>
-            <a:prstDash val="solid"/>
-          </a:ln>
-        </p:spPr>
-      </p:sp>
-      <p:sp>
-        <p:nvSpPr>
-          <p:cNvPr id="19" name="Shape 17"/>
-          <p:cNvSpPr/>
-          <p:nvPr/>
-        </p:nvSpPr>
-        <p:spPr>
-          <a:xfrm>
-            <a:off x="10497312" y="3547872"/>
-            <a:ext cx="-1097280" cy="274320"/>
-          </a:xfrm>
-          <a:prstGeom prst="line">
-            <a:avLst/>
-          </a:prstGeom>
-          <a:noFill/>
-          <a:ln w="19050">
-            <a:solidFill>
-              <a:srgbClr val="8ABBD8"/>
-            </a:solidFill>
-            <a:prstDash val="solid"/>
-          </a:ln>
-        </p:spPr>
-      </p:sp>
-      <p:sp>
-        <p:nvSpPr>
-          <p:cNvPr id="20" name="Shape 18"/>
-          <p:cNvSpPr/>
-          <p:nvPr/>
-        </p:nvSpPr>
-        <p:spPr>
-          <a:xfrm>
-            <a:off x="9400032" y="3666744"/>
-            <a:ext cx="0" cy="155448"/>
-          </a:xfrm>
-          <a:prstGeom prst="line">
-            <a:avLst/>
-          </a:prstGeom>
-          <a:noFill/>
-          <a:ln w="19050">
-            <a:solidFill>
-              <a:srgbClr val="8ABBD8"/>
-            </a:solidFill>
-            <a:prstDash val="solid"/>
-          </a:ln>
-        </p:spPr>
-      </p:sp>
-      <p:sp>
-        <p:nvSpPr>
-          <p:cNvPr id="21" name="Shape 19"/>
-          <p:cNvSpPr/>
-          <p:nvPr/>
-        </p:nvSpPr>
-        <p:spPr>
-          <a:xfrm>
-            <a:off x="8302752" y="3456432"/>
-            <a:ext cx="1097280" cy="210312"/>
-          </a:xfrm>
-          <a:prstGeom prst="line">
-            <a:avLst/>
-          </a:prstGeom>
-          <a:noFill/>
-          <a:ln w="19050">
-            <a:solidFill>
-              <a:srgbClr val="8ABBD8"/>
-            </a:solidFill>
-            <a:prstDash val="solid"/>
-          </a:ln>
-        </p:spPr>
-      </p:sp>
-      <p:sp>
-        <p:nvSpPr>
-          <p:cNvPr id="22" name="Shape 20"/>
-          <p:cNvSpPr/>
-          <p:nvPr/>
-        </p:nvSpPr>
-        <p:spPr>
-          <a:xfrm>
-            <a:off x="10497312" y="3547872"/>
-            <a:ext cx="-1097280" cy="118872"/>
-          </a:xfrm>
-          <a:prstGeom prst="line">
-            <a:avLst/>
-          </a:prstGeom>
-          <a:noFill/>
-          <a:ln w="19050">
-            <a:solidFill>
-              <a:srgbClr val="8ABBD8"/>
-            </a:solidFill>
-            <a:prstDash val="solid"/>
-          </a:ln>
-        </p:spPr>
-      </p:sp>
-      <p:sp>
-        <p:nvSpPr>
-          <p:cNvPr id="23" name="Text 21"/>
-          <p:cNvSpPr/>
-          <p:nvPr/>
-        </p:nvSpPr>
-        <p:spPr>
-          <a:xfrm>
-            <a:off x="7909560" y="3977640"/>
-            <a:ext cx="2926080" cy="182880"/>
-          </a:xfrm>
-          <a:prstGeom prst="rect">
-            <a:avLst/>
-          </a:prstGeom>
-          <a:noFill/>
-          <a:ln/>
-        </p:spPr>
-        <p:txBody>
-          <a:bodyPr wrap="square" lIns="0" tIns="0" rIns="0" bIns="0" rtlCol="0" anchor="ctr"/>
-          <a:lstStyle/>
-          <a:p>
-            <a:pPr algn="ctr" indent="0" marL="0">
-              <a:buNone/>
-            </a:pPr>
-            <a:r>
-              <a:rPr lang="en-US" sz="1000" dirty="0">
-                <a:solidFill>
-                  <a:srgbClr val="003A63"/>
-                </a:solidFill>
-                <a:latin typeface="Aptos" pitchFamily="34" charset="0"/>
-                <a:ea typeface="Aptos" pitchFamily="34" charset="-122"/>
-                <a:cs typeface="Aptos" pitchFamily="34" charset="-120"/>
-              </a:rPr>
-              <a:t>People and trust</a:t>
-            </a:r>
-            <a:endParaRPr lang="en-US" sz="1000" dirty="0"/>
-          </a:p>
-        </p:txBody>
-      </p:sp>
-      <p:sp>
-        <p:nvSpPr>
-          <p:cNvPr id="24" name="Shape 22"/>
           <p:cNvSpPr/>
           <p:nvPr/>
         </p:nvSpPr>
@@ -7604,7 +7204,7 @@
       </p:sp>
       <p:sp>
         <p:nvSpPr>
-          <p:cNvPr id="25" name="Text 23"/>
+          <p:cNvPr id="17" name="Text 15"/>
           <p:cNvSpPr/>
           <p:nvPr/>
         </p:nvSpPr>
@@ -7643,7 +7243,7 @@
       </p:sp>
       <p:sp>
         <p:nvSpPr>
-          <p:cNvPr id="26" name="Text 24"/>
+          <p:cNvPr id="18" name="Text 16"/>
           <p:cNvSpPr/>
           <p:nvPr/>
         </p:nvSpPr>
@@ -8137,13 +7737,11 @@
             </a:avLst>
           </a:prstGeom>
           <a:solidFill>
-            <a:srgbClr val="FFFFFF">
-              <a:alpha val="88000"/>
-            </a:srgbClr>
+            <a:srgbClr val="FFFFFF"/>
           </a:solidFill>
           <a:ln w="12700">
             <a:solidFill>
-              <a:srgbClr val="D6E8F2"/>
+              <a:srgbClr val="B9D7E6"/>
             </a:solidFill>
             <a:prstDash val="solid"/>
           </a:ln>
@@ -8151,261 +7749,98 @@
       </p:sp>
       <p:sp>
         <p:nvSpPr>
-          <p:cNvPr id="14" name="Shape 12"/>
-          <p:cNvSpPr/>
-          <p:nvPr/>
-        </p:nvSpPr>
-        <p:spPr>
-          <a:xfrm>
-            <a:off x="8138160" y="3291840"/>
-            <a:ext cx="329184" cy="329184"/>
-          </a:xfrm>
-          <a:prstGeom prst="ellipse">
-            <a:avLst/>
-          </a:prstGeom>
-          <a:solidFill>
-            <a:srgbClr val="0068B7"/>
-          </a:solidFill>
-          <a:ln w="12700">
-            <a:solidFill>
-              <a:srgbClr val="0068B7"/>
-            </a:solidFill>
-            <a:prstDash val="solid"/>
-          </a:ln>
-        </p:spPr>
-      </p:sp>
-      <p:sp>
-        <p:nvSpPr>
-          <p:cNvPr id="15" name="Shape 13"/>
-          <p:cNvSpPr/>
-          <p:nvPr/>
-        </p:nvSpPr>
-        <p:spPr>
-          <a:xfrm>
-            <a:off x="10332720" y="3383280"/>
-            <a:ext cx="329184" cy="329184"/>
-          </a:xfrm>
-          <a:prstGeom prst="ellipse">
-            <a:avLst/>
-          </a:prstGeom>
-          <a:solidFill>
-            <a:srgbClr val="2F8A28"/>
-          </a:solidFill>
-          <a:ln w="12700">
-            <a:solidFill>
-              <a:srgbClr val="2F8A28"/>
-            </a:solidFill>
-            <a:prstDash val="solid"/>
-          </a:ln>
-        </p:spPr>
+          <p:cNvPr id="14" name="Text 12"/>
+          <p:cNvSpPr/>
+          <p:nvPr/>
+        </p:nvSpPr>
+        <p:spPr>
+          <a:xfrm>
+            <a:off x="7799832" y="2935224"/>
+            <a:ext cx="3145536" cy="256032"/>
+          </a:xfrm>
+          <a:prstGeom prst="rect">
+            <a:avLst/>
+          </a:prstGeom>
+          <a:noFill/>
+          <a:ln/>
+        </p:spPr>
+        <p:txBody>
+          <a:bodyPr wrap="square" lIns="0" tIns="0" rIns="0" bIns="0" rtlCol="0" anchor="ctr"/>
+          <a:lstStyle/>
+          <a:p>
+            <a:pPr indent="0" marL="0">
+              <a:buNone/>
+            </a:pPr>
+            <a:r>
+              <a:rPr lang="en-US" sz="1300" b="1" dirty="0">
+                <a:solidFill>
+                  <a:srgbClr val="0068B7"/>
+                </a:solidFill>
+                <a:latin typeface="Aptos" pitchFamily="34" charset="0"/>
+                <a:ea typeface="Aptos" pitchFamily="34" charset="-122"/>
+                <a:cs typeface="Aptos" pitchFamily="34" charset="-120"/>
+              </a:rPr>
+              <a:t>Concept checkpoints</a:t>
+            </a:r>
+            <a:endParaRPr lang="en-US" sz="1300" dirty="0"/>
+          </a:p>
+        </p:txBody>
+      </p:sp>
+      <p:sp>
+        <p:nvSpPr>
+          <p:cNvPr id="15" name="Text 13"/>
+          <p:cNvSpPr/>
+          <p:nvPr/>
+        </p:nvSpPr>
+        <p:spPr>
+          <a:xfrm>
+            <a:off x="7818120" y="3300984"/>
+            <a:ext cx="3090672" cy="877824"/>
+          </a:xfrm>
+          <a:prstGeom prst="rect">
+            <a:avLst/>
+          </a:prstGeom>
+          <a:noFill/>
+          <a:ln/>
+        </p:spPr>
+        <p:txBody>
+          <a:bodyPr wrap="square" lIns="254" tIns="254" rIns="254" bIns="254" rtlCol="0" anchor="t">
+            <a:normAutofit/>
+          </a:bodyPr>
+          <a:lstStyle/>
+          <a:p>
+            <a:r>
+              <a:rPr lang="en-US" sz="1380" dirty="0">
+                <a:solidFill>
+                  <a:srgbClr val="17364A"/>
+                </a:solidFill>
+                <a:latin typeface="Aptos" pitchFamily="34" charset="0"/>
+                <a:ea typeface="Aptos" pitchFamily="34" charset="-122"/>
+                <a:cs typeface="Aptos" pitchFamily="34" charset="-120"/>
+              </a:rPr>
+              <a:t>What evidence would governance, leadership, or operations staff need before moving forward?</a:t>
+            </a:r>
+            <a:endParaRPr lang="en-US" sz="1380" dirty="0"/>
+          </a:p>
+          <a:p>
+            <a:r>
+              <a:rPr lang="en-US" sz="1380" dirty="0">
+                <a:solidFill>
+                  <a:srgbClr val="17364A"/>
+                </a:solidFill>
+                <a:latin typeface="Aptos" pitchFamily="34" charset="0"/>
+                <a:ea typeface="Aptos" pitchFamily="34" charset="-122"/>
+                <a:cs typeface="Aptos" pitchFamily="34" charset="-120"/>
+              </a:rPr>
+              <a:t>Which policy, data, equity, privacy, security, or workflow questions remain unresolved?</a:t>
+            </a:r>
+            <a:endParaRPr lang="en-US" sz="1380" dirty="0"/>
+          </a:p>
+        </p:txBody>
       </p:sp>
       <p:sp>
         <p:nvSpPr>
           <p:cNvPr id="16" name="Shape 14"/>
-          <p:cNvSpPr/>
-          <p:nvPr/>
-        </p:nvSpPr>
-        <p:spPr>
-          <a:xfrm>
-            <a:off x="9235440" y="3502152"/>
-            <a:ext cx="329184" cy="329184"/>
-          </a:xfrm>
-          <a:prstGeom prst="ellipse">
-            <a:avLst/>
-          </a:prstGeom>
-          <a:solidFill>
-            <a:srgbClr val="D69A2D"/>
-          </a:solidFill>
-          <a:ln w="12700">
-            <a:solidFill>
-              <a:srgbClr val="D69A2D"/>
-            </a:solidFill>
-            <a:prstDash val="solid"/>
-          </a:ln>
-        </p:spPr>
-      </p:sp>
-      <p:sp>
-        <p:nvSpPr>
-          <p:cNvPr id="17" name="Shape 15"/>
-          <p:cNvSpPr/>
-          <p:nvPr/>
-        </p:nvSpPr>
-        <p:spPr>
-          <a:xfrm>
-            <a:off x="9235440" y="3657600"/>
-            <a:ext cx="329184" cy="329184"/>
-          </a:xfrm>
-          <a:prstGeom prst="ellipse">
-            <a:avLst/>
-          </a:prstGeom>
-          <a:solidFill>
-            <a:srgbClr val="6A4CA3"/>
-          </a:solidFill>
-          <a:ln w="12700">
-            <a:solidFill>
-              <a:srgbClr val="6A4CA3"/>
-            </a:solidFill>
-            <a:prstDash val="solid"/>
-          </a:ln>
-        </p:spPr>
-      </p:sp>
-      <p:sp>
-        <p:nvSpPr>
-          <p:cNvPr id="18" name="Shape 16"/>
-          <p:cNvSpPr/>
-          <p:nvPr/>
-        </p:nvSpPr>
-        <p:spPr>
-          <a:xfrm>
-            <a:off x="8302752" y="3456432"/>
-            <a:ext cx="1097280" cy="365760"/>
-          </a:xfrm>
-          <a:prstGeom prst="line">
-            <a:avLst/>
-          </a:prstGeom>
-          <a:noFill/>
-          <a:ln w="19050">
-            <a:solidFill>
-              <a:srgbClr val="8ABBD8"/>
-            </a:solidFill>
-            <a:prstDash val="solid"/>
-          </a:ln>
-        </p:spPr>
-      </p:sp>
-      <p:sp>
-        <p:nvSpPr>
-          <p:cNvPr id="19" name="Shape 17"/>
-          <p:cNvSpPr/>
-          <p:nvPr/>
-        </p:nvSpPr>
-        <p:spPr>
-          <a:xfrm>
-            <a:off x="10497312" y="3547872"/>
-            <a:ext cx="-1097280" cy="274320"/>
-          </a:xfrm>
-          <a:prstGeom prst="line">
-            <a:avLst/>
-          </a:prstGeom>
-          <a:noFill/>
-          <a:ln w="19050">
-            <a:solidFill>
-              <a:srgbClr val="8ABBD8"/>
-            </a:solidFill>
-            <a:prstDash val="solid"/>
-          </a:ln>
-        </p:spPr>
-      </p:sp>
-      <p:sp>
-        <p:nvSpPr>
-          <p:cNvPr id="20" name="Shape 18"/>
-          <p:cNvSpPr/>
-          <p:nvPr/>
-        </p:nvSpPr>
-        <p:spPr>
-          <a:xfrm>
-            <a:off x="9400032" y="3666744"/>
-            <a:ext cx="0" cy="155448"/>
-          </a:xfrm>
-          <a:prstGeom prst="line">
-            <a:avLst/>
-          </a:prstGeom>
-          <a:noFill/>
-          <a:ln w="19050">
-            <a:solidFill>
-              <a:srgbClr val="8ABBD8"/>
-            </a:solidFill>
-            <a:prstDash val="solid"/>
-          </a:ln>
-        </p:spPr>
-      </p:sp>
-      <p:sp>
-        <p:nvSpPr>
-          <p:cNvPr id="21" name="Shape 19"/>
-          <p:cNvSpPr/>
-          <p:nvPr/>
-        </p:nvSpPr>
-        <p:spPr>
-          <a:xfrm>
-            <a:off x="8302752" y="3456432"/>
-            <a:ext cx="1097280" cy="210312"/>
-          </a:xfrm>
-          <a:prstGeom prst="line">
-            <a:avLst/>
-          </a:prstGeom>
-          <a:noFill/>
-          <a:ln w="19050">
-            <a:solidFill>
-              <a:srgbClr val="8ABBD8"/>
-            </a:solidFill>
-            <a:prstDash val="solid"/>
-          </a:ln>
-        </p:spPr>
-      </p:sp>
-      <p:sp>
-        <p:nvSpPr>
-          <p:cNvPr id="22" name="Shape 20"/>
-          <p:cNvSpPr/>
-          <p:nvPr/>
-        </p:nvSpPr>
-        <p:spPr>
-          <a:xfrm>
-            <a:off x="10497312" y="3547872"/>
-            <a:ext cx="-1097280" cy="118872"/>
-          </a:xfrm>
-          <a:prstGeom prst="line">
-            <a:avLst/>
-          </a:prstGeom>
-          <a:noFill/>
-          <a:ln w="19050">
-            <a:solidFill>
-              <a:srgbClr val="8ABBD8"/>
-            </a:solidFill>
-            <a:prstDash val="solid"/>
-          </a:ln>
-        </p:spPr>
-      </p:sp>
-      <p:sp>
-        <p:nvSpPr>
-          <p:cNvPr id="23" name="Text 21"/>
-          <p:cNvSpPr/>
-          <p:nvPr/>
-        </p:nvSpPr>
-        <p:spPr>
-          <a:xfrm>
-            <a:off x="7909560" y="3977640"/>
-            <a:ext cx="2926080" cy="182880"/>
-          </a:xfrm>
-          <a:prstGeom prst="rect">
-            <a:avLst/>
-          </a:prstGeom>
-          <a:noFill/>
-          <a:ln/>
-        </p:spPr>
-        <p:txBody>
-          <a:bodyPr wrap="square" lIns="0" tIns="0" rIns="0" bIns="0" rtlCol="0" anchor="ctr"/>
-          <a:lstStyle/>
-          <a:p>
-            <a:pPr algn="ctr" indent="0" marL="0">
-              <a:buNone/>
-            </a:pPr>
-            <a:r>
-              <a:rPr lang="en-US" sz="1000" dirty="0">
-                <a:solidFill>
-                  <a:srgbClr val="003A63"/>
-                </a:solidFill>
-                <a:latin typeface="Aptos" pitchFamily="34" charset="0"/>
-                <a:ea typeface="Aptos" pitchFamily="34" charset="-122"/>
-                <a:cs typeface="Aptos" pitchFamily="34" charset="-120"/>
-              </a:rPr>
-              <a:t>People and trust</a:t>
-            </a:r>
-            <a:endParaRPr lang="en-US" sz="1000" dirty="0"/>
-          </a:p>
-        </p:txBody>
-      </p:sp>
-      <p:sp>
-        <p:nvSpPr>
-          <p:cNvPr id="24" name="Shape 22"/>
           <p:cNvSpPr/>
           <p:nvPr/>
         </p:nvSpPr>
@@ -8432,7 +7867,7 @@
       </p:sp>
       <p:sp>
         <p:nvSpPr>
-          <p:cNvPr id="25" name="Text 23"/>
+          <p:cNvPr id="17" name="Text 15"/>
           <p:cNvSpPr/>
           <p:nvPr/>
         </p:nvSpPr>
@@ -8471,7 +7906,7 @@
       </p:sp>
       <p:sp>
         <p:nvSpPr>
-          <p:cNvPr id="26" name="Text 24"/>
+          <p:cNvPr id="18" name="Text 16"/>
           <p:cNvSpPr/>
           <p:nvPr/>
         </p:nvSpPr>
@@ -8965,13 +8400,11 @@
             </a:avLst>
           </a:prstGeom>
           <a:solidFill>
-            <a:srgbClr val="FFFFFF">
-              <a:alpha val="88000"/>
-            </a:srgbClr>
+            <a:srgbClr val="FFFFFF"/>
           </a:solidFill>
           <a:ln w="12700">
             <a:solidFill>
-              <a:srgbClr val="D6E8F2"/>
+              <a:srgbClr val="B9D7E6"/>
             </a:solidFill>
             <a:prstDash val="solid"/>
           </a:ln>
@@ -8979,261 +8412,98 @@
       </p:sp>
       <p:sp>
         <p:nvSpPr>
-          <p:cNvPr id="14" name="Shape 12"/>
-          <p:cNvSpPr/>
-          <p:nvPr/>
-        </p:nvSpPr>
-        <p:spPr>
-          <a:xfrm>
-            <a:off x="8138160" y="3291840"/>
-            <a:ext cx="329184" cy="329184"/>
-          </a:xfrm>
-          <a:prstGeom prst="ellipse">
-            <a:avLst/>
-          </a:prstGeom>
-          <a:solidFill>
-            <a:srgbClr val="0068B7"/>
-          </a:solidFill>
-          <a:ln w="12700">
-            <a:solidFill>
-              <a:srgbClr val="0068B7"/>
-            </a:solidFill>
-            <a:prstDash val="solid"/>
-          </a:ln>
-        </p:spPr>
-      </p:sp>
-      <p:sp>
-        <p:nvSpPr>
-          <p:cNvPr id="15" name="Shape 13"/>
-          <p:cNvSpPr/>
-          <p:nvPr/>
-        </p:nvSpPr>
-        <p:spPr>
-          <a:xfrm>
-            <a:off x="10332720" y="3383280"/>
-            <a:ext cx="329184" cy="329184"/>
-          </a:xfrm>
-          <a:prstGeom prst="ellipse">
-            <a:avLst/>
-          </a:prstGeom>
-          <a:solidFill>
-            <a:srgbClr val="2F8A28"/>
-          </a:solidFill>
-          <a:ln w="12700">
-            <a:solidFill>
-              <a:srgbClr val="2F8A28"/>
-            </a:solidFill>
-            <a:prstDash val="solid"/>
-          </a:ln>
-        </p:spPr>
+          <p:cNvPr id="14" name="Text 12"/>
+          <p:cNvSpPr/>
+          <p:nvPr/>
+        </p:nvSpPr>
+        <p:spPr>
+          <a:xfrm>
+            <a:off x="7799832" y="2935224"/>
+            <a:ext cx="3145536" cy="256032"/>
+          </a:xfrm>
+          <a:prstGeom prst="rect">
+            <a:avLst/>
+          </a:prstGeom>
+          <a:noFill/>
+          <a:ln/>
+        </p:spPr>
+        <p:txBody>
+          <a:bodyPr wrap="square" lIns="0" tIns="0" rIns="0" bIns="0" rtlCol="0" anchor="ctr"/>
+          <a:lstStyle/>
+          <a:p>
+            <a:pPr indent="0" marL="0">
+              <a:buNone/>
+            </a:pPr>
+            <a:r>
+              <a:rPr lang="en-US" sz="1300" b="1" dirty="0">
+                <a:solidFill>
+                  <a:srgbClr val="0068B7"/>
+                </a:solidFill>
+                <a:latin typeface="Aptos" pitchFamily="34" charset="0"/>
+                <a:ea typeface="Aptos" pitchFamily="34" charset="-122"/>
+                <a:cs typeface="Aptos" pitchFamily="34" charset="-120"/>
+              </a:rPr>
+              <a:t>Concept checkpoints</a:t>
+            </a:r>
+            <a:endParaRPr lang="en-US" sz="1300" dirty="0"/>
+          </a:p>
+        </p:txBody>
+      </p:sp>
+      <p:sp>
+        <p:nvSpPr>
+          <p:cNvPr id="15" name="Text 13"/>
+          <p:cNvSpPr/>
+          <p:nvPr/>
+        </p:nvSpPr>
+        <p:spPr>
+          <a:xfrm>
+            <a:off x="7818120" y="3300984"/>
+            <a:ext cx="3090672" cy="877824"/>
+          </a:xfrm>
+          <a:prstGeom prst="rect">
+            <a:avLst/>
+          </a:prstGeom>
+          <a:noFill/>
+          <a:ln/>
+        </p:spPr>
+        <p:txBody>
+          <a:bodyPr wrap="square" lIns="254" tIns="254" rIns="254" bIns="254" rtlCol="0" anchor="t">
+            <a:normAutofit/>
+          </a:bodyPr>
+          <a:lstStyle/>
+          <a:p>
+            <a:r>
+              <a:rPr lang="en-US" sz="1380" dirty="0">
+                <a:solidFill>
+                  <a:srgbClr val="17364A"/>
+                </a:solidFill>
+                <a:latin typeface="Aptos" pitchFamily="34" charset="0"/>
+                <a:ea typeface="Aptos" pitchFamily="34" charset="-122"/>
+                <a:cs typeface="Aptos" pitchFamily="34" charset="-120"/>
+              </a:rPr>
+              <a:t>Create an AI-assisted communications review checklist for one public health message.</a:t>
+            </a:r>
+            <a:endParaRPr lang="en-US" sz="1380" dirty="0"/>
+          </a:p>
+          <a:p>
+            <a:r>
+              <a:rPr lang="en-US" sz="1380" dirty="0">
+                <a:solidFill>
+                  <a:srgbClr val="17364A"/>
+                </a:solidFill>
+                <a:latin typeface="Aptos" pitchFamily="34" charset="0"/>
+                <a:ea typeface="Aptos" pitchFamily="34" charset="-122"/>
+                <a:cs typeface="Aptos" pitchFamily="34" charset="-120"/>
+              </a:rPr>
+              <a:t>Include intended audience, source material, factual claims to verify, plain language.</a:t>
+            </a:r>
+            <a:endParaRPr lang="en-US" sz="1380" dirty="0"/>
+          </a:p>
+        </p:txBody>
       </p:sp>
       <p:sp>
         <p:nvSpPr>
           <p:cNvPr id="16" name="Shape 14"/>
-          <p:cNvSpPr/>
-          <p:nvPr/>
-        </p:nvSpPr>
-        <p:spPr>
-          <a:xfrm>
-            <a:off x="9235440" y="3502152"/>
-            <a:ext cx="329184" cy="329184"/>
-          </a:xfrm>
-          <a:prstGeom prst="ellipse">
-            <a:avLst/>
-          </a:prstGeom>
-          <a:solidFill>
-            <a:srgbClr val="D69A2D"/>
-          </a:solidFill>
-          <a:ln w="12700">
-            <a:solidFill>
-              <a:srgbClr val="D69A2D"/>
-            </a:solidFill>
-            <a:prstDash val="solid"/>
-          </a:ln>
-        </p:spPr>
-      </p:sp>
-      <p:sp>
-        <p:nvSpPr>
-          <p:cNvPr id="17" name="Shape 15"/>
-          <p:cNvSpPr/>
-          <p:nvPr/>
-        </p:nvSpPr>
-        <p:spPr>
-          <a:xfrm>
-            <a:off x="9235440" y="3657600"/>
-            <a:ext cx="329184" cy="329184"/>
-          </a:xfrm>
-          <a:prstGeom prst="ellipse">
-            <a:avLst/>
-          </a:prstGeom>
-          <a:solidFill>
-            <a:srgbClr val="6A4CA3"/>
-          </a:solidFill>
-          <a:ln w="12700">
-            <a:solidFill>
-              <a:srgbClr val="6A4CA3"/>
-            </a:solidFill>
-            <a:prstDash val="solid"/>
-          </a:ln>
-        </p:spPr>
-      </p:sp>
-      <p:sp>
-        <p:nvSpPr>
-          <p:cNvPr id="18" name="Shape 16"/>
-          <p:cNvSpPr/>
-          <p:nvPr/>
-        </p:nvSpPr>
-        <p:spPr>
-          <a:xfrm>
-            <a:off x="8302752" y="3456432"/>
-            <a:ext cx="1097280" cy="365760"/>
-          </a:xfrm>
-          <a:prstGeom prst="line">
-            <a:avLst/>
-          </a:prstGeom>
-          <a:noFill/>
-          <a:ln w="19050">
-            <a:solidFill>
-              <a:srgbClr val="8ABBD8"/>
-            </a:solidFill>
-            <a:prstDash val="solid"/>
-          </a:ln>
-        </p:spPr>
-      </p:sp>
-      <p:sp>
-        <p:nvSpPr>
-          <p:cNvPr id="19" name="Shape 17"/>
-          <p:cNvSpPr/>
-          <p:nvPr/>
-        </p:nvSpPr>
-        <p:spPr>
-          <a:xfrm>
-            <a:off x="10497312" y="3547872"/>
-            <a:ext cx="-1097280" cy="274320"/>
-          </a:xfrm>
-          <a:prstGeom prst="line">
-            <a:avLst/>
-          </a:prstGeom>
-          <a:noFill/>
-          <a:ln w="19050">
-            <a:solidFill>
-              <a:srgbClr val="8ABBD8"/>
-            </a:solidFill>
-            <a:prstDash val="solid"/>
-          </a:ln>
-        </p:spPr>
-      </p:sp>
-      <p:sp>
-        <p:nvSpPr>
-          <p:cNvPr id="20" name="Shape 18"/>
-          <p:cNvSpPr/>
-          <p:nvPr/>
-        </p:nvSpPr>
-        <p:spPr>
-          <a:xfrm>
-            <a:off x="9400032" y="3666744"/>
-            <a:ext cx="0" cy="155448"/>
-          </a:xfrm>
-          <a:prstGeom prst="line">
-            <a:avLst/>
-          </a:prstGeom>
-          <a:noFill/>
-          <a:ln w="19050">
-            <a:solidFill>
-              <a:srgbClr val="8ABBD8"/>
-            </a:solidFill>
-            <a:prstDash val="solid"/>
-          </a:ln>
-        </p:spPr>
-      </p:sp>
-      <p:sp>
-        <p:nvSpPr>
-          <p:cNvPr id="21" name="Shape 19"/>
-          <p:cNvSpPr/>
-          <p:nvPr/>
-        </p:nvSpPr>
-        <p:spPr>
-          <a:xfrm>
-            <a:off x="8302752" y="3456432"/>
-            <a:ext cx="1097280" cy="210312"/>
-          </a:xfrm>
-          <a:prstGeom prst="line">
-            <a:avLst/>
-          </a:prstGeom>
-          <a:noFill/>
-          <a:ln w="19050">
-            <a:solidFill>
-              <a:srgbClr val="8ABBD8"/>
-            </a:solidFill>
-            <a:prstDash val="solid"/>
-          </a:ln>
-        </p:spPr>
-      </p:sp>
-      <p:sp>
-        <p:nvSpPr>
-          <p:cNvPr id="22" name="Shape 20"/>
-          <p:cNvSpPr/>
-          <p:nvPr/>
-        </p:nvSpPr>
-        <p:spPr>
-          <a:xfrm>
-            <a:off x="10497312" y="3547872"/>
-            <a:ext cx="-1097280" cy="118872"/>
-          </a:xfrm>
-          <a:prstGeom prst="line">
-            <a:avLst/>
-          </a:prstGeom>
-          <a:noFill/>
-          <a:ln w="19050">
-            <a:solidFill>
-              <a:srgbClr val="8ABBD8"/>
-            </a:solidFill>
-            <a:prstDash val="solid"/>
-          </a:ln>
-        </p:spPr>
-      </p:sp>
-      <p:sp>
-        <p:nvSpPr>
-          <p:cNvPr id="23" name="Text 21"/>
-          <p:cNvSpPr/>
-          <p:nvPr/>
-        </p:nvSpPr>
-        <p:spPr>
-          <a:xfrm>
-            <a:off x="7909560" y="3977640"/>
-            <a:ext cx="2926080" cy="182880"/>
-          </a:xfrm>
-          <a:prstGeom prst="rect">
-            <a:avLst/>
-          </a:prstGeom>
-          <a:noFill/>
-          <a:ln/>
-        </p:spPr>
-        <p:txBody>
-          <a:bodyPr wrap="square" lIns="0" tIns="0" rIns="0" bIns="0" rtlCol="0" anchor="ctr"/>
-          <a:lstStyle/>
-          <a:p>
-            <a:pPr algn="ctr" indent="0" marL="0">
-              <a:buNone/>
-            </a:pPr>
-            <a:r>
-              <a:rPr lang="en-US" sz="1000" dirty="0">
-                <a:solidFill>
-                  <a:srgbClr val="003A63"/>
-                </a:solidFill>
-                <a:latin typeface="Aptos" pitchFamily="34" charset="0"/>
-                <a:ea typeface="Aptos" pitchFamily="34" charset="-122"/>
-                <a:cs typeface="Aptos" pitchFamily="34" charset="-120"/>
-              </a:rPr>
-              <a:t>People and trust</a:t>
-            </a:r>
-            <a:endParaRPr lang="en-US" sz="1000" dirty="0"/>
-          </a:p>
-        </p:txBody>
-      </p:sp>
-      <p:sp>
-        <p:nvSpPr>
-          <p:cNvPr id="24" name="Shape 22"/>
           <p:cNvSpPr/>
           <p:nvPr/>
         </p:nvSpPr>
@@ -9260,7 +8530,7 @@
       </p:sp>
       <p:sp>
         <p:nvSpPr>
-          <p:cNvPr id="25" name="Text 23"/>
+          <p:cNvPr id="17" name="Text 15"/>
           <p:cNvSpPr/>
           <p:nvPr/>
         </p:nvSpPr>
@@ -9299,7 +8569,7 @@
       </p:sp>
       <p:sp>
         <p:nvSpPr>
-          <p:cNvPr id="26" name="Text 24"/>
+          <p:cNvPr id="18" name="Text 16"/>
           <p:cNvSpPr/>
           <p:nvPr/>
         </p:nvSpPr>
@@ -9807,13 +9077,11 @@
             </a:avLst>
           </a:prstGeom>
           <a:solidFill>
-            <a:srgbClr val="FFFFFF">
-              <a:alpha val="88000"/>
-            </a:srgbClr>
+            <a:srgbClr val="FFFFFF"/>
           </a:solidFill>
           <a:ln w="12700">
             <a:solidFill>
-              <a:srgbClr val="D6E8F2"/>
+              <a:srgbClr val="B9D7E6"/>
             </a:solidFill>
             <a:prstDash val="solid"/>
           </a:ln>
@@ -9821,261 +9089,112 @@
       </p:sp>
       <p:sp>
         <p:nvSpPr>
-          <p:cNvPr id="14" name="Shape 12"/>
-          <p:cNvSpPr/>
-          <p:nvPr/>
-        </p:nvSpPr>
-        <p:spPr>
-          <a:xfrm>
-            <a:off x="8138160" y="3291840"/>
-            <a:ext cx="329184" cy="329184"/>
-          </a:xfrm>
-          <a:prstGeom prst="ellipse">
-            <a:avLst/>
-          </a:prstGeom>
-          <a:solidFill>
-            <a:srgbClr val="0068B7"/>
-          </a:solidFill>
-          <a:ln w="12700">
-            <a:solidFill>
-              <a:srgbClr val="0068B7"/>
-            </a:solidFill>
-            <a:prstDash val="solid"/>
-          </a:ln>
-        </p:spPr>
-      </p:sp>
-      <p:sp>
-        <p:nvSpPr>
-          <p:cNvPr id="15" name="Shape 13"/>
-          <p:cNvSpPr/>
-          <p:nvPr/>
-        </p:nvSpPr>
-        <p:spPr>
-          <a:xfrm>
-            <a:off x="10332720" y="3383280"/>
-            <a:ext cx="329184" cy="329184"/>
-          </a:xfrm>
-          <a:prstGeom prst="ellipse">
-            <a:avLst/>
-          </a:prstGeom>
-          <a:solidFill>
-            <a:srgbClr val="2F8A28"/>
-          </a:solidFill>
-          <a:ln w="12700">
-            <a:solidFill>
-              <a:srgbClr val="2F8A28"/>
-            </a:solidFill>
-            <a:prstDash val="solid"/>
-          </a:ln>
-        </p:spPr>
+          <p:cNvPr id="14" name="Text 12"/>
+          <p:cNvSpPr/>
+          <p:nvPr/>
+        </p:nvSpPr>
+        <p:spPr>
+          <a:xfrm>
+            <a:off x="7799832" y="2935224"/>
+            <a:ext cx="3145536" cy="256032"/>
+          </a:xfrm>
+          <a:prstGeom prst="rect">
+            <a:avLst/>
+          </a:prstGeom>
+          <a:noFill/>
+          <a:ln/>
+        </p:spPr>
+        <p:txBody>
+          <a:bodyPr wrap="square" lIns="0" tIns="0" rIns="0" bIns="0" rtlCol="0" anchor="ctr"/>
+          <a:lstStyle/>
+          <a:p>
+            <a:pPr indent="0" marL="0">
+              <a:buNone/>
+            </a:pPr>
+            <a:r>
+              <a:rPr lang="en-US" sz="1300" b="1" dirty="0">
+                <a:solidFill>
+                  <a:srgbClr val="0068B7"/>
+                </a:solidFill>
+                <a:latin typeface="Aptos" pitchFamily="34" charset="0"/>
+                <a:ea typeface="Aptos" pitchFamily="34" charset="-122"/>
+                <a:cs typeface="Aptos" pitchFamily="34" charset="-120"/>
+              </a:rPr>
+              <a:t>Concept checkpoints</a:t>
+            </a:r>
+            <a:endParaRPr lang="en-US" sz="1300" dirty="0"/>
+          </a:p>
+        </p:txBody>
+      </p:sp>
+      <p:sp>
+        <p:nvSpPr>
+          <p:cNvPr id="15" name="Text 13"/>
+          <p:cNvSpPr/>
+          <p:nvPr/>
+        </p:nvSpPr>
+        <p:spPr>
+          <a:xfrm>
+            <a:off x="7818120" y="3300984"/>
+            <a:ext cx="3090672" cy="877824"/>
+          </a:xfrm>
+          <a:prstGeom prst="rect">
+            <a:avLst/>
+          </a:prstGeom>
+          <a:noFill/>
+          <a:ln/>
+        </p:spPr>
+        <p:txBody>
+          <a:bodyPr wrap="square" lIns="254" tIns="254" rIns="254" bIns="254" rtlCol="0" anchor="t">
+            <a:normAutofit/>
+          </a:bodyPr>
+          <a:lstStyle/>
+          <a:p>
+            <a:r>
+              <a:rPr lang="en-US" sz="1380" dirty="0">
+                <a:solidFill>
+                  <a:srgbClr val="17364A"/>
+                </a:solidFill>
+                <a:latin typeface="Aptos" pitchFamily="34" charset="0"/>
+                <a:ea typeface="Aptos" pitchFamily="34" charset="-122"/>
+                <a:cs typeface="Aptos" pitchFamily="34" charset="-120"/>
+              </a:rPr>
+              <a:t>AI-assisted communications review checklist</a:t>
+            </a:r>
+            <a:endParaRPr lang="en-US" sz="1380" dirty="0"/>
+          </a:p>
+          <a:p>
+            <a:r>
+              <a:rPr lang="en-US" sz="1380" dirty="0">
+                <a:solidFill>
+                  <a:srgbClr val="17364A"/>
+                </a:solidFill>
+                <a:latin typeface="Aptos" pitchFamily="34" charset="0"/>
+                <a:ea typeface="Aptos" pitchFamily="34" charset="-122"/>
+                <a:cs typeface="Aptos" pitchFamily="34" charset="-120"/>
+              </a:rPr>
+              <a:t>Source verification notes</a:t>
+            </a:r>
+            <a:endParaRPr lang="en-US" sz="1380" dirty="0"/>
+          </a:p>
+          <a:p>
+            <a:r>
+              <a:rPr lang="en-US" sz="1380" dirty="0">
+                <a:solidFill>
+                  <a:srgbClr val="17364A"/>
+                </a:solidFill>
+                <a:latin typeface="Aptos" pitchFamily="34" charset="0"/>
+                <a:ea typeface="Aptos" pitchFamily="34" charset="-122"/>
+                <a:cs typeface="Aptos" pitchFamily="34" charset="-120"/>
+              </a:rPr>
+              <a:t>Plain language and accessibility review notes</a:t>
+            </a:r>
+            <a:endParaRPr lang="en-US" sz="1380" dirty="0"/>
+          </a:p>
+        </p:txBody>
       </p:sp>
       <p:sp>
         <p:nvSpPr>
           <p:cNvPr id="16" name="Shape 14"/>
-          <p:cNvSpPr/>
-          <p:nvPr/>
-        </p:nvSpPr>
-        <p:spPr>
-          <a:xfrm>
-            <a:off x="9235440" y="3502152"/>
-            <a:ext cx="329184" cy="329184"/>
-          </a:xfrm>
-          <a:prstGeom prst="ellipse">
-            <a:avLst/>
-          </a:prstGeom>
-          <a:solidFill>
-            <a:srgbClr val="D69A2D"/>
-          </a:solidFill>
-          <a:ln w="12700">
-            <a:solidFill>
-              <a:srgbClr val="D69A2D"/>
-            </a:solidFill>
-            <a:prstDash val="solid"/>
-          </a:ln>
-        </p:spPr>
-      </p:sp>
-      <p:sp>
-        <p:nvSpPr>
-          <p:cNvPr id="17" name="Shape 15"/>
-          <p:cNvSpPr/>
-          <p:nvPr/>
-        </p:nvSpPr>
-        <p:spPr>
-          <a:xfrm>
-            <a:off x="9235440" y="3657600"/>
-            <a:ext cx="329184" cy="329184"/>
-          </a:xfrm>
-          <a:prstGeom prst="ellipse">
-            <a:avLst/>
-          </a:prstGeom>
-          <a:solidFill>
-            <a:srgbClr val="6A4CA3"/>
-          </a:solidFill>
-          <a:ln w="12700">
-            <a:solidFill>
-              <a:srgbClr val="6A4CA3"/>
-            </a:solidFill>
-            <a:prstDash val="solid"/>
-          </a:ln>
-        </p:spPr>
-      </p:sp>
-      <p:sp>
-        <p:nvSpPr>
-          <p:cNvPr id="18" name="Shape 16"/>
-          <p:cNvSpPr/>
-          <p:nvPr/>
-        </p:nvSpPr>
-        <p:spPr>
-          <a:xfrm>
-            <a:off x="8302752" y="3456432"/>
-            <a:ext cx="1097280" cy="365760"/>
-          </a:xfrm>
-          <a:prstGeom prst="line">
-            <a:avLst/>
-          </a:prstGeom>
-          <a:noFill/>
-          <a:ln w="19050">
-            <a:solidFill>
-              <a:srgbClr val="8ABBD8"/>
-            </a:solidFill>
-            <a:prstDash val="solid"/>
-          </a:ln>
-        </p:spPr>
-      </p:sp>
-      <p:sp>
-        <p:nvSpPr>
-          <p:cNvPr id="19" name="Shape 17"/>
-          <p:cNvSpPr/>
-          <p:nvPr/>
-        </p:nvSpPr>
-        <p:spPr>
-          <a:xfrm>
-            <a:off x="10497312" y="3547872"/>
-            <a:ext cx="-1097280" cy="274320"/>
-          </a:xfrm>
-          <a:prstGeom prst="line">
-            <a:avLst/>
-          </a:prstGeom>
-          <a:noFill/>
-          <a:ln w="19050">
-            <a:solidFill>
-              <a:srgbClr val="8ABBD8"/>
-            </a:solidFill>
-            <a:prstDash val="solid"/>
-          </a:ln>
-        </p:spPr>
-      </p:sp>
-      <p:sp>
-        <p:nvSpPr>
-          <p:cNvPr id="20" name="Shape 18"/>
-          <p:cNvSpPr/>
-          <p:nvPr/>
-        </p:nvSpPr>
-        <p:spPr>
-          <a:xfrm>
-            <a:off x="9400032" y="3666744"/>
-            <a:ext cx="0" cy="155448"/>
-          </a:xfrm>
-          <a:prstGeom prst="line">
-            <a:avLst/>
-          </a:prstGeom>
-          <a:noFill/>
-          <a:ln w="19050">
-            <a:solidFill>
-              <a:srgbClr val="8ABBD8"/>
-            </a:solidFill>
-            <a:prstDash val="solid"/>
-          </a:ln>
-        </p:spPr>
-      </p:sp>
-      <p:sp>
-        <p:nvSpPr>
-          <p:cNvPr id="21" name="Shape 19"/>
-          <p:cNvSpPr/>
-          <p:nvPr/>
-        </p:nvSpPr>
-        <p:spPr>
-          <a:xfrm>
-            <a:off x="8302752" y="3456432"/>
-            <a:ext cx="1097280" cy="210312"/>
-          </a:xfrm>
-          <a:prstGeom prst="line">
-            <a:avLst/>
-          </a:prstGeom>
-          <a:noFill/>
-          <a:ln w="19050">
-            <a:solidFill>
-              <a:srgbClr val="8ABBD8"/>
-            </a:solidFill>
-            <a:prstDash val="solid"/>
-          </a:ln>
-        </p:spPr>
-      </p:sp>
-      <p:sp>
-        <p:nvSpPr>
-          <p:cNvPr id="22" name="Shape 20"/>
-          <p:cNvSpPr/>
-          <p:nvPr/>
-        </p:nvSpPr>
-        <p:spPr>
-          <a:xfrm>
-            <a:off x="10497312" y="3547872"/>
-            <a:ext cx="-1097280" cy="118872"/>
-          </a:xfrm>
-          <a:prstGeom prst="line">
-            <a:avLst/>
-          </a:prstGeom>
-          <a:noFill/>
-          <a:ln w="19050">
-            <a:solidFill>
-              <a:srgbClr val="8ABBD8"/>
-            </a:solidFill>
-            <a:prstDash val="solid"/>
-          </a:ln>
-        </p:spPr>
-      </p:sp>
-      <p:sp>
-        <p:nvSpPr>
-          <p:cNvPr id="23" name="Text 21"/>
-          <p:cNvSpPr/>
-          <p:nvPr/>
-        </p:nvSpPr>
-        <p:spPr>
-          <a:xfrm>
-            <a:off x="7909560" y="3977640"/>
-            <a:ext cx="2926080" cy="182880"/>
-          </a:xfrm>
-          <a:prstGeom prst="rect">
-            <a:avLst/>
-          </a:prstGeom>
-          <a:noFill/>
-          <a:ln/>
-        </p:spPr>
-        <p:txBody>
-          <a:bodyPr wrap="square" lIns="0" tIns="0" rIns="0" bIns="0" rtlCol="0" anchor="ctr"/>
-          <a:lstStyle/>
-          <a:p>
-            <a:pPr algn="ctr" indent="0" marL="0">
-              <a:buNone/>
-            </a:pPr>
-            <a:r>
-              <a:rPr lang="en-US" sz="1000" dirty="0">
-                <a:solidFill>
-                  <a:srgbClr val="003A63"/>
-                </a:solidFill>
-                <a:latin typeface="Aptos" pitchFamily="34" charset="0"/>
-                <a:ea typeface="Aptos" pitchFamily="34" charset="-122"/>
-                <a:cs typeface="Aptos" pitchFamily="34" charset="-120"/>
-              </a:rPr>
-              <a:t>People and trust</a:t>
-            </a:r>
-            <a:endParaRPr lang="en-US" sz="1000" dirty="0"/>
-          </a:p>
-        </p:txBody>
-      </p:sp>
-      <p:sp>
-        <p:nvSpPr>
-          <p:cNvPr id="24" name="Shape 22"/>
           <p:cNvSpPr/>
           <p:nvPr/>
         </p:nvSpPr>
@@ -10102,7 +9221,7 @@
       </p:sp>
       <p:sp>
         <p:nvSpPr>
-          <p:cNvPr id="25" name="Text 23"/>
+          <p:cNvPr id="17" name="Text 15"/>
           <p:cNvSpPr/>
           <p:nvPr/>
         </p:nvSpPr>
@@ -10141,7 +9260,7 @@
       </p:sp>
       <p:sp>
         <p:nvSpPr>
-          <p:cNvPr id="26" name="Text 24"/>
+          <p:cNvPr id="18" name="Text 16"/>
           <p:cNvSpPr/>
           <p:nvPr/>
         </p:nvSpPr>
@@ -10635,13 +9754,11 @@
             </a:avLst>
           </a:prstGeom>
           <a:solidFill>
-            <a:srgbClr val="FFFFFF">
-              <a:alpha val="88000"/>
-            </a:srgbClr>
+            <a:srgbClr val="FFFFFF"/>
           </a:solidFill>
           <a:ln w="12700">
             <a:solidFill>
-              <a:srgbClr val="D6E8F2"/>
+              <a:srgbClr val="B9D7E6"/>
             </a:solidFill>
             <a:prstDash val="solid"/>
           </a:ln>
@@ -10649,261 +9766,98 @@
       </p:sp>
       <p:sp>
         <p:nvSpPr>
-          <p:cNvPr id="14" name="Shape 12"/>
-          <p:cNvSpPr/>
-          <p:nvPr/>
-        </p:nvSpPr>
-        <p:spPr>
-          <a:xfrm>
-            <a:off x="8138160" y="3291840"/>
-            <a:ext cx="329184" cy="329184"/>
-          </a:xfrm>
-          <a:prstGeom prst="ellipse">
-            <a:avLst/>
-          </a:prstGeom>
-          <a:solidFill>
-            <a:srgbClr val="0068B7"/>
-          </a:solidFill>
-          <a:ln w="12700">
-            <a:solidFill>
-              <a:srgbClr val="0068B7"/>
-            </a:solidFill>
-            <a:prstDash val="solid"/>
-          </a:ln>
-        </p:spPr>
-      </p:sp>
-      <p:sp>
-        <p:nvSpPr>
-          <p:cNvPr id="15" name="Shape 13"/>
-          <p:cNvSpPr/>
-          <p:nvPr/>
-        </p:nvSpPr>
-        <p:spPr>
-          <a:xfrm>
-            <a:off x="10332720" y="3383280"/>
-            <a:ext cx="329184" cy="329184"/>
-          </a:xfrm>
-          <a:prstGeom prst="ellipse">
-            <a:avLst/>
-          </a:prstGeom>
-          <a:solidFill>
-            <a:srgbClr val="2F8A28"/>
-          </a:solidFill>
-          <a:ln w="12700">
-            <a:solidFill>
-              <a:srgbClr val="2F8A28"/>
-            </a:solidFill>
-            <a:prstDash val="solid"/>
-          </a:ln>
-        </p:spPr>
+          <p:cNvPr id="14" name="Text 12"/>
+          <p:cNvSpPr/>
+          <p:nvPr/>
+        </p:nvSpPr>
+        <p:spPr>
+          <a:xfrm>
+            <a:off x="7799832" y="2935224"/>
+            <a:ext cx="3145536" cy="256032"/>
+          </a:xfrm>
+          <a:prstGeom prst="rect">
+            <a:avLst/>
+          </a:prstGeom>
+          <a:noFill/>
+          <a:ln/>
+        </p:spPr>
+        <p:txBody>
+          <a:bodyPr wrap="square" lIns="0" tIns="0" rIns="0" bIns="0" rtlCol="0" anchor="ctr"/>
+          <a:lstStyle/>
+          <a:p>
+            <a:pPr indent="0" marL="0">
+              <a:buNone/>
+            </a:pPr>
+            <a:r>
+              <a:rPr lang="en-US" sz="1300" b="1" dirty="0">
+                <a:solidFill>
+                  <a:srgbClr val="0068B7"/>
+                </a:solidFill>
+                <a:latin typeface="Aptos" pitchFamily="34" charset="0"/>
+                <a:ea typeface="Aptos" pitchFamily="34" charset="-122"/>
+                <a:cs typeface="Aptos" pitchFamily="34" charset="-120"/>
+              </a:rPr>
+              <a:t>Concept checkpoints</a:t>
+            </a:r>
+            <a:endParaRPr lang="en-US" sz="1300" dirty="0"/>
+          </a:p>
+        </p:txBody>
+      </p:sp>
+      <p:sp>
+        <p:nvSpPr>
+          <p:cNvPr id="15" name="Text 13"/>
+          <p:cNvSpPr/>
+          <p:nvPr/>
+        </p:nvSpPr>
+        <p:spPr>
+          <a:xfrm>
+            <a:off x="7818120" y="3300984"/>
+            <a:ext cx="3090672" cy="877824"/>
+          </a:xfrm>
+          <a:prstGeom prst="rect">
+            <a:avLst/>
+          </a:prstGeom>
+          <a:noFill/>
+          <a:ln/>
+        </p:spPr>
+        <p:txBody>
+          <a:bodyPr wrap="square" lIns="254" tIns="254" rIns="254" bIns="254" rtlCol="0" anchor="t">
+            <a:normAutofit/>
+          </a:bodyPr>
+          <a:lstStyle/>
+          <a:p>
+            <a:r>
+              <a:rPr lang="en-US" sz="1380" dirty="0">
+                <a:solidFill>
+                  <a:srgbClr val="17364A"/>
+                </a:solidFill>
+                <a:latin typeface="Aptos" pitchFamily="34" charset="0"/>
+                <a:ea typeface="Aptos" pitchFamily="34" charset="-122"/>
+                <a:cs typeface="Aptos" pitchFamily="34" charset="-120"/>
+              </a:rPr>
+              <a:t>Approval pathway documentation</a:t>
+            </a:r>
+            <a:endParaRPr lang="en-US" sz="1380" dirty="0"/>
+          </a:p>
+          <a:p>
+            <a:r>
+              <a:rPr lang="en-US" sz="1380" dirty="0">
+                <a:solidFill>
+                  <a:srgbClr val="17364A"/>
+                </a:solidFill>
+                <a:latin typeface="Aptos" pitchFamily="34" charset="0"/>
+                <a:ea typeface="Aptos" pitchFamily="34" charset="-122"/>
+                <a:cs typeface="Aptos" pitchFamily="34" charset="-120"/>
+              </a:rPr>
+              <a:t>Final reviewed message or sample revision</a:t>
+            </a:r>
+            <a:endParaRPr lang="en-US" sz="1380" dirty="0"/>
+          </a:p>
+        </p:txBody>
       </p:sp>
       <p:sp>
         <p:nvSpPr>
           <p:cNvPr id="16" name="Shape 14"/>
-          <p:cNvSpPr/>
-          <p:nvPr/>
-        </p:nvSpPr>
-        <p:spPr>
-          <a:xfrm>
-            <a:off x="9235440" y="3502152"/>
-            <a:ext cx="329184" cy="329184"/>
-          </a:xfrm>
-          <a:prstGeom prst="ellipse">
-            <a:avLst/>
-          </a:prstGeom>
-          <a:solidFill>
-            <a:srgbClr val="D69A2D"/>
-          </a:solidFill>
-          <a:ln w="12700">
-            <a:solidFill>
-              <a:srgbClr val="D69A2D"/>
-            </a:solidFill>
-            <a:prstDash val="solid"/>
-          </a:ln>
-        </p:spPr>
-      </p:sp>
-      <p:sp>
-        <p:nvSpPr>
-          <p:cNvPr id="17" name="Shape 15"/>
-          <p:cNvSpPr/>
-          <p:nvPr/>
-        </p:nvSpPr>
-        <p:spPr>
-          <a:xfrm>
-            <a:off x="9235440" y="3657600"/>
-            <a:ext cx="329184" cy="329184"/>
-          </a:xfrm>
-          <a:prstGeom prst="ellipse">
-            <a:avLst/>
-          </a:prstGeom>
-          <a:solidFill>
-            <a:srgbClr val="6A4CA3"/>
-          </a:solidFill>
-          <a:ln w="12700">
-            <a:solidFill>
-              <a:srgbClr val="6A4CA3"/>
-            </a:solidFill>
-            <a:prstDash val="solid"/>
-          </a:ln>
-        </p:spPr>
-      </p:sp>
-      <p:sp>
-        <p:nvSpPr>
-          <p:cNvPr id="18" name="Shape 16"/>
-          <p:cNvSpPr/>
-          <p:nvPr/>
-        </p:nvSpPr>
-        <p:spPr>
-          <a:xfrm>
-            <a:off x="8302752" y="3456432"/>
-            <a:ext cx="1097280" cy="365760"/>
-          </a:xfrm>
-          <a:prstGeom prst="line">
-            <a:avLst/>
-          </a:prstGeom>
-          <a:noFill/>
-          <a:ln w="19050">
-            <a:solidFill>
-              <a:srgbClr val="8ABBD8"/>
-            </a:solidFill>
-            <a:prstDash val="solid"/>
-          </a:ln>
-        </p:spPr>
-      </p:sp>
-      <p:sp>
-        <p:nvSpPr>
-          <p:cNvPr id="19" name="Shape 17"/>
-          <p:cNvSpPr/>
-          <p:nvPr/>
-        </p:nvSpPr>
-        <p:spPr>
-          <a:xfrm>
-            <a:off x="10497312" y="3547872"/>
-            <a:ext cx="-1097280" cy="274320"/>
-          </a:xfrm>
-          <a:prstGeom prst="line">
-            <a:avLst/>
-          </a:prstGeom>
-          <a:noFill/>
-          <a:ln w="19050">
-            <a:solidFill>
-              <a:srgbClr val="8ABBD8"/>
-            </a:solidFill>
-            <a:prstDash val="solid"/>
-          </a:ln>
-        </p:spPr>
-      </p:sp>
-      <p:sp>
-        <p:nvSpPr>
-          <p:cNvPr id="20" name="Shape 18"/>
-          <p:cNvSpPr/>
-          <p:nvPr/>
-        </p:nvSpPr>
-        <p:spPr>
-          <a:xfrm>
-            <a:off x="9400032" y="3666744"/>
-            <a:ext cx="0" cy="155448"/>
-          </a:xfrm>
-          <a:prstGeom prst="line">
-            <a:avLst/>
-          </a:prstGeom>
-          <a:noFill/>
-          <a:ln w="19050">
-            <a:solidFill>
-              <a:srgbClr val="8ABBD8"/>
-            </a:solidFill>
-            <a:prstDash val="solid"/>
-          </a:ln>
-        </p:spPr>
-      </p:sp>
-      <p:sp>
-        <p:nvSpPr>
-          <p:cNvPr id="21" name="Shape 19"/>
-          <p:cNvSpPr/>
-          <p:nvPr/>
-        </p:nvSpPr>
-        <p:spPr>
-          <a:xfrm>
-            <a:off x="8302752" y="3456432"/>
-            <a:ext cx="1097280" cy="210312"/>
-          </a:xfrm>
-          <a:prstGeom prst="line">
-            <a:avLst/>
-          </a:prstGeom>
-          <a:noFill/>
-          <a:ln w="19050">
-            <a:solidFill>
-              <a:srgbClr val="8ABBD8"/>
-            </a:solidFill>
-            <a:prstDash val="solid"/>
-          </a:ln>
-        </p:spPr>
-      </p:sp>
-      <p:sp>
-        <p:nvSpPr>
-          <p:cNvPr id="22" name="Shape 20"/>
-          <p:cNvSpPr/>
-          <p:nvPr/>
-        </p:nvSpPr>
-        <p:spPr>
-          <a:xfrm>
-            <a:off x="10497312" y="3547872"/>
-            <a:ext cx="-1097280" cy="118872"/>
-          </a:xfrm>
-          <a:prstGeom prst="line">
-            <a:avLst/>
-          </a:prstGeom>
-          <a:noFill/>
-          <a:ln w="19050">
-            <a:solidFill>
-              <a:srgbClr val="8ABBD8"/>
-            </a:solidFill>
-            <a:prstDash val="solid"/>
-          </a:ln>
-        </p:spPr>
-      </p:sp>
-      <p:sp>
-        <p:nvSpPr>
-          <p:cNvPr id="23" name="Text 21"/>
-          <p:cNvSpPr/>
-          <p:nvPr/>
-        </p:nvSpPr>
-        <p:spPr>
-          <a:xfrm>
-            <a:off x="7909560" y="3977640"/>
-            <a:ext cx="2926080" cy="182880"/>
-          </a:xfrm>
-          <a:prstGeom prst="rect">
-            <a:avLst/>
-          </a:prstGeom>
-          <a:noFill/>
-          <a:ln/>
-        </p:spPr>
-        <p:txBody>
-          <a:bodyPr wrap="square" lIns="0" tIns="0" rIns="0" bIns="0" rtlCol="0" anchor="ctr"/>
-          <a:lstStyle/>
-          <a:p>
-            <a:pPr algn="ctr" indent="0" marL="0">
-              <a:buNone/>
-            </a:pPr>
-            <a:r>
-              <a:rPr lang="en-US" sz="1000" dirty="0">
-                <a:solidFill>
-                  <a:srgbClr val="003A63"/>
-                </a:solidFill>
-                <a:latin typeface="Aptos" pitchFamily="34" charset="0"/>
-                <a:ea typeface="Aptos" pitchFamily="34" charset="-122"/>
-                <a:cs typeface="Aptos" pitchFamily="34" charset="-120"/>
-              </a:rPr>
-              <a:t>People and trust</a:t>
-            </a:r>
-            <a:endParaRPr lang="en-US" sz="1000" dirty="0"/>
-          </a:p>
-        </p:txBody>
-      </p:sp>
-      <p:sp>
-        <p:nvSpPr>
-          <p:cNvPr id="24" name="Shape 22"/>
           <p:cNvSpPr/>
           <p:nvPr/>
         </p:nvSpPr>
@@ -10930,7 +9884,7 @@
       </p:sp>
       <p:sp>
         <p:nvSpPr>
-          <p:cNvPr id="25" name="Text 23"/>
+          <p:cNvPr id="17" name="Text 15"/>
           <p:cNvSpPr/>
           <p:nvPr/>
         </p:nvSpPr>
@@ -10969,7 +9923,7 @@
       </p:sp>
       <p:sp>
         <p:nvSpPr>
-          <p:cNvPr id="26" name="Text 24"/>
+          <p:cNvPr id="18" name="Text 16"/>
           <p:cNvSpPr/>
           <p:nvPr/>
         </p:nvSpPr>
@@ -11502,20 +10456,20 @@
         </p:nvSpPr>
         <p:spPr>
           <a:xfrm>
-            <a:off x="7635240" y="3730752"/>
-            <a:ext cx="1033272" cy="749808"/>
+            <a:off x="7909560" y="3675888"/>
+            <a:ext cx="3154680" cy="1691640"/>
           </a:xfrm>
           <a:prstGeom prst="roundRect">
             <a:avLst>
-              <a:gd name="adj" fmla="val 14634"/>
+              <a:gd name="adj" fmla="val 6486"/>
             </a:avLst>
           </a:prstGeom>
           <a:solidFill>
-            <a:srgbClr val="0068B7"/>
+            <a:srgbClr val="FFFFFF"/>
           </a:solidFill>
           <a:ln w="12700">
             <a:solidFill>
-              <a:srgbClr val="0068B7"/>
+              <a:srgbClr val="B9D7E6"/>
             </a:solidFill>
             <a:prstDash val="solid"/>
           </a:ln>
@@ -11529,172 +10483,100 @@
         </p:nvSpPr>
         <p:spPr>
           <a:xfrm>
-            <a:off x="7708392" y="3922776"/>
-            <a:ext cx="886968" cy="310896"/>
-          </a:xfrm>
-          <a:prstGeom prst="rect">
-            <a:avLst/>
-          </a:prstGeom>
-          <a:noFill/>
-          <a:ln/>
-        </p:spPr>
-        <p:txBody>
-          <a:bodyPr wrap="square" lIns="0" tIns="0" rIns="0" bIns="0" rtlCol="0" anchor="ctr">
+            <a:off x="8074152" y="3822192"/>
+            <a:ext cx="2825496" cy="256032"/>
+          </a:xfrm>
+          <a:prstGeom prst="rect">
+            <a:avLst/>
+          </a:prstGeom>
+          <a:noFill/>
+          <a:ln/>
+        </p:spPr>
+        <p:txBody>
+          <a:bodyPr wrap="square" lIns="0" tIns="0" rIns="0" bIns="0" rtlCol="0" anchor="ctr"/>
+          <a:lstStyle/>
+          <a:p>
+            <a:pPr indent="0" marL="0">
+              <a:buNone/>
+            </a:pPr>
+            <a:r>
+              <a:rPr lang="en-US" sz="1300" b="1" dirty="0">
+                <a:solidFill>
+                  <a:srgbClr val="0068B7"/>
+                </a:solidFill>
+                <a:latin typeface="Aptos" pitchFamily="34" charset="0"/>
+                <a:ea typeface="Aptos" pitchFamily="34" charset="-122"/>
+                <a:cs typeface="Aptos" pitchFamily="34" charset="-120"/>
+              </a:rPr>
+              <a:t>Learning sequence</a:t>
+            </a:r>
+            <a:endParaRPr lang="en-US" sz="1300" dirty="0"/>
+          </a:p>
+        </p:txBody>
+      </p:sp>
+      <p:sp>
+        <p:nvSpPr>
+          <p:cNvPr id="15" name="Text 13"/>
+          <p:cNvSpPr/>
+          <p:nvPr/>
+        </p:nvSpPr>
+        <p:spPr>
+          <a:xfrm>
+            <a:off x="8092440" y="4187952"/>
+            <a:ext cx="2770632" cy="1033272"/>
+          </a:xfrm>
+          <a:prstGeom prst="rect">
+            <a:avLst/>
+          </a:prstGeom>
+          <a:noFill/>
+          <a:ln/>
+        </p:spPr>
+        <p:txBody>
+          <a:bodyPr wrap="square" lIns="254" tIns="254" rIns="254" bIns="254" rtlCol="0" anchor="t">
             <a:normAutofit/>
           </a:bodyPr>
           <a:lstStyle/>
           <a:p>
-            <a:pPr algn="ctr" indent="0" marL="0">
-              <a:buNone/>
-            </a:pPr>
-            <a:r>
-              <a:rPr lang="en-US" sz="1500" b="1" dirty="0">
-                <a:solidFill>
-                  <a:srgbClr val="FFFFFF"/>
-                </a:solidFill>
-                <a:latin typeface="Aptos" pitchFamily="34" charset="0"/>
-                <a:ea typeface="Aptos" pitchFamily="34" charset="-122"/>
-                <a:cs typeface="Aptos" pitchFamily="34" charset="-120"/>
-              </a:rPr>
-              <a:t>Learn</a:t>
-            </a:r>
-            <a:endParaRPr lang="en-US" sz="1500" dirty="0"/>
-          </a:p>
-        </p:txBody>
-      </p:sp>
-      <p:sp>
-        <p:nvSpPr>
-          <p:cNvPr id="15" name="Shape 13"/>
-          <p:cNvSpPr/>
-          <p:nvPr/>
-        </p:nvSpPr>
-        <p:spPr>
-          <a:xfrm>
-            <a:off x="8924544" y="3730752"/>
-            <a:ext cx="1033272" cy="749808"/>
-          </a:xfrm>
-          <a:prstGeom prst="roundRect">
-            <a:avLst>
-              <a:gd name="adj" fmla="val 14634"/>
-            </a:avLst>
-          </a:prstGeom>
-          <a:solidFill>
-            <a:srgbClr val="2F8A28"/>
-          </a:solidFill>
-          <a:ln w="12700">
-            <a:solidFill>
-              <a:srgbClr val="2F8A28"/>
-            </a:solidFill>
-            <a:prstDash val="solid"/>
-          </a:ln>
-        </p:spPr>
-      </p:sp>
-      <p:sp>
-        <p:nvSpPr>
-          <p:cNvPr id="16" name="Text 14"/>
-          <p:cNvSpPr/>
-          <p:nvPr/>
-        </p:nvSpPr>
-        <p:spPr>
-          <a:xfrm>
-            <a:off x="8997696" y="3922776"/>
-            <a:ext cx="886968" cy="310896"/>
-          </a:xfrm>
-          <a:prstGeom prst="rect">
-            <a:avLst/>
-          </a:prstGeom>
-          <a:noFill/>
-          <a:ln/>
-        </p:spPr>
-        <p:txBody>
-          <a:bodyPr wrap="square" lIns="0" tIns="0" rIns="0" bIns="0" rtlCol="0" anchor="ctr">
-            <a:normAutofit/>
-          </a:bodyPr>
-          <a:lstStyle/>
-          <a:p>
-            <a:pPr algn="ctr" indent="0" marL="0">
-              <a:buNone/>
-            </a:pPr>
-            <a:r>
-              <a:rPr lang="en-US" sz="1500" b="1" dirty="0">
-                <a:solidFill>
-                  <a:srgbClr val="FFFFFF"/>
-                </a:solidFill>
-                <a:latin typeface="Aptos" pitchFamily="34" charset="0"/>
-                <a:ea typeface="Aptos" pitchFamily="34" charset="-122"/>
-                <a:cs typeface="Aptos" pitchFamily="34" charset="-120"/>
-              </a:rPr>
-              <a:t>Apply</a:t>
-            </a:r>
-            <a:endParaRPr lang="en-US" sz="1500" dirty="0"/>
-          </a:p>
-        </p:txBody>
-      </p:sp>
-      <p:sp>
-        <p:nvSpPr>
-          <p:cNvPr id="17" name="Shape 15"/>
-          <p:cNvSpPr/>
-          <p:nvPr/>
-        </p:nvSpPr>
-        <p:spPr>
-          <a:xfrm>
-            <a:off x="10213848" y="3730752"/>
-            <a:ext cx="1033272" cy="749808"/>
-          </a:xfrm>
-          <a:prstGeom prst="roundRect">
-            <a:avLst>
-              <a:gd name="adj" fmla="val 14634"/>
-            </a:avLst>
-          </a:prstGeom>
-          <a:solidFill>
-            <a:srgbClr val="6A4CA3"/>
-          </a:solidFill>
-          <a:ln w="12700">
-            <a:solidFill>
-              <a:srgbClr val="6A4CA3"/>
-            </a:solidFill>
-            <a:prstDash val="solid"/>
-          </a:ln>
-        </p:spPr>
-      </p:sp>
-      <p:sp>
-        <p:nvSpPr>
-          <p:cNvPr id="18" name="Text 16"/>
-          <p:cNvSpPr/>
-          <p:nvPr/>
-        </p:nvSpPr>
-        <p:spPr>
-          <a:xfrm>
-            <a:off x="10287000" y="3922776"/>
-            <a:ext cx="886968" cy="310896"/>
-          </a:xfrm>
-          <a:prstGeom prst="rect">
-            <a:avLst/>
-          </a:prstGeom>
-          <a:noFill/>
-          <a:ln/>
-        </p:spPr>
-        <p:txBody>
-          <a:bodyPr wrap="square" lIns="0" tIns="0" rIns="0" bIns="0" rtlCol="0" anchor="ctr">
-            <a:normAutofit/>
-          </a:bodyPr>
-          <a:lstStyle/>
-          <a:p>
-            <a:pPr algn="ctr" indent="0" marL="0">
-              <a:buNone/>
-            </a:pPr>
-            <a:r>
-              <a:rPr lang="en-US" sz="1500" b="1" dirty="0">
-                <a:solidFill>
-                  <a:srgbClr val="FFFFFF"/>
-                </a:solidFill>
-                <a:latin typeface="Aptos" pitchFamily="34" charset="0"/>
-                <a:ea typeface="Aptos" pitchFamily="34" charset="-122"/>
-                <a:cs typeface="Aptos" pitchFamily="34" charset="-120"/>
-              </a:rPr>
-              <a:t>Document</a:t>
-            </a:r>
-            <a:endParaRPr lang="en-US" sz="1500" dirty="0"/>
+            <a:r>
+              <a:rPr lang="en-US" sz="1380" dirty="0">
+                <a:solidFill>
+                  <a:srgbClr val="17364A"/>
+                </a:solidFill>
+                <a:latin typeface="Aptos" pitchFamily="34" charset="0"/>
+                <a:ea typeface="Aptos" pitchFamily="34" charset="-122"/>
+                <a:cs typeface="Aptos" pitchFamily="34" charset="-120"/>
+              </a:rPr>
+              <a:t>Read the module for shared vocabulary and context.</a:t>
+            </a:r>
+            <a:endParaRPr lang="en-US" sz="1380" dirty="0"/>
+          </a:p>
+          <a:p>
+            <a:r>
+              <a:rPr lang="en-US" sz="1380" dirty="0">
+                <a:solidFill>
+                  <a:srgbClr val="17364A"/>
+                </a:solidFill>
+                <a:latin typeface="Aptos" pitchFamily="34" charset="0"/>
+                <a:ea typeface="Aptos" pitchFamily="34" charset="-122"/>
+                <a:cs typeface="Aptos" pitchFamily="34" charset="-120"/>
+              </a:rPr>
+              <a:t>Complete the practical exercise to apply the concept.</a:t>
+            </a:r>
+            <a:endParaRPr lang="en-US" sz="1380" dirty="0"/>
+          </a:p>
+          <a:p>
+            <a:r>
+              <a:rPr lang="en-US" sz="1380" dirty="0">
+                <a:solidFill>
+                  <a:srgbClr val="17364A"/>
+                </a:solidFill>
+                <a:latin typeface="Aptos" pitchFamily="34" charset="0"/>
+                <a:ea typeface="Aptos" pitchFamily="34" charset="-122"/>
+                <a:cs typeface="Aptos" pitchFamily="34" charset="-120"/>
+              </a:rPr>
+              <a:t>Use the notes and references for deeper review.</a:t>
+            </a:r>
+            <a:endParaRPr lang="en-US" sz="1380" dirty="0"/>
           </a:p>
         </p:txBody>
       </p:sp>
@@ -12167,13 +11049,11 @@
             </a:avLst>
           </a:prstGeom>
           <a:solidFill>
-            <a:srgbClr val="FFFFFF">
-              <a:alpha val="88000"/>
-            </a:srgbClr>
+            <a:srgbClr val="FFFFFF"/>
           </a:solidFill>
           <a:ln w="12700">
             <a:solidFill>
-              <a:srgbClr val="D6E8F2"/>
+              <a:srgbClr val="B9D7E6"/>
             </a:solidFill>
             <a:prstDash val="solid"/>
           </a:ln>
@@ -12181,261 +11061,98 @@
       </p:sp>
       <p:sp>
         <p:nvSpPr>
-          <p:cNvPr id="14" name="Shape 12"/>
-          <p:cNvSpPr/>
-          <p:nvPr/>
-        </p:nvSpPr>
-        <p:spPr>
-          <a:xfrm>
-            <a:off x="8138160" y="3291840"/>
-            <a:ext cx="329184" cy="329184"/>
-          </a:xfrm>
-          <a:prstGeom prst="ellipse">
-            <a:avLst/>
-          </a:prstGeom>
-          <a:solidFill>
-            <a:srgbClr val="0068B7"/>
-          </a:solidFill>
-          <a:ln w="12700">
-            <a:solidFill>
-              <a:srgbClr val="0068B7"/>
-            </a:solidFill>
-            <a:prstDash val="solid"/>
-          </a:ln>
-        </p:spPr>
-      </p:sp>
-      <p:sp>
-        <p:nvSpPr>
-          <p:cNvPr id="15" name="Shape 13"/>
-          <p:cNvSpPr/>
-          <p:nvPr/>
-        </p:nvSpPr>
-        <p:spPr>
-          <a:xfrm>
-            <a:off x="10332720" y="3383280"/>
-            <a:ext cx="329184" cy="329184"/>
-          </a:xfrm>
-          <a:prstGeom prst="ellipse">
-            <a:avLst/>
-          </a:prstGeom>
-          <a:solidFill>
-            <a:srgbClr val="2F8A28"/>
-          </a:solidFill>
-          <a:ln w="12700">
-            <a:solidFill>
-              <a:srgbClr val="2F8A28"/>
-            </a:solidFill>
-            <a:prstDash val="solid"/>
-          </a:ln>
-        </p:spPr>
+          <p:cNvPr id="14" name="Text 12"/>
+          <p:cNvSpPr/>
+          <p:nvPr/>
+        </p:nvSpPr>
+        <p:spPr>
+          <a:xfrm>
+            <a:off x="7799832" y="2935224"/>
+            <a:ext cx="3145536" cy="256032"/>
+          </a:xfrm>
+          <a:prstGeom prst="rect">
+            <a:avLst/>
+          </a:prstGeom>
+          <a:noFill/>
+          <a:ln/>
+        </p:spPr>
+        <p:txBody>
+          <a:bodyPr wrap="square" lIns="0" tIns="0" rIns="0" bIns="0" rtlCol="0" anchor="ctr"/>
+          <a:lstStyle/>
+          <a:p>
+            <a:pPr indent="0" marL="0">
+              <a:buNone/>
+            </a:pPr>
+            <a:r>
+              <a:rPr lang="en-US" sz="1300" b="1" dirty="0">
+                <a:solidFill>
+                  <a:srgbClr val="0068B7"/>
+                </a:solidFill>
+                <a:latin typeface="Aptos" pitchFamily="34" charset="0"/>
+                <a:ea typeface="Aptos" pitchFamily="34" charset="-122"/>
+                <a:cs typeface="Aptos" pitchFamily="34" charset="-120"/>
+              </a:rPr>
+              <a:t>Concept checkpoints</a:t>
+            </a:r>
+            <a:endParaRPr lang="en-US" sz="1300" dirty="0"/>
+          </a:p>
+        </p:txBody>
+      </p:sp>
+      <p:sp>
+        <p:nvSpPr>
+          <p:cNvPr id="15" name="Text 13"/>
+          <p:cNvSpPr/>
+          <p:nvPr/>
+        </p:nvSpPr>
+        <p:spPr>
+          <a:xfrm>
+            <a:off x="7818120" y="3300984"/>
+            <a:ext cx="3090672" cy="877824"/>
+          </a:xfrm>
+          <a:prstGeom prst="rect">
+            <a:avLst/>
+          </a:prstGeom>
+          <a:noFill/>
+          <a:ln/>
+        </p:spPr>
+        <p:txBody>
+          <a:bodyPr wrap="square" lIns="254" tIns="254" rIns="254" bIns="254" rtlCol="0" anchor="t">
+            <a:normAutofit/>
+          </a:bodyPr>
+          <a:lstStyle/>
+          <a:p>
+            <a:r>
+              <a:rPr lang="en-US" sz="1380" dirty="0">
+                <a:solidFill>
+                  <a:srgbClr val="17364A"/>
+                </a:solidFill>
+                <a:latin typeface="Aptos" pitchFamily="34" charset="0"/>
+                <a:ea typeface="Aptos" pitchFamily="34" charset="-122"/>
+                <a:cs typeface="Aptos" pitchFamily="34" charset="-120"/>
+              </a:rPr>
+              <a:t>Approval pathway documentation</a:t>
+            </a:r>
+            <a:endParaRPr lang="en-US" sz="1380" dirty="0"/>
+          </a:p>
+          <a:p>
+            <a:r>
+              <a:rPr lang="en-US" sz="1380" dirty="0">
+                <a:solidFill>
+                  <a:srgbClr val="17364A"/>
+                </a:solidFill>
+                <a:latin typeface="Aptos" pitchFamily="34" charset="0"/>
+                <a:ea typeface="Aptos" pitchFamily="34" charset="-122"/>
+                <a:cs typeface="Aptos" pitchFamily="34" charset="-120"/>
+              </a:rPr>
+              <a:t>Final reviewed message or sample revision</a:t>
+            </a:r>
+            <a:endParaRPr lang="en-US" sz="1380" dirty="0"/>
+          </a:p>
+        </p:txBody>
       </p:sp>
       <p:sp>
         <p:nvSpPr>
           <p:cNvPr id="16" name="Shape 14"/>
-          <p:cNvSpPr/>
-          <p:nvPr/>
-        </p:nvSpPr>
-        <p:spPr>
-          <a:xfrm>
-            <a:off x="9235440" y="3502152"/>
-            <a:ext cx="329184" cy="329184"/>
-          </a:xfrm>
-          <a:prstGeom prst="ellipse">
-            <a:avLst/>
-          </a:prstGeom>
-          <a:solidFill>
-            <a:srgbClr val="D69A2D"/>
-          </a:solidFill>
-          <a:ln w="12700">
-            <a:solidFill>
-              <a:srgbClr val="D69A2D"/>
-            </a:solidFill>
-            <a:prstDash val="solid"/>
-          </a:ln>
-        </p:spPr>
-      </p:sp>
-      <p:sp>
-        <p:nvSpPr>
-          <p:cNvPr id="17" name="Shape 15"/>
-          <p:cNvSpPr/>
-          <p:nvPr/>
-        </p:nvSpPr>
-        <p:spPr>
-          <a:xfrm>
-            <a:off x="9235440" y="3657600"/>
-            <a:ext cx="329184" cy="329184"/>
-          </a:xfrm>
-          <a:prstGeom prst="ellipse">
-            <a:avLst/>
-          </a:prstGeom>
-          <a:solidFill>
-            <a:srgbClr val="6A4CA3"/>
-          </a:solidFill>
-          <a:ln w="12700">
-            <a:solidFill>
-              <a:srgbClr val="6A4CA3"/>
-            </a:solidFill>
-            <a:prstDash val="solid"/>
-          </a:ln>
-        </p:spPr>
-      </p:sp>
-      <p:sp>
-        <p:nvSpPr>
-          <p:cNvPr id="18" name="Shape 16"/>
-          <p:cNvSpPr/>
-          <p:nvPr/>
-        </p:nvSpPr>
-        <p:spPr>
-          <a:xfrm>
-            <a:off x="8302752" y="3456432"/>
-            <a:ext cx="1097280" cy="365760"/>
-          </a:xfrm>
-          <a:prstGeom prst="line">
-            <a:avLst/>
-          </a:prstGeom>
-          <a:noFill/>
-          <a:ln w="19050">
-            <a:solidFill>
-              <a:srgbClr val="8ABBD8"/>
-            </a:solidFill>
-            <a:prstDash val="solid"/>
-          </a:ln>
-        </p:spPr>
-      </p:sp>
-      <p:sp>
-        <p:nvSpPr>
-          <p:cNvPr id="19" name="Shape 17"/>
-          <p:cNvSpPr/>
-          <p:nvPr/>
-        </p:nvSpPr>
-        <p:spPr>
-          <a:xfrm>
-            <a:off x="10497312" y="3547872"/>
-            <a:ext cx="-1097280" cy="274320"/>
-          </a:xfrm>
-          <a:prstGeom prst="line">
-            <a:avLst/>
-          </a:prstGeom>
-          <a:noFill/>
-          <a:ln w="19050">
-            <a:solidFill>
-              <a:srgbClr val="8ABBD8"/>
-            </a:solidFill>
-            <a:prstDash val="solid"/>
-          </a:ln>
-        </p:spPr>
-      </p:sp>
-      <p:sp>
-        <p:nvSpPr>
-          <p:cNvPr id="20" name="Shape 18"/>
-          <p:cNvSpPr/>
-          <p:nvPr/>
-        </p:nvSpPr>
-        <p:spPr>
-          <a:xfrm>
-            <a:off x="9400032" y="3666744"/>
-            <a:ext cx="0" cy="155448"/>
-          </a:xfrm>
-          <a:prstGeom prst="line">
-            <a:avLst/>
-          </a:prstGeom>
-          <a:noFill/>
-          <a:ln w="19050">
-            <a:solidFill>
-              <a:srgbClr val="8ABBD8"/>
-            </a:solidFill>
-            <a:prstDash val="solid"/>
-          </a:ln>
-        </p:spPr>
-      </p:sp>
-      <p:sp>
-        <p:nvSpPr>
-          <p:cNvPr id="21" name="Shape 19"/>
-          <p:cNvSpPr/>
-          <p:nvPr/>
-        </p:nvSpPr>
-        <p:spPr>
-          <a:xfrm>
-            <a:off x="8302752" y="3456432"/>
-            <a:ext cx="1097280" cy="210312"/>
-          </a:xfrm>
-          <a:prstGeom prst="line">
-            <a:avLst/>
-          </a:prstGeom>
-          <a:noFill/>
-          <a:ln w="19050">
-            <a:solidFill>
-              <a:srgbClr val="8ABBD8"/>
-            </a:solidFill>
-            <a:prstDash val="solid"/>
-          </a:ln>
-        </p:spPr>
-      </p:sp>
-      <p:sp>
-        <p:nvSpPr>
-          <p:cNvPr id="22" name="Shape 20"/>
-          <p:cNvSpPr/>
-          <p:nvPr/>
-        </p:nvSpPr>
-        <p:spPr>
-          <a:xfrm>
-            <a:off x="10497312" y="3547872"/>
-            <a:ext cx="-1097280" cy="118872"/>
-          </a:xfrm>
-          <a:prstGeom prst="line">
-            <a:avLst/>
-          </a:prstGeom>
-          <a:noFill/>
-          <a:ln w="19050">
-            <a:solidFill>
-              <a:srgbClr val="8ABBD8"/>
-            </a:solidFill>
-            <a:prstDash val="solid"/>
-          </a:ln>
-        </p:spPr>
-      </p:sp>
-      <p:sp>
-        <p:nvSpPr>
-          <p:cNvPr id="23" name="Text 21"/>
-          <p:cNvSpPr/>
-          <p:nvPr/>
-        </p:nvSpPr>
-        <p:spPr>
-          <a:xfrm>
-            <a:off x="7909560" y="3977640"/>
-            <a:ext cx="2926080" cy="182880"/>
-          </a:xfrm>
-          <a:prstGeom prst="rect">
-            <a:avLst/>
-          </a:prstGeom>
-          <a:noFill/>
-          <a:ln/>
-        </p:spPr>
-        <p:txBody>
-          <a:bodyPr wrap="square" lIns="0" tIns="0" rIns="0" bIns="0" rtlCol="0" anchor="ctr"/>
-          <a:lstStyle/>
-          <a:p>
-            <a:pPr algn="ctr" indent="0" marL="0">
-              <a:buNone/>
-            </a:pPr>
-            <a:r>
-              <a:rPr lang="en-US" sz="1000" dirty="0">
-                <a:solidFill>
-                  <a:srgbClr val="003A63"/>
-                </a:solidFill>
-                <a:latin typeface="Aptos" pitchFamily="34" charset="0"/>
-                <a:ea typeface="Aptos" pitchFamily="34" charset="-122"/>
-                <a:cs typeface="Aptos" pitchFamily="34" charset="-120"/>
-              </a:rPr>
-              <a:t>People and trust</a:t>
-            </a:r>
-            <a:endParaRPr lang="en-US" sz="1000" dirty="0"/>
-          </a:p>
-        </p:txBody>
-      </p:sp>
-      <p:sp>
-        <p:nvSpPr>
-          <p:cNvPr id="24" name="Shape 22"/>
           <p:cNvSpPr/>
           <p:nvPr/>
         </p:nvSpPr>
@@ -12462,7 +11179,7 @@
       </p:sp>
       <p:sp>
         <p:nvSpPr>
-          <p:cNvPr id="25" name="Text 23"/>
+          <p:cNvPr id="17" name="Text 15"/>
           <p:cNvSpPr/>
           <p:nvPr/>
         </p:nvSpPr>
@@ -12501,7 +11218,7 @@
       </p:sp>
       <p:sp>
         <p:nvSpPr>
-          <p:cNvPr id="26" name="Text 24"/>
+          <p:cNvPr id="18" name="Text 16"/>
           <p:cNvSpPr/>
           <p:nvPr/>
         </p:nvSpPr>
@@ -13009,13 +11726,11 @@
             </a:avLst>
           </a:prstGeom>
           <a:solidFill>
-            <a:srgbClr val="FFFFFF">
-              <a:alpha val="88000"/>
-            </a:srgbClr>
+            <a:srgbClr val="FFFFFF"/>
           </a:solidFill>
           <a:ln w="12700">
             <a:solidFill>
-              <a:srgbClr val="D6E8F2"/>
+              <a:srgbClr val="B9D7E6"/>
             </a:solidFill>
             <a:prstDash val="solid"/>
           </a:ln>
@@ -13023,261 +11738,112 @@
       </p:sp>
       <p:sp>
         <p:nvSpPr>
-          <p:cNvPr id="14" name="Shape 12"/>
-          <p:cNvSpPr/>
-          <p:nvPr/>
-        </p:nvSpPr>
-        <p:spPr>
-          <a:xfrm>
-            <a:off x="8138160" y="3291840"/>
-            <a:ext cx="329184" cy="329184"/>
-          </a:xfrm>
-          <a:prstGeom prst="ellipse">
-            <a:avLst/>
-          </a:prstGeom>
-          <a:solidFill>
-            <a:srgbClr val="0068B7"/>
-          </a:solidFill>
-          <a:ln w="12700">
-            <a:solidFill>
-              <a:srgbClr val="0068B7"/>
-            </a:solidFill>
-            <a:prstDash val="solid"/>
-          </a:ln>
-        </p:spPr>
-      </p:sp>
-      <p:sp>
-        <p:nvSpPr>
-          <p:cNvPr id="15" name="Shape 13"/>
-          <p:cNvSpPr/>
-          <p:nvPr/>
-        </p:nvSpPr>
-        <p:spPr>
-          <a:xfrm>
-            <a:off x="10332720" y="3383280"/>
-            <a:ext cx="329184" cy="329184"/>
-          </a:xfrm>
-          <a:prstGeom prst="ellipse">
-            <a:avLst/>
-          </a:prstGeom>
-          <a:solidFill>
-            <a:srgbClr val="2F8A28"/>
-          </a:solidFill>
-          <a:ln w="12700">
-            <a:solidFill>
-              <a:srgbClr val="2F8A28"/>
-            </a:solidFill>
-            <a:prstDash val="solid"/>
-          </a:ln>
-        </p:spPr>
+          <p:cNvPr id="14" name="Text 12"/>
+          <p:cNvSpPr/>
+          <p:nvPr/>
+        </p:nvSpPr>
+        <p:spPr>
+          <a:xfrm>
+            <a:off x="7799832" y="2935224"/>
+            <a:ext cx="3145536" cy="256032"/>
+          </a:xfrm>
+          <a:prstGeom prst="rect">
+            <a:avLst/>
+          </a:prstGeom>
+          <a:noFill/>
+          <a:ln/>
+        </p:spPr>
+        <p:txBody>
+          <a:bodyPr wrap="square" lIns="0" tIns="0" rIns="0" bIns="0" rtlCol="0" anchor="ctr"/>
+          <a:lstStyle/>
+          <a:p>
+            <a:pPr indent="0" marL="0">
+              <a:buNone/>
+            </a:pPr>
+            <a:r>
+              <a:rPr lang="en-US" sz="1300" b="1" dirty="0">
+                <a:solidFill>
+                  <a:srgbClr val="0068B7"/>
+                </a:solidFill>
+                <a:latin typeface="Aptos" pitchFamily="34" charset="0"/>
+                <a:ea typeface="Aptos" pitchFamily="34" charset="-122"/>
+                <a:cs typeface="Aptos" pitchFamily="34" charset="-120"/>
+              </a:rPr>
+              <a:t>Concept checkpoints</a:t>
+            </a:r>
+            <a:endParaRPr lang="en-US" sz="1300" dirty="0"/>
+          </a:p>
+        </p:txBody>
+      </p:sp>
+      <p:sp>
+        <p:nvSpPr>
+          <p:cNvPr id="15" name="Text 13"/>
+          <p:cNvSpPr/>
+          <p:nvPr/>
+        </p:nvSpPr>
+        <p:spPr>
+          <a:xfrm>
+            <a:off x="7818120" y="3300984"/>
+            <a:ext cx="3090672" cy="877824"/>
+          </a:xfrm>
+          <a:prstGeom prst="rect">
+            <a:avLst/>
+          </a:prstGeom>
+          <a:noFill/>
+          <a:ln/>
+        </p:spPr>
+        <p:txBody>
+          <a:bodyPr wrap="square" lIns="254" tIns="254" rIns="254" bIns="254" rtlCol="0" anchor="t">
+            <a:normAutofit/>
+          </a:bodyPr>
+          <a:lstStyle/>
+          <a:p>
+            <a:r>
+              <a:rPr lang="en-US" sz="1380" dirty="0">
+                <a:solidFill>
+                  <a:srgbClr val="17364A"/>
+                </a:solidFill>
+                <a:latin typeface="Aptos" pitchFamily="34" charset="0"/>
+                <a:ea typeface="Aptos" pitchFamily="34" charset="-122"/>
+                <a:cs typeface="Aptos" pitchFamily="34" charset="-120"/>
+              </a:rPr>
+              <a:t>1.</a:t>
+            </a:r>
+            <a:endParaRPr lang="en-US" sz="1380" dirty="0"/>
+          </a:p>
+          <a:p>
+            <a:r>
+              <a:rPr lang="en-US" sz="1380" dirty="0">
+                <a:solidFill>
+                  <a:srgbClr val="17364A"/>
+                </a:solidFill>
+                <a:latin typeface="Aptos" pitchFamily="34" charset="0"/>
+                <a:ea typeface="Aptos" pitchFamily="34" charset="-122"/>
+                <a:cs typeface="Aptos" pitchFamily="34" charset="-120"/>
+              </a:rPr>
+              <a:t>What is an appropriate role for AI in public health communications?</a:t>
+            </a:r>
+            <a:endParaRPr lang="en-US" sz="1380" dirty="0"/>
+          </a:p>
+          <a:p>
+            <a:r>
+              <a:rPr lang="en-US" sz="1380" dirty="0">
+                <a:solidFill>
+                  <a:srgbClr val="17364A"/>
+                </a:solidFill>
+                <a:latin typeface="Aptos" pitchFamily="34" charset="0"/>
+                <a:ea typeface="Aptos" pitchFamily="34" charset="-122"/>
+                <a:cs typeface="Aptos" pitchFamily="34" charset="-120"/>
+              </a:rPr>
+              <a:t>2.</a:t>
+            </a:r>
+            <a:endParaRPr lang="en-US" sz="1380" dirty="0"/>
+          </a:p>
+        </p:txBody>
       </p:sp>
       <p:sp>
         <p:nvSpPr>
           <p:cNvPr id="16" name="Shape 14"/>
-          <p:cNvSpPr/>
-          <p:nvPr/>
-        </p:nvSpPr>
-        <p:spPr>
-          <a:xfrm>
-            <a:off x="9235440" y="3502152"/>
-            <a:ext cx="329184" cy="329184"/>
-          </a:xfrm>
-          <a:prstGeom prst="ellipse">
-            <a:avLst/>
-          </a:prstGeom>
-          <a:solidFill>
-            <a:srgbClr val="D69A2D"/>
-          </a:solidFill>
-          <a:ln w="12700">
-            <a:solidFill>
-              <a:srgbClr val="D69A2D"/>
-            </a:solidFill>
-            <a:prstDash val="solid"/>
-          </a:ln>
-        </p:spPr>
-      </p:sp>
-      <p:sp>
-        <p:nvSpPr>
-          <p:cNvPr id="17" name="Shape 15"/>
-          <p:cNvSpPr/>
-          <p:nvPr/>
-        </p:nvSpPr>
-        <p:spPr>
-          <a:xfrm>
-            <a:off x="9235440" y="3657600"/>
-            <a:ext cx="329184" cy="329184"/>
-          </a:xfrm>
-          <a:prstGeom prst="ellipse">
-            <a:avLst/>
-          </a:prstGeom>
-          <a:solidFill>
-            <a:srgbClr val="6A4CA3"/>
-          </a:solidFill>
-          <a:ln w="12700">
-            <a:solidFill>
-              <a:srgbClr val="6A4CA3"/>
-            </a:solidFill>
-            <a:prstDash val="solid"/>
-          </a:ln>
-        </p:spPr>
-      </p:sp>
-      <p:sp>
-        <p:nvSpPr>
-          <p:cNvPr id="18" name="Shape 16"/>
-          <p:cNvSpPr/>
-          <p:nvPr/>
-        </p:nvSpPr>
-        <p:spPr>
-          <a:xfrm>
-            <a:off x="8302752" y="3456432"/>
-            <a:ext cx="1097280" cy="365760"/>
-          </a:xfrm>
-          <a:prstGeom prst="line">
-            <a:avLst/>
-          </a:prstGeom>
-          <a:noFill/>
-          <a:ln w="19050">
-            <a:solidFill>
-              <a:srgbClr val="8ABBD8"/>
-            </a:solidFill>
-            <a:prstDash val="solid"/>
-          </a:ln>
-        </p:spPr>
-      </p:sp>
-      <p:sp>
-        <p:nvSpPr>
-          <p:cNvPr id="19" name="Shape 17"/>
-          <p:cNvSpPr/>
-          <p:nvPr/>
-        </p:nvSpPr>
-        <p:spPr>
-          <a:xfrm>
-            <a:off x="10497312" y="3547872"/>
-            <a:ext cx="-1097280" cy="274320"/>
-          </a:xfrm>
-          <a:prstGeom prst="line">
-            <a:avLst/>
-          </a:prstGeom>
-          <a:noFill/>
-          <a:ln w="19050">
-            <a:solidFill>
-              <a:srgbClr val="8ABBD8"/>
-            </a:solidFill>
-            <a:prstDash val="solid"/>
-          </a:ln>
-        </p:spPr>
-      </p:sp>
-      <p:sp>
-        <p:nvSpPr>
-          <p:cNvPr id="20" name="Shape 18"/>
-          <p:cNvSpPr/>
-          <p:nvPr/>
-        </p:nvSpPr>
-        <p:spPr>
-          <a:xfrm>
-            <a:off x="9400032" y="3666744"/>
-            <a:ext cx="0" cy="155448"/>
-          </a:xfrm>
-          <a:prstGeom prst="line">
-            <a:avLst/>
-          </a:prstGeom>
-          <a:noFill/>
-          <a:ln w="19050">
-            <a:solidFill>
-              <a:srgbClr val="8ABBD8"/>
-            </a:solidFill>
-            <a:prstDash val="solid"/>
-          </a:ln>
-        </p:spPr>
-      </p:sp>
-      <p:sp>
-        <p:nvSpPr>
-          <p:cNvPr id="21" name="Shape 19"/>
-          <p:cNvSpPr/>
-          <p:nvPr/>
-        </p:nvSpPr>
-        <p:spPr>
-          <a:xfrm>
-            <a:off x="8302752" y="3456432"/>
-            <a:ext cx="1097280" cy="210312"/>
-          </a:xfrm>
-          <a:prstGeom prst="line">
-            <a:avLst/>
-          </a:prstGeom>
-          <a:noFill/>
-          <a:ln w="19050">
-            <a:solidFill>
-              <a:srgbClr val="8ABBD8"/>
-            </a:solidFill>
-            <a:prstDash val="solid"/>
-          </a:ln>
-        </p:spPr>
-      </p:sp>
-      <p:sp>
-        <p:nvSpPr>
-          <p:cNvPr id="22" name="Shape 20"/>
-          <p:cNvSpPr/>
-          <p:nvPr/>
-        </p:nvSpPr>
-        <p:spPr>
-          <a:xfrm>
-            <a:off x="10497312" y="3547872"/>
-            <a:ext cx="-1097280" cy="118872"/>
-          </a:xfrm>
-          <a:prstGeom prst="line">
-            <a:avLst/>
-          </a:prstGeom>
-          <a:noFill/>
-          <a:ln w="19050">
-            <a:solidFill>
-              <a:srgbClr val="8ABBD8"/>
-            </a:solidFill>
-            <a:prstDash val="solid"/>
-          </a:ln>
-        </p:spPr>
-      </p:sp>
-      <p:sp>
-        <p:nvSpPr>
-          <p:cNvPr id="23" name="Text 21"/>
-          <p:cNvSpPr/>
-          <p:nvPr/>
-        </p:nvSpPr>
-        <p:spPr>
-          <a:xfrm>
-            <a:off x="7909560" y="3977640"/>
-            <a:ext cx="2926080" cy="182880"/>
-          </a:xfrm>
-          <a:prstGeom prst="rect">
-            <a:avLst/>
-          </a:prstGeom>
-          <a:noFill/>
-          <a:ln/>
-        </p:spPr>
-        <p:txBody>
-          <a:bodyPr wrap="square" lIns="0" tIns="0" rIns="0" bIns="0" rtlCol="0" anchor="ctr"/>
-          <a:lstStyle/>
-          <a:p>
-            <a:pPr algn="ctr" indent="0" marL="0">
-              <a:buNone/>
-            </a:pPr>
-            <a:r>
-              <a:rPr lang="en-US" sz="1000" dirty="0">
-                <a:solidFill>
-                  <a:srgbClr val="003A63"/>
-                </a:solidFill>
-                <a:latin typeface="Aptos" pitchFamily="34" charset="0"/>
-                <a:ea typeface="Aptos" pitchFamily="34" charset="-122"/>
-                <a:cs typeface="Aptos" pitchFamily="34" charset="-120"/>
-              </a:rPr>
-              <a:t>People and trust</a:t>
-            </a:r>
-            <a:endParaRPr lang="en-US" sz="1000" dirty="0"/>
-          </a:p>
-        </p:txBody>
-      </p:sp>
-      <p:sp>
-        <p:nvSpPr>
-          <p:cNvPr id="24" name="Shape 22"/>
           <p:cNvSpPr/>
           <p:nvPr/>
         </p:nvSpPr>
@@ -13304,7 +11870,7 @@
       </p:sp>
       <p:sp>
         <p:nvSpPr>
-          <p:cNvPr id="25" name="Text 23"/>
+          <p:cNvPr id="17" name="Text 15"/>
           <p:cNvSpPr/>
           <p:nvPr/>
         </p:nvSpPr>
@@ -13343,7 +11909,7 @@
       </p:sp>
       <p:sp>
         <p:nvSpPr>
-          <p:cNvPr id="26" name="Text 24"/>
+          <p:cNvPr id="18" name="Text 16"/>
           <p:cNvSpPr/>
           <p:nvPr/>
         </p:nvSpPr>
@@ -13851,13 +12417,11 @@
             </a:avLst>
           </a:prstGeom>
           <a:solidFill>
-            <a:srgbClr val="FFFFFF">
-              <a:alpha val="88000"/>
-            </a:srgbClr>
+            <a:srgbClr val="FFFFFF"/>
           </a:solidFill>
           <a:ln w="12700">
             <a:solidFill>
-              <a:srgbClr val="D6E8F2"/>
+              <a:srgbClr val="B9D7E6"/>
             </a:solidFill>
             <a:prstDash val="solid"/>
           </a:ln>
@@ -13865,261 +12429,112 @@
       </p:sp>
       <p:sp>
         <p:nvSpPr>
-          <p:cNvPr id="14" name="Shape 12"/>
-          <p:cNvSpPr/>
-          <p:nvPr/>
-        </p:nvSpPr>
-        <p:spPr>
-          <a:xfrm>
-            <a:off x="8138160" y="3291840"/>
-            <a:ext cx="329184" cy="329184"/>
-          </a:xfrm>
-          <a:prstGeom prst="ellipse">
-            <a:avLst/>
-          </a:prstGeom>
-          <a:solidFill>
-            <a:srgbClr val="0068B7"/>
-          </a:solidFill>
-          <a:ln w="12700">
-            <a:solidFill>
-              <a:srgbClr val="0068B7"/>
-            </a:solidFill>
-            <a:prstDash val="solid"/>
-          </a:ln>
-        </p:spPr>
-      </p:sp>
-      <p:sp>
-        <p:nvSpPr>
-          <p:cNvPr id="15" name="Shape 13"/>
-          <p:cNvSpPr/>
-          <p:nvPr/>
-        </p:nvSpPr>
-        <p:spPr>
-          <a:xfrm>
-            <a:off x="10332720" y="3383280"/>
-            <a:ext cx="329184" cy="329184"/>
-          </a:xfrm>
-          <a:prstGeom prst="ellipse">
-            <a:avLst/>
-          </a:prstGeom>
-          <a:solidFill>
-            <a:srgbClr val="2F8A28"/>
-          </a:solidFill>
-          <a:ln w="12700">
-            <a:solidFill>
-              <a:srgbClr val="2F8A28"/>
-            </a:solidFill>
-            <a:prstDash val="solid"/>
-          </a:ln>
-        </p:spPr>
+          <p:cNvPr id="14" name="Text 12"/>
+          <p:cNvSpPr/>
+          <p:nvPr/>
+        </p:nvSpPr>
+        <p:spPr>
+          <a:xfrm>
+            <a:off x="7799832" y="2935224"/>
+            <a:ext cx="3145536" cy="256032"/>
+          </a:xfrm>
+          <a:prstGeom prst="rect">
+            <a:avLst/>
+          </a:prstGeom>
+          <a:noFill/>
+          <a:ln/>
+        </p:spPr>
+        <p:txBody>
+          <a:bodyPr wrap="square" lIns="0" tIns="0" rIns="0" bIns="0" rtlCol="0" anchor="ctr"/>
+          <a:lstStyle/>
+          <a:p>
+            <a:pPr indent="0" marL="0">
+              <a:buNone/>
+            </a:pPr>
+            <a:r>
+              <a:rPr lang="en-US" sz="1300" b="1" dirty="0">
+                <a:solidFill>
+                  <a:srgbClr val="0068B7"/>
+                </a:solidFill>
+                <a:latin typeface="Aptos" pitchFamily="34" charset="0"/>
+                <a:ea typeface="Aptos" pitchFamily="34" charset="-122"/>
+                <a:cs typeface="Aptos" pitchFamily="34" charset="-120"/>
+              </a:rPr>
+              <a:t>Concept checkpoints</a:t>
+            </a:r>
+            <a:endParaRPr lang="en-US" sz="1300" dirty="0"/>
+          </a:p>
+        </p:txBody>
+      </p:sp>
+      <p:sp>
+        <p:nvSpPr>
+          <p:cNvPr id="15" name="Text 13"/>
+          <p:cNvSpPr/>
+          <p:nvPr/>
+        </p:nvSpPr>
+        <p:spPr>
+          <a:xfrm>
+            <a:off x="7818120" y="3300984"/>
+            <a:ext cx="3090672" cy="877824"/>
+          </a:xfrm>
+          <a:prstGeom prst="rect">
+            <a:avLst/>
+          </a:prstGeom>
+          <a:noFill/>
+          <a:ln/>
+        </p:spPr>
+        <p:txBody>
+          <a:bodyPr wrap="square" lIns="254" tIns="254" rIns="254" bIns="254" rtlCol="0" anchor="t">
+            <a:normAutofit/>
+          </a:bodyPr>
+          <a:lstStyle/>
+          <a:p>
+            <a:r>
+              <a:rPr lang="en-US" sz="1380" dirty="0">
+                <a:solidFill>
+                  <a:srgbClr val="17364A"/>
+                </a:solidFill>
+                <a:latin typeface="Aptos" pitchFamily="34" charset="0"/>
+                <a:ea typeface="Aptos" pitchFamily="34" charset="-122"/>
+                <a:cs typeface="Aptos" pitchFamily="34" charset="-120"/>
+              </a:rPr>
+              <a:t>NIST Artificial Intelligence Risk Management Framework:.</a:t>
+            </a:r>
+            <a:endParaRPr lang="en-US" sz="1380" dirty="0"/>
+          </a:p>
+          <a:p>
+            <a:r>
+              <a:rPr lang="en-US" sz="1380" dirty="0">
+                <a:solidFill>
+                  <a:srgbClr val="17364A"/>
+                </a:solidFill>
+                <a:latin typeface="Aptos" pitchFamily="34" charset="0"/>
+                <a:ea typeface="Aptos" pitchFamily="34" charset="-122"/>
+                <a:cs typeface="Aptos" pitchFamily="34" charset="-120"/>
+              </a:rPr>
+              <a:t>OWASP guidance for LLM application security</a:t>
+            </a:r>
+            <a:endParaRPr lang="en-US" sz="1380" dirty="0"/>
+          </a:p>
+          <a:p>
+            <a:r>
+              <a:rPr lang="en-US" sz="1380" dirty="0">
+                <a:solidFill>
+                  <a:srgbClr val="17364A"/>
+                </a:solidFill>
+                <a:latin typeface="Aptos" pitchFamily="34" charset="0"/>
+                <a:ea typeface="Aptos" pitchFamily="34" charset="-122"/>
+                <a:cs typeface="Aptos" pitchFamily="34" charset="-120"/>
+              </a:rPr>
+              <a:t>Agency policies for privacy, cybersecurity, records, procurement, accessibility, and.</a:t>
+            </a:r>
+            <a:endParaRPr lang="en-US" sz="1380" dirty="0"/>
+          </a:p>
+        </p:txBody>
       </p:sp>
       <p:sp>
         <p:nvSpPr>
           <p:cNvPr id="16" name="Shape 14"/>
-          <p:cNvSpPr/>
-          <p:nvPr/>
-        </p:nvSpPr>
-        <p:spPr>
-          <a:xfrm>
-            <a:off x="9235440" y="3502152"/>
-            <a:ext cx="329184" cy="329184"/>
-          </a:xfrm>
-          <a:prstGeom prst="ellipse">
-            <a:avLst/>
-          </a:prstGeom>
-          <a:solidFill>
-            <a:srgbClr val="D69A2D"/>
-          </a:solidFill>
-          <a:ln w="12700">
-            <a:solidFill>
-              <a:srgbClr val="D69A2D"/>
-            </a:solidFill>
-            <a:prstDash val="solid"/>
-          </a:ln>
-        </p:spPr>
-      </p:sp>
-      <p:sp>
-        <p:nvSpPr>
-          <p:cNvPr id="17" name="Shape 15"/>
-          <p:cNvSpPr/>
-          <p:nvPr/>
-        </p:nvSpPr>
-        <p:spPr>
-          <a:xfrm>
-            <a:off x="9235440" y="3657600"/>
-            <a:ext cx="329184" cy="329184"/>
-          </a:xfrm>
-          <a:prstGeom prst="ellipse">
-            <a:avLst/>
-          </a:prstGeom>
-          <a:solidFill>
-            <a:srgbClr val="6A4CA3"/>
-          </a:solidFill>
-          <a:ln w="12700">
-            <a:solidFill>
-              <a:srgbClr val="6A4CA3"/>
-            </a:solidFill>
-            <a:prstDash val="solid"/>
-          </a:ln>
-        </p:spPr>
-      </p:sp>
-      <p:sp>
-        <p:nvSpPr>
-          <p:cNvPr id="18" name="Shape 16"/>
-          <p:cNvSpPr/>
-          <p:nvPr/>
-        </p:nvSpPr>
-        <p:spPr>
-          <a:xfrm>
-            <a:off x="8302752" y="3456432"/>
-            <a:ext cx="1097280" cy="365760"/>
-          </a:xfrm>
-          <a:prstGeom prst="line">
-            <a:avLst/>
-          </a:prstGeom>
-          <a:noFill/>
-          <a:ln w="19050">
-            <a:solidFill>
-              <a:srgbClr val="8ABBD8"/>
-            </a:solidFill>
-            <a:prstDash val="solid"/>
-          </a:ln>
-        </p:spPr>
-      </p:sp>
-      <p:sp>
-        <p:nvSpPr>
-          <p:cNvPr id="19" name="Shape 17"/>
-          <p:cNvSpPr/>
-          <p:nvPr/>
-        </p:nvSpPr>
-        <p:spPr>
-          <a:xfrm>
-            <a:off x="10497312" y="3547872"/>
-            <a:ext cx="-1097280" cy="274320"/>
-          </a:xfrm>
-          <a:prstGeom prst="line">
-            <a:avLst/>
-          </a:prstGeom>
-          <a:noFill/>
-          <a:ln w="19050">
-            <a:solidFill>
-              <a:srgbClr val="8ABBD8"/>
-            </a:solidFill>
-            <a:prstDash val="solid"/>
-          </a:ln>
-        </p:spPr>
-      </p:sp>
-      <p:sp>
-        <p:nvSpPr>
-          <p:cNvPr id="20" name="Shape 18"/>
-          <p:cNvSpPr/>
-          <p:nvPr/>
-        </p:nvSpPr>
-        <p:spPr>
-          <a:xfrm>
-            <a:off x="9400032" y="3666744"/>
-            <a:ext cx="0" cy="155448"/>
-          </a:xfrm>
-          <a:prstGeom prst="line">
-            <a:avLst/>
-          </a:prstGeom>
-          <a:noFill/>
-          <a:ln w="19050">
-            <a:solidFill>
-              <a:srgbClr val="8ABBD8"/>
-            </a:solidFill>
-            <a:prstDash val="solid"/>
-          </a:ln>
-        </p:spPr>
-      </p:sp>
-      <p:sp>
-        <p:nvSpPr>
-          <p:cNvPr id="21" name="Shape 19"/>
-          <p:cNvSpPr/>
-          <p:nvPr/>
-        </p:nvSpPr>
-        <p:spPr>
-          <a:xfrm>
-            <a:off x="8302752" y="3456432"/>
-            <a:ext cx="1097280" cy="210312"/>
-          </a:xfrm>
-          <a:prstGeom prst="line">
-            <a:avLst/>
-          </a:prstGeom>
-          <a:noFill/>
-          <a:ln w="19050">
-            <a:solidFill>
-              <a:srgbClr val="8ABBD8"/>
-            </a:solidFill>
-            <a:prstDash val="solid"/>
-          </a:ln>
-        </p:spPr>
-      </p:sp>
-      <p:sp>
-        <p:nvSpPr>
-          <p:cNvPr id="22" name="Shape 20"/>
-          <p:cNvSpPr/>
-          <p:nvPr/>
-        </p:nvSpPr>
-        <p:spPr>
-          <a:xfrm>
-            <a:off x="10497312" y="3547872"/>
-            <a:ext cx="-1097280" cy="118872"/>
-          </a:xfrm>
-          <a:prstGeom prst="line">
-            <a:avLst/>
-          </a:prstGeom>
-          <a:noFill/>
-          <a:ln w="19050">
-            <a:solidFill>
-              <a:srgbClr val="8ABBD8"/>
-            </a:solidFill>
-            <a:prstDash val="solid"/>
-          </a:ln>
-        </p:spPr>
-      </p:sp>
-      <p:sp>
-        <p:nvSpPr>
-          <p:cNvPr id="23" name="Text 21"/>
-          <p:cNvSpPr/>
-          <p:nvPr/>
-        </p:nvSpPr>
-        <p:spPr>
-          <a:xfrm>
-            <a:off x="7909560" y="3977640"/>
-            <a:ext cx="2926080" cy="182880"/>
-          </a:xfrm>
-          <a:prstGeom prst="rect">
-            <a:avLst/>
-          </a:prstGeom>
-          <a:noFill/>
-          <a:ln/>
-        </p:spPr>
-        <p:txBody>
-          <a:bodyPr wrap="square" lIns="0" tIns="0" rIns="0" bIns="0" rtlCol="0" anchor="ctr"/>
-          <a:lstStyle/>
-          <a:p>
-            <a:pPr algn="ctr" indent="0" marL="0">
-              <a:buNone/>
-            </a:pPr>
-            <a:r>
-              <a:rPr lang="en-US" sz="1000" dirty="0">
-                <a:solidFill>
-                  <a:srgbClr val="003A63"/>
-                </a:solidFill>
-                <a:latin typeface="Aptos" pitchFamily="34" charset="0"/>
-                <a:ea typeface="Aptos" pitchFamily="34" charset="-122"/>
-                <a:cs typeface="Aptos" pitchFamily="34" charset="-120"/>
-              </a:rPr>
-              <a:t>People and trust</a:t>
-            </a:r>
-            <a:endParaRPr lang="en-US" sz="1000" dirty="0"/>
-          </a:p>
-        </p:txBody>
-      </p:sp>
-      <p:sp>
-        <p:nvSpPr>
-          <p:cNvPr id="24" name="Shape 22"/>
           <p:cNvSpPr/>
           <p:nvPr/>
         </p:nvSpPr>
@@ -14146,7 +12561,7 @@
       </p:sp>
       <p:sp>
         <p:nvSpPr>
-          <p:cNvPr id="25" name="Text 23"/>
+          <p:cNvPr id="17" name="Text 15"/>
           <p:cNvSpPr/>
           <p:nvPr/>
         </p:nvSpPr>
@@ -14185,7 +12600,7 @@
       </p:sp>
       <p:sp>
         <p:nvSpPr>
-          <p:cNvPr id="26" name="Text 24"/>
+          <p:cNvPr id="18" name="Text 16"/>
           <p:cNvSpPr/>
           <p:nvPr/>
         </p:nvSpPr>
@@ -14665,13 +13080,11 @@
             </a:avLst>
           </a:prstGeom>
           <a:solidFill>
-            <a:srgbClr val="FFFFFF">
-              <a:alpha val="88000"/>
-            </a:srgbClr>
+            <a:srgbClr val="FFFFFF"/>
           </a:solidFill>
           <a:ln w="12700">
             <a:solidFill>
-              <a:srgbClr val="D6E8F2"/>
+              <a:srgbClr val="B9D7E6"/>
             </a:solidFill>
             <a:prstDash val="solid"/>
           </a:ln>
@@ -14679,261 +13092,84 @@
       </p:sp>
       <p:sp>
         <p:nvSpPr>
-          <p:cNvPr id="14" name="Shape 12"/>
-          <p:cNvSpPr/>
-          <p:nvPr/>
-        </p:nvSpPr>
-        <p:spPr>
-          <a:xfrm>
-            <a:off x="8138160" y="3291840"/>
-            <a:ext cx="329184" cy="329184"/>
-          </a:xfrm>
-          <a:prstGeom prst="ellipse">
-            <a:avLst/>
-          </a:prstGeom>
-          <a:solidFill>
-            <a:srgbClr val="0068B7"/>
-          </a:solidFill>
-          <a:ln w="12700">
-            <a:solidFill>
-              <a:srgbClr val="0068B7"/>
-            </a:solidFill>
-            <a:prstDash val="solid"/>
-          </a:ln>
-        </p:spPr>
-      </p:sp>
-      <p:sp>
-        <p:nvSpPr>
-          <p:cNvPr id="15" name="Shape 13"/>
-          <p:cNvSpPr/>
-          <p:nvPr/>
-        </p:nvSpPr>
-        <p:spPr>
-          <a:xfrm>
-            <a:off x="10332720" y="3383280"/>
-            <a:ext cx="329184" cy="329184"/>
-          </a:xfrm>
-          <a:prstGeom prst="ellipse">
-            <a:avLst/>
-          </a:prstGeom>
-          <a:solidFill>
-            <a:srgbClr val="2F8A28"/>
-          </a:solidFill>
-          <a:ln w="12700">
-            <a:solidFill>
-              <a:srgbClr val="2F8A28"/>
-            </a:solidFill>
-            <a:prstDash val="solid"/>
-          </a:ln>
-        </p:spPr>
+          <p:cNvPr id="14" name="Text 12"/>
+          <p:cNvSpPr/>
+          <p:nvPr/>
+        </p:nvSpPr>
+        <p:spPr>
+          <a:xfrm>
+            <a:off x="7799832" y="2935224"/>
+            <a:ext cx="3145536" cy="256032"/>
+          </a:xfrm>
+          <a:prstGeom prst="rect">
+            <a:avLst/>
+          </a:prstGeom>
+          <a:noFill/>
+          <a:ln/>
+        </p:spPr>
+        <p:txBody>
+          <a:bodyPr wrap="square" lIns="0" tIns="0" rIns="0" bIns="0" rtlCol="0" anchor="ctr"/>
+          <a:lstStyle/>
+          <a:p>
+            <a:pPr indent="0" marL="0">
+              <a:buNone/>
+            </a:pPr>
+            <a:r>
+              <a:rPr lang="en-US" sz="1300" b="1" dirty="0">
+                <a:solidFill>
+                  <a:srgbClr val="0068B7"/>
+                </a:solidFill>
+                <a:latin typeface="Aptos" pitchFamily="34" charset="0"/>
+                <a:ea typeface="Aptos" pitchFamily="34" charset="-122"/>
+                <a:cs typeface="Aptos" pitchFamily="34" charset="-120"/>
+              </a:rPr>
+              <a:t>Concept checkpoints</a:t>
+            </a:r>
+            <a:endParaRPr lang="en-US" sz="1300" dirty="0"/>
+          </a:p>
+        </p:txBody>
+      </p:sp>
+      <p:sp>
+        <p:nvSpPr>
+          <p:cNvPr id="15" name="Text 13"/>
+          <p:cNvSpPr/>
+          <p:nvPr/>
+        </p:nvSpPr>
+        <p:spPr>
+          <a:xfrm>
+            <a:off x="7818120" y="3300984"/>
+            <a:ext cx="3090672" cy="877824"/>
+          </a:xfrm>
+          <a:prstGeom prst="rect">
+            <a:avLst/>
+          </a:prstGeom>
+          <a:noFill/>
+          <a:ln/>
+        </p:spPr>
+        <p:txBody>
+          <a:bodyPr wrap="square" lIns="254" tIns="254" rIns="254" bIns="254" rtlCol="0" anchor="t">
+            <a:normAutofit/>
+          </a:bodyPr>
+          <a:lstStyle/>
+          <a:p>
+            <a:r>
+              <a:rPr lang="en-US" sz="1380" dirty="0">
+                <a:solidFill>
+                  <a:srgbClr val="17364A"/>
+                </a:solidFill>
+                <a:latin typeface="Aptos" pitchFamily="34" charset="0"/>
+                <a:ea typeface="Aptos" pitchFamily="34" charset="-122"/>
+                <a:cs typeface="Aptos" pitchFamily="34" charset="-120"/>
+              </a:rPr>
+              <a:t>Relevant public health program SOPs, data governance documentation, and implementation plans</a:t>
+            </a:r>
+            <a:endParaRPr lang="en-US" sz="1380" dirty="0"/>
+          </a:p>
+        </p:txBody>
       </p:sp>
       <p:sp>
         <p:nvSpPr>
           <p:cNvPr id="16" name="Shape 14"/>
-          <p:cNvSpPr/>
-          <p:nvPr/>
-        </p:nvSpPr>
-        <p:spPr>
-          <a:xfrm>
-            <a:off x="9235440" y="3502152"/>
-            <a:ext cx="329184" cy="329184"/>
-          </a:xfrm>
-          <a:prstGeom prst="ellipse">
-            <a:avLst/>
-          </a:prstGeom>
-          <a:solidFill>
-            <a:srgbClr val="D69A2D"/>
-          </a:solidFill>
-          <a:ln w="12700">
-            <a:solidFill>
-              <a:srgbClr val="D69A2D"/>
-            </a:solidFill>
-            <a:prstDash val="solid"/>
-          </a:ln>
-        </p:spPr>
-      </p:sp>
-      <p:sp>
-        <p:nvSpPr>
-          <p:cNvPr id="17" name="Shape 15"/>
-          <p:cNvSpPr/>
-          <p:nvPr/>
-        </p:nvSpPr>
-        <p:spPr>
-          <a:xfrm>
-            <a:off x="9235440" y="3657600"/>
-            <a:ext cx="329184" cy="329184"/>
-          </a:xfrm>
-          <a:prstGeom prst="ellipse">
-            <a:avLst/>
-          </a:prstGeom>
-          <a:solidFill>
-            <a:srgbClr val="6A4CA3"/>
-          </a:solidFill>
-          <a:ln w="12700">
-            <a:solidFill>
-              <a:srgbClr val="6A4CA3"/>
-            </a:solidFill>
-            <a:prstDash val="solid"/>
-          </a:ln>
-        </p:spPr>
-      </p:sp>
-      <p:sp>
-        <p:nvSpPr>
-          <p:cNvPr id="18" name="Shape 16"/>
-          <p:cNvSpPr/>
-          <p:nvPr/>
-        </p:nvSpPr>
-        <p:spPr>
-          <a:xfrm>
-            <a:off x="8302752" y="3456432"/>
-            <a:ext cx="1097280" cy="365760"/>
-          </a:xfrm>
-          <a:prstGeom prst="line">
-            <a:avLst/>
-          </a:prstGeom>
-          <a:noFill/>
-          <a:ln w="19050">
-            <a:solidFill>
-              <a:srgbClr val="8ABBD8"/>
-            </a:solidFill>
-            <a:prstDash val="solid"/>
-          </a:ln>
-        </p:spPr>
-      </p:sp>
-      <p:sp>
-        <p:nvSpPr>
-          <p:cNvPr id="19" name="Shape 17"/>
-          <p:cNvSpPr/>
-          <p:nvPr/>
-        </p:nvSpPr>
-        <p:spPr>
-          <a:xfrm>
-            <a:off x="10497312" y="3547872"/>
-            <a:ext cx="-1097280" cy="274320"/>
-          </a:xfrm>
-          <a:prstGeom prst="line">
-            <a:avLst/>
-          </a:prstGeom>
-          <a:noFill/>
-          <a:ln w="19050">
-            <a:solidFill>
-              <a:srgbClr val="8ABBD8"/>
-            </a:solidFill>
-            <a:prstDash val="solid"/>
-          </a:ln>
-        </p:spPr>
-      </p:sp>
-      <p:sp>
-        <p:nvSpPr>
-          <p:cNvPr id="20" name="Shape 18"/>
-          <p:cNvSpPr/>
-          <p:nvPr/>
-        </p:nvSpPr>
-        <p:spPr>
-          <a:xfrm>
-            <a:off x="9400032" y="3666744"/>
-            <a:ext cx="0" cy="155448"/>
-          </a:xfrm>
-          <a:prstGeom prst="line">
-            <a:avLst/>
-          </a:prstGeom>
-          <a:noFill/>
-          <a:ln w="19050">
-            <a:solidFill>
-              <a:srgbClr val="8ABBD8"/>
-            </a:solidFill>
-            <a:prstDash val="solid"/>
-          </a:ln>
-        </p:spPr>
-      </p:sp>
-      <p:sp>
-        <p:nvSpPr>
-          <p:cNvPr id="21" name="Shape 19"/>
-          <p:cNvSpPr/>
-          <p:nvPr/>
-        </p:nvSpPr>
-        <p:spPr>
-          <a:xfrm>
-            <a:off x="8302752" y="3456432"/>
-            <a:ext cx="1097280" cy="210312"/>
-          </a:xfrm>
-          <a:prstGeom prst="line">
-            <a:avLst/>
-          </a:prstGeom>
-          <a:noFill/>
-          <a:ln w="19050">
-            <a:solidFill>
-              <a:srgbClr val="8ABBD8"/>
-            </a:solidFill>
-            <a:prstDash val="solid"/>
-          </a:ln>
-        </p:spPr>
-      </p:sp>
-      <p:sp>
-        <p:nvSpPr>
-          <p:cNvPr id="22" name="Shape 20"/>
-          <p:cNvSpPr/>
-          <p:nvPr/>
-        </p:nvSpPr>
-        <p:spPr>
-          <a:xfrm>
-            <a:off x="10497312" y="3547872"/>
-            <a:ext cx="-1097280" cy="118872"/>
-          </a:xfrm>
-          <a:prstGeom prst="line">
-            <a:avLst/>
-          </a:prstGeom>
-          <a:noFill/>
-          <a:ln w="19050">
-            <a:solidFill>
-              <a:srgbClr val="8ABBD8"/>
-            </a:solidFill>
-            <a:prstDash val="solid"/>
-          </a:ln>
-        </p:spPr>
-      </p:sp>
-      <p:sp>
-        <p:nvSpPr>
-          <p:cNvPr id="23" name="Text 21"/>
-          <p:cNvSpPr/>
-          <p:nvPr/>
-        </p:nvSpPr>
-        <p:spPr>
-          <a:xfrm>
-            <a:off x="7909560" y="3977640"/>
-            <a:ext cx="2926080" cy="182880"/>
-          </a:xfrm>
-          <a:prstGeom prst="rect">
-            <a:avLst/>
-          </a:prstGeom>
-          <a:noFill/>
-          <a:ln/>
-        </p:spPr>
-        <p:txBody>
-          <a:bodyPr wrap="square" lIns="0" tIns="0" rIns="0" bIns="0" rtlCol="0" anchor="ctr"/>
-          <a:lstStyle/>
-          <a:p>
-            <a:pPr algn="ctr" indent="0" marL="0">
-              <a:buNone/>
-            </a:pPr>
-            <a:r>
-              <a:rPr lang="en-US" sz="1000" dirty="0">
-                <a:solidFill>
-                  <a:srgbClr val="003A63"/>
-                </a:solidFill>
-                <a:latin typeface="Aptos" pitchFamily="34" charset="0"/>
-                <a:ea typeface="Aptos" pitchFamily="34" charset="-122"/>
-                <a:cs typeface="Aptos" pitchFamily="34" charset="-120"/>
-              </a:rPr>
-              <a:t>People and trust</a:t>
-            </a:r>
-            <a:endParaRPr lang="en-US" sz="1000" dirty="0"/>
-          </a:p>
-        </p:txBody>
-      </p:sp>
-      <p:sp>
-        <p:nvSpPr>
-          <p:cNvPr id="24" name="Shape 22"/>
           <p:cNvSpPr/>
           <p:nvPr/>
         </p:nvSpPr>
@@ -14960,7 +13196,7 @@
       </p:sp>
       <p:sp>
         <p:nvSpPr>
-          <p:cNvPr id="25" name="Text 23"/>
+          <p:cNvPr id="17" name="Text 15"/>
           <p:cNvSpPr/>
           <p:nvPr/>
         </p:nvSpPr>
@@ -14999,7 +13235,7 @@
       </p:sp>
       <p:sp>
         <p:nvSpPr>
-          <p:cNvPr id="26" name="Text 24"/>
+          <p:cNvPr id="18" name="Text 16"/>
           <p:cNvSpPr/>
           <p:nvPr/>
         </p:nvSpPr>
@@ -15512,20 +13748,20 @@
         </p:nvSpPr>
         <p:spPr>
           <a:xfrm>
-            <a:off x="7818120" y="3977640"/>
-            <a:ext cx="972312" cy="749808"/>
+            <a:off x="8046720" y="3794760"/>
+            <a:ext cx="3063240" cy="1600200"/>
           </a:xfrm>
           <a:prstGeom prst="roundRect">
             <a:avLst>
-              <a:gd name="adj" fmla="val 14634"/>
+              <a:gd name="adj" fmla="val 6857"/>
             </a:avLst>
           </a:prstGeom>
           <a:solidFill>
-            <a:srgbClr val="0068B7"/>
+            <a:srgbClr val="FFFFFF"/>
           </a:solidFill>
           <a:ln w="12700">
             <a:solidFill>
-              <a:srgbClr val="0068B7"/>
+              <a:srgbClr val="B9D7E6"/>
             </a:solidFill>
             <a:prstDash val="solid"/>
           </a:ln>
@@ -15539,172 +13775,100 @@
         </p:nvSpPr>
         <p:spPr>
           <a:xfrm>
-            <a:off x="7891272" y="4169664"/>
-            <a:ext cx="826008" cy="310896"/>
-          </a:xfrm>
-          <a:prstGeom prst="rect">
-            <a:avLst/>
-          </a:prstGeom>
-          <a:noFill/>
-          <a:ln/>
-        </p:spPr>
-        <p:txBody>
-          <a:bodyPr wrap="square" lIns="0" tIns="0" rIns="0" bIns="0" rtlCol="0" anchor="ctr">
+            <a:off x="8211312" y="3941064"/>
+            <a:ext cx="2734056" cy="256032"/>
+          </a:xfrm>
+          <a:prstGeom prst="rect">
+            <a:avLst/>
+          </a:prstGeom>
+          <a:noFill/>
+          <a:ln/>
+        </p:spPr>
+        <p:txBody>
+          <a:bodyPr wrap="square" lIns="0" tIns="0" rIns="0" bIns="0" rtlCol="0" anchor="ctr"/>
+          <a:lstStyle/>
+          <a:p>
+            <a:pPr indent="0" marL="0">
+              <a:buNone/>
+            </a:pPr>
+            <a:r>
+              <a:rPr lang="en-US" sz="1300" b="1" dirty="0">
+                <a:solidFill>
+                  <a:srgbClr val="0068B7"/>
+                </a:solidFill>
+                <a:latin typeface="Aptos" pitchFamily="34" charset="0"/>
+                <a:ea typeface="Aptos" pitchFamily="34" charset="-122"/>
+                <a:cs typeface="Aptos" pitchFamily="34" charset="-120"/>
+              </a:rPr>
+              <a:t>Use the play links to</a:t>
+            </a:r>
+            <a:endParaRPr lang="en-US" sz="1300" dirty="0"/>
+          </a:p>
+        </p:txBody>
+      </p:sp>
+      <p:sp>
+        <p:nvSpPr>
+          <p:cNvPr id="15" name="Text 13"/>
+          <p:cNvSpPr/>
+          <p:nvPr/>
+        </p:nvSpPr>
+        <p:spPr>
+          <a:xfrm>
+            <a:off x="8229600" y="4306824"/>
+            <a:ext cx="2679192" cy="941832"/>
+          </a:xfrm>
+          <a:prstGeom prst="rect">
+            <a:avLst/>
+          </a:prstGeom>
+          <a:noFill/>
+          <a:ln/>
+        </p:spPr>
+        <p:txBody>
+          <a:bodyPr wrap="square" lIns="254" tIns="254" rIns="254" bIns="254" rtlCol="0" anchor="t">
             <a:normAutofit/>
           </a:bodyPr>
           <a:lstStyle/>
           <a:p>
-            <a:pPr algn="ctr" indent="0" marL="0">
-              <a:buNone/>
-            </a:pPr>
-            <a:r>
-              <a:rPr lang="en-US" sz="1500" b="1" dirty="0">
-                <a:solidFill>
-                  <a:srgbClr val="FFFFFF"/>
-                </a:solidFill>
-                <a:latin typeface="Aptos" pitchFamily="34" charset="0"/>
-                <a:ea typeface="Aptos" pitchFamily="34" charset="-122"/>
-                <a:cs typeface="Aptos" pitchFamily="34" charset="-120"/>
-              </a:rPr>
-              <a:t>Lesson</a:t>
-            </a:r>
-            <a:endParaRPr lang="en-US" sz="1500" dirty="0"/>
-          </a:p>
-        </p:txBody>
-      </p:sp>
-      <p:sp>
-        <p:nvSpPr>
-          <p:cNvPr id="15" name="Shape 13"/>
-          <p:cNvSpPr/>
-          <p:nvPr/>
-        </p:nvSpPr>
-        <p:spPr>
-          <a:xfrm>
-            <a:off x="9046464" y="3977640"/>
-            <a:ext cx="972312" cy="749808"/>
-          </a:xfrm>
-          <a:prstGeom prst="roundRect">
-            <a:avLst>
-              <a:gd name="adj" fmla="val 14634"/>
-            </a:avLst>
-          </a:prstGeom>
-          <a:solidFill>
-            <a:srgbClr val="2F8A28"/>
-          </a:solidFill>
-          <a:ln w="12700">
-            <a:solidFill>
-              <a:srgbClr val="2F8A28"/>
-            </a:solidFill>
-            <a:prstDash val="solid"/>
-          </a:ln>
-        </p:spPr>
-      </p:sp>
-      <p:sp>
-        <p:nvSpPr>
-          <p:cNvPr id="16" name="Text 14"/>
-          <p:cNvSpPr/>
-          <p:nvPr/>
-        </p:nvSpPr>
-        <p:spPr>
-          <a:xfrm>
-            <a:off x="9119616" y="4169664"/>
-            <a:ext cx="826008" cy="310896"/>
-          </a:xfrm>
-          <a:prstGeom prst="rect">
-            <a:avLst/>
-          </a:prstGeom>
-          <a:noFill/>
-          <a:ln/>
-        </p:spPr>
-        <p:txBody>
-          <a:bodyPr wrap="square" lIns="0" tIns="0" rIns="0" bIns="0" rtlCol="0" anchor="ctr">
-            <a:normAutofit/>
-          </a:bodyPr>
-          <a:lstStyle/>
-          <a:p>
-            <a:pPr algn="ctr" indent="0" marL="0">
-              <a:buNone/>
-            </a:pPr>
-            <a:r>
-              <a:rPr lang="en-US" sz="1500" b="1" dirty="0">
-                <a:solidFill>
-                  <a:srgbClr val="FFFFFF"/>
-                </a:solidFill>
-                <a:latin typeface="Aptos" pitchFamily="34" charset="0"/>
-                <a:ea typeface="Aptos" pitchFamily="34" charset="-122"/>
-                <a:cs typeface="Aptos" pitchFamily="34" charset="-120"/>
-              </a:rPr>
-              <a:t>Plays</a:t>
-            </a:r>
-            <a:endParaRPr lang="en-US" sz="1500" dirty="0"/>
-          </a:p>
-        </p:txBody>
-      </p:sp>
-      <p:sp>
-        <p:nvSpPr>
-          <p:cNvPr id="17" name="Shape 15"/>
-          <p:cNvSpPr/>
-          <p:nvPr/>
-        </p:nvSpPr>
-        <p:spPr>
-          <a:xfrm>
-            <a:off x="10274808" y="3977640"/>
-            <a:ext cx="972312" cy="749808"/>
-          </a:xfrm>
-          <a:prstGeom prst="roundRect">
-            <a:avLst>
-              <a:gd name="adj" fmla="val 14634"/>
-            </a:avLst>
-          </a:prstGeom>
-          <a:solidFill>
-            <a:srgbClr val="6A4CA3"/>
-          </a:solidFill>
-          <a:ln w="12700">
-            <a:solidFill>
-              <a:srgbClr val="6A4CA3"/>
-            </a:solidFill>
-            <a:prstDash val="solid"/>
-          </a:ln>
-        </p:spPr>
-      </p:sp>
-      <p:sp>
-        <p:nvSpPr>
-          <p:cNvPr id="18" name="Text 16"/>
-          <p:cNvSpPr/>
-          <p:nvPr/>
-        </p:nvSpPr>
-        <p:spPr>
-          <a:xfrm>
-            <a:off x="10347960" y="4169664"/>
-            <a:ext cx="826008" cy="310896"/>
-          </a:xfrm>
-          <a:prstGeom prst="rect">
-            <a:avLst/>
-          </a:prstGeom>
-          <a:noFill/>
-          <a:ln/>
-        </p:spPr>
-        <p:txBody>
-          <a:bodyPr wrap="square" lIns="0" tIns="0" rIns="0" bIns="0" rtlCol="0" anchor="ctr">
-            <a:normAutofit/>
-          </a:bodyPr>
-          <a:lstStyle/>
-          <a:p>
-            <a:pPr algn="ctr" indent="0" marL="0">
-              <a:buNone/>
-            </a:pPr>
-            <a:r>
-              <a:rPr lang="en-US" sz="1500" b="1" dirty="0">
-                <a:solidFill>
-                  <a:srgbClr val="FFFFFF"/>
-                </a:solidFill>
-                <a:latin typeface="Aptos" pitchFamily="34" charset="0"/>
-                <a:ea typeface="Aptos" pitchFamily="34" charset="-122"/>
-                <a:cs typeface="Aptos" pitchFamily="34" charset="-120"/>
-              </a:rPr>
-              <a:t>Action</a:t>
-            </a:r>
-            <a:endParaRPr lang="en-US" sz="1500" dirty="0"/>
+            <a:r>
+              <a:rPr lang="en-US" sz="1380" dirty="0">
+                <a:solidFill>
+                  <a:srgbClr val="17364A"/>
+                </a:solidFill>
+                <a:latin typeface="Aptos" pitchFamily="34" charset="0"/>
+                <a:ea typeface="Aptos" pitchFamily="34" charset="-122"/>
+                <a:cs typeface="Aptos" pitchFamily="34" charset="-120"/>
+              </a:rPr>
+              <a:t>Locate the decision point in the playbook sequence.</a:t>
+            </a:r>
+            <a:endParaRPr lang="en-US" sz="1380" dirty="0"/>
+          </a:p>
+          <a:p>
+            <a:r>
+              <a:rPr lang="en-US" sz="1380" dirty="0">
+                <a:solidFill>
+                  <a:srgbClr val="17364A"/>
+                </a:solidFill>
+                <a:latin typeface="Aptos" pitchFamily="34" charset="0"/>
+                <a:ea typeface="Aptos" pitchFamily="34" charset="-122"/>
+                <a:cs typeface="Aptos" pitchFamily="34" charset="-120"/>
+              </a:rPr>
+              <a:t>Identify who should participate in the work.</a:t>
+            </a:r>
+            <a:endParaRPr lang="en-US" sz="1380" dirty="0"/>
+          </a:p>
+          <a:p>
+            <a:r>
+              <a:rPr lang="en-US" sz="1380" dirty="0">
+                <a:solidFill>
+                  <a:srgbClr val="17364A"/>
+                </a:solidFill>
+                <a:latin typeface="Aptos" pitchFamily="34" charset="0"/>
+                <a:ea typeface="Aptos" pitchFamily="34" charset="-122"/>
+                <a:cs typeface="Aptos" pitchFamily="34" charset="-120"/>
+              </a:rPr>
+              <a:t>Document the review, approval, or implementation step.</a:t>
+            </a:r>
+            <a:endParaRPr lang="en-US" sz="1380" dirty="0"/>
           </a:p>
         </p:txBody>
       </p:sp>
@@ -16182,20 +14346,20 @@
         </p:nvSpPr>
         <p:spPr>
           <a:xfrm>
-            <a:off x="7818120" y="3977640"/>
-            <a:ext cx="972312" cy="749808"/>
+            <a:off x="8046720" y="3794760"/>
+            <a:ext cx="3063240" cy="1600200"/>
           </a:xfrm>
           <a:prstGeom prst="roundRect">
             <a:avLst>
-              <a:gd name="adj" fmla="val 14634"/>
+              <a:gd name="adj" fmla="val 6857"/>
             </a:avLst>
           </a:prstGeom>
           <a:solidFill>
-            <a:srgbClr val="0068B7"/>
+            <a:srgbClr val="FFFFFF"/>
           </a:solidFill>
           <a:ln w="12700">
             <a:solidFill>
-              <a:srgbClr val="0068B7"/>
+              <a:srgbClr val="B9D7E6"/>
             </a:solidFill>
             <a:prstDash val="solid"/>
           </a:ln>
@@ -16209,172 +14373,100 @@
         </p:nvSpPr>
         <p:spPr>
           <a:xfrm>
-            <a:off x="7891272" y="4169664"/>
-            <a:ext cx="826008" cy="310896"/>
-          </a:xfrm>
-          <a:prstGeom prst="rect">
-            <a:avLst/>
-          </a:prstGeom>
-          <a:noFill/>
-          <a:ln/>
-        </p:spPr>
-        <p:txBody>
-          <a:bodyPr wrap="square" lIns="0" tIns="0" rIns="0" bIns="0" rtlCol="0" anchor="ctr">
+            <a:off x="8211312" y="3941064"/>
+            <a:ext cx="2734056" cy="256032"/>
+          </a:xfrm>
+          <a:prstGeom prst="rect">
+            <a:avLst/>
+          </a:prstGeom>
+          <a:noFill/>
+          <a:ln/>
+        </p:spPr>
+        <p:txBody>
+          <a:bodyPr wrap="square" lIns="0" tIns="0" rIns="0" bIns="0" rtlCol="0" anchor="ctr"/>
+          <a:lstStyle/>
+          <a:p>
+            <a:pPr indent="0" marL="0">
+              <a:buNone/>
+            </a:pPr>
+            <a:r>
+              <a:rPr lang="en-US" sz="1300" b="1" dirty="0">
+                <a:solidFill>
+                  <a:srgbClr val="0068B7"/>
+                </a:solidFill>
+                <a:latin typeface="Aptos" pitchFamily="34" charset="0"/>
+                <a:ea typeface="Aptos" pitchFamily="34" charset="-122"/>
+                <a:cs typeface="Aptos" pitchFamily="34" charset="-120"/>
+              </a:rPr>
+              <a:t>Tool selection cues</a:t>
+            </a:r>
+            <a:endParaRPr lang="en-US" sz="1300" dirty="0"/>
+          </a:p>
+        </p:txBody>
+      </p:sp>
+      <p:sp>
+        <p:nvSpPr>
+          <p:cNvPr id="15" name="Text 13"/>
+          <p:cNvSpPr/>
+          <p:nvPr/>
+        </p:nvSpPr>
+        <p:spPr>
+          <a:xfrm>
+            <a:off x="8229600" y="4306824"/>
+            <a:ext cx="2679192" cy="941832"/>
+          </a:xfrm>
+          <a:prstGeom prst="rect">
+            <a:avLst/>
+          </a:prstGeom>
+          <a:noFill/>
+          <a:ln/>
+        </p:spPr>
+        <p:txBody>
+          <a:bodyPr wrap="square" lIns="254" tIns="254" rIns="254" bIns="254" rtlCol="0" anchor="t">
             <a:normAutofit/>
           </a:bodyPr>
           <a:lstStyle/>
           <a:p>
-            <a:pPr algn="ctr" indent="0" marL="0">
-              <a:buNone/>
-            </a:pPr>
-            <a:r>
-              <a:rPr lang="en-US" sz="1500" b="1" dirty="0">
-                <a:solidFill>
-                  <a:srgbClr val="FFFFFF"/>
-                </a:solidFill>
-                <a:latin typeface="Aptos" pitchFamily="34" charset="0"/>
-                <a:ea typeface="Aptos" pitchFamily="34" charset="-122"/>
-                <a:cs typeface="Aptos" pitchFamily="34" charset="-120"/>
-              </a:rPr>
-              <a:t>Concept</a:t>
-            </a:r>
-            <a:endParaRPr lang="en-US" sz="1500" dirty="0"/>
-          </a:p>
-        </p:txBody>
-      </p:sp>
-      <p:sp>
-        <p:nvSpPr>
-          <p:cNvPr id="15" name="Shape 13"/>
-          <p:cNvSpPr/>
-          <p:nvPr/>
-        </p:nvSpPr>
-        <p:spPr>
-          <a:xfrm>
-            <a:off x="9046464" y="3977640"/>
-            <a:ext cx="972312" cy="749808"/>
-          </a:xfrm>
-          <a:prstGeom prst="roundRect">
-            <a:avLst>
-              <a:gd name="adj" fmla="val 14634"/>
-            </a:avLst>
-          </a:prstGeom>
-          <a:solidFill>
-            <a:srgbClr val="2F8A28"/>
-          </a:solidFill>
-          <a:ln w="12700">
-            <a:solidFill>
-              <a:srgbClr val="2F8A28"/>
-            </a:solidFill>
-            <a:prstDash val="solid"/>
-          </a:ln>
-        </p:spPr>
-      </p:sp>
-      <p:sp>
-        <p:nvSpPr>
-          <p:cNvPr id="16" name="Text 14"/>
-          <p:cNvSpPr/>
-          <p:nvPr/>
-        </p:nvSpPr>
-        <p:spPr>
-          <a:xfrm>
-            <a:off x="9119616" y="4169664"/>
-            <a:ext cx="826008" cy="310896"/>
-          </a:xfrm>
-          <a:prstGeom prst="rect">
-            <a:avLst/>
-          </a:prstGeom>
-          <a:noFill/>
-          <a:ln/>
-        </p:spPr>
-        <p:txBody>
-          <a:bodyPr wrap="square" lIns="0" tIns="0" rIns="0" bIns="0" rtlCol="0" anchor="ctr">
-            <a:normAutofit/>
-          </a:bodyPr>
-          <a:lstStyle/>
-          <a:p>
-            <a:pPr algn="ctr" indent="0" marL="0">
-              <a:buNone/>
-            </a:pPr>
-            <a:r>
-              <a:rPr lang="en-US" sz="1500" b="1" dirty="0">
-                <a:solidFill>
-                  <a:srgbClr val="FFFFFF"/>
-                </a:solidFill>
-                <a:latin typeface="Aptos" pitchFamily="34" charset="0"/>
-                <a:ea typeface="Aptos" pitchFamily="34" charset="-122"/>
-                <a:cs typeface="Aptos" pitchFamily="34" charset="-120"/>
-              </a:rPr>
-              <a:t>Tool</a:t>
-            </a:r>
-            <a:endParaRPr lang="en-US" sz="1500" dirty="0"/>
-          </a:p>
-        </p:txBody>
-      </p:sp>
-      <p:sp>
-        <p:nvSpPr>
-          <p:cNvPr id="17" name="Shape 15"/>
-          <p:cNvSpPr/>
-          <p:nvPr/>
-        </p:nvSpPr>
-        <p:spPr>
-          <a:xfrm>
-            <a:off x="10274808" y="3977640"/>
-            <a:ext cx="972312" cy="749808"/>
-          </a:xfrm>
-          <a:prstGeom prst="roundRect">
-            <a:avLst>
-              <a:gd name="adj" fmla="val 14634"/>
-            </a:avLst>
-          </a:prstGeom>
-          <a:solidFill>
-            <a:srgbClr val="D69A2D"/>
-          </a:solidFill>
-          <a:ln w="12700">
-            <a:solidFill>
-              <a:srgbClr val="D69A2D"/>
-            </a:solidFill>
-            <a:prstDash val="solid"/>
-          </a:ln>
-        </p:spPr>
-      </p:sp>
-      <p:sp>
-        <p:nvSpPr>
-          <p:cNvPr id="18" name="Text 16"/>
-          <p:cNvSpPr/>
-          <p:nvPr/>
-        </p:nvSpPr>
-        <p:spPr>
-          <a:xfrm>
-            <a:off x="10347960" y="4169664"/>
-            <a:ext cx="826008" cy="310896"/>
-          </a:xfrm>
-          <a:prstGeom prst="rect">
-            <a:avLst/>
-          </a:prstGeom>
-          <a:noFill/>
-          <a:ln/>
-        </p:spPr>
-        <p:txBody>
-          <a:bodyPr wrap="square" lIns="0" tIns="0" rIns="0" bIns="0" rtlCol="0" anchor="ctr">
-            <a:normAutofit/>
-          </a:bodyPr>
-          <a:lstStyle/>
-          <a:p>
-            <a:pPr algn="ctr" indent="0" marL="0">
-              <a:buNone/>
-            </a:pPr>
-            <a:r>
-              <a:rPr lang="en-US" sz="1500" b="1" dirty="0">
-                <a:solidFill>
-                  <a:srgbClr val="FFFFFF"/>
-                </a:solidFill>
-                <a:latin typeface="Aptos" pitchFamily="34" charset="0"/>
-                <a:ea typeface="Aptos" pitchFamily="34" charset="-122"/>
-                <a:cs typeface="Aptos" pitchFamily="34" charset="-120"/>
-              </a:rPr>
-              <a:t>Artifact</a:t>
-            </a:r>
-            <a:endParaRPr lang="en-US" sz="1500" dirty="0"/>
+            <a:r>
+              <a:rPr lang="en-US" sz="1380" dirty="0">
+                <a:solidFill>
+                  <a:srgbClr val="17364A"/>
+                </a:solidFill>
+                <a:latin typeface="Aptos" pitchFamily="34" charset="0"/>
+                <a:ea typeface="Aptos" pitchFamily="34" charset="-122"/>
+                <a:cs typeface="Aptos" pitchFamily="34" charset="-120"/>
+              </a:rPr>
+              <a:t>Use a tool when no comparable local process exists.</a:t>
+            </a:r>
+            <a:endParaRPr lang="en-US" sz="1380" dirty="0"/>
+          </a:p>
+          <a:p>
+            <a:r>
+              <a:rPr lang="en-US" sz="1380" dirty="0">
+                <a:solidFill>
+                  <a:srgbClr val="17364A"/>
+                </a:solidFill>
+                <a:latin typeface="Aptos" pitchFamily="34" charset="0"/>
+                <a:ea typeface="Aptos" pitchFamily="34" charset="-122"/>
+                <a:cs typeface="Aptos" pitchFamily="34" charset="-120"/>
+              </a:rPr>
+              <a:t>Adapt existing department templates when they already fit the purpose.</a:t>
+            </a:r>
+            <a:endParaRPr lang="en-US" sz="1380" dirty="0"/>
+          </a:p>
+          <a:p>
+            <a:r>
+              <a:rPr lang="en-US" sz="1380" dirty="0">
+                <a:solidFill>
+                  <a:srgbClr val="17364A"/>
+                </a:solidFill>
+                <a:latin typeface="Aptos" pitchFamily="34" charset="0"/>
+                <a:ea typeface="Aptos" pitchFamily="34" charset="-122"/>
+                <a:cs typeface="Aptos" pitchFamily="34" charset="-120"/>
+              </a:rPr>
+              <a:t>Save the completed artifact as evidence of the decision.</a:t>
+            </a:r>
+            <a:endParaRPr lang="en-US" sz="1380" dirty="0"/>
           </a:p>
         </p:txBody>
       </p:sp>
@@ -16847,13 +14939,11 @@
             </a:avLst>
           </a:prstGeom>
           <a:solidFill>
-            <a:srgbClr val="FFFFFF">
-              <a:alpha val="88000"/>
-            </a:srgbClr>
+            <a:srgbClr val="FFFFFF"/>
           </a:solidFill>
           <a:ln w="12700">
             <a:solidFill>
-              <a:srgbClr val="D6E8F2"/>
+              <a:srgbClr val="B9D7E6"/>
             </a:solidFill>
             <a:prstDash val="solid"/>
           </a:ln>
@@ -16861,261 +14951,98 @@
       </p:sp>
       <p:sp>
         <p:nvSpPr>
-          <p:cNvPr id="14" name="Shape 12"/>
-          <p:cNvSpPr/>
-          <p:nvPr/>
-        </p:nvSpPr>
-        <p:spPr>
-          <a:xfrm>
-            <a:off x="8138160" y="3291840"/>
-            <a:ext cx="329184" cy="329184"/>
-          </a:xfrm>
-          <a:prstGeom prst="ellipse">
-            <a:avLst/>
-          </a:prstGeom>
-          <a:solidFill>
-            <a:srgbClr val="0068B7"/>
-          </a:solidFill>
-          <a:ln w="12700">
-            <a:solidFill>
-              <a:srgbClr val="0068B7"/>
-            </a:solidFill>
-            <a:prstDash val="solid"/>
-          </a:ln>
-        </p:spPr>
-      </p:sp>
-      <p:sp>
-        <p:nvSpPr>
-          <p:cNvPr id="15" name="Shape 13"/>
-          <p:cNvSpPr/>
-          <p:nvPr/>
-        </p:nvSpPr>
-        <p:spPr>
-          <a:xfrm>
-            <a:off x="10332720" y="3383280"/>
-            <a:ext cx="329184" cy="329184"/>
-          </a:xfrm>
-          <a:prstGeom prst="ellipse">
-            <a:avLst/>
-          </a:prstGeom>
-          <a:solidFill>
-            <a:srgbClr val="2F8A28"/>
-          </a:solidFill>
-          <a:ln w="12700">
-            <a:solidFill>
-              <a:srgbClr val="2F8A28"/>
-            </a:solidFill>
-            <a:prstDash val="solid"/>
-          </a:ln>
-        </p:spPr>
+          <p:cNvPr id="14" name="Text 12"/>
+          <p:cNvSpPr/>
+          <p:nvPr/>
+        </p:nvSpPr>
+        <p:spPr>
+          <a:xfrm>
+            <a:off x="7799832" y="2935224"/>
+            <a:ext cx="3145536" cy="256032"/>
+          </a:xfrm>
+          <a:prstGeom prst="rect">
+            <a:avLst/>
+          </a:prstGeom>
+          <a:noFill/>
+          <a:ln/>
+        </p:spPr>
+        <p:txBody>
+          <a:bodyPr wrap="square" lIns="0" tIns="0" rIns="0" bIns="0" rtlCol="0" anchor="ctr"/>
+          <a:lstStyle/>
+          <a:p>
+            <a:pPr indent="0" marL="0">
+              <a:buNone/>
+            </a:pPr>
+            <a:r>
+              <a:rPr lang="en-US" sz="1300" b="1" dirty="0">
+                <a:solidFill>
+                  <a:srgbClr val="0068B7"/>
+                </a:solidFill>
+                <a:latin typeface="Aptos" pitchFamily="34" charset="0"/>
+                <a:ea typeface="Aptos" pitchFamily="34" charset="-122"/>
+                <a:cs typeface="Aptos" pitchFamily="34" charset="-120"/>
+              </a:rPr>
+              <a:t>Concept checkpoints</a:t>
+            </a:r>
+            <a:endParaRPr lang="en-US" sz="1300" dirty="0"/>
+          </a:p>
+        </p:txBody>
+      </p:sp>
+      <p:sp>
+        <p:nvSpPr>
+          <p:cNvPr id="15" name="Text 13"/>
+          <p:cNvSpPr/>
+          <p:nvPr/>
+        </p:nvSpPr>
+        <p:spPr>
+          <a:xfrm>
+            <a:off x="7818120" y="3300984"/>
+            <a:ext cx="3090672" cy="877824"/>
+          </a:xfrm>
+          <a:prstGeom prst="rect">
+            <a:avLst/>
+          </a:prstGeom>
+          <a:noFill/>
+          <a:ln/>
+        </p:spPr>
+        <p:txBody>
+          <a:bodyPr wrap="square" lIns="254" tIns="254" rIns="254" bIns="254" rtlCol="0" anchor="t">
+            <a:normAutofit/>
+          </a:bodyPr>
+          <a:lstStyle/>
+          <a:p>
+            <a:r>
+              <a:rPr lang="en-US" sz="1380" dirty="0">
+                <a:solidFill>
+                  <a:srgbClr val="17364A"/>
+                </a:solidFill>
+                <a:latin typeface="Aptos" pitchFamily="34" charset="0"/>
+                <a:ea typeface="Aptos" pitchFamily="34" charset="-122"/>
+                <a:cs typeface="Aptos" pitchFamily="34" charset="-120"/>
+              </a:rPr>
+              <a:t>Recognize misinformation, overstatement, missing uncertainty, and stigmatizing language.</a:t>
+            </a:r>
+            <a:endParaRPr lang="en-US" sz="1380" dirty="0"/>
+          </a:p>
+          <a:p>
+            <a:r>
+              <a:rPr lang="en-US" sz="1380" dirty="0">
+                <a:solidFill>
+                  <a:srgbClr val="17364A"/>
+                </a:solidFill>
+                <a:latin typeface="Aptos" pitchFamily="34" charset="0"/>
+                <a:ea typeface="Aptos" pitchFamily="34" charset="-122"/>
+                <a:cs typeface="Aptos" pitchFamily="34" charset="-120"/>
+              </a:rPr>
+              <a:t>Produce an AI-assisted communications review checklist.</a:t>
+            </a:r>
+            <a:endParaRPr lang="en-US" sz="1380" dirty="0"/>
+          </a:p>
+        </p:txBody>
       </p:sp>
       <p:sp>
         <p:nvSpPr>
           <p:cNvPr id="16" name="Shape 14"/>
-          <p:cNvSpPr/>
-          <p:nvPr/>
-        </p:nvSpPr>
-        <p:spPr>
-          <a:xfrm>
-            <a:off x="9235440" y="3502152"/>
-            <a:ext cx="329184" cy="329184"/>
-          </a:xfrm>
-          <a:prstGeom prst="ellipse">
-            <a:avLst/>
-          </a:prstGeom>
-          <a:solidFill>
-            <a:srgbClr val="D69A2D"/>
-          </a:solidFill>
-          <a:ln w="12700">
-            <a:solidFill>
-              <a:srgbClr val="D69A2D"/>
-            </a:solidFill>
-            <a:prstDash val="solid"/>
-          </a:ln>
-        </p:spPr>
-      </p:sp>
-      <p:sp>
-        <p:nvSpPr>
-          <p:cNvPr id="17" name="Shape 15"/>
-          <p:cNvSpPr/>
-          <p:nvPr/>
-        </p:nvSpPr>
-        <p:spPr>
-          <a:xfrm>
-            <a:off x="9235440" y="3657600"/>
-            <a:ext cx="329184" cy="329184"/>
-          </a:xfrm>
-          <a:prstGeom prst="ellipse">
-            <a:avLst/>
-          </a:prstGeom>
-          <a:solidFill>
-            <a:srgbClr val="6A4CA3"/>
-          </a:solidFill>
-          <a:ln w="12700">
-            <a:solidFill>
-              <a:srgbClr val="6A4CA3"/>
-            </a:solidFill>
-            <a:prstDash val="solid"/>
-          </a:ln>
-        </p:spPr>
-      </p:sp>
-      <p:sp>
-        <p:nvSpPr>
-          <p:cNvPr id="18" name="Shape 16"/>
-          <p:cNvSpPr/>
-          <p:nvPr/>
-        </p:nvSpPr>
-        <p:spPr>
-          <a:xfrm>
-            <a:off x="8302752" y="3456432"/>
-            <a:ext cx="1097280" cy="365760"/>
-          </a:xfrm>
-          <a:prstGeom prst="line">
-            <a:avLst/>
-          </a:prstGeom>
-          <a:noFill/>
-          <a:ln w="19050">
-            <a:solidFill>
-              <a:srgbClr val="8ABBD8"/>
-            </a:solidFill>
-            <a:prstDash val="solid"/>
-          </a:ln>
-        </p:spPr>
-      </p:sp>
-      <p:sp>
-        <p:nvSpPr>
-          <p:cNvPr id="19" name="Shape 17"/>
-          <p:cNvSpPr/>
-          <p:nvPr/>
-        </p:nvSpPr>
-        <p:spPr>
-          <a:xfrm>
-            <a:off x="10497312" y="3547872"/>
-            <a:ext cx="-1097280" cy="274320"/>
-          </a:xfrm>
-          <a:prstGeom prst="line">
-            <a:avLst/>
-          </a:prstGeom>
-          <a:noFill/>
-          <a:ln w="19050">
-            <a:solidFill>
-              <a:srgbClr val="8ABBD8"/>
-            </a:solidFill>
-            <a:prstDash val="solid"/>
-          </a:ln>
-        </p:spPr>
-      </p:sp>
-      <p:sp>
-        <p:nvSpPr>
-          <p:cNvPr id="20" name="Shape 18"/>
-          <p:cNvSpPr/>
-          <p:nvPr/>
-        </p:nvSpPr>
-        <p:spPr>
-          <a:xfrm>
-            <a:off x="9400032" y="3666744"/>
-            <a:ext cx="0" cy="155448"/>
-          </a:xfrm>
-          <a:prstGeom prst="line">
-            <a:avLst/>
-          </a:prstGeom>
-          <a:noFill/>
-          <a:ln w="19050">
-            <a:solidFill>
-              <a:srgbClr val="8ABBD8"/>
-            </a:solidFill>
-            <a:prstDash val="solid"/>
-          </a:ln>
-        </p:spPr>
-      </p:sp>
-      <p:sp>
-        <p:nvSpPr>
-          <p:cNvPr id="21" name="Shape 19"/>
-          <p:cNvSpPr/>
-          <p:nvPr/>
-        </p:nvSpPr>
-        <p:spPr>
-          <a:xfrm>
-            <a:off x="8302752" y="3456432"/>
-            <a:ext cx="1097280" cy="210312"/>
-          </a:xfrm>
-          <a:prstGeom prst="line">
-            <a:avLst/>
-          </a:prstGeom>
-          <a:noFill/>
-          <a:ln w="19050">
-            <a:solidFill>
-              <a:srgbClr val="8ABBD8"/>
-            </a:solidFill>
-            <a:prstDash val="solid"/>
-          </a:ln>
-        </p:spPr>
-      </p:sp>
-      <p:sp>
-        <p:nvSpPr>
-          <p:cNvPr id="22" name="Shape 20"/>
-          <p:cNvSpPr/>
-          <p:nvPr/>
-        </p:nvSpPr>
-        <p:spPr>
-          <a:xfrm>
-            <a:off x="10497312" y="3547872"/>
-            <a:ext cx="-1097280" cy="118872"/>
-          </a:xfrm>
-          <a:prstGeom prst="line">
-            <a:avLst/>
-          </a:prstGeom>
-          <a:noFill/>
-          <a:ln w="19050">
-            <a:solidFill>
-              <a:srgbClr val="8ABBD8"/>
-            </a:solidFill>
-            <a:prstDash val="solid"/>
-          </a:ln>
-        </p:spPr>
-      </p:sp>
-      <p:sp>
-        <p:nvSpPr>
-          <p:cNvPr id="23" name="Text 21"/>
-          <p:cNvSpPr/>
-          <p:nvPr/>
-        </p:nvSpPr>
-        <p:spPr>
-          <a:xfrm>
-            <a:off x="7909560" y="3977640"/>
-            <a:ext cx="2926080" cy="182880"/>
-          </a:xfrm>
-          <a:prstGeom prst="rect">
-            <a:avLst/>
-          </a:prstGeom>
-          <a:noFill/>
-          <a:ln/>
-        </p:spPr>
-        <p:txBody>
-          <a:bodyPr wrap="square" lIns="0" tIns="0" rIns="0" bIns="0" rtlCol="0" anchor="ctr"/>
-          <a:lstStyle/>
-          <a:p>
-            <a:pPr algn="ctr" indent="0" marL="0">
-              <a:buNone/>
-            </a:pPr>
-            <a:r>
-              <a:rPr lang="en-US" sz="1000" dirty="0">
-                <a:solidFill>
-                  <a:srgbClr val="003A63"/>
-                </a:solidFill>
-                <a:latin typeface="Aptos" pitchFamily="34" charset="0"/>
-                <a:ea typeface="Aptos" pitchFamily="34" charset="-122"/>
-                <a:cs typeface="Aptos" pitchFamily="34" charset="-120"/>
-              </a:rPr>
-              <a:t>People and trust</a:t>
-            </a:r>
-            <a:endParaRPr lang="en-US" sz="1000" dirty="0"/>
-          </a:p>
-        </p:txBody>
-      </p:sp>
-      <p:sp>
-        <p:nvSpPr>
-          <p:cNvPr id="24" name="Shape 22"/>
           <p:cNvSpPr/>
           <p:nvPr/>
         </p:nvSpPr>
@@ -17142,7 +15069,7 @@
       </p:sp>
       <p:sp>
         <p:nvSpPr>
-          <p:cNvPr id="25" name="Text 23"/>
+          <p:cNvPr id="17" name="Text 15"/>
           <p:cNvSpPr/>
           <p:nvPr/>
         </p:nvSpPr>
@@ -17181,7 +15108,7 @@
       </p:sp>
       <p:sp>
         <p:nvSpPr>
-          <p:cNvPr id="26" name="Text 24"/>
+          <p:cNvPr id="18" name="Text 16"/>
           <p:cNvSpPr/>
           <p:nvPr/>
         </p:nvSpPr>
@@ -17689,13 +15616,11 @@
             </a:avLst>
           </a:prstGeom>
           <a:solidFill>
-            <a:srgbClr val="FFFFFF">
-              <a:alpha val="88000"/>
-            </a:srgbClr>
+            <a:srgbClr val="FFFFFF"/>
           </a:solidFill>
           <a:ln w="12700">
             <a:solidFill>
-              <a:srgbClr val="D6E8F2"/>
+              <a:srgbClr val="B9D7E6"/>
             </a:solidFill>
             <a:prstDash val="solid"/>
           </a:ln>
@@ -17703,261 +15628,112 @@
       </p:sp>
       <p:sp>
         <p:nvSpPr>
-          <p:cNvPr id="14" name="Shape 12"/>
-          <p:cNvSpPr/>
-          <p:nvPr/>
-        </p:nvSpPr>
-        <p:spPr>
-          <a:xfrm>
-            <a:off x="8138160" y="3291840"/>
-            <a:ext cx="329184" cy="329184"/>
-          </a:xfrm>
-          <a:prstGeom prst="ellipse">
-            <a:avLst/>
-          </a:prstGeom>
-          <a:solidFill>
-            <a:srgbClr val="0068B7"/>
-          </a:solidFill>
-          <a:ln w="12700">
-            <a:solidFill>
-              <a:srgbClr val="0068B7"/>
-            </a:solidFill>
-            <a:prstDash val="solid"/>
-          </a:ln>
-        </p:spPr>
-      </p:sp>
-      <p:sp>
-        <p:nvSpPr>
-          <p:cNvPr id="15" name="Shape 13"/>
-          <p:cNvSpPr/>
-          <p:nvPr/>
-        </p:nvSpPr>
-        <p:spPr>
-          <a:xfrm>
-            <a:off x="10332720" y="3383280"/>
-            <a:ext cx="329184" cy="329184"/>
-          </a:xfrm>
-          <a:prstGeom prst="ellipse">
-            <a:avLst/>
-          </a:prstGeom>
-          <a:solidFill>
-            <a:srgbClr val="2F8A28"/>
-          </a:solidFill>
-          <a:ln w="12700">
-            <a:solidFill>
-              <a:srgbClr val="2F8A28"/>
-            </a:solidFill>
-            <a:prstDash val="solid"/>
-          </a:ln>
-        </p:spPr>
+          <p:cNvPr id="14" name="Text 12"/>
+          <p:cNvSpPr/>
+          <p:nvPr/>
+        </p:nvSpPr>
+        <p:spPr>
+          <a:xfrm>
+            <a:off x="7799832" y="2935224"/>
+            <a:ext cx="3145536" cy="256032"/>
+          </a:xfrm>
+          <a:prstGeom prst="rect">
+            <a:avLst/>
+          </a:prstGeom>
+          <a:noFill/>
+          <a:ln/>
+        </p:spPr>
+        <p:txBody>
+          <a:bodyPr wrap="square" lIns="0" tIns="0" rIns="0" bIns="0" rtlCol="0" anchor="ctr"/>
+          <a:lstStyle/>
+          <a:p>
+            <a:pPr indent="0" marL="0">
+              <a:buNone/>
+            </a:pPr>
+            <a:r>
+              <a:rPr lang="en-US" sz="1300" b="1" dirty="0">
+                <a:solidFill>
+                  <a:srgbClr val="0068B7"/>
+                </a:solidFill>
+                <a:latin typeface="Aptos" pitchFamily="34" charset="0"/>
+                <a:ea typeface="Aptos" pitchFamily="34" charset="-122"/>
+                <a:cs typeface="Aptos" pitchFamily="34" charset="-120"/>
+              </a:rPr>
+              <a:t>Concept checkpoints</a:t>
+            </a:r>
+            <a:endParaRPr lang="en-US" sz="1300" dirty="0"/>
+          </a:p>
+        </p:txBody>
+      </p:sp>
+      <p:sp>
+        <p:nvSpPr>
+          <p:cNvPr id="15" name="Text 13"/>
+          <p:cNvSpPr/>
+          <p:nvPr/>
+        </p:nvSpPr>
+        <p:spPr>
+          <a:xfrm>
+            <a:off x="7818120" y="3300984"/>
+            <a:ext cx="3090672" cy="877824"/>
+          </a:xfrm>
+          <a:prstGeom prst="rect">
+            <a:avLst/>
+          </a:prstGeom>
+          <a:noFill/>
+          <a:ln/>
+        </p:spPr>
+        <p:txBody>
+          <a:bodyPr wrap="square" lIns="254" tIns="254" rIns="254" bIns="254" rtlCol="0" anchor="t">
+            <a:normAutofit/>
+          </a:bodyPr>
+          <a:lstStyle/>
+          <a:p>
+            <a:r>
+              <a:rPr lang="en-US" sz="1380" dirty="0">
+                <a:solidFill>
+                  <a:srgbClr val="17364A"/>
+                </a:solidFill>
+                <a:latin typeface="Aptos" pitchFamily="34" charset="0"/>
+                <a:ea typeface="Aptos" pitchFamily="34" charset="-122"/>
+                <a:cs typeface="Aptos" pitchFamily="34" charset="-120"/>
+              </a:rPr>
+              <a:t>Generative AI can support public health communications by helping staff draft, revise,.</a:t>
+            </a:r>
+            <a:endParaRPr lang="en-US" sz="1380" dirty="0"/>
+          </a:p>
+          <a:p>
+            <a:r>
+              <a:rPr lang="en-US" sz="1380" dirty="0">
+                <a:solidFill>
+                  <a:srgbClr val="17364A"/>
+                </a:solidFill>
+                <a:latin typeface="Aptos" pitchFamily="34" charset="0"/>
+                <a:ea typeface="Aptos" pitchFamily="34" charset="-122"/>
+                <a:cs typeface="Aptos" pitchFamily="34" charset="-120"/>
+              </a:rPr>
+              <a:t>AI-generated text can sound clear and authoritative while misstating evidence, omitting.</a:t>
+            </a:r>
+            <a:endParaRPr lang="en-US" sz="1380" dirty="0"/>
+          </a:p>
+          <a:p>
+            <a:r>
+              <a:rPr lang="en-US" sz="1380" dirty="0">
+                <a:solidFill>
+                  <a:srgbClr val="17364A"/>
+                </a:solidFill>
+                <a:latin typeface="Aptos" pitchFamily="34" charset="0"/>
+                <a:ea typeface="Aptos" pitchFamily="34" charset="-122"/>
+                <a:cs typeface="Aptos" pitchFamily="34" charset="-120"/>
+              </a:rPr>
+              <a:t>This module teaches communications staff and program partners how to use AI as a drafting.</a:t>
+            </a:r>
+            <a:endParaRPr lang="en-US" sz="1380" dirty="0"/>
+          </a:p>
+        </p:txBody>
       </p:sp>
       <p:sp>
         <p:nvSpPr>
           <p:cNvPr id="16" name="Shape 14"/>
-          <p:cNvSpPr/>
-          <p:nvPr/>
-        </p:nvSpPr>
-        <p:spPr>
-          <a:xfrm>
-            <a:off x="9235440" y="3502152"/>
-            <a:ext cx="329184" cy="329184"/>
-          </a:xfrm>
-          <a:prstGeom prst="ellipse">
-            <a:avLst/>
-          </a:prstGeom>
-          <a:solidFill>
-            <a:srgbClr val="D69A2D"/>
-          </a:solidFill>
-          <a:ln w="12700">
-            <a:solidFill>
-              <a:srgbClr val="D69A2D"/>
-            </a:solidFill>
-            <a:prstDash val="solid"/>
-          </a:ln>
-        </p:spPr>
-      </p:sp>
-      <p:sp>
-        <p:nvSpPr>
-          <p:cNvPr id="17" name="Shape 15"/>
-          <p:cNvSpPr/>
-          <p:nvPr/>
-        </p:nvSpPr>
-        <p:spPr>
-          <a:xfrm>
-            <a:off x="9235440" y="3657600"/>
-            <a:ext cx="329184" cy="329184"/>
-          </a:xfrm>
-          <a:prstGeom prst="ellipse">
-            <a:avLst/>
-          </a:prstGeom>
-          <a:solidFill>
-            <a:srgbClr val="6A4CA3"/>
-          </a:solidFill>
-          <a:ln w="12700">
-            <a:solidFill>
-              <a:srgbClr val="6A4CA3"/>
-            </a:solidFill>
-            <a:prstDash val="solid"/>
-          </a:ln>
-        </p:spPr>
-      </p:sp>
-      <p:sp>
-        <p:nvSpPr>
-          <p:cNvPr id="18" name="Shape 16"/>
-          <p:cNvSpPr/>
-          <p:nvPr/>
-        </p:nvSpPr>
-        <p:spPr>
-          <a:xfrm>
-            <a:off x="8302752" y="3456432"/>
-            <a:ext cx="1097280" cy="365760"/>
-          </a:xfrm>
-          <a:prstGeom prst="line">
-            <a:avLst/>
-          </a:prstGeom>
-          <a:noFill/>
-          <a:ln w="19050">
-            <a:solidFill>
-              <a:srgbClr val="8ABBD8"/>
-            </a:solidFill>
-            <a:prstDash val="solid"/>
-          </a:ln>
-        </p:spPr>
-      </p:sp>
-      <p:sp>
-        <p:nvSpPr>
-          <p:cNvPr id="19" name="Shape 17"/>
-          <p:cNvSpPr/>
-          <p:nvPr/>
-        </p:nvSpPr>
-        <p:spPr>
-          <a:xfrm>
-            <a:off x="10497312" y="3547872"/>
-            <a:ext cx="-1097280" cy="274320"/>
-          </a:xfrm>
-          <a:prstGeom prst="line">
-            <a:avLst/>
-          </a:prstGeom>
-          <a:noFill/>
-          <a:ln w="19050">
-            <a:solidFill>
-              <a:srgbClr val="8ABBD8"/>
-            </a:solidFill>
-            <a:prstDash val="solid"/>
-          </a:ln>
-        </p:spPr>
-      </p:sp>
-      <p:sp>
-        <p:nvSpPr>
-          <p:cNvPr id="20" name="Shape 18"/>
-          <p:cNvSpPr/>
-          <p:nvPr/>
-        </p:nvSpPr>
-        <p:spPr>
-          <a:xfrm>
-            <a:off x="9400032" y="3666744"/>
-            <a:ext cx="0" cy="155448"/>
-          </a:xfrm>
-          <a:prstGeom prst="line">
-            <a:avLst/>
-          </a:prstGeom>
-          <a:noFill/>
-          <a:ln w="19050">
-            <a:solidFill>
-              <a:srgbClr val="8ABBD8"/>
-            </a:solidFill>
-            <a:prstDash val="solid"/>
-          </a:ln>
-        </p:spPr>
-      </p:sp>
-      <p:sp>
-        <p:nvSpPr>
-          <p:cNvPr id="21" name="Shape 19"/>
-          <p:cNvSpPr/>
-          <p:nvPr/>
-        </p:nvSpPr>
-        <p:spPr>
-          <a:xfrm>
-            <a:off x="8302752" y="3456432"/>
-            <a:ext cx="1097280" cy="210312"/>
-          </a:xfrm>
-          <a:prstGeom prst="line">
-            <a:avLst/>
-          </a:prstGeom>
-          <a:noFill/>
-          <a:ln w="19050">
-            <a:solidFill>
-              <a:srgbClr val="8ABBD8"/>
-            </a:solidFill>
-            <a:prstDash val="solid"/>
-          </a:ln>
-        </p:spPr>
-      </p:sp>
-      <p:sp>
-        <p:nvSpPr>
-          <p:cNvPr id="22" name="Shape 20"/>
-          <p:cNvSpPr/>
-          <p:nvPr/>
-        </p:nvSpPr>
-        <p:spPr>
-          <a:xfrm>
-            <a:off x="10497312" y="3547872"/>
-            <a:ext cx="-1097280" cy="118872"/>
-          </a:xfrm>
-          <a:prstGeom prst="line">
-            <a:avLst/>
-          </a:prstGeom>
-          <a:noFill/>
-          <a:ln w="19050">
-            <a:solidFill>
-              <a:srgbClr val="8ABBD8"/>
-            </a:solidFill>
-            <a:prstDash val="solid"/>
-          </a:ln>
-        </p:spPr>
-      </p:sp>
-      <p:sp>
-        <p:nvSpPr>
-          <p:cNvPr id="23" name="Text 21"/>
-          <p:cNvSpPr/>
-          <p:nvPr/>
-        </p:nvSpPr>
-        <p:spPr>
-          <a:xfrm>
-            <a:off x="7909560" y="3977640"/>
-            <a:ext cx="2926080" cy="182880"/>
-          </a:xfrm>
-          <a:prstGeom prst="rect">
-            <a:avLst/>
-          </a:prstGeom>
-          <a:noFill/>
-          <a:ln/>
-        </p:spPr>
-        <p:txBody>
-          <a:bodyPr wrap="square" lIns="0" tIns="0" rIns="0" bIns="0" rtlCol="0" anchor="ctr"/>
-          <a:lstStyle/>
-          <a:p>
-            <a:pPr algn="ctr" indent="0" marL="0">
-              <a:buNone/>
-            </a:pPr>
-            <a:r>
-              <a:rPr lang="en-US" sz="1000" dirty="0">
-                <a:solidFill>
-                  <a:srgbClr val="003A63"/>
-                </a:solidFill>
-                <a:latin typeface="Aptos" pitchFamily="34" charset="0"/>
-                <a:ea typeface="Aptos" pitchFamily="34" charset="-122"/>
-                <a:cs typeface="Aptos" pitchFamily="34" charset="-120"/>
-              </a:rPr>
-              <a:t>People and trust</a:t>
-            </a:r>
-            <a:endParaRPr lang="en-US" sz="1000" dirty="0"/>
-          </a:p>
-        </p:txBody>
-      </p:sp>
-      <p:sp>
-        <p:nvSpPr>
-          <p:cNvPr id="24" name="Shape 22"/>
           <p:cNvSpPr/>
           <p:nvPr/>
         </p:nvSpPr>
@@ -17984,7 +15760,7 @@
       </p:sp>
       <p:sp>
         <p:nvSpPr>
-          <p:cNvPr id="25" name="Text 23"/>
+          <p:cNvPr id="17" name="Text 15"/>
           <p:cNvSpPr/>
           <p:nvPr/>
         </p:nvSpPr>
@@ -18023,7 +15799,7 @@
       </p:sp>
       <p:sp>
         <p:nvSpPr>
-          <p:cNvPr id="26" name="Text 24"/>
+          <p:cNvPr id="18" name="Text 16"/>
           <p:cNvSpPr/>
           <p:nvPr/>
         </p:nvSpPr>
@@ -18531,13 +16307,11 @@
             </a:avLst>
           </a:prstGeom>
           <a:solidFill>
-            <a:srgbClr val="FFFFFF">
-              <a:alpha val="88000"/>
-            </a:srgbClr>
+            <a:srgbClr val="FFFFFF"/>
           </a:solidFill>
           <a:ln w="12700">
             <a:solidFill>
-              <a:srgbClr val="D6E8F2"/>
+              <a:srgbClr val="B9D7E6"/>
             </a:solidFill>
             <a:prstDash val="solid"/>
           </a:ln>
@@ -18545,190 +16319,112 @@
       </p:sp>
       <p:sp>
         <p:nvSpPr>
-          <p:cNvPr id="14" name="Shape 12"/>
-          <p:cNvSpPr/>
-          <p:nvPr/>
-        </p:nvSpPr>
-        <p:spPr>
-          <a:xfrm>
-            <a:off x="7891272" y="3108960"/>
-            <a:ext cx="566928" cy="566928"/>
-          </a:xfrm>
-          <a:prstGeom prst="ellipse">
-            <a:avLst/>
-          </a:prstGeom>
-          <a:solidFill>
-            <a:srgbClr val="0068B7"/>
-          </a:solidFill>
-          <a:ln w="12700">
-            <a:solidFill>
-              <a:srgbClr val="0068B7"/>
-            </a:solidFill>
-            <a:prstDash val="solid"/>
-          </a:ln>
-        </p:spPr>
-      </p:sp>
-      <p:sp>
-        <p:nvSpPr>
-          <p:cNvPr id="15" name="Shape 13"/>
-          <p:cNvSpPr/>
-          <p:nvPr/>
-        </p:nvSpPr>
-        <p:spPr>
-          <a:xfrm>
-            <a:off x="10287000" y="3108960"/>
-            <a:ext cx="566928" cy="566928"/>
-          </a:xfrm>
-          <a:prstGeom prst="ellipse">
-            <a:avLst/>
-          </a:prstGeom>
-          <a:solidFill>
-            <a:srgbClr val="2F8A28"/>
-          </a:solidFill>
-          <a:ln w="12700">
-            <a:solidFill>
-              <a:srgbClr val="2F8A28"/>
-            </a:solidFill>
-            <a:prstDash val="solid"/>
-          </a:ln>
-        </p:spPr>
+          <p:cNvPr id="14" name="Text 12"/>
+          <p:cNvSpPr/>
+          <p:nvPr/>
+        </p:nvSpPr>
+        <p:spPr>
+          <a:xfrm>
+            <a:off x="7799832" y="2935224"/>
+            <a:ext cx="3145536" cy="256032"/>
+          </a:xfrm>
+          <a:prstGeom prst="rect">
+            <a:avLst/>
+          </a:prstGeom>
+          <a:noFill/>
+          <a:ln/>
+        </p:spPr>
+        <p:txBody>
+          <a:bodyPr wrap="square" lIns="0" tIns="0" rIns="0" bIns="0" rtlCol="0" anchor="ctr"/>
+          <a:lstStyle/>
+          <a:p>
+            <a:pPr indent="0" marL="0">
+              <a:buNone/>
+            </a:pPr>
+            <a:r>
+              <a:rPr lang="en-US" sz="1300" b="1" dirty="0">
+                <a:solidFill>
+                  <a:srgbClr val="0068B7"/>
+                </a:solidFill>
+                <a:latin typeface="Aptos" pitchFamily="34" charset="0"/>
+                <a:ea typeface="Aptos" pitchFamily="34" charset="-122"/>
+                <a:cs typeface="Aptos" pitchFamily="34" charset="-120"/>
+              </a:rPr>
+              <a:t>Concept checkpoints</a:t>
+            </a:r>
+            <a:endParaRPr lang="en-US" sz="1300" dirty="0"/>
+          </a:p>
+        </p:txBody>
+      </p:sp>
+      <p:sp>
+        <p:nvSpPr>
+          <p:cNvPr id="15" name="Text 13"/>
+          <p:cNvSpPr/>
+          <p:nvPr/>
+        </p:nvSpPr>
+        <p:spPr>
+          <a:xfrm>
+            <a:off x="7818120" y="3300984"/>
+            <a:ext cx="3090672" cy="877824"/>
+          </a:xfrm>
+          <a:prstGeom prst="rect">
+            <a:avLst/>
+          </a:prstGeom>
+          <a:noFill/>
+          <a:ln/>
+        </p:spPr>
+        <p:txBody>
+          <a:bodyPr wrap="square" lIns="254" tIns="254" rIns="254" bIns="254" rtlCol="0" anchor="t">
+            <a:normAutofit/>
+          </a:bodyPr>
+          <a:lstStyle/>
+          <a:p>
+            <a:r>
+              <a:rPr lang="en-US" sz="1380" dirty="0">
+                <a:solidFill>
+                  <a:srgbClr val="17364A"/>
+                </a:solidFill>
+                <a:latin typeface="Aptos" pitchFamily="34" charset="0"/>
+                <a:ea typeface="Aptos" pitchFamily="34" charset="-122"/>
+                <a:cs typeface="Aptos" pitchFamily="34" charset="-120"/>
+              </a:rPr>
+              <a:t>This national-level module is intended for training and planning purposes.</a:t>
+            </a:r>
+            <a:endParaRPr lang="en-US" sz="1380" dirty="0"/>
+          </a:p>
+          <a:p>
+            <a:r>
+              <a:rPr lang="en-US" sz="1380" dirty="0">
+                <a:solidFill>
+                  <a:srgbClr val="17364A"/>
+                </a:solidFill>
+                <a:latin typeface="Aptos" pitchFamily="34" charset="0"/>
+                <a:ea typeface="Aptos" pitchFamily="34" charset="-122"/>
+                <a:cs typeface="Aptos" pitchFamily="34" charset="-120"/>
+              </a:rPr>
+              <a:t>It does not replace legal, privacy, procurement, civil rights, records, or agency policy.</a:t>
+            </a:r>
+            <a:endParaRPr lang="en-US" sz="1380" dirty="0"/>
+          </a:p>
+          <a:p>
+            <a:r>
+              <a:rPr lang="en-US" sz="1380" dirty="0">
+                <a:solidFill>
+                  <a:srgbClr val="17364A"/>
+                </a:solidFill>
+                <a:latin typeface="Aptos" pitchFamily="34" charset="0"/>
+                <a:ea typeface="Aptos" pitchFamily="34" charset="-122"/>
+                <a:cs typeface="Aptos" pitchFamily="34" charset="-120"/>
+              </a:rPr>
+              <a:t>Learners should confirm applicable requirements in their own jurisdiction and organization.</a:t>
+            </a:r>
+            <a:endParaRPr lang="en-US" sz="1380" dirty="0"/>
+          </a:p>
+        </p:txBody>
       </p:sp>
       <p:sp>
         <p:nvSpPr>
           <p:cNvPr id="16" name="Shape 14"/>
-          <p:cNvSpPr/>
-          <p:nvPr/>
-        </p:nvSpPr>
-        <p:spPr>
-          <a:xfrm>
-            <a:off x="9089136" y="3456432"/>
-            <a:ext cx="566928" cy="566928"/>
-          </a:xfrm>
-          <a:prstGeom prst="ellipse">
-            <a:avLst/>
-          </a:prstGeom>
-          <a:solidFill>
-            <a:srgbClr val="6A4CA3"/>
-          </a:solidFill>
-          <a:ln w="12700">
-            <a:solidFill>
-              <a:srgbClr val="6A4CA3"/>
-            </a:solidFill>
-            <a:prstDash val="solid"/>
-          </a:ln>
-        </p:spPr>
-      </p:sp>
-      <p:sp>
-        <p:nvSpPr>
-          <p:cNvPr id="17" name="Shape 15"/>
-          <p:cNvSpPr/>
-          <p:nvPr/>
-        </p:nvSpPr>
-        <p:spPr>
-          <a:xfrm>
-            <a:off x="8385048" y="3419856"/>
-            <a:ext cx="1975104" cy="0"/>
-          </a:xfrm>
-          <a:prstGeom prst="line">
-            <a:avLst/>
-          </a:prstGeom>
-          <a:noFill/>
-          <a:ln w="25400">
-            <a:solidFill>
-              <a:srgbClr val="8ABBD8"/>
-            </a:solidFill>
-            <a:prstDash val="solid"/>
-          </a:ln>
-        </p:spPr>
-      </p:sp>
-      <p:sp>
-        <p:nvSpPr>
-          <p:cNvPr id="18" name="Shape 16"/>
-          <p:cNvSpPr/>
-          <p:nvPr/>
-        </p:nvSpPr>
-        <p:spPr>
-          <a:xfrm>
-            <a:off x="8202168" y="3630168"/>
-            <a:ext cx="1170432" cy="118872"/>
-          </a:xfrm>
-          <a:prstGeom prst="line">
-            <a:avLst/>
-          </a:prstGeom>
-          <a:noFill/>
-          <a:ln w="25400">
-            <a:solidFill>
-              <a:srgbClr val="8ABBD8"/>
-            </a:solidFill>
-            <a:prstDash val="solid"/>
-          </a:ln>
-        </p:spPr>
-      </p:sp>
-      <p:sp>
-        <p:nvSpPr>
-          <p:cNvPr id="19" name="Shape 17"/>
-          <p:cNvSpPr/>
-          <p:nvPr/>
-        </p:nvSpPr>
-        <p:spPr>
-          <a:xfrm>
-            <a:off x="10543032" y="3630168"/>
-            <a:ext cx="-1170432" cy="118872"/>
-          </a:xfrm>
-          <a:prstGeom prst="line">
-            <a:avLst/>
-          </a:prstGeom>
-          <a:noFill/>
-          <a:ln w="25400">
-            <a:solidFill>
-              <a:srgbClr val="8ABBD8"/>
-            </a:solidFill>
-            <a:prstDash val="solid"/>
-          </a:ln>
-        </p:spPr>
-      </p:sp>
-      <p:sp>
-        <p:nvSpPr>
-          <p:cNvPr id="20" name="Text 18"/>
-          <p:cNvSpPr/>
-          <p:nvPr/>
-        </p:nvSpPr>
-        <p:spPr>
-          <a:xfrm>
-            <a:off x="7863840" y="4069080"/>
-            <a:ext cx="3017520" cy="164592"/>
-          </a:xfrm>
-          <a:prstGeom prst="rect">
-            <a:avLst/>
-          </a:prstGeom>
-          <a:noFill/>
-          <a:ln/>
-        </p:spPr>
-        <p:txBody>
-          <a:bodyPr wrap="square" lIns="0" tIns="0" rIns="0" bIns="0" rtlCol="0" anchor="ctr"/>
-          <a:lstStyle/>
-          <a:p>
-            <a:pPr algn="ctr" indent="0" marL="0">
-              <a:buNone/>
-            </a:pPr>
-            <a:r>
-              <a:rPr lang="en-US" sz="900" b="1" dirty="0">
-                <a:solidFill>
-                  <a:srgbClr val="003A63"/>
-                </a:solidFill>
-                <a:latin typeface="Aptos" pitchFamily="34" charset="0"/>
-                <a:ea typeface="Aptos" pitchFamily="34" charset="-122"/>
-                <a:cs typeface="Aptos" pitchFamily="34" charset="-120"/>
-              </a:rPr>
-              <a:t>Decision rights</a:t>
-            </a:r>
-            <a:endParaRPr lang="en-US" sz="900" dirty="0"/>
-          </a:p>
-        </p:txBody>
-      </p:sp>
-      <p:sp>
-        <p:nvSpPr>
-          <p:cNvPr id="21" name="Shape 19"/>
           <p:cNvSpPr/>
           <p:nvPr/>
         </p:nvSpPr>
@@ -18755,7 +16451,7 @@
       </p:sp>
       <p:sp>
         <p:nvSpPr>
-          <p:cNvPr id="22" name="Text 20"/>
+          <p:cNvPr id="17" name="Text 15"/>
           <p:cNvSpPr/>
           <p:nvPr/>
         </p:nvSpPr>
@@ -18794,7 +16490,7 @@
       </p:sp>
       <p:sp>
         <p:nvSpPr>
-          <p:cNvPr id="23" name="Text 21"/>
+          <p:cNvPr id="18" name="Text 16"/>
           <p:cNvSpPr/>
           <p:nvPr/>
         </p:nvSpPr>
@@ -19288,13 +16984,11 @@
             </a:avLst>
           </a:prstGeom>
           <a:solidFill>
-            <a:srgbClr val="FFFFFF">
-              <a:alpha val="88000"/>
-            </a:srgbClr>
+            <a:srgbClr val="FFFFFF"/>
           </a:solidFill>
           <a:ln w="12700">
             <a:solidFill>
-              <a:srgbClr val="D6E8F2"/>
+              <a:srgbClr val="B9D7E6"/>
             </a:solidFill>
             <a:prstDash val="solid"/>
           </a:ln>
@@ -19302,261 +16996,98 @@
       </p:sp>
       <p:sp>
         <p:nvSpPr>
-          <p:cNvPr id="14" name="Shape 12"/>
-          <p:cNvSpPr/>
-          <p:nvPr/>
-        </p:nvSpPr>
-        <p:spPr>
-          <a:xfrm>
-            <a:off x="8138160" y="3291840"/>
-            <a:ext cx="329184" cy="329184"/>
-          </a:xfrm>
-          <a:prstGeom prst="ellipse">
-            <a:avLst/>
-          </a:prstGeom>
-          <a:solidFill>
-            <a:srgbClr val="0068B7"/>
-          </a:solidFill>
-          <a:ln w="12700">
-            <a:solidFill>
-              <a:srgbClr val="0068B7"/>
-            </a:solidFill>
-            <a:prstDash val="solid"/>
-          </a:ln>
-        </p:spPr>
-      </p:sp>
-      <p:sp>
-        <p:nvSpPr>
-          <p:cNvPr id="15" name="Shape 13"/>
-          <p:cNvSpPr/>
-          <p:nvPr/>
-        </p:nvSpPr>
-        <p:spPr>
-          <a:xfrm>
-            <a:off x="10332720" y="3383280"/>
-            <a:ext cx="329184" cy="329184"/>
-          </a:xfrm>
-          <a:prstGeom prst="ellipse">
-            <a:avLst/>
-          </a:prstGeom>
-          <a:solidFill>
-            <a:srgbClr val="2F8A28"/>
-          </a:solidFill>
-          <a:ln w="12700">
-            <a:solidFill>
-              <a:srgbClr val="2F8A28"/>
-            </a:solidFill>
-            <a:prstDash val="solid"/>
-          </a:ln>
-        </p:spPr>
+          <p:cNvPr id="14" name="Text 12"/>
+          <p:cNvSpPr/>
+          <p:nvPr/>
+        </p:nvSpPr>
+        <p:spPr>
+          <a:xfrm>
+            <a:off x="7799832" y="2935224"/>
+            <a:ext cx="3145536" cy="256032"/>
+          </a:xfrm>
+          <a:prstGeom prst="rect">
+            <a:avLst/>
+          </a:prstGeom>
+          <a:noFill/>
+          <a:ln/>
+        </p:spPr>
+        <p:txBody>
+          <a:bodyPr wrap="square" lIns="0" tIns="0" rIns="0" bIns="0" rtlCol="0" anchor="ctr"/>
+          <a:lstStyle/>
+          <a:p>
+            <a:pPr indent="0" marL="0">
+              <a:buNone/>
+            </a:pPr>
+            <a:r>
+              <a:rPr lang="en-US" sz="1300" b="1" dirty="0">
+                <a:solidFill>
+                  <a:srgbClr val="0068B7"/>
+                </a:solidFill>
+                <a:latin typeface="Aptos" pitchFamily="34" charset="0"/>
+                <a:ea typeface="Aptos" pitchFamily="34" charset="-122"/>
+                <a:cs typeface="Aptos" pitchFamily="34" charset="-120"/>
+              </a:rPr>
+              <a:t>Concept checkpoints</a:t>
+            </a:r>
+            <a:endParaRPr lang="en-US" sz="1300" dirty="0"/>
+          </a:p>
+        </p:txBody>
+      </p:sp>
+      <p:sp>
+        <p:nvSpPr>
+          <p:cNvPr id="15" name="Text 13"/>
+          <p:cNvSpPr/>
+          <p:nvPr/>
+        </p:nvSpPr>
+        <p:spPr>
+          <a:xfrm>
+            <a:off x="7818120" y="3300984"/>
+            <a:ext cx="3090672" cy="877824"/>
+          </a:xfrm>
+          <a:prstGeom prst="rect">
+            <a:avLst/>
+          </a:prstGeom>
+          <a:noFill/>
+          <a:ln/>
+        </p:spPr>
+        <p:txBody>
+          <a:bodyPr wrap="square" lIns="254" tIns="254" rIns="254" bIns="254" rtlCol="0" anchor="t">
+            <a:normAutofit/>
+          </a:bodyPr>
+          <a:lstStyle/>
+          <a:p>
+            <a:r>
+              <a:rPr lang="en-US" sz="1380" dirty="0">
+                <a:solidFill>
+                  <a:srgbClr val="17364A"/>
+                </a:solidFill>
+                <a:latin typeface="Aptos" pitchFamily="34" charset="0"/>
+                <a:ea typeface="Aptos" pitchFamily="34" charset="-122"/>
+                <a:cs typeface="Aptos" pitchFamily="34" charset="-120"/>
+              </a:rPr>
+              <a:t>A health department uses AI to draft a heat safety message for older adults, outdoor.</a:t>
+            </a:r>
+            <a:endParaRPr lang="en-US" sz="1380" dirty="0"/>
+          </a:p>
+          <a:p>
+            <a:r>
+              <a:rPr lang="en-US" sz="1380" dirty="0">
+                <a:solidFill>
+                  <a:srgbClr val="17364A"/>
+                </a:solidFill>
+                <a:latin typeface="Aptos" pitchFamily="34" charset="0"/>
+                <a:ea typeface="Aptos" pitchFamily="34" charset="-122"/>
+                <a:cs typeface="Aptos" pitchFamily="34" charset="-120"/>
+              </a:rPr>
+              <a:t>Communications staff verify the recommendations against official guidance, rewrite the.</a:t>
+            </a:r>
+            <a:endParaRPr lang="en-US" sz="1380" dirty="0"/>
+          </a:p>
+        </p:txBody>
       </p:sp>
       <p:sp>
         <p:nvSpPr>
           <p:cNvPr id="16" name="Shape 14"/>
-          <p:cNvSpPr/>
-          <p:nvPr/>
-        </p:nvSpPr>
-        <p:spPr>
-          <a:xfrm>
-            <a:off x="9235440" y="3502152"/>
-            <a:ext cx="329184" cy="329184"/>
-          </a:xfrm>
-          <a:prstGeom prst="ellipse">
-            <a:avLst/>
-          </a:prstGeom>
-          <a:solidFill>
-            <a:srgbClr val="D69A2D"/>
-          </a:solidFill>
-          <a:ln w="12700">
-            <a:solidFill>
-              <a:srgbClr val="D69A2D"/>
-            </a:solidFill>
-            <a:prstDash val="solid"/>
-          </a:ln>
-        </p:spPr>
-      </p:sp>
-      <p:sp>
-        <p:nvSpPr>
-          <p:cNvPr id="17" name="Shape 15"/>
-          <p:cNvSpPr/>
-          <p:nvPr/>
-        </p:nvSpPr>
-        <p:spPr>
-          <a:xfrm>
-            <a:off x="9235440" y="3657600"/>
-            <a:ext cx="329184" cy="329184"/>
-          </a:xfrm>
-          <a:prstGeom prst="ellipse">
-            <a:avLst/>
-          </a:prstGeom>
-          <a:solidFill>
-            <a:srgbClr val="6A4CA3"/>
-          </a:solidFill>
-          <a:ln w="12700">
-            <a:solidFill>
-              <a:srgbClr val="6A4CA3"/>
-            </a:solidFill>
-            <a:prstDash val="solid"/>
-          </a:ln>
-        </p:spPr>
-      </p:sp>
-      <p:sp>
-        <p:nvSpPr>
-          <p:cNvPr id="18" name="Shape 16"/>
-          <p:cNvSpPr/>
-          <p:nvPr/>
-        </p:nvSpPr>
-        <p:spPr>
-          <a:xfrm>
-            <a:off x="8302752" y="3456432"/>
-            <a:ext cx="1097280" cy="365760"/>
-          </a:xfrm>
-          <a:prstGeom prst="line">
-            <a:avLst/>
-          </a:prstGeom>
-          <a:noFill/>
-          <a:ln w="19050">
-            <a:solidFill>
-              <a:srgbClr val="8ABBD8"/>
-            </a:solidFill>
-            <a:prstDash val="solid"/>
-          </a:ln>
-        </p:spPr>
-      </p:sp>
-      <p:sp>
-        <p:nvSpPr>
-          <p:cNvPr id="19" name="Shape 17"/>
-          <p:cNvSpPr/>
-          <p:nvPr/>
-        </p:nvSpPr>
-        <p:spPr>
-          <a:xfrm>
-            <a:off x="10497312" y="3547872"/>
-            <a:ext cx="-1097280" cy="274320"/>
-          </a:xfrm>
-          <a:prstGeom prst="line">
-            <a:avLst/>
-          </a:prstGeom>
-          <a:noFill/>
-          <a:ln w="19050">
-            <a:solidFill>
-              <a:srgbClr val="8ABBD8"/>
-            </a:solidFill>
-            <a:prstDash val="solid"/>
-          </a:ln>
-        </p:spPr>
-      </p:sp>
-      <p:sp>
-        <p:nvSpPr>
-          <p:cNvPr id="20" name="Shape 18"/>
-          <p:cNvSpPr/>
-          <p:nvPr/>
-        </p:nvSpPr>
-        <p:spPr>
-          <a:xfrm>
-            <a:off x="9400032" y="3666744"/>
-            <a:ext cx="0" cy="155448"/>
-          </a:xfrm>
-          <a:prstGeom prst="line">
-            <a:avLst/>
-          </a:prstGeom>
-          <a:noFill/>
-          <a:ln w="19050">
-            <a:solidFill>
-              <a:srgbClr val="8ABBD8"/>
-            </a:solidFill>
-            <a:prstDash val="solid"/>
-          </a:ln>
-        </p:spPr>
-      </p:sp>
-      <p:sp>
-        <p:nvSpPr>
-          <p:cNvPr id="21" name="Shape 19"/>
-          <p:cNvSpPr/>
-          <p:nvPr/>
-        </p:nvSpPr>
-        <p:spPr>
-          <a:xfrm>
-            <a:off x="8302752" y="3456432"/>
-            <a:ext cx="1097280" cy="210312"/>
-          </a:xfrm>
-          <a:prstGeom prst="line">
-            <a:avLst/>
-          </a:prstGeom>
-          <a:noFill/>
-          <a:ln w="19050">
-            <a:solidFill>
-              <a:srgbClr val="8ABBD8"/>
-            </a:solidFill>
-            <a:prstDash val="solid"/>
-          </a:ln>
-        </p:spPr>
-      </p:sp>
-      <p:sp>
-        <p:nvSpPr>
-          <p:cNvPr id="22" name="Shape 20"/>
-          <p:cNvSpPr/>
-          <p:nvPr/>
-        </p:nvSpPr>
-        <p:spPr>
-          <a:xfrm>
-            <a:off x="10497312" y="3547872"/>
-            <a:ext cx="-1097280" cy="118872"/>
-          </a:xfrm>
-          <a:prstGeom prst="line">
-            <a:avLst/>
-          </a:prstGeom>
-          <a:noFill/>
-          <a:ln w="19050">
-            <a:solidFill>
-              <a:srgbClr val="8ABBD8"/>
-            </a:solidFill>
-            <a:prstDash val="solid"/>
-          </a:ln>
-        </p:spPr>
-      </p:sp>
-      <p:sp>
-        <p:nvSpPr>
-          <p:cNvPr id="23" name="Text 21"/>
-          <p:cNvSpPr/>
-          <p:nvPr/>
-        </p:nvSpPr>
-        <p:spPr>
-          <a:xfrm>
-            <a:off x="7909560" y="3977640"/>
-            <a:ext cx="2926080" cy="182880"/>
-          </a:xfrm>
-          <a:prstGeom prst="rect">
-            <a:avLst/>
-          </a:prstGeom>
-          <a:noFill/>
-          <a:ln/>
-        </p:spPr>
-        <p:txBody>
-          <a:bodyPr wrap="square" lIns="0" tIns="0" rIns="0" bIns="0" rtlCol="0" anchor="ctr"/>
-          <a:lstStyle/>
-          <a:p>
-            <a:pPr algn="ctr" indent="0" marL="0">
-              <a:buNone/>
-            </a:pPr>
-            <a:r>
-              <a:rPr lang="en-US" sz="1000" dirty="0">
-                <a:solidFill>
-                  <a:srgbClr val="003A63"/>
-                </a:solidFill>
-                <a:latin typeface="Aptos" pitchFamily="34" charset="0"/>
-                <a:ea typeface="Aptos" pitchFamily="34" charset="-122"/>
-                <a:cs typeface="Aptos" pitchFamily="34" charset="-120"/>
-              </a:rPr>
-              <a:t>People and trust</a:t>
-            </a:r>
-            <a:endParaRPr lang="en-US" sz="1000" dirty="0"/>
-          </a:p>
-        </p:txBody>
-      </p:sp>
-      <p:sp>
-        <p:nvSpPr>
-          <p:cNvPr id="24" name="Shape 22"/>
           <p:cNvSpPr/>
           <p:nvPr/>
         </p:nvSpPr>
@@ -19583,7 +17114,7 @@
       </p:sp>
       <p:sp>
         <p:nvSpPr>
-          <p:cNvPr id="25" name="Text 23"/>
+          <p:cNvPr id="17" name="Text 15"/>
           <p:cNvSpPr/>
           <p:nvPr/>
         </p:nvSpPr>
@@ -19622,7 +17153,7 @@
       </p:sp>
       <p:sp>
         <p:nvSpPr>
-          <p:cNvPr id="26" name="Text 24"/>
+          <p:cNvPr id="18" name="Text 16"/>
           <p:cNvSpPr/>
           <p:nvPr/>
         </p:nvSpPr>
@@ -20130,13 +17661,11 @@
             </a:avLst>
           </a:prstGeom>
           <a:solidFill>
-            <a:srgbClr val="FFFFFF">
-              <a:alpha val="88000"/>
-            </a:srgbClr>
+            <a:srgbClr val="FFFFFF"/>
           </a:solidFill>
           <a:ln w="12700">
             <a:solidFill>
-              <a:srgbClr val="D6E8F2"/>
+              <a:srgbClr val="B9D7E6"/>
             </a:solidFill>
             <a:prstDash val="solid"/>
           </a:ln>
@@ -20144,261 +17673,112 @@
       </p:sp>
       <p:sp>
         <p:nvSpPr>
-          <p:cNvPr id="14" name="Shape 12"/>
-          <p:cNvSpPr/>
-          <p:nvPr/>
-        </p:nvSpPr>
-        <p:spPr>
-          <a:xfrm>
-            <a:off x="8138160" y="3291840"/>
-            <a:ext cx="329184" cy="329184"/>
-          </a:xfrm>
-          <a:prstGeom prst="ellipse">
-            <a:avLst/>
-          </a:prstGeom>
-          <a:solidFill>
-            <a:srgbClr val="0068B7"/>
-          </a:solidFill>
-          <a:ln w="12700">
-            <a:solidFill>
-              <a:srgbClr val="0068B7"/>
-            </a:solidFill>
-            <a:prstDash val="solid"/>
-          </a:ln>
-        </p:spPr>
-      </p:sp>
-      <p:sp>
-        <p:nvSpPr>
-          <p:cNvPr id="15" name="Shape 13"/>
-          <p:cNvSpPr/>
-          <p:nvPr/>
-        </p:nvSpPr>
-        <p:spPr>
-          <a:xfrm>
-            <a:off x="10332720" y="3383280"/>
-            <a:ext cx="329184" cy="329184"/>
-          </a:xfrm>
-          <a:prstGeom prst="ellipse">
-            <a:avLst/>
-          </a:prstGeom>
-          <a:solidFill>
-            <a:srgbClr val="2F8A28"/>
-          </a:solidFill>
-          <a:ln w="12700">
-            <a:solidFill>
-              <a:srgbClr val="2F8A28"/>
-            </a:solidFill>
-            <a:prstDash val="solid"/>
-          </a:ln>
-        </p:spPr>
+          <p:cNvPr id="14" name="Text 12"/>
+          <p:cNvSpPr/>
+          <p:nvPr/>
+        </p:nvSpPr>
+        <p:spPr>
+          <a:xfrm>
+            <a:off x="7799832" y="2935224"/>
+            <a:ext cx="3145536" cy="256032"/>
+          </a:xfrm>
+          <a:prstGeom prst="rect">
+            <a:avLst/>
+          </a:prstGeom>
+          <a:noFill/>
+          <a:ln/>
+        </p:spPr>
+        <p:txBody>
+          <a:bodyPr wrap="square" lIns="0" tIns="0" rIns="0" bIns="0" rtlCol="0" anchor="ctr"/>
+          <a:lstStyle/>
+          <a:p>
+            <a:pPr indent="0" marL="0">
+              <a:buNone/>
+            </a:pPr>
+            <a:r>
+              <a:rPr lang="en-US" sz="1300" b="1" dirty="0">
+                <a:solidFill>
+                  <a:srgbClr val="0068B7"/>
+                </a:solidFill>
+                <a:latin typeface="Aptos" pitchFamily="34" charset="0"/>
+                <a:ea typeface="Aptos" pitchFamily="34" charset="-122"/>
+                <a:cs typeface="Aptos" pitchFamily="34" charset="-120"/>
+              </a:rPr>
+              <a:t>Concept checkpoints</a:t>
+            </a:r>
+            <a:endParaRPr lang="en-US" sz="1300" dirty="0"/>
+          </a:p>
+        </p:txBody>
+      </p:sp>
+      <p:sp>
+        <p:nvSpPr>
+          <p:cNvPr id="15" name="Text 13"/>
+          <p:cNvSpPr/>
+          <p:nvPr/>
+        </p:nvSpPr>
+        <p:spPr>
+          <a:xfrm>
+            <a:off x="7818120" y="3300984"/>
+            <a:ext cx="3090672" cy="877824"/>
+          </a:xfrm>
+          <a:prstGeom prst="rect">
+            <a:avLst/>
+          </a:prstGeom>
+          <a:noFill/>
+          <a:ln/>
+        </p:spPr>
+        <p:txBody>
+          <a:bodyPr wrap="square" lIns="254" tIns="254" rIns="254" bIns="254" rtlCol="0" anchor="t">
+            <a:normAutofit/>
+          </a:bodyPr>
+          <a:lstStyle/>
+          <a:p>
+            <a:r>
+              <a:rPr lang="en-US" sz="1380" dirty="0">
+                <a:solidFill>
+                  <a:srgbClr val="17364A"/>
+                </a:solidFill>
+                <a:latin typeface="Aptos" pitchFamily="34" charset="0"/>
+                <a:ea typeface="Aptos" pitchFamily="34" charset="-122"/>
+                <a:cs typeface="Aptos" pitchFamily="34" charset="-120"/>
+              </a:rPr>
+              <a:t>It can generate first drafts, propose alternative tones, simplify technical language,.</a:t>
+            </a:r>
+            <a:endParaRPr lang="en-US" sz="1380" dirty="0"/>
+          </a:p>
+          <a:p>
+            <a:r>
+              <a:rPr lang="en-US" sz="1380" dirty="0">
+                <a:solidFill>
+                  <a:srgbClr val="17364A"/>
+                </a:solidFill>
+                <a:latin typeface="Aptos" pitchFamily="34" charset="0"/>
+                <a:ea typeface="Aptos" pitchFamily="34" charset="-122"/>
+                <a:cs typeface="Aptos" pitchFamily="34" charset="-120"/>
+              </a:rPr>
+              <a:t>However, AI should not be treated as the authority on public health content.</a:t>
+            </a:r>
+            <a:endParaRPr lang="en-US" sz="1380" dirty="0"/>
+          </a:p>
+          <a:p>
+            <a:r>
+              <a:rPr lang="en-US" sz="1380" dirty="0">
+                <a:solidFill>
+                  <a:srgbClr val="17364A"/>
+                </a:solidFill>
+                <a:latin typeface="Aptos" pitchFamily="34" charset="0"/>
+                <a:ea typeface="Aptos" pitchFamily="34" charset="-122"/>
+                <a:cs typeface="Aptos" pitchFamily="34" charset="-120"/>
+              </a:rPr>
+              <a:t>The approved evidence base should come from agency guidance, subject matter experts,.</a:t>
+            </a:r>
+            <a:endParaRPr lang="en-US" sz="1380" dirty="0"/>
+          </a:p>
+        </p:txBody>
       </p:sp>
       <p:sp>
         <p:nvSpPr>
           <p:cNvPr id="16" name="Shape 14"/>
-          <p:cNvSpPr/>
-          <p:nvPr/>
-        </p:nvSpPr>
-        <p:spPr>
-          <a:xfrm>
-            <a:off x="9235440" y="3502152"/>
-            <a:ext cx="329184" cy="329184"/>
-          </a:xfrm>
-          <a:prstGeom prst="ellipse">
-            <a:avLst/>
-          </a:prstGeom>
-          <a:solidFill>
-            <a:srgbClr val="D69A2D"/>
-          </a:solidFill>
-          <a:ln w="12700">
-            <a:solidFill>
-              <a:srgbClr val="D69A2D"/>
-            </a:solidFill>
-            <a:prstDash val="solid"/>
-          </a:ln>
-        </p:spPr>
-      </p:sp>
-      <p:sp>
-        <p:nvSpPr>
-          <p:cNvPr id="17" name="Shape 15"/>
-          <p:cNvSpPr/>
-          <p:nvPr/>
-        </p:nvSpPr>
-        <p:spPr>
-          <a:xfrm>
-            <a:off x="9235440" y="3657600"/>
-            <a:ext cx="329184" cy="329184"/>
-          </a:xfrm>
-          <a:prstGeom prst="ellipse">
-            <a:avLst/>
-          </a:prstGeom>
-          <a:solidFill>
-            <a:srgbClr val="6A4CA3"/>
-          </a:solidFill>
-          <a:ln w="12700">
-            <a:solidFill>
-              <a:srgbClr val="6A4CA3"/>
-            </a:solidFill>
-            <a:prstDash val="solid"/>
-          </a:ln>
-        </p:spPr>
-      </p:sp>
-      <p:sp>
-        <p:nvSpPr>
-          <p:cNvPr id="18" name="Shape 16"/>
-          <p:cNvSpPr/>
-          <p:nvPr/>
-        </p:nvSpPr>
-        <p:spPr>
-          <a:xfrm>
-            <a:off x="8302752" y="3456432"/>
-            <a:ext cx="1097280" cy="365760"/>
-          </a:xfrm>
-          <a:prstGeom prst="line">
-            <a:avLst/>
-          </a:prstGeom>
-          <a:noFill/>
-          <a:ln w="19050">
-            <a:solidFill>
-              <a:srgbClr val="8ABBD8"/>
-            </a:solidFill>
-            <a:prstDash val="solid"/>
-          </a:ln>
-        </p:spPr>
-      </p:sp>
-      <p:sp>
-        <p:nvSpPr>
-          <p:cNvPr id="19" name="Shape 17"/>
-          <p:cNvSpPr/>
-          <p:nvPr/>
-        </p:nvSpPr>
-        <p:spPr>
-          <a:xfrm>
-            <a:off x="10497312" y="3547872"/>
-            <a:ext cx="-1097280" cy="274320"/>
-          </a:xfrm>
-          <a:prstGeom prst="line">
-            <a:avLst/>
-          </a:prstGeom>
-          <a:noFill/>
-          <a:ln w="19050">
-            <a:solidFill>
-              <a:srgbClr val="8ABBD8"/>
-            </a:solidFill>
-            <a:prstDash val="solid"/>
-          </a:ln>
-        </p:spPr>
-      </p:sp>
-      <p:sp>
-        <p:nvSpPr>
-          <p:cNvPr id="20" name="Shape 18"/>
-          <p:cNvSpPr/>
-          <p:nvPr/>
-        </p:nvSpPr>
-        <p:spPr>
-          <a:xfrm>
-            <a:off x="9400032" y="3666744"/>
-            <a:ext cx="0" cy="155448"/>
-          </a:xfrm>
-          <a:prstGeom prst="line">
-            <a:avLst/>
-          </a:prstGeom>
-          <a:noFill/>
-          <a:ln w="19050">
-            <a:solidFill>
-              <a:srgbClr val="8ABBD8"/>
-            </a:solidFill>
-            <a:prstDash val="solid"/>
-          </a:ln>
-        </p:spPr>
-      </p:sp>
-      <p:sp>
-        <p:nvSpPr>
-          <p:cNvPr id="21" name="Shape 19"/>
-          <p:cNvSpPr/>
-          <p:nvPr/>
-        </p:nvSpPr>
-        <p:spPr>
-          <a:xfrm>
-            <a:off x="8302752" y="3456432"/>
-            <a:ext cx="1097280" cy="210312"/>
-          </a:xfrm>
-          <a:prstGeom prst="line">
-            <a:avLst/>
-          </a:prstGeom>
-          <a:noFill/>
-          <a:ln w="19050">
-            <a:solidFill>
-              <a:srgbClr val="8ABBD8"/>
-            </a:solidFill>
-            <a:prstDash val="solid"/>
-          </a:ln>
-        </p:spPr>
-      </p:sp>
-      <p:sp>
-        <p:nvSpPr>
-          <p:cNvPr id="22" name="Shape 20"/>
-          <p:cNvSpPr/>
-          <p:nvPr/>
-        </p:nvSpPr>
-        <p:spPr>
-          <a:xfrm>
-            <a:off x="10497312" y="3547872"/>
-            <a:ext cx="-1097280" cy="118872"/>
-          </a:xfrm>
-          <a:prstGeom prst="line">
-            <a:avLst/>
-          </a:prstGeom>
-          <a:noFill/>
-          <a:ln w="19050">
-            <a:solidFill>
-              <a:srgbClr val="8ABBD8"/>
-            </a:solidFill>
-            <a:prstDash val="solid"/>
-          </a:ln>
-        </p:spPr>
-      </p:sp>
-      <p:sp>
-        <p:nvSpPr>
-          <p:cNvPr id="23" name="Text 21"/>
-          <p:cNvSpPr/>
-          <p:nvPr/>
-        </p:nvSpPr>
-        <p:spPr>
-          <a:xfrm>
-            <a:off x="7909560" y="3977640"/>
-            <a:ext cx="2926080" cy="182880"/>
-          </a:xfrm>
-          <a:prstGeom prst="rect">
-            <a:avLst/>
-          </a:prstGeom>
-          <a:noFill/>
-          <a:ln/>
-        </p:spPr>
-        <p:txBody>
-          <a:bodyPr wrap="square" lIns="0" tIns="0" rIns="0" bIns="0" rtlCol="0" anchor="ctr"/>
-          <a:lstStyle/>
-          <a:p>
-            <a:pPr algn="ctr" indent="0" marL="0">
-              <a:buNone/>
-            </a:pPr>
-            <a:r>
-              <a:rPr lang="en-US" sz="1000" dirty="0">
-                <a:solidFill>
-                  <a:srgbClr val="003A63"/>
-                </a:solidFill>
-                <a:latin typeface="Aptos" pitchFamily="34" charset="0"/>
-                <a:ea typeface="Aptos" pitchFamily="34" charset="-122"/>
-                <a:cs typeface="Aptos" pitchFamily="34" charset="-120"/>
-              </a:rPr>
-              <a:t>People and trust</a:t>
-            </a:r>
-            <a:endParaRPr lang="en-US" sz="1000" dirty="0"/>
-          </a:p>
-        </p:txBody>
-      </p:sp>
-      <p:sp>
-        <p:nvSpPr>
-          <p:cNvPr id="24" name="Shape 22"/>
           <p:cNvSpPr/>
           <p:nvPr/>
         </p:nvSpPr>
@@ -20425,7 +17805,7 @@
       </p:sp>
       <p:sp>
         <p:nvSpPr>
-          <p:cNvPr id="25" name="Text 23"/>
+          <p:cNvPr id="17" name="Text 15"/>
           <p:cNvSpPr/>
           <p:nvPr/>
         </p:nvSpPr>
@@ -20464,7 +17844,7 @@
       </p:sp>
       <p:sp>
         <p:nvSpPr>
-          <p:cNvPr id="26" name="Text 24"/>
+          <p:cNvPr id="18" name="Text 16"/>
           <p:cNvSpPr/>
           <p:nvPr/>
         </p:nvSpPr>

--- a/downloads/presentations/modules/com-200.pptx
+++ b/downloads/presentations/modules/com-200.pptx
@@ -3447,49 +3447,58 @@
           <a:ln/>
         </p:spPr>
         <p:txBody>
-          <a:bodyPr wrap="square" lIns="635" tIns="635" rIns="635" bIns="635" rtlCol="0" anchor="t">
+          <a:bodyPr wrap="square" lIns="1016" tIns="1016" rIns="1016" bIns="1016" rtlCol="0" anchor="t">
             <a:normAutofit/>
           </a:bodyPr>
           <a:lstStyle/>
           <a:p>
+            <a:pPr indent="0" marL="0">
+              <a:buNone/>
+            </a:pPr>
             <a:r>
               <a:rPr lang="en-US" sz="2100" dirty="0">
                 <a:solidFill>
-                  <a:srgbClr val="17364A"/>
-                </a:solidFill>
-                <a:latin typeface="Aptos" pitchFamily="34" charset="0"/>
-                <a:ea typeface="Aptos" pitchFamily="34" charset="-122"/>
-                <a:cs typeface="Aptos" pitchFamily="34" charset="-120"/>
-              </a:rPr>
-              <a:t>AI can also support review, but it should not replace reviewers.</a:t>
+                  <a:srgbClr val="003A63"/>
+                </a:solidFill>
+                <a:latin typeface="Aptos" pitchFamily="34" charset="0"/>
+                <a:ea typeface="Aptos" pitchFamily="34" charset="-122"/>
+                <a:cs typeface="Aptos" pitchFamily="34" charset="-120"/>
+              </a:rPr>
+              <a:t>• AI can also support review, but it should not replace reviewers.</a:t>
             </a:r>
             <a:endParaRPr lang="en-US" sz="2100" dirty="0"/>
           </a:p>
           <a:p>
+            <a:pPr indent="0" marL="0">
+              <a:buNone/>
+            </a:pPr>
             <a:r>
               <a:rPr lang="en-US" sz="2100" dirty="0">
                 <a:solidFill>
-                  <a:srgbClr val="17364A"/>
-                </a:solidFill>
-                <a:latin typeface="Aptos" pitchFamily="34" charset="0"/>
-                <a:ea typeface="Aptos" pitchFamily="34" charset="-122"/>
-                <a:cs typeface="Aptos" pitchFamily="34" charset="-120"/>
-              </a:rPr>
-              <a:t>A communications workflow should define who checks technical accuracy, who reviews equity and.</a:t>
+                  <a:srgbClr val="003A63"/>
+                </a:solidFill>
+                <a:latin typeface="Aptos" pitchFamily="34" charset="0"/>
+                <a:ea typeface="Aptos" pitchFamily="34" charset="-122"/>
+                <a:cs typeface="Aptos" pitchFamily="34" charset="-120"/>
+              </a:rPr>
+              <a:t>• A communications workflow should define who checks technical accuracy, who reviews equity and.</a:t>
             </a:r>
             <a:endParaRPr lang="en-US" sz="2100" dirty="0"/>
           </a:p>
           <a:p>
+            <a:pPr indent="0" marL="0">
+              <a:buNone/>
+            </a:pPr>
             <a:r>
               <a:rPr lang="en-US" sz="2100" dirty="0">
                 <a:solidFill>
-                  <a:srgbClr val="17364A"/>
-                </a:solidFill>
-                <a:latin typeface="Aptos" pitchFamily="34" charset="0"/>
-                <a:ea typeface="Aptos" pitchFamily="34" charset="-122"/>
-                <a:cs typeface="Aptos" pitchFamily="34" charset="-120"/>
-              </a:rPr>
-              <a:t>For urgent communications, the workflow should include expedited review rules that still preserve.</a:t>
+                  <a:srgbClr val="003A63"/>
+                </a:solidFill>
+                <a:latin typeface="Aptos" pitchFamily="34" charset="0"/>
+                <a:ea typeface="Aptos" pitchFamily="34" charset="-122"/>
+                <a:cs typeface="Aptos" pitchFamily="34" charset="-120"/>
+              </a:rPr>
+              <a:t>• For urgent communications, the workflow should include expedited review rules that still.</a:t>
             </a:r>
             <a:endParaRPr lang="en-US" sz="2100" dirty="0"/>
           </a:p>
@@ -3569,17 +3578,17 @@
         </p:nvSpPr>
         <p:spPr>
           <a:xfrm>
-            <a:off x="7799832" y="1828800"/>
-            <a:ext cx="3145536" cy="685800"/>
-          </a:xfrm>
-          <a:prstGeom prst="rect">
-            <a:avLst/>
-          </a:prstGeom>
-          <a:noFill/>
-          <a:ln/>
-        </p:spPr>
-        <p:txBody>
-          <a:bodyPr wrap="square" lIns="0" tIns="0" rIns="0" bIns="0" rtlCol="0" anchor="t">
+            <a:off x="7799832" y="1801368"/>
+            <a:ext cx="3145536" cy="758952"/>
+          </a:xfrm>
+          <a:prstGeom prst="rect">
+            <a:avLst/>
+          </a:prstGeom>
+          <a:noFill/>
+          <a:ln/>
+        </p:spPr>
+        <p:txBody>
+          <a:bodyPr wrap="square" lIns="254" tIns="254" rIns="254" bIns="254" rtlCol="0" anchor="t">
             <a:normAutofit/>
           </a:bodyPr>
           <a:lstStyle/>
@@ -3588,7 +3597,7 @@
               <a:buNone/>
             </a:pPr>
             <a:r>
-              <a:rPr lang="en-US" sz="1550" dirty="0">
+              <a:rPr lang="en-US" sz="1320" dirty="0">
                 <a:solidFill>
                   <a:srgbClr val="17364A"/>
                 </a:solidFill>
@@ -3598,7 +3607,7 @@
               </a:rPr>
               <a:t>AI can also support review, but it should not replace reviewers.</a:t>
             </a:r>
-            <a:endParaRPr lang="en-US" sz="1550" dirty="0"/>
+            <a:endParaRPr lang="en-US" sz="1320" dirty="0"/>
           </a:p>
         </p:txBody>
       </p:sp>
@@ -3686,13 +3695,16 @@
           <a:ln/>
         </p:spPr>
         <p:txBody>
-          <a:bodyPr wrap="square" lIns="254" tIns="254" rIns="254" bIns="254" rtlCol="0" anchor="t">
+          <a:bodyPr wrap="square" lIns="508" tIns="508" rIns="508" bIns="508" rtlCol="0" anchor="t">
             <a:normAutofit/>
           </a:bodyPr>
           <a:lstStyle/>
           <a:p>
-            <a:r>
-              <a:rPr lang="en-US" sz="1380" dirty="0">
+            <a:pPr indent="0" marL="0">
+              <a:buNone/>
+            </a:pPr>
+            <a:r>
+              <a:rPr lang="en-US" sz="1220" dirty="0">
                 <a:solidFill>
                   <a:srgbClr val="17364A"/>
                 </a:solidFill>
@@ -3700,13 +3712,16 @@
                 <a:ea typeface="Aptos" pitchFamily="34" charset="-122"/>
                 <a:cs typeface="Aptos" pitchFamily="34" charset="-120"/>
               </a:rPr>
-              <a:t>A communications workflow should define who checks technical accuracy, who reviews equity.</a:t>
-            </a:r>
-            <a:endParaRPr lang="en-US" sz="1380" dirty="0"/>
-          </a:p>
-          <a:p>
-            <a:r>
-              <a:rPr lang="en-US" sz="1380" dirty="0">
+              <a:t>A communications workflow should define who checks technical.</a:t>
+            </a:r>
+            <a:endParaRPr lang="en-US" sz="1220" dirty="0"/>
+          </a:p>
+          <a:p>
+            <a:pPr indent="0" marL="0">
+              <a:buNone/>
+            </a:pPr>
+            <a:r>
+              <a:rPr lang="en-US" sz="1220" dirty="0">
                 <a:solidFill>
                   <a:srgbClr val="17364A"/>
                 </a:solidFill>
@@ -3714,9 +3729,9 @@
                 <a:ea typeface="Aptos" pitchFamily="34" charset="-122"/>
                 <a:cs typeface="Aptos" pitchFamily="34" charset="-120"/>
               </a:rPr>
-              <a:t>For urgent communications, the workflow should include expedited review rules that still.</a:t>
-            </a:r>
-            <a:endParaRPr lang="en-US" sz="1380" dirty="0"/>
+              <a:t>For urgent communications, the workflow should include expedited.</a:t>
+            </a:r>
+            <a:endParaRPr lang="en-US" sz="1220" dirty="0"/>
           </a:p>
         </p:txBody>
       </p:sp>
@@ -3794,17 +3809,17 @@
         </p:nvSpPr>
         <p:spPr>
           <a:xfrm>
-            <a:off x="7799832" y="5001768"/>
-            <a:ext cx="3145536" cy="502920"/>
-          </a:xfrm>
-          <a:prstGeom prst="rect">
-            <a:avLst/>
-          </a:prstGeom>
-          <a:noFill/>
-          <a:ln/>
-        </p:spPr>
-        <p:txBody>
-          <a:bodyPr wrap="square" lIns="0" tIns="0" rIns="0" bIns="0" rtlCol="0" anchor="t">
+            <a:off x="7799832" y="4974336"/>
+            <a:ext cx="3145536" cy="576072"/>
+          </a:xfrm>
+          <a:prstGeom prst="rect">
+            <a:avLst/>
+          </a:prstGeom>
+          <a:noFill/>
+          <a:ln/>
+        </p:spPr>
+        <p:txBody>
+          <a:bodyPr wrap="square" lIns="254" tIns="254" rIns="254" bIns="254" rtlCol="0" anchor="t">
             <a:normAutofit/>
           </a:bodyPr>
           <a:lstStyle/>
@@ -3813,7 +3828,7 @@
               <a:buNone/>
             </a:pPr>
             <a:r>
-              <a:rPr lang="en-US" sz="1550" dirty="0">
+              <a:rPr lang="en-US" sz="1320" dirty="0">
                 <a:solidFill>
                   <a:srgbClr val="17364A"/>
                 </a:solidFill>
@@ -3821,9 +3836,9 @@
                 <a:ea typeface="Aptos" pitchFamily="34" charset="-122"/>
                 <a:cs typeface="Aptos" pitchFamily="34" charset="-120"/>
               </a:rPr>
-              <a:t>Use the concept to plan transparent communication, gather stakeholder input, protect trust, and make sure affected communities are considered early.</a:t>
-            </a:r>
-            <a:endParaRPr lang="en-US" sz="1550" dirty="0"/>
+              <a:t>Use the concept to plan transparent communication, gather stakeholder input, protect trust, and make sure affected.</a:t>
+            </a:r>
+            <a:endParaRPr lang="en-US" sz="1320" dirty="0"/>
           </a:p>
         </p:txBody>
       </p:sp>
@@ -4124,49 +4139,58 @@
           <a:ln/>
         </p:spPr>
         <p:txBody>
-          <a:bodyPr wrap="square" lIns="635" tIns="635" rIns="635" bIns="635" rtlCol="0" anchor="t">
+          <a:bodyPr wrap="square" lIns="1016" tIns="1016" rIns="1016" bIns="1016" rtlCol="0" anchor="t">
             <a:normAutofit/>
           </a:bodyPr>
           <a:lstStyle/>
           <a:p>
+            <a:pPr indent="0" marL="0">
+              <a:buNone/>
+            </a:pPr>
             <a:r>
               <a:rPr lang="en-US" sz="2100" dirty="0">
                 <a:solidFill>
-                  <a:srgbClr val="17364A"/>
-                </a:solidFill>
-                <a:latin typeface="Aptos" pitchFamily="34" charset="0"/>
-                <a:ea typeface="Aptos" pitchFamily="34" charset="-122"/>
-                <a:cs typeface="Aptos" pitchFamily="34" charset="-120"/>
-              </a:rPr>
-              <a:t>Risks and failure modes include the following:</a:t>
+                  <a:srgbClr val="003A63"/>
+                </a:solidFill>
+                <a:latin typeface="Aptos" pitchFamily="34" charset="0"/>
+                <a:ea typeface="Aptos" pitchFamily="34" charset="-122"/>
+                <a:cs typeface="Aptos" pitchFamily="34" charset="-120"/>
+              </a:rPr>
+              <a:t>• Risks and failure modes include the following:</a:t>
             </a:r>
             <a:endParaRPr lang="en-US" sz="2100" dirty="0"/>
           </a:p>
           <a:p>
+            <a:pPr indent="0" marL="0">
+              <a:buNone/>
+            </a:pPr>
             <a:r>
               <a:rPr lang="en-US" sz="2100" dirty="0">
                 <a:solidFill>
-                  <a:srgbClr val="17364A"/>
-                </a:solidFill>
-                <a:latin typeface="Aptos" pitchFamily="34" charset="0"/>
-                <a:ea typeface="Aptos" pitchFamily="34" charset="-122"/>
-                <a:cs typeface="Aptos" pitchFamily="34" charset="-120"/>
-              </a:rPr>
-              <a:t>AI-generated messages overstating evidence or omitting uncertainty.</a:t>
+                  <a:srgbClr val="003A63"/>
+                </a:solidFill>
+                <a:latin typeface="Aptos" pitchFamily="34" charset="0"/>
+                <a:ea typeface="Aptos" pitchFamily="34" charset="-122"/>
+                <a:cs typeface="Aptos" pitchFamily="34" charset="-120"/>
+              </a:rPr>
+              <a:t>• AI-generated messages overstating evidence or omitting uncertainty.</a:t>
             </a:r>
             <a:endParaRPr lang="en-US" sz="2100" dirty="0"/>
           </a:p>
           <a:p>
+            <a:pPr indent="0" marL="0">
+              <a:buNone/>
+            </a:pPr>
             <a:r>
               <a:rPr lang="en-US" sz="2100" dirty="0">
                 <a:solidFill>
-                  <a:srgbClr val="17364A"/>
-                </a:solidFill>
-                <a:latin typeface="Aptos" pitchFamily="34" charset="0"/>
-                <a:ea typeface="Aptos" pitchFamily="34" charset="-122"/>
-                <a:cs typeface="Aptos" pitchFamily="34" charset="-120"/>
-              </a:rPr>
-              <a:t>Use of stigmatizing, blaming, or culturally inappropriate language.</a:t>
+                  <a:srgbClr val="003A63"/>
+                </a:solidFill>
+                <a:latin typeface="Aptos" pitchFamily="34" charset="0"/>
+                <a:ea typeface="Aptos" pitchFamily="34" charset="-122"/>
+                <a:cs typeface="Aptos" pitchFamily="34" charset="-120"/>
+              </a:rPr>
+              <a:t>• Use of stigmatizing, blaming, or culturally inappropriate language.</a:t>
             </a:r>
             <a:endParaRPr lang="en-US" sz="2100" dirty="0"/>
           </a:p>
@@ -4246,17 +4270,17 @@
         </p:nvSpPr>
         <p:spPr>
           <a:xfrm>
-            <a:off x="7799832" y="1828800"/>
-            <a:ext cx="3145536" cy="685800"/>
-          </a:xfrm>
-          <a:prstGeom prst="rect">
-            <a:avLst/>
-          </a:prstGeom>
-          <a:noFill/>
-          <a:ln/>
-        </p:spPr>
-        <p:txBody>
-          <a:bodyPr wrap="square" lIns="0" tIns="0" rIns="0" bIns="0" rtlCol="0" anchor="t">
+            <a:off x="7799832" y="1801368"/>
+            <a:ext cx="3145536" cy="758952"/>
+          </a:xfrm>
+          <a:prstGeom prst="rect">
+            <a:avLst/>
+          </a:prstGeom>
+          <a:noFill/>
+          <a:ln/>
+        </p:spPr>
+        <p:txBody>
+          <a:bodyPr wrap="square" lIns="254" tIns="254" rIns="254" bIns="254" rtlCol="0" anchor="t">
             <a:normAutofit/>
           </a:bodyPr>
           <a:lstStyle/>
@@ -4265,7 +4289,7 @@
               <a:buNone/>
             </a:pPr>
             <a:r>
-              <a:rPr lang="en-US" sz="1550" dirty="0">
+              <a:rPr lang="en-US" sz="1320" dirty="0">
                 <a:solidFill>
                   <a:srgbClr val="17364A"/>
                 </a:solidFill>
@@ -4275,7 +4299,7 @@
               </a:rPr>
               <a:t>Risks and failure modes include the following:</a:t>
             </a:r>
-            <a:endParaRPr lang="en-US" sz="1550" dirty="0"/>
+            <a:endParaRPr lang="en-US" sz="1320" dirty="0"/>
           </a:p>
         </p:txBody>
       </p:sp>
@@ -4363,13 +4387,16 @@
           <a:ln/>
         </p:spPr>
         <p:txBody>
-          <a:bodyPr wrap="square" lIns="254" tIns="254" rIns="254" bIns="254" rtlCol="0" anchor="t">
+          <a:bodyPr wrap="square" lIns="508" tIns="508" rIns="508" bIns="508" rtlCol="0" anchor="t">
             <a:normAutofit/>
           </a:bodyPr>
           <a:lstStyle/>
           <a:p>
-            <a:r>
-              <a:rPr lang="en-US" sz="1380" dirty="0">
+            <a:pPr indent="0" marL="0">
+              <a:buNone/>
+            </a:pPr>
+            <a:r>
+              <a:rPr lang="en-US" sz="1220" dirty="0">
                 <a:solidFill>
                   <a:srgbClr val="17364A"/>
                 </a:solidFill>
@@ -4379,11 +4406,14 @@
               </a:rPr>
               <a:t>Risks and failure modes include the following:</a:t>
             </a:r>
-            <a:endParaRPr lang="en-US" sz="1380" dirty="0"/>
-          </a:p>
-          <a:p>
-            <a:r>
-              <a:rPr lang="en-US" sz="1380" dirty="0">
+            <a:endParaRPr lang="en-US" sz="1220" dirty="0"/>
+          </a:p>
+          <a:p>
+            <a:pPr indent="0" marL="0">
+              <a:buNone/>
+            </a:pPr>
+            <a:r>
+              <a:rPr lang="en-US" sz="1220" dirty="0">
                 <a:solidFill>
                   <a:srgbClr val="17364A"/>
                 </a:solidFill>
@@ -4393,11 +4423,14 @@
               </a:rPr>
               <a:t>AI-generated messages overstating evidence or omitting uncertainty.</a:t>
             </a:r>
-            <a:endParaRPr lang="en-US" sz="1380" dirty="0"/>
-          </a:p>
-          <a:p>
-            <a:r>
-              <a:rPr lang="en-US" sz="1380" dirty="0">
+            <a:endParaRPr lang="en-US" sz="1220" dirty="0"/>
+          </a:p>
+          <a:p>
+            <a:pPr indent="0" marL="0">
+              <a:buNone/>
+            </a:pPr>
+            <a:r>
+              <a:rPr lang="en-US" sz="1220" dirty="0">
                 <a:solidFill>
                   <a:srgbClr val="17364A"/>
                 </a:solidFill>
@@ -4407,7 +4440,7 @@
               </a:rPr>
               <a:t>Use of stigmatizing, blaming, or culturally inappropriate language.</a:t>
             </a:r>
-            <a:endParaRPr lang="en-US" sz="1380" dirty="0"/>
+            <a:endParaRPr lang="en-US" sz="1220" dirty="0"/>
           </a:p>
         </p:txBody>
       </p:sp>
@@ -4485,17 +4518,17 @@
         </p:nvSpPr>
         <p:spPr>
           <a:xfrm>
-            <a:off x="7799832" y="5001768"/>
-            <a:ext cx="3145536" cy="502920"/>
-          </a:xfrm>
-          <a:prstGeom prst="rect">
-            <a:avLst/>
-          </a:prstGeom>
-          <a:noFill/>
-          <a:ln/>
-        </p:spPr>
-        <p:txBody>
-          <a:bodyPr wrap="square" lIns="0" tIns="0" rIns="0" bIns="0" rtlCol="0" anchor="t">
+            <a:off x="7799832" y="4974336"/>
+            <a:ext cx="3145536" cy="576072"/>
+          </a:xfrm>
+          <a:prstGeom prst="rect">
+            <a:avLst/>
+          </a:prstGeom>
+          <a:noFill/>
+          <a:ln/>
+        </p:spPr>
+        <p:txBody>
+          <a:bodyPr wrap="square" lIns="254" tIns="254" rIns="254" bIns="254" rtlCol="0" anchor="t">
             <a:normAutofit/>
           </a:bodyPr>
           <a:lstStyle/>
@@ -4504,7 +4537,7 @@
               <a:buNone/>
             </a:pPr>
             <a:r>
-              <a:rPr lang="en-US" sz="1550" dirty="0">
+              <a:rPr lang="en-US" sz="1320" dirty="0">
                 <a:solidFill>
                   <a:srgbClr val="17364A"/>
                 </a:solidFill>
@@ -4512,9 +4545,9 @@
                 <a:ea typeface="Aptos" pitchFamily="34" charset="-122"/>
                 <a:cs typeface="Aptos" pitchFamily="34" charset="-120"/>
               </a:rPr>
-              <a:t>Identify what could go wrong, who could be affected, what safeguards are needed, and what evidence should be reviewed before use expands.</a:t>
-            </a:r>
-            <a:endParaRPr lang="en-US" sz="1550" dirty="0"/>
+              <a:t>Identify what could go wrong, who could be affected, what safeguards are needed, and what evidence should be reviewed.</a:t>
+            </a:r>
+            <a:endParaRPr lang="en-US" sz="1320" dirty="0"/>
           </a:p>
         </p:txBody>
       </p:sp>
@@ -4815,49 +4848,58 @@
           <a:ln/>
         </p:spPr>
         <p:txBody>
-          <a:bodyPr wrap="square" lIns="635" tIns="635" rIns="635" bIns="635" rtlCol="0" anchor="t">
+          <a:bodyPr wrap="square" lIns="1016" tIns="1016" rIns="1016" bIns="1016" rtlCol="0" anchor="t">
             <a:normAutofit/>
           </a:bodyPr>
           <a:lstStyle/>
           <a:p>
+            <a:pPr indent="0" marL="0">
+              <a:buNone/>
+            </a:pPr>
             <a:r>
               <a:rPr lang="en-US" sz="2100" dirty="0">
                 <a:solidFill>
-                  <a:srgbClr val="17364A"/>
-                </a:solidFill>
-                <a:latin typeface="Aptos" pitchFamily="34" charset="0"/>
-                <a:ea typeface="Aptos" pitchFamily="34" charset="-122"/>
-                <a:cs typeface="Aptos" pitchFamily="34" charset="-120"/>
-              </a:rPr>
-              <a:t>Unverified translations or readability changes that alter meaning.</a:t>
+                  <a:srgbClr val="003A63"/>
+                </a:solidFill>
+                <a:latin typeface="Aptos" pitchFamily="34" charset="0"/>
+                <a:ea typeface="Aptos" pitchFamily="34" charset="-122"/>
+                <a:cs typeface="Aptos" pitchFamily="34" charset="-120"/>
+              </a:rPr>
+              <a:t>• Unverified translations or readability changes that alter meaning.</a:t>
             </a:r>
             <a:endParaRPr lang="en-US" sz="2100" dirty="0"/>
           </a:p>
           <a:p>
+            <a:pPr indent="0" marL="0">
+              <a:buNone/>
+            </a:pPr>
             <a:r>
               <a:rPr lang="en-US" sz="2100" dirty="0">
                 <a:solidFill>
-                  <a:srgbClr val="17364A"/>
-                </a:solidFill>
-                <a:latin typeface="Aptos" pitchFamily="34" charset="0"/>
-                <a:ea typeface="Aptos" pitchFamily="34" charset="-122"/>
-                <a:cs typeface="Aptos" pitchFamily="34" charset="-120"/>
-              </a:rPr>
-              <a:t>Public-facing content being released without required subject matter or leadership review.</a:t>
+                  <a:srgbClr val="003A63"/>
+                </a:solidFill>
+                <a:latin typeface="Aptos" pitchFamily="34" charset="0"/>
+                <a:ea typeface="Aptos" pitchFamily="34" charset="-122"/>
+                <a:cs typeface="Aptos" pitchFamily="34" charset="-120"/>
+              </a:rPr>
+              <a:t>• Public-facing content being released without required subject matter or leadership review.</a:t>
             </a:r>
             <a:endParaRPr lang="en-US" sz="2100" dirty="0"/>
           </a:p>
           <a:p>
+            <a:pPr indent="0" marL="0">
+              <a:buNone/>
+            </a:pPr>
             <a:r>
               <a:rPr lang="en-US" sz="2100" dirty="0">
                 <a:solidFill>
-                  <a:srgbClr val="17364A"/>
-                </a:solidFill>
-                <a:latin typeface="Aptos" pitchFamily="34" charset="0"/>
-                <a:ea typeface="Aptos" pitchFamily="34" charset="-122"/>
-                <a:cs typeface="Aptos" pitchFamily="34" charset="-120"/>
-              </a:rPr>
-              <a:t>Messages that assume access to resources, technology, transportation, or healthcare that the audience.</a:t>
+                  <a:srgbClr val="003A63"/>
+                </a:solidFill>
+                <a:latin typeface="Aptos" pitchFamily="34" charset="0"/>
+                <a:ea typeface="Aptos" pitchFamily="34" charset="-122"/>
+                <a:cs typeface="Aptos" pitchFamily="34" charset="-120"/>
+              </a:rPr>
+              <a:t>• Messages that assume access to resources, technology, transportation, or healthcare that the.</a:t>
             </a:r>
             <a:endParaRPr lang="en-US" sz="2100" dirty="0"/>
           </a:p>
@@ -4937,17 +4979,17 @@
         </p:nvSpPr>
         <p:spPr>
           <a:xfrm>
-            <a:off x="7799832" y="1828800"/>
-            <a:ext cx="3145536" cy="685800"/>
-          </a:xfrm>
-          <a:prstGeom prst="rect">
-            <a:avLst/>
-          </a:prstGeom>
-          <a:noFill/>
-          <a:ln/>
-        </p:spPr>
-        <p:txBody>
-          <a:bodyPr wrap="square" lIns="0" tIns="0" rIns="0" bIns="0" rtlCol="0" anchor="t">
+            <a:off x="7799832" y="1801368"/>
+            <a:ext cx="3145536" cy="758952"/>
+          </a:xfrm>
+          <a:prstGeom prst="rect">
+            <a:avLst/>
+          </a:prstGeom>
+          <a:noFill/>
+          <a:ln/>
+        </p:spPr>
+        <p:txBody>
+          <a:bodyPr wrap="square" lIns="254" tIns="254" rIns="254" bIns="254" rtlCol="0" anchor="t">
             <a:normAutofit/>
           </a:bodyPr>
           <a:lstStyle/>
@@ -4956,7 +4998,7 @@
               <a:buNone/>
             </a:pPr>
             <a:r>
-              <a:rPr lang="en-US" sz="1550" dirty="0">
+              <a:rPr lang="en-US" sz="1320" dirty="0">
                 <a:solidFill>
                   <a:srgbClr val="17364A"/>
                 </a:solidFill>
@@ -4966,7 +5008,7 @@
               </a:rPr>
               <a:t>Unverified translations or readability changes that alter meaning.</a:t>
             </a:r>
-            <a:endParaRPr lang="en-US" sz="1550" dirty="0"/>
+            <a:endParaRPr lang="en-US" sz="1320" dirty="0"/>
           </a:p>
         </p:txBody>
       </p:sp>
@@ -5054,13 +5096,16 @@
           <a:ln/>
         </p:spPr>
         <p:txBody>
-          <a:bodyPr wrap="square" lIns="254" tIns="254" rIns="254" bIns="254" rtlCol="0" anchor="t">
+          <a:bodyPr wrap="square" lIns="508" tIns="508" rIns="508" bIns="508" rtlCol="0" anchor="t">
             <a:normAutofit/>
           </a:bodyPr>
           <a:lstStyle/>
           <a:p>
-            <a:r>
-              <a:rPr lang="en-US" sz="1380" dirty="0">
+            <a:pPr indent="0" marL="0">
+              <a:buNone/>
+            </a:pPr>
+            <a:r>
+              <a:rPr lang="en-US" sz="1220" dirty="0">
                 <a:solidFill>
                   <a:srgbClr val="17364A"/>
                 </a:solidFill>
@@ -5070,11 +5115,14 @@
               </a:rPr>
               <a:t>Unverified translations or readability changes that alter meaning.</a:t>
             </a:r>
-            <a:endParaRPr lang="en-US" sz="1380" dirty="0"/>
-          </a:p>
-          <a:p>
-            <a:r>
-              <a:rPr lang="en-US" sz="1380" dirty="0">
+            <a:endParaRPr lang="en-US" sz="1220" dirty="0"/>
+          </a:p>
+          <a:p>
+            <a:pPr indent="0" marL="0">
+              <a:buNone/>
+            </a:pPr>
+            <a:r>
+              <a:rPr lang="en-US" sz="1220" dirty="0">
                 <a:solidFill>
                   <a:srgbClr val="17364A"/>
                 </a:solidFill>
@@ -5082,13 +5130,16 @@
                 <a:ea typeface="Aptos" pitchFamily="34" charset="-122"/>
                 <a:cs typeface="Aptos" pitchFamily="34" charset="-120"/>
               </a:rPr>
-              <a:t>Public-facing content being released without required subject matter or leadership review.</a:t>
-            </a:r>
-            <a:endParaRPr lang="en-US" sz="1380" dirty="0"/>
-          </a:p>
-          <a:p>
-            <a:r>
-              <a:rPr lang="en-US" sz="1380" dirty="0">
+              <a:t>Public-facing content being released without required subject.</a:t>
+            </a:r>
+            <a:endParaRPr lang="en-US" sz="1220" dirty="0"/>
+          </a:p>
+          <a:p>
+            <a:pPr indent="0" marL="0">
+              <a:buNone/>
+            </a:pPr>
+            <a:r>
+              <a:rPr lang="en-US" sz="1220" dirty="0">
                 <a:solidFill>
                   <a:srgbClr val="17364A"/>
                 </a:solidFill>
@@ -5096,9 +5147,9 @@
                 <a:ea typeface="Aptos" pitchFamily="34" charset="-122"/>
                 <a:cs typeface="Aptos" pitchFamily="34" charset="-120"/>
               </a:rPr>
-              <a:t>Messages that assume access to resources, technology, transportation, or healthcare that.</a:t>
-            </a:r>
-            <a:endParaRPr lang="en-US" sz="1380" dirty="0"/>
+              <a:t>Messages that assume access to resources, technology,.</a:t>
+            </a:r>
+            <a:endParaRPr lang="en-US" sz="1220" dirty="0"/>
           </a:p>
         </p:txBody>
       </p:sp>
@@ -5176,17 +5227,17 @@
         </p:nvSpPr>
         <p:spPr>
           <a:xfrm>
-            <a:off x="7799832" y="5001768"/>
-            <a:ext cx="3145536" cy="502920"/>
-          </a:xfrm>
-          <a:prstGeom prst="rect">
-            <a:avLst/>
-          </a:prstGeom>
-          <a:noFill/>
-          <a:ln/>
-        </p:spPr>
-        <p:txBody>
-          <a:bodyPr wrap="square" lIns="0" tIns="0" rIns="0" bIns="0" rtlCol="0" anchor="t">
+            <a:off x="7799832" y="4974336"/>
+            <a:ext cx="3145536" cy="576072"/>
+          </a:xfrm>
+          <a:prstGeom prst="rect">
+            <a:avLst/>
+          </a:prstGeom>
+          <a:noFill/>
+          <a:ln/>
+        </p:spPr>
+        <p:txBody>
+          <a:bodyPr wrap="square" lIns="254" tIns="254" rIns="254" bIns="254" rtlCol="0" anchor="t">
             <a:normAutofit/>
           </a:bodyPr>
           <a:lstStyle/>
@@ -5195,7 +5246,7 @@
               <a:buNone/>
             </a:pPr>
             <a:r>
-              <a:rPr lang="en-US" sz="1550" dirty="0">
+              <a:rPr lang="en-US" sz="1320" dirty="0">
                 <a:solidFill>
                   <a:srgbClr val="17364A"/>
                 </a:solidFill>
@@ -5203,9 +5254,9 @@
                 <a:ea typeface="Aptos" pitchFamily="34" charset="-122"/>
                 <a:cs typeface="Aptos" pitchFamily="34" charset="-120"/>
               </a:rPr>
-              <a:t>Identify what could go wrong, who could be affected, what safeguards are needed, and what evidence should be reviewed before use expands.</a:t>
-            </a:r>
-            <a:endParaRPr lang="en-US" sz="1550" dirty="0"/>
+              <a:t>Identify what could go wrong, who could be affected, what safeguards are needed, and what evidence should be reviewed.</a:t>
+            </a:r>
+            <a:endParaRPr lang="en-US" sz="1320" dirty="0"/>
           </a:p>
         </p:txBody>
       </p:sp>
@@ -5506,49 +5557,58 @@
           <a:ln/>
         </p:spPr>
         <p:txBody>
-          <a:bodyPr wrap="square" lIns="635" tIns="635" rIns="635" bIns="635" rtlCol="0" anchor="t">
+          <a:bodyPr wrap="square" lIns="1016" tIns="1016" rIns="1016" bIns="1016" rtlCol="0" anchor="t">
             <a:normAutofit/>
           </a:bodyPr>
           <a:lstStyle/>
           <a:p>
+            <a:pPr indent="0" marL="0">
+              <a:buNone/>
+            </a:pPr>
             <a:r>
               <a:rPr lang="en-US" sz="2100" dirty="0">
                 <a:solidFill>
-                  <a:srgbClr val="17364A"/>
-                </a:solidFill>
-                <a:latin typeface="Aptos" pitchFamily="34" charset="0"/>
-                <a:ea typeface="Aptos" pitchFamily="34" charset="-122"/>
-                <a:cs typeface="Aptos" pitchFamily="34" charset="-120"/>
-              </a:rPr>
-              <a:t>Recommended guardrails include the following:</a:t>
+                  <a:srgbClr val="003A63"/>
+                </a:solidFill>
+                <a:latin typeface="Aptos" pitchFamily="34" charset="0"/>
+                <a:ea typeface="Aptos" pitchFamily="34" charset="-122"/>
+                <a:cs typeface="Aptos" pitchFamily="34" charset="-120"/>
+              </a:rPr>
+              <a:t>• Recommended guardrails include the following:</a:t>
             </a:r>
             <a:endParaRPr lang="en-US" sz="2100" dirty="0"/>
           </a:p>
           <a:p>
+            <a:pPr indent="0" marL="0">
+              <a:buNone/>
+            </a:pPr>
             <a:r>
               <a:rPr lang="en-US" sz="2100" dirty="0">
                 <a:solidFill>
-                  <a:srgbClr val="17364A"/>
-                </a:solidFill>
-                <a:latin typeface="Aptos" pitchFamily="34" charset="0"/>
-                <a:ea typeface="Aptos" pitchFamily="34" charset="-122"/>
-                <a:cs typeface="Aptos" pitchFamily="34" charset="-120"/>
-              </a:rPr>
-              <a:t>Use only approved tools and approved source material for public health communications.</a:t>
+                  <a:srgbClr val="003A63"/>
+                </a:solidFill>
+                <a:latin typeface="Aptos" pitchFamily="34" charset="0"/>
+                <a:ea typeface="Aptos" pitchFamily="34" charset="-122"/>
+                <a:cs typeface="Aptos" pitchFamily="34" charset="-120"/>
+              </a:rPr>
+              <a:t>• Use only approved tools and approved source material for public health communications.</a:t>
             </a:r>
             <a:endParaRPr lang="en-US" sz="2100" dirty="0"/>
           </a:p>
           <a:p>
+            <a:pPr indent="0" marL="0">
+              <a:buNone/>
+            </a:pPr>
             <a:r>
               <a:rPr lang="en-US" sz="2100" dirty="0">
                 <a:solidFill>
-                  <a:srgbClr val="17364A"/>
-                </a:solidFill>
-                <a:latin typeface="Aptos" pitchFamily="34" charset="0"/>
-                <a:ea typeface="Aptos" pitchFamily="34" charset="-122"/>
-                <a:cs typeface="Aptos" pitchFamily="34" charset="-120"/>
-              </a:rPr>
-              <a:t>Require human review for accuracy, plain language, accessibility, equity, and tone.</a:t>
+                  <a:srgbClr val="003A63"/>
+                </a:solidFill>
+                <a:latin typeface="Aptos" pitchFamily="34" charset="0"/>
+                <a:ea typeface="Aptos" pitchFamily="34" charset="-122"/>
+                <a:cs typeface="Aptos" pitchFamily="34" charset="-120"/>
+              </a:rPr>
+              <a:t>• Require human review for accuracy, plain language, accessibility, equity, and tone.</a:t>
             </a:r>
             <a:endParaRPr lang="en-US" sz="2100" dirty="0"/>
           </a:p>
@@ -5628,17 +5688,17 @@
         </p:nvSpPr>
         <p:spPr>
           <a:xfrm>
-            <a:off x="7799832" y="1828800"/>
-            <a:ext cx="3145536" cy="685800"/>
-          </a:xfrm>
-          <a:prstGeom prst="rect">
-            <a:avLst/>
-          </a:prstGeom>
-          <a:noFill/>
-          <a:ln/>
-        </p:spPr>
-        <p:txBody>
-          <a:bodyPr wrap="square" lIns="0" tIns="0" rIns="0" bIns="0" rtlCol="0" anchor="t">
+            <a:off x="7799832" y="1801368"/>
+            <a:ext cx="3145536" cy="758952"/>
+          </a:xfrm>
+          <a:prstGeom prst="rect">
+            <a:avLst/>
+          </a:prstGeom>
+          <a:noFill/>
+          <a:ln/>
+        </p:spPr>
+        <p:txBody>
+          <a:bodyPr wrap="square" lIns="254" tIns="254" rIns="254" bIns="254" rtlCol="0" anchor="t">
             <a:normAutofit/>
           </a:bodyPr>
           <a:lstStyle/>
@@ -5647,7 +5707,7 @@
               <a:buNone/>
             </a:pPr>
             <a:r>
-              <a:rPr lang="en-US" sz="1550" dirty="0">
+              <a:rPr lang="en-US" sz="1320" dirty="0">
                 <a:solidFill>
                   <a:srgbClr val="17364A"/>
                 </a:solidFill>
@@ -5657,7 +5717,7 @@
               </a:rPr>
               <a:t>Recommended guardrails include the following:</a:t>
             </a:r>
-            <a:endParaRPr lang="en-US" sz="1550" dirty="0"/>
+            <a:endParaRPr lang="en-US" sz="1320" dirty="0"/>
           </a:p>
         </p:txBody>
       </p:sp>
@@ -5745,13 +5805,16 @@
           <a:ln/>
         </p:spPr>
         <p:txBody>
-          <a:bodyPr wrap="square" lIns="254" tIns="254" rIns="254" bIns="254" rtlCol="0" anchor="t">
+          <a:bodyPr wrap="square" lIns="508" tIns="508" rIns="508" bIns="508" rtlCol="0" anchor="t">
             <a:normAutofit/>
           </a:bodyPr>
           <a:lstStyle/>
           <a:p>
-            <a:r>
-              <a:rPr lang="en-US" sz="1380" dirty="0">
+            <a:pPr indent="0" marL="0">
+              <a:buNone/>
+            </a:pPr>
+            <a:r>
+              <a:rPr lang="en-US" sz="1220" dirty="0">
                 <a:solidFill>
                   <a:srgbClr val="17364A"/>
                 </a:solidFill>
@@ -5761,11 +5824,14 @@
               </a:rPr>
               <a:t>Recommended guardrails include the following:</a:t>
             </a:r>
-            <a:endParaRPr lang="en-US" sz="1380" dirty="0"/>
-          </a:p>
-          <a:p>
-            <a:r>
-              <a:rPr lang="en-US" sz="1380" dirty="0">
+            <a:endParaRPr lang="en-US" sz="1220" dirty="0"/>
+          </a:p>
+          <a:p>
+            <a:pPr indent="0" marL="0">
+              <a:buNone/>
+            </a:pPr>
+            <a:r>
+              <a:rPr lang="en-US" sz="1220" dirty="0">
                 <a:solidFill>
                   <a:srgbClr val="17364A"/>
                 </a:solidFill>
@@ -5773,13 +5839,16 @@
                 <a:ea typeface="Aptos" pitchFamily="34" charset="-122"/>
                 <a:cs typeface="Aptos" pitchFamily="34" charset="-120"/>
               </a:rPr>
-              <a:t>Use only approved tools and approved source material for public health communications.</a:t>
-            </a:r>
-            <a:endParaRPr lang="en-US" sz="1380" dirty="0"/>
-          </a:p>
-          <a:p>
-            <a:r>
-              <a:rPr lang="en-US" sz="1380" dirty="0">
+              <a:t>Use only approved tools and approved source material for public.</a:t>
+            </a:r>
+            <a:endParaRPr lang="en-US" sz="1220" dirty="0"/>
+          </a:p>
+          <a:p>
+            <a:pPr indent="0" marL="0">
+              <a:buNone/>
+            </a:pPr>
+            <a:r>
+              <a:rPr lang="en-US" sz="1220" dirty="0">
                 <a:solidFill>
                   <a:srgbClr val="17364A"/>
                 </a:solidFill>
@@ -5787,9 +5856,9 @@
                 <a:ea typeface="Aptos" pitchFamily="34" charset="-122"/>
                 <a:cs typeface="Aptos" pitchFamily="34" charset="-120"/>
               </a:rPr>
-              <a:t>Require human review for accuracy, plain language, accessibility, equity, and tone.</a:t>
-            </a:r>
-            <a:endParaRPr lang="en-US" sz="1380" dirty="0"/>
+              <a:t>Require human review for accuracy, plain language, accessibility,.</a:t>
+            </a:r>
+            <a:endParaRPr lang="en-US" sz="1220" dirty="0"/>
           </a:p>
         </p:txBody>
       </p:sp>
@@ -5867,17 +5936,17 @@
         </p:nvSpPr>
         <p:spPr>
           <a:xfrm>
-            <a:off x="7799832" y="5001768"/>
-            <a:ext cx="3145536" cy="502920"/>
-          </a:xfrm>
-          <a:prstGeom prst="rect">
-            <a:avLst/>
-          </a:prstGeom>
-          <a:noFill/>
-          <a:ln/>
-        </p:spPr>
-        <p:txBody>
-          <a:bodyPr wrap="square" lIns="0" tIns="0" rIns="0" bIns="0" rtlCol="0" anchor="t">
+            <a:off x="7799832" y="4974336"/>
+            <a:ext cx="3145536" cy="576072"/>
+          </a:xfrm>
+          <a:prstGeom prst="rect">
+            <a:avLst/>
+          </a:prstGeom>
+          <a:noFill/>
+          <a:ln/>
+        </p:spPr>
+        <p:txBody>
+          <a:bodyPr wrap="square" lIns="254" tIns="254" rIns="254" bIns="254" rtlCol="0" anchor="t">
             <a:normAutofit/>
           </a:bodyPr>
           <a:lstStyle/>
@@ -5886,7 +5955,7 @@
               <a:buNone/>
             </a:pPr>
             <a:r>
-              <a:rPr lang="en-US" sz="1550" dirty="0">
+              <a:rPr lang="en-US" sz="1320" dirty="0">
                 <a:solidFill>
                   <a:srgbClr val="17364A"/>
                 </a:solidFill>
@@ -5894,9 +5963,9 @@
                 <a:ea typeface="Aptos" pitchFamily="34" charset="-122"/>
                 <a:cs typeface="Aptos" pitchFamily="34" charset="-120"/>
               </a:rPr>
-              <a:t>Identify what could go wrong, who could be affected, what safeguards are needed, and what evidence should be reviewed before use expands.</a:t>
-            </a:r>
-            <a:endParaRPr lang="en-US" sz="1550" dirty="0"/>
+              <a:t>Identify what could go wrong, who could be affected, what safeguards are needed, and what evidence should be reviewed.</a:t>
+            </a:r>
+            <a:endParaRPr lang="en-US" sz="1320" dirty="0"/>
           </a:p>
         </p:txBody>
       </p:sp>
@@ -6197,49 +6266,58 @@
           <a:ln/>
         </p:spPr>
         <p:txBody>
-          <a:bodyPr wrap="square" lIns="635" tIns="635" rIns="635" bIns="635" rtlCol="0" anchor="t">
+          <a:bodyPr wrap="square" lIns="1016" tIns="1016" rIns="1016" bIns="1016" rtlCol="0" anchor="t">
             <a:normAutofit/>
           </a:bodyPr>
           <a:lstStyle/>
           <a:p>
+            <a:pPr indent="0" marL="0">
+              <a:buNone/>
+            </a:pPr>
             <a:r>
               <a:rPr lang="en-US" sz="2100" dirty="0">
                 <a:solidFill>
-                  <a:srgbClr val="17364A"/>
-                </a:solidFill>
-                <a:latin typeface="Aptos" pitchFamily="34" charset="0"/>
-                <a:ea typeface="Aptos" pitchFamily="34" charset="-122"/>
-                <a:cs typeface="Aptos" pitchFamily="34" charset="-120"/>
-              </a:rPr>
-              <a:t>Document source material used for public-facing claims.</a:t>
+                  <a:srgbClr val="003A63"/>
+                </a:solidFill>
+                <a:latin typeface="Aptos" pitchFamily="34" charset="0"/>
+                <a:ea typeface="Aptos" pitchFamily="34" charset="-122"/>
+                <a:cs typeface="Aptos" pitchFamily="34" charset="-120"/>
+              </a:rPr>
+              <a:t>• Document source material used for public-facing claims.</a:t>
             </a:r>
             <a:endParaRPr lang="en-US" sz="2100" dirty="0"/>
           </a:p>
           <a:p>
+            <a:pPr indent="0" marL="0">
+              <a:buNone/>
+            </a:pPr>
             <a:r>
               <a:rPr lang="en-US" sz="2100" dirty="0">
                 <a:solidFill>
-                  <a:srgbClr val="17364A"/>
-                </a:solidFill>
-                <a:latin typeface="Aptos" pitchFamily="34" charset="0"/>
-                <a:ea typeface="Aptos" pitchFamily="34" charset="-122"/>
-                <a:cs typeface="Aptos" pitchFamily="34" charset="-120"/>
-              </a:rPr>
-              <a:t>Use qualified review for translation and language access needs.</a:t>
+                  <a:srgbClr val="003A63"/>
+                </a:solidFill>
+                <a:latin typeface="Aptos" pitchFamily="34" charset="0"/>
+                <a:ea typeface="Aptos" pitchFamily="34" charset="-122"/>
+                <a:cs typeface="Aptos" pitchFamily="34" charset="-120"/>
+              </a:rPr>
+              <a:t>• Use qualified review for translation and language access needs.</a:t>
             </a:r>
             <a:endParaRPr lang="en-US" sz="2100" dirty="0"/>
           </a:p>
           <a:p>
+            <a:pPr indent="0" marL="0">
+              <a:buNone/>
+            </a:pPr>
             <a:r>
               <a:rPr lang="en-US" sz="2100" dirty="0">
                 <a:solidFill>
-                  <a:srgbClr val="17364A"/>
-                </a:solidFill>
-                <a:latin typeface="Aptos" pitchFamily="34" charset="0"/>
-                <a:ea typeface="Aptos" pitchFamily="34" charset="-122"/>
-                <a:cs typeface="Aptos" pitchFamily="34" charset="-120"/>
-              </a:rPr>
-              <a:t>Route public-facing materials through the agency approval process before release.</a:t>
+                  <a:srgbClr val="003A63"/>
+                </a:solidFill>
+                <a:latin typeface="Aptos" pitchFamily="34" charset="0"/>
+                <a:ea typeface="Aptos" pitchFamily="34" charset="-122"/>
+                <a:cs typeface="Aptos" pitchFamily="34" charset="-120"/>
+              </a:rPr>
+              <a:t>• Route public-facing materials through the agency approval process before release.</a:t>
             </a:r>
             <a:endParaRPr lang="en-US" sz="2100" dirty="0"/>
           </a:p>
@@ -6319,17 +6397,17 @@
         </p:nvSpPr>
         <p:spPr>
           <a:xfrm>
-            <a:off x="7799832" y="1828800"/>
-            <a:ext cx="3145536" cy="685800"/>
-          </a:xfrm>
-          <a:prstGeom prst="rect">
-            <a:avLst/>
-          </a:prstGeom>
-          <a:noFill/>
-          <a:ln/>
-        </p:spPr>
-        <p:txBody>
-          <a:bodyPr wrap="square" lIns="0" tIns="0" rIns="0" bIns="0" rtlCol="0" anchor="t">
+            <a:off x="7799832" y="1801368"/>
+            <a:ext cx="3145536" cy="758952"/>
+          </a:xfrm>
+          <a:prstGeom prst="rect">
+            <a:avLst/>
+          </a:prstGeom>
+          <a:noFill/>
+          <a:ln/>
+        </p:spPr>
+        <p:txBody>
+          <a:bodyPr wrap="square" lIns="254" tIns="254" rIns="254" bIns="254" rtlCol="0" anchor="t">
             <a:normAutofit/>
           </a:bodyPr>
           <a:lstStyle/>
@@ -6338,7 +6416,7 @@
               <a:buNone/>
             </a:pPr>
             <a:r>
-              <a:rPr lang="en-US" sz="1550" dirty="0">
+              <a:rPr lang="en-US" sz="1320" dirty="0">
                 <a:solidFill>
                   <a:srgbClr val="17364A"/>
                 </a:solidFill>
@@ -6348,7 +6426,7 @@
               </a:rPr>
               <a:t>Document source material used for public-facing claims.</a:t>
             </a:r>
-            <a:endParaRPr lang="en-US" sz="1550" dirty="0"/>
+            <a:endParaRPr lang="en-US" sz="1320" dirty="0"/>
           </a:p>
         </p:txBody>
       </p:sp>
@@ -6436,13 +6514,16 @@
           <a:ln/>
         </p:spPr>
         <p:txBody>
-          <a:bodyPr wrap="square" lIns="254" tIns="254" rIns="254" bIns="254" rtlCol="0" anchor="t">
+          <a:bodyPr wrap="square" lIns="508" tIns="508" rIns="508" bIns="508" rtlCol="0" anchor="t">
             <a:normAutofit/>
           </a:bodyPr>
           <a:lstStyle/>
           <a:p>
-            <a:r>
-              <a:rPr lang="en-US" sz="1380" dirty="0">
+            <a:pPr indent="0" marL="0">
+              <a:buNone/>
+            </a:pPr>
+            <a:r>
+              <a:rPr lang="en-US" sz="1220" dirty="0">
                 <a:solidFill>
                   <a:srgbClr val="17364A"/>
                 </a:solidFill>
@@ -6452,11 +6533,14 @@
               </a:rPr>
               <a:t>Document source material used for public-facing claims.</a:t>
             </a:r>
-            <a:endParaRPr lang="en-US" sz="1380" dirty="0"/>
-          </a:p>
-          <a:p>
-            <a:r>
-              <a:rPr lang="en-US" sz="1380" dirty="0">
+            <a:endParaRPr lang="en-US" sz="1220" dirty="0"/>
+          </a:p>
+          <a:p>
+            <a:pPr indent="0" marL="0">
+              <a:buNone/>
+            </a:pPr>
+            <a:r>
+              <a:rPr lang="en-US" sz="1220" dirty="0">
                 <a:solidFill>
                   <a:srgbClr val="17364A"/>
                 </a:solidFill>
@@ -6466,11 +6550,14 @@
               </a:rPr>
               <a:t>Use qualified review for translation and language access needs.</a:t>
             </a:r>
-            <a:endParaRPr lang="en-US" sz="1380" dirty="0"/>
-          </a:p>
-          <a:p>
-            <a:r>
-              <a:rPr lang="en-US" sz="1380" dirty="0">
+            <a:endParaRPr lang="en-US" sz="1220" dirty="0"/>
+          </a:p>
+          <a:p>
+            <a:pPr indent="0" marL="0">
+              <a:buNone/>
+            </a:pPr>
+            <a:r>
+              <a:rPr lang="en-US" sz="1220" dirty="0">
                 <a:solidFill>
                   <a:srgbClr val="17364A"/>
                 </a:solidFill>
@@ -6478,9 +6565,9 @@
                 <a:ea typeface="Aptos" pitchFamily="34" charset="-122"/>
                 <a:cs typeface="Aptos" pitchFamily="34" charset="-120"/>
               </a:rPr>
-              <a:t>Route public-facing materials through the agency approval process before release.</a:t>
-            </a:r>
-            <a:endParaRPr lang="en-US" sz="1380" dirty="0"/>
+              <a:t>Route public-facing materials through the agency approval process.</a:t>
+            </a:r>
+            <a:endParaRPr lang="en-US" sz="1220" dirty="0"/>
           </a:p>
         </p:txBody>
       </p:sp>
@@ -6558,17 +6645,17 @@
         </p:nvSpPr>
         <p:spPr>
           <a:xfrm>
-            <a:off x="7799832" y="5001768"/>
-            <a:ext cx="3145536" cy="502920"/>
-          </a:xfrm>
-          <a:prstGeom prst="rect">
-            <a:avLst/>
-          </a:prstGeom>
-          <a:noFill/>
-          <a:ln/>
-        </p:spPr>
-        <p:txBody>
-          <a:bodyPr wrap="square" lIns="0" tIns="0" rIns="0" bIns="0" rtlCol="0" anchor="t">
+            <a:off x="7799832" y="4974336"/>
+            <a:ext cx="3145536" cy="576072"/>
+          </a:xfrm>
+          <a:prstGeom prst="rect">
+            <a:avLst/>
+          </a:prstGeom>
+          <a:noFill/>
+          <a:ln/>
+        </p:spPr>
+        <p:txBody>
+          <a:bodyPr wrap="square" lIns="254" tIns="254" rIns="254" bIns="254" rtlCol="0" anchor="t">
             <a:normAutofit/>
           </a:bodyPr>
           <a:lstStyle/>
@@ -6577,7 +6664,7 @@
               <a:buNone/>
             </a:pPr>
             <a:r>
-              <a:rPr lang="en-US" sz="1550" dirty="0">
+              <a:rPr lang="en-US" sz="1320" dirty="0">
                 <a:solidFill>
                   <a:srgbClr val="17364A"/>
                 </a:solidFill>
@@ -6585,9 +6672,9 @@
                 <a:ea typeface="Aptos" pitchFamily="34" charset="-122"/>
                 <a:cs typeface="Aptos" pitchFamily="34" charset="-120"/>
               </a:rPr>
-              <a:t>Identify what could go wrong, who could be affected, what safeguards are needed, and what evidence should be reviewed before use expands.</a:t>
-            </a:r>
-            <a:endParaRPr lang="en-US" sz="1550" dirty="0"/>
+              <a:t>Identify what could go wrong, who could be affected, what safeguards are needed, and what evidence should be reviewed.</a:t>
+            </a:r>
+            <a:endParaRPr lang="en-US" sz="1320" dirty="0"/>
           </a:p>
         </p:txBody>
       </p:sp>
@@ -6888,49 +6975,58 @@
           <a:ln/>
         </p:spPr>
         <p:txBody>
-          <a:bodyPr wrap="square" lIns="635" tIns="635" rIns="635" bIns="635" rtlCol="0" anchor="t">
+          <a:bodyPr wrap="square" lIns="1016" tIns="1016" rIns="1016" bIns="1016" rtlCol="0" anchor="t">
             <a:normAutofit/>
           </a:bodyPr>
           <a:lstStyle/>
           <a:p>
+            <a:pPr indent="0" marL="0">
+              <a:buNone/>
+            </a:pPr>
             <a:r>
               <a:rPr lang="en-US" sz="2100" dirty="0">
                 <a:solidFill>
-                  <a:srgbClr val="17364A"/>
-                </a:solidFill>
-                <a:latin typeface="Aptos" pitchFamily="34" charset="0"/>
-                <a:ea typeface="Aptos" pitchFamily="34" charset="-122"/>
-                <a:cs typeface="Aptos" pitchFamily="34" charset="-120"/>
-              </a:rPr>
-              <a:t>Where does this topic appear in your agency, program, or workflow?</a:t>
+                  <a:srgbClr val="003A63"/>
+                </a:solidFill>
+                <a:latin typeface="Aptos" pitchFamily="34" charset="0"/>
+                <a:ea typeface="Aptos" pitchFamily="34" charset="-122"/>
+                <a:cs typeface="Aptos" pitchFamily="34" charset="-120"/>
+              </a:rPr>
+              <a:t>• Where does this topic appear in your agency, program, or workflow?</a:t>
             </a:r>
             <a:endParaRPr lang="en-US" sz="2100" dirty="0"/>
           </a:p>
           <a:p>
+            <a:pPr indent="0" marL="0">
+              <a:buNone/>
+            </a:pPr>
             <a:r>
               <a:rPr lang="en-US" sz="2100" dirty="0">
                 <a:solidFill>
-                  <a:srgbClr val="17364A"/>
-                </a:solidFill>
-                <a:latin typeface="Aptos" pitchFamily="34" charset="0"/>
-                <a:ea typeface="Aptos" pitchFamily="34" charset="-122"/>
-                <a:cs typeface="Aptos" pitchFamily="34" charset="-120"/>
-              </a:rPr>
-              <a:t>Which staff roles would need to understand or apply this concept before AI use is approved?</a:t>
+                  <a:srgbClr val="003A63"/>
+                </a:solidFill>
+                <a:latin typeface="Aptos" pitchFamily="34" charset="0"/>
+                <a:ea typeface="Aptos" pitchFamily="34" charset="-122"/>
+                <a:cs typeface="Aptos" pitchFamily="34" charset="-120"/>
+              </a:rPr>
+              <a:t>• Which staff roles would need to understand or apply this concept before AI use is approved?</a:t>
             </a:r>
             <a:endParaRPr lang="en-US" sz="2100" dirty="0"/>
           </a:p>
           <a:p>
+            <a:pPr indent="0" marL="0">
+              <a:buNone/>
+            </a:pPr>
             <a:r>
               <a:rPr lang="en-US" sz="2100" dirty="0">
                 <a:solidFill>
-                  <a:srgbClr val="17364A"/>
-                </a:solidFill>
-                <a:latin typeface="Aptos" pitchFamily="34" charset="0"/>
-                <a:ea typeface="Aptos" pitchFamily="34" charset="-122"/>
-                <a:cs typeface="Aptos" pitchFamily="34" charset="-120"/>
-              </a:rPr>
-              <a:t>What could go wrong if this topic is not addressed before implementation?</a:t>
+                  <a:srgbClr val="003A63"/>
+                </a:solidFill>
+                <a:latin typeface="Aptos" pitchFamily="34" charset="0"/>
+                <a:ea typeface="Aptos" pitchFamily="34" charset="-122"/>
+                <a:cs typeface="Aptos" pitchFamily="34" charset="-120"/>
+              </a:rPr>
+              <a:t>• What could go wrong if this topic is not addressed before implementation?</a:t>
             </a:r>
             <a:endParaRPr lang="en-US" sz="2100" dirty="0"/>
           </a:p>
@@ -7010,17 +7106,17 @@
         </p:nvSpPr>
         <p:spPr>
           <a:xfrm>
-            <a:off x="7799832" y="1828800"/>
-            <a:ext cx="3145536" cy="685800"/>
-          </a:xfrm>
-          <a:prstGeom prst="rect">
-            <a:avLst/>
-          </a:prstGeom>
-          <a:noFill/>
-          <a:ln/>
-        </p:spPr>
-        <p:txBody>
-          <a:bodyPr wrap="square" lIns="0" tIns="0" rIns="0" bIns="0" rtlCol="0" anchor="t">
+            <a:off x="7799832" y="1801368"/>
+            <a:ext cx="3145536" cy="758952"/>
+          </a:xfrm>
+          <a:prstGeom prst="rect">
+            <a:avLst/>
+          </a:prstGeom>
+          <a:noFill/>
+          <a:ln/>
+        </p:spPr>
+        <p:txBody>
+          <a:bodyPr wrap="square" lIns="254" tIns="254" rIns="254" bIns="254" rtlCol="0" anchor="t">
             <a:normAutofit/>
           </a:bodyPr>
           <a:lstStyle/>
@@ -7029,7 +7125,7 @@
               <a:buNone/>
             </a:pPr>
             <a:r>
-              <a:rPr lang="en-US" sz="1550" dirty="0">
+              <a:rPr lang="en-US" sz="1320" dirty="0">
                 <a:solidFill>
                   <a:srgbClr val="17364A"/>
                 </a:solidFill>
@@ -7039,7 +7135,7 @@
               </a:rPr>
               <a:t>Where does this topic appear in your agency, program, or workflow?</a:t>
             </a:r>
-            <a:endParaRPr lang="en-US" sz="1550" dirty="0"/>
+            <a:endParaRPr lang="en-US" sz="1320" dirty="0"/>
           </a:p>
         </p:txBody>
       </p:sp>
@@ -7127,13 +7223,16 @@
           <a:ln/>
         </p:spPr>
         <p:txBody>
-          <a:bodyPr wrap="square" lIns="254" tIns="254" rIns="254" bIns="254" rtlCol="0" anchor="t">
+          <a:bodyPr wrap="square" lIns="508" tIns="508" rIns="508" bIns="508" rtlCol="0" anchor="t">
             <a:normAutofit/>
           </a:bodyPr>
           <a:lstStyle/>
           <a:p>
-            <a:r>
-              <a:rPr lang="en-US" sz="1380" dirty="0">
+            <a:pPr indent="0" marL="0">
+              <a:buNone/>
+            </a:pPr>
+            <a:r>
+              <a:rPr lang="en-US" sz="1220" dirty="0">
                 <a:solidFill>
                   <a:srgbClr val="17364A"/>
                 </a:solidFill>
@@ -7143,11 +7242,14 @@
               </a:rPr>
               <a:t>Where does this topic appear in your agency, program, or workflow?</a:t>
             </a:r>
-            <a:endParaRPr lang="en-US" sz="1380" dirty="0"/>
-          </a:p>
-          <a:p>
-            <a:r>
-              <a:rPr lang="en-US" sz="1380" dirty="0">
+            <a:endParaRPr lang="en-US" sz="1220" dirty="0"/>
+          </a:p>
+          <a:p>
+            <a:pPr indent="0" marL="0">
+              <a:buNone/>
+            </a:pPr>
+            <a:r>
+              <a:rPr lang="en-US" sz="1220" dirty="0">
                 <a:solidFill>
                   <a:srgbClr val="17364A"/>
                 </a:solidFill>
@@ -7155,13 +7257,16 @@
                 <a:ea typeface="Aptos" pitchFamily="34" charset="-122"/>
                 <a:cs typeface="Aptos" pitchFamily="34" charset="-120"/>
               </a:rPr>
-              <a:t>Which staff roles would need to understand or apply this concept before AI use is approved?</a:t>
-            </a:r>
-            <a:endParaRPr lang="en-US" sz="1380" dirty="0"/>
-          </a:p>
-          <a:p>
-            <a:r>
-              <a:rPr lang="en-US" sz="1380" dirty="0">
+              <a:t>Which staff roles would need to understand or apply this concept.</a:t>
+            </a:r>
+            <a:endParaRPr lang="en-US" sz="1220" dirty="0"/>
+          </a:p>
+          <a:p>
+            <a:pPr indent="0" marL="0">
+              <a:buNone/>
+            </a:pPr>
+            <a:r>
+              <a:rPr lang="en-US" sz="1220" dirty="0">
                 <a:solidFill>
                   <a:srgbClr val="17364A"/>
                 </a:solidFill>
@@ -7169,9 +7274,9 @@
                 <a:ea typeface="Aptos" pitchFamily="34" charset="-122"/>
                 <a:cs typeface="Aptos" pitchFamily="34" charset="-120"/>
               </a:rPr>
-              <a:t>What could go wrong if this topic is not addressed before implementation?</a:t>
-            </a:r>
-            <a:endParaRPr lang="en-US" sz="1380" dirty="0"/>
+              <a:t>What could go wrong if this topic is not addressed before.</a:t>
+            </a:r>
+            <a:endParaRPr lang="en-US" sz="1220" dirty="0"/>
           </a:p>
         </p:txBody>
       </p:sp>
@@ -7249,17 +7354,17 @@
         </p:nvSpPr>
         <p:spPr>
           <a:xfrm>
-            <a:off x="7799832" y="5001768"/>
-            <a:ext cx="3145536" cy="502920"/>
-          </a:xfrm>
-          <a:prstGeom prst="rect">
-            <a:avLst/>
-          </a:prstGeom>
-          <a:noFill/>
-          <a:ln/>
-        </p:spPr>
-        <p:txBody>
-          <a:bodyPr wrap="square" lIns="0" tIns="0" rIns="0" bIns="0" rtlCol="0" anchor="t">
+            <a:off x="7799832" y="4974336"/>
+            <a:ext cx="3145536" cy="576072"/>
+          </a:xfrm>
+          <a:prstGeom prst="rect">
+            <a:avLst/>
+          </a:prstGeom>
+          <a:noFill/>
+          <a:ln/>
+        </p:spPr>
+        <p:txBody>
+          <a:bodyPr wrap="square" lIns="254" tIns="254" rIns="254" bIns="254" rtlCol="0" anchor="t">
             <a:normAutofit/>
           </a:bodyPr>
           <a:lstStyle/>
@@ -7268,7 +7373,7 @@
               <a:buNone/>
             </a:pPr>
             <a:r>
-              <a:rPr lang="en-US" sz="1550" dirty="0">
+              <a:rPr lang="en-US" sz="1320" dirty="0">
                 <a:solidFill>
                   <a:srgbClr val="17364A"/>
                 </a:solidFill>
@@ -7276,9 +7381,9 @@
                 <a:ea typeface="Aptos" pitchFamily="34" charset="-122"/>
                 <a:cs typeface="Aptos" pitchFamily="34" charset="-120"/>
               </a:rPr>
-              <a:t>Use the concept to plan transparent communication, gather stakeholder input, protect trust, and make sure affected communities are considered early.</a:t>
-            </a:r>
-            <a:endParaRPr lang="en-US" sz="1550" dirty="0"/>
+              <a:t>Use the concept to plan transparent communication, gather stakeholder input, protect trust, and make sure affected.</a:t>
+            </a:r>
+            <a:endParaRPr lang="en-US" sz="1320" dirty="0"/>
           </a:p>
         </p:txBody>
       </p:sp>
@@ -7579,35 +7684,41 @@
           <a:ln/>
         </p:spPr>
         <p:txBody>
-          <a:bodyPr wrap="square" lIns="635" tIns="635" rIns="635" bIns="635" rtlCol="0" anchor="t">
+          <a:bodyPr wrap="square" lIns="1016" tIns="1016" rIns="1016" bIns="1016" rtlCol="0" anchor="t">
             <a:normAutofit/>
           </a:bodyPr>
           <a:lstStyle/>
           <a:p>
+            <a:pPr indent="0" marL="0">
+              <a:buNone/>
+            </a:pPr>
             <a:r>
               <a:rPr lang="en-US" sz="2100" dirty="0">
                 <a:solidFill>
-                  <a:srgbClr val="17364A"/>
-                </a:solidFill>
-                <a:latin typeface="Aptos" pitchFamily="34" charset="0"/>
-                <a:ea typeface="Aptos" pitchFamily="34" charset="-122"/>
-                <a:cs typeface="Aptos" pitchFamily="34" charset="-120"/>
-              </a:rPr>
-              <a:t>What evidence would governance, leadership, or operations staff need before moving forward?</a:t>
+                  <a:srgbClr val="003A63"/>
+                </a:solidFill>
+                <a:latin typeface="Aptos" pitchFamily="34" charset="0"/>
+                <a:ea typeface="Aptos" pitchFamily="34" charset="-122"/>
+                <a:cs typeface="Aptos" pitchFamily="34" charset="-120"/>
+              </a:rPr>
+              <a:t>• What evidence would governance, leadership, or operations staff need before moving forward?</a:t>
             </a:r>
             <a:endParaRPr lang="en-US" sz="2100" dirty="0"/>
           </a:p>
           <a:p>
+            <a:pPr indent="0" marL="0">
+              <a:buNone/>
+            </a:pPr>
             <a:r>
               <a:rPr lang="en-US" sz="2100" dirty="0">
                 <a:solidFill>
-                  <a:srgbClr val="17364A"/>
-                </a:solidFill>
-                <a:latin typeface="Aptos" pitchFamily="34" charset="0"/>
-                <a:ea typeface="Aptos" pitchFamily="34" charset="-122"/>
-                <a:cs typeface="Aptos" pitchFamily="34" charset="-120"/>
-              </a:rPr>
-              <a:t>Which policy, data, equity, privacy, security, or workflow questions remain unresolved?</a:t>
+                  <a:srgbClr val="003A63"/>
+                </a:solidFill>
+                <a:latin typeface="Aptos" pitchFamily="34" charset="0"/>
+                <a:ea typeface="Aptos" pitchFamily="34" charset="-122"/>
+                <a:cs typeface="Aptos" pitchFamily="34" charset="-120"/>
+              </a:rPr>
+              <a:t>• Which policy, data, equity, privacy, security, or workflow questions remain unresolved?</a:t>
             </a:r>
             <a:endParaRPr lang="en-US" sz="2100" dirty="0"/>
           </a:p>
@@ -7687,17 +7798,17 @@
         </p:nvSpPr>
         <p:spPr>
           <a:xfrm>
-            <a:off x="7799832" y="1828800"/>
-            <a:ext cx="3145536" cy="685800"/>
-          </a:xfrm>
-          <a:prstGeom prst="rect">
-            <a:avLst/>
-          </a:prstGeom>
-          <a:noFill/>
-          <a:ln/>
-        </p:spPr>
-        <p:txBody>
-          <a:bodyPr wrap="square" lIns="0" tIns="0" rIns="0" bIns="0" rtlCol="0" anchor="t">
+            <a:off x="7799832" y="1801368"/>
+            <a:ext cx="3145536" cy="758952"/>
+          </a:xfrm>
+          <a:prstGeom prst="rect">
+            <a:avLst/>
+          </a:prstGeom>
+          <a:noFill/>
+          <a:ln/>
+        </p:spPr>
+        <p:txBody>
+          <a:bodyPr wrap="square" lIns="254" tIns="254" rIns="254" bIns="254" rtlCol="0" anchor="t">
             <a:normAutofit/>
           </a:bodyPr>
           <a:lstStyle/>
@@ -7706,7 +7817,7 @@
               <a:buNone/>
             </a:pPr>
             <a:r>
-              <a:rPr lang="en-US" sz="1550" dirty="0">
+              <a:rPr lang="en-US" sz="1320" dirty="0">
                 <a:solidFill>
                   <a:srgbClr val="17364A"/>
                 </a:solidFill>
@@ -7716,7 +7827,7 @@
               </a:rPr>
               <a:t>What evidence would governance, leadership, or operations staff need before moving forward?</a:t>
             </a:r>
-            <a:endParaRPr lang="en-US" sz="1550" dirty="0"/>
+            <a:endParaRPr lang="en-US" sz="1320" dirty="0"/>
           </a:p>
         </p:txBody>
       </p:sp>
@@ -7804,13 +7915,16 @@
           <a:ln/>
         </p:spPr>
         <p:txBody>
-          <a:bodyPr wrap="square" lIns="254" tIns="254" rIns="254" bIns="254" rtlCol="0" anchor="t">
+          <a:bodyPr wrap="square" lIns="508" tIns="508" rIns="508" bIns="508" rtlCol="0" anchor="t">
             <a:normAutofit/>
           </a:bodyPr>
           <a:lstStyle/>
           <a:p>
-            <a:r>
-              <a:rPr lang="en-US" sz="1380" dirty="0">
+            <a:pPr indent="0" marL="0">
+              <a:buNone/>
+            </a:pPr>
+            <a:r>
+              <a:rPr lang="en-US" sz="1220" dirty="0">
                 <a:solidFill>
                   <a:srgbClr val="17364A"/>
                 </a:solidFill>
@@ -7818,13 +7932,16 @@
                 <a:ea typeface="Aptos" pitchFamily="34" charset="-122"/>
                 <a:cs typeface="Aptos" pitchFamily="34" charset="-120"/>
               </a:rPr>
-              <a:t>What evidence would governance, leadership, or operations staff need before moving forward?</a:t>
-            </a:r>
-            <a:endParaRPr lang="en-US" sz="1380" dirty="0"/>
-          </a:p>
-          <a:p>
-            <a:r>
-              <a:rPr lang="en-US" sz="1380" dirty="0">
+              <a:t>What evidence would governance, leadership, or operations staff.</a:t>
+            </a:r>
+            <a:endParaRPr lang="en-US" sz="1220" dirty="0"/>
+          </a:p>
+          <a:p>
+            <a:pPr indent="0" marL="0">
+              <a:buNone/>
+            </a:pPr>
+            <a:r>
+              <a:rPr lang="en-US" sz="1220" dirty="0">
                 <a:solidFill>
                   <a:srgbClr val="17364A"/>
                 </a:solidFill>
@@ -7832,9 +7949,9 @@
                 <a:ea typeface="Aptos" pitchFamily="34" charset="-122"/>
                 <a:cs typeface="Aptos" pitchFamily="34" charset="-120"/>
               </a:rPr>
-              <a:t>Which policy, data, equity, privacy, security, or workflow questions remain unresolved?</a:t>
-            </a:r>
-            <a:endParaRPr lang="en-US" sz="1380" dirty="0"/>
+              <a:t>Which policy, data, equity, privacy, security, or workflow.</a:t>
+            </a:r>
+            <a:endParaRPr lang="en-US" sz="1220" dirty="0"/>
           </a:p>
         </p:txBody>
       </p:sp>
@@ -7912,17 +8029,17 @@
         </p:nvSpPr>
         <p:spPr>
           <a:xfrm>
-            <a:off x="7799832" y="5001768"/>
-            <a:ext cx="3145536" cy="502920"/>
-          </a:xfrm>
-          <a:prstGeom prst="rect">
-            <a:avLst/>
-          </a:prstGeom>
-          <a:noFill/>
-          <a:ln/>
-        </p:spPr>
-        <p:txBody>
-          <a:bodyPr wrap="square" lIns="0" tIns="0" rIns="0" bIns="0" rtlCol="0" anchor="t">
+            <a:off x="7799832" y="4974336"/>
+            <a:ext cx="3145536" cy="576072"/>
+          </a:xfrm>
+          <a:prstGeom prst="rect">
+            <a:avLst/>
+          </a:prstGeom>
+          <a:noFill/>
+          <a:ln/>
+        </p:spPr>
+        <p:txBody>
+          <a:bodyPr wrap="square" lIns="254" tIns="254" rIns="254" bIns="254" rtlCol="0" anchor="t">
             <a:normAutofit/>
           </a:bodyPr>
           <a:lstStyle/>
@@ -7931,7 +8048,7 @@
               <a:buNone/>
             </a:pPr>
             <a:r>
-              <a:rPr lang="en-US" sz="1550" dirty="0">
+              <a:rPr lang="en-US" sz="1320" dirty="0">
                 <a:solidFill>
                   <a:srgbClr val="17364A"/>
                 </a:solidFill>
@@ -7939,9 +8056,9 @@
                 <a:ea typeface="Aptos" pitchFamily="34" charset="-122"/>
                 <a:cs typeface="Aptos" pitchFamily="34" charset="-120"/>
               </a:rPr>
-              <a:t>Use the concept to plan transparent communication, gather stakeholder input, protect trust, and make sure affected communities are considered early.</a:t>
-            </a:r>
-            <a:endParaRPr lang="en-US" sz="1550" dirty="0"/>
+              <a:t>Use the concept to plan transparent communication, gather stakeholder input, protect trust, and make sure affected.</a:t>
+            </a:r>
+            <a:endParaRPr lang="en-US" sz="1320" dirty="0"/>
           </a:p>
         </p:txBody>
       </p:sp>
@@ -8242,35 +8359,41 @@
           <a:ln/>
         </p:spPr>
         <p:txBody>
-          <a:bodyPr wrap="square" lIns="635" tIns="635" rIns="635" bIns="635" rtlCol="0" anchor="t">
+          <a:bodyPr wrap="square" lIns="1016" tIns="1016" rIns="1016" bIns="1016" rtlCol="0" anchor="t">
             <a:normAutofit/>
           </a:bodyPr>
           <a:lstStyle/>
           <a:p>
+            <a:pPr indent="0" marL="0">
+              <a:buNone/>
+            </a:pPr>
             <a:r>
               <a:rPr lang="en-US" sz="2100" dirty="0">
                 <a:solidFill>
-                  <a:srgbClr val="17364A"/>
-                </a:solidFill>
-                <a:latin typeface="Aptos" pitchFamily="34" charset="0"/>
-                <a:ea typeface="Aptos" pitchFamily="34" charset="-122"/>
-                <a:cs typeface="Aptos" pitchFamily="34" charset="-120"/>
-              </a:rPr>
-              <a:t>Create an AI-assisted communications review checklist for one public health message.</a:t>
+                  <a:srgbClr val="003A63"/>
+                </a:solidFill>
+                <a:latin typeface="Aptos" pitchFamily="34" charset="0"/>
+                <a:ea typeface="Aptos" pitchFamily="34" charset="-122"/>
+                <a:cs typeface="Aptos" pitchFamily="34" charset="-120"/>
+              </a:rPr>
+              <a:t>• Create an AI-assisted communications review checklist for one public health message.</a:t>
             </a:r>
             <a:endParaRPr lang="en-US" sz="2100" dirty="0"/>
           </a:p>
           <a:p>
+            <a:pPr indent="0" marL="0">
+              <a:buNone/>
+            </a:pPr>
             <a:r>
               <a:rPr lang="en-US" sz="2100" dirty="0">
                 <a:solidFill>
-                  <a:srgbClr val="17364A"/>
-                </a:solidFill>
-                <a:latin typeface="Aptos" pitchFamily="34" charset="0"/>
-                <a:ea typeface="Aptos" pitchFamily="34" charset="-122"/>
-                <a:cs typeface="Aptos" pitchFamily="34" charset="-120"/>
-              </a:rPr>
-              <a:t>Include intended audience, source material, factual claims to verify, plain language review,.</a:t>
+                  <a:srgbClr val="003A63"/>
+                </a:solidFill>
+                <a:latin typeface="Aptos" pitchFamily="34" charset="0"/>
+                <a:ea typeface="Aptos" pitchFamily="34" charset="-122"/>
+                <a:cs typeface="Aptos" pitchFamily="34" charset="-120"/>
+              </a:rPr>
+              <a:t>• Include intended audience, source material, factual claims to verify, plain language review,.</a:t>
             </a:r>
             <a:endParaRPr lang="en-US" sz="2100" dirty="0"/>
           </a:p>
@@ -8350,17 +8473,17 @@
         </p:nvSpPr>
         <p:spPr>
           <a:xfrm>
-            <a:off x="7799832" y="1828800"/>
-            <a:ext cx="3145536" cy="685800"/>
-          </a:xfrm>
-          <a:prstGeom prst="rect">
-            <a:avLst/>
-          </a:prstGeom>
-          <a:noFill/>
-          <a:ln/>
-        </p:spPr>
-        <p:txBody>
-          <a:bodyPr wrap="square" lIns="0" tIns="0" rIns="0" bIns="0" rtlCol="0" anchor="t">
+            <a:off x="7799832" y="1801368"/>
+            <a:ext cx="3145536" cy="758952"/>
+          </a:xfrm>
+          <a:prstGeom prst="rect">
+            <a:avLst/>
+          </a:prstGeom>
+          <a:noFill/>
+          <a:ln/>
+        </p:spPr>
+        <p:txBody>
+          <a:bodyPr wrap="square" lIns="254" tIns="254" rIns="254" bIns="254" rtlCol="0" anchor="t">
             <a:normAutofit/>
           </a:bodyPr>
           <a:lstStyle/>
@@ -8369,7 +8492,7 @@
               <a:buNone/>
             </a:pPr>
             <a:r>
-              <a:rPr lang="en-US" sz="1550" dirty="0">
+              <a:rPr lang="en-US" sz="1320" dirty="0">
                 <a:solidFill>
                   <a:srgbClr val="17364A"/>
                 </a:solidFill>
@@ -8379,7 +8502,7 @@
               </a:rPr>
               <a:t>Create an AI-assisted communications review checklist for one public health message.</a:t>
             </a:r>
-            <a:endParaRPr lang="en-US" sz="1550" dirty="0"/>
+            <a:endParaRPr lang="en-US" sz="1320" dirty="0"/>
           </a:p>
         </p:txBody>
       </p:sp>
@@ -8467,13 +8590,16 @@
           <a:ln/>
         </p:spPr>
         <p:txBody>
-          <a:bodyPr wrap="square" lIns="254" tIns="254" rIns="254" bIns="254" rtlCol="0" anchor="t">
+          <a:bodyPr wrap="square" lIns="508" tIns="508" rIns="508" bIns="508" rtlCol="0" anchor="t">
             <a:normAutofit/>
           </a:bodyPr>
           <a:lstStyle/>
           <a:p>
-            <a:r>
-              <a:rPr lang="en-US" sz="1380" dirty="0">
+            <a:pPr indent="0" marL="0">
+              <a:buNone/>
+            </a:pPr>
+            <a:r>
+              <a:rPr lang="en-US" sz="1220" dirty="0">
                 <a:solidFill>
                   <a:srgbClr val="17364A"/>
                 </a:solidFill>
@@ -8481,13 +8607,16 @@
                 <a:ea typeface="Aptos" pitchFamily="34" charset="-122"/>
                 <a:cs typeface="Aptos" pitchFamily="34" charset="-120"/>
               </a:rPr>
-              <a:t>Create an AI-assisted communications review checklist for one public health message.</a:t>
-            </a:r>
-            <a:endParaRPr lang="en-US" sz="1380" dirty="0"/>
-          </a:p>
-          <a:p>
-            <a:r>
-              <a:rPr lang="en-US" sz="1380" dirty="0">
+              <a:t>Create an AI-assisted communications review checklist for one.</a:t>
+            </a:r>
+            <a:endParaRPr lang="en-US" sz="1220" dirty="0"/>
+          </a:p>
+          <a:p>
+            <a:pPr indent="0" marL="0">
+              <a:buNone/>
+            </a:pPr>
+            <a:r>
+              <a:rPr lang="en-US" sz="1220" dirty="0">
                 <a:solidFill>
                   <a:srgbClr val="17364A"/>
                 </a:solidFill>
@@ -8495,9 +8624,9 @@
                 <a:ea typeface="Aptos" pitchFamily="34" charset="-122"/>
                 <a:cs typeface="Aptos" pitchFamily="34" charset="-120"/>
               </a:rPr>
-              <a:t>Include intended audience, source material, factual claims to verify, plain language.</a:t>
-            </a:r>
-            <a:endParaRPr lang="en-US" sz="1380" dirty="0"/>
+              <a:t>Include intended audience, source material, factual claims to.</a:t>
+            </a:r>
+            <a:endParaRPr lang="en-US" sz="1220" dirty="0"/>
           </a:p>
         </p:txBody>
       </p:sp>
@@ -8575,17 +8704,17 @@
         </p:nvSpPr>
         <p:spPr>
           <a:xfrm>
-            <a:off x="7799832" y="5001768"/>
-            <a:ext cx="3145536" cy="502920"/>
-          </a:xfrm>
-          <a:prstGeom prst="rect">
-            <a:avLst/>
-          </a:prstGeom>
-          <a:noFill/>
-          <a:ln/>
-        </p:spPr>
-        <p:txBody>
-          <a:bodyPr wrap="square" lIns="0" tIns="0" rIns="0" bIns="0" rtlCol="0" anchor="t">
+            <a:off x="7799832" y="4974336"/>
+            <a:ext cx="3145536" cy="576072"/>
+          </a:xfrm>
+          <a:prstGeom prst="rect">
+            <a:avLst/>
+          </a:prstGeom>
+          <a:noFill/>
+          <a:ln/>
+        </p:spPr>
+        <p:txBody>
+          <a:bodyPr wrap="square" lIns="254" tIns="254" rIns="254" bIns="254" rtlCol="0" anchor="t">
             <a:normAutofit/>
           </a:bodyPr>
           <a:lstStyle/>
@@ -8594,7 +8723,7 @@
               <a:buNone/>
             </a:pPr>
             <a:r>
-              <a:rPr lang="en-US" sz="1550" dirty="0">
+              <a:rPr lang="en-US" sz="1320" dirty="0">
                 <a:solidFill>
                   <a:srgbClr val="17364A"/>
                 </a:solidFill>
@@ -8602,9 +8731,9 @@
                 <a:ea typeface="Aptos" pitchFamily="34" charset="-122"/>
                 <a:cs typeface="Aptos" pitchFamily="34" charset="-120"/>
               </a:rPr>
-              <a:t>Use the assignment to test whether you can explain the concept, apply it to a realistic public health situation, and identify what would need review before the work moves forward.</a:t>
-            </a:r>
-            <a:endParaRPr lang="en-US" sz="1550" dirty="0"/>
+              <a:t>Use the assignment to test whether you can explain the concept, apply it to a realistic public health situation, and.</a:t>
+            </a:r>
+            <a:endParaRPr lang="en-US" sz="1320" dirty="0"/>
           </a:p>
         </p:txBody>
       </p:sp>
@@ -8905,49 +9034,58 @@
           <a:ln/>
         </p:spPr>
         <p:txBody>
-          <a:bodyPr wrap="square" lIns="635" tIns="635" rIns="635" bIns="635" rtlCol="0" anchor="t">
+          <a:bodyPr wrap="square" lIns="1016" tIns="1016" rIns="1016" bIns="1016" rtlCol="0" anchor="t">
             <a:normAutofit/>
           </a:bodyPr>
           <a:lstStyle/>
           <a:p>
+            <a:pPr indent="0" marL="0">
+              <a:buNone/>
+            </a:pPr>
             <a:r>
               <a:rPr lang="en-US" sz="2100" dirty="0">
                 <a:solidFill>
-                  <a:srgbClr val="17364A"/>
-                </a:solidFill>
-                <a:latin typeface="Aptos" pitchFamily="34" charset="0"/>
-                <a:ea typeface="Aptos" pitchFamily="34" charset="-122"/>
-                <a:cs typeface="Aptos" pitchFamily="34" charset="-120"/>
-              </a:rPr>
-              <a:t>AI-assisted communications review checklist</a:t>
+                  <a:srgbClr val="003A63"/>
+                </a:solidFill>
+                <a:latin typeface="Aptos" pitchFamily="34" charset="0"/>
+                <a:ea typeface="Aptos" pitchFamily="34" charset="-122"/>
+                <a:cs typeface="Aptos" pitchFamily="34" charset="-120"/>
+              </a:rPr>
+              <a:t>• AI-assisted communications review checklist</a:t>
             </a:r>
             <a:endParaRPr lang="en-US" sz="2100" dirty="0"/>
           </a:p>
           <a:p>
+            <a:pPr indent="0" marL="0">
+              <a:buNone/>
+            </a:pPr>
             <a:r>
               <a:rPr lang="en-US" sz="2100" dirty="0">
                 <a:solidFill>
-                  <a:srgbClr val="17364A"/>
-                </a:solidFill>
-                <a:latin typeface="Aptos" pitchFamily="34" charset="0"/>
-                <a:ea typeface="Aptos" pitchFamily="34" charset="-122"/>
-                <a:cs typeface="Aptos" pitchFamily="34" charset="-120"/>
-              </a:rPr>
-              <a:t>Source verification notes</a:t>
+                  <a:srgbClr val="003A63"/>
+                </a:solidFill>
+                <a:latin typeface="Aptos" pitchFamily="34" charset="0"/>
+                <a:ea typeface="Aptos" pitchFamily="34" charset="-122"/>
+                <a:cs typeface="Aptos" pitchFamily="34" charset="-120"/>
+              </a:rPr>
+              <a:t>• Source verification notes</a:t>
             </a:r>
             <a:endParaRPr lang="en-US" sz="2100" dirty="0"/>
           </a:p>
           <a:p>
+            <a:pPr indent="0" marL="0">
+              <a:buNone/>
+            </a:pPr>
             <a:r>
               <a:rPr lang="en-US" sz="2100" dirty="0">
                 <a:solidFill>
-                  <a:srgbClr val="17364A"/>
-                </a:solidFill>
-                <a:latin typeface="Aptos" pitchFamily="34" charset="0"/>
-                <a:ea typeface="Aptos" pitchFamily="34" charset="-122"/>
-                <a:cs typeface="Aptos" pitchFamily="34" charset="-120"/>
-              </a:rPr>
-              <a:t>Plain language and accessibility review notes</a:t>
+                  <a:srgbClr val="003A63"/>
+                </a:solidFill>
+                <a:latin typeface="Aptos" pitchFamily="34" charset="0"/>
+                <a:ea typeface="Aptos" pitchFamily="34" charset="-122"/>
+                <a:cs typeface="Aptos" pitchFamily="34" charset="-120"/>
+              </a:rPr>
+              <a:t>• Plain language and accessibility review notes</a:t>
             </a:r>
             <a:endParaRPr lang="en-US" sz="2100" dirty="0"/>
           </a:p>
@@ -9027,17 +9165,17 @@
         </p:nvSpPr>
         <p:spPr>
           <a:xfrm>
-            <a:off x="7799832" y="1828800"/>
-            <a:ext cx="3145536" cy="685800"/>
-          </a:xfrm>
-          <a:prstGeom prst="rect">
-            <a:avLst/>
-          </a:prstGeom>
-          <a:noFill/>
-          <a:ln/>
-        </p:spPr>
-        <p:txBody>
-          <a:bodyPr wrap="square" lIns="0" tIns="0" rIns="0" bIns="0" rtlCol="0" anchor="t">
+            <a:off x="7799832" y="1801368"/>
+            <a:ext cx="3145536" cy="758952"/>
+          </a:xfrm>
+          <a:prstGeom prst="rect">
+            <a:avLst/>
+          </a:prstGeom>
+          <a:noFill/>
+          <a:ln/>
+        </p:spPr>
+        <p:txBody>
+          <a:bodyPr wrap="square" lIns="254" tIns="254" rIns="254" bIns="254" rtlCol="0" anchor="t">
             <a:normAutofit/>
           </a:bodyPr>
           <a:lstStyle/>
@@ -9046,7 +9184,7 @@
               <a:buNone/>
             </a:pPr>
             <a:r>
-              <a:rPr lang="en-US" sz="1550" dirty="0">
+              <a:rPr lang="en-US" sz="1320" dirty="0">
                 <a:solidFill>
                   <a:srgbClr val="17364A"/>
                 </a:solidFill>
@@ -9056,7 +9194,7 @@
               </a:rPr>
               <a:t>AI-assisted communications review checklist</a:t>
             </a:r>
-            <a:endParaRPr lang="en-US" sz="1550" dirty="0"/>
+            <a:endParaRPr lang="en-US" sz="1320" dirty="0"/>
           </a:p>
         </p:txBody>
       </p:sp>
@@ -9144,13 +9282,16 @@
           <a:ln/>
         </p:spPr>
         <p:txBody>
-          <a:bodyPr wrap="square" lIns="254" tIns="254" rIns="254" bIns="254" rtlCol="0" anchor="t">
+          <a:bodyPr wrap="square" lIns="508" tIns="508" rIns="508" bIns="508" rtlCol="0" anchor="t">
             <a:normAutofit/>
           </a:bodyPr>
           <a:lstStyle/>
           <a:p>
-            <a:r>
-              <a:rPr lang="en-US" sz="1380" dirty="0">
+            <a:pPr indent="0" marL="0">
+              <a:buNone/>
+            </a:pPr>
+            <a:r>
+              <a:rPr lang="en-US" sz="1220" dirty="0">
                 <a:solidFill>
                   <a:srgbClr val="17364A"/>
                 </a:solidFill>
@@ -9160,11 +9301,14 @@
               </a:rPr>
               <a:t>AI-assisted communications review checklist</a:t>
             </a:r>
-            <a:endParaRPr lang="en-US" sz="1380" dirty="0"/>
-          </a:p>
-          <a:p>
-            <a:r>
-              <a:rPr lang="en-US" sz="1380" dirty="0">
+            <a:endParaRPr lang="en-US" sz="1220" dirty="0"/>
+          </a:p>
+          <a:p>
+            <a:pPr indent="0" marL="0">
+              <a:buNone/>
+            </a:pPr>
+            <a:r>
+              <a:rPr lang="en-US" sz="1220" dirty="0">
                 <a:solidFill>
                   <a:srgbClr val="17364A"/>
                 </a:solidFill>
@@ -9174,11 +9318,14 @@
               </a:rPr>
               <a:t>Source verification notes</a:t>
             </a:r>
-            <a:endParaRPr lang="en-US" sz="1380" dirty="0"/>
-          </a:p>
-          <a:p>
-            <a:r>
-              <a:rPr lang="en-US" sz="1380" dirty="0">
+            <a:endParaRPr lang="en-US" sz="1220" dirty="0"/>
+          </a:p>
+          <a:p>
+            <a:pPr indent="0" marL="0">
+              <a:buNone/>
+            </a:pPr>
+            <a:r>
+              <a:rPr lang="en-US" sz="1220" dirty="0">
                 <a:solidFill>
                   <a:srgbClr val="17364A"/>
                 </a:solidFill>
@@ -9188,7 +9335,7 @@
               </a:rPr>
               <a:t>Plain language and accessibility review notes</a:t>
             </a:r>
-            <a:endParaRPr lang="en-US" sz="1380" dirty="0"/>
+            <a:endParaRPr lang="en-US" sz="1220" dirty="0"/>
           </a:p>
         </p:txBody>
       </p:sp>
@@ -9266,17 +9413,17 @@
         </p:nvSpPr>
         <p:spPr>
           <a:xfrm>
-            <a:off x="7799832" y="5001768"/>
-            <a:ext cx="3145536" cy="502920"/>
-          </a:xfrm>
-          <a:prstGeom prst="rect">
-            <a:avLst/>
-          </a:prstGeom>
-          <a:noFill/>
-          <a:ln/>
-        </p:spPr>
-        <p:txBody>
-          <a:bodyPr wrap="square" lIns="0" tIns="0" rIns="0" bIns="0" rtlCol="0" anchor="t">
+            <a:off x="7799832" y="4974336"/>
+            <a:ext cx="3145536" cy="576072"/>
+          </a:xfrm>
+          <a:prstGeom prst="rect">
+            <a:avLst/>
+          </a:prstGeom>
+          <a:noFill/>
+          <a:ln/>
+        </p:spPr>
+        <p:txBody>
+          <a:bodyPr wrap="square" lIns="254" tIns="254" rIns="254" bIns="254" rtlCol="0" anchor="t">
             <a:normAutofit/>
           </a:bodyPr>
           <a:lstStyle/>
@@ -9285,7 +9432,7 @@
               <a:buNone/>
             </a:pPr>
             <a:r>
-              <a:rPr lang="en-US" sz="1550" dirty="0">
+              <a:rPr lang="en-US" sz="1320" dirty="0">
                 <a:solidFill>
                   <a:srgbClr val="17364A"/>
                 </a:solidFill>
@@ -9293,9 +9440,9 @@
                 <a:ea typeface="Aptos" pitchFamily="34" charset="-122"/>
                 <a:cs typeface="Aptos" pitchFamily="34" charset="-120"/>
               </a:rPr>
-              <a:t>Use the concept to plan transparent communication, gather stakeholder input, protect trust, and make sure affected communities are considered early.</a:t>
-            </a:r>
-            <a:endParaRPr lang="en-US" sz="1550" dirty="0"/>
+              <a:t>Use the concept to plan transparent communication, gather stakeholder input, protect trust, and make sure affected.</a:t>
+            </a:r>
+            <a:endParaRPr lang="en-US" sz="1320" dirty="0"/>
           </a:p>
         </p:txBody>
       </p:sp>
@@ -9596,35 +9743,41 @@
           <a:ln/>
         </p:spPr>
         <p:txBody>
-          <a:bodyPr wrap="square" lIns="635" tIns="635" rIns="635" bIns="635" rtlCol="0" anchor="t">
+          <a:bodyPr wrap="square" lIns="1016" tIns="1016" rIns="1016" bIns="1016" rtlCol="0" anchor="t">
             <a:normAutofit/>
           </a:bodyPr>
           <a:lstStyle/>
           <a:p>
+            <a:pPr indent="0" marL="0">
+              <a:buNone/>
+            </a:pPr>
             <a:r>
               <a:rPr lang="en-US" sz="2100" dirty="0">
                 <a:solidFill>
-                  <a:srgbClr val="17364A"/>
-                </a:solidFill>
-                <a:latin typeface="Aptos" pitchFamily="34" charset="0"/>
-                <a:ea typeface="Aptos" pitchFamily="34" charset="-122"/>
-                <a:cs typeface="Aptos" pitchFamily="34" charset="-120"/>
-              </a:rPr>
-              <a:t>Approval pathway documentation</a:t>
+                  <a:srgbClr val="003A63"/>
+                </a:solidFill>
+                <a:latin typeface="Aptos" pitchFamily="34" charset="0"/>
+                <a:ea typeface="Aptos" pitchFamily="34" charset="-122"/>
+                <a:cs typeface="Aptos" pitchFamily="34" charset="-120"/>
+              </a:rPr>
+              <a:t>• Approval pathway documentation</a:t>
             </a:r>
             <a:endParaRPr lang="en-US" sz="2100" dirty="0"/>
           </a:p>
           <a:p>
+            <a:pPr indent="0" marL="0">
+              <a:buNone/>
+            </a:pPr>
             <a:r>
               <a:rPr lang="en-US" sz="2100" dirty="0">
                 <a:solidFill>
-                  <a:srgbClr val="17364A"/>
-                </a:solidFill>
-                <a:latin typeface="Aptos" pitchFamily="34" charset="0"/>
-                <a:ea typeface="Aptos" pitchFamily="34" charset="-122"/>
-                <a:cs typeface="Aptos" pitchFamily="34" charset="-120"/>
-              </a:rPr>
-              <a:t>Final reviewed message or sample revision</a:t>
+                  <a:srgbClr val="003A63"/>
+                </a:solidFill>
+                <a:latin typeface="Aptos" pitchFamily="34" charset="0"/>
+                <a:ea typeface="Aptos" pitchFamily="34" charset="-122"/>
+                <a:cs typeface="Aptos" pitchFamily="34" charset="-120"/>
+              </a:rPr>
+              <a:t>• Final reviewed message or sample revision</a:t>
             </a:r>
             <a:endParaRPr lang="en-US" sz="2100" dirty="0"/>
           </a:p>
@@ -9704,17 +9857,17 @@
         </p:nvSpPr>
         <p:spPr>
           <a:xfrm>
-            <a:off x="7799832" y="1828800"/>
-            <a:ext cx="3145536" cy="685800"/>
-          </a:xfrm>
-          <a:prstGeom prst="rect">
-            <a:avLst/>
-          </a:prstGeom>
-          <a:noFill/>
-          <a:ln/>
-        </p:spPr>
-        <p:txBody>
-          <a:bodyPr wrap="square" lIns="0" tIns="0" rIns="0" bIns="0" rtlCol="0" anchor="t">
+            <a:off x="7799832" y="1801368"/>
+            <a:ext cx="3145536" cy="758952"/>
+          </a:xfrm>
+          <a:prstGeom prst="rect">
+            <a:avLst/>
+          </a:prstGeom>
+          <a:noFill/>
+          <a:ln/>
+        </p:spPr>
+        <p:txBody>
+          <a:bodyPr wrap="square" lIns="254" tIns="254" rIns="254" bIns="254" rtlCol="0" anchor="t">
             <a:normAutofit/>
           </a:bodyPr>
           <a:lstStyle/>
@@ -9723,7 +9876,7 @@
               <a:buNone/>
             </a:pPr>
             <a:r>
-              <a:rPr lang="en-US" sz="1550" dirty="0">
+              <a:rPr lang="en-US" sz="1320" dirty="0">
                 <a:solidFill>
                   <a:srgbClr val="17364A"/>
                 </a:solidFill>
@@ -9733,7 +9886,7 @@
               </a:rPr>
               <a:t>Approval pathway documentation</a:t>
             </a:r>
-            <a:endParaRPr lang="en-US" sz="1550" dirty="0"/>
+            <a:endParaRPr lang="en-US" sz="1320" dirty="0"/>
           </a:p>
         </p:txBody>
       </p:sp>
@@ -9821,13 +9974,16 @@
           <a:ln/>
         </p:spPr>
         <p:txBody>
-          <a:bodyPr wrap="square" lIns="254" tIns="254" rIns="254" bIns="254" rtlCol="0" anchor="t">
+          <a:bodyPr wrap="square" lIns="508" tIns="508" rIns="508" bIns="508" rtlCol="0" anchor="t">
             <a:normAutofit/>
           </a:bodyPr>
           <a:lstStyle/>
           <a:p>
-            <a:r>
-              <a:rPr lang="en-US" sz="1380" dirty="0">
+            <a:pPr indent="0" marL="0">
+              <a:buNone/>
+            </a:pPr>
+            <a:r>
+              <a:rPr lang="en-US" sz="1220" dirty="0">
                 <a:solidFill>
                   <a:srgbClr val="17364A"/>
                 </a:solidFill>
@@ -9837,11 +9993,14 @@
               </a:rPr>
               <a:t>Approval pathway documentation</a:t>
             </a:r>
-            <a:endParaRPr lang="en-US" sz="1380" dirty="0"/>
-          </a:p>
-          <a:p>
-            <a:r>
-              <a:rPr lang="en-US" sz="1380" dirty="0">
+            <a:endParaRPr lang="en-US" sz="1220" dirty="0"/>
+          </a:p>
+          <a:p>
+            <a:pPr indent="0" marL="0">
+              <a:buNone/>
+            </a:pPr>
+            <a:r>
+              <a:rPr lang="en-US" sz="1220" dirty="0">
                 <a:solidFill>
                   <a:srgbClr val="17364A"/>
                 </a:solidFill>
@@ -9851,7 +10010,7 @@
               </a:rPr>
               <a:t>Final reviewed message or sample revision</a:t>
             </a:r>
-            <a:endParaRPr lang="en-US" sz="1380" dirty="0"/>
+            <a:endParaRPr lang="en-US" sz="1220" dirty="0"/>
           </a:p>
         </p:txBody>
       </p:sp>
@@ -9929,17 +10088,17 @@
         </p:nvSpPr>
         <p:spPr>
           <a:xfrm>
-            <a:off x="7799832" y="5001768"/>
-            <a:ext cx="3145536" cy="502920"/>
-          </a:xfrm>
-          <a:prstGeom prst="rect">
-            <a:avLst/>
-          </a:prstGeom>
-          <a:noFill/>
-          <a:ln/>
-        </p:spPr>
-        <p:txBody>
-          <a:bodyPr wrap="square" lIns="0" tIns="0" rIns="0" bIns="0" rtlCol="0" anchor="t">
+            <a:off x="7799832" y="4974336"/>
+            <a:ext cx="3145536" cy="576072"/>
+          </a:xfrm>
+          <a:prstGeom prst="rect">
+            <a:avLst/>
+          </a:prstGeom>
+          <a:noFill/>
+          <a:ln/>
+        </p:spPr>
+        <p:txBody>
+          <a:bodyPr wrap="square" lIns="254" tIns="254" rIns="254" bIns="254" rtlCol="0" anchor="t">
             <a:normAutofit/>
           </a:bodyPr>
           <a:lstStyle/>
@@ -9948,7 +10107,7 @@
               <a:buNone/>
             </a:pPr>
             <a:r>
-              <a:rPr lang="en-US" sz="1550" dirty="0">
+              <a:rPr lang="en-US" sz="1320" dirty="0">
                 <a:solidFill>
                   <a:srgbClr val="17364A"/>
                 </a:solidFill>
@@ -9956,9 +10115,9 @@
                 <a:ea typeface="Aptos" pitchFamily="34" charset="-122"/>
                 <a:cs typeface="Aptos" pitchFamily="34" charset="-120"/>
               </a:rPr>
-              <a:t>Use the concept to plan transparent communication, gather stakeholder input, protect trust, and make sure affected communities are considered early.</a:t>
-            </a:r>
-            <a:endParaRPr lang="en-US" sz="1550" dirty="0"/>
+              <a:t>Use the concept to plan transparent communication, gather stakeholder input, protect trust, and make sure affected.</a:t>
+            </a:r>
+            <a:endParaRPr lang="en-US" sz="1320" dirty="0"/>
           </a:p>
         </p:txBody>
       </p:sp>
@@ -10259,49 +10418,58 @@
           <a:ln/>
         </p:spPr>
         <p:txBody>
-          <a:bodyPr wrap="square" lIns="635" tIns="635" rIns="635" bIns="635" rtlCol="0" anchor="t">
+          <a:bodyPr wrap="square" lIns="1016" tIns="1016" rIns="1016" bIns="1016" rtlCol="0" anchor="t">
             <a:normAutofit/>
           </a:bodyPr>
           <a:lstStyle/>
           <a:p>
+            <a:pPr indent="0" marL="0">
+              <a:buNone/>
+            </a:pPr>
             <a:r>
               <a:rPr lang="en-US" sz="2100" dirty="0">
                 <a:solidFill>
-                  <a:srgbClr val="17364A"/>
-                </a:solidFill>
-                <a:latin typeface="Aptos" pitchFamily="34" charset="0"/>
-                <a:ea typeface="Aptos" pitchFamily="34" charset="-122"/>
-                <a:cs typeface="Aptos" pitchFamily="34" charset="-120"/>
-              </a:rPr>
-              <a:t>Generative AI can support public health communications by helping staff draft, revise, simplify, translate,.</a:t>
+                  <a:srgbClr val="003A63"/>
+                </a:solidFill>
+                <a:latin typeface="Aptos" pitchFamily="34" charset="0"/>
+                <a:ea typeface="Aptos" pitchFamily="34" charset="-122"/>
+                <a:cs typeface="Aptos" pitchFamily="34" charset="-120"/>
+              </a:rPr>
+              <a:t>• Generative AI can support public health communications by helping staff draft, revise,.</a:t>
             </a:r>
             <a:endParaRPr lang="en-US" sz="2100" dirty="0"/>
           </a:p>
           <a:p>
+            <a:pPr indent="0" marL="0">
+              <a:buNone/>
+            </a:pPr>
             <a:r>
               <a:rPr lang="en-US" sz="2100" dirty="0">
                 <a:solidFill>
-                  <a:srgbClr val="17364A"/>
-                </a:solidFill>
-                <a:latin typeface="Aptos" pitchFamily="34" charset="0"/>
-                <a:ea typeface="Aptos" pitchFamily="34" charset="-122"/>
-                <a:cs typeface="Aptos" pitchFamily="34" charset="-120"/>
-              </a:rPr>
-              <a:t>However, public health communication carries high trust, equity, accessibility, and accuracy obligations.</a:t>
+                  <a:srgbClr val="003A63"/>
+                </a:solidFill>
+                <a:latin typeface="Aptos" pitchFamily="34" charset="0"/>
+                <a:ea typeface="Aptos" pitchFamily="34" charset="-122"/>
+                <a:cs typeface="Aptos" pitchFamily="34" charset="-120"/>
+              </a:rPr>
+              <a:t>• However, public health communication carries high trust, equity, accessibility, and accuracy.</a:t>
             </a:r>
             <a:endParaRPr lang="en-US" sz="2100" dirty="0"/>
           </a:p>
           <a:p>
+            <a:pPr indent="0" marL="0">
+              <a:buNone/>
+            </a:pPr>
             <a:r>
               <a:rPr lang="en-US" sz="2100" dirty="0">
                 <a:solidFill>
-                  <a:srgbClr val="17364A"/>
-                </a:solidFill>
-                <a:latin typeface="Aptos" pitchFamily="34" charset="0"/>
-                <a:ea typeface="Aptos" pitchFamily="34" charset="-122"/>
-                <a:cs typeface="Aptos" pitchFamily="34" charset="-120"/>
-              </a:rPr>
-              <a:t>AI-generated text can sound clear and authoritative while misstating evidence, omitting uncertainty, using.</a:t>
+                  <a:srgbClr val="003A63"/>
+                </a:solidFill>
+                <a:latin typeface="Aptos" pitchFamily="34" charset="0"/>
+                <a:ea typeface="Aptos" pitchFamily="34" charset="-122"/>
+                <a:cs typeface="Aptos" pitchFamily="34" charset="-120"/>
+              </a:rPr>
+              <a:t>• AI-generated text can sound clear and authoritative while misstating evidence, omitting.</a:t>
             </a:r>
             <a:endParaRPr lang="en-US" sz="2100" dirty="0"/>
           </a:p>
@@ -10381,17 +10549,17 @@
         </p:nvSpPr>
         <p:spPr>
           <a:xfrm>
-            <a:off x="8074152" y="1920240"/>
-            <a:ext cx="2825496" cy="1280160"/>
-          </a:xfrm>
-          <a:prstGeom prst="rect">
-            <a:avLst/>
-          </a:prstGeom>
-          <a:noFill/>
-          <a:ln/>
-        </p:spPr>
-        <p:txBody>
-          <a:bodyPr wrap="square" lIns="0" tIns="0" rIns="0" bIns="0" rtlCol="0" anchor="t">
+            <a:off x="8074152" y="1892808"/>
+            <a:ext cx="2825496" cy="1353312"/>
+          </a:xfrm>
+          <a:prstGeom prst="rect">
+            <a:avLst/>
+          </a:prstGeom>
+          <a:noFill/>
+          <a:ln/>
+        </p:spPr>
+        <p:txBody>
+          <a:bodyPr wrap="square" lIns="254" tIns="254" rIns="254" bIns="254" rtlCol="0" anchor="t">
             <a:normAutofit/>
           </a:bodyPr>
           <a:lstStyle/>
@@ -10400,7 +10568,7 @@
               <a:buNone/>
             </a:pPr>
             <a:r>
-              <a:rPr lang="en-US" sz="1550" dirty="0">
+              <a:rPr lang="en-US" sz="1320" dirty="0">
                 <a:solidFill>
                   <a:srgbClr val="17364A"/>
                 </a:solidFill>
@@ -10408,43 +10576,9 @@
                 <a:ea typeface="Aptos" pitchFamily="34" charset="-122"/>
                 <a:cs typeface="Aptos" pitchFamily="34" charset="-120"/>
               </a:rPr>
-              <a:t>Level: applied/foundational</a:t>
-            </a:r>
-            <a:endParaRPr lang="en-US" sz="1550" dirty="0"/>
-          </a:p>
-          <a:p>
-            <a:pPr indent="0" marL="0">
-              <a:buNone/>
-            </a:pPr>
-            <a:r>
-              <a:rPr lang="en-US" sz="1550" dirty="0">
-                <a:solidFill>
-                  <a:srgbClr val="17364A"/>
-                </a:solidFill>
-                <a:latin typeface="Aptos" pitchFamily="34" charset="0"/>
-                <a:ea typeface="Aptos" pitchFamily="34" charset="-122"/>
-                <a:cs typeface="Aptos" pitchFamily="34" charset="-120"/>
-              </a:rPr>
-              <a:t>Primary track: Communications Role-Based Track</a:t>
-            </a:r>
-            <a:endParaRPr lang="en-US" sz="1550" dirty="0"/>
-          </a:p>
-          <a:p>
-            <a:pPr indent="0" marL="0">
-              <a:buNone/>
-            </a:pPr>
-            <a:r>
-              <a:rPr lang="en-US" sz="1550" dirty="0">
-                <a:solidFill>
-                  <a:srgbClr val="17364A"/>
-                </a:solidFill>
-                <a:latin typeface="Aptos" pitchFamily="34" charset="0"/>
-                <a:ea typeface="Aptos" pitchFamily="34" charset="-122"/>
-                <a:cs typeface="Aptos" pitchFamily="34" charset="-120"/>
-              </a:rPr>
-              <a:t>Appears in tracks: communications, shared-foundational, policy, public-health-executive-leadership</a:t>
-            </a:r>
-            <a:endParaRPr lang="en-US" sz="1550" dirty="0"/>
+              <a:t>Level: applied/foundational Primary track: Communications Role-Based Track Appears in tracks: communications,.</a:t>
+            </a:r>
+            <a:endParaRPr lang="en-US" sz="1320" dirty="0"/>
           </a:p>
         </p:txBody>
       </p:sp>
@@ -10532,13 +10666,16 @@
           <a:ln/>
         </p:spPr>
         <p:txBody>
-          <a:bodyPr wrap="square" lIns="254" tIns="254" rIns="254" bIns="254" rtlCol="0" anchor="t">
+          <a:bodyPr wrap="square" lIns="508" tIns="508" rIns="508" bIns="508" rtlCol="0" anchor="t">
             <a:normAutofit/>
           </a:bodyPr>
           <a:lstStyle/>
           <a:p>
-            <a:r>
-              <a:rPr lang="en-US" sz="1380" dirty="0">
+            <a:pPr indent="0" marL="0">
+              <a:buNone/>
+            </a:pPr>
+            <a:r>
+              <a:rPr lang="en-US" sz="1220" dirty="0">
                 <a:solidFill>
                   <a:srgbClr val="17364A"/>
                 </a:solidFill>
@@ -10548,11 +10685,14 @@
               </a:rPr>
               <a:t>Read the module for shared vocabulary and context.</a:t>
             </a:r>
-            <a:endParaRPr lang="en-US" sz="1380" dirty="0"/>
-          </a:p>
-          <a:p>
-            <a:r>
-              <a:rPr lang="en-US" sz="1380" dirty="0">
+            <a:endParaRPr lang="en-US" sz="1220" dirty="0"/>
+          </a:p>
+          <a:p>
+            <a:pPr indent="0" marL="0">
+              <a:buNone/>
+            </a:pPr>
+            <a:r>
+              <a:rPr lang="en-US" sz="1220" dirty="0">
                 <a:solidFill>
                   <a:srgbClr val="17364A"/>
                 </a:solidFill>
@@ -10562,11 +10702,14 @@
               </a:rPr>
               <a:t>Complete the practical exercise to apply the concept.</a:t>
             </a:r>
-            <a:endParaRPr lang="en-US" sz="1380" dirty="0"/>
-          </a:p>
-          <a:p>
-            <a:r>
-              <a:rPr lang="en-US" sz="1380" dirty="0">
+            <a:endParaRPr lang="en-US" sz="1220" dirty="0"/>
+          </a:p>
+          <a:p>
+            <a:pPr indent="0" marL="0">
+              <a:buNone/>
+            </a:pPr>
+            <a:r>
+              <a:rPr lang="en-US" sz="1220" dirty="0">
                 <a:solidFill>
                   <a:srgbClr val="17364A"/>
                 </a:solidFill>
@@ -10576,7 +10719,7 @@
               </a:rPr>
               <a:t>Use the notes and references for deeper review.</a:t>
             </a:r>
-            <a:endParaRPr lang="en-US" sz="1380" dirty="0"/>
+            <a:endParaRPr lang="en-US" sz="1220" dirty="0"/>
           </a:p>
         </p:txBody>
       </p:sp>
@@ -10877,49 +11020,58 @@
           <a:ln/>
         </p:spPr>
         <p:txBody>
-          <a:bodyPr wrap="square" lIns="635" tIns="635" rIns="635" bIns="635" rtlCol="0" anchor="t">
+          <a:bodyPr wrap="square" lIns="1016" tIns="1016" rIns="1016" bIns="1016" rtlCol="0" anchor="t">
             <a:normAutofit/>
           </a:bodyPr>
           <a:lstStyle/>
           <a:p>
+            <a:pPr indent="0" marL="0">
+              <a:buNone/>
+            </a:pPr>
             <a:r>
               <a:rPr lang="en-US" sz="2100" dirty="0">
                 <a:solidFill>
-                  <a:srgbClr val="17364A"/>
-                </a:solidFill>
-                <a:latin typeface="Aptos" pitchFamily="34" charset="0"/>
-                <a:ea typeface="Aptos" pitchFamily="34" charset="-122"/>
-                <a:cs typeface="Aptos" pitchFamily="34" charset="-120"/>
-              </a:rPr>
-              <a:t>AI-assisted communications review checklist</a:t>
+                  <a:srgbClr val="003A63"/>
+                </a:solidFill>
+                <a:latin typeface="Aptos" pitchFamily="34" charset="0"/>
+                <a:ea typeface="Aptos" pitchFamily="34" charset="-122"/>
+                <a:cs typeface="Aptos" pitchFamily="34" charset="-120"/>
+              </a:rPr>
+              <a:t>• AI-assisted communications review checklist</a:t>
             </a:r>
             <a:endParaRPr lang="en-US" sz="2100" dirty="0"/>
           </a:p>
           <a:p>
+            <a:pPr indent="0" marL="0">
+              <a:buNone/>
+            </a:pPr>
             <a:r>
               <a:rPr lang="en-US" sz="2100" dirty="0">
                 <a:solidFill>
-                  <a:srgbClr val="17364A"/>
-                </a:solidFill>
-                <a:latin typeface="Aptos" pitchFamily="34" charset="0"/>
-                <a:ea typeface="Aptos" pitchFamily="34" charset="-122"/>
-                <a:cs typeface="Aptos" pitchFamily="34" charset="-120"/>
-              </a:rPr>
-              <a:t>Source verification notes</a:t>
+                  <a:srgbClr val="003A63"/>
+                </a:solidFill>
+                <a:latin typeface="Aptos" pitchFamily="34" charset="0"/>
+                <a:ea typeface="Aptos" pitchFamily="34" charset="-122"/>
+                <a:cs typeface="Aptos" pitchFamily="34" charset="-120"/>
+              </a:rPr>
+              <a:t>• Source verification notes</a:t>
             </a:r>
             <a:endParaRPr lang="en-US" sz="2100" dirty="0"/>
           </a:p>
           <a:p>
+            <a:pPr indent="0" marL="0">
+              <a:buNone/>
+            </a:pPr>
             <a:r>
               <a:rPr lang="en-US" sz="2100" dirty="0">
                 <a:solidFill>
-                  <a:srgbClr val="17364A"/>
-                </a:solidFill>
-                <a:latin typeface="Aptos" pitchFamily="34" charset="0"/>
-                <a:ea typeface="Aptos" pitchFamily="34" charset="-122"/>
-                <a:cs typeface="Aptos" pitchFamily="34" charset="-120"/>
-              </a:rPr>
-              <a:t>Plain language and accessibility review notes</a:t>
+                  <a:srgbClr val="003A63"/>
+                </a:solidFill>
+                <a:latin typeface="Aptos" pitchFamily="34" charset="0"/>
+                <a:ea typeface="Aptos" pitchFamily="34" charset="-122"/>
+                <a:cs typeface="Aptos" pitchFamily="34" charset="-120"/>
+              </a:rPr>
+              <a:t>• Plain language and accessibility review notes</a:t>
             </a:r>
             <a:endParaRPr lang="en-US" sz="2100" dirty="0"/>
           </a:p>
@@ -10999,17 +11151,17 @@
         </p:nvSpPr>
         <p:spPr>
           <a:xfrm>
-            <a:off x="7799832" y="1828800"/>
-            <a:ext cx="3145536" cy="685800"/>
-          </a:xfrm>
-          <a:prstGeom prst="rect">
-            <a:avLst/>
-          </a:prstGeom>
-          <a:noFill/>
-          <a:ln/>
-        </p:spPr>
-        <p:txBody>
-          <a:bodyPr wrap="square" lIns="0" tIns="0" rIns="0" bIns="0" rtlCol="0" anchor="t">
+            <a:off x="7799832" y="1801368"/>
+            <a:ext cx="3145536" cy="758952"/>
+          </a:xfrm>
+          <a:prstGeom prst="rect">
+            <a:avLst/>
+          </a:prstGeom>
+          <a:noFill/>
+          <a:ln/>
+        </p:spPr>
+        <p:txBody>
+          <a:bodyPr wrap="square" lIns="254" tIns="254" rIns="254" bIns="254" rtlCol="0" anchor="t">
             <a:normAutofit/>
           </a:bodyPr>
           <a:lstStyle/>
@@ -11018,7 +11170,7 @@
               <a:buNone/>
             </a:pPr>
             <a:r>
-              <a:rPr lang="en-US" sz="1550" dirty="0">
+              <a:rPr lang="en-US" sz="1320" dirty="0">
                 <a:solidFill>
                   <a:srgbClr val="17364A"/>
                 </a:solidFill>
@@ -11028,7 +11180,7 @@
               </a:rPr>
               <a:t>AI-assisted communications review checklist</a:t>
             </a:r>
-            <a:endParaRPr lang="en-US" sz="1550" dirty="0"/>
+            <a:endParaRPr lang="en-US" sz="1320" dirty="0"/>
           </a:p>
         </p:txBody>
       </p:sp>
@@ -11116,13 +11268,16 @@
           <a:ln/>
         </p:spPr>
         <p:txBody>
-          <a:bodyPr wrap="square" lIns="254" tIns="254" rIns="254" bIns="254" rtlCol="0" anchor="t">
+          <a:bodyPr wrap="square" lIns="508" tIns="508" rIns="508" bIns="508" rtlCol="0" anchor="t">
             <a:normAutofit/>
           </a:bodyPr>
           <a:lstStyle/>
           <a:p>
-            <a:r>
-              <a:rPr lang="en-US" sz="1380" dirty="0">
+            <a:pPr indent="0" marL="0">
+              <a:buNone/>
+            </a:pPr>
+            <a:r>
+              <a:rPr lang="en-US" sz="1220" dirty="0">
                 <a:solidFill>
                   <a:srgbClr val="17364A"/>
                 </a:solidFill>
@@ -11132,11 +11287,14 @@
               </a:rPr>
               <a:t>Approval pathway documentation</a:t>
             </a:r>
-            <a:endParaRPr lang="en-US" sz="1380" dirty="0"/>
-          </a:p>
-          <a:p>
-            <a:r>
-              <a:rPr lang="en-US" sz="1380" dirty="0">
+            <a:endParaRPr lang="en-US" sz="1220" dirty="0"/>
+          </a:p>
+          <a:p>
+            <a:pPr indent="0" marL="0">
+              <a:buNone/>
+            </a:pPr>
+            <a:r>
+              <a:rPr lang="en-US" sz="1220" dirty="0">
                 <a:solidFill>
                   <a:srgbClr val="17364A"/>
                 </a:solidFill>
@@ -11146,7 +11304,7 @@
               </a:rPr>
               <a:t>Final reviewed message or sample revision</a:t>
             </a:r>
-            <a:endParaRPr lang="en-US" sz="1380" dirty="0"/>
+            <a:endParaRPr lang="en-US" sz="1220" dirty="0"/>
           </a:p>
         </p:txBody>
       </p:sp>
@@ -11224,17 +11382,17 @@
         </p:nvSpPr>
         <p:spPr>
           <a:xfrm>
-            <a:off x="7799832" y="5001768"/>
-            <a:ext cx="3145536" cy="502920"/>
-          </a:xfrm>
-          <a:prstGeom prst="rect">
-            <a:avLst/>
-          </a:prstGeom>
-          <a:noFill/>
-          <a:ln/>
-        </p:spPr>
-        <p:txBody>
-          <a:bodyPr wrap="square" lIns="0" tIns="0" rIns="0" bIns="0" rtlCol="0" anchor="t">
+            <a:off x="7799832" y="4974336"/>
+            <a:ext cx="3145536" cy="576072"/>
+          </a:xfrm>
+          <a:prstGeom prst="rect">
+            <a:avLst/>
+          </a:prstGeom>
+          <a:noFill/>
+          <a:ln/>
+        </p:spPr>
+        <p:txBody>
+          <a:bodyPr wrap="square" lIns="254" tIns="254" rIns="254" bIns="254" rtlCol="0" anchor="t">
             <a:normAutofit/>
           </a:bodyPr>
           <a:lstStyle/>
@@ -11243,7 +11401,7 @@
               <a:buNone/>
             </a:pPr>
             <a:r>
-              <a:rPr lang="en-US" sz="1550" dirty="0">
+              <a:rPr lang="en-US" sz="1320" dirty="0">
                 <a:solidFill>
                   <a:srgbClr val="17364A"/>
                 </a:solidFill>
@@ -11251,9 +11409,9 @@
                 <a:ea typeface="Aptos" pitchFamily="34" charset="-122"/>
                 <a:cs typeface="Aptos" pitchFamily="34" charset="-120"/>
               </a:rPr>
-              <a:t>Use the assignment to test whether you can explain the concept, apply it to a realistic public health situation, and identify what would need review before the work moves forward.</a:t>
-            </a:r>
-            <a:endParaRPr lang="en-US" sz="1550" dirty="0"/>
+              <a:t>Use the assignment to test whether you can explain the concept, apply it to a realistic public health situation, and.</a:t>
+            </a:r>
+            <a:endParaRPr lang="en-US" sz="1320" dirty="0"/>
           </a:p>
         </p:txBody>
       </p:sp>
@@ -11554,49 +11712,58 @@
           <a:ln/>
         </p:spPr>
         <p:txBody>
-          <a:bodyPr wrap="square" lIns="635" tIns="635" rIns="635" bIns="635" rtlCol="0" anchor="t">
+          <a:bodyPr wrap="square" lIns="1016" tIns="1016" rIns="1016" bIns="1016" rtlCol="0" anchor="t">
             <a:normAutofit/>
           </a:bodyPr>
           <a:lstStyle/>
           <a:p>
+            <a:pPr indent="0" marL="0">
+              <a:buNone/>
+            </a:pPr>
             <a:r>
               <a:rPr lang="en-US" sz="2100" dirty="0">
                 <a:solidFill>
-                  <a:srgbClr val="17364A"/>
-                </a:solidFill>
-                <a:latin typeface="Aptos" pitchFamily="34" charset="0"/>
-                <a:ea typeface="Aptos" pitchFamily="34" charset="-122"/>
-                <a:cs typeface="Aptos" pitchFamily="34" charset="-120"/>
-              </a:rPr>
-              <a:t>1. What is an appropriate role for AI in public health communications?</a:t>
+                  <a:srgbClr val="003A63"/>
+                </a:solidFill>
+                <a:latin typeface="Aptos" pitchFamily="34" charset="0"/>
+                <a:ea typeface="Aptos" pitchFamily="34" charset="-122"/>
+                <a:cs typeface="Aptos" pitchFamily="34" charset="-120"/>
+              </a:rPr>
+              <a:t>• 1. What is an appropriate role for AI in public health communications?</a:t>
             </a:r>
             <a:endParaRPr lang="en-US" sz="2100" dirty="0"/>
           </a:p>
           <a:p>
+            <a:pPr indent="0" marL="0">
+              <a:buNone/>
+            </a:pPr>
             <a:r>
               <a:rPr lang="en-US" sz="2100" dirty="0">
                 <a:solidFill>
-                  <a:srgbClr val="17364A"/>
-                </a:solidFill>
-                <a:latin typeface="Aptos" pitchFamily="34" charset="0"/>
-                <a:ea typeface="Aptos" pitchFamily="34" charset="-122"/>
-                <a:cs typeface="Aptos" pitchFamily="34" charset="-120"/>
-              </a:rPr>
-              <a:t>2. Why is source verification necessary?</a:t>
+                  <a:srgbClr val="003A63"/>
+                </a:solidFill>
+                <a:latin typeface="Aptos" pitchFamily="34" charset="0"/>
+                <a:ea typeface="Aptos" pitchFamily="34" charset="-122"/>
+                <a:cs typeface="Aptos" pitchFamily="34" charset="-120"/>
+              </a:rPr>
+              <a:t>• 2. Why is source verification necessary?</a:t>
             </a:r>
             <a:endParaRPr lang="en-US" sz="2100" dirty="0"/>
           </a:p>
           <a:p>
+            <a:pPr indent="0" marL="0">
+              <a:buNone/>
+            </a:pPr>
             <a:r>
               <a:rPr lang="en-US" sz="2100" dirty="0">
                 <a:solidFill>
-                  <a:srgbClr val="17364A"/>
-                </a:solidFill>
-                <a:latin typeface="Aptos" pitchFamily="34" charset="0"/>
-                <a:ea typeface="Aptos" pitchFamily="34" charset="-122"/>
-                <a:cs typeface="Aptos" pitchFamily="34" charset="-120"/>
-              </a:rPr>
-              <a:t>3. Which review is especially important for public-facing AI-assisted messages?</a:t>
+                  <a:srgbClr val="003A63"/>
+                </a:solidFill>
+                <a:latin typeface="Aptos" pitchFamily="34" charset="0"/>
+                <a:ea typeface="Aptos" pitchFamily="34" charset="-122"/>
+                <a:cs typeface="Aptos" pitchFamily="34" charset="-120"/>
+              </a:rPr>
+              <a:t>• 3. Which review is especially important for public-facing AI-assisted messages?</a:t>
             </a:r>
             <a:endParaRPr lang="en-US" sz="2100" dirty="0"/>
           </a:p>
@@ -11676,17 +11843,17 @@
         </p:nvSpPr>
         <p:spPr>
           <a:xfrm>
-            <a:off x="7799832" y="1828800"/>
-            <a:ext cx="3145536" cy="685800"/>
-          </a:xfrm>
-          <a:prstGeom prst="rect">
-            <a:avLst/>
-          </a:prstGeom>
-          <a:noFill/>
-          <a:ln/>
-        </p:spPr>
-        <p:txBody>
-          <a:bodyPr wrap="square" lIns="0" tIns="0" rIns="0" bIns="0" rtlCol="0" anchor="t">
+            <a:off x="7799832" y="1801368"/>
+            <a:ext cx="3145536" cy="758952"/>
+          </a:xfrm>
+          <a:prstGeom prst="rect">
+            <a:avLst/>
+          </a:prstGeom>
+          <a:noFill/>
+          <a:ln/>
+        </p:spPr>
+        <p:txBody>
+          <a:bodyPr wrap="square" lIns="254" tIns="254" rIns="254" bIns="254" rtlCol="0" anchor="t">
             <a:normAutofit/>
           </a:bodyPr>
           <a:lstStyle/>
@@ -11695,7 +11862,7 @@
               <a:buNone/>
             </a:pPr>
             <a:r>
-              <a:rPr lang="en-US" sz="1550" dirty="0">
+              <a:rPr lang="en-US" sz="1320" dirty="0">
                 <a:solidFill>
                   <a:srgbClr val="17364A"/>
                 </a:solidFill>
@@ -11705,7 +11872,7 @@
               </a:rPr>
               <a:t>1. What is an appropriate role for AI in public health communications?</a:t>
             </a:r>
-            <a:endParaRPr lang="en-US" sz="1550" dirty="0"/>
+            <a:endParaRPr lang="en-US" sz="1320" dirty="0"/>
           </a:p>
         </p:txBody>
       </p:sp>
@@ -11793,13 +11960,16 @@
           <a:ln/>
         </p:spPr>
         <p:txBody>
-          <a:bodyPr wrap="square" lIns="254" tIns="254" rIns="254" bIns="254" rtlCol="0" anchor="t">
+          <a:bodyPr wrap="square" lIns="508" tIns="508" rIns="508" bIns="508" rtlCol="0" anchor="t">
             <a:normAutofit/>
           </a:bodyPr>
           <a:lstStyle/>
           <a:p>
-            <a:r>
-              <a:rPr lang="en-US" sz="1380" dirty="0">
+            <a:pPr indent="0" marL="0">
+              <a:buNone/>
+            </a:pPr>
+            <a:r>
+              <a:rPr lang="en-US" sz="1220" dirty="0">
                 <a:solidFill>
                   <a:srgbClr val="17364A"/>
                 </a:solidFill>
@@ -11809,11 +11979,14 @@
               </a:rPr>
               <a:t>1.</a:t>
             </a:r>
-            <a:endParaRPr lang="en-US" sz="1380" dirty="0"/>
-          </a:p>
-          <a:p>
-            <a:r>
-              <a:rPr lang="en-US" sz="1380" dirty="0">
+            <a:endParaRPr lang="en-US" sz="1220" dirty="0"/>
+          </a:p>
+          <a:p>
+            <a:pPr indent="0" marL="0">
+              <a:buNone/>
+            </a:pPr>
+            <a:r>
+              <a:rPr lang="en-US" sz="1220" dirty="0">
                 <a:solidFill>
                   <a:srgbClr val="17364A"/>
                 </a:solidFill>
@@ -11823,11 +11996,14 @@
               </a:rPr>
               <a:t>What is an appropriate role for AI in public health communications?</a:t>
             </a:r>
-            <a:endParaRPr lang="en-US" sz="1380" dirty="0"/>
-          </a:p>
-          <a:p>
-            <a:r>
-              <a:rPr lang="en-US" sz="1380" dirty="0">
+            <a:endParaRPr lang="en-US" sz="1220" dirty="0"/>
+          </a:p>
+          <a:p>
+            <a:pPr indent="0" marL="0">
+              <a:buNone/>
+            </a:pPr>
+            <a:r>
+              <a:rPr lang="en-US" sz="1220" dirty="0">
                 <a:solidFill>
                   <a:srgbClr val="17364A"/>
                 </a:solidFill>
@@ -11837,7 +12013,7 @@
               </a:rPr>
               <a:t>2.</a:t>
             </a:r>
-            <a:endParaRPr lang="en-US" sz="1380" dirty="0"/>
+            <a:endParaRPr lang="en-US" sz="1220" dirty="0"/>
           </a:p>
         </p:txBody>
       </p:sp>
@@ -11915,17 +12091,17 @@
         </p:nvSpPr>
         <p:spPr>
           <a:xfrm>
-            <a:off x="7799832" y="5001768"/>
-            <a:ext cx="3145536" cy="502920"/>
-          </a:xfrm>
-          <a:prstGeom prst="rect">
-            <a:avLst/>
-          </a:prstGeom>
-          <a:noFill/>
-          <a:ln/>
-        </p:spPr>
-        <p:txBody>
-          <a:bodyPr wrap="square" lIns="0" tIns="0" rIns="0" bIns="0" rtlCol="0" anchor="t">
+            <a:off x="7799832" y="4974336"/>
+            <a:ext cx="3145536" cy="576072"/>
+          </a:xfrm>
+          <a:prstGeom prst="rect">
+            <a:avLst/>
+          </a:prstGeom>
+          <a:noFill/>
+          <a:ln/>
+        </p:spPr>
+        <p:txBody>
+          <a:bodyPr wrap="square" lIns="254" tIns="254" rIns="254" bIns="254" rtlCol="0" anchor="t">
             <a:normAutofit/>
           </a:bodyPr>
           <a:lstStyle/>
@@ -11934,7 +12110,7 @@
               <a:buNone/>
             </a:pPr>
             <a:r>
-              <a:rPr lang="en-US" sz="1550" dirty="0">
+              <a:rPr lang="en-US" sz="1320" dirty="0">
                 <a:solidFill>
                   <a:srgbClr val="17364A"/>
                 </a:solidFill>
@@ -11942,9 +12118,9 @@
                 <a:ea typeface="Aptos" pitchFamily="34" charset="-122"/>
                 <a:cs typeface="Aptos" pitchFamily="34" charset="-120"/>
               </a:rPr>
-              <a:t>Use the assignment to test whether you can explain the concept, apply it to a realistic public health situation, and identify what would need review before the work moves forward.</a:t>
-            </a:r>
-            <a:endParaRPr lang="en-US" sz="1550" dirty="0"/>
+              <a:t>Use the assignment to test whether you can explain the concept, apply it to a realistic public health situation, and.</a:t>
+            </a:r>
+            <a:endParaRPr lang="en-US" sz="1320" dirty="0"/>
           </a:p>
         </p:txBody>
       </p:sp>
@@ -12245,49 +12421,58 @@
           <a:ln/>
         </p:spPr>
         <p:txBody>
-          <a:bodyPr wrap="square" lIns="635" tIns="635" rIns="635" bIns="635" rtlCol="0" anchor="t">
+          <a:bodyPr wrap="square" lIns="1016" tIns="1016" rIns="1016" bIns="1016" rtlCol="0" anchor="t">
             <a:normAutofit/>
           </a:bodyPr>
           <a:lstStyle/>
           <a:p>
+            <a:pPr indent="0" marL="0">
+              <a:buNone/>
+            </a:pPr>
             <a:r>
               <a:rPr lang="en-US" sz="2100" dirty="0">
                 <a:solidFill>
-                  <a:srgbClr val="17364A"/>
-                </a:solidFill>
-                <a:latin typeface="Aptos" pitchFamily="34" charset="0"/>
-                <a:ea typeface="Aptos" pitchFamily="34" charset="-122"/>
-                <a:cs typeface="Aptos" pitchFamily="34" charset="-120"/>
-              </a:rPr>
-              <a:t>NIST Artificial Intelligence Risk Management Framework:.</a:t>
+                  <a:srgbClr val="003A63"/>
+                </a:solidFill>
+                <a:latin typeface="Aptos" pitchFamily="34" charset="0"/>
+                <a:ea typeface="Aptos" pitchFamily="34" charset="-122"/>
+                <a:cs typeface="Aptos" pitchFamily="34" charset="-120"/>
+              </a:rPr>
+              <a:t>• NIST Artificial Intelligence Risk Management Framework:.</a:t>
             </a:r>
             <a:endParaRPr lang="en-US" sz="2100" dirty="0"/>
           </a:p>
           <a:p>
+            <a:pPr indent="0" marL="0">
+              <a:buNone/>
+            </a:pPr>
             <a:r>
               <a:rPr lang="en-US" sz="2100" dirty="0">
                 <a:solidFill>
-                  <a:srgbClr val="17364A"/>
-                </a:solidFill>
-                <a:latin typeface="Aptos" pitchFamily="34" charset="0"/>
-                <a:ea typeface="Aptos" pitchFamily="34" charset="-122"/>
-                <a:cs typeface="Aptos" pitchFamily="34" charset="-120"/>
-              </a:rPr>
-              <a:t>NIST Generative AI Profile:.</a:t>
+                  <a:srgbClr val="003A63"/>
+                </a:solidFill>
+                <a:latin typeface="Aptos" pitchFamily="34" charset="0"/>
+                <a:ea typeface="Aptos" pitchFamily="34" charset="-122"/>
+                <a:cs typeface="Aptos" pitchFamily="34" charset="-120"/>
+              </a:rPr>
+              <a:t>• NIST Generative AI Profile:.</a:t>
             </a:r>
             <a:endParaRPr lang="en-US" sz="2100" dirty="0"/>
           </a:p>
           <a:p>
+            <a:pPr indent="0" marL="0">
+              <a:buNone/>
+            </a:pPr>
             <a:r>
               <a:rPr lang="en-US" sz="2100" dirty="0">
                 <a:solidFill>
-                  <a:srgbClr val="17364A"/>
-                </a:solidFill>
-                <a:latin typeface="Aptos" pitchFamily="34" charset="0"/>
-                <a:ea typeface="Aptos" pitchFamily="34" charset="-122"/>
-                <a:cs typeface="Aptos" pitchFamily="34" charset="-120"/>
-              </a:rPr>
-              <a:t>CDC Public Health Data Strategy and Data Modernization resources:.</a:t>
+                  <a:srgbClr val="003A63"/>
+                </a:solidFill>
+                <a:latin typeface="Aptos" pitchFamily="34" charset="0"/>
+                <a:ea typeface="Aptos" pitchFamily="34" charset="-122"/>
+                <a:cs typeface="Aptos" pitchFamily="34" charset="-120"/>
+              </a:rPr>
+              <a:t>• CDC Public Health Data Strategy and Data Modernization resources:.</a:t>
             </a:r>
             <a:endParaRPr lang="en-US" sz="2100" dirty="0"/>
           </a:p>
@@ -12367,17 +12552,17 @@
         </p:nvSpPr>
         <p:spPr>
           <a:xfrm>
-            <a:off x="7799832" y="1828800"/>
-            <a:ext cx="3145536" cy="685800"/>
-          </a:xfrm>
-          <a:prstGeom prst="rect">
-            <a:avLst/>
-          </a:prstGeom>
-          <a:noFill/>
-          <a:ln/>
-        </p:spPr>
-        <p:txBody>
-          <a:bodyPr wrap="square" lIns="0" tIns="0" rIns="0" bIns="0" rtlCol="0" anchor="t">
+            <a:off x="7799832" y="1801368"/>
+            <a:ext cx="3145536" cy="758952"/>
+          </a:xfrm>
+          <a:prstGeom prst="rect">
+            <a:avLst/>
+          </a:prstGeom>
+          <a:noFill/>
+          <a:ln/>
+        </p:spPr>
+        <p:txBody>
+          <a:bodyPr wrap="square" lIns="254" tIns="254" rIns="254" bIns="254" rtlCol="0" anchor="t">
             <a:normAutofit/>
           </a:bodyPr>
           <a:lstStyle/>
@@ -12386,7 +12571,7 @@
               <a:buNone/>
             </a:pPr>
             <a:r>
-              <a:rPr lang="en-US" sz="1550" dirty="0">
+              <a:rPr lang="en-US" sz="1320" dirty="0">
                 <a:solidFill>
                   <a:srgbClr val="17364A"/>
                 </a:solidFill>
@@ -12396,7 +12581,7 @@
               </a:rPr>
               <a:t>NIST Artificial Intelligence Risk Management Framework:.</a:t>
             </a:r>
-            <a:endParaRPr lang="en-US" sz="1550" dirty="0"/>
+            <a:endParaRPr lang="en-US" sz="1320" dirty="0"/>
           </a:p>
         </p:txBody>
       </p:sp>
@@ -12484,13 +12669,16 @@
           <a:ln/>
         </p:spPr>
         <p:txBody>
-          <a:bodyPr wrap="square" lIns="254" tIns="254" rIns="254" bIns="254" rtlCol="0" anchor="t">
+          <a:bodyPr wrap="square" lIns="508" tIns="508" rIns="508" bIns="508" rtlCol="0" anchor="t">
             <a:normAutofit/>
           </a:bodyPr>
           <a:lstStyle/>
           <a:p>
-            <a:r>
-              <a:rPr lang="en-US" sz="1380" dirty="0">
+            <a:pPr indent="0" marL="0">
+              <a:buNone/>
+            </a:pPr>
+            <a:r>
+              <a:rPr lang="en-US" sz="1220" dirty="0">
                 <a:solidFill>
                   <a:srgbClr val="17364A"/>
                 </a:solidFill>
@@ -12500,11 +12688,14 @@
               </a:rPr>
               <a:t>NIST Artificial Intelligence Risk Management Framework:.</a:t>
             </a:r>
-            <a:endParaRPr lang="en-US" sz="1380" dirty="0"/>
-          </a:p>
-          <a:p>
-            <a:r>
-              <a:rPr lang="en-US" sz="1380" dirty="0">
+            <a:endParaRPr lang="en-US" sz="1220" dirty="0"/>
+          </a:p>
+          <a:p>
+            <a:pPr indent="0" marL="0">
+              <a:buNone/>
+            </a:pPr>
+            <a:r>
+              <a:rPr lang="en-US" sz="1220" dirty="0">
                 <a:solidFill>
                   <a:srgbClr val="17364A"/>
                 </a:solidFill>
@@ -12514,11 +12705,14 @@
               </a:rPr>
               <a:t>OWASP guidance for LLM application security</a:t>
             </a:r>
-            <a:endParaRPr lang="en-US" sz="1380" dirty="0"/>
-          </a:p>
-          <a:p>
-            <a:r>
-              <a:rPr lang="en-US" sz="1380" dirty="0">
+            <a:endParaRPr lang="en-US" sz="1220" dirty="0"/>
+          </a:p>
+          <a:p>
+            <a:pPr indent="0" marL="0">
+              <a:buNone/>
+            </a:pPr>
+            <a:r>
+              <a:rPr lang="en-US" sz="1220" dirty="0">
                 <a:solidFill>
                   <a:srgbClr val="17364A"/>
                 </a:solidFill>
@@ -12526,9 +12720,9 @@
                 <a:ea typeface="Aptos" pitchFamily="34" charset="-122"/>
                 <a:cs typeface="Aptos" pitchFamily="34" charset="-120"/>
               </a:rPr>
-              <a:t>Agency policies for privacy, cybersecurity, records, procurement, accessibility, and.</a:t>
-            </a:r>
-            <a:endParaRPr lang="en-US" sz="1380" dirty="0"/>
+              <a:t>Agency policies for privacy, cybersecurity, records, procurement,.</a:t>
+            </a:r>
+            <a:endParaRPr lang="en-US" sz="1220" dirty="0"/>
           </a:p>
         </p:txBody>
       </p:sp>
@@ -12606,17 +12800,17 @@
         </p:nvSpPr>
         <p:spPr>
           <a:xfrm>
-            <a:off x="7799832" y="5001768"/>
-            <a:ext cx="3145536" cy="502920"/>
-          </a:xfrm>
-          <a:prstGeom prst="rect">
-            <a:avLst/>
-          </a:prstGeom>
-          <a:noFill/>
-          <a:ln/>
-        </p:spPr>
-        <p:txBody>
-          <a:bodyPr wrap="square" lIns="0" tIns="0" rIns="0" bIns="0" rtlCol="0" anchor="t">
+            <a:off x="7799832" y="4974336"/>
+            <a:ext cx="3145536" cy="576072"/>
+          </a:xfrm>
+          <a:prstGeom prst="rect">
+            <a:avLst/>
+          </a:prstGeom>
+          <a:noFill/>
+          <a:ln/>
+        </p:spPr>
+        <p:txBody>
+          <a:bodyPr wrap="square" lIns="254" tIns="254" rIns="254" bIns="254" rtlCol="0" anchor="t">
             <a:normAutofit/>
           </a:bodyPr>
           <a:lstStyle/>
@@ -12625,7 +12819,7 @@
               <a:buNone/>
             </a:pPr>
             <a:r>
-              <a:rPr lang="en-US" sz="1550" dirty="0">
+              <a:rPr lang="en-US" sz="1320" dirty="0">
                 <a:solidFill>
                   <a:srgbClr val="17364A"/>
                 </a:solidFill>
@@ -12633,9 +12827,9 @@
                 <a:ea typeface="Aptos" pitchFamily="34" charset="-122"/>
                 <a:cs typeface="Aptos" pitchFamily="34" charset="-120"/>
               </a:rPr>
-              <a:t>Use the concept to plan transparent communication, gather stakeholder input, protect trust, and make sure affected communities are considered early.</a:t>
-            </a:r>
-            <a:endParaRPr lang="en-US" sz="1550" dirty="0"/>
+              <a:t>Use the concept to plan transparent communication, gather stakeholder input, protect trust, and make sure affected.</a:t>
+            </a:r>
+            <a:endParaRPr lang="en-US" sz="1320" dirty="0"/>
           </a:p>
         </p:txBody>
       </p:sp>
@@ -12936,21 +13130,24 @@
           <a:ln/>
         </p:spPr>
         <p:txBody>
-          <a:bodyPr wrap="square" lIns="635" tIns="635" rIns="635" bIns="635" rtlCol="0" anchor="t">
+          <a:bodyPr wrap="square" lIns="1016" tIns="1016" rIns="1016" bIns="1016" rtlCol="0" anchor="t">
             <a:normAutofit/>
           </a:bodyPr>
           <a:lstStyle/>
           <a:p>
+            <a:pPr indent="0" marL="0">
+              <a:buNone/>
+            </a:pPr>
             <a:r>
               <a:rPr lang="en-US" sz="2100" dirty="0">
                 <a:solidFill>
-                  <a:srgbClr val="17364A"/>
-                </a:solidFill>
-                <a:latin typeface="Aptos" pitchFamily="34" charset="0"/>
-                <a:ea typeface="Aptos" pitchFamily="34" charset="-122"/>
-                <a:cs typeface="Aptos" pitchFamily="34" charset="-120"/>
-              </a:rPr>
-              <a:t>Relevant public health program SOPs, data governance documentation, and implementation plans</a:t>
+                  <a:srgbClr val="003A63"/>
+                </a:solidFill>
+                <a:latin typeface="Aptos" pitchFamily="34" charset="0"/>
+                <a:ea typeface="Aptos" pitchFamily="34" charset="-122"/>
+                <a:cs typeface="Aptos" pitchFamily="34" charset="-120"/>
+              </a:rPr>
+              <a:t>• Relevant public health program SOPs, data governance documentation, and implementation plans</a:t>
             </a:r>
             <a:endParaRPr lang="en-US" sz="2100" dirty="0"/>
           </a:p>
@@ -13030,17 +13227,17 @@
         </p:nvSpPr>
         <p:spPr>
           <a:xfrm>
-            <a:off x="7799832" y="1828800"/>
-            <a:ext cx="3145536" cy="685800"/>
-          </a:xfrm>
-          <a:prstGeom prst="rect">
-            <a:avLst/>
-          </a:prstGeom>
-          <a:noFill/>
-          <a:ln/>
-        </p:spPr>
-        <p:txBody>
-          <a:bodyPr wrap="square" lIns="0" tIns="0" rIns="0" bIns="0" rtlCol="0" anchor="t">
+            <a:off x="7799832" y="1801368"/>
+            <a:ext cx="3145536" cy="758952"/>
+          </a:xfrm>
+          <a:prstGeom prst="rect">
+            <a:avLst/>
+          </a:prstGeom>
+          <a:noFill/>
+          <a:ln/>
+        </p:spPr>
+        <p:txBody>
+          <a:bodyPr wrap="square" lIns="254" tIns="254" rIns="254" bIns="254" rtlCol="0" anchor="t">
             <a:normAutofit/>
           </a:bodyPr>
           <a:lstStyle/>
@@ -13049,7 +13246,7 @@
               <a:buNone/>
             </a:pPr>
             <a:r>
-              <a:rPr lang="en-US" sz="1550" dirty="0">
+              <a:rPr lang="en-US" sz="1320" dirty="0">
                 <a:solidFill>
                   <a:srgbClr val="17364A"/>
                 </a:solidFill>
@@ -13059,7 +13256,7 @@
               </a:rPr>
               <a:t>Relevant public health program SOPs, data governance documentation, and implementation plans</a:t>
             </a:r>
-            <a:endParaRPr lang="en-US" sz="1550" dirty="0"/>
+            <a:endParaRPr lang="en-US" sz="1320" dirty="0"/>
           </a:p>
         </p:txBody>
       </p:sp>
@@ -13147,13 +13344,16 @@
           <a:ln/>
         </p:spPr>
         <p:txBody>
-          <a:bodyPr wrap="square" lIns="254" tIns="254" rIns="254" bIns="254" rtlCol="0" anchor="t">
+          <a:bodyPr wrap="square" lIns="508" tIns="508" rIns="508" bIns="508" rtlCol="0" anchor="t">
             <a:normAutofit/>
           </a:bodyPr>
           <a:lstStyle/>
           <a:p>
-            <a:r>
-              <a:rPr lang="en-US" sz="1380" dirty="0">
+            <a:pPr indent="0" marL="0">
+              <a:buNone/>
+            </a:pPr>
+            <a:r>
+              <a:rPr lang="en-US" sz="1220" dirty="0">
                 <a:solidFill>
                   <a:srgbClr val="17364A"/>
                 </a:solidFill>
@@ -13161,9 +13361,9 @@
                 <a:ea typeface="Aptos" pitchFamily="34" charset="-122"/>
                 <a:cs typeface="Aptos" pitchFamily="34" charset="-120"/>
               </a:rPr>
-              <a:t>Relevant public health program SOPs, data governance documentation, and implementation plans</a:t>
-            </a:r>
-            <a:endParaRPr lang="en-US" sz="1380" dirty="0"/>
+              <a:t>Relevant public health program SOPs, data governance.</a:t>
+            </a:r>
+            <a:endParaRPr lang="en-US" sz="1220" dirty="0"/>
           </a:p>
         </p:txBody>
       </p:sp>
@@ -13241,17 +13441,17 @@
         </p:nvSpPr>
         <p:spPr>
           <a:xfrm>
-            <a:off x="7799832" y="5001768"/>
-            <a:ext cx="3145536" cy="502920"/>
-          </a:xfrm>
-          <a:prstGeom prst="rect">
-            <a:avLst/>
-          </a:prstGeom>
-          <a:noFill/>
-          <a:ln/>
-        </p:spPr>
-        <p:txBody>
-          <a:bodyPr wrap="square" lIns="0" tIns="0" rIns="0" bIns="0" rtlCol="0" anchor="t">
+            <a:off x="7799832" y="4974336"/>
+            <a:ext cx="3145536" cy="576072"/>
+          </a:xfrm>
+          <a:prstGeom prst="rect">
+            <a:avLst/>
+          </a:prstGeom>
+          <a:noFill/>
+          <a:ln/>
+        </p:spPr>
+        <p:txBody>
+          <a:bodyPr wrap="square" lIns="254" tIns="254" rIns="254" bIns="254" rtlCol="0" anchor="t">
             <a:normAutofit/>
           </a:bodyPr>
           <a:lstStyle/>
@@ -13260,7 +13460,7 @@
               <a:buNone/>
             </a:pPr>
             <a:r>
-              <a:rPr lang="en-US" sz="1550" dirty="0">
+              <a:rPr lang="en-US" sz="1320" dirty="0">
                 <a:solidFill>
                   <a:srgbClr val="17364A"/>
                 </a:solidFill>
@@ -13268,9 +13468,9 @@
                 <a:ea typeface="Aptos" pitchFamily="34" charset="-122"/>
                 <a:cs typeface="Aptos" pitchFamily="34" charset="-120"/>
               </a:rPr>
-              <a:t>Use the concept to plan transparent communication, gather stakeholder input, protect trust, and make sure affected communities are considered early.</a:t>
-            </a:r>
-            <a:endParaRPr lang="en-US" sz="1550" dirty="0"/>
+              <a:t>Use the concept to plan transparent communication, gather stakeholder input, protect trust, and make sure affected.</a:t>
+            </a:r>
+            <a:endParaRPr lang="en-US" sz="1320" dirty="0"/>
           </a:p>
         </p:txBody>
       </p:sp>
@@ -13571,63 +13771,75 @@
           <a:ln/>
         </p:spPr>
         <p:txBody>
-          <a:bodyPr wrap="square" lIns="635" tIns="635" rIns="635" bIns="635" rtlCol="0" anchor="t">
+          <a:bodyPr wrap="square" lIns="1016" tIns="1016" rIns="1016" bIns="1016" rtlCol="0" anchor="t">
             <a:normAutofit/>
           </a:bodyPr>
           <a:lstStyle/>
           <a:p>
+            <a:pPr indent="0" marL="0">
+              <a:buNone/>
+            </a:pPr>
             <a:r>
               <a:rPr lang="en-US" sz="1900" dirty="0">
                 <a:solidFill>
-                  <a:srgbClr val="17364A"/>
-                </a:solidFill>
-                <a:latin typeface="Aptos" pitchFamily="34" charset="0"/>
-                <a:ea typeface="Aptos" pitchFamily="34" charset="-122"/>
-                <a:cs typeface="Aptos" pitchFamily="34" charset="-120"/>
-              </a:rPr>
-              <a:t>Play 11: Build and Deploy AI Solutions - This lesson informs Play 11 by helping learners connect the lesson.</a:t>
+                  <a:srgbClr val="003A63"/>
+                </a:solidFill>
+                <a:latin typeface="Aptos" pitchFamily="34" charset="0"/>
+                <a:ea typeface="Aptos" pitchFamily="34" charset="-122"/>
+                <a:cs typeface="Aptos" pitchFamily="34" charset="-120"/>
+              </a:rPr>
+              <a:t>• Play 11: Build and Deploy AI Solutions - This lesson informs Play 11 by helping learners.</a:t>
             </a:r>
             <a:endParaRPr lang="en-US" sz="1900" dirty="0"/>
           </a:p>
           <a:p>
+            <a:pPr indent="0" marL="0">
+              <a:buNone/>
+            </a:pPr>
             <a:r>
               <a:rPr lang="en-US" sz="1900" dirty="0">
                 <a:solidFill>
-                  <a:srgbClr val="17364A"/>
-                </a:solidFill>
-                <a:latin typeface="Aptos" pitchFamily="34" charset="0"/>
-                <a:ea typeface="Aptos" pitchFamily="34" charset="-122"/>
-                <a:cs typeface="Aptos" pitchFamily="34" charset="-120"/>
-              </a:rPr>
-              <a:t>Play 3: Establish AI Governance - This lesson informs Play 3 by helping learners connect the lesson topic to.</a:t>
+                  <a:srgbClr val="003A63"/>
+                </a:solidFill>
+                <a:latin typeface="Aptos" pitchFamily="34" charset="0"/>
+                <a:ea typeface="Aptos" pitchFamily="34" charset="-122"/>
+                <a:cs typeface="Aptos" pitchFamily="34" charset="-120"/>
+              </a:rPr>
+              <a:t>• Play 3: Establish AI Governance - This lesson informs Play 3 by helping learners connect the.</a:t>
             </a:r>
             <a:endParaRPr lang="en-US" sz="1900" dirty="0"/>
           </a:p>
           <a:p>
+            <a:pPr indent="0" marL="0">
+              <a:buNone/>
+            </a:pPr>
             <a:r>
               <a:rPr lang="en-US" sz="1900" dirty="0">
                 <a:solidFill>
-                  <a:srgbClr val="17364A"/>
-                </a:solidFill>
-                <a:latin typeface="Aptos" pitchFamily="34" charset="0"/>
-                <a:ea typeface="Aptos" pitchFamily="34" charset="-122"/>
-                <a:cs typeface="Aptos" pitchFamily="34" charset="-120"/>
-              </a:rPr>
-              <a:t>Play 1: Vision &amp; Guardrails - This lesson informs Play 1 by helping learners connect the lesson topic to.</a:t>
+                  <a:srgbClr val="003A63"/>
+                </a:solidFill>
+                <a:latin typeface="Aptos" pitchFamily="34" charset="0"/>
+                <a:ea typeface="Aptos" pitchFamily="34" charset="-122"/>
+                <a:cs typeface="Aptos" pitchFamily="34" charset="-120"/>
+              </a:rPr>
+              <a:t>• Play 1: Vision &amp; Guardrails - This lesson informs Play 1 by helping learners connect the.</a:t>
             </a:r>
             <a:endParaRPr lang="en-US" sz="1900" dirty="0"/>
           </a:p>
           <a:p>
+            <a:pPr indent="0" marL="0">
+              <a:buNone/>
+            </a:pPr>
             <a:r>
               <a:rPr lang="en-US" sz="1900" dirty="0">
                 <a:solidFill>
-                  <a:srgbClr val="17364A"/>
-                </a:solidFill>
-                <a:latin typeface="Aptos" pitchFamily="34" charset="0"/>
-                <a:ea typeface="Aptos" pitchFamily="34" charset="-122"/>
-                <a:cs typeface="Aptos" pitchFamily="34" charset="-120"/>
-              </a:rPr>
-              <a:t>Play 2: Readiness Assessment - This lesson informs Play 2 by helping learners connect the lesson topic to.</a:t>
+                  <a:srgbClr val="003A63"/>
+                </a:solidFill>
+                <a:latin typeface="Aptos" pitchFamily="34" charset="0"/>
+                <a:ea typeface="Aptos" pitchFamily="34" charset="-122"/>
+                <a:cs typeface="Aptos" pitchFamily="34" charset="-120"/>
+              </a:rPr>
+              <a:t>• Play 2: Readiness Assessment - This lesson informs Play 2 by helping learners connect the.</a:t>
             </a:r>
             <a:endParaRPr lang="en-US" sz="1900" dirty="0"/>
           </a:p>
@@ -13707,17 +13919,17 @@
         </p:nvSpPr>
         <p:spPr>
           <a:xfrm>
-            <a:off x="8211312" y="1920240"/>
-            <a:ext cx="2734056" cy="1463040"/>
-          </a:xfrm>
-          <a:prstGeom prst="rect">
-            <a:avLst/>
-          </a:prstGeom>
-          <a:noFill/>
-          <a:ln/>
-        </p:spPr>
-        <p:txBody>
-          <a:bodyPr wrap="square" lIns="0" tIns="0" rIns="0" bIns="0" rtlCol="0" anchor="t">
+            <a:off x="8211312" y="1892808"/>
+            <a:ext cx="2734056" cy="1536192"/>
+          </a:xfrm>
+          <a:prstGeom prst="rect">
+            <a:avLst/>
+          </a:prstGeom>
+          <a:noFill/>
+          <a:ln/>
+        </p:spPr>
+        <p:txBody>
+          <a:bodyPr wrap="square" lIns="254" tIns="254" rIns="254" bIns="254" rtlCol="0" anchor="t">
             <a:normAutofit/>
           </a:bodyPr>
           <a:lstStyle/>
@@ -13726,7 +13938,7 @@
               <a:buNone/>
             </a:pPr>
             <a:r>
-              <a:rPr lang="en-US" sz="1550" dirty="0">
+              <a:rPr lang="en-US" sz="1320" dirty="0">
                 <a:solidFill>
                   <a:srgbClr val="17364A"/>
                 </a:solidFill>
@@ -13734,9 +13946,9 @@
                 <a:ea typeface="Aptos" pitchFamily="34" charset="-122"/>
                 <a:cs typeface="Aptos" pitchFamily="34" charset="-120"/>
               </a:rPr>
-              <a:t>Use the related plays to identify decisions, participants, timing, approvals, and documentation needed for responsible implementation.</a:t>
-            </a:r>
-            <a:endParaRPr lang="en-US" sz="1550" dirty="0"/>
+              <a:t>Use the related plays to identify decisions, participants, timing, approvals, and documentation needed for responsible.</a:t>
+            </a:r>
+            <a:endParaRPr lang="en-US" sz="1320" dirty="0"/>
           </a:p>
         </p:txBody>
       </p:sp>
@@ -13824,13 +14036,16 @@
           <a:ln/>
         </p:spPr>
         <p:txBody>
-          <a:bodyPr wrap="square" lIns="254" tIns="254" rIns="254" bIns="254" rtlCol="0" anchor="t">
+          <a:bodyPr wrap="square" lIns="508" tIns="508" rIns="508" bIns="508" rtlCol="0" anchor="t">
             <a:normAutofit/>
           </a:bodyPr>
           <a:lstStyle/>
           <a:p>
-            <a:r>
-              <a:rPr lang="en-US" sz="1380" dirty="0">
+            <a:pPr indent="0" marL="0">
+              <a:buNone/>
+            </a:pPr>
+            <a:r>
+              <a:rPr lang="en-US" sz="1220" dirty="0">
                 <a:solidFill>
                   <a:srgbClr val="17364A"/>
                 </a:solidFill>
@@ -13840,11 +14055,14 @@
               </a:rPr>
               <a:t>Locate the decision point in the playbook sequence.</a:t>
             </a:r>
-            <a:endParaRPr lang="en-US" sz="1380" dirty="0"/>
-          </a:p>
-          <a:p>
-            <a:r>
-              <a:rPr lang="en-US" sz="1380" dirty="0">
+            <a:endParaRPr lang="en-US" sz="1220" dirty="0"/>
+          </a:p>
+          <a:p>
+            <a:pPr indent="0" marL="0">
+              <a:buNone/>
+            </a:pPr>
+            <a:r>
+              <a:rPr lang="en-US" sz="1220" dirty="0">
                 <a:solidFill>
                   <a:srgbClr val="17364A"/>
                 </a:solidFill>
@@ -13854,11 +14072,14 @@
               </a:rPr>
               <a:t>Identify who should participate in the work.</a:t>
             </a:r>
-            <a:endParaRPr lang="en-US" sz="1380" dirty="0"/>
-          </a:p>
-          <a:p>
-            <a:r>
-              <a:rPr lang="en-US" sz="1380" dirty="0">
+            <a:endParaRPr lang="en-US" sz="1220" dirty="0"/>
+          </a:p>
+          <a:p>
+            <a:pPr indent="0" marL="0">
+              <a:buNone/>
+            </a:pPr>
+            <a:r>
+              <a:rPr lang="en-US" sz="1220" dirty="0">
                 <a:solidFill>
                   <a:srgbClr val="17364A"/>
                 </a:solidFill>
@@ -13868,7 +14089,7 @@
               </a:rPr>
               <a:t>Document the review, approval, or implementation step.</a:t>
             </a:r>
-            <a:endParaRPr lang="en-US" sz="1380" dirty="0"/>
+            <a:endParaRPr lang="en-US" sz="1220" dirty="0"/>
           </a:p>
         </p:txBody>
       </p:sp>
@@ -14169,63 +14390,75 @@
           <a:ln/>
         </p:spPr>
         <p:txBody>
-          <a:bodyPr wrap="square" lIns="635" tIns="635" rIns="635" bIns="635" rtlCol="0" anchor="t">
+          <a:bodyPr wrap="square" lIns="1016" tIns="1016" rIns="1016" bIns="1016" rtlCol="0" anchor="t">
             <a:normAutofit/>
           </a:bodyPr>
           <a:lstStyle/>
           <a:p>
+            <a:pPr indent="0" marL="0">
+              <a:buNone/>
+            </a:pPr>
             <a:r>
               <a:rPr lang="en-US" sz="1850" dirty="0">
                 <a:solidFill>
-                  <a:srgbClr val="17364A"/>
-                </a:solidFill>
-                <a:latin typeface="Aptos" pitchFamily="34" charset="0"/>
-                <a:ea typeface="Aptos" pitchFamily="34" charset="-122"/>
-                <a:cs typeface="Aptos" pitchFamily="34" charset="-120"/>
-              </a:rPr>
-              <a:t>Tool 4: AI Policy Landscape Scan (Worksheet) - Use AI Policy Landscape Scan to translate this lesson into a.</a:t>
+                  <a:srgbClr val="003A63"/>
+                </a:solidFill>
+                <a:latin typeface="Aptos" pitchFamily="34" charset="0"/>
+                <a:ea typeface="Aptos" pitchFamily="34" charset="-122"/>
+                <a:cs typeface="Aptos" pitchFamily="34" charset="-120"/>
+              </a:rPr>
+              <a:t>• Tool 4: AI Policy Landscape Scan (Worksheet) - Use AI Policy Landscape Scan to translate this.</a:t>
             </a:r>
             <a:endParaRPr lang="en-US" sz="1850" dirty="0"/>
           </a:p>
           <a:p>
+            <a:pPr indent="0" marL="0">
+              <a:buNone/>
+            </a:pPr>
             <a:r>
               <a:rPr lang="en-US" sz="1850" dirty="0">
                 <a:solidFill>
-                  <a:srgbClr val="17364A"/>
-                </a:solidFill>
-                <a:latin typeface="Aptos" pitchFamily="34" charset="0"/>
-                <a:ea typeface="Aptos" pitchFamily="34" charset="-122"/>
-                <a:cs typeface="Aptos" pitchFamily="34" charset="-120"/>
-              </a:rPr>
-              <a:t>Tool 5: AI Environmental and Resource Impact Review (Checklist) - Use AI Environmental and Resource Impact.</a:t>
+                  <a:srgbClr val="003A63"/>
+                </a:solidFill>
+                <a:latin typeface="Aptos" pitchFamily="34" charset="0"/>
+                <a:ea typeface="Aptos" pitchFamily="34" charset="-122"/>
+                <a:cs typeface="Aptos" pitchFamily="34" charset="-120"/>
+              </a:rPr>
+              <a:t>• Tool 5: AI Environmental and Resource Impact Review (Checklist) - Use AI Environmental and.</a:t>
             </a:r>
             <a:endParaRPr lang="en-US" sz="1850" dirty="0"/>
           </a:p>
           <a:p>
+            <a:pPr indent="0" marL="0">
+              <a:buNone/>
+            </a:pPr>
             <a:r>
               <a:rPr lang="en-US" sz="1850" dirty="0">
                 <a:solidFill>
-                  <a:srgbClr val="17364A"/>
-                </a:solidFill>
-                <a:latin typeface="Aptos" pitchFamily="34" charset="0"/>
-                <a:ea typeface="Aptos" pitchFamily="34" charset="-122"/>
-                <a:cs typeface="Aptos" pitchFamily="34" charset="-120"/>
-              </a:rPr>
-              <a:t>Tool 6: Human-Centered AI Decision Rule Checklist (Checklist) - Use this tool to complete or strengthen the.</a:t>
+                  <a:srgbClr val="003A63"/>
+                </a:solidFill>
+                <a:latin typeface="Aptos" pitchFamily="34" charset="0"/>
+                <a:ea typeface="Aptos" pitchFamily="34" charset="-122"/>
+                <a:cs typeface="Aptos" pitchFamily="34" charset="-120"/>
+              </a:rPr>
+              <a:t>• Tool 6: Human-Centered AI Decision Rule Checklist (Checklist) - Use this tool to complete or.</a:t>
             </a:r>
             <a:endParaRPr lang="en-US" sz="1850" dirty="0"/>
           </a:p>
           <a:p>
+            <a:pPr indent="0" marL="0">
+              <a:buNone/>
+            </a:pPr>
             <a:r>
               <a:rPr lang="en-US" sz="1850" dirty="0">
                 <a:solidFill>
-                  <a:srgbClr val="17364A"/>
-                </a:solidFill>
-                <a:latin typeface="Aptos" pitchFamily="34" charset="0"/>
-                <a:ea typeface="Aptos" pitchFamily="34" charset="-122"/>
-                <a:cs typeface="Aptos" pitchFamily="34" charset="-120"/>
-              </a:rPr>
-              <a:t>Tool 8: AI Project Charter (Planning) - Use AI Project Charter to translate this lesson into a documented.</a:t>
+                  <a:srgbClr val="003A63"/>
+                </a:solidFill>
+                <a:latin typeface="Aptos" pitchFamily="34" charset="0"/>
+                <a:ea typeface="Aptos" pitchFamily="34" charset="-122"/>
+                <a:cs typeface="Aptos" pitchFamily="34" charset="-120"/>
+              </a:rPr>
+              <a:t>• Tool 8: AI Project Charter (Planning) - Use AI Project Charter to translate this lesson into a.</a:t>
             </a:r>
             <a:endParaRPr lang="en-US" sz="1850" dirty="0"/>
           </a:p>
@@ -14305,17 +14538,17 @@
         </p:nvSpPr>
         <p:spPr>
           <a:xfrm>
-            <a:off x="8211312" y="1920240"/>
-            <a:ext cx="2734056" cy="1463040"/>
-          </a:xfrm>
-          <a:prstGeom prst="rect">
-            <a:avLst/>
-          </a:prstGeom>
-          <a:noFill/>
-          <a:ln/>
-        </p:spPr>
-        <p:txBody>
-          <a:bodyPr wrap="square" lIns="0" tIns="0" rIns="0" bIns="0" rtlCol="0" anchor="t">
+            <a:off x="8211312" y="1892808"/>
+            <a:ext cx="2734056" cy="1536192"/>
+          </a:xfrm>
+          <a:prstGeom prst="rect">
+            <a:avLst/>
+          </a:prstGeom>
+          <a:noFill/>
+          <a:ln/>
+        </p:spPr>
+        <p:txBody>
+          <a:bodyPr wrap="square" lIns="254" tIns="254" rIns="254" bIns="254" rtlCol="0" anchor="t">
             <a:normAutofit/>
           </a:bodyPr>
           <a:lstStyle/>
@@ -14324,7 +14557,7 @@
               <a:buNone/>
             </a:pPr>
             <a:r>
-              <a:rPr lang="en-US" sz="1550" dirty="0">
+              <a:rPr lang="en-US" sz="1320" dirty="0">
                 <a:solidFill>
                   <a:srgbClr val="17364A"/>
                 </a:solidFill>
@@ -14332,9 +14565,9 @@
                 <a:ea typeface="Aptos" pitchFamily="34" charset="-122"/>
                 <a:cs typeface="Aptos" pitchFamily="34" charset="-120"/>
               </a:rPr>
-              <a:t>Use linked tools when your department needs a structured worksheet, template, checklist, review process, or documentation artifact.</a:t>
-            </a:r>
-            <a:endParaRPr lang="en-US" sz="1550" dirty="0"/>
+              <a:t>Use linked tools when your department needs a structured worksheet, template, checklist, review process, or.</a:t>
+            </a:r>
+            <a:endParaRPr lang="en-US" sz="1320" dirty="0"/>
           </a:p>
         </p:txBody>
       </p:sp>
@@ -14422,13 +14655,16 @@
           <a:ln/>
         </p:spPr>
         <p:txBody>
-          <a:bodyPr wrap="square" lIns="254" tIns="254" rIns="254" bIns="254" rtlCol="0" anchor="t">
+          <a:bodyPr wrap="square" lIns="508" tIns="508" rIns="508" bIns="508" rtlCol="0" anchor="t">
             <a:normAutofit/>
           </a:bodyPr>
           <a:lstStyle/>
           <a:p>
-            <a:r>
-              <a:rPr lang="en-US" sz="1380" dirty="0">
+            <a:pPr indent="0" marL="0">
+              <a:buNone/>
+            </a:pPr>
+            <a:r>
+              <a:rPr lang="en-US" sz="1220" dirty="0">
                 <a:solidFill>
                   <a:srgbClr val="17364A"/>
                 </a:solidFill>
@@ -14438,11 +14674,14 @@
               </a:rPr>
               <a:t>Use a tool when no comparable local process exists.</a:t>
             </a:r>
-            <a:endParaRPr lang="en-US" sz="1380" dirty="0"/>
-          </a:p>
-          <a:p>
-            <a:r>
-              <a:rPr lang="en-US" sz="1380" dirty="0">
+            <a:endParaRPr lang="en-US" sz="1220" dirty="0"/>
+          </a:p>
+          <a:p>
+            <a:pPr indent="0" marL="0">
+              <a:buNone/>
+            </a:pPr>
+            <a:r>
+              <a:rPr lang="en-US" sz="1220" dirty="0">
                 <a:solidFill>
                   <a:srgbClr val="17364A"/>
                 </a:solidFill>
@@ -14450,13 +14689,16 @@
                 <a:ea typeface="Aptos" pitchFamily="34" charset="-122"/>
                 <a:cs typeface="Aptos" pitchFamily="34" charset="-120"/>
               </a:rPr>
-              <a:t>Adapt existing department templates when they already fit the purpose.</a:t>
-            </a:r>
-            <a:endParaRPr lang="en-US" sz="1380" dirty="0"/>
-          </a:p>
-          <a:p>
-            <a:r>
-              <a:rPr lang="en-US" sz="1380" dirty="0">
+              <a:t>Adapt existing department templates when they already fit the.</a:t>
+            </a:r>
+            <a:endParaRPr lang="en-US" sz="1220" dirty="0"/>
+          </a:p>
+          <a:p>
+            <a:pPr indent="0" marL="0">
+              <a:buNone/>
+            </a:pPr>
+            <a:r>
+              <a:rPr lang="en-US" sz="1220" dirty="0">
                 <a:solidFill>
                   <a:srgbClr val="17364A"/>
                 </a:solidFill>
@@ -14466,7 +14708,7 @@
               </a:rPr>
               <a:t>Save the completed artifact as evidence of the decision.</a:t>
             </a:r>
-            <a:endParaRPr lang="en-US" sz="1380" dirty="0"/>
+            <a:endParaRPr lang="en-US" sz="1220" dirty="0"/>
           </a:p>
         </p:txBody>
       </p:sp>
@@ -14767,49 +15009,58 @@
           <a:ln/>
         </p:spPr>
         <p:txBody>
-          <a:bodyPr wrap="square" lIns="635" tIns="635" rIns="635" bIns="635" rtlCol="0" anchor="t">
+          <a:bodyPr wrap="square" lIns="1016" tIns="1016" rIns="1016" bIns="1016" rtlCol="0" anchor="t">
             <a:normAutofit/>
           </a:bodyPr>
           <a:lstStyle/>
           <a:p>
+            <a:pPr indent="0" marL="0">
+              <a:buNone/>
+            </a:pPr>
             <a:r>
               <a:rPr lang="en-US" sz="2100" dirty="0">
                 <a:solidFill>
-                  <a:srgbClr val="17364A"/>
-                </a:solidFill>
-                <a:latin typeface="Aptos" pitchFamily="34" charset="0"/>
-                <a:ea typeface="Aptos" pitchFamily="34" charset="-122"/>
-                <a:cs typeface="Aptos" pitchFamily="34" charset="-120"/>
-              </a:rPr>
-              <a:t>Identify appropriate and inappropriate uses of AI in public health communications.</a:t>
+                  <a:srgbClr val="003A63"/>
+                </a:solidFill>
+                <a:latin typeface="Aptos" pitchFamily="34" charset="0"/>
+                <a:ea typeface="Aptos" pitchFamily="34" charset="-122"/>
+                <a:cs typeface="Aptos" pitchFamily="34" charset="-120"/>
+              </a:rPr>
+              <a:t>• Identify appropriate and inappropriate uses of AI in public health communications.</a:t>
             </a:r>
             <a:endParaRPr lang="en-US" sz="2100" dirty="0"/>
           </a:p>
           <a:p>
+            <a:pPr indent="0" marL="0">
+              <a:buNone/>
+            </a:pPr>
             <a:r>
               <a:rPr lang="en-US" sz="2100" dirty="0">
                 <a:solidFill>
-                  <a:srgbClr val="17364A"/>
-                </a:solidFill>
-                <a:latin typeface="Aptos" pitchFamily="34" charset="0"/>
-                <a:ea typeface="Aptos" pitchFamily="34" charset="-122"/>
-                <a:cs typeface="Aptos" pitchFamily="34" charset="-120"/>
-              </a:rPr>
-              <a:t>Apply source verification, plain language, accessibility, and equity review to AI-generated messages.</a:t>
+                  <a:srgbClr val="003A63"/>
+                </a:solidFill>
+                <a:latin typeface="Aptos" pitchFamily="34" charset="0"/>
+                <a:ea typeface="Aptos" pitchFamily="34" charset="-122"/>
+                <a:cs typeface="Aptos" pitchFamily="34" charset="-120"/>
+              </a:rPr>
+              <a:t>• Apply source verification, plain language, accessibility, and equity review to AI-generated.</a:t>
             </a:r>
             <a:endParaRPr lang="en-US" sz="2100" dirty="0"/>
           </a:p>
           <a:p>
+            <a:pPr indent="0" marL="0">
+              <a:buNone/>
+            </a:pPr>
             <a:r>
               <a:rPr lang="en-US" sz="2100" dirty="0">
                 <a:solidFill>
-                  <a:srgbClr val="17364A"/>
-                </a:solidFill>
-                <a:latin typeface="Aptos" pitchFamily="34" charset="0"/>
-                <a:ea typeface="Aptos" pitchFamily="34" charset="-122"/>
-                <a:cs typeface="Aptos" pitchFamily="34" charset="-120"/>
-              </a:rPr>
-              <a:t>Design a human review workflow for AI-assisted public-facing communications.</a:t>
+                  <a:srgbClr val="003A63"/>
+                </a:solidFill>
+                <a:latin typeface="Aptos" pitchFamily="34" charset="0"/>
+                <a:ea typeface="Aptos" pitchFamily="34" charset="-122"/>
+                <a:cs typeface="Aptos" pitchFamily="34" charset="-120"/>
+              </a:rPr>
+              <a:t>• Design a human review workflow for AI-assisted public-facing communications.</a:t>
             </a:r>
             <a:endParaRPr lang="en-US" sz="2100" dirty="0"/>
           </a:p>
@@ -14889,17 +15140,17 @@
         </p:nvSpPr>
         <p:spPr>
           <a:xfrm>
-            <a:off x="7799832" y="1828800"/>
-            <a:ext cx="3145536" cy="685800"/>
-          </a:xfrm>
-          <a:prstGeom prst="rect">
-            <a:avLst/>
-          </a:prstGeom>
-          <a:noFill/>
-          <a:ln/>
-        </p:spPr>
-        <p:txBody>
-          <a:bodyPr wrap="square" lIns="0" tIns="0" rIns="0" bIns="0" rtlCol="0" anchor="t">
+            <a:off x="7799832" y="1801368"/>
+            <a:ext cx="3145536" cy="758952"/>
+          </a:xfrm>
+          <a:prstGeom prst="rect">
+            <a:avLst/>
+          </a:prstGeom>
+          <a:noFill/>
+          <a:ln/>
+        </p:spPr>
+        <p:txBody>
+          <a:bodyPr wrap="square" lIns="254" tIns="254" rIns="254" bIns="254" rtlCol="0" anchor="t">
             <a:normAutofit/>
           </a:bodyPr>
           <a:lstStyle/>
@@ -14908,7 +15159,7 @@
               <a:buNone/>
             </a:pPr>
             <a:r>
-              <a:rPr lang="en-US" sz="1550" dirty="0">
+              <a:rPr lang="en-US" sz="1320" dirty="0">
                 <a:solidFill>
                   <a:srgbClr val="17364A"/>
                 </a:solidFill>
@@ -14918,7 +15169,7 @@
               </a:rPr>
               <a:t>Identify appropriate and inappropriate uses of AI in public health communications.</a:t>
             </a:r>
-            <a:endParaRPr lang="en-US" sz="1550" dirty="0"/>
+            <a:endParaRPr lang="en-US" sz="1320" dirty="0"/>
           </a:p>
         </p:txBody>
       </p:sp>
@@ -15006,13 +15257,16 @@
           <a:ln/>
         </p:spPr>
         <p:txBody>
-          <a:bodyPr wrap="square" lIns="254" tIns="254" rIns="254" bIns="254" rtlCol="0" anchor="t">
+          <a:bodyPr wrap="square" lIns="508" tIns="508" rIns="508" bIns="508" rtlCol="0" anchor="t">
             <a:normAutofit/>
           </a:bodyPr>
           <a:lstStyle/>
           <a:p>
-            <a:r>
-              <a:rPr lang="en-US" sz="1380" dirty="0">
+            <a:pPr indent="0" marL="0">
+              <a:buNone/>
+            </a:pPr>
+            <a:r>
+              <a:rPr lang="en-US" sz="1220" dirty="0">
                 <a:solidFill>
                   <a:srgbClr val="17364A"/>
                 </a:solidFill>
@@ -15020,13 +15274,16 @@
                 <a:ea typeface="Aptos" pitchFamily="34" charset="-122"/>
                 <a:cs typeface="Aptos" pitchFamily="34" charset="-120"/>
               </a:rPr>
-              <a:t>Recognize misinformation, overstatement, missing uncertainty, and stigmatizing language.</a:t>
-            </a:r>
-            <a:endParaRPr lang="en-US" sz="1380" dirty="0"/>
-          </a:p>
-          <a:p>
-            <a:r>
-              <a:rPr lang="en-US" sz="1380" dirty="0">
+              <a:t>Recognize misinformation, overstatement, missing uncertainty, and.</a:t>
+            </a:r>
+            <a:endParaRPr lang="en-US" sz="1220" dirty="0"/>
+          </a:p>
+          <a:p>
+            <a:pPr indent="0" marL="0">
+              <a:buNone/>
+            </a:pPr>
+            <a:r>
+              <a:rPr lang="en-US" sz="1220" dirty="0">
                 <a:solidFill>
                   <a:srgbClr val="17364A"/>
                 </a:solidFill>
@@ -15036,7 +15293,7 @@
               </a:rPr>
               <a:t>Produce an AI-assisted communications review checklist.</a:t>
             </a:r>
-            <a:endParaRPr lang="en-US" sz="1380" dirty="0"/>
+            <a:endParaRPr lang="en-US" sz="1220" dirty="0"/>
           </a:p>
         </p:txBody>
       </p:sp>
@@ -15114,17 +15371,17 @@
         </p:nvSpPr>
         <p:spPr>
           <a:xfrm>
-            <a:off x="7799832" y="5001768"/>
-            <a:ext cx="3145536" cy="502920"/>
-          </a:xfrm>
-          <a:prstGeom prst="rect">
-            <a:avLst/>
-          </a:prstGeom>
-          <a:noFill/>
-          <a:ln/>
-        </p:spPr>
-        <p:txBody>
-          <a:bodyPr wrap="square" lIns="0" tIns="0" rIns="0" bIns="0" rtlCol="0" anchor="t">
+            <a:off x="7799832" y="4974336"/>
+            <a:ext cx="3145536" cy="576072"/>
+          </a:xfrm>
+          <a:prstGeom prst="rect">
+            <a:avLst/>
+          </a:prstGeom>
+          <a:noFill/>
+          <a:ln/>
+        </p:spPr>
+        <p:txBody>
+          <a:bodyPr wrap="square" lIns="254" tIns="254" rIns="254" bIns="254" rtlCol="0" anchor="t">
             <a:normAutofit/>
           </a:bodyPr>
           <a:lstStyle/>
@@ -15133,7 +15390,7 @@
               <a:buNone/>
             </a:pPr>
             <a:r>
-              <a:rPr lang="en-US" sz="1550" dirty="0">
+              <a:rPr lang="en-US" sz="1320" dirty="0">
                 <a:solidFill>
                   <a:srgbClr val="17364A"/>
                 </a:solidFill>
@@ -15141,9 +15398,9 @@
                 <a:ea typeface="Aptos" pitchFamily="34" charset="-122"/>
                 <a:cs typeface="Aptos" pitchFamily="34" charset="-120"/>
               </a:rPr>
-              <a:t>Use the assignment to test whether you can explain the concept, apply it to a realistic public health situation, and identify what would need review before the work moves forward.</a:t>
-            </a:r>
-            <a:endParaRPr lang="en-US" sz="1550" dirty="0"/>
+              <a:t>Use the assignment to test whether you can explain the concept, apply it to a realistic public health situation, and.</a:t>
+            </a:r>
+            <a:endParaRPr lang="en-US" sz="1320" dirty="0"/>
           </a:p>
         </p:txBody>
       </p:sp>
@@ -15444,49 +15701,58 @@
           <a:ln/>
         </p:spPr>
         <p:txBody>
-          <a:bodyPr wrap="square" lIns="635" tIns="635" rIns="635" bIns="635" rtlCol="0" anchor="t">
+          <a:bodyPr wrap="square" lIns="1016" tIns="1016" rIns="1016" bIns="1016" rtlCol="0" anchor="t">
             <a:normAutofit/>
           </a:bodyPr>
           <a:lstStyle/>
           <a:p>
+            <a:pPr indent="0" marL="0">
+              <a:buNone/>
+            </a:pPr>
             <a:r>
               <a:rPr lang="en-US" sz="2100" dirty="0">
                 <a:solidFill>
-                  <a:srgbClr val="17364A"/>
-                </a:solidFill>
-                <a:latin typeface="Aptos" pitchFamily="34" charset="0"/>
-                <a:ea typeface="Aptos" pitchFamily="34" charset="-122"/>
-                <a:cs typeface="Aptos" pitchFamily="34" charset="-120"/>
-              </a:rPr>
-              <a:t>Generative AI can support public health communications by helping staff draft, revise, simplify,.</a:t>
+                  <a:srgbClr val="003A63"/>
+                </a:solidFill>
+                <a:latin typeface="Aptos" pitchFamily="34" charset="0"/>
+                <a:ea typeface="Aptos" pitchFamily="34" charset="-122"/>
+                <a:cs typeface="Aptos" pitchFamily="34" charset="-120"/>
+              </a:rPr>
+              <a:t>• Generative AI can support public health communications by helping staff draft, revise,.</a:t>
             </a:r>
             <a:endParaRPr lang="en-US" sz="2100" dirty="0"/>
           </a:p>
           <a:p>
+            <a:pPr indent="0" marL="0">
+              <a:buNone/>
+            </a:pPr>
             <a:r>
               <a:rPr lang="en-US" sz="2100" dirty="0">
                 <a:solidFill>
-                  <a:srgbClr val="17364A"/>
-                </a:solidFill>
-                <a:latin typeface="Aptos" pitchFamily="34" charset="0"/>
-                <a:ea typeface="Aptos" pitchFamily="34" charset="-122"/>
-                <a:cs typeface="Aptos" pitchFamily="34" charset="-120"/>
-              </a:rPr>
-              <a:t>However, public health communication carries high trust, equity, accessibility, and accuracy obligations.</a:t>
+                  <a:srgbClr val="003A63"/>
+                </a:solidFill>
+                <a:latin typeface="Aptos" pitchFamily="34" charset="0"/>
+                <a:ea typeface="Aptos" pitchFamily="34" charset="-122"/>
+                <a:cs typeface="Aptos" pitchFamily="34" charset="-120"/>
+              </a:rPr>
+              <a:t>• However, public health communication carries high trust, equity, accessibility, and accuracy.</a:t>
             </a:r>
             <a:endParaRPr lang="en-US" sz="2100" dirty="0"/>
           </a:p>
           <a:p>
+            <a:pPr indent="0" marL="0">
+              <a:buNone/>
+            </a:pPr>
             <a:r>
               <a:rPr lang="en-US" sz="2100" dirty="0">
                 <a:solidFill>
-                  <a:srgbClr val="17364A"/>
-                </a:solidFill>
-                <a:latin typeface="Aptos" pitchFamily="34" charset="0"/>
-                <a:ea typeface="Aptos" pitchFamily="34" charset="-122"/>
-                <a:cs typeface="Aptos" pitchFamily="34" charset="-120"/>
-              </a:rPr>
-              <a:t>AI-generated text can sound clear and authoritative while misstating evidence, omitting uncertainty,.</a:t>
+                  <a:srgbClr val="003A63"/>
+                </a:solidFill>
+                <a:latin typeface="Aptos" pitchFamily="34" charset="0"/>
+                <a:ea typeface="Aptos" pitchFamily="34" charset="-122"/>
+                <a:cs typeface="Aptos" pitchFamily="34" charset="-120"/>
+              </a:rPr>
+              <a:t>• AI-generated text can sound clear and authoritative while misstating evidence, omitting.</a:t>
             </a:r>
             <a:endParaRPr lang="en-US" sz="2100" dirty="0"/>
           </a:p>
@@ -15566,17 +15832,17 @@
         </p:nvSpPr>
         <p:spPr>
           <a:xfrm>
-            <a:off x="7799832" y="1828800"/>
-            <a:ext cx="3145536" cy="685800"/>
-          </a:xfrm>
-          <a:prstGeom prst="rect">
-            <a:avLst/>
-          </a:prstGeom>
-          <a:noFill/>
-          <a:ln/>
-        </p:spPr>
-        <p:txBody>
-          <a:bodyPr wrap="square" lIns="0" tIns="0" rIns="0" bIns="0" rtlCol="0" anchor="t">
+            <a:off x="7799832" y="1801368"/>
+            <a:ext cx="3145536" cy="758952"/>
+          </a:xfrm>
+          <a:prstGeom prst="rect">
+            <a:avLst/>
+          </a:prstGeom>
+          <a:noFill/>
+          <a:ln/>
+        </p:spPr>
+        <p:txBody>
+          <a:bodyPr wrap="square" lIns="254" tIns="254" rIns="254" bIns="254" rtlCol="0" anchor="t">
             <a:normAutofit/>
           </a:bodyPr>
           <a:lstStyle/>
@@ -15585,7 +15851,7 @@
               <a:buNone/>
             </a:pPr>
             <a:r>
-              <a:rPr lang="en-US" sz="1550" dirty="0">
+              <a:rPr lang="en-US" sz="1320" dirty="0">
                 <a:solidFill>
                   <a:srgbClr val="17364A"/>
                 </a:solidFill>
@@ -15595,7 +15861,7 @@
               </a:rPr>
               <a:t>Generative AI can support public health communications by helping staff draft, revise, simplify,.</a:t>
             </a:r>
-            <a:endParaRPr lang="en-US" sz="1550" dirty="0"/>
+            <a:endParaRPr lang="en-US" sz="1320" dirty="0"/>
           </a:p>
         </p:txBody>
       </p:sp>
@@ -15683,13 +15949,16 @@
           <a:ln/>
         </p:spPr>
         <p:txBody>
-          <a:bodyPr wrap="square" lIns="254" tIns="254" rIns="254" bIns="254" rtlCol="0" anchor="t">
+          <a:bodyPr wrap="square" lIns="508" tIns="508" rIns="508" bIns="508" rtlCol="0" anchor="t">
             <a:normAutofit/>
           </a:bodyPr>
           <a:lstStyle/>
           <a:p>
-            <a:r>
-              <a:rPr lang="en-US" sz="1380" dirty="0">
+            <a:pPr indent="0" marL="0">
+              <a:buNone/>
+            </a:pPr>
+            <a:r>
+              <a:rPr lang="en-US" sz="1220" dirty="0">
                 <a:solidFill>
                   <a:srgbClr val="17364A"/>
                 </a:solidFill>
@@ -15697,13 +15966,16 @@
                 <a:ea typeface="Aptos" pitchFamily="34" charset="-122"/>
                 <a:cs typeface="Aptos" pitchFamily="34" charset="-120"/>
               </a:rPr>
-              <a:t>Generative AI can support public health communications by helping staff draft, revise,.</a:t>
-            </a:r>
-            <a:endParaRPr lang="en-US" sz="1380" dirty="0"/>
-          </a:p>
-          <a:p>
-            <a:r>
-              <a:rPr lang="en-US" sz="1380" dirty="0">
+              <a:t>Generative AI can support public health communications by helping.</a:t>
+            </a:r>
+            <a:endParaRPr lang="en-US" sz="1220" dirty="0"/>
+          </a:p>
+          <a:p>
+            <a:pPr indent="0" marL="0">
+              <a:buNone/>
+            </a:pPr>
+            <a:r>
+              <a:rPr lang="en-US" sz="1220" dirty="0">
                 <a:solidFill>
                   <a:srgbClr val="17364A"/>
                 </a:solidFill>
@@ -15711,13 +15983,16 @@
                 <a:ea typeface="Aptos" pitchFamily="34" charset="-122"/>
                 <a:cs typeface="Aptos" pitchFamily="34" charset="-120"/>
               </a:rPr>
-              <a:t>AI-generated text can sound clear and authoritative while misstating evidence, omitting.</a:t>
-            </a:r>
-            <a:endParaRPr lang="en-US" sz="1380" dirty="0"/>
-          </a:p>
-          <a:p>
-            <a:r>
-              <a:rPr lang="en-US" sz="1380" dirty="0">
+              <a:t>AI-generated text can sound clear and authoritative while.</a:t>
+            </a:r>
+            <a:endParaRPr lang="en-US" sz="1220" dirty="0"/>
+          </a:p>
+          <a:p>
+            <a:pPr indent="0" marL="0">
+              <a:buNone/>
+            </a:pPr>
+            <a:r>
+              <a:rPr lang="en-US" sz="1220" dirty="0">
                 <a:solidFill>
                   <a:srgbClr val="17364A"/>
                 </a:solidFill>
@@ -15725,9 +16000,9 @@
                 <a:ea typeface="Aptos" pitchFamily="34" charset="-122"/>
                 <a:cs typeface="Aptos" pitchFamily="34" charset="-120"/>
               </a:rPr>
-              <a:t>This module teaches communications staff and program partners how to use AI as a drafting.</a:t>
-            </a:r>
-            <a:endParaRPr lang="en-US" sz="1380" dirty="0"/>
+              <a:t>This module teaches communications staff and program partners how.</a:t>
+            </a:r>
+            <a:endParaRPr lang="en-US" sz="1220" dirty="0"/>
           </a:p>
         </p:txBody>
       </p:sp>
@@ -15805,17 +16080,17 @@
         </p:nvSpPr>
         <p:spPr>
           <a:xfrm>
-            <a:off x="7799832" y="5001768"/>
-            <a:ext cx="3145536" cy="502920"/>
-          </a:xfrm>
-          <a:prstGeom prst="rect">
-            <a:avLst/>
-          </a:prstGeom>
-          <a:noFill/>
-          <a:ln/>
-        </p:spPr>
-        <p:txBody>
-          <a:bodyPr wrap="square" lIns="0" tIns="0" rIns="0" bIns="0" rtlCol="0" anchor="t">
+            <a:off x="7799832" y="4974336"/>
+            <a:ext cx="3145536" cy="576072"/>
+          </a:xfrm>
+          <a:prstGeom prst="rect">
+            <a:avLst/>
+          </a:prstGeom>
+          <a:noFill/>
+          <a:ln/>
+        </p:spPr>
+        <p:txBody>
+          <a:bodyPr wrap="square" lIns="254" tIns="254" rIns="254" bIns="254" rtlCol="0" anchor="t">
             <a:normAutofit/>
           </a:bodyPr>
           <a:lstStyle/>
@@ -15824,7 +16099,7 @@
               <a:buNone/>
             </a:pPr>
             <a:r>
-              <a:rPr lang="en-US" sz="1550" dirty="0">
+              <a:rPr lang="en-US" sz="1320" dirty="0">
                 <a:solidFill>
                   <a:srgbClr val="17364A"/>
                 </a:solidFill>
@@ -15832,9 +16107,9 @@
                 <a:ea typeface="Aptos" pitchFamily="34" charset="-122"/>
                 <a:cs typeface="Aptos" pitchFamily="34" charset="-120"/>
               </a:rPr>
-              <a:t>Use the concept to plan transparent communication, gather stakeholder input, protect trust, and make sure affected communities are considered early.</a:t>
-            </a:r>
-            <a:endParaRPr lang="en-US" sz="1550" dirty="0"/>
+              <a:t>Use the concept to plan transparent communication, gather stakeholder input, protect trust, and make sure affected.</a:t>
+            </a:r>
+            <a:endParaRPr lang="en-US" sz="1320" dirty="0"/>
           </a:p>
         </p:txBody>
       </p:sp>
@@ -16135,49 +16410,58 @@
           <a:ln/>
         </p:spPr>
         <p:txBody>
-          <a:bodyPr wrap="square" lIns="635" tIns="635" rIns="635" bIns="635" rtlCol="0" anchor="t">
+          <a:bodyPr wrap="square" lIns="1016" tIns="1016" rIns="1016" bIns="1016" rtlCol="0" anchor="t">
             <a:normAutofit/>
           </a:bodyPr>
           <a:lstStyle/>
           <a:p>
+            <a:pPr indent="0" marL="0">
+              <a:buNone/>
+            </a:pPr>
             <a:r>
               <a:rPr lang="en-US" sz="2100" dirty="0">
                 <a:solidFill>
-                  <a:srgbClr val="17364A"/>
-                </a:solidFill>
-                <a:latin typeface="Aptos" pitchFamily="34" charset="0"/>
-                <a:ea typeface="Aptos" pitchFamily="34" charset="-122"/>
-                <a:cs typeface="Aptos" pitchFamily="34" charset="-120"/>
-              </a:rPr>
-              <a:t>This national-level module is intended for training and planning purposes.</a:t>
+                  <a:srgbClr val="003A63"/>
+                </a:solidFill>
+                <a:latin typeface="Aptos" pitchFamily="34" charset="0"/>
+                <a:ea typeface="Aptos" pitchFamily="34" charset="-122"/>
+                <a:cs typeface="Aptos" pitchFamily="34" charset="-120"/>
+              </a:rPr>
+              <a:t>• This national-level module is intended for training and planning purposes.</a:t>
             </a:r>
             <a:endParaRPr lang="en-US" sz="2100" dirty="0"/>
           </a:p>
           <a:p>
+            <a:pPr indent="0" marL="0">
+              <a:buNone/>
+            </a:pPr>
             <a:r>
               <a:rPr lang="en-US" sz="2100" dirty="0">
                 <a:solidFill>
-                  <a:srgbClr val="17364A"/>
-                </a:solidFill>
-                <a:latin typeface="Aptos" pitchFamily="34" charset="0"/>
-                <a:ea typeface="Aptos" pitchFamily="34" charset="-122"/>
-                <a:cs typeface="Aptos" pitchFamily="34" charset="-120"/>
-              </a:rPr>
-              <a:t>It does not replace legal, privacy, procurement, civil rights, records, or agency policy review.</a:t>
+                  <a:srgbClr val="003A63"/>
+                </a:solidFill>
+                <a:latin typeface="Aptos" pitchFamily="34" charset="0"/>
+                <a:ea typeface="Aptos" pitchFamily="34" charset="-122"/>
+                <a:cs typeface="Aptos" pitchFamily="34" charset="-120"/>
+              </a:rPr>
+              <a:t>• It does not replace legal, privacy, procurement, civil rights, records, or agency policy review.</a:t>
             </a:r>
             <a:endParaRPr lang="en-US" sz="2100" dirty="0"/>
           </a:p>
           <a:p>
+            <a:pPr indent="0" marL="0">
+              <a:buNone/>
+            </a:pPr>
             <a:r>
               <a:rPr lang="en-US" sz="2100" dirty="0">
                 <a:solidFill>
-                  <a:srgbClr val="17364A"/>
-                </a:solidFill>
-                <a:latin typeface="Aptos" pitchFamily="34" charset="0"/>
-                <a:ea typeface="Aptos" pitchFamily="34" charset="-122"/>
-                <a:cs typeface="Aptos" pitchFamily="34" charset="-120"/>
-              </a:rPr>
-              <a:t>Learners should confirm applicable requirements in their own jurisdiction and organization before.</a:t>
+                  <a:srgbClr val="003A63"/>
+                </a:solidFill>
+                <a:latin typeface="Aptos" pitchFamily="34" charset="0"/>
+                <a:ea typeface="Aptos" pitchFamily="34" charset="-122"/>
+                <a:cs typeface="Aptos" pitchFamily="34" charset="-120"/>
+              </a:rPr>
+              <a:t>• Learners should confirm applicable requirements in their own jurisdiction and organization.</a:t>
             </a:r>
             <a:endParaRPr lang="en-US" sz="2100" dirty="0"/>
           </a:p>
@@ -16257,17 +16541,17 @@
         </p:nvSpPr>
         <p:spPr>
           <a:xfrm>
-            <a:off x="7799832" y="1828800"/>
-            <a:ext cx="3145536" cy="685800"/>
-          </a:xfrm>
-          <a:prstGeom prst="rect">
-            <a:avLst/>
-          </a:prstGeom>
-          <a:noFill/>
-          <a:ln/>
-        </p:spPr>
-        <p:txBody>
-          <a:bodyPr wrap="square" lIns="0" tIns="0" rIns="0" bIns="0" rtlCol="0" anchor="t">
+            <a:off x="7799832" y="1801368"/>
+            <a:ext cx="3145536" cy="758952"/>
+          </a:xfrm>
+          <a:prstGeom prst="rect">
+            <a:avLst/>
+          </a:prstGeom>
+          <a:noFill/>
+          <a:ln/>
+        </p:spPr>
+        <p:txBody>
+          <a:bodyPr wrap="square" lIns="254" tIns="254" rIns="254" bIns="254" rtlCol="0" anchor="t">
             <a:normAutofit/>
           </a:bodyPr>
           <a:lstStyle/>
@@ -16276,7 +16560,7 @@
               <a:buNone/>
             </a:pPr>
             <a:r>
-              <a:rPr lang="en-US" sz="1550" dirty="0">
+              <a:rPr lang="en-US" sz="1320" dirty="0">
                 <a:solidFill>
                   <a:srgbClr val="17364A"/>
                 </a:solidFill>
@@ -16286,7 +16570,7 @@
               </a:rPr>
               <a:t>This national-level module is intended for training and planning purposes.</a:t>
             </a:r>
-            <a:endParaRPr lang="en-US" sz="1550" dirty="0"/>
+            <a:endParaRPr lang="en-US" sz="1320" dirty="0"/>
           </a:p>
         </p:txBody>
       </p:sp>
@@ -16374,13 +16658,16 @@
           <a:ln/>
         </p:spPr>
         <p:txBody>
-          <a:bodyPr wrap="square" lIns="254" tIns="254" rIns="254" bIns="254" rtlCol="0" anchor="t">
+          <a:bodyPr wrap="square" lIns="508" tIns="508" rIns="508" bIns="508" rtlCol="0" anchor="t">
             <a:normAutofit/>
           </a:bodyPr>
           <a:lstStyle/>
           <a:p>
-            <a:r>
-              <a:rPr lang="en-US" sz="1380" dirty="0">
+            <a:pPr indent="0" marL="0">
+              <a:buNone/>
+            </a:pPr>
+            <a:r>
+              <a:rPr lang="en-US" sz="1220" dirty="0">
                 <a:solidFill>
                   <a:srgbClr val="17364A"/>
                 </a:solidFill>
@@ -16388,13 +16675,16 @@
                 <a:ea typeface="Aptos" pitchFamily="34" charset="-122"/>
                 <a:cs typeface="Aptos" pitchFamily="34" charset="-120"/>
               </a:rPr>
-              <a:t>This national-level module is intended for training and planning purposes.</a:t>
-            </a:r>
-            <a:endParaRPr lang="en-US" sz="1380" dirty="0"/>
-          </a:p>
-          <a:p>
-            <a:r>
-              <a:rPr lang="en-US" sz="1380" dirty="0">
+              <a:t>This national-level module is intended for training and planning.</a:t>
+            </a:r>
+            <a:endParaRPr lang="en-US" sz="1220" dirty="0"/>
+          </a:p>
+          <a:p>
+            <a:pPr indent="0" marL="0">
+              <a:buNone/>
+            </a:pPr>
+            <a:r>
+              <a:rPr lang="en-US" sz="1220" dirty="0">
                 <a:solidFill>
                   <a:srgbClr val="17364A"/>
                 </a:solidFill>
@@ -16402,13 +16692,16 @@
                 <a:ea typeface="Aptos" pitchFamily="34" charset="-122"/>
                 <a:cs typeface="Aptos" pitchFamily="34" charset="-120"/>
               </a:rPr>
-              <a:t>It does not replace legal, privacy, procurement, civil rights, records, or agency policy.</a:t>
-            </a:r>
-            <a:endParaRPr lang="en-US" sz="1380" dirty="0"/>
-          </a:p>
-          <a:p>
-            <a:r>
-              <a:rPr lang="en-US" sz="1380" dirty="0">
+              <a:t>It does not replace legal, privacy, procurement, civil rights,.</a:t>
+            </a:r>
+            <a:endParaRPr lang="en-US" sz="1220" dirty="0"/>
+          </a:p>
+          <a:p>
+            <a:pPr indent="0" marL="0">
+              <a:buNone/>
+            </a:pPr>
+            <a:r>
+              <a:rPr lang="en-US" sz="1220" dirty="0">
                 <a:solidFill>
                   <a:srgbClr val="17364A"/>
                 </a:solidFill>
@@ -16416,9 +16709,9 @@
                 <a:ea typeface="Aptos" pitchFamily="34" charset="-122"/>
                 <a:cs typeface="Aptos" pitchFamily="34" charset="-120"/>
               </a:rPr>
-              <a:t>Learners should confirm applicable requirements in their own jurisdiction and organization.</a:t>
-            </a:r>
-            <a:endParaRPr lang="en-US" sz="1380" dirty="0"/>
+              <a:t>Learners should confirm applicable requirements in their own.</a:t>
+            </a:r>
+            <a:endParaRPr lang="en-US" sz="1220" dirty="0"/>
           </a:p>
         </p:txBody>
       </p:sp>
@@ -16496,17 +16789,17 @@
         </p:nvSpPr>
         <p:spPr>
           <a:xfrm>
-            <a:off x="7799832" y="5001768"/>
-            <a:ext cx="3145536" cy="502920"/>
-          </a:xfrm>
-          <a:prstGeom prst="rect">
-            <a:avLst/>
-          </a:prstGeom>
-          <a:noFill/>
-          <a:ln/>
-        </p:spPr>
-        <p:txBody>
-          <a:bodyPr wrap="square" lIns="0" tIns="0" rIns="0" bIns="0" rtlCol="0" anchor="t">
+            <a:off x="7799832" y="4974336"/>
+            <a:ext cx="3145536" cy="576072"/>
+          </a:xfrm>
+          <a:prstGeom prst="rect">
+            <a:avLst/>
+          </a:prstGeom>
+          <a:noFill/>
+          <a:ln/>
+        </p:spPr>
+        <p:txBody>
+          <a:bodyPr wrap="square" lIns="254" tIns="254" rIns="254" bIns="254" rtlCol="0" anchor="t">
             <a:normAutofit/>
           </a:bodyPr>
           <a:lstStyle/>
@@ -16515,7 +16808,7 @@
               <a:buNone/>
             </a:pPr>
             <a:r>
-              <a:rPr lang="en-US" sz="1550" dirty="0">
+              <a:rPr lang="en-US" sz="1320" dirty="0">
                 <a:solidFill>
                   <a:srgbClr val="17364A"/>
                 </a:solidFill>
@@ -16523,9 +16816,9 @@
                 <a:ea typeface="Aptos" pitchFamily="34" charset="-122"/>
                 <a:cs typeface="Aptos" pitchFamily="34" charset="-120"/>
               </a:rPr>
-              <a:t>Translate this concept into clear decision rights, review steps, documentation expectations, and escalation paths before an AI-supported workflow is approved.</a:t>
-            </a:r>
-            <a:endParaRPr lang="en-US" sz="1550" dirty="0"/>
+              <a:t>Translate this concept into clear decision rights, review steps, documentation expectations, and escalation paths before.</a:t>
+            </a:r>
+            <a:endParaRPr lang="en-US" sz="1320" dirty="0"/>
           </a:p>
         </p:txBody>
       </p:sp>
@@ -16826,35 +17119,41 @@
           <a:ln/>
         </p:spPr>
         <p:txBody>
-          <a:bodyPr wrap="square" lIns="635" tIns="635" rIns="635" bIns="635" rtlCol="0" anchor="t">
+          <a:bodyPr wrap="square" lIns="1016" tIns="1016" rIns="1016" bIns="1016" rtlCol="0" anchor="t">
             <a:normAutofit/>
           </a:bodyPr>
           <a:lstStyle/>
           <a:p>
+            <a:pPr indent="0" marL="0">
+              <a:buNone/>
+            </a:pPr>
             <a:r>
               <a:rPr lang="en-US" sz="2100" dirty="0">
                 <a:solidFill>
-                  <a:srgbClr val="17364A"/>
-                </a:solidFill>
-                <a:latin typeface="Aptos" pitchFamily="34" charset="0"/>
-                <a:ea typeface="Aptos" pitchFamily="34" charset="-122"/>
-                <a:cs typeface="Aptos" pitchFamily="34" charset="-120"/>
-              </a:rPr>
-              <a:t>A health department uses AI to draft a heat safety message for older adults, outdoor workers, and.</a:t>
+                  <a:srgbClr val="003A63"/>
+                </a:solidFill>
+                <a:latin typeface="Aptos" pitchFamily="34" charset="0"/>
+                <a:ea typeface="Aptos" pitchFamily="34" charset="-122"/>
+                <a:cs typeface="Aptos" pitchFamily="34" charset="-120"/>
+              </a:rPr>
+              <a:t>• A health department uses AI to draft a heat safety message for older adults, outdoor workers,.</a:t>
             </a:r>
             <a:endParaRPr lang="en-US" sz="2100" dirty="0"/>
           </a:p>
           <a:p>
+            <a:pPr indent="0" marL="0">
+              <a:buNone/>
+            </a:pPr>
             <a:r>
               <a:rPr lang="en-US" sz="2100" dirty="0">
                 <a:solidFill>
-                  <a:srgbClr val="17364A"/>
-                </a:solidFill>
-                <a:latin typeface="Aptos" pitchFamily="34" charset="0"/>
-                <a:ea typeface="Aptos" pitchFamily="34" charset="-122"/>
-                <a:cs typeface="Aptos" pitchFamily="34" charset="-120"/>
-              </a:rPr>
-              <a:t>Communications staff verify the recommendations against official guidance, rewrite the message in plain.</a:t>
+                  <a:srgbClr val="003A63"/>
+                </a:solidFill>
+                <a:latin typeface="Aptos" pitchFamily="34" charset="0"/>
+                <a:ea typeface="Aptos" pitchFamily="34" charset="-122"/>
+                <a:cs typeface="Aptos" pitchFamily="34" charset="-120"/>
+              </a:rPr>
+              <a:t>• Communications staff verify the recommendations against official guidance, rewrite the message.</a:t>
             </a:r>
             <a:endParaRPr lang="en-US" sz="2100" dirty="0"/>
           </a:p>
@@ -16934,17 +17233,17 @@
         </p:nvSpPr>
         <p:spPr>
           <a:xfrm>
-            <a:off x="7799832" y="1828800"/>
-            <a:ext cx="3145536" cy="685800"/>
-          </a:xfrm>
-          <a:prstGeom prst="rect">
-            <a:avLst/>
-          </a:prstGeom>
-          <a:noFill/>
-          <a:ln/>
-        </p:spPr>
-        <p:txBody>
-          <a:bodyPr wrap="square" lIns="0" tIns="0" rIns="0" bIns="0" rtlCol="0" anchor="t">
+            <a:off x="7799832" y="1801368"/>
+            <a:ext cx="3145536" cy="758952"/>
+          </a:xfrm>
+          <a:prstGeom prst="rect">
+            <a:avLst/>
+          </a:prstGeom>
+          <a:noFill/>
+          <a:ln/>
+        </p:spPr>
+        <p:txBody>
+          <a:bodyPr wrap="square" lIns="254" tIns="254" rIns="254" bIns="254" rtlCol="0" anchor="t">
             <a:normAutofit/>
           </a:bodyPr>
           <a:lstStyle/>
@@ -16953,7 +17252,7 @@
               <a:buNone/>
             </a:pPr>
             <a:r>
-              <a:rPr lang="en-US" sz="1550" dirty="0">
+              <a:rPr lang="en-US" sz="1320" dirty="0">
                 <a:solidFill>
                   <a:srgbClr val="17364A"/>
                 </a:solidFill>
@@ -16963,7 +17262,7 @@
               </a:rPr>
               <a:t>A health department uses AI to draft a heat safety message for older adults, outdoor workers, and.</a:t>
             </a:r>
-            <a:endParaRPr lang="en-US" sz="1550" dirty="0"/>
+            <a:endParaRPr lang="en-US" sz="1320" dirty="0"/>
           </a:p>
         </p:txBody>
       </p:sp>
@@ -17051,13 +17350,16 @@
           <a:ln/>
         </p:spPr>
         <p:txBody>
-          <a:bodyPr wrap="square" lIns="254" tIns="254" rIns="254" bIns="254" rtlCol="0" anchor="t">
+          <a:bodyPr wrap="square" lIns="508" tIns="508" rIns="508" bIns="508" rtlCol="0" anchor="t">
             <a:normAutofit/>
           </a:bodyPr>
           <a:lstStyle/>
           <a:p>
-            <a:r>
-              <a:rPr lang="en-US" sz="1380" dirty="0">
+            <a:pPr indent="0" marL="0">
+              <a:buNone/>
+            </a:pPr>
+            <a:r>
+              <a:rPr lang="en-US" sz="1220" dirty="0">
                 <a:solidFill>
                   <a:srgbClr val="17364A"/>
                 </a:solidFill>
@@ -17065,13 +17367,16 @@
                 <a:ea typeface="Aptos" pitchFamily="34" charset="-122"/>
                 <a:cs typeface="Aptos" pitchFamily="34" charset="-120"/>
               </a:rPr>
-              <a:t>A health department uses AI to draft a heat safety message for older adults, outdoor.</a:t>
-            </a:r>
-            <a:endParaRPr lang="en-US" sz="1380" dirty="0"/>
-          </a:p>
-          <a:p>
-            <a:r>
-              <a:rPr lang="en-US" sz="1380" dirty="0">
+              <a:t>A health department uses AI to draft a heat safety message for.</a:t>
+            </a:r>
+            <a:endParaRPr lang="en-US" sz="1220" dirty="0"/>
+          </a:p>
+          <a:p>
+            <a:pPr indent="0" marL="0">
+              <a:buNone/>
+            </a:pPr>
+            <a:r>
+              <a:rPr lang="en-US" sz="1220" dirty="0">
                 <a:solidFill>
                   <a:srgbClr val="17364A"/>
                 </a:solidFill>
@@ -17079,9 +17384,9 @@
                 <a:ea typeface="Aptos" pitchFamily="34" charset="-122"/>
                 <a:cs typeface="Aptos" pitchFamily="34" charset="-120"/>
               </a:rPr>
-              <a:t>Communications staff verify the recommendations against official guidance, rewrite the.</a:t>
-            </a:r>
-            <a:endParaRPr lang="en-US" sz="1380" dirty="0"/>
+              <a:t>Communications staff verify the recommendations against official.</a:t>
+            </a:r>
+            <a:endParaRPr lang="en-US" sz="1220" dirty="0"/>
           </a:p>
         </p:txBody>
       </p:sp>
@@ -17159,17 +17464,17 @@
         </p:nvSpPr>
         <p:spPr>
           <a:xfrm>
-            <a:off x="7799832" y="5001768"/>
-            <a:ext cx="3145536" cy="502920"/>
-          </a:xfrm>
-          <a:prstGeom prst="rect">
-            <a:avLst/>
-          </a:prstGeom>
-          <a:noFill/>
-          <a:ln/>
-        </p:spPr>
-        <p:txBody>
-          <a:bodyPr wrap="square" lIns="0" tIns="0" rIns="0" bIns="0" rtlCol="0" anchor="t">
+            <a:off x="7799832" y="4974336"/>
+            <a:ext cx="3145536" cy="576072"/>
+          </a:xfrm>
+          <a:prstGeom prst="rect">
+            <a:avLst/>
+          </a:prstGeom>
+          <a:noFill/>
+          <a:ln/>
+        </p:spPr>
+        <p:txBody>
+          <a:bodyPr wrap="square" lIns="254" tIns="254" rIns="254" bIns="254" rtlCol="0" anchor="t">
             <a:normAutofit/>
           </a:bodyPr>
           <a:lstStyle/>
@@ -17178,7 +17483,7 @@
               <a:buNone/>
             </a:pPr>
             <a:r>
-              <a:rPr lang="en-US" sz="1550" dirty="0">
+              <a:rPr lang="en-US" sz="1320" dirty="0">
                 <a:solidFill>
                   <a:srgbClr val="17364A"/>
                 </a:solidFill>
@@ -17186,9 +17491,9 @@
                 <a:ea typeface="Aptos" pitchFamily="34" charset="-122"/>
                 <a:cs typeface="Aptos" pitchFamily="34" charset="-120"/>
               </a:rPr>
-              <a:t>Use the concept to plan transparent communication, gather stakeholder input, protect trust, and make sure affected communities are considered early.</a:t>
-            </a:r>
-            <a:endParaRPr lang="en-US" sz="1550" dirty="0"/>
+              <a:t>Use the concept to plan transparent communication, gather stakeholder input, protect trust, and make sure affected.</a:t>
+            </a:r>
+            <a:endParaRPr lang="en-US" sz="1320" dirty="0"/>
           </a:p>
         </p:txBody>
       </p:sp>
@@ -17489,49 +17794,58 @@
           <a:ln/>
         </p:spPr>
         <p:txBody>
-          <a:bodyPr wrap="square" lIns="635" tIns="635" rIns="635" bIns="635" rtlCol="0" anchor="t">
+          <a:bodyPr wrap="square" lIns="1016" tIns="1016" rIns="1016" bIns="1016" rtlCol="0" anchor="t">
             <a:normAutofit/>
           </a:bodyPr>
           <a:lstStyle/>
           <a:p>
+            <a:pPr indent="0" marL="0">
+              <a:buNone/>
+            </a:pPr>
             <a:r>
               <a:rPr lang="en-US" sz="2100" dirty="0">
                 <a:solidFill>
-                  <a:srgbClr val="17364A"/>
-                </a:solidFill>
-                <a:latin typeface="Aptos" pitchFamily="34" charset="0"/>
-                <a:ea typeface="Aptos" pitchFamily="34" charset="-122"/>
-                <a:cs typeface="Aptos" pitchFamily="34" charset="-120"/>
-              </a:rPr>
-              <a:t>AI can be useful early in the message development process.</a:t>
+                  <a:srgbClr val="003A63"/>
+                </a:solidFill>
+                <a:latin typeface="Aptos" pitchFamily="34" charset="0"/>
+                <a:ea typeface="Aptos" pitchFamily="34" charset="-122"/>
+                <a:cs typeface="Aptos" pitchFamily="34" charset="-120"/>
+              </a:rPr>
+              <a:t>• AI can be useful early in the message development process.</a:t>
             </a:r>
             <a:endParaRPr lang="en-US" sz="2100" dirty="0"/>
           </a:p>
           <a:p>
+            <a:pPr indent="0" marL="0">
+              <a:buNone/>
+            </a:pPr>
             <a:r>
               <a:rPr lang="en-US" sz="2100" dirty="0">
                 <a:solidFill>
-                  <a:srgbClr val="17364A"/>
-                </a:solidFill>
-                <a:latin typeface="Aptos" pitchFamily="34" charset="0"/>
-                <a:ea typeface="Aptos" pitchFamily="34" charset="-122"/>
-                <a:cs typeface="Aptos" pitchFamily="34" charset="-120"/>
-              </a:rPr>
-              <a:t>It can generate first drafts, propose alternative tones, simplify technical language, identify jargon,.</a:t>
+                  <a:srgbClr val="003A63"/>
+                </a:solidFill>
+                <a:latin typeface="Aptos" pitchFamily="34" charset="0"/>
+                <a:ea typeface="Aptos" pitchFamily="34" charset="-122"/>
+                <a:cs typeface="Aptos" pitchFamily="34" charset="-120"/>
+              </a:rPr>
+              <a:t>• It can generate first drafts, propose alternative tones, simplify technical language, identify.</a:t>
             </a:r>
             <a:endParaRPr lang="en-US" sz="2100" dirty="0"/>
           </a:p>
           <a:p>
+            <a:pPr indent="0" marL="0">
+              <a:buNone/>
+            </a:pPr>
             <a:r>
               <a:rPr lang="en-US" sz="2100" dirty="0">
                 <a:solidFill>
-                  <a:srgbClr val="17364A"/>
-                </a:solidFill>
-                <a:latin typeface="Aptos" pitchFamily="34" charset="0"/>
-                <a:ea typeface="Aptos" pitchFamily="34" charset="-122"/>
-                <a:cs typeface="Aptos" pitchFamily="34" charset="-120"/>
-              </a:rPr>
-              <a:t>These uses can save time, especially when communications staff support multiple programs.</a:t>
+                  <a:srgbClr val="003A63"/>
+                </a:solidFill>
+                <a:latin typeface="Aptos" pitchFamily="34" charset="0"/>
+                <a:ea typeface="Aptos" pitchFamily="34" charset="-122"/>
+                <a:cs typeface="Aptos" pitchFamily="34" charset="-120"/>
+              </a:rPr>
+              <a:t>• These uses can save time, especially when communications staff support multiple programs.</a:t>
             </a:r>
             <a:endParaRPr lang="en-US" sz="2100" dirty="0"/>
           </a:p>
@@ -17611,17 +17925,17 @@
         </p:nvSpPr>
         <p:spPr>
           <a:xfrm>
-            <a:off x="7799832" y="1828800"/>
-            <a:ext cx="3145536" cy="685800"/>
-          </a:xfrm>
-          <a:prstGeom prst="rect">
-            <a:avLst/>
-          </a:prstGeom>
-          <a:noFill/>
-          <a:ln/>
-        </p:spPr>
-        <p:txBody>
-          <a:bodyPr wrap="square" lIns="0" tIns="0" rIns="0" bIns="0" rtlCol="0" anchor="t">
+            <a:off x="7799832" y="1801368"/>
+            <a:ext cx="3145536" cy="758952"/>
+          </a:xfrm>
+          <a:prstGeom prst="rect">
+            <a:avLst/>
+          </a:prstGeom>
+          <a:noFill/>
+          <a:ln/>
+        </p:spPr>
+        <p:txBody>
+          <a:bodyPr wrap="square" lIns="254" tIns="254" rIns="254" bIns="254" rtlCol="0" anchor="t">
             <a:normAutofit/>
           </a:bodyPr>
           <a:lstStyle/>
@@ -17630,7 +17944,7 @@
               <a:buNone/>
             </a:pPr>
             <a:r>
-              <a:rPr lang="en-US" sz="1550" dirty="0">
+              <a:rPr lang="en-US" sz="1320" dirty="0">
                 <a:solidFill>
                   <a:srgbClr val="17364A"/>
                 </a:solidFill>
@@ -17640,7 +17954,7 @@
               </a:rPr>
               <a:t>AI can be useful early in the message development process.</a:t>
             </a:r>
-            <a:endParaRPr lang="en-US" sz="1550" dirty="0"/>
+            <a:endParaRPr lang="en-US" sz="1320" dirty="0"/>
           </a:p>
         </p:txBody>
       </p:sp>
@@ -17728,13 +18042,16 @@
           <a:ln/>
         </p:spPr>
         <p:txBody>
-          <a:bodyPr wrap="square" lIns="254" tIns="254" rIns="254" bIns="254" rtlCol="0" anchor="t">
+          <a:bodyPr wrap="square" lIns="508" tIns="508" rIns="508" bIns="508" rtlCol="0" anchor="t">
             <a:normAutofit/>
           </a:bodyPr>
           <a:lstStyle/>
           <a:p>
-            <a:r>
-              <a:rPr lang="en-US" sz="1380" dirty="0">
+            <a:pPr indent="0" marL="0">
+              <a:buNone/>
+            </a:pPr>
+            <a:r>
+              <a:rPr lang="en-US" sz="1220" dirty="0">
                 <a:solidFill>
                   <a:srgbClr val="17364A"/>
                 </a:solidFill>
@@ -17742,13 +18059,16 @@
                 <a:ea typeface="Aptos" pitchFamily="34" charset="-122"/>
                 <a:cs typeface="Aptos" pitchFamily="34" charset="-120"/>
               </a:rPr>
-              <a:t>It can generate first drafts, propose alternative tones, simplify technical language,.</a:t>
-            </a:r>
-            <a:endParaRPr lang="en-US" sz="1380" dirty="0"/>
-          </a:p>
-          <a:p>
-            <a:r>
-              <a:rPr lang="en-US" sz="1380" dirty="0">
+              <a:t>It can generate first drafts, propose alternative tones, simplify.</a:t>
+            </a:r>
+            <a:endParaRPr lang="en-US" sz="1220" dirty="0"/>
+          </a:p>
+          <a:p>
+            <a:pPr indent="0" marL="0">
+              <a:buNone/>
+            </a:pPr>
+            <a:r>
+              <a:rPr lang="en-US" sz="1220" dirty="0">
                 <a:solidFill>
                   <a:srgbClr val="17364A"/>
                 </a:solidFill>
@@ -17756,13 +18076,16 @@
                 <a:ea typeface="Aptos" pitchFamily="34" charset="-122"/>
                 <a:cs typeface="Aptos" pitchFamily="34" charset="-120"/>
               </a:rPr>
-              <a:t>However, AI should not be treated as the authority on public health content.</a:t>
-            </a:r>
-            <a:endParaRPr lang="en-US" sz="1380" dirty="0"/>
-          </a:p>
-          <a:p>
-            <a:r>
-              <a:rPr lang="en-US" sz="1380" dirty="0">
+              <a:t>However, AI should not be treated as the authority on public.</a:t>
+            </a:r>
+            <a:endParaRPr lang="en-US" sz="1220" dirty="0"/>
+          </a:p>
+          <a:p>
+            <a:pPr indent="0" marL="0">
+              <a:buNone/>
+            </a:pPr>
+            <a:r>
+              <a:rPr lang="en-US" sz="1220" dirty="0">
                 <a:solidFill>
                   <a:srgbClr val="17364A"/>
                 </a:solidFill>
@@ -17770,9 +18093,9 @@
                 <a:ea typeface="Aptos" pitchFamily="34" charset="-122"/>
                 <a:cs typeface="Aptos" pitchFamily="34" charset="-120"/>
               </a:rPr>
-              <a:t>The approved evidence base should come from agency guidance, subject matter experts,.</a:t>
-            </a:r>
-            <a:endParaRPr lang="en-US" sz="1380" dirty="0"/>
+              <a:t>The approved evidence base should come from agency guidance,.</a:t>
+            </a:r>
+            <a:endParaRPr lang="en-US" sz="1220" dirty="0"/>
           </a:p>
         </p:txBody>
       </p:sp>
@@ -17850,17 +18173,17 @@
         </p:nvSpPr>
         <p:spPr>
           <a:xfrm>
-            <a:off x="7799832" y="5001768"/>
-            <a:ext cx="3145536" cy="502920"/>
-          </a:xfrm>
-          <a:prstGeom prst="rect">
-            <a:avLst/>
-          </a:prstGeom>
-          <a:noFill/>
-          <a:ln/>
-        </p:spPr>
-        <p:txBody>
-          <a:bodyPr wrap="square" lIns="0" tIns="0" rIns="0" bIns="0" rtlCol="0" anchor="t">
+            <a:off x="7799832" y="4974336"/>
+            <a:ext cx="3145536" cy="576072"/>
+          </a:xfrm>
+          <a:prstGeom prst="rect">
+            <a:avLst/>
+          </a:prstGeom>
+          <a:noFill/>
+          <a:ln/>
+        </p:spPr>
+        <p:txBody>
+          <a:bodyPr wrap="square" lIns="254" tIns="254" rIns="254" bIns="254" rtlCol="0" anchor="t">
             <a:normAutofit/>
           </a:bodyPr>
           <a:lstStyle/>
@@ -17869,7 +18192,7 @@
               <a:buNone/>
             </a:pPr>
             <a:r>
-              <a:rPr lang="en-US" sz="1550" dirty="0">
+              <a:rPr lang="en-US" sz="1320" dirty="0">
                 <a:solidFill>
                   <a:srgbClr val="17364A"/>
                 </a:solidFill>
@@ -17877,9 +18200,9 @@
                 <a:ea typeface="Aptos" pitchFamily="34" charset="-122"/>
                 <a:cs typeface="Aptos" pitchFamily="34" charset="-120"/>
               </a:rPr>
-              <a:t>Use the concept to plan transparent communication, gather stakeholder input, protect trust, and make sure affected communities are considered early.</a:t>
-            </a:r>
-            <a:endParaRPr lang="en-US" sz="1550" dirty="0"/>
+              <a:t>Use the concept to plan transparent communication, gather stakeholder input, protect trust, and make sure affected.</a:t>
+            </a:r>
+            <a:endParaRPr lang="en-US" sz="1320" dirty="0"/>
           </a:p>
         </p:txBody>
       </p:sp>

--- a/downloads/presentations/modules/com-200.pptx
+++ b/downloads/presentations/modules/com-200.pptx
@@ -3513,11 +3513,11 @@
         <p:spPr>
           <a:xfrm>
             <a:off x="7635240" y="1325880"/>
-            <a:ext cx="3474720" cy="1325880"/>
+            <a:ext cx="3474720" cy="1207008"/>
           </a:xfrm>
           <a:prstGeom prst="roundRect">
             <a:avLst>
-              <a:gd name="adj" fmla="val 8276"/>
+              <a:gd name="adj" fmla="val 9091"/>
             </a:avLst>
           </a:prstGeom>
           <a:solidFill>
@@ -3579,7 +3579,7 @@
         <p:spPr>
           <a:xfrm>
             <a:off x="7799832" y="1801368"/>
-            <a:ext cx="3145536" cy="758952"/>
+            <a:ext cx="3145536" cy="640080"/>
           </a:xfrm>
           <a:prstGeom prst="rect">
             <a:avLst/>
@@ -3619,12 +3619,12 @@
         </p:nvSpPr>
         <p:spPr>
           <a:xfrm>
-            <a:off x="7635240" y="2788920"/>
-            <a:ext cx="3474720" cy="1536192"/>
+            <a:off x="7635240" y="2670048"/>
+            <a:ext cx="3474720" cy="1377086"/>
           </a:xfrm>
           <a:prstGeom prst="roundRect">
             <a:avLst>
-              <a:gd name="adj" fmla="val 7143"/>
+              <a:gd name="adj" fmla="val 7968"/>
             </a:avLst>
           </a:prstGeom>
           <a:solidFill>
@@ -3646,7 +3646,7 @@
         </p:nvSpPr>
         <p:spPr>
           <a:xfrm>
-            <a:off x="7799832" y="2935224"/>
+            <a:off x="7799832" y="2816352"/>
             <a:ext cx="3145536" cy="256032"/>
           </a:xfrm>
           <a:prstGeom prst="rect">
@@ -3685,8 +3685,8 @@
         </p:nvSpPr>
         <p:spPr>
           <a:xfrm>
-            <a:off x="7818120" y="3300984"/>
-            <a:ext cx="3090672" cy="877824"/>
+            <a:off x="7818120" y="3182112"/>
+            <a:ext cx="3090672" cy="718718"/>
           </a:xfrm>
           <a:prstGeom prst="rect">
             <a:avLst/>
@@ -3743,12 +3743,12 @@
         </p:nvSpPr>
         <p:spPr>
           <a:xfrm>
-            <a:off x="7635240" y="4498848"/>
-            <a:ext cx="3474720" cy="1143000"/>
+            <a:off x="7635240" y="4184294"/>
+            <a:ext cx="3474720" cy="1466698"/>
           </a:xfrm>
           <a:prstGeom prst="roundRect">
             <a:avLst>
-              <a:gd name="adj" fmla="val 9600"/>
+              <a:gd name="adj" fmla="val 7481"/>
             </a:avLst>
           </a:prstGeom>
           <a:solidFill>
@@ -3770,7 +3770,7 @@
         </p:nvSpPr>
         <p:spPr>
           <a:xfrm>
-            <a:off x="7799832" y="4645152"/>
+            <a:off x="7799832" y="4330598"/>
             <a:ext cx="3145536" cy="256032"/>
           </a:xfrm>
           <a:prstGeom prst="rect">
@@ -3809,8 +3809,8 @@
         </p:nvSpPr>
         <p:spPr>
           <a:xfrm>
-            <a:off x="7799832" y="4974336"/>
-            <a:ext cx="3145536" cy="576072"/>
+            <a:off x="7799832" y="4659782"/>
+            <a:ext cx="3145536" cy="899770"/>
           </a:xfrm>
           <a:prstGeom prst="rect">
             <a:avLst/>
@@ -3836,7 +3836,7 @@
                 <a:ea typeface="Aptos" pitchFamily="34" charset="-122"/>
                 <a:cs typeface="Aptos" pitchFamily="34" charset="-120"/>
               </a:rPr>
-              <a:t>Use the concept to plan transparent communication, gather stakeholder input, protect trust, and make sure affected.</a:t>
+              <a:t>Use the concept to plan transparent communication, gather stakeholder input, protect trust, and make sure affected communities are considered early.</a:t>
             </a:r>
             <a:endParaRPr lang="en-US" sz="1320" dirty="0"/>
           </a:p>
@@ -4205,11 +4205,11 @@
         <p:spPr>
           <a:xfrm>
             <a:off x="7635240" y="1325880"/>
-            <a:ext cx="3474720" cy="1325880"/>
+            <a:ext cx="3474720" cy="1207008"/>
           </a:xfrm>
           <a:prstGeom prst="roundRect">
             <a:avLst>
-              <a:gd name="adj" fmla="val 8276"/>
+              <a:gd name="adj" fmla="val 9091"/>
             </a:avLst>
           </a:prstGeom>
           <a:solidFill>
@@ -4271,7 +4271,7 @@
         <p:spPr>
           <a:xfrm>
             <a:off x="7799832" y="1801368"/>
-            <a:ext cx="3145536" cy="758952"/>
+            <a:ext cx="3145536" cy="640080"/>
           </a:xfrm>
           <a:prstGeom prst="rect">
             <a:avLst/>
@@ -4311,7 +4311,7 @@
         </p:nvSpPr>
         <p:spPr>
           <a:xfrm>
-            <a:off x="7635240" y="2788920"/>
+            <a:off x="7635240" y="2670048"/>
             <a:ext cx="3474720" cy="1536192"/>
           </a:xfrm>
           <a:prstGeom prst="roundRect">
@@ -4338,7 +4338,7 @@
         </p:nvSpPr>
         <p:spPr>
           <a:xfrm>
-            <a:off x="7799832" y="2935224"/>
+            <a:off x="7799832" y="2816352"/>
             <a:ext cx="3145536" cy="256032"/>
           </a:xfrm>
           <a:prstGeom prst="rect">
@@ -4377,7 +4377,7 @@
         </p:nvSpPr>
         <p:spPr>
           <a:xfrm>
-            <a:off x="7818120" y="3300984"/>
+            <a:off x="7818120" y="3182112"/>
             <a:ext cx="3090672" cy="877824"/>
           </a:xfrm>
           <a:prstGeom prst="rect">
@@ -4452,12 +4452,12 @@
         </p:nvSpPr>
         <p:spPr>
           <a:xfrm>
-            <a:off x="7635240" y="4498848"/>
-            <a:ext cx="3474720" cy="1143000"/>
+            <a:off x="7635240" y="4343400"/>
+            <a:ext cx="3474720" cy="1255471"/>
           </a:xfrm>
           <a:prstGeom prst="roundRect">
             <a:avLst>
-              <a:gd name="adj" fmla="val 9600"/>
+              <a:gd name="adj" fmla="val 8740"/>
             </a:avLst>
           </a:prstGeom>
           <a:solidFill>
@@ -4479,7 +4479,7 @@
         </p:nvSpPr>
         <p:spPr>
           <a:xfrm>
-            <a:off x="7799832" y="4645152"/>
+            <a:off x="7799832" y="4489704"/>
             <a:ext cx="3145536" cy="256032"/>
           </a:xfrm>
           <a:prstGeom prst="rect">
@@ -4518,8 +4518,8 @@
         </p:nvSpPr>
         <p:spPr>
           <a:xfrm>
-            <a:off x="7799832" y="4974336"/>
-            <a:ext cx="3145536" cy="576072"/>
+            <a:off x="7799832" y="4818888"/>
+            <a:ext cx="3145536" cy="688543"/>
           </a:xfrm>
           <a:prstGeom prst="rect">
             <a:avLst/>
@@ -4545,7 +4545,7 @@
                 <a:ea typeface="Aptos" pitchFamily="34" charset="-122"/>
                 <a:cs typeface="Aptos" pitchFamily="34" charset="-120"/>
               </a:rPr>
-              <a:t>Identify what could go wrong, who could be affected, what safeguards are needed, and what evidence should be reviewed.</a:t>
+              <a:t>Identify what could go wrong, who could be affected, what safeguards are needed, and what evidence should be reviewed before use.</a:t>
             </a:r>
             <a:endParaRPr lang="en-US" sz="1320" dirty="0"/>
           </a:p>
@@ -4914,11 +4914,11 @@
         <p:spPr>
           <a:xfrm>
             <a:off x="7635240" y="1325880"/>
-            <a:ext cx="3474720" cy="1325880"/>
+            <a:ext cx="3474720" cy="1207008"/>
           </a:xfrm>
           <a:prstGeom prst="roundRect">
             <a:avLst>
-              <a:gd name="adj" fmla="val 8276"/>
+              <a:gd name="adj" fmla="val 9091"/>
             </a:avLst>
           </a:prstGeom>
           <a:solidFill>
@@ -4980,7 +4980,7 @@
         <p:spPr>
           <a:xfrm>
             <a:off x="7799832" y="1801368"/>
-            <a:ext cx="3145536" cy="758952"/>
+            <a:ext cx="3145536" cy="640080"/>
           </a:xfrm>
           <a:prstGeom prst="rect">
             <a:avLst/>
@@ -5020,7 +5020,7 @@
         </p:nvSpPr>
         <p:spPr>
           <a:xfrm>
-            <a:off x="7635240" y="2788920"/>
+            <a:off x="7635240" y="2670048"/>
             <a:ext cx="3474720" cy="1536192"/>
           </a:xfrm>
           <a:prstGeom prst="roundRect">
@@ -5047,7 +5047,7 @@
         </p:nvSpPr>
         <p:spPr>
           <a:xfrm>
-            <a:off x="7799832" y="2935224"/>
+            <a:off x="7799832" y="2816352"/>
             <a:ext cx="3145536" cy="256032"/>
           </a:xfrm>
           <a:prstGeom prst="rect">
@@ -5086,7 +5086,7 @@
         </p:nvSpPr>
         <p:spPr>
           <a:xfrm>
-            <a:off x="7818120" y="3300984"/>
+            <a:off x="7818120" y="3182112"/>
             <a:ext cx="3090672" cy="877824"/>
           </a:xfrm>
           <a:prstGeom prst="rect">
@@ -5161,12 +5161,12 @@
         </p:nvSpPr>
         <p:spPr>
           <a:xfrm>
-            <a:off x="7635240" y="4498848"/>
-            <a:ext cx="3474720" cy="1143000"/>
+            <a:off x="7635240" y="4343400"/>
+            <a:ext cx="3474720" cy="1255471"/>
           </a:xfrm>
           <a:prstGeom prst="roundRect">
             <a:avLst>
-              <a:gd name="adj" fmla="val 9600"/>
+              <a:gd name="adj" fmla="val 8740"/>
             </a:avLst>
           </a:prstGeom>
           <a:solidFill>
@@ -5188,7 +5188,7 @@
         </p:nvSpPr>
         <p:spPr>
           <a:xfrm>
-            <a:off x="7799832" y="4645152"/>
+            <a:off x="7799832" y="4489704"/>
             <a:ext cx="3145536" cy="256032"/>
           </a:xfrm>
           <a:prstGeom prst="rect">
@@ -5227,8 +5227,8 @@
         </p:nvSpPr>
         <p:spPr>
           <a:xfrm>
-            <a:off x="7799832" y="4974336"/>
-            <a:ext cx="3145536" cy="576072"/>
+            <a:off x="7799832" y="4818888"/>
+            <a:ext cx="3145536" cy="688543"/>
           </a:xfrm>
           <a:prstGeom prst="rect">
             <a:avLst/>
@@ -5254,7 +5254,7 @@
                 <a:ea typeface="Aptos" pitchFamily="34" charset="-122"/>
                 <a:cs typeface="Aptos" pitchFamily="34" charset="-120"/>
               </a:rPr>
-              <a:t>Identify what could go wrong, who could be affected, what safeguards are needed, and what evidence should be reviewed.</a:t>
+              <a:t>Identify what could go wrong, who could be affected, what safeguards are needed, and what evidence should be reviewed before use.</a:t>
             </a:r>
             <a:endParaRPr lang="en-US" sz="1320" dirty="0"/>
           </a:p>
@@ -5623,11 +5623,11 @@
         <p:spPr>
           <a:xfrm>
             <a:off x="7635240" y="1325880"/>
-            <a:ext cx="3474720" cy="1325880"/>
+            <a:ext cx="3474720" cy="1207008"/>
           </a:xfrm>
           <a:prstGeom prst="roundRect">
             <a:avLst>
-              <a:gd name="adj" fmla="val 8276"/>
+              <a:gd name="adj" fmla="val 9091"/>
             </a:avLst>
           </a:prstGeom>
           <a:solidFill>
@@ -5689,7 +5689,7 @@
         <p:spPr>
           <a:xfrm>
             <a:off x="7799832" y="1801368"/>
-            <a:ext cx="3145536" cy="758952"/>
+            <a:ext cx="3145536" cy="640080"/>
           </a:xfrm>
           <a:prstGeom prst="rect">
             <a:avLst/>
@@ -5729,7 +5729,7 @@
         </p:nvSpPr>
         <p:spPr>
           <a:xfrm>
-            <a:off x="7635240" y="2788920"/>
+            <a:off x="7635240" y="2670048"/>
             <a:ext cx="3474720" cy="1536192"/>
           </a:xfrm>
           <a:prstGeom prst="roundRect">
@@ -5756,7 +5756,7 @@
         </p:nvSpPr>
         <p:spPr>
           <a:xfrm>
-            <a:off x="7799832" y="2935224"/>
+            <a:off x="7799832" y="2816352"/>
             <a:ext cx="3145536" cy="256032"/>
           </a:xfrm>
           <a:prstGeom prst="rect">
@@ -5795,7 +5795,7 @@
         </p:nvSpPr>
         <p:spPr>
           <a:xfrm>
-            <a:off x="7818120" y="3300984"/>
+            <a:off x="7818120" y="3182112"/>
             <a:ext cx="3090672" cy="877824"/>
           </a:xfrm>
           <a:prstGeom prst="rect">
@@ -5870,12 +5870,12 @@
         </p:nvSpPr>
         <p:spPr>
           <a:xfrm>
-            <a:off x="7635240" y="4498848"/>
-            <a:ext cx="3474720" cy="1143000"/>
+            <a:off x="7635240" y="4343400"/>
+            <a:ext cx="3474720" cy="1255471"/>
           </a:xfrm>
           <a:prstGeom prst="roundRect">
             <a:avLst>
-              <a:gd name="adj" fmla="val 9600"/>
+              <a:gd name="adj" fmla="val 8740"/>
             </a:avLst>
           </a:prstGeom>
           <a:solidFill>
@@ -5897,7 +5897,7 @@
         </p:nvSpPr>
         <p:spPr>
           <a:xfrm>
-            <a:off x="7799832" y="4645152"/>
+            <a:off x="7799832" y="4489704"/>
             <a:ext cx="3145536" cy="256032"/>
           </a:xfrm>
           <a:prstGeom prst="rect">
@@ -5936,8 +5936,8 @@
         </p:nvSpPr>
         <p:spPr>
           <a:xfrm>
-            <a:off x="7799832" y="4974336"/>
-            <a:ext cx="3145536" cy="576072"/>
+            <a:off x="7799832" y="4818888"/>
+            <a:ext cx="3145536" cy="688543"/>
           </a:xfrm>
           <a:prstGeom prst="rect">
             <a:avLst/>
@@ -5963,7 +5963,7 @@
                 <a:ea typeface="Aptos" pitchFamily="34" charset="-122"/>
                 <a:cs typeface="Aptos" pitchFamily="34" charset="-120"/>
               </a:rPr>
-              <a:t>Identify what could go wrong, who could be affected, what safeguards are needed, and what evidence should be reviewed.</a:t>
+              <a:t>Identify what could go wrong, who could be affected, what safeguards are needed, and what evidence should be reviewed before use.</a:t>
             </a:r>
             <a:endParaRPr lang="en-US" sz="1320" dirty="0"/>
           </a:p>
@@ -6332,11 +6332,11 @@
         <p:spPr>
           <a:xfrm>
             <a:off x="7635240" y="1325880"/>
-            <a:ext cx="3474720" cy="1325880"/>
+            <a:ext cx="3474720" cy="1207008"/>
           </a:xfrm>
           <a:prstGeom prst="roundRect">
             <a:avLst>
-              <a:gd name="adj" fmla="val 8276"/>
+              <a:gd name="adj" fmla="val 9091"/>
             </a:avLst>
           </a:prstGeom>
           <a:solidFill>
@@ -6398,7 +6398,7 @@
         <p:spPr>
           <a:xfrm>
             <a:off x="7799832" y="1801368"/>
-            <a:ext cx="3145536" cy="758952"/>
+            <a:ext cx="3145536" cy="640080"/>
           </a:xfrm>
           <a:prstGeom prst="rect">
             <a:avLst/>
@@ -6438,7 +6438,7 @@
         </p:nvSpPr>
         <p:spPr>
           <a:xfrm>
-            <a:off x="7635240" y="2788920"/>
+            <a:off x="7635240" y="2670048"/>
             <a:ext cx="3474720" cy="1536192"/>
           </a:xfrm>
           <a:prstGeom prst="roundRect">
@@ -6465,7 +6465,7 @@
         </p:nvSpPr>
         <p:spPr>
           <a:xfrm>
-            <a:off x="7799832" y="2935224"/>
+            <a:off x="7799832" y="2816352"/>
             <a:ext cx="3145536" cy="256032"/>
           </a:xfrm>
           <a:prstGeom prst="rect">
@@ -6504,7 +6504,7 @@
         </p:nvSpPr>
         <p:spPr>
           <a:xfrm>
-            <a:off x="7818120" y="3300984"/>
+            <a:off x="7818120" y="3182112"/>
             <a:ext cx="3090672" cy="877824"/>
           </a:xfrm>
           <a:prstGeom prst="rect">
@@ -6579,12 +6579,12 @@
         </p:nvSpPr>
         <p:spPr>
           <a:xfrm>
-            <a:off x="7635240" y="4498848"/>
-            <a:ext cx="3474720" cy="1143000"/>
+            <a:off x="7635240" y="4343400"/>
+            <a:ext cx="3474720" cy="1255471"/>
           </a:xfrm>
           <a:prstGeom prst="roundRect">
             <a:avLst>
-              <a:gd name="adj" fmla="val 9600"/>
+              <a:gd name="adj" fmla="val 8740"/>
             </a:avLst>
           </a:prstGeom>
           <a:solidFill>
@@ -6606,7 +6606,7 @@
         </p:nvSpPr>
         <p:spPr>
           <a:xfrm>
-            <a:off x="7799832" y="4645152"/>
+            <a:off x="7799832" y="4489704"/>
             <a:ext cx="3145536" cy="256032"/>
           </a:xfrm>
           <a:prstGeom prst="rect">
@@ -6645,8 +6645,8 @@
         </p:nvSpPr>
         <p:spPr>
           <a:xfrm>
-            <a:off x="7799832" y="4974336"/>
-            <a:ext cx="3145536" cy="576072"/>
+            <a:off x="7799832" y="4818888"/>
+            <a:ext cx="3145536" cy="688543"/>
           </a:xfrm>
           <a:prstGeom prst="rect">
             <a:avLst/>
@@ -6672,7 +6672,7 @@
                 <a:ea typeface="Aptos" pitchFamily="34" charset="-122"/>
                 <a:cs typeface="Aptos" pitchFamily="34" charset="-120"/>
               </a:rPr>
-              <a:t>Identify what could go wrong, who could be affected, what safeguards are needed, and what evidence should be reviewed.</a:t>
+              <a:t>Identify what could go wrong, who could be affected, what safeguards are needed, and what evidence should be reviewed before use.</a:t>
             </a:r>
             <a:endParaRPr lang="en-US" sz="1320" dirty="0"/>
           </a:p>
@@ -7041,11 +7041,11 @@
         <p:spPr>
           <a:xfrm>
             <a:off x="7635240" y="1325880"/>
-            <a:ext cx="3474720" cy="1325880"/>
+            <a:ext cx="3474720" cy="1207008"/>
           </a:xfrm>
           <a:prstGeom prst="roundRect">
             <a:avLst>
-              <a:gd name="adj" fmla="val 8276"/>
+              <a:gd name="adj" fmla="val 9091"/>
             </a:avLst>
           </a:prstGeom>
           <a:solidFill>
@@ -7107,7 +7107,7 @@
         <p:spPr>
           <a:xfrm>
             <a:off x="7799832" y="1801368"/>
-            <a:ext cx="3145536" cy="758952"/>
+            <a:ext cx="3145536" cy="640080"/>
           </a:xfrm>
           <a:prstGeom prst="rect">
             <a:avLst/>
@@ -7147,12 +7147,12 @@
         </p:nvSpPr>
         <p:spPr>
           <a:xfrm>
-            <a:off x="7635240" y="2788920"/>
-            <a:ext cx="3474720" cy="1536192"/>
+            <a:off x="7635240" y="2670048"/>
+            <a:ext cx="3474720" cy="1377086"/>
           </a:xfrm>
           <a:prstGeom prst="roundRect">
             <a:avLst>
-              <a:gd name="adj" fmla="val 7143"/>
+              <a:gd name="adj" fmla="val 7968"/>
             </a:avLst>
           </a:prstGeom>
           <a:solidFill>
@@ -7174,7 +7174,7 @@
         </p:nvSpPr>
         <p:spPr>
           <a:xfrm>
-            <a:off x="7799832" y="2935224"/>
+            <a:off x="7799832" y="2816352"/>
             <a:ext cx="3145536" cy="256032"/>
           </a:xfrm>
           <a:prstGeom prst="rect">
@@ -7213,8 +7213,8 @@
         </p:nvSpPr>
         <p:spPr>
           <a:xfrm>
-            <a:off x="7818120" y="3300984"/>
-            <a:ext cx="3090672" cy="877824"/>
+            <a:off x="7818120" y="3182112"/>
+            <a:ext cx="3090672" cy="718718"/>
           </a:xfrm>
           <a:prstGeom prst="rect">
             <a:avLst/>
@@ -7288,12 +7288,12 @@
         </p:nvSpPr>
         <p:spPr>
           <a:xfrm>
-            <a:off x="7635240" y="4498848"/>
-            <a:ext cx="3474720" cy="1143000"/>
+            <a:off x="7635240" y="4184294"/>
+            <a:ext cx="3474720" cy="1466698"/>
           </a:xfrm>
           <a:prstGeom prst="roundRect">
             <a:avLst>
-              <a:gd name="adj" fmla="val 9600"/>
+              <a:gd name="adj" fmla="val 7481"/>
             </a:avLst>
           </a:prstGeom>
           <a:solidFill>
@@ -7315,7 +7315,7 @@
         </p:nvSpPr>
         <p:spPr>
           <a:xfrm>
-            <a:off x="7799832" y="4645152"/>
+            <a:off x="7799832" y="4330598"/>
             <a:ext cx="3145536" cy="256032"/>
           </a:xfrm>
           <a:prstGeom prst="rect">
@@ -7354,8 +7354,8 @@
         </p:nvSpPr>
         <p:spPr>
           <a:xfrm>
-            <a:off x="7799832" y="4974336"/>
-            <a:ext cx="3145536" cy="576072"/>
+            <a:off x="7799832" y="4659782"/>
+            <a:ext cx="3145536" cy="899770"/>
           </a:xfrm>
           <a:prstGeom prst="rect">
             <a:avLst/>
@@ -7381,7 +7381,7 @@
                 <a:ea typeface="Aptos" pitchFamily="34" charset="-122"/>
                 <a:cs typeface="Aptos" pitchFamily="34" charset="-120"/>
               </a:rPr>
-              <a:t>Use the concept to plan transparent communication, gather stakeholder input, protect trust, and make sure affected.</a:t>
+              <a:t>Use the concept to plan transparent communication, gather stakeholder input, protect trust, and make sure affected communities are considered early.</a:t>
             </a:r>
             <a:endParaRPr lang="en-US" sz="1320" dirty="0"/>
           </a:p>
@@ -7733,11 +7733,11 @@
         <p:spPr>
           <a:xfrm>
             <a:off x="7635240" y="1325880"/>
-            <a:ext cx="3474720" cy="1325880"/>
+            <a:ext cx="3474720" cy="1207008"/>
           </a:xfrm>
           <a:prstGeom prst="roundRect">
             <a:avLst>
-              <a:gd name="adj" fmla="val 8276"/>
+              <a:gd name="adj" fmla="val 9091"/>
             </a:avLst>
           </a:prstGeom>
           <a:solidFill>
@@ -7799,7 +7799,7 @@
         <p:spPr>
           <a:xfrm>
             <a:off x="7799832" y="1801368"/>
-            <a:ext cx="3145536" cy="758952"/>
+            <a:ext cx="3145536" cy="640080"/>
           </a:xfrm>
           <a:prstGeom prst="rect">
             <a:avLst/>
@@ -7825,7 +7825,7 @@
                 <a:ea typeface="Aptos" pitchFamily="34" charset="-122"/>
                 <a:cs typeface="Aptos" pitchFamily="34" charset="-120"/>
               </a:rPr>
-              <a:t>What evidence would governance, leadership, or operations staff need before moving forward?</a:t>
+              <a:t>What evidence would governance, leadership, or operations staff need before moving.</a:t>
             </a:r>
             <a:endParaRPr lang="en-US" sz="1320" dirty="0"/>
           </a:p>
@@ -7839,12 +7839,12 @@
         </p:nvSpPr>
         <p:spPr>
           <a:xfrm>
-            <a:off x="7635240" y="2788920"/>
-            <a:ext cx="3474720" cy="1536192"/>
+            <a:off x="7635240" y="2670048"/>
+            <a:ext cx="3474720" cy="1377086"/>
           </a:xfrm>
           <a:prstGeom prst="roundRect">
             <a:avLst>
-              <a:gd name="adj" fmla="val 7143"/>
+              <a:gd name="adj" fmla="val 7968"/>
             </a:avLst>
           </a:prstGeom>
           <a:solidFill>
@@ -7866,7 +7866,7 @@
         </p:nvSpPr>
         <p:spPr>
           <a:xfrm>
-            <a:off x="7799832" y="2935224"/>
+            <a:off x="7799832" y="2816352"/>
             <a:ext cx="3145536" cy="256032"/>
           </a:xfrm>
           <a:prstGeom prst="rect">
@@ -7905,8 +7905,8 @@
         </p:nvSpPr>
         <p:spPr>
           <a:xfrm>
-            <a:off x="7818120" y="3300984"/>
-            <a:ext cx="3090672" cy="877824"/>
+            <a:off x="7818120" y="3182112"/>
+            <a:ext cx="3090672" cy="718718"/>
           </a:xfrm>
           <a:prstGeom prst="rect">
             <a:avLst/>
@@ -7963,12 +7963,12 @@
         </p:nvSpPr>
         <p:spPr>
           <a:xfrm>
-            <a:off x="7635240" y="4498848"/>
-            <a:ext cx="3474720" cy="1143000"/>
+            <a:off x="7635240" y="4184294"/>
+            <a:ext cx="3474720" cy="1466698"/>
           </a:xfrm>
           <a:prstGeom prst="roundRect">
             <a:avLst>
-              <a:gd name="adj" fmla="val 9600"/>
+              <a:gd name="adj" fmla="val 7481"/>
             </a:avLst>
           </a:prstGeom>
           <a:solidFill>
@@ -7990,7 +7990,7 @@
         </p:nvSpPr>
         <p:spPr>
           <a:xfrm>
-            <a:off x="7799832" y="4645152"/>
+            <a:off x="7799832" y="4330598"/>
             <a:ext cx="3145536" cy="256032"/>
           </a:xfrm>
           <a:prstGeom prst="rect">
@@ -8029,8 +8029,8 @@
         </p:nvSpPr>
         <p:spPr>
           <a:xfrm>
-            <a:off x="7799832" y="4974336"/>
-            <a:ext cx="3145536" cy="576072"/>
+            <a:off x="7799832" y="4659782"/>
+            <a:ext cx="3145536" cy="899770"/>
           </a:xfrm>
           <a:prstGeom prst="rect">
             <a:avLst/>
@@ -8056,7 +8056,7 @@
                 <a:ea typeface="Aptos" pitchFamily="34" charset="-122"/>
                 <a:cs typeface="Aptos" pitchFamily="34" charset="-120"/>
               </a:rPr>
-              <a:t>Use the concept to plan transparent communication, gather stakeholder input, protect trust, and make sure affected.</a:t>
+              <a:t>Use the concept to plan transparent communication, gather stakeholder input, protect trust, and make sure affected communities are considered early.</a:t>
             </a:r>
             <a:endParaRPr lang="en-US" sz="1320" dirty="0"/>
           </a:p>
@@ -8408,11 +8408,11 @@
         <p:spPr>
           <a:xfrm>
             <a:off x="7635240" y="1325880"/>
-            <a:ext cx="3474720" cy="1325880"/>
+            <a:ext cx="3474720" cy="1207008"/>
           </a:xfrm>
           <a:prstGeom prst="roundRect">
             <a:avLst>
-              <a:gd name="adj" fmla="val 8276"/>
+              <a:gd name="adj" fmla="val 9091"/>
             </a:avLst>
           </a:prstGeom>
           <a:solidFill>
@@ -8474,7 +8474,7 @@
         <p:spPr>
           <a:xfrm>
             <a:off x="7799832" y="1801368"/>
-            <a:ext cx="3145536" cy="758952"/>
+            <a:ext cx="3145536" cy="640080"/>
           </a:xfrm>
           <a:prstGeom prst="rect">
             <a:avLst/>
@@ -8514,12 +8514,12 @@
         </p:nvSpPr>
         <p:spPr>
           <a:xfrm>
-            <a:off x="7635240" y="2788920"/>
-            <a:ext cx="3474720" cy="1536192"/>
+            <a:off x="7635240" y="2670048"/>
+            <a:ext cx="3474720" cy="1377086"/>
           </a:xfrm>
           <a:prstGeom prst="roundRect">
             <a:avLst>
-              <a:gd name="adj" fmla="val 7143"/>
+              <a:gd name="adj" fmla="val 7968"/>
             </a:avLst>
           </a:prstGeom>
           <a:solidFill>
@@ -8541,7 +8541,7 @@
         </p:nvSpPr>
         <p:spPr>
           <a:xfrm>
-            <a:off x="7799832" y="2935224"/>
+            <a:off x="7799832" y="2816352"/>
             <a:ext cx="3145536" cy="256032"/>
           </a:xfrm>
           <a:prstGeom prst="rect">
@@ -8580,8 +8580,8 @@
         </p:nvSpPr>
         <p:spPr>
           <a:xfrm>
-            <a:off x="7818120" y="3300984"/>
-            <a:ext cx="3090672" cy="877824"/>
+            <a:off x="7818120" y="3182112"/>
+            <a:ext cx="3090672" cy="718718"/>
           </a:xfrm>
           <a:prstGeom prst="rect">
             <a:avLst/>
@@ -8638,12 +8638,12 @@
         </p:nvSpPr>
         <p:spPr>
           <a:xfrm>
-            <a:off x="7635240" y="4498848"/>
-            <a:ext cx="3474720" cy="1143000"/>
+            <a:off x="7635240" y="4184294"/>
+            <a:ext cx="3474720" cy="1466698"/>
           </a:xfrm>
           <a:prstGeom prst="roundRect">
             <a:avLst>
-              <a:gd name="adj" fmla="val 9600"/>
+              <a:gd name="adj" fmla="val 7481"/>
             </a:avLst>
           </a:prstGeom>
           <a:solidFill>
@@ -8665,7 +8665,7 @@
         </p:nvSpPr>
         <p:spPr>
           <a:xfrm>
-            <a:off x="7799832" y="4645152"/>
+            <a:off x="7799832" y="4330598"/>
             <a:ext cx="3145536" cy="256032"/>
           </a:xfrm>
           <a:prstGeom prst="rect">
@@ -8704,8 +8704,8 @@
         </p:nvSpPr>
         <p:spPr>
           <a:xfrm>
-            <a:off x="7799832" y="4974336"/>
-            <a:ext cx="3145536" cy="576072"/>
+            <a:off x="7799832" y="4659782"/>
+            <a:ext cx="3145536" cy="899770"/>
           </a:xfrm>
           <a:prstGeom prst="rect">
             <a:avLst/>
@@ -8731,7 +8731,7 @@
                 <a:ea typeface="Aptos" pitchFamily="34" charset="-122"/>
                 <a:cs typeface="Aptos" pitchFamily="34" charset="-120"/>
               </a:rPr>
-              <a:t>Use the assignment to test whether you can explain the concept, apply it to a realistic public health situation, and.</a:t>
+              <a:t>Use the assignment to test whether you can explain the concept, apply it to a realistic public health situation, and identify what would need review before the work moves forward.</a:t>
             </a:r>
             <a:endParaRPr lang="en-US" sz="1320" dirty="0"/>
           </a:p>
@@ -9100,11 +9100,11 @@
         <p:spPr>
           <a:xfrm>
             <a:off x="7635240" y="1325880"/>
-            <a:ext cx="3474720" cy="1325880"/>
+            <a:ext cx="3474720" cy="1207008"/>
           </a:xfrm>
           <a:prstGeom prst="roundRect">
             <a:avLst>
-              <a:gd name="adj" fmla="val 8276"/>
+              <a:gd name="adj" fmla="val 9091"/>
             </a:avLst>
           </a:prstGeom>
           <a:solidFill>
@@ -9166,7 +9166,7 @@
         <p:spPr>
           <a:xfrm>
             <a:off x="7799832" y="1801368"/>
-            <a:ext cx="3145536" cy="758952"/>
+            <a:ext cx="3145536" cy="640080"/>
           </a:xfrm>
           <a:prstGeom prst="rect">
             <a:avLst/>
@@ -9206,12 +9206,12 @@
         </p:nvSpPr>
         <p:spPr>
           <a:xfrm>
-            <a:off x="7635240" y="2788920"/>
-            <a:ext cx="3474720" cy="1536192"/>
+            <a:off x="7635240" y="2670048"/>
+            <a:ext cx="3474720" cy="1377086"/>
           </a:xfrm>
           <a:prstGeom prst="roundRect">
             <a:avLst>
-              <a:gd name="adj" fmla="val 7143"/>
+              <a:gd name="adj" fmla="val 7968"/>
             </a:avLst>
           </a:prstGeom>
           <a:solidFill>
@@ -9233,7 +9233,7 @@
         </p:nvSpPr>
         <p:spPr>
           <a:xfrm>
-            <a:off x="7799832" y="2935224"/>
+            <a:off x="7799832" y="2816352"/>
             <a:ext cx="3145536" cy="256032"/>
           </a:xfrm>
           <a:prstGeom prst="rect">
@@ -9272,8 +9272,8 @@
         </p:nvSpPr>
         <p:spPr>
           <a:xfrm>
-            <a:off x="7818120" y="3300984"/>
-            <a:ext cx="3090672" cy="877824"/>
+            <a:off x="7818120" y="3182112"/>
+            <a:ext cx="3090672" cy="718718"/>
           </a:xfrm>
           <a:prstGeom prst="rect">
             <a:avLst/>
@@ -9347,12 +9347,12 @@
         </p:nvSpPr>
         <p:spPr>
           <a:xfrm>
-            <a:off x="7635240" y="4498848"/>
-            <a:ext cx="3474720" cy="1143000"/>
+            <a:off x="7635240" y="4184294"/>
+            <a:ext cx="3474720" cy="1466698"/>
           </a:xfrm>
           <a:prstGeom prst="roundRect">
             <a:avLst>
-              <a:gd name="adj" fmla="val 9600"/>
+              <a:gd name="adj" fmla="val 7481"/>
             </a:avLst>
           </a:prstGeom>
           <a:solidFill>
@@ -9374,7 +9374,7 @@
         </p:nvSpPr>
         <p:spPr>
           <a:xfrm>
-            <a:off x="7799832" y="4645152"/>
+            <a:off x="7799832" y="4330598"/>
             <a:ext cx="3145536" cy="256032"/>
           </a:xfrm>
           <a:prstGeom prst="rect">
@@ -9413,8 +9413,8 @@
         </p:nvSpPr>
         <p:spPr>
           <a:xfrm>
-            <a:off x="7799832" y="4974336"/>
-            <a:ext cx="3145536" cy="576072"/>
+            <a:off x="7799832" y="4659782"/>
+            <a:ext cx="3145536" cy="899770"/>
           </a:xfrm>
           <a:prstGeom prst="rect">
             <a:avLst/>
@@ -9440,7 +9440,7 @@
                 <a:ea typeface="Aptos" pitchFamily="34" charset="-122"/>
                 <a:cs typeface="Aptos" pitchFamily="34" charset="-120"/>
               </a:rPr>
-              <a:t>Use the concept to plan transparent communication, gather stakeholder input, protect trust, and make sure affected.</a:t>
+              <a:t>Use the concept to plan transparent communication, gather stakeholder input, protect trust, and make sure affected communities are considered early.</a:t>
             </a:r>
             <a:endParaRPr lang="en-US" sz="1320" dirty="0"/>
           </a:p>
@@ -9792,11 +9792,11 @@
         <p:spPr>
           <a:xfrm>
             <a:off x="7635240" y="1325880"/>
-            <a:ext cx="3474720" cy="1325880"/>
+            <a:ext cx="3474720" cy="1207008"/>
           </a:xfrm>
           <a:prstGeom prst="roundRect">
             <a:avLst>
-              <a:gd name="adj" fmla="val 8276"/>
+              <a:gd name="adj" fmla="val 9091"/>
             </a:avLst>
           </a:prstGeom>
           <a:solidFill>
@@ -9858,7 +9858,7 @@
         <p:spPr>
           <a:xfrm>
             <a:off x="7799832" y="1801368"/>
-            <a:ext cx="3145536" cy="758952"/>
+            <a:ext cx="3145536" cy="640080"/>
           </a:xfrm>
           <a:prstGeom prst="rect">
             <a:avLst/>
@@ -9898,12 +9898,12 @@
         </p:nvSpPr>
         <p:spPr>
           <a:xfrm>
-            <a:off x="7635240" y="2788920"/>
-            <a:ext cx="3474720" cy="1536192"/>
+            <a:off x="7635240" y="2670048"/>
+            <a:ext cx="3474720" cy="1377086"/>
           </a:xfrm>
           <a:prstGeom prst="roundRect">
             <a:avLst>
-              <a:gd name="adj" fmla="val 7143"/>
+              <a:gd name="adj" fmla="val 7968"/>
             </a:avLst>
           </a:prstGeom>
           <a:solidFill>
@@ -9925,7 +9925,7 @@
         </p:nvSpPr>
         <p:spPr>
           <a:xfrm>
-            <a:off x="7799832" y="2935224"/>
+            <a:off x="7799832" y="2816352"/>
             <a:ext cx="3145536" cy="256032"/>
           </a:xfrm>
           <a:prstGeom prst="rect">
@@ -9964,8 +9964,8 @@
         </p:nvSpPr>
         <p:spPr>
           <a:xfrm>
-            <a:off x="7818120" y="3300984"/>
-            <a:ext cx="3090672" cy="877824"/>
+            <a:off x="7818120" y="3182112"/>
+            <a:ext cx="3090672" cy="718718"/>
           </a:xfrm>
           <a:prstGeom prst="rect">
             <a:avLst/>
@@ -10022,12 +10022,12 @@
         </p:nvSpPr>
         <p:spPr>
           <a:xfrm>
-            <a:off x="7635240" y="4498848"/>
-            <a:ext cx="3474720" cy="1143000"/>
+            <a:off x="7635240" y="4184294"/>
+            <a:ext cx="3474720" cy="1466698"/>
           </a:xfrm>
           <a:prstGeom prst="roundRect">
             <a:avLst>
-              <a:gd name="adj" fmla="val 9600"/>
+              <a:gd name="adj" fmla="val 7481"/>
             </a:avLst>
           </a:prstGeom>
           <a:solidFill>
@@ -10049,7 +10049,7 @@
         </p:nvSpPr>
         <p:spPr>
           <a:xfrm>
-            <a:off x="7799832" y="4645152"/>
+            <a:off x="7799832" y="4330598"/>
             <a:ext cx="3145536" cy="256032"/>
           </a:xfrm>
           <a:prstGeom prst="rect">
@@ -10088,8 +10088,8 @@
         </p:nvSpPr>
         <p:spPr>
           <a:xfrm>
-            <a:off x="7799832" y="4974336"/>
-            <a:ext cx="3145536" cy="576072"/>
+            <a:off x="7799832" y="4659782"/>
+            <a:ext cx="3145536" cy="899770"/>
           </a:xfrm>
           <a:prstGeom prst="rect">
             <a:avLst/>
@@ -10115,7 +10115,7 @@
                 <a:ea typeface="Aptos" pitchFamily="34" charset="-122"/>
                 <a:cs typeface="Aptos" pitchFamily="34" charset="-120"/>
               </a:rPr>
-              <a:t>Use the concept to plan transparent communication, gather stakeholder input, protect trust, and make sure affected.</a:t>
+              <a:t>Use the concept to plan transparent communication, gather stakeholder input, protect trust, and make sure affected communities are considered early.</a:t>
             </a:r>
             <a:endParaRPr lang="en-US" sz="1320" dirty="0"/>
           </a:p>
@@ -10576,7 +10576,7 @@
                 <a:ea typeface="Aptos" pitchFamily="34" charset="-122"/>
                 <a:cs typeface="Aptos" pitchFamily="34" charset="-120"/>
               </a:rPr>
-              <a:t>Level: applied/foundational Primary track: Communications Role-Based Track Appears in tracks: communications,.</a:t>
+              <a:t>Level: applied/foundational Primary track: Communications Role-Based Track Appears in tracks: communications, shared-foundational, policy, public-health-executive-leadership</a:t>
             </a:r>
             <a:endParaRPr lang="en-US" sz="1320" dirty="0"/>
           </a:p>
@@ -11086,11 +11086,11 @@
         <p:spPr>
           <a:xfrm>
             <a:off x="7635240" y="1325880"/>
-            <a:ext cx="3474720" cy="1325880"/>
+            <a:ext cx="3474720" cy="1207008"/>
           </a:xfrm>
           <a:prstGeom prst="roundRect">
             <a:avLst>
-              <a:gd name="adj" fmla="val 8276"/>
+              <a:gd name="adj" fmla="val 9091"/>
             </a:avLst>
           </a:prstGeom>
           <a:solidFill>
@@ -11152,7 +11152,7 @@
         <p:spPr>
           <a:xfrm>
             <a:off x="7799832" y="1801368"/>
-            <a:ext cx="3145536" cy="758952"/>
+            <a:ext cx="3145536" cy="640080"/>
           </a:xfrm>
           <a:prstGeom prst="rect">
             <a:avLst/>
@@ -11192,12 +11192,12 @@
         </p:nvSpPr>
         <p:spPr>
           <a:xfrm>
-            <a:off x="7635240" y="2788920"/>
-            <a:ext cx="3474720" cy="1536192"/>
+            <a:off x="7635240" y="2670048"/>
+            <a:ext cx="3474720" cy="1377086"/>
           </a:xfrm>
           <a:prstGeom prst="roundRect">
             <a:avLst>
-              <a:gd name="adj" fmla="val 7143"/>
+              <a:gd name="adj" fmla="val 7968"/>
             </a:avLst>
           </a:prstGeom>
           <a:solidFill>
@@ -11219,7 +11219,7 @@
         </p:nvSpPr>
         <p:spPr>
           <a:xfrm>
-            <a:off x="7799832" y="2935224"/>
+            <a:off x="7799832" y="2816352"/>
             <a:ext cx="3145536" cy="256032"/>
           </a:xfrm>
           <a:prstGeom prst="rect">
@@ -11258,8 +11258,8 @@
         </p:nvSpPr>
         <p:spPr>
           <a:xfrm>
-            <a:off x="7818120" y="3300984"/>
-            <a:ext cx="3090672" cy="877824"/>
+            <a:off x="7818120" y="3182112"/>
+            <a:ext cx="3090672" cy="718718"/>
           </a:xfrm>
           <a:prstGeom prst="rect">
             <a:avLst/>
@@ -11316,12 +11316,12 @@
         </p:nvSpPr>
         <p:spPr>
           <a:xfrm>
-            <a:off x="7635240" y="4498848"/>
-            <a:ext cx="3474720" cy="1143000"/>
+            <a:off x="7635240" y="4184294"/>
+            <a:ext cx="3474720" cy="1466698"/>
           </a:xfrm>
           <a:prstGeom prst="roundRect">
             <a:avLst>
-              <a:gd name="adj" fmla="val 9600"/>
+              <a:gd name="adj" fmla="val 7481"/>
             </a:avLst>
           </a:prstGeom>
           <a:solidFill>
@@ -11343,7 +11343,7 @@
         </p:nvSpPr>
         <p:spPr>
           <a:xfrm>
-            <a:off x="7799832" y="4645152"/>
+            <a:off x="7799832" y="4330598"/>
             <a:ext cx="3145536" cy="256032"/>
           </a:xfrm>
           <a:prstGeom prst="rect">
@@ -11382,8 +11382,8 @@
         </p:nvSpPr>
         <p:spPr>
           <a:xfrm>
-            <a:off x="7799832" y="4974336"/>
-            <a:ext cx="3145536" cy="576072"/>
+            <a:off x="7799832" y="4659782"/>
+            <a:ext cx="3145536" cy="899770"/>
           </a:xfrm>
           <a:prstGeom prst="rect">
             <a:avLst/>
@@ -11409,7 +11409,7 @@
                 <a:ea typeface="Aptos" pitchFamily="34" charset="-122"/>
                 <a:cs typeface="Aptos" pitchFamily="34" charset="-120"/>
               </a:rPr>
-              <a:t>Use the assignment to test whether you can explain the concept, apply it to a realistic public health situation, and.</a:t>
+              <a:t>Use the assignment to test whether you can explain the concept, apply it to a realistic public health situation, and identify what would need review before the work moves forward.</a:t>
             </a:r>
             <a:endParaRPr lang="en-US" sz="1320" dirty="0"/>
           </a:p>
@@ -11778,11 +11778,11 @@
         <p:spPr>
           <a:xfrm>
             <a:off x="7635240" y="1325880"/>
-            <a:ext cx="3474720" cy="1325880"/>
+            <a:ext cx="3474720" cy="1207008"/>
           </a:xfrm>
           <a:prstGeom prst="roundRect">
             <a:avLst>
-              <a:gd name="adj" fmla="val 8276"/>
+              <a:gd name="adj" fmla="val 9091"/>
             </a:avLst>
           </a:prstGeom>
           <a:solidFill>
@@ -11844,7 +11844,7 @@
         <p:spPr>
           <a:xfrm>
             <a:off x="7799832" y="1801368"/>
-            <a:ext cx="3145536" cy="758952"/>
+            <a:ext cx="3145536" cy="640080"/>
           </a:xfrm>
           <a:prstGeom prst="rect">
             <a:avLst/>
@@ -11884,12 +11884,12 @@
         </p:nvSpPr>
         <p:spPr>
           <a:xfrm>
-            <a:off x="7635240" y="2788920"/>
-            <a:ext cx="3474720" cy="1536192"/>
+            <a:off x="7635240" y="2670048"/>
+            <a:ext cx="3474720" cy="1377086"/>
           </a:xfrm>
           <a:prstGeom prst="roundRect">
             <a:avLst>
-              <a:gd name="adj" fmla="val 7143"/>
+              <a:gd name="adj" fmla="val 7968"/>
             </a:avLst>
           </a:prstGeom>
           <a:solidFill>
@@ -11911,7 +11911,7 @@
         </p:nvSpPr>
         <p:spPr>
           <a:xfrm>
-            <a:off x="7799832" y="2935224"/>
+            <a:off x="7799832" y="2816352"/>
             <a:ext cx="3145536" cy="256032"/>
           </a:xfrm>
           <a:prstGeom prst="rect">
@@ -11950,8 +11950,8 @@
         </p:nvSpPr>
         <p:spPr>
           <a:xfrm>
-            <a:off x="7818120" y="3300984"/>
-            <a:ext cx="3090672" cy="877824"/>
+            <a:off x="7818120" y="3182112"/>
+            <a:ext cx="3090672" cy="718718"/>
           </a:xfrm>
           <a:prstGeom prst="rect">
             <a:avLst/>
@@ -12025,12 +12025,12 @@
         </p:nvSpPr>
         <p:spPr>
           <a:xfrm>
-            <a:off x="7635240" y="4498848"/>
-            <a:ext cx="3474720" cy="1143000"/>
+            <a:off x="7635240" y="4184294"/>
+            <a:ext cx="3474720" cy="1466698"/>
           </a:xfrm>
           <a:prstGeom prst="roundRect">
             <a:avLst>
-              <a:gd name="adj" fmla="val 9600"/>
+              <a:gd name="adj" fmla="val 7481"/>
             </a:avLst>
           </a:prstGeom>
           <a:solidFill>
@@ -12052,7 +12052,7 @@
         </p:nvSpPr>
         <p:spPr>
           <a:xfrm>
-            <a:off x="7799832" y="4645152"/>
+            <a:off x="7799832" y="4330598"/>
             <a:ext cx="3145536" cy="256032"/>
           </a:xfrm>
           <a:prstGeom prst="rect">
@@ -12091,8 +12091,8 @@
         </p:nvSpPr>
         <p:spPr>
           <a:xfrm>
-            <a:off x="7799832" y="4974336"/>
-            <a:ext cx="3145536" cy="576072"/>
+            <a:off x="7799832" y="4659782"/>
+            <a:ext cx="3145536" cy="899770"/>
           </a:xfrm>
           <a:prstGeom prst="rect">
             <a:avLst/>
@@ -12118,7 +12118,7 @@
                 <a:ea typeface="Aptos" pitchFamily="34" charset="-122"/>
                 <a:cs typeface="Aptos" pitchFamily="34" charset="-120"/>
               </a:rPr>
-              <a:t>Use the assignment to test whether you can explain the concept, apply it to a realistic public health situation, and.</a:t>
+              <a:t>Use the assignment to test whether you can explain the concept, apply it to a realistic public health situation, and identify what would need review before the work moves forward.</a:t>
             </a:r>
             <a:endParaRPr lang="en-US" sz="1320" dirty="0"/>
           </a:p>
@@ -12487,11 +12487,11 @@
         <p:spPr>
           <a:xfrm>
             <a:off x="7635240" y="1325880"/>
-            <a:ext cx="3474720" cy="1325880"/>
+            <a:ext cx="3474720" cy="1207008"/>
           </a:xfrm>
           <a:prstGeom prst="roundRect">
             <a:avLst>
-              <a:gd name="adj" fmla="val 8276"/>
+              <a:gd name="adj" fmla="val 9091"/>
             </a:avLst>
           </a:prstGeom>
           <a:solidFill>
@@ -12553,7 +12553,7 @@
         <p:spPr>
           <a:xfrm>
             <a:off x="7799832" y="1801368"/>
-            <a:ext cx="3145536" cy="758952"/>
+            <a:ext cx="3145536" cy="640080"/>
           </a:xfrm>
           <a:prstGeom prst="rect">
             <a:avLst/>
@@ -12593,12 +12593,12 @@
         </p:nvSpPr>
         <p:spPr>
           <a:xfrm>
-            <a:off x="7635240" y="2788920"/>
-            <a:ext cx="3474720" cy="1536192"/>
+            <a:off x="7635240" y="2670048"/>
+            <a:ext cx="3474720" cy="1377086"/>
           </a:xfrm>
           <a:prstGeom prst="roundRect">
             <a:avLst>
-              <a:gd name="adj" fmla="val 7143"/>
+              <a:gd name="adj" fmla="val 7968"/>
             </a:avLst>
           </a:prstGeom>
           <a:solidFill>
@@ -12620,7 +12620,7 @@
         </p:nvSpPr>
         <p:spPr>
           <a:xfrm>
-            <a:off x="7799832" y="2935224"/>
+            <a:off x="7799832" y="2816352"/>
             <a:ext cx="3145536" cy="256032"/>
           </a:xfrm>
           <a:prstGeom prst="rect">
@@ -12659,8 +12659,8 @@
         </p:nvSpPr>
         <p:spPr>
           <a:xfrm>
-            <a:off x="7818120" y="3300984"/>
-            <a:ext cx="3090672" cy="877824"/>
+            <a:off x="7818120" y="3182112"/>
+            <a:ext cx="3090672" cy="718718"/>
           </a:xfrm>
           <a:prstGeom prst="rect">
             <a:avLst/>
@@ -12734,12 +12734,12 @@
         </p:nvSpPr>
         <p:spPr>
           <a:xfrm>
-            <a:off x="7635240" y="4498848"/>
-            <a:ext cx="3474720" cy="1143000"/>
+            <a:off x="7635240" y="4184294"/>
+            <a:ext cx="3474720" cy="1466698"/>
           </a:xfrm>
           <a:prstGeom prst="roundRect">
             <a:avLst>
-              <a:gd name="adj" fmla="val 9600"/>
+              <a:gd name="adj" fmla="val 7481"/>
             </a:avLst>
           </a:prstGeom>
           <a:solidFill>
@@ -12761,7 +12761,7 @@
         </p:nvSpPr>
         <p:spPr>
           <a:xfrm>
-            <a:off x="7799832" y="4645152"/>
+            <a:off x="7799832" y="4330598"/>
             <a:ext cx="3145536" cy="256032"/>
           </a:xfrm>
           <a:prstGeom prst="rect">
@@ -12800,8 +12800,8 @@
         </p:nvSpPr>
         <p:spPr>
           <a:xfrm>
-            <a:off x="7799832" y="4974336"/>
-            <a:ext cx="3145536" cy="576072"/>
+            <a:off x="7799832" y="4659782"/>
+            <a:ext cx="3145536" cy="899770"/>
           </a:xfrm>
           <a:prstGeom prst="rect">
             <a:avLst/>
@@ -12827,7 +12827,7 @@
                 <a:ea typeface="Aptos" pitchFamily="34" charset="-122"/>
                 <a:cs typeface="Aptos" pitchFamily="34" charset="-120"/>
               </a:rPr>
-              <a:t>Use the concept to plan transparent communication, gather stakeholder input, protect trust, and make sure affected.</a:t>
+              <a:t>Use the concept to plan transparent communication, gather stakeholder input, protect trust, and make sure affected communities are considered early.</a:t>
             </a:r>
             <a:endParaRPr lang="en-US" sz="1320" dirty="0"/>
           </a:p>
@@ -13162,11 +13162,11 @@
         <p:spPr>
           <a:xfrm>
             <a:off x="7635240" y="1325880"/>
-            <a:ext cx="3474720" cy="1325880"/>
+            <a:ext cx="3474720" cy="1207008"/>
           </a:xfrm>
           <a:prstGeom prst="roundRect">
             <a:avLst>
-              <a:gd name="adj" fmla="val 8276"/>
+              <a:gd name="adj" fmla="val 9091"/>
             </a:avLst>
           </a:prstGeom>
           <a:solidFill>
@@ -13228,7 +13228,7 @@
         <p:spPr>
           <a:xfrm>
             <a:off x="7799832" y="1801368"/>
-            <a:ext cx="3145536" cy="758952"/>
+            <a:ext cx="3145536" cy="640080"/>
           </a:xfrm>
           <a:prstGeom prst="rect">
             <a:avLst/>
@@ -13254,7 +13254,7 @@
                 <a:ea typeface="Aptos" pitchFamily="34" charset="-122"/>
                 <a:cs typeface="Aptos" pitchFamily="34" charset="-120"/>
               </a:rPr>
-              <a:t>Relevant public health program SOPs, data governance documentation, and implementation plans</a:t>
+              <a:t>Relevant public health program SOPs, data governance documentation, and implementation.</a:t>
             </a:r>
             <a:endParaRPr lang="en-US" sz="1320" dirty="0"/>
           </a:p>
@@ -13268,12 +13268,12 @@
         </p:nvSpPr>
         <p:spPr>
           <a:xfrm>
-            <a:off x="7635240" y="2788920"/>
-            <a:ext cx="3474720" cy="1536192"/>
+            <a:off x="7635240" y="2670048"/>
+            <a:ext cx="3474720" cy="1377086"/>
           </a:xfrm>
           <a:prstGeom prst="roundRect">
             <a:avLst>
-              <a:gd name="adj" fmla="val 7143"/>
+              <a:gd name="adj" fmla="val 7968"/>
             </a:avLst>
           </a:prstGeom>
           <a:solidFill>
@@ -13295,7 +13295,7 @@
         </p:nvSpPr>
         <p:spPr>
           <a:xfrm>
-            <a:off x="7799832" y="2935224"/>
+            <a:off x="7799832" y="2816352"/>
             <a:ext cx="3145536" cy="256032"/>
           </a:xfrm>
           <a:prstGeom prst="rect">
@@ -13334,8 +13334,8 @@
         </p:nvSpPr>
         <p:spPr>
           <a:xfrm>
-            <a:off x="7818120" y="3300984"/>
-            <a:ext cx="3090672" cy="877824"/>
+            <a:off x="7818120" y="3182112"/>
+            <a:ext cx="3090672" cy="718718"/>
           </a:xfrm>
           <a:prstGeom prst="rect">
             <a:avLst/>
@@ -13375,12 +13375,12 @@
         </p:nvSpPr>
         <p:spPr>
           <a:xfrm>
-            <a:off x="7635240" y="4498848"/>
-            <a:ext cx="3474720" cy="1143000"/>
+            <a:off x="7635240" y="4184294"/>
+            <a:ext cx="3474720" cy="1466698"/>
           </a:xfrm>
           <a:prstGeom prst="roundRect">
             <a:avLst>
-              <a:gd name="adj" fmla="val 9600"/>
+              <a:gd name="adj" fmla="val 7481"/>
             </a:avLst>
           </a:prstGeom>
           <a:solidFill>
@@ -13402,7 +13402,7 @@
         </p:nvSpPr>
         <p:spPr>
           <a:xfrm>
-            <a:off x="7799832" y="4645152"/>
+            <a:off x="7799832" y="4330598"/>
             <a:ext cx="3145536" cy="256032"/>
           </a:xfrm>
           <a:prstGeom prst="rect">
@@ -13441,8 +13441,8 @@
         </p:nvSpPr>
         <p:spPr>
           <a:xfrm>
-            <a:off x="7799832" y="4974336"/>
-            <a:ext cx="3145536" cy="576072"/>
+            <a:off x="7799832" y="4659782"/>
+            <a:ext cx="3145536" cy="899770"/>
           </a:xfrm>
           <a:prstGeom prst="rect">
             <a:avLst/>
@@ -13468,7 +13468,7 @@
                 <a:ea typeface="Aptos" pitchFamily="34" charset="-122"/>
                 <a:cs typeface="Aptos" pitchFamily="34" charset="-120"/>
               </a:rPr>
-              <a:t>Use the concept to plan transparent communication, gather stakeholder input, protect trust, and make sure affected.</a:t>
+              <a:t>Use the concept to plan transparent communication, gather stakeholder input, protect trust, and make sure affected communities are considered early.</a:t>
             </a:r>
             <a:endParaRPr lang="en-US" sz="1320" dirty="0"/>
           </a:p>
@@ -13946,7 +13946,7 @@
                 <a:ea typeface="Aptos" pitchFamily="34" charset="-122"/>
                 <a:cs typeface="Aptos" pitchFamily="34" charset="-120"/>
               </a:rPr>
-              <a:t>Use the related plays to identify decisions, participants, timing, approvals, and documentation needed for responsible.</a:t>
+              <a:t>Use the related plays to identify decisions, participants, timing, approvals, and documentation needed for responsible implementation.</a:t>
             </a:r>
             <a:endParaRPr lang="en-US" sz="1320" dirty="0"/>
           </a:p>
@@ -14565,7 +14565,7 @@
                 <a:ea typeface="Aptos" pitchFamily="34" charset="-122"/>
                 <a:cs typeface="Aptos" pitchFamily="34" charset="-120"/>
               </a:rPr>
-              <a:t>Use linked tools when your department needs a structured worksheet, template, checklist, review process, or.</a:t>
+              <a:t>Use linked tools when your department needs a structured worksheet, template, checklist, review process, or documentation artifact.</a:t>
             </a:r>
             <a:endParaRPr lang="en-US" sz="1320" dirty="0"/>
           </a:p>
@@ -15075,11 +15075,11 @@
         <p:spPr>
           <a:xfrm>
             <a:off x="7635240" y="1325880"/>
-            <a:ext cx="3474720" cy="1325880"/>
+            <a:ext cx="3474720" cy="1207008"/>
           </a:xfrm>
           <a:prstGeom prst="roundRect">
             <a:avLst>
-              <a:gd name="adj" fmla="val 8276"/>
+              <a:gd name="adj" fmla="val 9091"/>
             </a:avLst>
           </a:prstGeom>
           <a:solidFill>
@@ -15141,7 +15141,7 @@
         <p:spPr>
           <a:xfrm>
             <a:off x="7799832" y="1801368"/>
-            <a:ext cx="3145536" cy="758952"/>
+            <a:ext cx="3145536" cy="640080"/>
           </a:xfrm>
           <a:prstGeom prst="rect">
             <a:avLst/>
@@ -15181,12 +15181,12 @@
         </p:nvSpPr>
         <p:spPr>
           <a:xfrm>
-            <a:off x="7635240" y="2788920"/>
-            <a:ext cx="3474720" cy="1536192"/>
+            <a:off x="7635240" y="2670048"/>
+            <a:ext cx="3474720" cy="1377086"/>
           </a:xfrm>
           <a:prstGeom prst="roundRect">
             <a:avLst>
-              <a:gd name="adj" fmla="val 7143"/>
+              <a:gd name="adj" fmla="val 7968"/>
             </a:avLst>
           </a:prstGeom>
           <a:solidFill>
@@ -15208,7 +15208,7 @@
         </p:nvSpPr>
         <p:spPr>
           <a:xfrm>
-            <a:off x="7799832" y="2935224"/>
+            <a:off x="7799832" y="2816352"/>
             <a:ext cx="3145536" cy="256032"/>
           </a:xfrm>
           <a:prstGeom prst="rect">
@@ -15247,8 +15247,8 @@
         </p:nvSpPr>
         <p:spPr>
           <a:xfrm>
-            <a:off x="7818120" y="3300984"/>
-            <a:ext cx="3090672" cy="877824"/>
+            <a:off x="7818120" y="3182112"/>
+            <a:ext cx="3090672" cy="718718"/>
           </a:xfrm>
           <a:prstGeom prst="rect">
             <a:avLst/>
@@ -15305,12 +15305,12 @@
         </p:nvSpPr>
         <p:spPr>
           <a:xfrm>
-            <a:off x="7635240" y="4498848"/>
-            <a:ext cx="3474720" cy="1143000"/>
+            <a:off x="7635240" y="4184294"/>
+            <a:ext cx="3474720" cy="1466698"/>
           </a:xfrm>
           <a:prstGeom prst="roundRect">
             <a:avLst>
-              <a:gd name="adj" fmla="val 9600"/>
+              <a:gd name="adj" fmla="val 7481"/>
             </a:avLst>
           </a:prstGeom>
           <a:solidFill>
@@ -15332,7 +15332,7 @@
         </p:nvSpPr>
         <p:spPr>
           <a:xfrm>
-            <a:off x="7799832" y="4645152"/>
+            <a:off x="7799832" y="4330598"/>
             <a:ext cx="3145536" cy="256032"/>
           </a:xfrm>
           <a:prstGeom prst="rect">
@@ -15371,8 +15371,8 @@
         </p:nvSpPr>
         <p:spPr>
           <a:xfrm>
-            <a:off x="7799832" y="4974336"/>
-            <a:ext cx="3145536" cy="576072"/>
+            <a:off x="7799832" y="4659782"/>
+            <a:ext cx="3145536" cy="899770"/>
           </a:xfrm>
           <a:prstGeom prst="rect">
             <a:avLst/>
@@ -15398,7 +15398,7 @@
                 <a:ea typeface="Aptos" pitchFamily="34" charset="-122"/>
                 <a:cs typeface="Aptos" pitchFamily="34" charset="-120"/>
               </a:rPr>
-              <a:t>Use the assignment to test whether you can explain the concept, apply it to a realistic public health situation, and.</a:t>
+              <a:t>Use the assignment to test whether you can explain the concept, apply it to a realistic public health situation, and identify what would need review before the work moves forward.</a:t>
             </a:r>
             <a:endParaRPr lang="en-US" sz="1320" dirty="0"/>
           </a:p>
@@ -15767,11 +15767,11 @@
         <p:spPr>
           <a:xfrm>
             <a:off x="7635240" y="1325880"/>
-            <a:ext cx="3474720" cy="1325880"/>
+            <a:ext cx="3474720" cy="1255471"/>
           </a:xfrm>
           <a:prstGeom prst="roundRect">
             <a:avLst>
-              <a:gd name="adj" fmla="val 8276"/>
+              <a:gd name="adj" fmla="val 8740"/>
             </a:avLst>
           </a:prstGeom>
           <a:solidFill>
@@ -15833,7 +15833,7 @@
         <p:spPr>
           <a:xfrm>
             <a:off x="7799832" y="1801368"/>
-            <a:ext cx="3145536" cy="758952"/>
+            <a:ext cx="3145536" cy="688543"/>
           </a:xfrm>
           <a:prstGeom prst="rect">
             <a:avLst/>
@@ -15873,12 +15873,12 @@
         </p:nvSpPr>
         <p:spPr>
           <a:xfrm>
-            <a:off x="7635240" y="2788920"/>
-            <a:ext cx="3474720" cy="1536192"/>
+            <a:off x="7635240" y="2718511"/>
+            <a:ext cx="3474720" cy="1328623"/>
           </a:xfrm>
           <a:prstGeom prst="roundRect">
             <a:avLst>
-              <a:gd name="adj" fmla="val 7143"/>
+              <a:gd name="adj" fmla="val 8259"/>
             </a:avLst>
           </a:prstGeom>
           <a:solidFill>
@@ -15900,8 +15900,8 @@
         </p:nvSpPr>
         <p:spPr>
           <a:xfrm>
-            <a:off x="7799832" y="2935224"/>
-            <a:ext cx="3145536" cy="256032"/>
+            <a:off x="7799832" y="2846527"/>
+            <a:ext cx="3145536" cy="237744"/>
           </a:xfrm>
           <a:prstGeom prst="rect">
             <a:avLst/>
@@ -15917,7 +15917,7 @@
               <a:buNone/>
             </a:pPr>
             <a:r>
-              <a:rPr lang="en-US" sz="1300" b="1" dirty="0">
+              <a:rPr lang="en-US" sz="1250" b="1" dirty="0">
                 <a:solidFill>
                   <a:srgbClr val="0068B7"/>
                 </a:solidFill>
@@ -15925,101 +15925,317 @@
                 <a:ea typeface="Aptos" pitchFamily="34" charset="-122"/>
                 <a:cs typeface="Aptos" pitchFamily="34" charset="-120"/>
               </a:rPr>
-              <a:t>Concept checkpoints</a:t>
-            </a:r>
-            <a:endParaRPr lang="en-US" sz="1300" dirty="0"/>
-          </a:p>
-        </p:txBody>
-      </p:sp>
-      <p:sp>
-        <p:nvSpPr>
-          <p:cNvPr id="15" name="Text 13"/>
-          <p:cNvSpPr/>
-          <p:nvPr/>
-        </p:nvSpPr>
-        <p:spPr>
-          <a:xfrm>
-            <a:off x="7818120" y="3300984"/>
-            <a:ext cx="3090672" cy="877824"/>
-          </a:xfrm>
-          <a:prstGeom prst="rect">
-            <a:avLst/>
-          </a:prstGeom>
-          <a:noFill/>
-          <a:ln/>
-        </p:spPr>
-        <p:txBody>
-          <a:bodyPr wrap="square" lIns="508" tIns="508" rIns="508" bIns="508" rtlCol="0" anchor="t">
+              <a:t>Trust cycle</a:t>
+            </a:r>
+            <a:endParaRPr lang="en-US" sz="1250" dirty="0"/>
+          </a:p>
+        </p:txBody>
+      </p:sp>
+      <p:sp>
+        <p:nvSpPr>
+          <p:cNvPr id="15" name="Shape 13"/>
+          <p:cNvSpPr/>
+          <p:nvPr/>
+        </p:nvSpPr>
+        <p:spPr>
+          <a:xfrm>
+            <a:off x="8763000" y="3399739"/>
+            <a:ext cx="164592" cy="0"/>
+          </a:xfrm>
+          <a:prstGeom prst="line">
+            <a:avLst/>
+          </a:prstGeom>
+          <a:noFill/>
+          <a:ln w="15240">
+            <a:solidFill>
+              <a:srgbClr val="8ABBD8"/>
+            </a:solidFill>
+            <a:prstDash val="solid"/>
+          </a:ln>
+        </p:spPr>
+      </p:sp>
+      <p:sp>
+        <p:nvSpPr>
+          <p:cNvPr id="16" name="Shape 14"/>
+          <p:cNvSpPr/>
+          <p:nvPr/>
+        </p:nvSpPr>
+        <p:spPr>
+          <a:xfrm>
+            <a:off x="7872984" y="3248863"/>
+            <a:ext cx="890016" cy="301752"/>
+          </a:xfrm>
+          <a:prstGeom prst="roundRect">
+            <a:avLst>
+              <a:gd name="adj" fmla="val 24242"/>
+            </a:avLst>
+          </a:prstGeom>
+          <a:solidFill>
+            <a:srgbClr val="0068B7"/>
+          </a:solidFill>
+          <a:ln w="12700">
+            <a:solidFill>
+              <a:srgbClr val="0068B7"/>
+            </a:solidFill>
+            <a:prstDash val="solid"/>
+          </a:ln>
+        </p:spPr>
+      </p:sp>
+      <p:sp>
+        <p:nvSpPr>
+          <p:cNvPr id="17" name="Text 15"/>
+          <p:cNvSpPr/>
+          <p:nvPr/>
+        </p:nvSpPr>
+        <p:spPr>
+          <a:xfrm>
+            <a:off x="7909560" y="3322015"/>
+            <a:ext cx="816864" cy="146304"/>
+          </a:xfrm>
+          <a:prstGeom prst="rect">
+            <a:avLst/>
+          </a:prstGeom>
+          <a:noFill/>
+          <a:ln/>
+        </p:spPr>
+        <p:txBody>
+          <a:bodyPr wrap="square" lIns="0" tIns="0" rIns="0" bIns="0" rtlCol="0" anchor="ctr">
             <a:normAutofit/>
           </a:bodyPr>
           <a:lstStyle/>
           <a:p>
-            <a:pPr indent="0" marL="0">
-              <a:buNone/>
-            </a:pPr>
-            <a:r>
-              <a:rPr lang="en-US" sz="1220" dirty="0">
-                <a:solidFill>
-                  <a:srgbClr val="17364A"/>
-                </a:solidFill>
-                <a:latin typeface="Aptos" pitchFamily="34" charset="0"/>
-                <a:ea typeface="Aptos" pitchFamily="34" charset="-122"/>
-                <a:cs typeface="Aptos" pitchFamily="34" charset="-120"/>
-              </a:rPr>
-              <a:t>Generative AI can support public health communications by helping.</a:t>
-            </a:r>
-            <a:endParaRPr lang="en-US" sz="1220" dirty="0"/>
-          </a:p>
-          <a:p>
-            <a:pPr indent="0" marL="0">
-              <a:buNone/>
-            </a:pPr>
-            <a:r>
-              <a:rPr lang="en-US" sz="1220" dirty="0">
-                <a:solidFill>
-                  <a:srgbClr val="17364A"/>
-                </a:solidFill>
-                <a:latin typeface="Aptos" pitchFamily="34" charset="0"/>
-                <a:ea typeface="Aptos" pitchFamily="34" charset="-122"/>
-                <a:cs typeface="Aptos" pitchFamily="34" charset="-120"/>
-              </a:rPr>
-              <a:t>AI-generated text can sound clear and authoritative while.</a:t>
-            </a:r>
-            <a:endParaRPr lang="en-US" sz="1220" dirty="0"/>
-          </a:p>
-          <a:p>
-            <a:pPr indent="0" marL="0">
-              <a:buNone/>
-            </a:pPr>
-            <a:r>
-              <a:rPr lang="en-US" sz="1220" dirty="0">
-                <a:solidFill>
-                  <a:srgbClr val="17364A"/>
-                </a:solidFill>
-                <a:latin typeface="Aptos" pitchFamily="34" charset="0"/>
-                <a:ea typeface="Aptos" pitchFamily="34" charset="-122"/>
-                <a:cs typeface="Aptos" pitchFamily="34" charset="-120"/>
-              </a:rPr>
-              <a:t>This module teaches communications staff and program partners how.</a:t>
-            </a:r>
-            <a:endParaRPr lang="en-US" sz="1220" dirty="0"/>
-          </a:p>
-        </p:txBody>
-      </p:sp>
-      <p:sp>
-        <p:nvSpPr>
-          <p:cNvPr id="16" name="Shape 14"/>
-          <p:cNvSpPr/>
-          <p:nvPr/>
-        </p:nvSpPr>
-        <p:spPr>
-          <a:xfrm>
-            <a:off x="7635240" y="4498848"/>
-            <a:ext cx="3474720" cy="1143000"/>
+            <a:pPr algn="ctr" indent="0" marL="0">
+              <a:buNone/>
+            </a:pPr>
+            <a:r>
+              <a:rPr lang="en-US" sz="880" b="1" dirty="0">
+                <a:solidFill>
+                  <a:srgbClr val="FFFFFF"/>
+                </a:solidFill>
+                <a:latin typeface="Aptos" pitchFamily="34" charset="0"/>
+                <a:ea typeface="Aptos" pitchFamily="34" charset="-122"/>
+                <a:cs typeface="Aptos" pitchFamily="34" charset="-120"/>
+              </a:rPr>
+              <a:t>Listen</a:t>
+            </a:r>
+            <a:endParaRPr lang="en-US" sz="880" dirty="0"/>
+          </a:p>
+        </p:txBody>
+      </p:sp>
+      <p:sp>
+        <p:nvSpPr>
+          <p:cNvPr id="18" name="Shape 16"/>
+          <p:cNvSpPr/>
+          <p:nvPr/>
+        </p:nvSpPr>
+        <p:spPr>
+          <a:xfrm>
+            <a:off x="9817608" y="3399739"/>
+            <a:ext cx="164592" cy="0"/>
+          </a:xfrm>
+          <a:prstGeom prst="line">
+            <a:avLst/>
+          </a:prstGeom>
+          <a:noFill/>
+          <a:ln w="15240">
+            <a:solidFill>
+              <a:srgbClr val="8ABBD8"/>
+            </a:solidFill>
+            <a:prstDash val="solid"/>
+          </a:ln>
+        </p:spPr>
+      </p:sp>
+      <p:sp>
+        <p:nvSpPr>
+          <p:cNvPr id="19" name="Shape 17"/>
+          <p:cNvSpPr/>
+          <p:nvPr/>
+        </p:nvSpPr>
+        <p:spPr>
+          <a:xfrm>
+            <a:off x="8927592" y="3248863"/>
+            <a:ext cx="890016" cy="301752"/>
           </a:xfrm>
           <a:prstGeom prst="roundRect">
             <a:avLst>
-              <a:gd name="adj" fmla="val 9600"/>
+              <a:gd name="adj" fmla="val 24242"/>
+            </a:avLst>
+          </a:prstGeom>
+          <a:solidFill>
+            <a:srgbClr val="2F8A28"/>
+          </a:solidFill>
+          <a:ln w="12700">
+            <a:solidFill>
+              <a:srgbClr val="2F8A28"/>
+            </a:solidFill>
+            <a:prstDash val="solid"/>
+          </a:ln>
+        </p:spPr>
+      </p:sp>
+      <p:sp>
+        <p:nvSpPr>
+          <p:cNvPr id="20" name="Text 18"/>
+          <p:cNvSpPr/>
+          <p:nvPr/>
+        </p:nvSpPr>
+        <p:spPr>
+          <a:xfrm>
+            <a:off x="8964168" y="3322015"/>
+            <a:ext cx="816864" cy="146304"/>
+          </a:xfrm>
+          <a:prstGeom prst="rect">
+            <a:avLst/>
+          </a:prstGeom>
+          <a:noFill/>
+          <a:ln/>
+        </p:spPr>
+        <p:txBody>
+          <a:bodyPr wrap="square" lIns="0" tIns="0" rIns="0" bIns="0" rtlCol="0" anchor="ctr">
+            <a:normAutofit/>
+          </a:bodyPr>
+          <a:lstStyle/>
+          <a:p>
+            <a:pPr algn="ctr" indent="0" marL="0">
+              <a:buNone/>
+            </a:pPr>
+            <a:r>
+              <a:rPr lang="en-US" sz="880" b="1" dirty="0">
+                <a:solidFill>
+                  <a:srgbClr val="FFFFFF"/>
+                </a:solidFill>
+                <a:latin typeface="Aptos" pitchFamily="34" charset="0"/>
+                <a:ea typeface="Aptos" pitchFamily="34" charset="-122"/>
+                <a:cs typeface="Aptos" pitchFamily="34" charset="-120"/>
+              </a:rPr>
+              <a:t>Adapt</a:t>
+            </a:r>
+            <a:endParaRPr lang="en-US" sz="880" dirty="0"/>
+          </a:p>
+        </p:txBody>
+      </p:sp>
+      <p:sp>
+        <p:nvSpPr>
+          <p:cNvPr id="21" name="Shape 19"/>
+          <p:cNvSpPr/>
+          <p:nvPr/>
+        </p:nvSpPr>
+        <p:spPr>
+          <a:xfrm>
+            <a:off x="9982200" y="3248863"/>
+            <a:ext cx="890016" cy="301752"/>
+          </a:xfrm>
+          <a:prstGeom prst="roundRect">
+            <a:avLst>
+              <a:gd name="adj" fmla="val 24242"/>
+            </a:avLst>
+          </a:prstGeom>
+          <a:solidFill>
+            <a:srgbClr val="6A4CA3"/>
+          </a:solidFill>
+          <a:ln w="12700">
+            <a:solidFill>
+              <a:srgbClr val="6A4CA3"/>
+            </a:solidFill>
+            <a:prstDash val="solid"/>
+          </a:ln>
+        </p:spPr>
+      </p:sp>
+      <p:sp>
+        <p:nvSpPr>
+          <p:cNvPr id="22" name="Text 20"/>
+          <p:cNvSpPr/>
+          <p:nvPr/>
+        </p:nvSpPr>
+        <p:spPr>
+          <a:xfrm>
+            <a:off x="10018776" y="3322015"/>
+            <a:ext cx="816864" cy="146304"/>
+          </a:xfrm>
+          <a:prstGeom prst="rect">
+            <a:avLst/>
+          </a:prstGeom>
+          <a:noFill/>
+          <a:ln/>
+        </p:spPr>
+        <p:txBody>
+          <a:bodyPr wrap="square" lIns="0" tIns="0" rIns="0" bIns="0" rtlCol="0" anchor="ctr">
+            <a:normAutofit/>
+          </a:bodyPr>
+          <a:lstStyle/>
+          <a:p>
+            <a:pPr algn="ctr" indent="0" marL="0">
+              <a:buNone/>
+            </a:pPr>
+            <a:r>
+              <a:rPr lang="en-US" sz="880" b="1" dirty="0">
+                <a:solidFill>
+                  <a:srgbClr val="FFFFFF"/>
+                </a:solidFill>
+                <a:latin typeface="Aptos" pitchFamily="34" charset="0"/>
+                <a:ea typeface="Aptos" pitchFamily="34" charset="-122"/>
+                <a:cs typeface="Aptos" pitchFamily="34" charset="-120"/>
+              </a:rPr>
+              <a:t>Report</a:t>
+            </a:r>
+            <a:endParaRPr lang="en-US" sz="880" dirty="0"/>
+          </a:p>
+        </p:txBody>
+      </p:sp>
+      <p:sp>
+        <p:nvSpPr>
+          <p:cNvPr id="23" name="Text 21"/>
+          <p:cNvSpPr/>
+          <p:nvPr/>
+        </p:nvSpPr>
+        <p:spPr>
+          <a:xfrm>
+            <a:off x="7854696" y="3742639"/>
+            <a:ext cx="3035808" cy="158191"/>
+          </a:xfrm>
+          <a:prstGeom prst="rect">
+            <a:avLst/>
+          </a:prstGeom>
+          <a:noFill/>
+          <a:ln/>
+        </p:spPr>
+        <p:txBody>
+          <a:bodyPr wrap="square" lIns="254" tIns="254" rIns="254" bIns="254" rtlCol="0" anchor="t">
+            <a:normAutofit/>
+          </a:bodyPr>
+          <a:lstStyle/>
+          <a:p>
+            <a:pPr indent="0" marL="0">
+              <a:buNone/>
+            </a:pPr>
+            <a:r>
+              <a:rPr lang="en-US" sz="1120" dirty="0">
+                <a:solidFill>
+                  <a:srgbClr val="17364A"/>
+                </a:solidFill>
+                <a:latin typeface="Aptos" pitchFamily="34" charset="0"/>
+                <a:ea typeface="Aptos" pitchFamily="34" charset="-122"/>
+                <a:cs typeface="Aptos" pitchFamily="34" charset="-120"/>
+              </a:rPr>
+              <a:t>Communication and engagement are stronger when feedback changes the work and the department reports what.</a:t>
+            </a:r>
+            <a:endParaRPr lang="en-US" sz="1120" dirty="0"/>
+          </a:p>
+        </p:txBody>
+      </p:sp>
+      <p:sp>
+        <p:nvSpPr>
+          <p:cNvPr id="24" name="Shape 22"/>
+          <p:cNvSpPr/>
+          <p:nvPr/>
+        </p:nvSpPr>
+        <p:spPr>
+          <a:xfrm>
+            <a:off x="7635240" y="4184294"/>
+            <a:ext cx="3474720" cy="1466698"/>
+          </a:xfrm>
+          <a:prstGeom prst="roundRect">
+            <a:avLst>
+              <a:gd name="adj" fmla="val 7481"/>
             </a:avLst>
           </a:prstGeom>
           <a:solidFill>
@@ -16035,13 +16251,13 @@
       </p:sp>
       <p:sp>
         <p:nvSpPr>
-          <p:cNvPr id="17" name="Text 15"/>
-          <p:cNvSpPr/>
-          <p:nvPr/>
-        </p:nvSpPr>
-        <p:spPr>
-          <a:xfrm>
-            <a:off x="7799832" y="4645152"/>
+          <p:cNvPr id="25" name="Text 23"/>
+          <p:cNvSpPr/>
+          <p:nvPr/>
+        </p:nvSpPr>
+        <p:spPr>
+          <a:xfrm>
+            <a:off x="7799832" y="4330598"/>
             <a:ext cx="3145536" cy="256032"/>
           </a:xfrm>
           <a:prstGeom prst="rect">
@@ -16074,14 +16290,14 @@
       </p:sp>
       <p:sp>
         <p:nvSpPr>
-          <p:cNvPr id="18" name="Text 16"/>
-          <p:cNvSpPr/>
-          <p:nvPr/>
-        </p:nvSpPr>
-        <p:spPr>
-          <a:xfrm>
-            <a:off x="7799832" y="4974336"/>
-            <a:ext cx="3145536" cy="576072"/>
+          <p:cNvPr id="26" name="Text 24"/>
+          <p:cNvSpPr/>
+          <p:nvPr/>
+        </p:nvSpPr>
+        <p:spPr>
+          <a:xfrm>
+            <a:off x="7799832" y="4659782"/>
+            <a:ext cx="3145536" cy="899770"/>
           </a:xfrm>
           <a:prstGeom prst="rect">
             <a:avLst/>
@@ -16107,7 +16323,7 @@
                 <a:ea typeface="Aptos" pitchFamily="34" charset="-122"/>
                 <a:cs typeface="Aptos" pitchFamily="34" charset="-120"/>
               </a:rPr>
-              <a:t>Use the concept to plan transparent communication, gather stakeholder input, protect trust, and make sure affected.</a:t>
+              <a:t>Use the concept to plan transparent communication, gather stakeholder input, protect trust, and make sure affected communities are considered early.</a:t>
             </a:r>
             <a:endParaRPr lang="en-US" sz="1320" dirty="0"/>
           </a:p>
@@ -16476,11 +16692,11 @@
         <p:spPr>
           <a:xfrm>
             <a:off x="7635240" y="1325880"/>
-            <a:ext cx="3474720" cy="1325880"/>
+            <a:ext cx="3474720" cy="1207008"/>
           </a:xfrm>
           <a:prstGeom prst="roundRect">
             <a:avLst>
-              <a:gd name="adj" fmla="val 8276"/>
+              <a:gd name="adj" fmla="val 9091"/>
             </a:avLst>
           </a:prstGeom>
           <a:solidFill>
@@ -16542,7 +16758,7 @@
         <p:spPr>
           <a:xfrm>
             <a:off x="7799832" y="1801368"/>
-            <a:ext cx="3145536" cy="758952"/>
+            <a:ext cx="3145536" cy="640080"/>
           </a:xfrm>
           <a:prstGeom prst="rect">
             <a:avLst/>
@@ -16582,12 +16798,12 @@
         </p:nvSpPr>
         <p:spPr>
           <a:xfrm>
-            <a:off x="7635240" y="2788920"/>
-            <a:ext cx="3474720" cy="1536192"/>
+            <a:off x="7635240" y="2670048"/>
+            <a:ext cx="3474720" cy="1377086"/>
           </a:xfrm>
           <a:prstGeom prst="roundRect">
             <a:avLst>
-              <a:gd name="adj" fmla="val 7143"/>
+              <a:gd name="adj" fmla="val 7968"/>
             </a:avLst>
           </a:prstGeom>
           <a:solidFill>
@@ -16609,8 +16825,8 @@
         </p:nvSpPr>
         <p:spPr>
           <a:xfrm>
-            <a:off x="7799832" y="2935224"/>
-            <a:ext cx="3145536" cy="256032"/>
+            <a:off x="7799832" y="2798064"/>
+            <a:ext cx="3145536" cy="237744"/>
           </a:xfrm>
           <a:prstGeom prst="rect">
             <a:avLst/>
@@ -16626,7 +16842,7 @@
               <a:buNone/>
             </a:pPr>
             <a:r>
-              <a:rPr lang="en-US" sz="1300" b="1" dirty="0">
+              <a:rPr lang="en-US" sz="1250" b="1" dirty="0">
                 <a:solidFill>
                   <a:srgbClr val="0068B7"/>
                 </a:solidFill>
@@ -16634,101 +16850,317 @@
                 <a:ea typeface="Aptos" pitchFamily="34" charset="-122"/>
                 <a:cs typeface="Aptos" pitchFamily="34" charset="-120"/>
               </a:rPr>
-              <a:t>Concept checkpoints</a:t>
-            </a:r>
-            <a:endParaRPr lang="en-US" sz="1300" dirty="0"/>
-          </a:p>
-        </p:txBody>
-      </p:sp>
-      <p:sp>
-        <p:nvSpPr>
-          <p:cNvPr id="15" name="Text 13"/>
-          <p:cNvSpPr/>
-          <p:nvPr/>
-        </p:nvSpPr>
-        <p:spPr>
-          <a:xfrm>
-            <a:off x="7818120" y="3300984"/>
-            <a:ext cx="3090672" cy="877824"/>
-          </a:xfrm>
-          <a:prstGeom prst="rect">
-            <a:avLst/>
-          </a:prstGeom>
-          <a:noFill/>
-          <a:ln/>
-        </p:spPr>
-        <p:txBody>
-          <a:bodyPr wrap="square" lIns="508" tIns="508" rIns="508" bIns="508" rtlCol="0" anchor="t">
+              <a:t>Governance pathway</a:t>
+            </a:r>
+            <a:endParaRPr lang="en-US" sz="1250" dirty="0"/>
+          </a:p>
+        </p:txBody>
+      </p:sp>
+      <p:sp>
+        <p:nvSpPr>
+          <p:cNvPr id="15" name="Shape 13"/>
+          <p:cNvSpPr/>
+          <p:nvPr/>
+        </p:nvSpPr>
+        <p:spPr>
+          <a:xfrm>
+            <a:off x="8763000" y="3351276"/>
+            <a:ext cx="164592" cy="0"/>
+          </a:xfrm>
+          <a:prstGeom prst="line">
+            <a:avLst/>
+          </a:prstGeom>
+          <a:noFill/>
+          <a:ln w="15240">
+            <a:solidFill>
+              <a:srgbClr val="8ABBD8"/>
+            </a:solidFill>
+            <a:prstDash val="solid"/>
+          </a:ln>
+        </p:spPr>
+      </p:sp>
+      <p:sp>
+        <p:nvSpPr>
+          <p:cNvPr id="16" name="Shape 14"/>
+          <p:cNvSpPr/>
+          <p:nvPr/>
+        </p:nvSpPr>
+        <p:spPr>
+          <a:xfrm>
+            <a:off x="7872984" y="3200400"/>
+            <a:ext cx="890016" cy="301752"/>
+          </a:xfrm>
+          <a:prstGeom prst="roundRect">
+            <a:avLst>
+              <a:gd name="adj" fmla="val 24242"/>
+            </a:avLst>
+          </a:prstGeom>
+          <a:solidFill>
+            <a:srgbClr val="0068B7"/>
+          </a:solidFill>
+          <a:ln w="12700">
+            <a:solidFill>
+              <a:srgbClr val="0068B7"/>
+            </a:solidFill>
+            <a:prstDash val="solid"/>
+          </a:ln>
+        </p:spPr>
+      </p:sp>
+      <p:sp>
+        <p:nvSpPr>
+          <p:cNvPr id="17" name="Text 15"/>
+          <p:cNvSpPr/>
+          <p:nvPr/>
+        </p:nvSpPr>
+        <p:spPr>
+          <a:xfrm>
+            <a:off x="7909560" y="3273552"/>
+            <a:ext cx="816864" cy="146304"/>
+          </a:xfrm>
+          <a:prstGeom prst="rect">
+            <a:avLst/>
+          </a:prstGeom>
+          <a:noFill/>
+          <a:ln/>
+        </p:spPr>
+        <p:txBody>
+          <a:bodyPr wrap="square" lIns="0" tIns="0" rIns="0" bIns="0" rtlCol="0" anchor="ctr">
             <a:normAutofit/>
           </a:bodyPr>
           <a:lstStyle/>
           <a:p>
-            <a:pPr indent="0" marL="0">
-              <a:buNone/>
-            </a:pPr>
-            <a:r>
-              <a:rPr lang="en-US" sz="1220" dirty="0">
-                <a:solidFill>
-                  <a:srgbClr val="17364A"/>
-                </a:solidFill>
-                <a:latin typeface="Aptos" pitchFamily="34" charset="0"/>
-                <a:ea typeface="Aptos" pitchFamily="34" charset="-122"/>
-                <a:cs typeface="Aptos" pitchFamily="34" charset="-120"/>
-              </a:rPr>
-              <a:t>This national-level module is intended for training and planning.</a:t>
-            </a:r>
-            <a:endParaRPr lang="en-US" sz="1220" dirty="0"/>
-          </a:p>
-          <a:p>
-            <a:pPr indent="0" marL="0">
-              <a:buNone/>
-            </a:pPr>
-            <a:r>
-              <a:rPr lang="en-US" sz="1220" dirty="0">
-                <a:solidFill>
-                  <a:srgbClr val="17364A"/>
-                </a:solidFill>
-                <a:latin typeface="Aptos" pitchFamily="34" charset="0"/>
-                <a:ea typeface="Aptos" pitchFamily="34" charset="-122"/>
-                <a:cs typeface="Aptos" pitchFamily="34" charset="-120"/>
-              </a:rPr>
-              <a:t>It does not replace legal, privacy, procurement, civil rights,.</a:t>
-            </a:r>
-            <a:endParaRPr lang="en-US" sz="1220" dirty="0"/>
-          </a:p>
-          <a:p>
-            <a:pPr indent="0" marL="0">
-              <a:buNone/>
-            </a:pPr>
-            <a:r>
-              <a:rPr lang="en-US" sz="1220" dirty="0">
-                <a:solidFill>
-                  <a:srgbClr val="17364A"/>
-                </a:solidFill>
-                <a:latin typeface="Aptos" pitchFamily="34" charset="0"/>
-                <a:ea typeface="Aptos" pitchFamily="34" charset="-122"/>
-                <a:cs typeface="Aptos" pitchFamily="34" charset="-120"/>
-              </a:rPr>
-              <a:t>Learners should confirm applicable requirements in their own.</a:t>
-            </a:r>
-            <a:endParaRPr lang="en-US" sz="1220" dirty="0"/>
-          </a:p>
-        </p:txBody>
-      </p:sp>
-      <p:sp>
-        <p:nvSpPr>
-          <p:cNvPr id="16" name="Shape 14"/>
-          <p:cNvSpPr/>
-          <p:nvPr/>
-        </p:nvSpPr>
-        <p:spPr>
-          <a:xfrm>
-            <a:off x="7635240" y="4498848"/>
-            <a:ext cx="3474720" cy="1143000"/>
+            <a:pPr algn="ctr" indent="0" marL="0">
+              <a:buNone/>
+            </a:pPr>
+            <a:r>
+              <a:rPr lang="en-US" sz="880" b="1" dirty="0">
+                <a:solidFill>
+                  <a:srgbClr val="FFFFFF"/>
+                </a:solidFill>
+                <a:latin typeface="Aptos" pitchFamily="34" charset="0"/>
+                <a:ea typeface="Aptos" pitchFamily="34" charset="-122"/>
+                <a:cs typeface="Aptos" pitchFamily="34" charset="-120"/>
+              </a:rPr>
+              <a:t>Submit</a:t>
+            </a:r>
+            <a:endParaRPr lang="en-US" sz="880" dirty="0"/>
+          </a:p>
+        </p:txBody>
+      </p:sp>
+      <p:sp>
+        <p:nvSpPr>
+          <p:cNvPr id="18" name="Shape 16"/>
+          <p:cNvSpPr/>
+          <p:nvPr/>
+        </p:nvSpPr>
+        <p:spPr>
+          <a:xfrm>
+            <a:off x="9817608" y="3351276"/>
+            <a:ext cx="164592" cy="0"/>
+          </a:xfrm>
+          <a:prstGeom prst="line">
+            <a:avLst/>
+          </a:prstGeom>
+          <a:noFill/>
+          <a:ln w="15240">
+            <a:solidFill>
+              <a:srgbClr val="8ABBD8"/>
+            </a:solidFill>
+            <a:prstDash val="solid"/>
+          </a:ln>
+        </p:spPr>
+      </p:sp>
+      <p:sp>
+        <p:nvSpPr>
+          <p:cNvPr id="19" name="Shape 17"/>
+          <p:cNvSpPr/>
+          <p:nvPr/>
+        </p:nvSpPr>
+        <p:spPr>
+          <a:xfrm>
+            <a:off x="8927592" y="3200400"/>
+            <a:ext cx="890016" cy="301752"/>
           </a:xfrm>
           <a:prstGeom prst="roundRect">
             <a:avLst>
-              <a:gd name="adj" fmla="val 9600"/>
+              <a:gd name="adj" fmla="val 24242"/>
+            </a:avLst>
+          </a:prstGeom>
+          <a:solidFill>
+            <a:srgbClr val="2F8A28"/>
+          </a:solidFill>
+          <a:ln w="12700">
+            <a:solidFill>
+              <a:srgbClr val="2F8A28"/>
+            </a:solidFill>
+            <a:prstDash val="solid"/>
+          </a:ln>
+        </p:spPr>
+      </p:sp>
+      <p:sp>
+        <p:nvSpPr>
+          <p:cNvPr id="20" name="Text 18"/>
+          <p:cNvSpPr/>
+          <p:nvPr/>
+        </p:nvSpPr>
+        <p:spPr>
+          <a:xfrm>
+            <a:off x="8964168" y="3273552"/>
+            <a:ext cx="816864" cy="146304"/>
+          </a:xfrm>
+          <a:prstGeom prst="rect">
+            <a:avLst/>
+          </a:prstGeom>
+          <a:noFill/>
+          <a:ln/>
+        </p:spPr>
+        <p:txBody>
+          <a:bodyPr wrap="square" lIns="0" tIns="0" rIns="0" bIns="0" rtlCol="0" anchor="ctr">
+            <a:normAutofit/>
+          </a:bodyPr>
+          <a:lstStyle/>
+          <a:p>
+            <a:pPr algn="ctr" indent="0" marL="0">
+              <a:buNone/>
+            </a:pPr>
+            <a:r>
+              <a:rPr lang="en-US" sz="880" b="1" dirty="0">
+                <a:solidFill>
+                  <a:srgbClr val="FFFFFF"/>
+                </a:solidFill>
+                <a:latin typeface="Aptos" pitchFamily="34" charset="0"/>
+                <a:ea typeface="Aptos" pitchFamily="34" charset="-122"/>
+                <a:cs typeface="Aptos" pitchFamily="34" charset="-120"/>
+              </a:rPr>
+              <a:t>Review</a:t>
+            </a:r>
+            <a:endParaRPr lang="en-US" sz="880" dirty="0"/>
+          </a:p>
+        </p:txBody>
+      </p:sp>
+      <p:sp>
+        <p:nvSpPr>
+          <p:cNvPr id="21" name="Shape 19"/>
+          <p:cNvSpPr/>
+          <p:nvPr/>
+        </p:nvSpPr>
+        <p:spPr>
+          <a:xfrm>
+            <a:off x="9982200" y="3200400"/>
+            <a:ext cx="890016" cy="301752"/>
+          </a:xfrm>
+          <a:prstGeom prst="roundRect">
+            <a:avLst>
+              <a:gd name="adj" fmla="val 24242"/>
+            </a:avLst>
+          </a:prstGeom>
+          <a:solidFill>
+            <a:srgbClr val="6A4CA3"/>
+          </a:solidFill>
+          <a:ln w="12700">
+            <a:solidFill>
+              <a:srgbClr val="6A4CA3"/>
+            </a:solidFill>
+            <a:prstDash val="solid"/>
+          </a:ln>
+        </p:spPr>
+      </p:sp>
+      <p:sp>
+        <p:nvSpPr>
+          <p:cNvPr id="22" name="Text 20"/>
+          <p:cNvSpPr/>
+          <p:nvPr/>
+        </p:nvSpPr>
+        <p:spPr>
+          <a:xfrm>
+            <a:off x="10018776" y="3273552"/>
+            <a:ext cx="816864" cy="146304"/>
+          </a:xfrm>
+          <a:prstGeom prst="rect">
+            <a:avLst/>
+          </a:prstGeom>
+          <a:noFill/>
+          <a:ln/>
+        </p:spPr>
+        <p:txBody>
+          <a:bodyPr wrap="square" lIns="0" tIns="0" rIns="0" bIns="0" rtlCol="0" anchor="ctr">
+            <a:normAutofit/>
+          </a:bodyPr>
+          <a:lstStyle/>
+          <a:p>
+            <a:pPr algn="ctr" indent="0" marL="0">
+              <a:buNone/>
+            </a:pPr>
+            <a:r>
+              <a:rPr lang="en-US" sz="880" b="1" dirty="0">
+                <a:solidFill>
+                  <a:srgbClr val="FFFFFF"/>
+                </a:solidFill>
+                <a:latin typeface="Aptos" pitchFamily="34" charset="0"/>
+                <a:ea typeface="Aptos" pitchFamily="34" charset="-122"/>
+                <a:cs typeface="Aptos" pitchFamily="34" charset="-120"/>
+              </a:rPr>
+              <a:t>Oversee</a:t>
+            </a:r>
+            <a:endParaRPr lang="en-US" sz="880" dirty="0"/>
+          </a:p>
+        </p:txBody>
+      </p:sp>
+      <p:sp>
+        <p:nvSpPr>
+          <p:cNvPr id="23" name="Text 21"/>
+          <p:cNvSpPr/>
+          <p:nvPr/>
+        </p:nvSpPr>
+        <p:spPr>
+          <a:xfrm>
+            <a:off x="7854696" y="3694176"/>
+            <a:ext cx="3035808" cy="206654"/>
+          </a:xfrm>
+          <a:prstGeom prst="rect">
+            <a:avLst/>
+          </a:prstGeom>
+          <a:noFill/>
+          <a:ln/>
+        </p:spPr>
+        <p:txBody>
+          <a:bodyPr wrap="square" lIns="254" tIns="254" rIns="254" bIns="254" rtlCol="0" anchor="t">
+            <a:normAutofit/>
+          </a:bodyPr>
+          <a:lstStyle/>
+          <a:p>
+            <a:pPr indent="0" marL="0">
+              <a:buNone/>
+            </a:pPr>
+            <a:r>
+              <a:rPr lang="en-US" sz="1120" dirty="0">
+                <a:solidFill>
+                  <a:srgbClr val="17364A"/>
+                </a:solidFill>
+                <a:latin typeface="Aptos" pitchFamily="34" charset="0"/>
+                <a:ea typeface="Aptos" pitchFamily="34" charset="-122"/>
+                <a:cs typeface="Aptos" pitchFamily="34" charset="-120"/>
+              </a:rPr>
+              <a:t>A proposed AI use should move through documented review before it becomes an operational workflow.</a:t>
+            </a:r>
+            <a:endParaRPr lang="en-US" sz="1120" dirty="0"/>
+          </a:p>
+        </p:txBody>
+      </p:sp>
+      <p:sp>
+        <p:nvSpPr>
+          <p:cNvPr id="24" name="Shape 22"/>
+          <p:cNvSpPr/>
+          <p:nvPr/>
+        </p:nvSpPr>
+        <p:spPr>
+          <a:xfrm>
+            <a:off x="7635240" y="4184294"/>
+            <a:ext cx="3474720" cy="1466698"/>
+          </a:xfrm>
+          <a:prstGeom prst="roundRect">
+            <a:avLst>
+              <a:gd name="adj" fmla="val 7481"/>
             </a:avLst>
           </a:prstGeom>
           <a:solidFill>
@@ -16744,13 +17176,13 @@
       </p:sp>
       <p:sp>
         <p:nvSpPr>
-          <p:cNvPr id="17" name="Text 15"/>
-          <p:cNvSpPr/>
-          <p:nvPr/>
-        </p:nvSpPr>
-        <p:spPr>
-          <a:xfrm>
-            <a:off x="7799832" y="4645152"/>
+          <p:cNvPr id="25" name="Text 23"/>
+          <p:cNvSpPr/>
+          <p:nvPr/>
+        </p:nvSpPr>
+        <p:spPr>
+          <a:xfrm>
+            <a:off x="7799832" y="4330598"/>
             <a:ext cx="3145536" cy="256032"/>
           </a:xfrm>
           <a:prstGeom prst="rect">
@@ -16783,14 +17215,14 @@
       </p:sp>
       <p:sp>
         <p:nvSpPr>
-          <p:cNvPr id="18" name="Text 16"/>
-          <p:cNvSpPr/>
-          <p:nvPr/>
-        </p:nvSpPr>
-        <p:spPr>
-          <a:xfrm>
-            <a:off x="7799832" y="4974336"/>
-            <a:ext cx="3145536" cy="576072"/>
+          <p:cNvPr id="26" name="Text 24"/>
+          <p:cNvSpPr/>
+          <p:nvPr/>
+        </p:nvSpPr>
+        <p:spPr>
+          <a:xfrm>
+            <a:off x="7799832" y="4659782"/>
+            <a:ext cx="3145536" cy="899770"/>
           </a:xfrm>
           <a:prstGeom prst="rect">
             <a:avLst/>
@@ -16816,7 +17248,7 @@
                 <a:ea typeface="Aptos" pitchFamily="34" charset="-122"/>
                 <a:cs typeface="Aptos" pitchFamily="34" charset="-120"/>
               </a:rPr>
-              <a:t>Translate this concept into clear decision rights, review steps, documentation expectations, and escalation paths before.</a:t>
+              <a:t>Translate this concept into clear decision rights, review steps, documentation expectations, and escalation paths before an AI-supported workflow is approved.</a:t>
             </a:r>
             <a:endParaRPr lang="en-US" sz="1320" dirty="0"/>
           </a:p>
@@ -17168,11 +17600,11 @@
         <p:spPr>
           <a:xfrm>
             <a:off x="7635240" y="1325880"/>
-            <a:ext cx="3474720" cy="1325880"/>
+            <a:ext cx="3474720" cy="1255471"/>
           </a:xfrm>
           <a:prstGeom prst="roundRect">
             <a:avLst>
-              <a:gd name="adj" fmla="val 8276"/>
+              <a:gd name="adj" fmla="val 8740"/>
             </a:avLst>
           </a:prstGeom>
           <a:solidFill>
@@ -17234,7 +17666,7 @@
         <p:spPr>
           <a:xfrm>
             <a:off x="7799832" y="1801368"/>
-            <a:ext cx="3145536" cy="758952"/>
+            <a:ext cx="3145536" cy="688543"/>
           </a:xfrm>
           <a:prstGeom prst="rect">
             <a:avLst/>
@@ -17274,12 +17706,12 @@
         </p:nvSpPr>
         <p:spPr>
           <a:xfrm>
-            <a:off x="7635240" y="2788920"/>
-            <a:ext cx="3474720" cy="1536192"/>
+            <a:off x="7635240" y="2718511"/>
+            <a:ext cx="3474720" cy="1328623"/>
           </a:xfrm>
           <a:prstGeom prst="roundRect">
             <a:avLst>
-              <a:gd name="adj" fmla="val 7143"/>
+              <a:gd name="adj" fmla="val 8259"/>
             </a:avLst>
           </a:prstGeom>
           <a:solidFill>
@@ -17301,7 +17733,7 @@
         </p:nvSpPr>
         <p:spPr>
           <a:xfrm>
-            <a:off x="7799832" y="2935224"/>
+            <a:off x="7799832" y="2864815"/>
             <a:ext cx="3145536" cy="256032"/>
           </a:xfrm>
           <a:prstGeom prst="rect">
@@ -17340,8 +17772,8 @@
         </p:nvSpPr>
         <p:spPr>
           <a:xfrm>
-            <a:off x="7818120" y="3300984"/>
-            <a:ext cx="3090672" cy="877824"/>
+            <a:off x="7818120" y="3230575"/>
+            <a:ext cx="3090672" cy="670255"/>
           </a:xfrm>
           <a:prstGeom prst="rect">
             <a:avLst/>
@@ -17398,12 +17830,12 @@
         </p:nvSpPr>
         <p:spPr>
           <a:xfrm>
-            <a:off x="7635240" y="4498848"/>
-            <a:ext cx="3474720" cy="1143000"/>
+            <a:off x="7635240" y="4184294"/>
+            <a:ext cx="3474720" cy="1466698"/>
           </a:xfrm>
           <a:prstGeom prst="roundRect">
             <a:avLst>
-              <a:gd name="adj" fmla="val 9600"/>
+              <a:gd name="adj" fmla="val 7481"/>
             </a:avLst>
           </a:prstGeom>
           <a:solidFill>
@@ -17425,7 +17857,7 @@
         </p:nvSpPr>
         <p:spPr>
           <a:xfrm>
-            <a:off x="7799832" y="4645152"/>
+            <a:off x="7799832" y="4330598"/>
             <a:ext cx="3145536" cy="256032"/>
           </a:xfrm>
           <a:prstGeom prst="rect">
@@ -17464,8 +17896,8 @@
         </p:nvSpPr>
         <p:spPr>
           <a:xfrm>
-            <a:off x="7799832" y="4974336"/>
-            <a:ext cx="3145536" cy="576072"/>
+            <a:off x="7799832" y="4659782"/>
+            <a:ext cx="3145536" cy="899770"/>
           </a:xfrm>
           <a:prstGeom prst="rect">
             <a:avLst/>
@@ -17491,7 +17923,7 @@
                 <a:ea typeface="Aptos" pitchFamily="34" charset="-122"/>
                 <a:cs typeface="Aptos" pitchFamily="34" charset="-120"/>
               </a:rPr>
-              <a:t>Use the concept to plan transparent communication, gather stakeholder input, protect trust, and make sure affected.</a:t>
+              <a:t>Use the concept to plan transparent communication, gather stakeholder input, protect trust, and make sure affected communities are considered early.</a:t>
             </a:r>
             <a:endParaRPr lang="en-US" sz="1320" dirty="0"/>
           </a:p>
@@ -17860,11 +18292,11 @@
         <p:spPr>
           <a:xfrm>
             <a:off x="7635240" y="1325880"/>
-            <a:ext cx="3474720" cy="1325880"/>
+            <a:ext cx="3474720" cy="1207008"/>
           </a:xfrm>
           <a:prstGeom prst="roundRect">
             <a:avLst>
-              <a:gd name="adj" fmla="val 8276"/>
+              <a:gd name="adj" fmla="val 9091"/>
             </a:avLst>
           </a:prstGeom>
           <a:solidFill>
@@ -17926,7 +18358,7 @@
         <p:spPr>
           <a:xfrm>
             <a:off x="7799832" y="1801368"/>
-            <a:ext cx="3145536" cy="758952"/>
+            <a:ext cx="3145536" cy="640080"/>
           </a:xfrm>
           <a:prstGeom prst="rect">
             <a:avLst/>
@@ -17966,12 +18398,12 @@
         </p:nvSpPr>
         <p:spPr>
           <a:xfrm>
-            <a:off x="7635240" y="2788920"/>
-            <a:ext cx="3474720" cy="1536192"/>
+            <a:off x="7635240" y="2670048"/>
+            <a:ext cx="3474720" cy="1377086"/>
           </a:xfrm>
           <a:prstGeom prst="roundRect">
             <a:avLst>
-              <a:gd name="adj" fmla="val 7143"/>
+              <a:gd name="adj" fmla="val 7968"/>
             </a:avLst>
           </a:prstGeom>
           <a:solidFill>
@@ -17993,8 +18425,8 @@
         </p:nvSpPr>
         <p:spPr>
           <a:xfrm>
-            <a:off x="7799832" y="2935224"/>
-            <a:ext cx="3145536" cy="256032"/>
+            <a:off x="7799832" y="2798064"/>
+            <a:ext cx="3145536" cy="237744"/>
           </a:xfrm>
           <a:prstGeom prst="rect">
             <a:avLst/>
@@ -18010,7 +18442,7 @@
               <a:buNone/>
             </a:pPr>
             <a:r>
-              <a:rPr lang="en-US" sz="1300" b="1" dirty="0">
+              <a:rPr lang="en-US" sz="1250" b="1" dirty="0">
                 <a:solidFill>
                   <a:srgbClr val="0068B7"/>
                 </a:solidFill>
@@ -18018,101 +18450,317 @@
                 <a:ea typeface="Aptos" pitchFamily="34" charset="-122"/>
                 <a:cs typeface="Aptos" pitchFamily="34" charset="-120"/>
               </a:rPr>
-              <a:t>Concept checkpoints</a:t>
-            </a:r>
-            <a:endParaRPr lang="en-US" sz="1300" dirty="0"/>
-          </a:p>
-        </p:txBody>
-      </p:sp>
-      <p:sp>
-        <p:nvSpPr>
-          <p:cNvPr id="15" name="Text 13"/>
-          <p:cNvSpPr/>
-          <p:nvPr/>
-        </p:nvSpPr>
-        <p:spPr>
-          <a:xfrm>
-            <a:off x="7818120" y="3300984"/>
-            <a:ext cx="3090672" cy="877824"/>
-          </a:xfrm>
-          <a:prstGeom prst="rect">
-            <a:avLst/>
-          </a:prstGeom>
-          <a:noFill/>
-          <a:ln/>
-        </p:spPr>
-        <p:txBody>
-          <a:bodyPr wrap="square" lIns="508" tIns="508" rIns="508" bIns="508" rtlCol="0" anchor="t">
+              <a:t>Trust cycle</a:t>
+            </a:r>
+            <a:endParaRPr lang="en-US" sz="1250" dirty="0"/>
+          </a:p>
+        </p:txBody>
+      </p:sp>
+      <p:sp>
+        <p:nvSpPr>
+          <p:cNvPr id="15" name="Shape 13"/>
+          <p:cNvSpPr/>
+          <p:nvPr/>
+        </p:nvSpPr>
+        <p:spPr>
+          <a:xfrm>
+            <a:off x="8763000" y="3351276"/>
+            <a:ext cx="164592" cy="0"/>
+          </a:xfrm>
+          <a:prstGeom prst="line">
+            <a:avLst/>
+          </a:prstGeom>
+          <a:noFill/>
+          <a:ln w="15240">
+            <a:solidFill>
+              <a:srgbClr val="8ABBD8"/>
+            </a:solidFill>
+            <a:prstDash val="solid"/>
+          </a:ln>
+        </p:spPr>
+      </p:sp>
+      <p:sp>
+        <p:nvSpPr>
+          <p:cNvPr id="16" name="Shape 14"/>
+          <p:cNvSpPr/>
+          <p:nvPr/>
+        </p:nvSpPr>
+        <p:spPr>
+          <a:xfrm>
+            <a:off x="7872984" y="3200400"/>
+            <a:ext cx="890016" cy="301752"/>
+          </a:xfrm>
+          <a:prstGeom prst="roundRect">
+            <a:avLst>
+              <a:gd name="adj" fmla="val 24242"/>
+            </a:avLst>
+          </a:prstGeom>
+          <a:solidFill>
+            <a:srgbClr val="0068B7"/>
+          </a:solidFill>
+          <a:ln w="12700">
+            <a:solidFill>
+              <a:srgbClr val="0068B7"/>
+            </a:solidFill>
+            <a:prstDash val="solid"/>
+          </a:ln>
+        </p:spPr>
+      </p:sp>
+      <p:sp>
+        <p:nvSpPr>
+          <p:cNvPr id="17" name="Text 15"/>
+          <p:cNvSpPr/>
+          <p:nvPr/>
+        </p:nvSpPr>
+        <p:spPr>
+          <a:xfrm>
+            <a:off x="7909560" y="3273552"/>
+            <a:ext cx="816864" cy="146304"/>
+          </a:xfrm>
+          <a:prstGeom prst="rect">
+            <a:avLst/>
+          </a:prstGeom>
+          <a:noFill/>
+          <a:ln/>
+        </p:spPr>
+        <p:txBody>
+          <a:bodyPr wrap="square" lIns="0" tIns="0" rIns="0" bIns="0" rtlCol="0" anchor="ctr">
             <a:normAutofit/>
           </a:bodyPr>
           <a:lstStyle/>
           <a:p>
-            <a:pPr indent="0" marL="0">
-              <a:buNone/>
-            </a:pPr>
-            <a:r>
-              <a:rPr lang="en-US" sz="1220" dirty="0">
-                <a:solidFill>
-                  <a:srgbClr val="17364A"/>
-                </a:solidFill>
-                <a:latin typeface="Aptos" pitchFamily="34" charset="0"/>
-                <a:ea typeface="Aptos" pitchFamily="34" charset="-122"/>
-                <a:cs typeface="Aptos" pitchFamily="34" charset="-120"/>
-              </a:rPr>
-              <a:t>It can generate first drafts, propose alternative tones, simplify.</a:t>
-            </a:r>
-            <a:endParaRPr lang="en-US" sz="1220" dirty="0"/>
-          </a:p>
-          <a:p>
-            <a:pPr indent="0" marL="0">
-              <a:buNone/>
-            </a:pPr>
-            <a:r>
-              <a:rPr lang="en-US" sz="1220" dirty="0">
-                <a:solidFill>
-                  <a:srgbClr val="17364A"/>
-                </a:solidFill>
-                <a:latin typeface="Aptos" pitchFamily="34" charset="0"/>
-                <a:ea typeface="Aptos" pitchFamily="34" charset="-122"/>
-                <a:cs typeface="Aptos" pitchFamily="34" charset="-120"/>
-              </a:rPr>
-              <a:t>However, AI should not be treated as the authority on public.</a:t>
-            </a:r>
-            <a:endParaRPr lang="en-US" sz="1220" dirty="0"/>
-          </a:p>
-          <a:p>
-            <a:pPr indent="0" marL="0">
-              <a:buNone/>
-            </a:pPr>
-            <a:r>
-              <a:rPr lang="en-US" sz="1220" dirty="0">
-                <a:solidFill>
-                  <a:srgbClr val="17364A"/>
-                </a:solidFill>
-                <a:latin typeface="Aptos" pitchFamily="34" charset="0"/>
-                <a:ea typeface="Aptos" pitchFamily="34" charset="-122"/>
-                <a:cs typeface="Aptos" pitchFamily="34" charset="-120"/>
-              </a:rPr>
-              <a:t>The approved evidence base should come from agency guidance,.</a:t>
-            </a:r>
-            <a:endParaRPr lang="en-US" sz="1220" dirty="0"/>
-          </a:p>
-        </p:txBody>
-      </p:sp>
-      <p:sp>
-        <p:nvSpPr>
-          <p:cNvPr id="16" name="Shape 14"/>
-          <p:cNvSpPr/>
-          <p:nvPr/>
-        </p:nvSpPr>
-        <p:spPr>
-          <a:xfrm>
-            <a:off x="7635240" y="4498848"/>
-            <a:ext cx="3474720" cy="1143000"/>
+            <a:pPr algn="ctr" indent="0" marL="0">
+              <a:buNone/>
+            </a:pPr>
+            <a:r>
+              <a:rPr lang="en-US" sz="880" b="1" dirty="0">
+                <a:solidFill>
+                  <a:srgbClr val="FFFFFF"/>
+                </a:solidFill>
+                <a:latin typeface="Aptos" pitchFamily="34" charset="0"/>
+                <a:ea typeface="Aptos" pitchFamily="34" charset="-122"/>
+                <a:cs typeface="Aptos" pitchFamily="34" charset="-120"/>
+              </a:rPr>
+              <a:t>Listen</a:t>
+            </a:r>
+            <a:endParaRPr lang="en-US" sz="880" dirty="0"/>
+          </a:p>
+        </p:txBody>
+      </p:sp>
+      <p:sp>
+        <p:nvSpPr>
+          <p:cNvPr id="18" name="Shape 16"/>
+          <p:cNvSpPr/>
+          <p:nvPr/>
+        </p:nvSpPr>
+        <p:spPr>
+          <a:xfrm>
+            <a:off x="9817608" y="3351276"/>
+            <a:ext cx="164592" cy="0"/>
+          </a:xfrm>
+          <a:prstGeom prst="line">
+            <a:avLst/>
+          </a:prstGeom>
+          <a:noFill/>
+          <a:ln w="15240">
+            <a:solidFill>
+              <a:srgbClr val="8ABBD8"/>
+            </a:solidFill>
+            <a:prstDash val="solid"/>
+          </a:ln>
+        </p:spPr>
+      </p:sp>
+      <p:sp>
+        <p:nvSpPr>
+          <p:cNvPr id="19" name="Shape 17"/>
+          <p:cNvSpPr/>
+          <p:nvPr/>
+        </p:nvSpPr>
+        <p:spPr>
+          <a:xfrm>
+            <a:off x="8927592" y="3200400"/>
+            <a:ext cx="890016" cy="301752"/>
           </a:xfrm>
           <a:prstGeom prst="roundRect">
             <a:avLst>
-              <a:gd name="adj" fmla="val 9600"/>
+              <a:gd name="adj" fmla="val 24242"/>
+            </a:avLst>
+          </a:prstGeom>
+          <a:solidFill>
+            <a:srgbClr val="2F8A28"/>
+          </a:solidFill>
+          <a:ln w="12700">
+            <a:solidFill>
+              <a:srgbClr val="2F8A28"/>
+            </a:solidFill>
+            <a:prstDash val="solid"/>
+          </a:ln>
+        </p:spPr>
+      </p:sp>
+      <p:sp>
+        <p:nvSpPr>
+          <p:cNvPr id="20" name="Text 18"/>
+          <p:cNvSpPr/>
+          <p:nvPr/>
+        </p:nvSpPr>
+        <p:spPr>
+          <a:xfrm>
+            <a:off x="8964168" y="3273552"/>
+            <a:ext cx="816864" cy="146304"/>
+          </a:xfrm>
+          <a:prstGeom prst="rect">
+            <a:avLst/>
+          </a:prstGeom>
+          <a:noFill/>
+          <a:ln/>
+        </p:spPr>
+        <p:txBody>
+          <a:bodyPr wrap="square" lIns="0" tIns="0" rIns="0" bIns="0" rtlCol="0" anchor="ctr">
+            <a:normAutofit/>
+          </a:bodyPr>
+          <a:lstStyle/>
+          <a:p>
+            <a:pPr algn="ctr" indent="0" marL="0">
+              <a:buNone/>
+            </a:pPr>
+            <a:r>
+              <a:rPr lang="en-US" sz="880" b="1" dirty="0">
+                <a:solidFill>
+                  <a:srgbClr val="FFFFFF"/>
+                </a:solidFill>
+                <a:latin typeface="Aptos" pitchFamily="34" charset="0"/>
+                <a:ea typeface="Aptos" pitchFamily="34" charset="-122"/>
+                <a:cs typeface="Aptos" pitchFamily="34" charset="-120"/>
+              </a:rPr>
+              <a:t>Adapt</a:t>
+            </a:r>
+            <a:endParaRPr lang="en-US" sz="880" dirty="0"/>
+          </a:p>
+        </p:txBody>
+      </p:sp>
+      <p:sp>
+        <p:nvSpPr>
+          <p:cNvPr id="21" name="Shape 19"/>
+          <p:cNvSpPr/>
+          <p:nvPr/>
+        </p:nvSpPr>
+        <p:spPr>
+          <a:xfrm>
+            <a:off x="9982200" y="3200400"/>
+            <a:ext cx="890016" cy="301752"/>
+          </a:xfrm>
+          <a:prstGeom prst="roundRect">
+            <a:avLst>
+              <a:gd name="adj" fmla="val 24242"/>
+            </a:avLst>
+          </a:prstGeom>
+          <a:solidFill>
+            <a:srgbClr val="6A4CA3"/>
+          </a:solidFill>
+          <a:ln w="12700">
+            <a:solidFill>
+              <a:srgbClr val="6A4CA3"/>
+            </a:solidFill>
+            <a:prstDash val="solid"/>
+          </a:ln>
+        </p:spPr>
+      </p:sp>
+      <p:sp>
+        <p:nvSpPr>
+          <p:cNvPr id="22" name="Text 20"/>
+          <p:cNvSpPr/>
+          <p:nvPr/>
+        </p:nvSpPr>
+        <p:spPr>
+          <a:xfrm>
+            <a:off x="10018776" y="3273552"/>
+            <a:ext cx="816864" cy="146304"/>
+          </a:xfrm>
+          <a:prstGeom prst="rect">
+            <a:avLst/>
+          </a:prstGeom>
+          <a:noFill/>
+          <a:ln/>
+        </p:spPr>
+        <p:txBody>
+          <a:bodyPr wrap="square" lIns="0" tIns="0" rIns="0" bIns="0" rtlCol="0" anchor="ctr">
+            <a:normAutofit/>
+          </a:bodyPr>
+          <a:lstStyle/>
+          <a:p>
+            <a:pPr algn="ctr" indent="0" marL="0">
+              <a:buNone/>
+            </a:pPr>
+            <a:r>
+              <a:rPr lang="en-US" sz="880" b="1" dirty="0">
+                <a:solidFill>
+                  <a:srgbClr val="FFFFFF"/>
+                </a:solidFill>
+                <a:latin typeface="Aptos" pitchFamily="34" charset="0"/>
+                <a:ea typeface="Aptos" pitchFamily="34" charset="-122"/>
+                <a:cs typeface="Aptos" pitchFamily="34" charset="-120"/>
+              </a:rPr>
+              <a:t>Report</a:t>
+            </a:r>
+            <a:endParaRPr lang="en-US" sz="880" dirty="0"/>
+          </a:p>
+        </p:txBody>
+      </p:sp>
+      <p:sp>
+        <p:nvSpPr>
+          <p:cNvPr id="23" name="Text 21"/>
+          <p:cNvSpPr/>
+          <p:nvPr/>
+        </p:nvSpPr>
+        <p:spPr>
+          <a:xfrm>
+            <a:off x="7854696" y="3694176"/>
+            <a:ext cx="3035808" cy="206654"/>
+          </a:xfrm>
+          <a:prstGeom prst="rect">
+            <a:avLst/>
+          </a:prstGeom>
+          <a:noFill/>
+          <a:ln/>
+        </p:spPr>
+        <p:txBody>
+          <a:bodyPr wrap="square" lIns="254" tIns="254" rIns="254" bIns="254" rtlCol="0" anchor="t">
+            <a:normAutofit/>
+          </a:bodyPr>
+          <a:lstStyle/>
+          <a:p>
+            <a:pPr indent="0" marL="0">
+              <a:buNone/>
+            </a:pPr>
+            <a:r>
+              <a:rPr lang="en-US" sz="1120" dirty="0">
+                <a:solidFill>
+                  <a:srgbClr val="17364A"/>
+                </a:solidFill>
+                <a:latin typeface="Aptos" pitchFamily="34" charset="0"/>
+                <a:ea typeface="Aptos" pitchFamily="34" charset="-122"/>
+                <a:cs typeface="Aptos" pitchFamily="34" charset="-120"/>
+              </a:rPr>
+              <a:t>Communication and engagement are stronger when feedback changes the work and the department reports what.</a:t>
+            </a:r>
+            <a:endParaRPr lang="en-US" sz="1120" dirty="0"/>
+          </a:p>
+        </p:txBody>
+      </p:sp>
+      <p:sp>
+        <p:nvSpPr>
+          <p:cNvPr id="24" name="Shape 22"/>
+          <p:cNvSpPr/>
+          <p:nvPr/>
+        </p:nvSpPr>
+        <p:spPr>
+          <a:xfrm>
+            <a:off x="7635240" y="4184294"/>
+            <a:ext cx="3474720" cy="1466698"/>
+          </a:xfrm>
+          <a:prstGeom prst="roundRect">
+            <a:avLst>
+              <a:gd name="adj" fmla="val 7481"/>
             </a:avLst>
           </a:prstGeom>
           <a:solidFill>
@@ -18128,13 +18776,13 @@
       </p:sp>
       <p:sp>
         <p:nvSpPr>
-          <p:cNvPr id="17" name="Text 15"/>
-          <p:cNvSpPr/>
-          <p:nvPr/>
-        </p:nvSpPr>
-        <p:spPr>
-          <a:xfrm>
-            <a:off x="7799832" y="4645152"/>
+          <p:cNvPr id="25" name="Text 23"/>
+          <p:cNvSpPr/>
+          <p:nvPr/>
+        </p:nvSpPr>
+        <p:spPr>
+          <a:xfrm>
+            <a:off x="7799832" y="4330598"/>
             <a:ext cx="3145536" cy="256032"/>
           </a:xfrm>
           <a:prstGeom prst="rect">
@@ -18167,14 +18815,14 @@
       </p:sp>
       <p:sp>
         <p:nvSpPr>
-          <p:cNvPr id="18" name="Text 16"/>
-          <p:cNvSpPr/>
-          <p:nvPr/>
-        </p:nvSpPr>
-        <p:spPr>
-          <a:xfrm>
-            <a:off x="7799832" y="4974336"/>
-            <a:ext cx="3145536" cy="576072"/>
+          <p:cNvPr id="26" name="Text 24"/>
+          <p:cNvSpPr/>
+          <p:nvPr/>
+        </p:nvSpPr>
+        <p:spPr>
+          <a:xfrm>
+            <a:off x="7799832" y="4659782"/>
+            <a:ext cx="3145536" cy="899770"/>
           </a:xfrm>
           <a:prstGeom prst="rect">
             <a:avLst/>
@@ -18200,7 +18848,7 @@
                 <a:ea typeface="Aptos" pitchFamily="34" charset="-122"/>
                 <a:cs typeface="Aptos" pitchFamily="34" charset="-120"/>
               </a:rPr>
-              <a:t>Use the concept to plan transparent communication, gather stakeholder input, protect trust, and make sure affected.</a:t>
+              <a:t>Use the concept to plan transparent communication, gather stakeholder input, protect trust, and make sure affected communities are considered early.</a:t>
             </a:r>
             <a:endParaRPr lang="en-US" sz="1320" dirty="0"/>
           </a:p>

--- a/downloads/presentations/modules/com-200.pptx
+++ b/downloads/presentations/modules/com-200.pptx
@@ -3437,8 +3437,8 @@
         </p:nvSpPr>
         <p:spPr>
           <a:xfrm>
-            <a:off x="868680" y="1508760"/>
-            <a:ext cx="6309360" cy="4160520"/>
+            <a:off x="822960" y="1463040"/>
+            <a:ext cx="6565392" cy="4343400"/>
           </a:xfrm>
           <a:prstGeom prst="rect">
             <a:avLst/>
@@ -3456,7 +3456,7 @@
               <a:buNone/>
             </a:pPr>
             <a:r>
-              <a:rPr lang="en-US" sz="2100" dirty="0">
+              <a:rPr lang="en-US" sz="1920" dirty="0">
                 <a:solidFill>
                   <a:srgbClr val="003A63"/>
                 </a:solidFill>
@@ -3466,14 +3466,14 @@
               </a:rPr>
               <a:t>• AI can also support review, but it should not replace reviewers.</a:t>
             </a:r>
-            <a:endParaRPr lang="en-US" sz="2100" dirty="0"/>
-          </a:p>
-          <a:p>
-            <a:pPr indent="0" marL="0">
-              <a:buNone/>
-            </a:pPr>
-            <a:r>
-              <a:rPr lang="en-US" sz="2100" dirty="0">
+            <a:endParaRPr lang="en-US" sz="1920" dirty="0"/>
+          </a:p>
+          <a:p>
+            <a:pPr indent="0" marL="0">
+              <a:buNone/>
+            </a:pPr>
+            <a:r>
+              <a:rPr lang="en-US" sz="1920" dirty="0">
                 <a:solidFill>
                   <a:srgbClr val="003A63"/>
                 </a:solidFill>
@@ -3481,16 +3481,16 @@
                 <a:ea typeface="Aptos" pitchFamily="34" charset="-122"/>
                 <a:cs typeface="Aptos" pitchFamily="34" charset="-120"/>
               </a:rPr>
-              <a:t>• A communications workflow should define who checks technical accuracy, who reviews equity and.</a:t>
-            </a:r>
-            <a:endParaRPr lang="en-US" sz="2100" dirty="0"/>
-          </a:p>
-          <a:p>
-            <a:pPr indent="0" marL="0">
-              <a:buNone/>
-            </a:pPr>
-            <a:r>
-              <a:rPr lang="en-US" sz="2100" dirty="0">
+              <a:t>• A communications workflow should define who checks technical accuracy, who.</a:t>
+            </a:r>
+            <a:endParaRPr lang="en-US" sz="1920" dirty="0"/>
+          </a:p>
+          <a:p>
+            <a:pPr indent="0" marL="0">
+              <a:buNone/>
+            </a:pPr>
+            <a:r>
+              <a:rPr lang="en-US" sz="1920" dirty="0">
                 <a:solidFill>
                   <a:srgbClr val="003A63"/>
                 </a:solidFill>
@@ -3498,9 +3498,9 @@
                 <a:ea typeface="Aptos" pitchFamily="34" charset="-122"/>
                 <a:cs typeface="Aptos" pitchFamily="34" charset="-120"/>
               </a:rPr>
-              <a:t>• For urgent communications, the workflow should include expedited review rules that still.</a:t>
-            </a:r>
-            <a:endParaRPr lang="en-US" sz="2100" dirty="0"/>
+              <a:t>• For urgent communications, the workflow should include expedited review.</a:t>
+            </a:r>
+            <a:endParaRPr lang="en-US" sz="1920" dirty="0"/>
           </a:p>
         </p:txBody>
       </p:sp>
@@ -3512,12 +3512,12 @@
         </p:nvSpPr>
         <p:spPr>
           <a:xfrm>
-            <a:off x="7635240" y="1325880"/>
-            <a:ext cx="3474720" cy="1207008"/>
+            <a:off x="7543800" y="1325880"/>
+            <a:ext cx="3611880" cy="1261872"/>
           </a:xfrm>
           <a:prstGeom prst="roundRect">
             <a:avLst>
-              <a:gd name="adj" fmla="val 9091"/>
+              <a:gd name="adj" fmla="val 8696"/>
             </a:avLst>
           </a:prstGeom>
           <a:solidFill>
@@ -3539,8 +3539,8 @@
         </p:nvSpPr>
         <p:spPr>
           <a:xfrm>
-            <a:off x="7799832" y="1472184"/>
-            <a:ext cx="3145536" cy="256032"/>
+            <a:off x="7708392" y="1453896"/>
+            <a:ext cx="3282696" cy="228600"/>
           </a:xfrm>
           <a:prstGeom prst="rect">
             <a:avLst/>
@@ -3556,7 +3556,7 @@
               <a:buNone/>
             </a:pPr>
             <a:r>
-              <a:rPr lang="en-US" sz="1300" b="1" dirty="0">
+              <a:rPr lang="en-US" sz="1220" b="1" dirty="0">
                 <a:solidFill>
                   <a:srgbClr val="0068B7"/>
                 </a:solidFill>
@@ -3566,7 +3566,7 @@
               </a:rPr>
               <a:t>Public health lens</a:t>
             </a:r>
-            <a:endParaRPr lang="en-US" sz="1300" dirty="0"/>
+            <a:endParaRPr lang="en-US" sz="1220" dirty="0"/>
           </a:p>
         </p:txBody>
       </p:sp>
@@ -3578,8 +3578,8 @@
         </p:nvSpPr>
         <p:spPr>
           <a:xfrm>
-            <a:off x="7799832" y="1801368"/>
-            <a:ext cx="3145536" cy="640080"/>
+            <a:off x="7708392" y="1764792"/>
+            <a:ext cx="3282696" cy="749808"/>
           </a:xfrm>
           <a:prstGeom prst="rect">
             <a:avLst/>
@@ -3597,7 +3597,7 @@
               <a:buNone/>
             </a:pPr>
             <a:r>
-              <a:rPr lang="en-US" sz="1320" dirty="0">
+              <a:rPr lang="en-US" sz="1220" dirty="0">
                 <a:solidFill>
                   <a:srgbClr val="17364A"/>
                 </a:solidFill>
@@ -3607,7 +3607,7 @@
               </a:rPr>
               <a:t>AI can also support review, but it should not replace reviewers.</a:t>
             </a:r>
-            <a:endParaRPr lang="en-US" sz="1320" dirty="0"/>
+            <a:endParaRPr lang="en-US" sz="1220" dirty="0"/>
           </a:p>
         </p:txBody>
       </p:sp>
@@ -3619,12 +3619,12 @@
         </p:nvSpPr>
         <p:spPr>
           <a:xfrm>
-            <a:off x="7635240" y="2670048"/>
-            <a:ext cx="3474720" cy="1377086"/>
+            <a:off x="7543800" y="2724912"/>
+            <a:ext cx="3611880" cy="1527048"/>
           </a:xfrm>
           <a:prstGeom prst="roundRect">
             <a:avLst>
-              <a:gd name="adj" fmla="val 7968"/>
+              <a:gd name="adj" fmla="val 7186"/>
             </a:avLst>
           </a:prstGeom>
           <a:solidFill>
@@ -3646,8 +3646,8 @@
         </p:nvSpPr>
         <p:spPr>
           <a:xfrm>
-            <a:off x="7799832" y="2816352"/>
-            <a:ext cx="3145536" cy="256032"/>
+            <a:off x="7708392" y="2852928"/>
+            <a:ext cx="3282696" cy="228600"/>
           </a:xfrm>
           <a:prstGeom prst="rect">
             <a:avLst/>
@@ -3663,7 +3663,7 @@
               <a:buNone/>
             </a:pPr>
             <a:r>
-              <a:rPr lang="en-US" sz="1300" b="1" dirty="0">
+              <a:rPr lang="en-US" sz="1220" b="1" dirty="0">
                 <a:solidFill>
                   <a:srgbClr val="0068B7"/>
                 </a:solidFill>
@@ -3673,7 +3673,7 @@
               </a:rPr>
               <a:t>Concept checkpoints</a:t>
             </a:r>
-            <a:endParaRPr lang="en-US" sz="1300" dirty="0"/>
+            <a:endParaRPr lang="en-US" sz="1220" dirty="0"/>
           </a:p>
         </p:txBody>
       </p:sp>
@@ -3685,8 +3685,8 @@
         </p:nvSpPr>
         <p:spPr>
           <a:xfrm>
-            <a:off x="7818120" y="3182112"/>
-            <a:ext cx="3090672" cy="718718"/>
+            <a:off x="7726680" y="3182112"/>
+            <a:ext cx="3227832" cy="960120"/>
           </a:xfrm>
           <a:prstGeom prst="rect">
             <a:avLst/>
@@ -3704,7 +3704,7 @@
               <a:buNone/>
             </a:pPr>
             <a:r>
-              <a:rPr lang="en-US" sz="1220" dirty="0">
+              <a:rPr lang="en-US" sz="1140" dirty="0">
                 <a:solidFill>
                   <a:srgbClr val="17364A"/>
                 </a:solidFill>
@@ -3712,16 +3712,16 @@
                 <a:ea typeface="Aptos" pitchFamily="34" charset="-122"/>
                 <a:cs typeface="Aptos" pitchFamily="34" charset="-120"/>
               </a:rPr>
-              <a:t>A communications workflow should define who checks technical.</a:t>
-            </a:r>
-            <a:endParaRPr lang="en-US" sz="1220" dirty="0"/>
-          </a:p>
-          <a:p>
-            <a:pPr indent="0" marL="0">
-              <a:buNone/>
-            </a:pPr>
-            <a:r>
-              <a:rPr lang="en-US" sz="1220" dirty="0">
+              <a:t>A communications workflow should define who checks.</a:t>
+            </a:r>
+            <a:endParaRPr lang="en-US" sz="1140" dirty="0"/>
+          </a:p>
+          <a:p>
+            <a:pPr indent="0" marL="0">
+              <a:buNone/>
+            </a:pPr>
+            <a:r>
+              <a:rPr lang="en-US" sz="1140" dirty="0">
                 <a:solidFill>
                   <a:srgbClr val="17364A"/>
                 </a:solidFill>
@@ -3729,9 +3729,9 @@
                 <a:ea typeface="Aptos" pitchFamily="34" charset="-122"/>
                 <a:cs typeface="Aptos" pitchFamily="34" charset="-120"/>
               </a:rPr>
-              <a:t>For urgent communications, the workflow should include expedited.</a:t>
-            </a:r>
-            <a:endParaRPr lang="en-US" sz="1220" dirty="0"/>
+              <a:t>For urgent communications, the workflow should.</a:t>
+            </a:r>
+            <a:endParaRPr lang="en-US" sz="1140" dirty="0"/>
           </a:p>
         </p:txBody>
       </p:sp>
@@ -3743,12 +3743,12 @@
         </p:nvSpPr>
         <p:spPr>
           <a:xfrm>
-            <a:off x="7635240" y="4184294"/>
-            <a:ext cx="3474720" cy="1466698"/>
+            <a:off x="7543800" y="4389120"/>
+            <a:ext cx="3611880" cy="1261872"/>
           </a:xfrm>
           <a:prstGeom prst="roundRect">
             <a:avLst>
-              <a:gd name="adj" fmla="val 7481"/>
+              <a:gd name="adj" fmla="val 8696"/>
             </a:avLst>
           </a:prstGeom>
           <a:solidFill>
@@ -3770,8 +3770,8 @@
         </p:nvSpPr>
         <p:spPr>
           <a:xfrm>
-            <a:off x="7799832" y="4330598"/>
-            <a:ext cx="3145536" cy="256032"/>
+            <a:off x="7708392" y="4517136"/>
+            <a:ext cx="3282696" cy="228600"/>
           </a:xfrm>
           <a:prstGeom prst="rect">
             <a:avLst/>
@@ -3787,7 +3787,7 @@
               <a:buNone/>
             </a:pPr>
             <a:r>
-              <a:rPr lang="en-US" sz="1300" b="1" dirty="0">
+              <a:rPr lang="en-US" sz="1220" b="1" dirty="0">
                 <a:solidFill>
                   <a:srgbClr val="0068B7"/>
                 </a:solidFill>
@@ -3797,7 +3797,7 @@
               </a:rPr>
               <a:t>Engagement move</a:t>
             </a:r>
-            <a:endParaRPr lang="en-US" sz="1300" dirty="0"/>
+            <a:endParaRPr lang="en-US" sz="1220" dirty="0"/>
           </a:p>
         </p:txBody>
       </p:sp>
@@ -3809,8 +3809,8 @@
         </p:nvSpPr>
         <p:spPr>
           <a:xfrm>
-            <a:off x="7799832" y="4659782"/>
-            <a:ext cx="3145536" cy="899770"/>
+            <a:off x="7708392" y="4828032"/>
+            <a:ext cx="3282696" cy="749808"/>
           </a:xfrm>
           <a:prstGeom prst="rect">
             <a:avLst/>
@@ -3828,7 +3828,7 @@
               <a:buNone/>
             </a:pPr>
             <a:r>
-              <a:rPr lang="en-US" sz="1320" dirty="0">
+              <a:rPr lang="en-US" sz="1220" dirty="0">
                 <a:solidFill>
                   <a:srgbClr val="17364A"/>
                 </a:solidFill>
@@ -3836,9 +3836,9 @@
                 <a:ea typeface="Aptos" pitchFamily="34" charset="-122"/>
                 <a:cs typeface="Aptos" pitchFamily="34" charset="-120"/>
               </a:rPr>
-              <a:t>Use the concept to plan transparent communication, gather stakeholder input, protect trust, and make sure affected communities are considered early.</a:t>
-            </a:r>
-            <a:endParaRPr lang="en-US" sz="1320" dirty="0"/>
+              <a:t>Use the concept to plan transparent communication, gather stakeholder input,.</a:t>
+            </a:r>
+            <a:endParaRPr lang="en-US" sz="1220" dirty="0"/>
           </a:p>
         </p:txBody>
       </p:sp>
@@ -4129,8 +4129,8 @@
         </p:nvSpPr>
         <p:spPr>
           <a:xfrm>
-            <a:off x="868680" y="1508760"/>
-            <a:ext cx="6309360" cy="4160520"/>
+            <a:off x="822960" y="1463040"/>
+            <a:ext cx="6565392" cy="4343400"/>
           </a:xfrm>
           <a:prstGeom prst="rect">
             <a:avLst/>
@@ -4148,7 +4148,7 @@
               <a:buNone/>
             </a:pPr>
             <a:r>
-              <a:rPr lang="en-US" sz="2100" dirty="0">
+              <a:rPr lang="en-US" sz="1920" dirty="0">
                 <a:solidFill>
                   <a:srgbClr val="003A63"/>
                 </a:solidFill>
@@ -4158,14 +4158,14 @@
               </a:rPr>
               <a:t>• Risks and failure modes include the following:</a:t>
             </a:r>
-            <a:endParaRPr lang="en-US" sz="2100" dirty="0"/>
-          </a:p>
-          <a:p>
-            <a:pPr indent="0" marL="0">
-              <a:buNone/>
-            </a:pPr>
-            <a:r>
-              <a:rPr lang="en-US" sz="2100" dirty="0">
+            <a:endParaRPr lang="en-US" sz="1920" dirty="0"/>
+          </a:p>
+          <a:p>
+            <a:pPr indent="0" marL="0">
+              <a:buNone/>
+            </a:pPr>
+            <a:r>
+              <a:rPr lang="en-US" sz="1920" dirty="0">
                 <a:solidFill>
                   <a:srgbClr val="003A63"/>
                 </a:solidFill>
@@ -4175,14 +4175,14 @@
               </a:rPr>
               <a:t>• AI-generated messages overstating evidence or omitting uncertainty.</a:t>
             </a:r>
-            <a:endParaRPr lang="en-US" sz="2100" dirty="0"/>
-          </a:p>
-          <a:p>
-            <a:pPr indent="0" marL="0">
-              <a:buNone/>
-            </a:pPr>
-            <a:r>
-              <a:rPr lang="en-US" sz="2100" dirty="0">
+            <a:endParaRPr lang="en-US" sz="1920" dirty="0"/>
+          </a:p>
+          <a:p>
+            <a:pPr indent="0" marL="0">
+              <a:buNone/>
+            </a:pPr>
+            <a:r>
+              <a:rPr lang="en-US" sz="1920" dirty="0">
                 <a:solidFill>
                   <a:srgbClr val="003A63"/>
                 </a:solidFill>
@@ -4192,7 +4192,7 @@
               </a:rPr>
               <a:t>• Use of stigmatizing, blaming, or culturally inappropriate language.</a:t>
             </a:r>
-            <a:endParaRPr lang="en-US" sz="2100" dirty="0"/>
+            <a:endParaRPr lang="en-US" sz="1920" dirty="0"/>
           </a:p>
         </p:txBody>
       </p:sp>
@@ -4204,12 +4204,12 @@
         </p:nvSpPr>
         <p:spPr>
           <a:xfrm>
-            <a:off x="7635240" y="1325880"/>
-            <a:ext cx="3474720" cy="1207008"/>
+            <a:off x="7543800" y="1325880"/>
+            <a:ext cx="3611880" cy="1261872"/>
           </a:xfrm>
           <a:prstGeom prst="roundRect">
             <a:avLst>
-              <a:gd name="adj" fmla="val 9091"/>
+              <a:gd name="adj" fmla="val 8696"/>
             </a:avLst>
           </a:prstGeom>
           <a:solidFill>
@@ -4231,8 +4231,8 @@
         </p:nvSpPr>
         <p:spPr>
           <a:xfrm>
-            <a:off x="7799832" y="1472184"/>
-            <a:ext cx="3145536" cy="256032"/>
+            <a:off x="7708392" y="1453896"/>
+            <a:ext cx="3282696" cy="228600"/>
           </a:xfrm>
           <a:prstGeom prst="rect">
             <a:avLst/>
@@ -4248,7 +4248,7 @@
               <a:buNone/>
             </a:pPr>
             <a:r>
-              <a:rPr lang="en-US" sz="1300" b="1" dirty="0">
+              <a:rPr lang="en-US" sz="1220" b="1" dirty="0">
                 <a:solidFill>
                   <a:srgbClr val="0068B7"/>
                 </a:solidFill>
@@ -4258,7 +4258,7 @@
               </a:rPr>
               <a:t>Risk check</a:t>
             </a:r>
-            <a:endParaRPr lang="en-US" sz="1300" dirty="0"/>
+            <a:endParaRPr lang="en-US" sz="1220" dirty="0"/>
           </a:p>
         </p:txBody>
       </p:sp>
@@ -4270,8 +4270,8 @@
         </p:nvSpPr>
         <p:spPr>
           <a:xfrm>
-            <a:off x="7799832" y="1801368"/>
-            <a:ext cx="3145536" cy="640080"/>
+            <a:off x="7708392" y="1764792"/>
+            <a:ext cx="3282696" cy="749808"/>
           </a:xfrm>
           <a:prstGeom prst="rect">
             <a:avLst/>
@@ -4289,7 +4289,7 @@
               <a:buNone/>
             </a:pPr>
             <a:r>
-              <a:rPr lang="en-US" sz="1320" dirty="0">
+              <a:rPr lang="en-US" sz="1220" dirty="0">
                 <a:solidFill>
                   <a:srgbClr val="17364A"/>
                 </a:solidFill>
@@ -4299,7 +4299,7 @@
               </a:rPr>
               <a:t>Risks and failure modes include the following:</a:t>
             </a:r>
-            <a:endParaRPr lang="en-US" sz="1320" dirty="0"/>
+            <a:endParaRPr lang="en-US" sz="1220" dirty="0"/>
           </a:p>
         </p:txBody>
       </p:sp>
@@ -4311,12 +4311,12 @@
         </p:nvSpPr>
         <p:spPr>
           <a:xfrm>
-            <a:off x="7635240" y="2670048"/>
-            <a:ext cx="3474720" cy="1536192"/>
+            <a:off x="7543800" y="2724912"/>
+            <a:ext cx="3611880" cy="1527048"/>
           </a:xfrm>
           <a:prstGeom prst="roundRect">
             <a:avLst>
-              <a:gd name="adj" fmla="val 7143"/>
+              <a:gd name="adj" fmla="val 7186"/>
             </a:avLst>
           </a:prstGeom>
           <a:solidFill>
@@ -4338,8 +4338,8 @@
         </p:nvSpPr>
         <p:spPr>
           <a:xfrm>
-            <a:off x="7799832" y="2816352"/>
-            <a:ext cx="3145536" cy="256032"/>
+            <a:off x="7708392" y="2852928"/>
+            <a:ext cx="3282696" cy="228600"/>
           </a:xfrm>
           <a:prstGeom prst="rect">
             <a:avLst/>
@@ -4355,7 +4355,7 @@
               <a:buNone/>
             </a:pPr>
             <a:r>
-              <a:rPr lang="en-US" sz="1300" b="1" dirty="0">
+              <a:rPr lang="en-US" sz="1220" b="1" dirty="0">
                 <a:solidFill>
                   <a:srgbClr val="0068B7"/>
                 </a:solidFill>
@@ -4365,7 +4365,7 @@
               </a:rPr>
               <a:t>Concept checkpoints</a:t>
             </a:r>
-            <a:endParaRPr lang="en-US" sz="1300" dirty="0"/>
+            <a:endParaRPr lang="en-US" sz="1220" dirty="0"/>
           </a:p>
         </p:txBody>
       </p:sp>
@@ -4377,8 +4377,8 @@
         </p:nvSpPr>
         <p:spPr>
           <a:xfrm>
-            <a:off x="7818120" y="3182112"/>
-            <a:ext cx="3090672" cy="877824"/>
+            <a:off x="7726680" y="3182112"/>
+            <a:ext cx="3227832" cy="960120"/>
           </a:xfrm>
           <a:prstGeom prst="rect">
             <a:avLst/>
@@ -4396,7 +4396,7 @@
               <a:buNone/>
             </a:pPr>
             <a:r>
-              <a:rPr lang="en-US" sz="1220" dirty="0">
+              <a:rPr lang="en-US" sz="1140" dirty="0">
                 <a:solidFill>
                   <a:srgbClr val="17364A"/>
                 </a:solidFill>
@@ -4406,14 +4406,14 @@
               </a:rPr>
               <a:t>Risks and failure modes include the following:</a:t>
             </a:r>
-            <a:endParaRPr lang="en-US" sz="1220" dirty="0"/>
-          </a:p>
-          <a:p>
-            <a:pPr indent="0" marL="0">
-              <a:buNone/>
-            </a:pPr>
-            <a:r>
-              <a:rPr lang="en-US" sz="1220" dirty="0">
+            <a:endParaRPr lang="en-US" sz="1140" dirty="0"/>
+          </a:p>
+          <a:p>
+            <a:pPr indent="0" marL="0">
+              <a:buNone/>
+            </a:pPr>
+            <a:r>
+              <a:rPr lang="en-US" sz="1140" dirty="0">
                 <a:solidFill>
                   <a:srgbClr val="17364A"/>
                 </a:solidFill>
@@ -4421,16 +4421,16 @@
                 <a:ea typeface="Aptos" pitchFamily="34" charset="-122"/>
                 <a:cs typeface="Aptos" pitchFamily="34" charset="-120"/>
               </a:rPr>
-              <a:t>AI-generated messages overstating evidence or omitting uncertainty.</a:t>
-            </a:r>
-            <a:endParaRPr lang="en-US" sz="1220" dirty="0"/>
-          </a:p>
-          <a:p>
-            <a:pPr indent="0" marL="0">
-              <a:buNone/>
-            </a:pPr>
-            <a:r>
-              <a:rPr lang="en-US" sz="1220" dirty="0">
+              <a:t>AI-generated messages overstating evidence or.</a:t>
+            </a:r>
+            <a:endParaRPr lang="en-US" sz="1140" dirty="0"/>
+          </a:p>
+          <a:p>
+            <a:pPr indent="0" marL="0">
+              <a:buNone/>
+            </a:pPr>
+            <a:r>
+              <a:rPr lang="en-US" sz="1140" dirty="0">
                 <a:solidFill>
                   <a:srgbClr val="17364A"/>
                 </a:solidFill>
@@ -4438,9 +4438,9 @@
                 <a:ea typeface="Aptos" pitchFamily="34" charset="-122"/>
                 <a:cs typeface="Aptos" pitchFamily="34" charset="-120"/>
               </a:rPr>
-              <a:t>Use of stigmatizing, blaming, or culturally inappropriate language.</a:t>
-            </a:r>
-            <a:endParaRPr lang="en-US" sz="1220" dirty="0"/>
+              <a:t>Use of stigmatizing, blaming, or culturally.</a:t>
+            </a:r>
+            <a:endParaRPr lang="en-US" sz="1140" dirty="0"/>
           </a:p>
         </p:txBody>
       </p:sp>
@@ -4452,12 +4452,12 @@
         </p:nvSpPr>
         <p:spPr>
           <a:xfrm>
-            <a:off x="7635240" y="4343400"/>
-            <a:ext cx="3474720" cy="1255471"/>
+            <a:off x="7543800" y="4389120"/>
+            <a:ext cx="3611880" cy="1261872"/>
           </a:xfrm>
           <a:prstGeom prst="roundRect">
             <a:avLst>
-              <a:gd name="adj" fmla="val 8740"/>
+              <a:gd name="adj" fmla="val 8696"/>
             </a:avLst>
           </a:prstGeom>
           <a:solidFill>
@@ -4479,8 +4479,8 @@
         </p:nvSpPr>
         <p:spPr>
           <a:xfrm>
-            <a:off x="7799832" y="4489704"/>
-            <a:ext cx="3145536" cy="256032"/>
+            <a:off x="7708392" y="4517136"/>
+            <a:ext cx="3282696" cy="228600"/>
           </a:xfrm>
           <a:prstGeom prst="rect">
             <a:avLst/>
@@ -4496,7 +4496,7 @@
               <a:buNone/>
             </a:pPr>
             <a:r>
-              <a:rPr lang="en-US" sz="1300" b="1" dirty="0">
+              <a:rPr lang="en-US" sz="1220" b="1" dirty="0">
                 <a:solidFill>
                   <a:srgbClr val="0068B7"/>
                 </a:solidFill>
@@ -4506,7 +4506,7 @@
               </a:rPr>
               <a:t>Safeguard to plan</a:t>
             </a:r>
-            <a:endParaRPr lang="en-US" sz="1300" dirty="0"/>
+            <a:endParaRPr lang="en-US" sz="1220" dirty="0"/>
           </a:p>
         </p:txBody>
       </p:sp>
@@ -4518,8 +4518,8 @@
         </p:nvSpPr>
         <p:spPr>
           <a:xfrm>
-            <a:off x="7799832" y="4818888"/>
-            <a:ext cx="3145536" cy="688543"/>
+            <a:off x="7708392" y="4828032"/>
+            <a:ext cx="3282696" cy="749808"/>
           </a:xfrm>
           <a:prstGeom prst="rect">
             <a:avLst/>
@@ -4537,7 +4537,7 @@
               <a:buNone/>
             </a:pPr>
             <a:r>
-              <a:rPr lang="en-US" sz="1320" dirty="0">
+              <a:rPr lang="en-US" sz="1220" dirty="0">
                 <a:solidFill>
                   <a:srgbClr val="17364A"/>
                 </a:solidFill>
@@ -4545,9 +4545,9 @@
                 <a:ea typeface="Aptos" pitchFamily="34" charset="-122"/>
                 <a:cs typeface="Aptos" pitchFamily="34" charset="-120"/>
               </a:rPr>
-              <a:t>Identify what could go wrong, who could be affected, what safeguards are needed, and what evidence should be reviewed before use.</a:t>
-            </a:r>
-            <a:endParaRPr lang="en-US" sz="1320" dirty="0"/>
+              <a:t>Identify what could go wrong, who could be affected, what safeguards are needed,.</a:t>
+            </a:r>
+            <a:endParaRPr lang="en-US" sz="1220" dirty="0"/>
           </a:p>
         </p:txBody>
       </p:sp>
@@ -4838,8 +4838,8 @@
         </p:nvSpPr>
         <p:spPr>
           <a:xfrm>
-            <a:off x="868680" y="1508760"/>
-            <a:ext cx="6309360" cy="4160520"/>
+            <a:off x="822960" y="1463040"/>
+            <a:ext cx="6565392" cy="4343400"/>
           </a:xfrm>
           <a:prstGeom prst="rect">
             <a:avLst/>
@@ -4857,7 +4857,7 @@
               <a:buNone/>
             </a:pPr>
             <a:r>
-              <a:rPr lang="en-US" sz="2100" dirty="0">
+              <a:rPr lang="en-US" sz="1920" dirty="0">
                 <a:solidFill>
                   <a:srgbClr val="003A63"/>
                 </a:solidFill>
@@ -4867,14 +4867,14 @@
               </a:rPr>
               <a:t>• Unverified translations or readability changes that alter meaning.</a:t>
             </a:r>
-            <a:endParaRPr lang="en-US" sz="2100" dirty="0"/>
-          </a:p>
-          <a:p>
-            <a:pPr indent="0" marL="0">
-              <a:buNone/>
-            </a:pPr>
-            <a:r>
-              <a:rPr lang="en-US" sz="2100" dirty="0">
+            <a:endParaRPr lang="en-US" sz="1920" dirty="0"/>
+          </a:p>
+          <a:p>
+            <a:pPr indent="0" marL="0">
+              <a:buNone/>
+            </a:pPr>
+            <a:r>
+              <a:rPr lang="en-US" sz="1920" dirty="0">
                 <a:solidFill>
                   <a:srgbClr val="003A63"/>
                 </a:solidFill>
@@ -4882,16 +4882,16 @@
                 <a:ea typeface="Aptos" pitchFamily="34" charset="-122"/>
                 <a:cs typeface="Aptos" pitchFamily="34" charset="-120"/>
               </a:rPr>
-              <a:t>• Public-facing content being released without required subject matter or leadership review.</a:t>
-            </a:r>
-            <a:endParaRPr lang="en-US" sz="2100" dirty="0"/>
-          </a:p>
-          <a:p>
-            <a:pPr indent="0" marL="0">
-              <a:buNone/>
-            </a:pPr>
-            <a:r>
-              <a:rPr lang="en-US" sz="2100" dirty="0">
+              <a:t>• Public-facing content being released without required subject matter or.</a:t>
+            </a:r>
+            <a:endParaRPr lang="en-US" sz="1920" dirty="0"/>
+          </a:p>
+          <a:p>
+            <a:pPr indent="0" marL="0">
+              <a:buNone/>
+            </a:pPr>
+            <a:r>
+              <a:rPr lang="en-US" sz="1920" dirty="0">
                 <a:solidFill>
                   <a:srgbClr val="003A63"/>
                 </a:solidFill>
@@ -4899,9 +4899,9 @@
                 <a:ea typeface="Aptos" pitchFamily="34" charset="-122"/>
                 <a:cs typeface="Aptos" pitchFamily="34" charset="-120"/>
               </a:rPr>
-              <a:t>• Messages that assume access to resources, technology, transportation, or healthcare that the.</a:t>
-            </a:r>
-            <a:endParaRPr lang="en-US" sz="2100" dirty="0"/>
+              <a:t>• Messages that assume access to resources, technology, transportation, or.</a:t>
+            </a:r>
+            <a:endParaRPr lang="en-US" sz="1920" dirty="0"/>
           </a:p>
         </p:txBody>
       </p:sp>
@@ -4913,12 +4913,12 @@
         </p:nvSpPr>
         <p:spPr>
           <a:xfrm>
-            <a:off x="7635240" y="1325880"/>
-            <a:ext cx="3474720" cy="1207008"/>
+            <a:off x="7543800" y="1325880"/>
+            <a:ext cx="3611880" cy="1261872"/>
           </a:xfrm>
           <a:prstGeom prst="roundRect">
             <a:avLst>
-              <a:gd name="adj" fmla="val 9091"/>
+              <a:gd name="adj" fmla="val 8696"/>
             </a:avLst>
           </a:prstGeom>
           <a:solidFill>
@@ -4940,8 +4940,8 @@
         </p:nvSpPr>
         <p:spPr>
           <a:xfrm>
-            <a:off x="7799832" y="1472184"/>
-            <a:ext cx="3145536" cy="256032"/>
+            <a:off x="7708392" y="1453896"/>
+            <a:ext cx="3282696" cy="228600"/>
           </a:xfrm>
           <a:prstGeom prst="rect">
             <a:avLst/>
@@ -4957,7 +4957,7 @@
               <a:buNone/>
             </a:pPr>
             <a:r>
-              <a:rPr lang="en-US" sz="1300" b="1" dirty="0">
+              <a:rPr lang="en-US" sz="1220" b="1" dirty="0">
                 <a:solidFill>
                   <a:srgbClr val="0068B7"/>
                 </a:solidFill>
@@ -4967,7 +4967,7 @@
               </a:rPr>
               <a:t>Risk check</a:t>
             </a:r>
-            <a:endParaRPr lang="en-US" sz="1300" dirty="0"/>
+            <a:endParaRPr lang="en-US" sz="1220" dirty="0"/>
           </a:p>
         </p:txBody>
       </p:sp>
@@ -4979,8 +4979,8 @@
         </p:nvSpPr>
         <p:spPr>
           <a:xfrm>
-            <a:off x="7799832" y="1801368"/>
-            <a:ext cx="3145536" cy="640080"/>
+            <a:off x="7708392" y="1764792"/>
+            <a:ext cx="3282696" cy="749808"/>
           </a:xfrm>
           <a:prstGeom prst="rect">
             <a:avLst/>
@@ -4998,7 +4998,7 @@
               <a:buNone/>
             </a:pPr>
             <a:r>
-              <a:rPr lang="en-US" sz="1320" dirty="0">
+              <a:rPr lang="en-US" sz="1220" dirty="0">
                 <a:solidFill>
                   <a:srgbClr val="17364A"/>
                 </a:solidFill>
@@ -5008,7 +5008,7 @@
               </a:rPr>
               <a:t>Unverified translations or readability changes that alter meaning.</a:t>
             </a:r>
-            <a:endParaRPr lang="en-US" sz="1320" dirty="0"/>
+            <a:endParaRPr lang="en-US" sz="1220" dirty="0"/>
           </a:p>
         </p:txBody>
       </p:sp>
@@ -5020,12 +5020,12 @@
         </p:nvSpPr>
         <p:spPr>
           <a:xfrm>
-            <a:off x="7635240" y="2670048"/>
-            <a:ext cx="3474720" cy="1536192"/>
+            <a:off x="7543800" y="2724912"/>
+            <a:ext cx="3611880" cy="1527048"/>
           </a:xfrm>
           <a:prstGeom prst="roundRect">
             <a:avLst>
-              <a:gd name="adj" fmla="val 7143"/>
+              <a:gd name="adj" fmla="val 7186"/>
             </a:avLst>
           </a:prstGeom>
           <a:solidFill>
@@ -5047,8 +5047,8 @@
         </p:nvSpPr>
         <p:spPr>
           <a:xfrm>
-            <a:off x="7799832" y="2816352"/>
-            <a:ext cx="3145536" cy="256032"/>
+            <a:off x="7708392" y="2852928"/>
+            <a:ext cx="3282696" cy="228600"/>
           </a:xfrm>
           <a:prstGeom prst="rect">
             <a:avLst/>
@@ -5064,7 +5064,7 @@
               <a:buNone/>
             </a:pPr>
             <a:r>
-              <a:rPr lang="en-US" sz="1300" b="1" dirty="0">
+              <a:rPr lang="en-US" sz="1220" b="1" dirty="0">
                 <a:solidFill>
                   <a:srgbClr val="0068B7"/>
                 </a:solidFill>
@@ -5074,7 +5074,7 @@
               </a:rPr>
               <a:t>Concept checkpoints</a:t>
             </a:r>
-            <a:endParaRPr lang="en-US" sz="1300" dirty="0"/>
+            <a:endParaRPr lang="en-US" sz="1220" dirty="0"/>
           </a:p>
         </p:txBody>
       </p:sp>
@@ -5086,8 +5086,8 @@
         </p:nvSpPr>
         <p:spPr>
           <a:xfrm>
-            <a:off x="7818120" y="3182112"/>
-            <a:ext cx="3090672" cy="877824"/>
+            <a:off x="7726680" y="3182112"/>
+            <a:ext cx="3227832" cy="960120"/>
           </a:xfrm>
           <a:prstGeom prst="rect">
             <a:avLst/>
@@ -5105,7 +5105,7 @@
               <a:buNone/>
             </a:pPr>
             <a:r>
-              <a:rPr lang="en-US" sz="1220" dirty="0">
+              <a:rPr lang="en-US" sz="1140" dirty="0">
                 <a:solidFill>
                   <a:srgbClr val="17364A"/>
                 </a:solidFill>
@@ -5113,16 +5113,16 @@
                 <a:ea typeface="Aptos" pitchFamily="34" charset="-122"/>
                 <a:cs typeface="Aptos" pitchFamily="34" charset="-120"/>
               </a:rPr>
-              <a:t>Unverified translations or readability changes that alter meaning.</a:t>
-            </a:r>
-            <a:endParaRPr lang="en-US" sz="1220" dirty="0"/>
-          </a:p>
-          <a:p>
-            <a:pPr indent="0" marL="0">
-              <a:buNone/>
-            </a:pPr>
-            <a:r>
-              <a:rPr lang="en-US" sz="1220" dirty="0">
+              <a:t>Unverified translations or readability changes.</a:t>
+            </a:r>
+            <a:endParaRPr lang="en-US" sz="1140" dirty="0"/>
+          </a:p>
+          <a:p>
+            <a:pPr indent="0" marL="0">
+              <a:buNone/>
+            </a:pPr>
+            <a:r>
+              <a:rPr lang="en-US" sz="1140" dirty="0">
                 <a:solidFill>
                   <a:srgbClr val="17364A"/>
                 </a:solidFill>
@@ -5130,16 +5130,16 @@
                 <a:ea typeface="Aptos" pitchFamily="34" charset="-122"/>
                 <a:cs typeface="Aptos" pitchFamily="34" charset="-120"/>
               </a:rPr>
-              <a:t>Public-facing content being released without required subject.</a:t>
-            </a:r>
-            <a:endParaRPr lang="en-US" sz="1220" dirty="0"/>
-          </a:p>
-          <a:p>
-            <a:pPr indent="0" marL="0">
-              <a:buNone/>
-            </a:pPr>
-            <a:r>
-              <a:rPr lang="en-US" sz="1220" dirty="0">
+              <a:t>Public-facing content being released without.</a:t>
+            </a:r>
+            <a:endParaRPr lang="en-US" sz="1140" dirty="0"/>
+          </a:p>
+          <a:p>
+            <a:pPr indent="0" marL="0">
+              <a:buNone/>
+            </a:pPr>
+            <a:r>
+              <a:rPr lang="en-US" sz="1140" dirty="0">
                 <a:solidFill>
                   <a:srgbClr val="17364A"/>
                 </a:solidFill>
@@ -5147,9 +5147,9 @@
                 <a:ea typeface="Aptos" pitchFamily="34" charset="-122"/>
                 <a:cs typeface="Aptos" pitchFamily="34" charset="-120"/>
               </a:rPr>
-              <a:t>Messages that assume access to resources, technology,.</a:t>
-            </a:r>
-            <a:endParaRPr lang="en-US" sz="1220" dirty="0"/>
+              <a:t>Messages that assume access to resources,.</a:t>
+            </a:r>
+            <a:endParaRPr lang="en-US" sz="1140" dirty="0"/>
           </a:p>
         </p:txBody>
       </p:sp>
@@ -5161,12 +5161,12 @@
         </p:nvSpPr>
         <p:spPr>
           <a:xfrm>
-            <a:off x="7635240" y="4343400"/>
-            <a:ext cx="3474720" cy="1255471"/>
+            <a:off x="7543800" y="4389120"/>
+            <a:ext cx="3611880" cy="1261872"/>
           </a:xfrm>
           <a:prstGeom prst="roundRect">
             <a:avLst>
-              <a:gd name="adj" fmla="val 8740"/>
+              <a:gd name="adj" fmla="val 8696"/>
             </a:avLst>
           </a:prstGeom>
           <a:solidFill>
@@ -5188,8 +5188,8 @@
         </p:nvSpPr>
         <p:spPr>
           <a:xfrm>
-            <a:off x="7799832" y="4489704"/>
-            <a:ext cx="3145536" cy="256032"/>
+            <a:off x="7708392" y="4517136"/>
+            <a:ext cx="3282696" cy="228600"/>
           </a:xfrm>
           <a:prstGeom prst="rect">
             <a:avLst/>
@@ -5205,7 +5205,7 @@
               <a:buNone/>
             </a:pPr>
             <a:r>
-              <a:rPr lang="en-US" sz="1300" b="1" dirty="0">
+              <a:rPr lang="en-US" sz="1220" b="1" dirty="0">
                 <a:solidFill>
                   <a:srgbClr val="0068B7"/>
                 </a:solidFill>
@@ -5215,7 +5215,7 @@
               </a:rPr>
               <a:t>Safeguard to plan</a:t>
             </a:r>
-            <a:endParaRPr lang="en-US" sz="1300" dirty="0"/>
+            <a:endParaRPr lang="en-US" sz="1220" dirty="0"/>
           </a:p>
         </p:txBody>
       </p:sp>
@@ -5227,8 +5227,8 @@
         </p:nvSpPr>
         <p:spPr>
           <a:xfrm>
-            <a:off x="7799832" y="4818888"/>
-            <a:ext cx="3145536" cy="688543"/>
+            <a:off x="7708392" y="4828032"/>
+            <a:ext cx="3282696" cy="749808"/>
           </a:xfrm>
           <a:prstGeom prst="rect">
             <a:avLst/>
@@ -5246,7 +5246,7 @@
               <a:buNone/>
             </a:pPr>
             <a:r>
-              <a:rPr lang="en-US" sz="1320" dirty="0">
+              <a:rPr lang="en-US" sz="1220" dirty="0">
                 <a:solidFill>
                   <a:srgbClr val="17364A"/>
                 </a:solidFill>
@@ -5254,9 +5254,9 @@
                 <a:ea typeface="Aptos" pitchFamily="34" charset="-122"/>
                 <a:cs typeface="Aptos" pitchFamily="34" charset="-120"/>
               </a:rPr>
-              <a:t>Identify what could go wrong, who could be affected, what safeguards are needed, and what evidence should be reviewed before use.</a:t>
-            </a:r>
-            <a:endParaRPr lang="en-US" sz="1320" dirty="0"/>
+              <a:t>Identify what could go wrong, who could be affected, what safeguards are needed,.</a:t>
+            </a:r>
+            <a:endParaRPr lang="en-US" sz="1220" dirty="0"/>
           </a:p>
         </p:txBody>
       </p:sp>
@@ -5547,8 +5547,8 @@
         </p:nvSpPr>
         <p:spPr>
           <a:xfrm>
-            <a:off x="868680" y="1508760"/>
-            <a:ext cx="6309360" cy="4160520"/>
+            <a:off x="822960" y="1463040"/>
+            <a:ext cx="6565392" cy="4343400"/>
           </a:xfrm>
           <a:prstGeom prst="rect">
             <a:avLst/>
@@ -5566,7 +5566,7 @@
               <a:buNone/>
             </a:pPr>
             <a:r>
-              <a:rPr lang="en-US" sz="2100" dirty="0">
+              <a:rPr lang="en-US" sz="1920" dirty="0">
                 <a:solidFill>
                   <a:srgbClr val="003A63"/>
                 </a:solidFill>
@@ -5576,14 +5576,14 @@
               </a:rPr>
               <a:t>• Recommended guardrails include the following:</a:t>
             </a:r>
-            <a:endParaRPr lang="en-US" sz="2100" dirty="0"/>
-          </a:p>
-          <a:p>
-            <a:pPr indent="0" marL="0">
-              <a:buNone/>
-            </a:pPr>
-            <a:r>
-              <a:rPr lang="en-US" sz="2100" dirty="0">
+            <a:endParaRPr lang="en-US" sz="1920" dirty="0"/>
+          </a:p>
+          <a:p>
+            <a:pPr indent="0" marL="0">
+              <a:buNone/>
+            </a:pPr>
+            <a:r>
+              <a:rPr lang="en-US" sz="1920" dirty="0">
                 <a:solidFill>
                   <a:srgbClr val="003A63"/>
                 </a:solidFill>
@@ -5591,16 +5591,16 @@
                 <a:ea typeface="Aptos" pitchFamily="34" charset="-122"/>
                 <a:cs typeface="Aptos" pitchFamily="34" charset="-120"/>
               </a:rPr>
-              <a:t>• Use only approved tools and approved source material for public health communications.</a:t>
-            </a:r>
-            <a:endParaRPr lang="en-US" sz="2100" dirty="0"/>
-          </a:p>
-          <a:p>
-            <a:pPr indent="0" marL="0">
-              <a:buNone/>
-            </a:pPr>
-            <a:r>
-              <a:rPr lang="en-US" sz="2100" dirty="0">
+              <a:t>• Use only approved tools and approved source material for public health.</a:t>
+            </a:r>
+            <a:endParaRPr lang="en-US" sz="1920" dirty="0"/>
+          </a:p>
+          <a:p>
+            <a:pPr indent="0" marL="0">
+              <a:buNone/>
+            </a:pPr>
+            <a:r>
+              <a:rPr lang="en-US" sz="1920" dirty="0">
                 <a:solidFill>
                   <a:srgbClr val="003A63"/>
                 </a:solidFill>
@@ -5608,9 +5608,9 @@
                 <a:ea typeface="Aptos" pitchFamily="34" charset="-122"/>
                 <a:cs typeface="Aptos" pitchFamily="34" charset="-120"/>
               </a:rPr>
-              <a:t>• Require human review for accuracy, plain language, accessibility, equity, and tone.</a:t>
-            </a:r>
-            <a:endParaRPr lang="en-US" sz="2100" dirty="0"/>
+              <a:t>• Require human review for accuracy, plain language, accessibility, equity,.</a:t>
+            </a:r>
+            <a:endParaRPr lang="en-US" sz="1920" dirty="0"/>
           </a:p>
         </p:txBody>
       </p:sp>
@@ -5622,12 +5622,12 @@
         </p:nvSpPr>
         <p:spPr>
           <a:xfrm>
-            <a:off x="7635240" y="1325880"/>
-            <a:ext cx="3474720" cy="1207008"/>
+            <a:off x="7543800" y="1325880"/>
+            <a:ext cx="3611880" cy="1261872"/>
           </a:xfrm>
           <a:prstGeom prst="roundRect">
             <a:avLst>
-              <a:gd name="adj" fmla="val 9091"/>
+              <a:gd name="adj" fmla="val 8696"/>
             </a:avLst>
           </a:prstGeom>
           <a:solidFill>
@@ -5649,8 +5649,8 @@
         </p:nvSpPr>
         <p:spPr>
           <a:xfrm>
-            <a:off x="7799832" y="1472184"/>
-            <a:ext cx="3145536" cy="256032"/>
+            <a:off x="7708392" y="1453896"/>
+            <a:ext cx="3282696" cy="228600"/>
           </a:xfrm>
           <a:prstGeom prst="rect">
             <a:avLst/>
@@ -5666,7 +5666,7 @@
               <a:buNone/>
             </a:pPr>
             <a:r>
-              <a:rPr lang="en-US" sz="1300" b="1" dirty="0">
+              <a:rPr lang="en-US" sz="1220" b="1" dirty="0">
                 <a:solidFill>
                   <a:srgbClr val="0068B7"/>
                 </a:solidFill>
@@ -5676,7 +5676,7 @@
               </a:rPr>
               <a:t>Risk check</a:t>
             </a:r>
-            <a:endParaRPr lang="en-US" sz="1300" dirty="0"/>
+            <a:endParaRPr lang="en-US" sz="1220" dirty="0"/>
           </a:p>
         </p:txBody>
       </p:sp>
@@ -5688,8 +5688,8 @@
         </p:nvSpPr>
         <p:spPr>
           <a:xfrm>
-            <a:off x="7799832" y="1801368"/>
-            <a:ext cx="3145536" cy="640080"/>
+            <a:off x="7708392" y="1764792"/>
+            <a:ext cx="3282696" cy="749808"/>
           </a:xfrm>
           <a:prstGeom prst="rect">
             <a:avLst/>
@@ -5707,7 +5707,7 @@
               <a:buNone/>
             </a:pPr>
             <a:r>
-              <a:rPr lang="en-US" sz="1320" dirty="0">
+              <a:rPr lang="en-US" sz="1220" dirty="0">
                 <a:solidFill>
                   <a:srgbClr val="17364A"/>
                 </a:solidFill>
@@ -5717,7 +5717,7 @@
               </a:rPr>
               <a:t>Recommended guardrails include the following:</a:t>
             </a:r>
-            <a:endParaRPr lang="en-US" sz="1320" dirty="0"/>
+            <a:endParaRPr lang="en-US" sz="1220" dirty="0"/>
           </a:p>
         </p:txBody>
       </p:sp>
@@ -5729,12 +5729,12 @@
         </p:nvSpPr>
         <p:spPr>
           <a:xfrm>
-            <a:off x="7635240" y="2670048"/>
-            <a:ext cx="3474720" cy="1536192"/>
+            <a:off x="7543800" y="2724912"/>
+            <a:ext cx="3611880" cy="1527048"/>
           </a:xfrm>
           <a:prstGeom prst="roundRect">
             <a:avLst>
-              <a:gd name="adj" fmla="val 7143"/>
+              <a:gd name="adj" fmla="val 7186"/>
             </a:avLst>
           </a:prstGeom>
           <a:solidFill>
@@ -5756,8 +5756,8 @@
         </p:nvSpPr>
         <p:spPr>
           <a:xfrm>
-            <a:off x="7799832" y="2816352"/>
-            <a:ext cx="3145536" cy="256032"/>
+            <a:off x="7708392" y="2852928"/>
+            <a:ext cx="3282696" cy="228600"/>
           </a:xfrm>
           <a:prstGeom prst="rect">
             <a:avLst/>
@@ -5773,7 +5773,7 @@
               <a:buNone/>
             </a:pPr>
             <a:r>
-              <a:rPr lang="en-US" sz="1300" b="1" dirty="0">
+              <a:rPr lang="en-US" sz="1220" b="1" dirty="0">
                 <a:solidFill>
                   <a:srgbClr val="0068B7"/>
                 </a:solidFill>
@@ -5783,7 +5783,7 @@
               </a:rPr>
               <a:t>Concept checkpoints</a:t>
             </a:r>
-            <a:endParaRPr lang="en-US" sz="1300" dirty="0"/>
+            <a:endParaRPr lang="en-US" sz="1220" dirty="0"/>
           </a:p>
         </p:txBody>
       </p:sp>
@@ -5795,8 +5795,8 @@
         </p:nvSpPr>
         <p:spPr>
           <a:xfrm>
-            <a:off x="7818120" y="3182112"/>
-            <a:ext cx="3090672" cy="877824"/>
+            <a:off x="7726680" y="3182112"/>
+            <a:ext cx="3227832" cy="960120"/>
           </a:xfrm>
           <a:prstGeom prst="rect">
             <a:avLst/>
@@ -5814,7 +5814,7 @@
               <a:buNone/>
             </a:pPr>
             <a:r>
-              <a:rPr lang="en-US" sz="1220" dirty="0">
+              <a:rPr lang="en-US" sz="1140" dirty="0">
                 <a:solidFill>
                   <a:srgbClr val="17364A"/>
                 </a:solidFill>
@@ -5824,14 +5824,14 @@
               </a:rPr>
               <a:t>Recommended guardrails include the following:</a:t>
             </a:r>
-            <a:endParaRPr lang="en-US" sz="1220" dirty="0"/>
-          </a:p>
-          <a:p>
-            <a:pPr indent="0" marL="0">
-              <a:buNone/>
-            </a:pPr>
-            <a:r>
-              <a:rPr lang="en-US" sz="1220" dirty="0">
+            <a:endParaRPr lang="en-US" sz="1140" dirty="0"/>
+          </a:p>
+          <a:p>
+            <a:pPr indent="0" marL="0">
+              <a:buNone/>
+            </a:pPr>
+            <a:r>
+              <a:rPr lang="en-US" sz="1140" dirty="0">
                 <a:solidFill>
                   <a:srgbClr val="17364A"/>
                 </a:solidFill>
@@ -5839,16 +5839,16 @@
                 <a:ea typeface="Aptos" pitchFamily="34" charset="-122"/>
                 <a:cs typeface="Aptos" pitchFamily="34" charset="-120"/>
               </a:rPr>
-              <a:t>Use only approved tools and approved source material for public.</a:t>
-            </a:r>
-            <a:endParaRPr lang="en-US" sz="1220" dirty="0"/>
-          </a:p>
-          <a:p>
-            <a:pPr indent="0" marL="0">
-              <a:buNone/>
-            </a:pPr>
-            <a:r>
-              <a:rPr lang="en-US" sz="1220" dirty="0">
+              <a:t>Use only approved tools and approved source.</a:t>
+            </a:r>
+            <a:endParaRPr lang="en-US" sz="1140" dirty="0"/>
+          </a:p>
+          <a:p>
+            <a:pPr indent="0" marL="0">
+              <a:buNone/>
+            </a:pPr>
+            <a:r>
+              <a:rPr lang="en-US" sz="1140" dirty="0">
                 <a:solidFill>
                   <a:srgbClr val="17364A"/>
                 </a:solidFill>
@@ -5856,9 +5856,9 @@
                 <a:ea typeface="Aptos" pitchFamily="34" charset="-122"/>
                 <a:cs typeface="Aptos" pitchFamily="34" charset="-120"/>
               </a:rPr>
-              <a:t>Require human review for accuracy, plain language, accessibility,.</a:t>
-            </a:r>
-            <a:endParaRPr lang="en-US" sz="1220" dirty="0"/>
+              <a:t>Require human review for accuracy, plain language,.</a:t>
+            </a:r>
+            <a:endParaRPr lang="en-US" sz="1140" dirty="0"/>
           </a:p>
         </p:txBody>
       </p:sp>
@@ -5870,12 +5870,12 @@
         </p:nvSpPr>
         <p:spPr>
           <a:xfrm>
-            <a:off x="7635240" y="4343400"/>
-            <a:ext cx="3474720" cy="1255471"/>
+            <a:off x="7543800" y="4389120"/>
+            <a:ext cx="3611880" cy="1261872"/>
           </a:xfrm>
           <a:prstGeom prst="roundRect">
             <a:avLst>
-              <a:gd name="adj" fmla="val 8740"/>
+              <a:gd name="adj" fmla="val 8696"/>
             </a:avLst>
           </a:prstGeom>
           <a:solidFill>
@@ -5897,8 +5897,8 @@
         </p:nvSpPr>
         <p:spPr>
           <a:xfrm>
-            <a:off x="7799832" y="4489704"/>
-            <a:ext cx="3145536" cy="256032"/>
+            <a:off x="7708392" y="4517136"/>
+            <a:ext cx="3282696" cy="228600"/>
           </a:xfrm>
           <a:prstGeom prst="rect">
             <a:avLst/>
@@ -5914,7 +5914,7 @@
               <a:buNone/>
             </a:pPr>
             <a:r>
-              <a:rPr lang="en-US" sz="1300" b="1" dirty="0">
+              <a:rPr lang="en-US" sz="1220" b="1" dirty="0">
                 <a:solidFill>
                   <a:srgbClr val="0068B7"/>
                 </a:solidFill>
@@ -5924,7 +5924,7 @@
               </a:rPr>
               <a:t>Safeguard to plan</a:t>
             </a:r>
-            <a:endParaRPr lang="en-US" sz="1300" dirty="0"/>
+            <a:endParaRPr lang="en-US" sz="1220" dirty="0"/>
           </a:p>
         </p:txBody>
       </p:sp>
@@ -5936,8 +5936,8 @@
         </p:nvSpPr>
         <p:spPr>
           <a:xfrm>
-            <a:off x="7799832" y="4818888"/>
-            <a:ext cx="3145536" cy="688543"/>
+            <a:off x="7708392" y="4828032"/>
+            <a:ext cx="3282696" cy="749808"/>
           </a:xfrm>
           <a:prstGeom prst="rect">
             <a:avLst/>
@@ -5955,7 +5955,7 @@
               <a:buNone/>
             </a:pPr>
             <a:r>
-              <a:rPr lang="en-US" sz="1320" dirty="0">
+              <a:rPr lang="en-US" sz="1220" dirty="0">
                 <a:solidFill>
                   <a:srgbClr val="17364A"/>
                 </a:solidFill>
@@ -5963,9 +5963,9 @@
                 <a:ea typeface="Aptos" pitchFamily="34" charset="-122"/>
                 <a:cs typeface="Aptos" pitchFamily="34" charset="-120"/>
               </a:rPr>
-              <a:t>Identify what could go wrong, who could be affected, what safeguards are needed, and what evidence should be reviewed before use.</a:t>
-            </a:r>
-            <a:endParaRPr lang="en-US" sz="1320" dirty="0"/>
+              <a:t>Identify what could go wrong, who could be affected, what safeguards are needed,.</a:t>
+            </a:r>
+            <a:endParaRPr lang="en-US" sz="1220" dirty="0"/>
           </a:p>
         </p:txBody>
       </p:sp>
@@ -6256,8 +6256,8 @@
         </p:nvSpPr>
         <p:spPr>
           <a:xfrm>
-            <a:off x="868680" y="1508760"/>
-            <a:ext cx="6309360" cy="4160520"/>
+            <a:off x="822960" y="1463040"/>
+            <a:ext cx="6565392" cy="4343400"/>
           </a:xfrm>
           <a:prstGeom prst="rect">
             <a:avLst/>
@@ -6275,7 +6275,7 @@
               <a:buNone/>
             </a:pPr>
             <a:r>
-              <a:rPr lang="en-US" sz="2100" dirty="0">
+              <a:rPr lang="en-US" sz="1920" dirty="0">
                 <a:solidFill>
                   <a:srgbClr val="003A63"/>
                 </a:solidFill>
@@ -6285,14 +6285,14 @@
               </a:rPr>
               <a:t>• Document source material used for public-facing claims.</a:t>
             </a:r>
-            <a:endParaRPr lang="en-US" sz="2100" dirty="0"/>
-          </a:p>
-          <a:p>
-            <a:pPr indent="0" marL="0">
-              <a:buNone/>
-            </a:pPr>
-            <a:r>
-              <a:rPr lang="en-US" sz="2100" dirty="0">
+            <a:endParaRPr lang="en-US" sz="1920" dirty="0"/>
+          </a:p>
+          <a:p>
+            <a:pPr indent="0" marL="0">
+              <a:buNone/>
+            </a:pPr>
+            <a:r>
+              <a:rPr lang="en-US" sz="1920" dirty="0">
                 <a:solidFill>
                   <a:srgbClr val="003A63"/>
                 </a:solidFill>
@@ -6302,14 +6302,14 @@
               </a:rPr>
               <a:t>• Use qualified review for translation and language access needs.</a:t>
             </a:r>
-            <a:endParaRPr lang="en-US" sz="2100" dirty="0"/>
-          </a:p>
-          <a:p>
-            <a:pPr indent="0" marL="0">
-              <a:buNone/>
-            </a:pPr>
-            <a:r>
-              <a:rPr lang="en-US" sz="2100" dirty="0">
+            <a:endParaRPr lang="en-US" sz="1920" dirty="0"/>
+          </a:p>
+          <a:p>
+            <a:pPr indent="0" marL="0">
+              <a:buNone/>
+            </a:pPr>
+            <a:r>
+              <a:rPr lang="en-US" sz="1920" dirty="0">
                 <a:solidFill>
                   <a:srgbClr val="003A63"/>
                 </a:solidFill>
@@ -6317,9 +6317,9 @@
                 <a:ea typeface="Aptos" pitchFamily="34" charset="-122"/>
                 <a:cs typeface="Aptos" pitchFamily="34" charset="-120"/>
               </a:rPr>
-              <a:t>• Route public-facing materials through the agency approval process before release.</a:t>
-            </a:r>
-            <a:endParaRPr lang="en-US" sz="2100" dirty="0"/>
+              <a:t>• Route public-facing materials through the agency approval process before.</a:t>
+            </a:r>
+            <a:endParaRPr lang="en-US" sz="1920" dirty="0"/>
           </a:p>
         </p:txBody>
       </p:sp>
@@ -6331,12 +6331,12 @@
         </p:nvSpPr>
         <p:spPr>
           <a:xfrm>
-            <a:off x="7635240" y="1325880"/>
-            <a:ext cx="3474720" cy="1207008"/>
+            <a:off x="7543800" y="1325880"/>
+            <a:ext cx="3611880" cy="1261872"/>
           </a:xfrm>
           <a:prstGeom prst="roundRect">
             <a:avLst>
-              <a:gd name="adj" fmla="val 9091"/>
+              <a:gd name="adj" fmla="val 8696"/>
             </a:avLst>
           </a:prstGeom>
           <a:solidFill>
@@ -6358,8 +6358,8 @@
         </p:nvSpPr>
         <p:spPr>
           <a:xfrm>
-            <a:off x="7799832" y="1472184"/>
-            <a:ext cx="3145536" cy="256032"/>
+            <a:off x="7708392" y="1453896"/>
+            <a:ext cx="3282696" cy="228600"/>
           </a:xfrm>
           <a:prstGeom prst="rect">
             <a:avLst/>
@@ -6375,7 +6375,7 @@
               <a:buNone/>
             </a:pPr>
             <a:r>
-              <a:rPr lang="en-US" sz="1300" b="1" dirty="0">
+              <a:rPr lang="en-US" sz="1220" b="1" dirty="0">
                 <a:solidFill>
                   <a:srgbClr val="0068B7"/>
                 </a:solidFill>
@@ -6385,7 +6385,7 @@
               </a:rPr>
               <a:t>Risk check</a:t>
             </a:r>
-            <a:endParaRPr lang="en-US" sz="1300" dirty="0"/>
+            <a:endParaRPr lang="en-US" sz="1220" dirty="0"/>
           </a:p>
         </p:txBody>
       </p:sp>
@@ -6397,8 +6397,8 @@
         </p:nvSpPr>
         <p:spPr>
           <a:xfrm>
-            <a:off x="7799832" y="1801368"/>
-            <a:ext cx="3145536" cy="640080"/>
+            <a:off x="7708392" y="1764792"/>
+            <a:ext cx="3282696" cy="749808"/>
           </a:xfrm>
           <a:prstGeom prst="rect">
             <a:avLst/>
@@ -6416,7 +6416,7 @@
               <a:buNone/>
             </a:pPr>
             <a:r>
-              <a:rPr lang="en-US" sz="1320" dirty="0">
+              <a:rPr lang="en-US" sz="1220" dirty="0">
                 <a:solidFill>
                   <a:srgbClr val="17364A"/>
                 </a:solidFill>
@@ -6426,7 +6426,7 @@
               </a:rPr>
               <a:t>Document source material used for public-facing claims.</a:t>
             </a:r>
-            <a:endParaRPr lang="en-US" sz="1320" dirty="0"/>
+            <a:endParaRPr lang="en-US" sz="1220" dirty="0"/>
           </a:p>
         </p:txBody>
       </p:sp>
@@ -6438,12 +6438,12 @@
         </p:nvSpPr>
         <p:spPr>
           <a:xfrm>
-            <a:off x="7635240" y="2670048"/>
-            <a:ext cx="3474720" cy="1536192"/>
+            <a:off x="7543800" y="2724912"/>
+            <a:ext cx="3611880" cy="1527048"/>
           </a:xfrm>
           <a:prstGeom prst="roundRect">
             <a:avLst>
-              <a:gd name="adj" fmla="val 7143"/>
+              <a:gd name="adj" fmla="val 7186"/>
             </a:avLst>
           </a:prstGeom>
           <a:solidFill>
@@ -6465,8 +6465,8 @@
         </p:nvSpPr>
         <p:spPr>
           <a:xfrm>
-            <a:off x="7799832" y="2816352"/>
-            <a:ext cx="3145536" cy="256032"/>
+            <a:off x="7708392" y="2852928"/>
+            <a:ext cx="3282696" cy="228600"/>
           </a:xfrm>
           <a:prstGeom prst="rect">
             <a:avLst/>
@@ -6482,7 +6482,7 @@
               <a:buNone/>
             </a:pPr>
             <a:r>
-              <a:rPr lang="en-US" sz="1300" b="1" dirty="0">
+              <a:rPr lang="en-US" sz="1220" b="1" dirty="0">
                 <a:solidFill>
                   <a:srgbClr val="0068B7"/>
                 </a:solidFill>
@@ -6492,7 +6492,7 @@
               </a:rPr>
               <a:t>Concept checkpoints</a:t>
             </a:r>
-            <a:endParaRPr lang="en-US" sz="1300" dirty="0"/>
+            <a:endParaRPr lang="en-US" sz="1220" dirty="0"/>
           </a:p>
         </p:txBody>
       </p:sp>
@@ -6504,8 +6504,8 @@
         </p:nvSpPr>
         <p:spPr>
           <a:xfrm>
-            <a:off x="7818120" y="3182112"/>
-            <a:ext cx="3090672" cy="877824"/>
+            <a:off x="7726680" y="3182112"/>
+            <a:ext cx="3227832" cy="960120"/>
           </a:xfrm>
           <a:prstGeom prst="rect">
             <a:avLst/>
@@ -6523,7 +6523,7 @@
               <a:buNone/>
             </a:pPr>
             <a:r>
-              <a:rPr lang="en-US" sz="1220" dirty="0">
+              <a:rPr lang="en-US" sz="1140" dirty="0">
                 <a:solidFill>
                   <a:srgbClr val="17364A"/>
                 </a:solidFill>
@@ -6531,16 +6531,16 @@
                 <a:ea typeface="Aptos" pitchFamily="34" charset="-122"/>
                 <a:cs typeface="Aptos" pitchFamily="34" charset="-120"/>
               </a:rPr>
-              <a:t>Document source material used for public-facing claims.</a:t>
-            </a:r>
-            <a:endParaRPr lang="en-US" sz="1220" dirty="0"/>
-          </a:p>
-          <a:p>
-            <a:pPr indent="0" marL="0">
-              <a:buNone/>
-            </a:pPr>
-            <a:r>
-              <a:rPr lang="en-US" sz="1220" dirty="0">
+              <a:t>Document source material used for public-facing.</a:t>
+            </a:r>
+            <a:endParaRPr lang="en-US" sz="1140" dirty="0"/>
+          </a:p>
+          <a:p>
+            <a:pPr indent="0" marL="0">
+              <a:buNone/>
+            </a:pPr>
+            <a:r>
+              <a:rPr lang="en-US" sz="1140" dirty="0">
                 <a:solidFill>
                   <a:srgbClr val="17364A"/>
                 </a:solidFill>
@@ -6548,16 +6548,16 @@
                 <a:ea typeface="Aptos" pitchFamily="34" charset="-122"/>
                 <a:cs typeface="Aptos" pitchFamily="34" charset="-120"/>
               </a:rPr>
-              <a:t>Use qualified review for translation and language access needs.</a:t>
-            </a:r>
-            <a:endParaRPr lang="en-US" sz="1220" dirty="0"/>
-          </a:p>
-          <a:p>
-            <a:pPr indent="0" marL="0">
-              <a:buNone/>
-            </a:pPr>
-            <a:r>
-              <a:rPr lang="en-US" sz="1220" dirty="0">
+              <a:t>Use qualified review for translation and language.</a:t>
+            </a:r>
+            <a:endParaRPr lang="en-US" sz="1140" dirty="0"/>
+          </a:p>
+          <a:p>
+            <a:pPr indent="0" marL="0">
+              <a:buNone/>
+            </a:pPr>
+            <a:r>
+              <a:rPr lang="en-US" sz="1140" dirty="0">
                 <a:solidFill>
                   <a:srgbClr val="17364A"/>
                 </a:solidFill>
@@ -6565,9 +6565,9 @@
                 <a:ea typeface="Aptos" pitchFamily="34" charset="-122"/>
                 <a:cs typeface="Aptos" pitchFamily="34" charset="-120"/>
               </a:rPr>
-              <a:t>Route public-facing materials through the agency approval process.</a:t>
-            </a:r>
-            <a:endParaRPr lang="en-US" sz="1220" dirty="0"/>
+              <a:t>Route public-facing materials through the agency.</a:t>
+            </a:r>
+            <a:endParaRPr lang="en-US" sz="1140" dirty="0"/>
           </a:p>
         </p:txBody>
       </p:sp>
@@ -6579,12 +6579,12 @@
         </p:nvSpPr>
         <p:spPr>
           <a:xfrm>
-            <a:off x="7635240" y="4343400"/>
-            <a:ext cx="3474720" cy="1255471"/>
+            <a:off x="7543800" y="4389120"/>
+            <a:ext cx="3611880" cy="1261872"/>
           </a:xfrm>
           <a:prstGeom prst="roundRect">
             <a:avLst>
-              <a:gd name="adj" fmla="val 8740"/>
+              <a:gd name="adj" fmla="val 8696"/>
             </a:avLst>
           </a:prstGeom>
           <a:solidFill>
@@ -6606,8 +6606,8 @@
         </p:nvSpPr>
         <p:spPr>
           <a:xfrm>
-            <a:off x="7799832" y="4489704"/>
-            <a:ext cx="3145536" cy="256032"/>
+            <a:off x="7708392" y="4517136"/>
+            <a:ext cx="3282696" cy="228600"/>
           </a:xfrm>
           <a:prstGeom prst="rect">
             <a:avLst/>
@@ -6623,7 +6623,7 @@
               <a:buNone/>
             </a:pPr>
             <a:r>
-              <a:rPr lang="en-US" sz="1300" b="1" dirty="0">
+              <a:rPr lang="en-US" sz="1220" b="1" dirty="0">
                 <a:solidFill>
                   <a:srgbClr val="0068B7"/>
                 </a:solidFill>
@@ -6633,7 +6633,7 @@
               </a:rPr>
               <a:t>Safeguard to plan</a:t>
             </a:r>
-            <a:endParaRPr lang="en-US" sz="1300" dirty="0"/>
+            <a:endParaRPr lang="en-US" sz="1220" dirty="0"/>
           </a:p>
         </p:txBody>
       </p:sp>
@@ -6645,8 +6645,8 @@
         </p:nvSpPr>
         <p:spPr>
           <a:xfrm>
-            <a:off x="7799832" y="4818888"/>
-            <a:ext cx="3145536" cy="688543"/>
+            <a:off x="7708392" y="4828032"/>
+            <a:ext cx="3282696" cy="749808"/>
           </a:xfrm>
           <a:prstGeom prst="rect">
             <a:avLst/>
@@ -6664,7 +6664,7 @@
               <a:buNone/>
             </a:pPr>
             <a:r>
-              <a:rPr lang="en-US" sz="1320" dirty="0">
+              <a:rPr lang="en-US" sz="1220" dirty="0">
                 <a:solidFill>
                   <a:srgbClr val="17364A"/>
                 </a:solidFill>
@@ -6672,9 +6672,9 @@
                 <a:ea typeface="Aptos" pitchFamily="34" charset="-122"/>
                 <a:cs typeface="Aptos" pitchFamily="34" charset="-120"/>
               </a:rPr>
-              <a:t>Identify what could go wrong, who could be affected, what safeguards are needed, and what evidence should be reviewed before use.</a:t>
-            </a:r>
-            <a:endParaRPr lang="en-US" sz="1320" dirty="0"/>
+              <a:t>Identify what could go wrong, who could be affected, what safeguards are needed,.</a:t>
+            </a:r>
+            <a:endParaRPr lang="en-US" sz="1220" dirty="0"/>
           </a:p>
         </p:txBody>
       </p:sp>
@@ -6965,8 +6965,8 @@
         </p:nvSpPr>
         <p:spPr>
           <a:xfrm>
-            <a:off x="868680" y="1508760"/>
-            <a:ext cx="6309360" cy="4160520"/>
+            <a:off x="822960" y="1463040"/>
+            <a:ext cx="6565392" cy="4343400"/>
           </a:xfrm>
           <a:prstGeom prst="rect">
             <a:avLst/>
@@ -6984,7 +6984,7 @@
               <a:buNone/>
             </a:pPr>
             <a:r>
-              <a:rPr lang="en-US" sz="2100" dirty="0">
+              <a:rPr lang="en-US" sz="1920" dirty="0">
                 <a:solidFill>
                   <a:srgbClr val="003A63"/>
                 </a:solidFill>
@@ -6994,14 +6994,14 @@
               </a:rPr>
               <a:t>• Where does this topic appear in your agency, program, or workflow?</a:t>
             </a:r>
-            <a:endParaRPr lang="en-US" sz="2100" dirty="0"/>
-          </a:p>
-          <a:p>
-            <a:pPr indent="0" marL="0">
-              <a:buNone/>
-            </a:pPr>
-            <a:r>
-              <a:rPr lang="en-US" sz="2100" dirty="0">
+            <a:endParaRPr lang="en-US" sz="1920" dirty="0"/>
+          </a:p>
+          <a:p>
+            <a:pPr indent="0" marL="0">
+              <a:buNone/>
+            </a:pPr>
+            <a:r>
+              <a:rPr lang="en-US" sz="1920" dirty="0">
                 <a:solidFill>
                   <a:srgbClr val="003A63"/>
                 </a:solidFill>
@@ -7009,16 +7009,16 @@
                 <a:ea typeface="Aptos" pitchFamily="34" charset="-122"/>
                 <a:cs typeface="Aptos" pitchFamily="34" charset="-120"/>
               </a:rPr>
-              <a:t>• Which staff roles would need to understand or apply this concept before AI use is approved?</a:t>
-            </a:r>
-            <a:endParaRPr lang="en-US" sz="2100" dirty="0"/>
-          </a:p>
-          <a:p>
-            <a:pPr indent="0" marL="0">
-              <a:buNone/>
-            </a:pPr>
-            <a:r>
-              <a:rPr lang="en-US" sz="2100" dirty="0">
+              <a:t>• Which staff roles would need to understand or apply this concept before AI.</a:t>
+            </a:r>
+            <a:endParaRPr lang="en-US" sz="1920" dirty="0"/>
+          </a:p>
+          <a:p>
+            <a:pPr indent="0" marL="0">
+              <a:buNone/>
+            </a:pPr>
+            <a:r>
+              <a:rPr lang="en-US" sz="1920" dirty="0">
                 <a:solidFill>
                   <a:srgbClr val="003A63"/>
                 </a:solidFill>
@@ -7028,7 +7028,7 @@
               </a:rPr>
               <a:t>• What could go wrong if this topic is not addressed before implementation?</a:t>
             </a:r>
-            <a:endParaRPr lang="en-US" sz="2100" dirty="0"/>
+            <a:endParaRPr lang="en-US" sz="1920" dirty="0"/>
           </a:p>
         </p:txBody>
       </p:sp>
@@ -7040,12 +7040,12 @@
         </p:nvSpPr>
         <p:spPr>
           <a:xfrm>
-            <a:off x="7635240" y="1325880"/>
-            <a:ext cx="3474720" cy="1207008"/>
+            <a:off x="7543800" y="1325880"/>
+            <a:ext cx="3611880" cy="1261872"/>
           </a:xfrm>
           <a:prstGeom prst="roundRect">
             <a:avLst>
-              <a:gd name="adj" fmla="val 9091"/>
+              <a:gd name="adj" fmla="val 8696"/>
             </a:avLst>
           </a:prstGeom>
           <a:solidFill>
@@ -7067,8 +7067,8 @@
         </p:nvSpPr>
         <p:spPr>
           <a:xfrm>
-            <a:off x="7799832" y="1472184"/>
-            <a:ext cx="3145536" cy="256032"/>
+            <a:off x="7708392" y="1453896"/>
+            <a:ext cx="3282696" cy="228600"/>
           </a:xfrm>
           <a:prstGeom prst="rect">
             <a:avLst/>
@@ -7084,7 +7084,7 @@
               <a:buNone/>
             </a:pPr>
             <a:r>
-              <a:rPr lang="en-US" sz="1300" b="1" dirty="0">
+              <a:rPr lang="en-US" sz="1220" b="1" dirty="0">
                 <a:solidFill>
                   <a:srgbClr val="0068B7"/>
                 </a:solidFill>
@@ -7094,7 +7094,7 @@
               </a:rPr>
               <a:t>Public health lens</a:t>
             </a:r>
-            <a:endParaRPr lang="en-US" sz="1300" dirty="0"/>
+            <a:endParaRPr lang="en-US" sz="1220" dirty="0"/>
           </a:p>
         </p:txBody>
       </p:sp>
@@ -7106,8 +7106,8 @@
         </p:nvSpPr>
         <p:spPr>
           <a:xfrm>
-            <a:off x="7799832" y="1801368"/>
-            <a:ext cx="3145536" cy="640080"/>
+            <a:off x="7708392" y="1764792"/>
+            <a:ext cx="3282696" cy="749808"/>
           </a:xfrm>
           <a:prstGeom prst="rect">
             <a:avLst/>
@@ -7125,7 +7125,7 @@
               <a:buNone/>
             </a:pPr>
             <a:r>
-              <a:rPr lang="en-US" sz="1320" dirty="0">
+              <a:rPr lang="en-US" sz="1220" dirty="0">
                 <a:solidFill>
                   <a:srgbClr val="17364A"/>
                 </a:solidFill>
@@ -7135,7 +7135,7 @@
               </a:rPr>
               <a:t>Where does this topic appear in your agency, program, or workflow?</a:t>
             </a:r>
-            <a:endParaRPr lang="en-US" sz="1320" dirty="0"/>
+            <a:endParaRPr lang="en-US" sz="1220" dirty="0"/>
           </a:p>
         </p:txBody>
       </p:sp>
@@ -7147,12 +7147,12 @@
         </p:nvSpPr>
         <p:spPr>
           <a:xfrm>
-            <a:off x="7635240" y="2670048"/>
-            <a:ext cx="3474720" cy="1377086"/>
+            <a:off x="7543800" y="2724912"/>
+            <a:ext cx="3611880" cy="1527048"/>
           </a:xfrm>
           <a:prstGeom prst="roundRect">
             <a:avLst>
-              <a:gd name="adj" fmla="val 7968"/>
+              <a:gd name="adj" fmla="val 7186"/>
             </a:avLst>
           </a:prstGeom>
           <a:solidFill>
@@ -7174,8 +7174,8 @@
         </p:nvSpPr>
         <p:spPr>
           <a:xfrm>
-            <a:off x="7799832" y="2816352"/>
-            <a:ext cx="3145536" cy="256032"/>
+            <a:off x="7708392" y="2852928"/>
+            <a:ext cx="3282696" cy="228600"/>
           </a:xfrm>
           <a:prstGeom prst="rect">
             <a:avLst/>
@@ -7191,7 +7191,7 @@
               <a:buNone/>
             </a:pPr>
             <a:r>
-              <a:rPr lang="en-US" sz="1300" b="1" dirty="0">
+              <a:rPr lang="en-US" sz="1220" b="1" dirty="0">
                 <a:solidFill>
                   <a:srgbClr val="0068B7"/>
                 </a:solidFill>
@@ -7201,7 +7201,7 @@
               </a:rPr>
               <a:t>Concept checkpoints</a:t>
             </a:r>
-            <a:endParaRPr lang="en-US" sz="1300" dirty="0"/>
+            <a:endParaRPr lang="en-US" sz="1220" dirty="0"/>
           </a:p>
         </p:txBody>
       </p:sp>
@@ -7213,8 +7213,8 @@
         </p:nvSpPr>
         <p:spPr>
           <a:xfrm>
-            <a:off x="7818120" y="3182112"/>
-            <a:ext cx="3090672" cy="718718"/>
+            <a:off x="7726680" y="3182112"/>
+            <a:ext cx="3227832" cy="960120"/>
           </a:xfrm>
           <a:prstGeom prst="rect">
             <a:avLst/>
@@ -7232,7 +7232,7 @@
               <a:buNone/>
             </a:pPr>
             <a:r>
-              <a:rPr lang="en-US" sz="1220" dirty="0">
+              <a:rPr lang="en-US" sz="1140" dirty="0">
                 <a:solidFill>
                   <a:srgbClr val="17364A"/>
                 </a:solidFill>
@@ -7240,16 +7240,16 @@
                 <a:ea typeface="Aptos" pitchFamily="34" charset="-122"/>
                 <a:cs typeface="Aptos" pitchFamily="34" charset="-120"/>
               </a:rPr>
-              <a:t>Where does this topic appear in your agency, program, or workflow?</a:t>
-            </a:r>
-            <a:endParaRPr lang="en-US" sz="1220" dirty="0"/>
-          </a:p>
-          <a:p>
-            <a:pPr indent="0" marL="0">
-              <a:buNone/>
-            </a:pPr>
-            <a:r>
-              <a:rPr lang="en-US" sz="1220" dirty="0">
+              <a:t>Where does this topic appear in your agency,.</a:t>
+            </a:r>
+            <a:endParaRPr lang="en-US" sz="1140" dirty="0"/>
+          </a:p>
+          <a:p>
+            <a:pPr indent="0" marL="0">
+              <a:buNone/>
+            </a:pPr>
+            <a:r>
+              <a:rPr lang="en-US" sz="1140" dirty="0">
                 <a:solidFill>
                   <a:srgbClr val="17364A"/>
                 </a:solidFill>
@@ -7257,16 +7257,16 @@
                 <a:ea typeface="Aptos" pitchFamily="34" charset="-122"/>
                 <a:cs typeface="Aptos" pitchFamily="34" charset="-120"/>
               </a:rPr>
-              <a:t>Which staff roles would need to understand or apply this concept.</a:t>
-            </a:r>
-            <a:endParaRPr lang="en-US" sz="1220" dirty="0"/>
-          </a:p>
-          <a:p>
-            <a:pPr indent="0" marL="0">
-              <a:buNone/>
-            </a:pPr>
-            <a:r>
-              <a:rPr lang="en-US" sz="1220" dirty="0">
+              <a:t>Which staff roles would need to understand or.</a:t>
+            </a:r>
+            <a:endParaRPr lang="en-US" sz="1140" dirty="0"/>
+          </a:p>
+          <a:p>
+            <a:pPr indent="0" marL="0">
+              <a:buNone/>
+            </a:pPr>
+            <a:r>
+              <a:rPr lang="en-US" sz="1140" dirty="0">
                 <a:solidFill>
                   <a:srgbClr val="17364A"/>
                 </a:solidFill>
@@ -7274,9 +7274,9 @@
                 <a:ea typeface="Aptos" pitchFamily="34" charset="-122"/>
                 <a:cs typeface="Aptos" pitchFamily="34" charset="-120"/>
               </a:rPr>
-              <a:t>What could go wrong if this topic is not addressed before.</a:t>
-            </a:r>
-            <a:endParaRPr lang="en-US" sz="1220" dirty="0"/>
+              <a:t>What could go wrong if this topic is not addressed.</a:t>
+            </a:r>
+            <a:endParaRPr lang="en-US" sz="1140" dirty="0"/>
           </a:p>
         </p:txBody>
       </p:sp>
@@ -7288,12 +7288,12 @@
         </p:nvSpPr>
         <p:spPr>
           <a:xfrm>
-            <a:off x="7635240" y="4184294"/>
-            <a:ext cx="3474720" cy="1466698"/>
+            <a:off x="7543800" y="4389120"/>
+            <a:ext cx="3611880" cy="1261872"/>
           </a:xfrm>
           <a:prstGeom prst="roundRect">
             <a:avLst>
-              <a:gd name="adj" fmla="val 7481"/>
+              <a:gd name="adj" fmla="val 8696"/>
             </a:avLst>
           </a:prstGeom>
           <a:solidFill>
@@ -7315,8 +7315,8 @@
         </p:nvSpPr>
         <p:spPr>
           <a:xfrm>
-            <a:off x="7799832" y="4330598"/>
-            <a:ext cx="3145536" cy="256032"/>
+            <a:off x="7708392" y="4517136"/>
+            <a:ext cx="3282696" cy="228600"/>
           </a:xfrm>
           <a:prstGeom prst="rect">
             <a:avLst/>
@@ -7332,7 +7332,7 @@
               <a:buNone/>
             </a:pPr>
             <a:r>
-              <a:rPr lang="en-US" sz="1300" b="1" dirty="0">
+              <a:rPr lang="en-US" sz="1220" b="1" dirty="0">
                 <a:solidFill>
                   <a:srgbClr val="0068B7"/>
                 </a:solidFill>
@@ -7342,7 +7342,7 @@
               </a:rPr>
               <a:t>Engagement move</a:t>
             </a:r>
-            <a:endParaRPr lang="en-US" sz="1300" dirty="0"/>
+            <a:endParaRPr lang="en-US" sz="1220" dirty="0"/>
           </a:p>
         </p:txBody>
       </p:sp>
@@ -7354,8 +7354,8 @@
         </p:nvSpPr>
         <p:spPr>
           <a:xfrm>
-            <a:off x="7799832" y="4659782"/>
-            <a:ext cx="3145536" cy="899770"/>
+            <a:off x="7708392" y="4828032"/>
+            <a:ext cx="3282696" cy="749808"/>
           </a:xfrm>
           <a:prstGeom prst="rect">
             <a:avLst/>
@@ -7373,7 +7373,7 @@
               <a:buNone/>
             </a:pPr>
             <a:r>
-              <a:rPr lang="en-US" sz="1320" dirty="0">
+              <a:rPr lang="en-US" sz="1220" dirty="0">
                 <a:solidFill>
                   <a:srgbClr val="17364A"/>
                 </a:solidFill>
@@ -7381,9 +7381,9 @@
                 <a:ea typeface="Aptos" pitchFamily="34" charset="-122"/>
                 <a:cs typeface="Aptos" pitchFamily="34" charset="-120"/>
               </a:rPr>
-              <a:t>Use the concept to plan transparent communication, gather stakeholder input, protect trust, and make sure affected communities are considered early.</a:t>
-            </a:r>
-            <a:endParaRPr lang="en-US" sz="1320" dirty="0"/>
+              <a:t>Use the concept to plan transparent communication, gather stakeholder input,.</a:t>
+            </a:r>
+            <a:endParaRPr lang="en-US" sz="1220" dirty="0"/>
           </a:p>
         </p:txBody>
       </p:sp>
@@ -7674,8 +7674,8 @@
         </p:nvSpPr>
         <p:spPr>
           <a:xfrm>
-            <a:off x="868680" y="1508760"/>
-            <a:ext cx="6309360" cy="4160520"/>
+            <a:off x="822960" y="1463040"/>
+            <a:ext cx="6565392" cy="4343400"/>
           </a:xfrm>
           <a:prstGeom prst="rect">
             <a:avLst/>
@@ -7693,7 +7693,7 @@
               <a:buNone/>
             </a:pPr>
             <a:r>
-              <a:rPr lang="en-US" sz="2100" dirty="0">
+              <a:rPr lang="en-US" sz="1920" dirty="0">
                 <a:solidFill>
                   <a:srgbClr val="003A63"/>
                 </a:solidFill>
@@ -7701,16 +7701,16 @@
                 <a:ea typeface="Aptos" pitchFamily="34" charset="-122"/>
                 <a:cs typeface="Aptos" pitchFamily="34" charset="-120"/>
               </a:rPr>
-              <a:t>• What evidence would governance, leadership, or operations staff need before moving forward?</a:t>
-            </a:r>
-            <a:endParaRPr lang="en-US" sz="2100" dirty="0"/>
-          </a:p>
-          <a:p>
-            <a:pPr indent="0" marL="0">
-              <a:buNone/>
-            </a:pPr>
-            <a:r>
-              <a:rPr lang="en-US" sz="2100" dirty="0">
+              <a:t>• What evidence would governance, leadership, or operations staff need before.</a:t>
+            </a:r>
+            <a:endParaRPr lang="en-US" sz="1920" dirty="0"/>
+          </a:p>
+          <a:p>
+            <a:pPr indent="0" marL="0">
+              <a:buNone/>
+            </a:pPr>
+            <a:r>
+              <a:rPr lang="en-US" sz="1920" dirty="0">
                 <a:solidFill>
                   <a:srgbClr val="003A63"/>
                 </a:solidFill>
@@ -7718,9 +7718,9 @@
                 <a:ea typeface="Aptos" pitchFamily="34" charset="-122"/>
                 <a:cs typeface="Aptos" pitchFamily="34" charset="-120"/>
               </a:rPr>
-              <a:t>• Which policy, data, equity, privacy, security, or workflow questions remain unresolved?</a:t>
-            </a:r>
-            <a:endParaRPr lang="en-US" sz="2100" dirty="0"/>
+              <a:t>• Which policy, data, equity, privacy, security, or workflow questions remain.</a:t>
+            </a:r>
+            <a:endParaRPr lang="en-US" sz="1920" dirty="0"/>
           </a:p>
         </p:txBody>
       </p:sp>
@@ -7732,12 +7732,12 @@
         </p:nvSpPr>
         <p:spPr>
           <a:xfrm>
-            <a:off x="7635240" y="1325880"/>
-            <a:ext cx="3474720" cy="1207008"/>
+            <a:off x="7543800" y="1325880"/>
+            <a:ext cx="3611880" cy="1261872"/>
           </a:xfrm>
           <a:prstGeom prst="roundRect">
             <a:avLst>
-              <a:gd name="adj" fmla="val 9091"/>
+              <a:gd name="adj" fmla="val 8696"/>
             </a:avLst>
           </a:prstGeom>
           <a:solidFill>
@@ -7759,8 +7759,8 @@
         </p:nvSpPr>
         <p:spPr>
           <a:xfrm>
-            <a:off x="7799832" y="1472184"/>
-            <a:ext cx="3145536" cy="256032"/>
+            <a:off x="7708392" y="1453896"/>
+            <a:ext cx="3282696" cy="228600"/>
           </a:xfrm>
           <a:prstGeom prst="rect">
             <a:avLst/>
@@ -7776,7 +7776,7 @@
               <a:buNone/>
             </a:pPr>
             <a:r>
-              <a:rPr lang="en-US" sz="1300" b="1" dirty="0">
+              <a:rPr lang="en-US" sz="1220" b="1" dirty="0">
                 <a:solidFill>
                   <a:srgbClr val="0068B7"/>
                 </a:solidFill>
@@ -7786,7 +7786,7 @@
               </a:rPr>
               <a:t>Public health lens</a:t>
             </a:r>
-            <a:endParaRPr lang="en-US" sz="1300" dirty="0"/>
+            <a:endParaRPr lang="en-US" sz="1220" dirty="0"/>
           </a:p>
         </p:txBody>
       </p:sp>
@@ -7798,8 +7798,8 @@
         </p:nvSpPr>
         <p:spPr>
           <a:xfrm>
-            <a:off x="7799832" y="1801368"/>
-            <a:ext cx="3145536" cy="640080"/>
+            <a:off x="7708392" y="1764792"/>
+            <a:ext cx="3282696" cy="749808"/>
           </a:xfrm>
           <a:prstGeom prst="rect">
             <a:avLst/>
@@ -7817,7 +7817,7 @@
               <a:buNone/>
             </a:pPr>
             <a:r>
-              <a:rPr lang="en-US" sz="1320" dirty="0">
+              <a:rPr lang="en-US" sz="1220" dirty="0">
                 <a:solidFill>
                   <a:srgbClr val="17364A"/>
                 </a:solidFill>
@@ -7825,9 +7825,9 @@
                 <a:ea typeface="Aptos" pitchFamily="34" charset="-122"/>
                 <a:cs typeface="Aptos" pitchFamily="34" charset="-120"/>
               </a:rPr>
-              <a:t>What evidence would governance, leadership, or operations staff need before moving.</a:t>
-            </a:r>
-            <a:endParaRPr lang="en-US" sz="1320" dirty="0"/>
+              <a:t>What evidence would governance, leadership, or operations staff need before.</a:t>
+            </a:r>
+            <a:endParaRPr lang="en-US" sz="1220" dirty="0"/>
           </a:p>
         </p:txBody>
       </p:sp>
@@ -7839,12 +7839,12 @@
         </p:nvSpPr>
         <p:spPr>
           <a:xfrm>
-            <a:off x="7635240" y="2670048"/>
-            <a:ext cx="3474720" cy="1377086"/>
+            <a:off x="7543800" y="2724912"/>
+            <a:ext cx="3611880" cy="1527048"/>
           </a:xfrm>
           <a:prstGeom prst="roundRect">
             <a:avLst>
-              <a:gd name="adj" fmla="val 7968"/>
+              <a:gd name="adj" fmla="val 7186"/>
             </a:avLst>
           </a:prstGeom>
           <a:solidFill>
@@ -7866,8 +7866,8 @@
         </p:nvSpPr>
         <p:spPr>
           <a:xfrm>
-            <a:off x="7799832" y="2816352"/>
-            <a:ext cx="3145536" cy="256032"/>
+            <a:off x="7708392" y="2852928"/>
+            <a:ext cx="3282696" cy="228600"/>
           </a:xfrm>
           <a:prstGeom prst="rect">
             <a:avLst/>
@@ -7883,7 +7883,7 @@
               <a:buNone/>
             </a:pPr>
             <a:r>
-              <a:rPr lang="en-US" sz="1300" b="1" dirty="0">
+              <a:rPr lang="en-US" sz="1220" b="1" dirty="0">
                 <a:solidFill>
                   <a:srgbClr val="0068B7"/>
                 </a:solidFill>
@@ -7893,7 +7893,7 @@
               </a:rPr>
               <a:t>Concept checkpoints</a:t>
             </a:r>
-            <a:endParaRPr lang="en-US" sz="1300" dirty="0"/>
+            <a:endParaRPr lang="en-US" sz="1220" dirty="0"/>
           </a:p>
         </p:txBody>
       </p:sp>
@@ -7905,8 +7905,8 @@
         </p:nvSpPr>
         <p:spPr>
           <a:xfrm>
-            <a:off x="7818120" y="3182112"/>
-            <a:ext cx="3090672" cy="718718"/>
+            <a:off x="7726680" y="3182112"/>
+            <a:ext cx="3227832" cy="960120"/>
           </a:xfrm>
           <a:prstGeom prst="rect">
             <a:avLst/>
@@ -7924,7 +7924,7 @@
               <a:buNone/>
             </a:pPr>
             <a:r>
-              <a:rPr lang="en-US" sz="1220" dirty="0">
+              <a:rPr lang="en-US" sz="1140" dirty="0">
                 <a:solidFill>
                   <a:srgbClr val="17364A"/>
                 </a:solidFill>
@@ -7932,16 +7932,16 @@
                 <a:ea typeface="Aptos" pitchFamily="34" charset="-122"/>
                 <a:cs typeface="Aptos" pitchFamily="34" charset="-120"/>
               </a:rPr>
-              <a:t>What evidence would governance, leadership, or operations staff.</a:t>
-            </a:r>
-            <a:endParaRPr lang="en-US" sz="1220" dirty="0"/>
-          </a:p>
-          <a:p>
-            <a:pPr indent="0" marL="0">
-              <a:buNone/>
-            </a:pPr>
-            <a:r>
-              <a:rPr lang="en-US" sz="1220" dirty="0">
+              <a:t>What evidence would governance, leadership, or.</a:t>
+            </a:r>
+            <a:endParaRPr lang="en-US" sz="1140" dirty="0"/>
+          </a:p>
+          <a:p>
+            <a:pPr indent="0" marL="0">
+              <a:buNone/>
+            </a:pPr>
+            <a:r>
+              <a:rPr lang="en-US" sz="1140" dirty="0">
                 <a:solidFill>
                   <a:srgbClr val="17364A"/>
                 </a:solidFill>
@@ -7949,9 +7949,9 @@
                 <a:ea typeface="Aptos" pitchFamily="34" charset="-122"/>
                 <a:cs typeface="Aptos" pitchFamily="34" charset="-120"/>
               </a:rPr>
-              <a:t>Which policy, data, equity, privacy, security, or workflow.</a:t>
-            </a:r>
-            <a:endParaRPr lang="en-US" sz="1220" dirty="0"/>
+              <a:t>Which policy, data, equity, privacy, security, or.</a:t>
+            </a:r>
+            <a:endParaRPr lang="en-US" sz="1140" dirty="0"/>
           </a:p>
         </p:txBody>
       </p:sp>
@@ -7963,12 +7963,12 @@
         </p:nvSpPr>
         <p:spPr>
           <a:xfrm>
-            <a:off x="7635240" y="4184294"/>
-            <a:ext cx="3474720" cy="1466698"/>
+            <a:off x="7543800" y="4389120"/>
+            <a:ext cx="3611880" cy="1261872"/>
           </a:xfrm>
           <a:prstGeom prst="roundRect">
             <a:avLst>
-              <a:gd name="adj" fmla="val 7481"/>
+              <a:gd name="adj" fmla="val 8696"/>
             </a:avLst>
           </a:prstGeom>
           <a:solidFill>
@@ -7990,8 +7990,8 @@
         </p:nvSpPr>
         <p:spPr>
           <a:xfrm>
-            <a:off x="7799832" y="4330598"/>
-            <a:ext cx="3145536" cy="256032"/>
+            <a:off x="7708392" y="4517136"/>
+            <a:ext cx="3282696" cy="228600"/>
           </a:xfrm>
           <a:prstGeom prst="rect">
             <a:avLst/>
@@ -8007,7 +8007,7 @@
               <a:buNone/>
             </a:pPr>
             <a:r>
-              <a:rPr lang="en-US" sz="1300" b="1" dirty="0">
+              <a:rPr lang="en-US" sz="1220" b="1" dirty="0">
                 <a:solidFill>
                   <a:srgbClr val="0068B7"/>
                 </a:solidFill>
@@ -8017,7 +8017,7 @@
               </a:rPr>
               <a:t>Engagement move</a:t>
             </a:r>
-            <a:endParaRPr lang="en-US" sz="1300" dirty="0"/>
+            <a:endParaRPr lang="en-US" sz="1220" dirty="0"/>
           </a:p>
         </p:txBody>
       </p:sp>
@@ -8029,8 +8029,8 @@
         </p:nvSpPr>
         <p:spPr>
           <a:xfrm>
-            <a:off x="7799832" y="4659782"/>
-            <a:ext cx="3145536" cy="899770"/>
+            <a:off x="7708392" y="4828032"/>
+            <a:ext cx="3282696" cy="749808"/>
           </a:xfrm>
           <a:prstGeom prst="rect">
             <a:avLst/>
@@ -8048,7 +8048,7 @@
               <a:buNone/>
             </a:pPr>
             <a:r>
-              <a:rPr lang="en-US" sz="1320" dirty="0">
+              <a:rPr lang="en-US" sz="1220" dirty="0">
                 <a:solidFill>
                   <a:srgbClr val="17364A"/>
                 </a:solidFill>
@@ -8056,9 +8056,9 @@
                 <a:ea typeface="Aptos" pitchFamily="34" charset="-122"/>
                 <a:cs typeface="Aptos" pitchFamily="34" charset="-120"/>
               </a:rPr>
-              <a:t>Use the concept to plan transparent communication, gather stakeholder input, protect trust, and make sure affected communities are considered early.</a:t>
-            </a:r>
-            <a:endParaRPr lang="en-US" sz="1320" dirty="0"/>
+              <a:t>Use the concept to plan transparent communication, gather stakeholder input,.</a:t>
+            </a:r>
+            <a:endParaRPr lang="en-US" sz="1220" dirty="0"/>
           </a:p>
         </p:txBody>
       </p:sp>
@@ -8349,8 +8349,8 @@
         </p:nvSpPr>
         <p:spPr>
           <a:xfrm>
-            <a:off x="868680" y="1508760"/>
-            <a:ext cx="6309360" cy="4160520"/>
+            <a:off x="822960" y="1463040"/>
+            <a:ext cx="6565392" cy="4343400"/>
           </a:xfrm>
           <a:prstGeom prst="rect">
             <a:avLst/>
@@ -8368,7 +8368,7 @@
               <a:buNone/>
             </a:pPr>
             <a:r>
-              <a:rPr lang="en-US" sz="2100" dirty="0">
+              <a:rPr lang="en-US" sz="1920" dirty="0">
                 <a:solidFill>
                   <a:srgbClr val="003A63"/>
                 </a:solidFill>
@@ -8376,16 +8376,16 @@
                 <a:ea typeface="Aptos" pitchFamily="34" charset="-122"/>
                 <a:cs typeface="Aptos" pitchFamily="34" charset="-120"/>
               </a:rPr>
-              <a:t>• Create an AI-assisted communications review checklist for one public health message.</a:t>
-            </a:r>
-            <a:endParaRPr lang="en-US" sz="2100" dirty="0"/>
-          </a:p>
-          <a:p>
-            <a:pPr indent="0" marL="0">
-              <a:buNone/>
-            </a:pPr>
-            <a:r>
-              <a:rPr lang="en-US" sz="2100" dirty="0">
+              <a:t>• Create an AI-assisted communications review checklist for one public health.</a:t>
+            </a:r>
+            <a:endParaRPr lang="en-US" sz="1920" dirty="0"/>
+          </a:p>
+          <a:p>
+            <a:pPr indent="0" marL="0">
+              <a:buNone/>
+            </a:pPr>
+            <a:r>
+              <a:rPr lang="en-US" sz="1920" dirty="0">
                 <a:solidFill>
                   <a:srgbClr val="003A63"/>
                 </a:solidFill>
@@ -8393,9 +8393,9 @@
                 <a:ea typeface="Aptos" pitchFamily="34" charset="-122"/>
                 <a:cs typeface="Aptos" pitchFamily="34" charset="-120"/>
               </a:rPr>
-              <a:t>• Include intended audience, source material, factual claims to verify, plain language review,.</a:t>
-            </a:r>
-            <a:endParaRPr lang="en-US" sz="2100" dirty="0"/>
+              <a:t>• Include intended audience, source material, factual claims to verify, plain.</a:t>
+            </a:r>
+            <a:endParaRPr lang="en-US" sz="1920" dirty="0"/>
           </a:p>
         </p:txBody>
       </p:sp>
@@ -8407,12 +8407,12 @@
         </p:nvSpPr>
         <p:spPr>
           <a:xfrm>
-            <a:off x="7635240" y="1325880"/>
-            <a:ext cx="3474720" cy="1207008"/>
+            <a:off x="7543800" y="1325880"/>
+            <a:ext cx="3611880" cy="1261872"/>
           </a:xfrm>
           <a:prstGeom prst="roundRect">
             <a:avLst>
-              <a:gd name="adj" fmla="val 9091"/>
+              <a:gd name="adj" fmla="val 8696"/>
             </a:avLst>
           </a:prstGeom>
           <a:solidFill>
@@ -8434,8 +8434,8 @@
         </p:nvSpPr>
         <p:spPr>
           <a:xfrm>
-            <a:off x="7799832" y="1472184"/>
-            <a:ext cx="3145536" cy="256032"/>
+            <a:off x="7708392" y="1453896"/>
+            <a:ext cx="3282696" cy="228600"/>
           </a:xfrm>
           <a:prstGeom prst="rect">
             <a:avLst/>
@@ -8451,7 +8451,7 @@
               <a:buNone/>
             </a:pPr>
             <a:r>
-              <a:rPr lang="en-US" sz="1300" b="1" dirty="0">
+              <a:rPr lang="en-US" sz="1220" b="1" dirty="0">
                 <a:solidFill>
                   <a:srgbClr val="0068B7"/>
                 </a:solidFill>
@@ -8461,7 +8461,7 @@
               </a:rPr>
               <a:t>Public health lens</a:t>
             </a:r>
-            <a:endParaRPr lang="en-US" sz="1300" dirty="0"/>
+            <a:endParaRPr lang="en-US" sz="1220" dirty="0"/>
           </a:p>
         </p:txBody>
       </p:sp>
@@ -8473,8 +8473,8 @@
         </p:nvSpPr>
         <p:spPr>
           <a:xfrm>
-            <a:off x="7799832" y="1801368"/>
-            <a:ext cx="3145536" cy="640080"/>
+            <a:off x="7708392" y="1764792"/>
+            <a:ext cx="3282696" cy="749808"/>
           </a:xfrm>
           <a:prstGeom prst="rect">
             <a:avLst/>
@@ -8492,7 +8492,7 @@
               <a:buNone/>
             </a:pPr>
             <a:r>
-              <a:rPr lang="en-US" sz="1320" dirty="0">
+              <a:rPr lang="en-US" sz="1220" dirty="0">
                 <a:solidFill>
                   <a:srgbClr val="17364A"/>
                 </a:solidFill>
@@ -8500,9 +8500,9 @@
                 <a:ea typeface="Aptos" pitchFamily="34" charset="-122"/>
                 <a:cs typeface="Aptos" pitchFamily="34" charset="-120"/>
               </a:rPr>
-              <a:t>Create an AI-assisted communications review checklist for one public health message.</a:t>
-            </a:r>
-            <a:endParaRPr lang="en-US" sz="1320" dirty="0"/>
+              <a:t>Create an AI-assisted communications review checklist for one public health.</a:t>
+            </a:r>
+            <a:endParaRPr lang="en-US" sz="1220" dirty="0"/>
           </a:p>
         </p:txBody>
       </p:sp>
@@ -8514,12 +8514,12 @@
         </p:nvSpPr>
         <p:spPr>
           <a:xfrm>
-            <a:off x="7635240" y="2670048"/>
-            <a:ext cx="3474720" cy="1377086"/>
+            <a:off x="7543800" y="2724912"/>
+            <a:ext cx="3611880" cy="1527048"/>
           </a:xfrm>
           <a:prstGeom prst="roundRect">
             <a:avLst>
-              <a:gd name="adj" fmla="val 7968"/>
+              <a:gd name="adj" fmla="val 7186"/>
             </a:avLst>
           </a:prstGeom>
           <a:solidFill>
@@ -8541,8 +8541,8 @@
         </p:nvSpPr>
         <p:spPr>
           <a:xfrm>
-            <a:off x="7799832" y="2816352"/>
-            <a:ext cx="3145536" cy="256032"/>
+            <a:off x="7708392" y="2852928"/>
+            <a:ext cx="3282696" cy="228600"/>
           </a:xfrm>
           <a:prstGeom prst="rect">
             <a:avLst/>
@@ -8558,7 +8558,7 @@
               <a:buNone/>
             </a:pPr>
             <a:r>
-              <a:rPr lang="en-US" sz="1300" b="1" dirty="0">
+              <a:rPr lang="en-US" sz="1220" b="1" dirty="0">
                 <a:solidFill>
                   <a:srgbClr val="0068B7"/>
                 </a:solidFill>
@@ -8568,7 +8568,7 @@
               </a:rPr>
               <a:t>Concept checkpoints</a:t>
             </a:r>
-            <a:endParaRPr lang="en-US" sz="1300" dirty="0"/>
+            <a:endParaRPr lang="en-US" sz="1220" dirty="0"/>
           </a:p>
         </p:txBody>
       </p:sp>
@@ -8580,8 +8580,8 @@
         </p:nvSpPr>
         <p:spPr>
           <a:xfrm>
-            <a:off x="7818120" y="3182112"/>
-            <a:ext cx="3090672" cy="718718"/>
+            <a:off x="7726680" y="3182112"/>
+            <a:ext cx="3227832" cy="960120"/>
           </a:xfrm>
           <a:prstGeom prst="rect">
             <a:avLst/>
@@ -8599,7 +8599,7 @@
               <a:buNone/>
             </a:pPr>
             <a:r>
-              <a:rPr lang="en-US" sz="1220" dirty="0">
+              <a:rPr lang="en-US" sz="1140" dirty="0">
                 <a:solidFill>
                   <a:srgbClr val="17364A"/>
                 </a:solidFill>
@@ -8607,16 +8607,16 @@
                 <a:ea typeface="Aptos" pitchFamily="34" charset="-122"/>
                 <a:cs typeface="Aptos" pitchFamily="34" charset="-120"/>
               </a:rPr>
-              <a:t>Create an AI-assisted communications review checklist for one.</a:t>
-            </a:r>
-            <a:endParaRPr lang="en-US" sz="1220" dirty="0"/>
-          </a:p>
-          <a:p>
-            <a:pPr indent="0" marL="0">
-              <a:buNone/>
-            </a:pPr>
-            <a:r>
-              <a:rPr lang="en-US" sz="1220" dirty="0">
+              <a:t>Create an AI-assisted communications review.</a:t>
+            </a:r>
+            <a:endParaRPr lang="en-US" sz="1140" dirty="0"/>
+          </a:p>
+          <a:p>
+            <a:pPr indent="0" marL="0">
+              <a:buNone/>
+            </a:pPr>
+            <a:r>
+              <a:rPr lang="en-US" sz="1140" dirty="0">
                 <a:solidFill>
                   <a:srgbClr val="17364A"/>
                 </a:solidFill>
@@ -8624,9 +8624,9 @@
                 <a:ea typeface="Aptos" pitchFamily="34" charset="-122"/>
                 <a:cs typeface="Aptos" pitchFamily="34" charset="-120"/>
               </a:rPr>
-              <a:t>Include intended audience, source material, factual claims to.</a:t>
-            </a:r>
-            <a:endParaRPr lang="en-US" sz="1220" dirty="0"/>
+              <a:t>Include intended audience, source material,.</a:t>
+            </a:r>
+            <a:endParaRPr lang="en-US" sz="1140" dirty="0"/>
           </a:p>
         </p:txBody>
       </p:sp>
@@ -8638,12 +8638,12 @@
         </p:nvSpPr>
         <p:spPr>
           <a:xfrm>
-            <a:off x="7635240" y="4184294"/>
-            <a:ext cx="3474720" cy="1466698"/>
+            <a:off x="7543800" y="4389120"/>
+            <a:ext cx="3611880" cy="1261872"/>
           </a:xfrm>
           <a:prstGeom prst="roundRect">
             <a:avLst>
-              <a:gd name="adj" fmla="val 7481"/>
+              <a:gd name="adj" fmla="val 8696"/>
             </a:avLst>
           </a:prstGeom>
           <a:solidFill>
@@ -8665,8 +8665,8 @@
         </p:nvSpPr>
         <p:spPr>
           <a:xfrm>
-            <a:off x="7799832" y="4330598"/>
-            <a:ext cx="3145536" cy="256032"/>
+            <a:off x="7708392" y="4517136"/>
+            <a:ext cx="3282696" cy="228600"/>
           </a:xfrm>
           <a:prstGeom prst="rect">
             <a:avLst/>
@@ -8682,7 +8682,7 @@
               <a:buNone/>
             </a:pPr>
             <a:r>
-              <a:rPr lang="en-US" sz="1300" b="1" dirty="0">
+              <a:rPr lang="en-US" sz="1220" b="1" dirty="0">
                 <a:solidFill>
                   <a:srgbClr val="0068B7"/>
                 </a:solidFill>
@@ -8692,7 +8692,7 @@
               </a:rPr>
               <a:t>Engagement move</a:t>
             </a:r>
-            <a:endParaRPr lang="en-US" sz="1300" dirty="0"/>
+            <a:endParaRPr lang="en-US" sz="1220" dirty="0"/>
           </a:p>
         </p:txBody>
       </p:sp>
@@ -8704,8 +8704,8 @@
         </p:nvSpPr>
         <p:spPr>
           <a:xfrm>
-            <a:off x="7799832" y="4659782"/>
-            <a:ext cx="3145536" cy="899770"/>
+            <a:off x="7708392" y="4828032"/>
+            <a:ext cx="3282696" cy="749808"/>
           </a:xfrm>
           <a:prstGeom prst="rect">
             <a:avLst/>
@@ -8723,7 +8723,7 @@
               <a:buNone/>
             </a:pPr>
             <a:r>
-              <a:rPr lang="en-US" sz="1320" dirty="0">
+              <a:rPr lang="en-US" sz="1220" dirty="0">
                 <a:solidFill>
                   <a:srgbClr val="17364A"/>
                 </a:solidFill>
@@ -8731,9 +8731,9 @@
                 <a:ea typeface="Aptos" pitchFamily="34" charset="-122"/>
                 <a:cs typeface="Aptos" pitchFamily="34" charset="-120"/>
               </a:rPr>
-              <a:t>Use the assignment to test whether you can explain the concept, apply it to a realistic public health situation, and identify what would need review before the work moves forward.</a:t>
-            </a:r>
-            <a:endParaRPr lang="en-US" sz="1320" dirty="0"/>
+              <a:t>Use the assignment to test whether you can explain the concept, apply it to a.</a:t>
+            </a:r>
+            <a:endParaRPr lang="en-US" sz="1220" dirty="0"/>
           </a:p>
         </p:txBody>
       </p:sp>
@@ -9024,8 +9024,8 @@
         </p:nvSpPr>
         <p:spPr>
           <a:xfrm>
-            <a:off x="868680" y="1508760"/>
-            <a:ext cx="6309360" cy="4160520"/>
+            <a:off x="822960" y="1463040"/>
+            <a:ext cx="6565392" cy="4343400"/>
           </a:xfrm>
           <a:prstGeom prst="rect">
             <a:avLst/>
@@ -9043,7 +9043,7 @@
               <a:buNone/>
             </a:pPr>
             <a:r>
-              <a:rPr lang="en-US" sz="2100" dirty="0">
+              <a:rPr lang="en-US" sz="1920" dirty="0">
                 <a:solidFill>
                   <a:srgbClr val="003A63"/>
                 </a:solidFill>
@@ -9053,14 +9053,14 @@
               </a:rPr>
               <a:t>• AI-assisted communications review checklist</a:t>
             </a:r>
-            <a:endParaRPr lang="en-US" sz="2100" dirty="0"/>
-          </a:p>
-          <a:p>
-            <a:pPr indent="0" marL="0">
-              <a:buNone/>
-            </a:pPr>
-            <a:r>
-              <a:rPr lang="en-US" sz="2100" dirty="0">
+            <a:endParaRPr lang="en-US" sz="1920" dirty="0"/>
+          </a:p>
+          <a:p>
+            <a:pPr indent="0" marL="0">
+              <a:buNone/>
+            </a:pPr>
+            <a:r>
+              <a:rPr lang="en-US" sz="1920" dirty="0">
                 <a:solidFill>
                   <a:srgbClr val="003A63"/>
                 </a:solidFill>
@@ -9070,14 +9070,14 @@
               </a:rPr>
               <a:t>• Source verification notes</a:t>
             </a:r>
-            <a:endParaRPr lang="en-US" sz="2100" dirty="0"/>
-          </a:p>
-          <a:p>
-            <a:pPr indent="0" marL="0">
-              <a:buNone/>
-            </a:pPr>
-            <a:r>
-              <a:rPr lang="en-US" sz="2100" dirty="0">
+            <a:endParaRPr lang="en-US" sz="1920" dirty="0"/>
+          </a:p>
+          <a:p>
+            <a:pPr indent="0" marL="0">
+              <a:buNone/>
+            </a:pPr>
+            <a:r>
+              <a:rPr lang="en-US" sz="1920" dirty="0">
                 <a:solidFill>
                   <a:srgbClr val="003A63"/>
                 </a:solidFill>
@@ -9087,7 +9087,7 @@
               </a:rPr>
               <a:t>• Plain language and accessibility review notes</a:t>
             </a:r>
-            <a:endParaRPr lang="en-US" sz="2100" dirty="0"/>
+            <a:endParaRPr lang="en-US" sz="1920" dirty="0"/>
           </a:p>
         </p:txBody>
       </p:sp>
@@ -9099,12 +9099,12 @@
         </p:nvSpPr>
         <p:spPr>
           <a:xfrm>
-            <a:off x="7635240" y="1325880"/>
-            <a:ext cx="3474720" cy="1207008"/>
+            <a:off x="7543800" y="1325880"/>
+            <a:ext cx="3611880" cy="1261872"/>
           </a:xfrm>
           <a:prstGeom prst="roundRect">
             <a:avLst>
-              <a:gd name="adj" fmla="val 9091"/>
+              <a:gd name="adj" fmla="val 8696"/>
             </a:avLst>
           </a:prstGeom>
           <a:solidFill>
@@ -9126,8 +9126,8 @@
         </p:nvSpPr>
         <p:spPr>
           <a:xfrm>
-            <a:off x="7799832" y="1472184"/>
-            <a:ext cx="3145536" cy="256032"/>
+            <a:off x="7708392" y="1453896"/>
+            <a:ext cx="3282696" cy="228600"/>
           </a:xfrm>
           <a:prstGeom prst="rect">
             <a:avLst/>
@@ -9143,7 +9143,7 @@
               <a:buNone/>
             </a:pPr>
             <a:r>
-              <a:rPr lang="en-US" sz="1300" b="1" dirty="0">
+              <a:rPr lang="en-US" sz="1220" b="1" dirty="0">
                 <a:solidFill>
                   <a:srgbClr val="0068B7"/>
                 </a:solidFill>
@@ -9153,7 +9153,7 @@
               </a:rPr>
               <a:t>Public health lens</a:t>
             </a:r>
-            <a:endParaRPr lang="en-US" sz="1300" dirty="0"/>
+            <a:endParaRPr lang="en-US" sz="1220" dirty="0"/>
           </a:p>
         </p:txBody>
       </p:sp>
@@ -9165,8 +9165,8 @@
         </p:nvSpPr>
         <p:spPr>
           <a:xfrm>
-            <a:off x="7799832" y="1801368"/>
-            <a:ext cx="3145536" cy="640080"/>
+            <a:off x="7708392" y="1764792"/>
+            <a:ext cx="3282696" cy="749808"/>
           </a:xfrm>
           <a:prstGeom prst="rect">
             <a:avLst/>
@@ -9184,7 +9184,7 @@
               <a:buNone/>
             </a:pPr>
             <a:r>
-              <a:rPr lang="en-US" sz="1320" dirty="0">
+              <a:rPr lang="en-US" sz="1220" dirty="0">
                 <a:solidFill>
                   <a:srgbClr val="17364A"/>
                 </a:solidFill>
@@ -9194,7 +9194,7 @@
               </a:rPr>
               <a:t>AI-assisted communications review checklist</a:t>
             </a:r>
-            <a:endParaRPr lang="en-US" sz="1320" dirty="0"/>
+            <a:endParaRPr lang="en-US" sz="1220" dirty="0"/>
           </a:p>
         </p:txBody>
       </p:sp>
@@ -9206,12 +9206,12 @@
         </p:nvSpPr>
         <p:spPr>
           <a:xfrm>
-            <a:off x="7635240" y="2670048"/>
-            <a:ext cx="3474720" cy="1377086"/>
+            <a:off x="7543800" y="2724912"/>
+            <a:ext cx="3611880" cy="1527048"/>
           </a:xfrm>
           <a:prstGeom prst="roundRect">
             <a:avLst>
-              <a:gd name="adj" fmla="val 7968"/>
+              <a:gd name="adj" fmla="val 7186"/>
             </a:avLst>
           </a:prstGeom>
           <a:solidFill>
@@ -9233,8 +9233,8 @@
         </p:nvSpPr>
         <p:spPr>
           <a:xfrm>
-            <a:off x="7799832" y="2816352"/>
-            <a:ext cx="3145536" cy="256032"/>
+            <a:off x="7708392" y="2852928"/>
+            <a:ext cx="3282696" cy="228600"/>
           </a:xfrm>
           <a:prstGeom prst="rect">
             <a:avLst/>
@@ -9250,7 +9250,7 @@
               <a:buNone/>
             </a:pPr>
             <a:r>
-              <a:rPr lang="en-US" sz="1300" b="1" dirty="0">
+              <a:rPr lang="en-US" sz="1220" b="1" dirty="0">
                 <a:solidFill>
                   <a:srgbClr val="0068B7"/>
                 </a:solidFill>
@@ -9260,7 +9260,7 @@
               </a:rPr>
               <a:t>Concept checkpoints</a:t>
             </a:r>
-            <a:endParaRPr lang="en-US" sz="1300" dirty="0"/>
+            <a:endParaRPr lang="en-US" sz="1220" dirty="0"/>
           </a:p>
         </p:txBody>
       </p:sp>
@@ -9272,8 +9272,8 @@
         </p:nvSpPr>
         <p:spPr>
           <a:xfrm>
-            <a:off x="7818120" y="3182112"/>
-            <a:ext cx="3090672" cy="718718"/>
+            <a:off x="7726680" y="3182112"/>
+            <a:ext cx="3227832" cy="960120"/>
           </a:xfrm>
           <a:prstGeom prst="rect">
             <a:avLst/>
@@ -9291,7 +9291,7 @@
               <a:buNone/>
             </a:pPr>
             <a:r>
-              <a:rPr lang="en-US" sz="1220" dirty="0">
+              <a:rPr lang="en-US" sz="1140" dirty="0">
                 <a:solidFill>
                   <a:srgbClr val="17364A"/>
                 </a:solidFill>
@@ -9301,14 +9301,14 @@
               </a:rPr>
               <a:t>AI-assisted communications review checklist</a:t>
             </a:r>
-            <a:endParaRPr lang="en-US" sz="1220" dirty="0"/>
-          </a:p>
-          <a:p>
-            <a:pPr indent="0" marL="0">
-              <a:buNone/>
-            </a:pPr>
-            <a:r>
-              <a:rPr lang="en-US" sz="1220" dirty="0">
+            <a:endParaRPr lang="en-US" sz="1140" dirty="0"/>
+          </a:p>
+          <a:p>
+            <a:pPr indent="0" marL="0">
+              <a:buNone/>
+            </a:pPr>
+            <a:r>
+              <a:rPr lang="en-US" sz="1140" dirty="0">
                 <a:solidFill>
                   <a:srgbClr val="17364A"/>
                 </a:solidFill>
@@ -9318,14 +9318,14 @@
               </a:rPr>
               <a:t>Source verification notes</a:t>
             </a:r>
-            <a:endParaRPr lang="en-US" sz="1220" dirty="0"/>
-          </a:p>
-          <a:p>
-            <a:pPr indent="0" marL="0">
-              <a:buNone/>
-            </a:pPr>
-            <a:r>
-              <a:rPr lang="en-US" sz="1220" dirty="0">
+            <a:endParaRPr lang="en-US" sz="1140" dirty="0"/>
+          </a:p>
+          <a:p>
+            <a:pPr indent="0" marL="0">
+              <a:buNone/>
+            </a:pPr>
+            <a:r>
+              <a:rPr lang="en-US" sz="1140" dirty="0">
                 <a:solidFill>
                   <a:srgbClr val="17364A"/>
                 </a:solidFill>
@@ -9335,7 +9335,7 @@
               </a:rPr>
               <a:t>Plain language and accessibility review notes</a:t>
             </a:r>
-            <a:endParaRPr lang="en-US" sz="1220" dirty="0"/>
+            <a:endParaRPr lang="en-US" sz="1140" dirty="0"/>
           </a:p>
         </p:txBody>
       </p:sp>
@@ -9347,12 +9347,12 @@
         </p:nvSpPr>
         <p:spPr>
           <a:xfrm>
-            <a:off x="7635240" y="4184294"/>
-            <a:ext cx="3474720" cy="1466698"/>
+            <a:off x="7543800" y="4389120"/>
+            <a:ext cx="3611880" cy="1261872"/>
           </a:xfrm>
           <a:prstGeom prst="roundRect">
             <a:avLst>
-              <a:gd name="adj" fmla="val 7481"/>
+              <a:gd name="adj" fmla="val 8696"/>
             </a:avLst>
           </a:prstGeom>
           <a:solidFill>
@@ -9374,8 +9374,8 @@
         </p:nvSpPr>
         <p:spPr>
           <a:xfrm>
-            <a:off x="7799832" y="4330598"/>
-            <a:ext cx="3145536" cy="256032"/>
+            <a:off x="7708392" y="4517136"/>
+            <a:ext cx="3282696" cy="228600"/>
           </a:xfrm>
           <a:prstGeom prst="rect">
             <a:avLst/>
@@ -9391,7 +9391,7 @@
               <a:buNone/>
             </a:pPr>
             <a:r>
-              <a:rPr lang="en-US" sz="1300" b="1" dirty="0">
+              <a:rPr lang="en-US" sz="1220" b="1" dirty="0">
                 <a:solidFill>
                   <a:srgbClr val="0068B7"/>
                 </a:solidFill>
@@ -9401,7 +9401,7 @@
               </a:rPr>
               <a:t>Engagement move</a:t>
             </a:r>
-            <a:endParaRPr lang="en-US" sz="1300" dirty="0"/>
+            <a:endParaRPr lang="en-US" sz="1220" dirty="0"/>
           </a:p>
         </p:txBody>
       </p:sp>
@@ -9413,8 +9413,8 @@
         </p:nvSpPr>
         <p:spPr>
           <a:xfrm>
-            <a:off x="7799832" y="4659782"/>
-            <a:ext cx="3145536" cy="899770"/>
+            <a:off x="7708392" y="4828032"/>
+            <a:ext cx="3282696" cy="749808"/>
           </a:xfrm>
           <a:prstGeom prst="rect">
             <a:avLst/>
@@ -9432,7 +9432,7 @@
               <a:buNone/>
             </a:pPr>
             <a:r>
-              <a:rPr lang="en-US" sz="1320" dirty="0">
+              <a:rPr lang="en-US" sz="1220" dirty="0">
                 <a:solidFill>
                   <a:srgbClr val="17364A"/>
                 </a:solidFill>
@@ -9440,9 +9440,9 @@
                 <a:ea typeface="Aptos" pitchFamily="34" charset="-122"/>
                 <a:cs typeface="Aptos" pitchFamily="34" charset="-120"/>
               </a:rPr>
-              <a:t>Use the concept to plan transparent communication, gather stakeholder input, protect trust, and make sure affected communities are considered early.</a:t>
-            </a:r>
-            <a:endParaRPr lang="en-US" sz="1320" dirty="0"/>
+              <a:t>Use the concept to plan transparent communication, gather stakeholder input,.</a:t>
+            </a:r>
+            <a:endParaRPr lang="en-US" sz="1220" dirty="0"/>
           </a:p>
         </p:txBody>
       </p:sp>
@@ -9733,8 +9733,8 @@
         </p:nvSpPr>
         <p:spPr>
           <a:xfrm>
-            <a:off x="868680" y="1508760"/>
-            <a:ext cx="6309360" cy="4160520"/>
+            <a:off x="822960" y="1463040"/>
+            <a:ext cx="6565392" cy="4343400"/>
           </a:xfrm>
           <a:prstGeom prst="rect">
             <a:avLst/>
@@ -9752,7 +9752,7 @@
               <a:buNone/>
             </a:pPr>
             <a:r>
-              <a:rPr lang="en-US" sz="2100" dirty="0">
+              <a:rPr lang="en-US" sz="1920" dirty="0">
                 <a:solidFill>
                   <a:srgbClr val="003A63"/>
                 </a:solidFill>
@@ -9762,14 +9762,14 @@
               </a:rPr>
               <a:t>• Approval pathway documentation</a:t>
             </a:r>
-            <a:endParaRPr lang="en-US" sz="2100" dirty="0"/>
-          </a:p>
-          <a:p>
-            <a:pPr indent="0" marL="0">
-              <a:buNone/>
-            </a:pPr>
-            <a:r>
-              <a:rPr lang="en-US" sz="2100" dirty="0">
+            <a:endParaRPr lang="en-US" sz="1920" dirty="0"/>
+          </a:p>
+          <a:p>
+            <a:pPr indent="0" marL="0">
+              <a:buNone/>
+            </a:pPr>
+            <a:r>
+              <a:rPr lang="en-US" sz="1920" dirty="0">
                 <a:solidFill>
                   <a:srgbClr val="003A63"/>
                 </a:solidFill>
@@ -9779,7 +9779,7 @@
               </a:rPr>
               <a:t>• Final reviewed message or sample revision</a:t>
             </a:r>
-            <a:endParaRPr lang="en-US" sz="2100" dirty="0"/>
+            <a:endParaRPr lang="en-US" sz="1920" dirty="0"/>
           </a:p>
         </p:txBody>
       </p:sp>
@@ -9791,12 +9791,12 @@
         </p:nvSpPr>
         <p:spPr>
           <a:xfrm>
-            <a:off x="7635240" y="1325880"/>
-            <a:ext cx="3474720" cy="1207008"/>
+            <a:off x="7543800" y="1325880"/>
+            <a:ext cx="3611880" cy="1261872"/>
           </a:xfrm>
           <a:prstGeom prst="roundRect">
             <a:avLst>
-              <a:gd name="adj" fmla="val 9091"/>
+              <a:gd name="adj" fmla="val 8696"/>
             </a:avLst>
           </a:prstGeom>
           <a:solidFill>
@@ -9818,8 +9818,8 @@
         </p:nvSpPr>
         <p:spPr>
           <a:xfrm>
-            <a:off x="7799832" y="1472184"/>
-            <a:ext cx="3145536" cy="256032"/>
+            <a:off x="7708392" y="1453896"/>
+            <a:ext cx="3282696" cy="228600"/>
           </a:xfrm>
           <a:prstGeom prst="rect">
             <a:avLst/>
@@ -9835,7 +9835,7 @@
               <a:buNone/>
             </a:pPr>
             <a:r>
-              <a:rPr lang="en-US" sz="1300" b="1" dirty="0">
+              <a:rPr lang="en-US" sz="1220" b="1" dirty="0">
                 <a:solidFill>
                   <a:srgbClr val="0068B7"/>
                 </a:solidFill>
@@ -9845,7 +9845,7 @@
               </a:rPr>
               <a:t>Public health lens</a:t>
             </a:r>
-            <a:endParaRPr lang="en-US" sz="1300" dirty="0"/>
+            <a:endParaRPr lang="en-US" sz="1220" dirty="0"/>
           </a:p>
         </p:txBody>
       </p:sp>
@@ -9857,8 +9857,8 @@
         </p:nvSpPr>
         <p:spPr>
           <a:xfrm>
-            <a:off x="7799832" y="1801368"/>
-            <a:ext cx="3145536" cy="640080"/>
+            <a:off x="7708392" y="1764792"/>
+            <a:ext cx="3282696" cy="749808"/>
           </a:xfrm>
           <a:prstGeom prst="rect">
             <a:avLst/>
@@ -9876,7 +9876,7 @@
               <a:buNone/>
             </a:pPr>
             <a:r>
-              <a:rPr lang="en-US" sz="1320" dirty="0">
+              <a:rPr lang="en-US" sz="1220" dirty="0">
                 <a:solidFill>
                   <a:srgbClr val="17364A"/>
                 </a:solidFill>
@@ -9886,7 +9886,7 @@
               </a:rPr>
               <a:t>Approval pathway documentation</a:t>
             </a:r>
-            <a:endParaRPr lang="en-US" sz="1320" dirty="0"/>
+            <a:endParaRPr lang="en-US" sz="1220" dirty="0"/>
           </a:p>
         </p:txBody>
       </p:sp>
@@ -9898,12 +9898,12 @@
         </p:nvSpPr>
         <p:spPr>
           <a:xfrm>
-            <a:off x="7635240" y="2670048"/>
-            <a:ext cx="3474720" cy="1377086"/>
+            <a:off x="7543800" y="2724912"/>
+            <a:ext cx="3611880" cy="1527048"/>
           </a:xfrm>
           <a:prstGeom prst="roundRect">
             <a:avLst>
-              <a:gd name="adj" fmla="val 7968"/>
+              <a:gd name="adj" fmla="val 7186"/>
             </a:avLst>
           </a:prstGeom>
           <a:solidFill>
@@ -9925,8 +9925,8 @@
         </p:nvSpPr>
         <p:spPr>
           <a:xfrm>
-            <a:off x="7799832" y="2816352"/>
-            <a:ext cx="3145536" cy="256032"/>
+            <a:off x="7708392" y="2852928"/>
+            <a:ext cx="3282696" cy="228600"/>
           </a:xfrm>
           <a:prstGeom prst="rect">
             <a:avLst/>
@@ -9942,7 +9942,7 @@
               <a:buNone/>
             </a:pPr>
             <a:r>
-              <a:rPr lang="en-US" sz="1300" b="1" dirty="0">
+              <a:rPr lang="en-US" sz="1220" b="1" dirty="0">
                 <a:solidFill>
                   <a:srgbClr val="0068B7"/>
                 </a:solidFill>
@@ -9952,7 +9952,7 @@
               </a:rPr>
               <a:t>Concept checkpoints</a:t>
             </a:r>
-            <a:endParaRPr lang="en-US" sz="1300" dirty="0"/>
+            <a:endParaRPr lang="en-US" sz="1220" dirty="0"/>
           </a:p>
         </p:txBody>
       </p:sp>
@@ -9964,8 +9964,8 @@
         </p:nvSpPr>
         <p:spPr>
           <a:xfrm>
-            <a:off x="7818120" y="3182112"/>
-            <a:ext cx="3090672" cy="718718"/>
+            <a:off x="7726680" y="3182112"/>
+            <a:ext cx="3227832" cy="960120"/>
           </a:xfrm>
           <a:prstGeom prst="rect">
             <a:avLst/>
@@ -9983,7 +9983,7 @@
               <a:buNone/>
             </a:pPr>
             <a:r>
-              <a:rPr lang="en-US" sz="1220" dirty="0">
+              <a:rPr lang="en-US" sz="1140" dirty="0">
                 <a:solidFill>
                   <a:srgbClr val="17364A"/>
                 </a:solidFill>
@@ -9993,14 +9993,14 @@
               </a:rPr>
               <a:t>Approval pathway documentation</a:t>
             </a:r>
-            <a:endParaRPr lang="en-US" sz="1220" dirty="0"/>
-          </a:p>
-          <a:p>
-            <a:pPr indent="0" marL="0">
-              <a:buNone/>
-            </a:pPr>
-            <a:r>
-              <a:rPr lang="en-US" sz="1220" dirty="0">
+            <a:endParaRPr lang="en-US" sz="1140" dirty="0"/>
+          </a:p>
+          <a:p>
+            <a:pPr indent="0" marL="0">
+              <a:buNone/>
+            </a:pPr>
+            <a:r>
+              <a:rPr lang="en-US" sz="1140" dirty="0">
                 <a:solidFill>
                   <a:srgbClr val="17364A"/>
                 </a:solidFill>
@@ -10010,7 +10010,7 @@
               </a:rPr>
               <a:t>Final reviewed message or sample revision</a:t>
             </a:r>
-            <a:endParaRPr lang="en-US" sz="1220" dirty="0"/>
+            <a:endParaRPr lang="en-US" sz="1140" dirty="0"/>
           </a:p>
         </p:txBody>
       </p:sp>
@@ -10022,12 +10022,12 @@
         </p:nvSpPr>
         <p:spPr>
           <a:xfrm>
-            <a:off x="7635240" y="4184294"/>
-            <a:ext cx="3474720" cy="1466698"/>
+            <a:off x="7543800" y="4389120"/>
+            <a:ext cx="3611880" cy="1261872"/>
           </a:xfrm>
           <a:prstGeom prst="roundRect">
             <a:avLst>
-              <a:gd name="adj" fmla="val 7481"/>
+              <a:gd name="adj" fmla="val 8696"/>
             </a:avLst>
           </a:prstGeom>
           <a:solidFill>
@@ -10049,8 +10049,8 @@
         </p:nvSpPr>
         <p:spPr>
           <a:xfrm>
-            <a:off x="7799832" y="4330598"/>
-            <a:ext cx="3145536" cy="256032"/>
+            <a:off x="7708392" y="4517136"/>
+            <a:ext cx="3282696" cy="228600"/>
           </a:xfrm>
           <a:prstGeom prst="rect">
             <a:avLst/>
@@ -10066,7 +10066,7 @@
               <a:buNone/>
             </a:pPr>
             <a:r>
-              <a:rPr lang="en-US" sz="1300" b="1" dirty="0">
+              <a:rPr lang="en-US" sz="1220" b="1" dirty="0">
                 <a:solidFill>
                   <a:srgbClr val="0068B7"/>
                 </a:solidFill>
@@ -10076,7 +10076,7 @@
               </a:rPr>
               <a:t>Engagement move</a:t>
             </a:r>
-            <a:endParaRPr lang="en-US" sz="1300" dirty="0"/>
+            <a:endParaRPr lang="en-US" sz="1220" dirty="0"/>
           </a:p>
         </p:txBody>
       </p:sp>
@@ -10088,8 +10088,8 @@
         </p:nvSpPr>
         <p:spPr>
           <a:xfrm>
-            <a:off x="7799832" y="4659782"/>
-            <a:ext cx="3145536" cy="899770"/>
+            <a:off x="7708392" y="4828032"/>
+            <a:ext cx="3282696" cy="749808"/>
           </a:xfrm>
           <a:prstGeom prst="rect">
             <a:avLst/>
@@ -10107,7 +10107,7 @@
               <a:buNone/>
             </a:pPr>
             <a:r>
-              <a:rPr lang="en-US" sz="1320" dirty="0">
+              <a:rPr lang="en-US" sz="1220" dirty="0">
                 <a:solidFill>
                   <a:srgbClr val="17364A"/>
                 </a:solidFill>
@@ -10115,9 +10115,9 @@
                 <a:ea typeface="Aptos" pitchFamily="34" charset="-122"/>
                 <a:cs typeface="Aptos" pitchFamily="34" charset="-120"/>
               </a:rPr>
-              <a:t>Use the concept to plan transparent communication, gather stakeholder input, protect trust, and make sure affected communities are considered early.</a:t>
-            </a:r>
-            <a:endParaRPr lang="en-US" sz="1320" dirty="0"/>
+              <a:t>Use the concept to plan transparent communication, gather stakeholder input,.</a:t>
+            </a:r>
+            <a:endParaRPr lang="en-US" sz="1220" dirty="0"/>
           </a:p>
         </p:txBody>
       </p:sp>
@@ -10435,7 +10435,7 @@
                 <a:ea typeface="Aptos" pitchFamily="34" charset="-122"/>
                 <a:cs typeface="Aptos" pitchFamily="34" charset="-120"/>
               </a:rPr>
-              <a:t>• Generative AI can support public health communications by helping staff draft, revise,.</a:t>
+              <a:t>• Generative AI can support public health communications by helping staff.</a:t>
             </a:r>
             <a:endParaRPr lang="en-US" sz="2100" dirty="0"/>
           </a:p>
@@ -10452,7 +10452,7 @@
                 <a:ea typeface="Aptos" pitchFamily="34" charset="-122"/>
                 <a:cs typeface="Aptos" pitchFamily="34" charset="-120"/>
               </a:rPr>
-              <a:t>• However, public health communication carries high trust, equity, accessibility, and accuracy.</a:t>
+              <a:t>• However, public health communication carries high trust, equity,.</a:t>
             </a:r>
             <a:endParaRPr lang="en-US" sz="2100" dirty="0"/>
           </a:p>
@@ -10469,7 +10469,7 @@
                 <a:ea typeface="Aptos" pitchFamily="34" charset="-122"/>
                 <a:cs typeface="Aptos" pitchFamily="34" charset="-120"/>
               </a:rPr>
-              <a:t>• AI-generated text can sound clear and authoritative while misstating evidence, omitting.</a:t>
+              <a:t>• AI-generated text can sound clear and authoritative while misstating.</a:t>
             </a:r>
             <a:endParaRPr lang="en-US" sz="2100" dirty="0"/>
           </a:p>
@@ -10510,8 +10510,8 @@
         </p:nvSpPr>
         <p:spPr>
           <a:xfrm>
-            <a:off x="8074152" y="1563624"/>
-            <a:ext cx="2825496" cy="256032"/>
+            <a:off x="8074152" y="1545336"/>
+            <a:ext cx="2825496" cy="228600"/>
           </a:xfrm>
           <a:prstGeom prst="rect">
             <a:avLst/>
@@ -10527,7 +10527,7 @@
               <a:buNone/>
             </a:pPr>
             <a:r>
-              <a:rPr lang="en-US" sz="1300" b="1" dirty="0">
+              <a:rPr lang="en-US" sz="1220" b="1" dirty="0">
                 <a:solidFill>
                   <a:srgbClr val="0068B7"/>
                 </a:solidFill>
@@ -10537,7 +10537,7 @@
               </a:rPr>
               <a:t>Module details</a:t>
             </a:r>
-            <a:endParaRPr lang="en-US" sz="1300" dirty="0"/>
+            <a:endParaRPr lang="en-US" sz="1220" dirty="0"/>
           </a:p>
         </p:txBody>
       </p:sp>
@@ -10549,8 +10549,8 @@
         </p:nvSpPr>
         <p:spPr>
           <a:xfrm>
-            <a:off x="8074152" y="1892808"/>
-            <a:ext cx="2825496" cy="1353312"/>
+            <a:off x="8074152" y="1856232"/>
+            <a:ext cx="2825496" cy="1408176"/>
           </a:xfrm>
           <a:prstGeom prst="rect">
             <a:avLst/>
@@ -10568,7 +10568,7 @@
               <a:buNone/>
             </a:pPr>
             <a:r>
-              <a:rPr lang="en-US" sz="1320" dirty="0">
+              <a:rPr lang="en-US" sz="1220" dirty="0">
                 <a:solidFill>
                   <a:srgbClr val="17364A"/>
                 </a:solidFill>
@@ -10576,9 +10576,9 @@
                 <a:ea typeface="Aptos" pitchFamily="34" charset="-122"/>
                 <a:cs typeface="Aptos" pitchFamily="34" charset="-120"/>
               </a:rPr>
-              <a:t>Level: applied/foundational Primary track: Communications Role-Based Track Appears in tracks: communications, shared-foundational, policy, public-health-executive-leadership</a:t>
-            </a:r>
-            <a:endParaRPr lang="en-US" sz="1320" dirty="0"/>
+              <a:t>Level: applied/foundational Primary track: Communications Role-Based Track.</a:t>
+            </a:r>
+            <a:endParaRPr lang="en-US" sz="1220" dirty="0"/>
           </a:p>
         </p:txBody>
       </p:sp>
@@ -10617,8 +10617,8 @@
         </p:nvSpPr>
         <p:spPr>
           <a:xfrm>
-            <a:off x="8074152" y="3822192"/>
-            <a:ext cx="2825496" cy="256032"/>
+            <a:off x="8074152" y="3803904"/>
+            <a:ext cx="2825496" cy="228600"/>
           </a:xfrm>
           <a:prstGeom prst="rect">
             <a:avLst/>
@@ -10634,7 +10634,7 @@
               <a:buNone/>
             </a:pPr>
             <a:r>
-              <a:rPr lang="en-US" sz="1300" b="1" dirty="0">
+              <a:rPr lang="en-US" sz="1220" b="1" dirty="0">
                 <a:solidFill>
                   <a:srgbClr val="0068B7"/>
                 </a:solidFill>
@@ -10644,7 +10644,7 @@
               </a:rPr>
               <a:t>Learning sequence</a:t>
             </a:r>
-            <a:endParaRPr lang="en-US" sz="1300" dirty="0"/>
+            <a:endParaRPr lang="en-US" sz="1220" dirty="0"/>
           </a:p>
         </p:txBody>
       </p:sp>
@@ -10656,8 +10656,8 @@
         </p:nvSpPr>
         <p:spPr>
           <a:xfrm>
-            <a:off x="8092440" y="4187952"/>
-            <a:ext cx="2770632" cy="1033272"/>
+            <a:off x="8092440" y="4133088"/>
+            <a:ext cx="2770632" cy="1124712"/>
           </a:xfrm>
           <a:prstGeom prst="rect">
             <a:avLst/>
@@ -10675,7 +10675,7 @@
               <a:buNone/>
             </a:pPr>
             <a:r>
-              <a:rPr lang="en-US" sz="1220" dirty="0">
+              <a:rPr lang="en-US" sz="1140" dirty="0">
                 <a:solidFill>
                   <a:srgbClr val="17364A"/>
                 </a:solidFill>
@@ -10685,14 +10685,14 @@
               </a:rPr>
               <a:t>Read the module for shared vocabulary and context.</a:t>
             </a:r>
-            <a:endParaRPr lang="en-US" sz="1220" dirty="0"/>
-          </a:p>
-          <a:p>
-            <a:pPr indent="0" marL="0">
-              <a:buNone/>
-            </a:pPr>
-            <a:r>
-              <a:rPr lang="en-US" sz="1220" dirty="0">
+            <a:endParaRPr lang="en-US" sz="1140" dirty="0"/>
+          </a:p>
+          <a:p>
+            <a:pPr indent="0" marL="0">
+              <a:buNone/>
+            </a:pPr>
+            <a:r>
+              <a:rPr lang="en-US" sz="1140" dirty="0">
                 <a:solidFill>
                   <a:srgbClr val="17364A"/>
                 </a:solidFill>
@@ -10700,16 +10700,16 @@
                 <a:ea typeface="Aptos" pitchFamily="34" charset="-122"/>
                 <a:cs typeface="Aptos" pitchFamily="34" charset="-120"/>
               </a:rPr>
-              <a:t>Complete the practical exercise to apply the concept.</a:t>
-            </a:r>
-            <a:endParaRPr lang="en-US" sz="1220" dirty="0"/>
-          </a:p>
-          <a:p>
-            <a:pPr indent="0" marL="0">
-              <a:buNone/>
-            </a:pPr>
-            <a:r>
-              <a:rPr lang="en-US" sz="1220" dirty="0">
+              <a:t>Complete the practical exercise to apply the.</a:t>
+            </a:r>
+            <a:endParaRPr lang="en-US" sz="1140" dirty="0"/>
+          </a:p>
+          <a:p>
+            <a:pPr indent="0" marL="0">
+              <a:buNone/>
+            </a:pPr>
+            <a:r>
+              <a:rPr lang="en-US" sz="1140" dirty="0">
                 <a:solidFill>
                   <a:srgbClr val="17364A"/>
                 </a:solidFill>
@@ -10719,7 +10719,7 @@
               </a:rPr>
               <a:t>Use the notes and references for deeper review.</a:t>
             </a:r>
-            <a:endParaRPr lang="en-US" sz="1220" dirty="0"/>
+            <a:endParaRPr lang="en-US" sz="1140" dirty="0"/>
           </a:p>
         </p:txBody>
       </p:sp>
@@ -11010,8 +11010,8 @@
         </p:nvSpPr>
         <p:spPr>
           <a:xfrm>
-            <a:off x="868680" y="1508760"/>
-            <a:ext cx="6309360" cy="4160520"/>
+            <a:off x="822960" y="1463040"/>
+            <a:ext cx="6565392" cy="4343400"/>
           </a:xfrm>
           <a:prstGeom prst="rect">
             <a:avLst/>
@@ -11029,7 +11029,7 @@
               <a:buNone/>
             </a:pPr>
             <a:r>
-              <a:rPr lang="en-US" sz="2100" dirty="0">
+              <a:rPr lang="en-US" sz="1920" dirty="0">
                 <a:solidFill>
                   <a:srgbClr val="003A63"/>
                 </a:solidFill>
@@ -11039,14 +11039,14 @@
               </a:rPr>
               <a:t>• AI-assisted communications review checklist</a:t>
             </a:r>
-            <a:endParaRPr lang="en-US" sz="2100" dirty="0"/>
-          </a:p>
-          <a:p>
-            <a:pPr indent="0" marL="0">
-              <a:buNone/>
-            </a:pPr>
-            <a:r>
-              <a:rPr lang="en-US" sz="2100" dirty="0">
+            <a:endParaRPr lang="en-US" sz="1920" dirty="0"/>
+          </a:p>
+          <a:p>
+            <a:pPr indent="0" marL="0">
+              <a:buNone/>
+            </a:pPr>
+            <a:r>
+              <a:rPr lang="en-US" sz="1920" dirty="0">
                 <a:solidFill>
                   <a:srgbClr val="003A63"/>
                 </a:solidFill>
@@ -11056,14 +11056,14 @@
               </a:rPr>
               <a:t>• Source verification notes</a:t>
             </a:r>
-            <a:endParaRPr lang="en-US" sz="2100" dirty="0"/>
-          </a:p>
-          <a:p>
-            <a:pPr indent="0" marL="0">
-              <a:buNone/>
-            </a:pPr>
-            <a:r>
-              <a:rPr lang="en-US" sz="2100" dirty="0">
+            <a:endParaRPr lang="en-US" sz="1920" dirty="0"/>
+          </a:p>
+          <a:p>
+            <a:pPr indent="0" marL="0">
+              <a:buNone/>
+            </a:pPr>
+            <a:r>
+              <a:rPr lang="en-US" sz="1920" dirty="0">
                 <a:solidFill>
                   <a:srgbClr val="003A63"/>
                 </a:solidFill>
@@ -11073,7 +11073,7 @@
               </a:rPr>
               <a:t>• Plain language and accessibility review notes</a:t>
             </a:r>
-            <a:endParaRPr lang="en-US" sz="2100" dirty="0"/>
+            <a:endParaRPr lang="en-US" sz="1920" dirty="0"/>
           </a:p>
         </p:txBody>
       </p:sp>
@@ -11085,12 +11085,12 @@
         </p:nvSpPr>
         <p:spPr>
           <a:xfrm>
-            <a:off x="7635240" y="1325880"/>
-            <a:ext cx="3474720" cy="1207008"/>
+            <a:off x="7543800" y="1325880"/>
+            <a:ext cx="3611880" cy="1261872"/>
           </a:xfrm>
           <a:prstGeom prst="roundRect">
             <a:avLst>
-              <a:gd name="adj" fmla="val 9091"/>
+              <a:gd name="adj" fmla="val 8696"/>
             </a:avLst>
           </a:prstGeom>
           <a:solidFill>
@@ -11112,8 +11112,8 @@
         </p:nvSpPr>
         <p:spPr>
           <a:xfrm>
-            <a:off x="7799832" y="1472184"/>
-            <a:ext cx="3145536" cy="256032"/>
+            <a:off x="7708392" y="1453896"/>
+            <a:ext cx="3282696" cy="228600"/>
           </a:xfrm>
           <a:prstGeom prst="rect">
             <a:avLst/>
@@ -11129,7 +11129,7 @@
               <a:buNone/>
             </a:pPr>
             <a:r>
-              <a:rPr lang="en-US" sz="1300" b="1" dirty="0">
+              <a:rPr lang="en-US" sz="1220" b="1" dirty="0">
                 <a:solidFill>
                   <a:srgbClr val="0068B7"/>
                 </a:solidFill>
@@ -11139,7 +11139,7 @@
               </a:rPr>
               <a:t>Public health lens</a:t>
             </a:r>
-            <a:endParaRPr lang="en-US" sz="1300" dirty="0"/>
+            <a:endParaRPr lang="en-US" sz="1220" dirty="0"/>
           </a:p>
         </p:txBody>
       </p:sp>
@@ -11151,8 +11151,8 @@
         </p:nvSpPr>
         <p:spPr>
           <a:xfrm>
-            <a:off x="7799832" y="1801368"/>
-            <a:ext cx="3145536" cy="640080"/>
+            <a:off x="7708392" y="1764792"/>
+            <a:ext cx="3282696" cy="749808"/>
           </a:xfrm>
           <a:prstGeom prst="rect">
             <a:avLst/>
@@ -11170,7 +11170,7 @@
               <a:buNone/>
             </a:pPr>
             <a:r>
-              <a:rPr lang="en-US" sz="1320" dirty="0">
+              <a:rPr lang="en-US" sz="1220" dirty="0">
                 <a:solidFill>
                   <a:srgbClr val="17364A"/>
                 </a:solidFill>
@@ -11180,7 +11180,7 @@
               </a:rPr>
               <a:t>AI-assisted communications review checklist</a:t>
             </a:r>
-            <a:endParaRPr lang="en-US" sz="1320" dirty="0"/>
+            <a:endParaRPr lang="en-US" sz="1220" dirty="0"/>
           </a:p>
         </p:txBody>
       </p:sp>
@@ -11192,12 +11192,12 @@
         </p:nvSpPr>
         <p:spPr>
           <a:xfrm>
-            <a:off x="7635240" y="2670048"/>
-            <a:ext cx="3474720" cy="1377086"/>
+            <a:off x="7543800" y="2724912"/>
+            <a:ext cx="3611880" cy="1527048"/>
           </a:xfrm>
           <a:prstGeom prst="roundRect">
             <a:avLst>
-              <a:gd name="adj" fmla="val 7968"/>
+              <a:gd name="adj" fmla="val 7186"/>
             </a:avLst>
           </a:prstGeom>
           <a:solidFill>
@@ -11219,8 +11219,8 @@
         </p:nvSpPr>
         <p:spPr>
           <a:xfrm>
-            <a:off x="7799832" y="2816352"/>
-            <a:ext cx="3145536" cy="256032"/>
+            <a:off x="7708392" y="2852928"/>
+            <a:ext cx="3282696" cy="228600"/>
           </a:xfrm>
           <a:prstGeom prst="rect">
             <a:avLst/>
@@ -11236,7 +11236,7 @@
               <a:buNone/>
             </a:pPr>
             <a:r>
-              <a:rPr lang="en-US" sz="1300" b="1" dirty="0">
+              <a:rPr lang="en-US" sz="1220" b="1" dirty="0">
                 <a:solidFill>
                   <a:srgbClr val="0068B7"/>
                 </a:solidFill>
@@ -11246,7 +11246,7 @@
               </a:rPr>
               <a:t>Concept checkpoints</a:t>
             </a:r>
-            <a:endParaRPr lang="en-US" sz="1300" dirty="0"/>
+            <a:endParaRPr lang="en-US" sz="1220" dirty="0"/>
           </a:p>
         </p:txBody>
       </p:sp>
@@ -11258,8 +11258,8 @@
         </p:nvSpPr>
         <p:spPr>
           <a:xfrm>
-            <a:off x="7818120" y="3182112"/>
-            <a:ext cx="3090672" cy="718718"/>
+            <a:off x="7726680" y="3182112"/>
+            <a:ext cx="3227832" cy="960120"/>
           </a:xfrm>
           <a:prstGeom prst="rect">
             <a:avLst/>
@@ -11277,7 +11277,7 @@
               <a:buNone/>
             </a:pPr>
             <a:r>
-              <a:rPr lang="en-US" sz="1220" dirty="0">
+              <a:rPr lang="en-US" sz="1140" dirty="0">
                 <a:solidFill>
                   <a:srgbClr val="17364A"/>
                 </a:solidFill>
@@ -11287,14 +11287,14 @@
               </a:rPr>
               <a:t>Approval pathway documentation</a:t>
             </a:r>
-            <a:endParaRPr lang="en-US" sz="1220" dirty="0"/>
-          </a:p>
-          <a:p>
-            <a:pPr indent="0" marL="0">
-              <a:buNone/>
-            </a:pPr>
-            <a:r>
-              <a:rPr lang="en-US" sz="1220" dirty="0">
+            <a:endParaRPr lang="en-US" sz="1140" dirty="0"/>
+          </a:p>
+          <a:p>
+            <a:pPr indent="0" marL="0">
+              <a:buNone/>
+            </a:pPr>
+            <a:r>
+              <a:rPr lang="en-US" sz="1140" dirty="0">
                 <a:solidFill>
                   <a:srgbClr val="17364A"/>
                 </a:solidFill>
@@ -11304,7 +11304,7 @@
               </a:rPr>
               <a:t>Final reviewed message or sample revision</a:t>
             </a:r>
-            <a:endParaRPr lang="en-US" sz="1220" dirty="0"/>
+            <a:endParaRPr lang="en-US" sz="1140" dirty="0"/>
           </a:p>
         </p:txBody>
       </p:sp>
@@ -11316,12 +11316,12 @@
         </p:nvSpPr>
         <p:spPr>
           <a:xfrm>
-            <a:off x="7635240" y="4184294"/>
-            <a:ext cx="3474720" cy="1466698"/>
+            <a:off x="7543800" y="4389120"/>
+            <a:ext cx="3611880" cy="1261872"/>
           </a:xfrm>
           <a:prstGeom prst="roundRect">
             <a:avLst>
-              <a:gd name="adj" fmla="val 7481"/>
+              <a:gd name="adj" fmla="val 8696"/>
             </a:avLst>
           </a:prstGeom>
           <a:solidFill>
@@ -11343,8 +11343,8 @@
         </p:nvSpPr>
         <p:spPr>
           <a:xfrm>
-            <a:off x="7799832" y="4330598"/>
-            <a:ext cx="3145536" cy="256032"/>
+            <a:off x="7708392" y="4517136"/>
+            <a:ext cx="3282696" cy="228600"/>
           </a:xfrm>
           <a:prstGeom prst="rect">
             <a:avLst/>
@@ -11360,7 +11360,7 @@
               <a:buNone/>
             </a:pPr>
             <a:r>
-              <a:rPr lang="en-US" sz="1300" b="1" dirty="0">
+              <a:rPr lang="en-US" sz="1220" b="1" dirty="0">
                 <a:solidFill>
                   <a:srgbClr val="0068B7"/>
                 </a:solidFill>
@@ -11370,7 +11370,7 @@
               </a:rPr>
               <a:t>Engagement move</a:t>
             </a:r>
-            <a:endParaRPr lang="en-US" sz="1300" dirty="0"/>
+            <a:endParaRPr lang="en-US" sz="1220" dirty="0"/>
           </a:p>
         </p:txBody>
       </p:sp>
@@ -11382,8 +11382,8 @@
         </p:nvSpPr>
         <p:spPr>
           <a:xfrm>
-            <a:off x="7799832" y="4659782"/>
-            <a:ext cx="3145536" cy="899770"/>
+            <a:off x="7708392" y="4828032"/>
+            <a:ext cx="3282696" cy="749808"/>
           </a:xfrm>
           <a:prstGeom prst="rect">
             <a:avLst/>
@@ -11401,7 +11401,7 @@
               <a:buNone/>
             </a:pPr>
             <a:r>
-              <a:rPr lang="en-US" sz="1320" dirty="0">
+              <a:rPr lang="en-US" sz="1220" dirty="0">
                 <a:solidFill>
                   <a:srgbClr val="17364A"/>
                 </a:solidFill>
@@ -11409,9 +11409,9 @@
                 <a:ea typeface="Aptos" pitchFamily="34" charset="-122"/>
                 <a:cs typeface="Aptos" pitchFamily="34" charset="-120"/>
               </a:rPr>
-              <a:t>Use the assignment to test whether you can explain the concept, apply it to a realistic public health situation, and identify what would need review before the work moves forward.</a:t>
-            </a:r>
-            <a:endParaRPr lang="en-US" sz="1320" dirty="0"/>
+              <a:t>Use the assignment to test whether you can explain the concept, apply it to a.</a:t>
+            </a:r>
+            <a:endParaRPr lang="en-US" sz="1220" dirty="0"/>
           </a:p>
         </p:txBody>
       </p:sp>
@@ -11702,8 +11702,8 @@
         </p:nvSpPr>
         <p:spPr>
           <a:xfrm>
-            <a:off x="868680" y="1508760"/>
-            <a:ext cx="6309360" cy="4160520"/>
+            <a:off x="822960" y="1463040"/>
+            <a:ext cx="6565392" cy="4343400"/>
           </a:xfrm>
           <a:prstGeom prst="rect">
             <a:avLst/>
@@ -11721,7 +11721,7 @@
               <a:buNone/>
             </a:pPr>
             <a:r>
-              <a:rPr lang="en-US" sz="2100" dirty="0">
+              <a:rPr lang="en-US" sz="1920" dirty="0">
                 <a:solidFill>
                   <a:srgbClr val="003A63"/>
                 </a:solidFill>
@@ -11731,14 +11731,14 @@
               </a:rPr>
               <a:t>• 1. What is an appropriate role for AI in public health communications?</a:t>
             </a:r>
-            <a:endParaRPr lang="en-US" sz="2100" dirty="0"/>
-          </a:p>
-          <a:p>
-            <a:pPr indent="0" marL="0">
-              <a:buNone/>
-            </a:pPr>
-            <a:r>
-              <a:rPr lang="en-US" sz="2100" dirty="0">
+            <a:endParaRPr lang="en-US" sz="1920" dirty="0"/>
+          </a:p>
+          <a:p>
+            <a:pPr indent="0" marL="0">
+              <a:buNone/>
+            </a:pPr>
+            <a:r>
+              <a:rPr lang="en-US" sz="1920" dirty="0">
                 <a:solidFill>
                   <a:srgbClr val="003A63"/>
                 </a:solidFill>
@@ -11748,14 +11748,14 @@
               </a:rPr>
               <a:t>• 2. Why is source verification necessary?</a:t>
             </a:r>
-            <a:endParaRPr lang="en-US" sz="2100" dirty="0"/>
-          </a:p>
-          <a:p>
-            <a:pPr indent="0" marL="0">
-              <a:buNone/>
-            </a:pPr>
-            <a:r>
-              <a:rPr lang="en-US" sz="2100" dirty="0">
+            <a:endParaRPr lang="en-US" sz="1920" dirty="0"/>
+          </a:p>
+          <a:p>
+            <a:pPr indent="0" marL="0">
+              <a:buNone/>
+            </a:pPr>
+            <a:r>
+              <a:rPr lang="en-US" sz="1920" dirty="0">
                 <a:solidFill>
                   <a:srgbClr val="003A63"/>
                 </a:solidFill>
@@ -11763,9 +11763,9 @@
                 <a:ea typeface="Aptos" pitchFamily="34" charset="-122"/>
                 <a:cs typeface="Aptos" pitchFamily="34" charset="-120"/>
               </a:rPr>
-              <a:t>• 3. Which review is especially important for public-facing AI-assisted messages?</a:t>
-            </a:r>
-            <a:endParaRPr lang="en-US" sz="2100" dirty="0"/>
+              <a:t>• 3. Which review is especially important for public-facing AI-assisted.</a:t>
+            </a:r>
+            <a:endParaRPr lang="en-US" sz="1920" dirty="0"/>
           </a:p>
         </p:txBody>
       </p:sp>
@@ -11777,12 +11777,12 @@
         </p:nvSpPr>
         <p:spPr>
           <a:xfrm>
-            <a:off x="7635240" y="1325880"/>
-            <a:ext cx="3474720" cy="1207008"/>
+            <a:off x="7543800" y="1325880"/>
+            <a:ext cx="3611880" cy="1261872"/>
           </a:xfrm>
           <a:prstGeom prst="roundRect">
             <a:avLst>
-              <a:gd name="adj" fmla="val 9091"/>
+              <a:gd name="adj" fmla="val 8696"/>
             </a:avLst>
           </a:prstGeom>
           <a:solidFill>
@@ -11804,8 +11804,8 @@
         </p:nvSpPr>
         <p:spPr>
           <a:xfrm>
-            <a:off x="7799832" y="1472184"/>
-            <a:ext cx="3145536" cy="256032"/>
+            <a:off x="7708392" y="1453896"/>
+            <a:ext cx="3282696" cy="228600"/>
           </a:xfrm>
           <a:prstGeom prst="rect">
             <a:avLst/>
@@ -11821,7 +11821,7 @@
               <a:buNone/>
             </a:pPr>
             <a:r>
-              <a:rPr lang="en-US" sz="1300" b="1" dirty="0">
+              <a:rPr lang="en-US" sz="1220" b="1" dirty="0">
                 <a:solidFill>
                   <a:srgbClr val="0068B7"/>
                 </a:solidFill>
@@ -11831,7 +11831,7 @@
               </a:rPr>
               <a:t>Public health lens</a:t>
             </a:r>
-            <a:endParaRPr lang="en-US" sz="1300" dirty="0"/>
+            <a:endParaRPr lang="en-US" sz="1220" dirty="0"/>
           </a:p>
         </p:txBody>
       </p:sp>
@@ -11843,8 +11843,8 @@
         </p:nvSpPr>
         <p:spPr>
           <a:xfrm>
-            <a:off x="7799832" y="1801368"/>
-            <a:ext cx="3145536" cy="640080"/>
+            <a:off x="7708392" y="1764792"/>
+            <a:ext cx="3282696" cy="749808"/>
           </a:xfrm>
           <a:prstGeom prst="rect">
             <a:avLst/>
@@ -11862,7 +11862,7 @@
               <a:buNone/>
             </a:pPr>
             <a:r>
-              <a:rPr lang="en-US" sz="1320" dirty="0">
+              <a:rPr lang="en-US" sz="1220" dirty="0">
                 <a:solidFill>
                   <a:srgbClr val="17364A"/>
                 </a:solidFill>
@@ -11872,7 +11872,7 @@
               </a:rPr>
               <a:t>1. What is an appropriate role for AI in public health communications?</a:t>
             </a:r>
-            <a:endParaRPr lang="en-US" sz="1320" dirty="0"/>
+            <a:endParaRPr lang="en-US" sz="1220" dirty="0"/>
           </a:p>
         </p:txBody>
       </p:sp>
@@ -11884,12 +11884,12 @@
         </p:nvSpPr>
         <p:spPr>
           <a:xfrm>
-            <a:off x="7635240" y="2670048"/>
-            <a:ext cx="3474720" cy="1377086"/>
+            <a:off x="7543800" y="2724912"/>
+            <a:ext cx="3611880" cy="1527048"/>
           </a:xfrm>
           <a:prstGeom prst="roundRect">
             <a:avLst>
-              <a:gd name="adj" fmla="val 7968"/>
+              <a:gd name="adj" fmla="val 7186"/>
             </a:avLst>
           </a:prstGeom>
           <a:solidFill>
@@ -11911,8 +11911,8 @@
         </p:nvSpPr>
         <p:spPr>
           <a:xfrm>
-            <a:off x="7799832" y="2816352"/>
-            <a:ext cx="3145536" cy="256032"/>
+            <a:off x="7708392" y="2852928"/>
+            <a:ext cx="3282696" cy="228600"/>
           </a:xfrm>
           <a:prstGeom prst="rect">
             <a:avLst/>
@@ -11928,7 +11928,7 @@
               <a:buNone/>
             </a:pPr>
             <a:r>
-              <a:rPr lang="en-US" sz="1300" b="1" dirty="0">
+              <a:rPr lang="en-US" sz="1220" b="1" dirty="0">
                 <a:solidFill>
                   <a:srgbClr val="0068B7"/>
                 </a:solidFill>
@@ -11938,7 +11938,7 @@
               </a:rPr>
               <a:t>Concept checkpoints</a:t>
             </a:r>
-            <a:endParaRPr lang="en-US" sz="1300" dirty="0"/>
+            <a:endParaRPr lang="en-US" sz="1220" dirty="0"/>
           </a:p>
         </p:txBody>
       </p:sp>
@@ -11950,8 +11950,8 @@
         </p:nvSpPr>
         <p:spPr>
           <a:xfrm>
-            <a:off x="7818120" y="3182112"/>
-            <a:ext cx="3090672" cy="718718"/>
+            <a:off x="7726680" y="3182112"/>
+            <a:ext cx="3227832" cy="960120"/>
           </a:xfrm>
           <a:prstGeom prst="rect">
             <a:avLst/>
@@ -11969,7 +11969,7 @@
               <a:buNone/>
             </a:pPr>
             <a:r>
-              <a:rPr lang="en-US" sz="1220" dirty="0">
+              <a:rPr lang="en-US" sz="1140" dirty="0">
                 <a:solidFill>
                   <a:srgbClr val="17364A"/>
                 </a:solidFill>
@@ -11979,14 +11979,14 @@
               </a:rPr>
               <a:t>1.</a:t>
             </a:r>
-            <a:endParaRPr lang="en-US" sz="1220" dirty="0"/>
-          </a:p>
-          <a:p>
-            <a:pPr indent="0" marL="0">
-              <a:buNone/>
-            </a:pPr>
-            <a:r>
-              <a:rPr lang="en-US" sz="1220" dirty="0">
+            <a:endParaRPr lang="en-US" sz="1140" dirty="0"/>
+          </a:p>
+          <a:p>
+            <a:pPr indent="0" marL="0">
+              <a:buNone/>
+            </a:pPr>
+            <a:r>
+              <a:rPr lang="en-US" sz="1140" dirty="0">
                 <a:solidFill>
                   <a:srgbClr val="17364A"/>
                 </a:solidFill>
@@ -11994,16 +11994,16 @@
                 <a:ea typeface="Aptos" pitchFamily="34" charset="-122"/>
                 <a:cs typeface="Aptos" pitchFamily="34" charset="-120"/>
               </a:rPr>
-              <a:t>What is an appropriate role for AI in public health communications?</a:t>
-            </a:r>
-            <a:endParaRPr lang="en-US" sz="1220" dirty="0"/>
-          </a:p>
-          <a:p>
-            <a:pPr indent="0" marL="0">
-              <a:buNone/>
-            </a:pPr>
-            <a:r>
-              <a:rPr lang="en-US" sz="1220" dirty="0">
+              <a:t>What is an appropriate role for AI in public.</a:t>
+            </a:r>
+            <a:endParaRPr lang="en-US" sz="1140" dirty="0"/>
+          </a:p>
+          <a:p>
+            <a:pPr indent="0" marL="0">
+              <a:buNone/>
+            </a:pPr>
+            <a:r>
+              <a:rPr lang="en-US" sz="1140" dirty="0">
                 <a:solidFill>
                   <a:srgbClr val="17364A"/>
                 </a:solidFill>
@@ -12013,7 +12013,7 @@
               </a:rPr>
               <a:t>2.</a:t>
             </a:r>
-            <a:endParaRPr lang="en-US" sz="1220" dirty="0"/>
+            <a:endParaRPr lang="en-US" sz="1140" dirty="0"/>
           </a:p>
         </p:txBody>
       </p:sp>
@@ -12025,12 +12025,12 @@
         </p:nvSpPr>
         <p:spPr>
           <a:xfrm>
-            <a:off x="7635240" y="4184294"/>
-            <a:ext cx="3474720" cy="1466698"/>
+            <a:off x="7543800" y="4389120"/>
+            <a:ext cx="3611880" cy="1261872"/>
           </a:xfrm>
           <a:prstGeom prst="roundRect">
             <a:avLst>
-              <a:gd name="adj" fmla="val 7481"/>
+              <a:gd name="adj" fmla="val 8696"/>
             </a:avLst>
           </a:prstGeom>
           <a:solidFill>
@@ -12052,8 +12052,8 @@
         </p:nvSpPr>
         <p:spPr>
           <a:xfrm>
-            <a:off x="7799832" y="4330598"/>
-            <a:ext cx="3145536" cy="256032"/>
+            <a:off x="7708392" y="4517136"/>
+            <a:ext cx="3282696" cy="228600"/>
           </a:xfrm>
           <a:prstGeom prst="rect">
             <a:avLst/>
@@ -12069,7 +12069,7 @@
               <a:buNone/>
             </a:pPr>
             <a:r>
-              <a:rPr lang="en-US" sz="1300" b="1" dirty="0">
+              <a:rPr lang="en-US" sz="1220" b="1" dirty="0">
                 <a:solidFill>
                   <a:srgbClr val="0068B7"/>
                 </a:solidFill>
@@ -12079,7 +12079,7 @@
               </a:rPr>
               <a:t>Engagement move</a:t>
             </a:r>
-            <a:endParaRPr lang="en-US" sz="1300" dirty="0"/>
+            <a:endParaRPr lang="en-US" sz="1220" dirty="0"/>
           </a:p>
         </p:txBody>
       </p:sp>
@@ -12091,8 +12091,8 @@
         </p:nvSpPr>
         <p:spPr>
           <a:xfrm>
-            <a:off x="7799832" y="4659782"/>
-            <a:ext cx="3145536" cy="899770"/>
+            <a:off x="7708392" y="4828032"/>
+            <a:ext cx="3282696" cy="749808"/>
           </a:xfrm>
           <a:prstGeom prst="rect">
             <a:avLst/>
@@ -12110,7 +12110,7 @@
               <a:buNone/>
             </a:pPr>
             <a:r>
-              <a:rPr lang="en-US" sz="1320" dirty="0">
+              <a:rPr lang="en-US" sz="1220" dirty="0">
                 <a:solidFill>
                   <a:srgbClr val="17364A"/>
                 </a:solidFill>
@@ -12118,9 +12118,9 @@
                 <a:ea typeface="Aptos" pitchFamily="34" charset="-122"/>
                 <a:cs typeface="Aptos" pitchFamily="34" charset="-120"/>
               </a:rPr>
-              <a:t>Use the assignment to test whether you can explain the concept, apply it to a realistic public health situation, and identify what would need review before the work moves forward.</a:t>
-            </a:r>
-            <a:endParaRPr lang="en-US" sz="1320" dirty="0"/>
+              <a:t>Use the assignment to test whether you can explain the concept, apply it to a.</a:t>
+            </a:r>
+            <a:endParaRPr lang="en-US" sz="1220" dirty="0"/>
           </a:p>
         </p:txBody>
       </p:sp>
@@ -12411,8 +12411,8 @@
         </p:nvSpPr>
         <p:spPr>
           <a:xfrm>
-            <a:off x="868680" y="1508760"/>
-            <a:ext cx="6309360" cy="4160520"/>
+            <a:off x="822960" y="1463040"/>
+            <a:ext cx="6565392" cy="4343400"/>
           </a:xfrm>
           <a:prstGeom prst="rect">
             <a:avLst/>
@@ -12430,7 +12430,7 @@
               <a:buNone/>
             </a:pPr>
             <a:r>
-              <a:rPr lang="en-US" sz="2100" dirty="0">
+              <a:rPr lang="en-US" sz="1920" dirty="0">
                 <a:solidFill>
                   <a:srgbClr val="003A63"/>
                 </a:solidFill>
@@ -12440,14 +12440,14 @@
               </a:rPr>
               <a:t>• NIST Artificial Intelligence Risk Management Framework:.</a:t>
             </a:r>
-            <a:endParaRPr lang="en-US" sz="2100" dirty="0"/>
-          </a:p>
-          <a:p>
-            <a:pPr indent="0" marL="0">
-              <a:buNone/>
-            </a:pPr>
-            <a:r>
-              <a:rPr lang="en-US" sz="2100" dirty="0">
+            <a:endParaRPr lang="en-US" sz="1920" dirty="0"/>
+          </a:p>
+          <a:p>
+            <a:pPr indent="0" marL="0">
+              <a:buNone/>
+            </a:pPr>
+            <a:r>
+              <a:rPr lang="en-US" sz="1920" dirty="0">
                 <a:solidFill>
                   <a:srgbClr val="003A63"/>
                 </a:solidFill>
@@ -12457,14 +12457,14 @@
               </a:rPr>
               <a:t>• NIST Generative AI Profile:.</a:t>
             </a:r>
-            <a:endParaRPr lang="en-US" sz="2100" dirty="0"/>
-          </a:p>
-          <a:p>
-            <a:pPr indent="0" marL="0">
-              <a:buNone/>
-            </a:pPr>
-            <a:r>
-              <a:rPr lang="en-US" sz="2100" dirty="0">
+            <a:endParaRPr lang="en-US" sz="1920" dirty="0"/>
+          </a:p>
+          <a:p>
+            <a:pPr indent="0" marL="0">
+              <a:buNone/>
+            </a:pPr>
+            <a:r>
+              <a:rPr lang="en-US" sz="1920" dirty="0">
                 <a:solidFill>
                   <a:srgbClr val="003A63"/>
                 </a:solidFill>
@@ -12474,7 +12474,7 @@
               </a:rPr>
               <a:t>• CDC Public Health Data Strategy and Data Modernization resources:.</a:t>
             </a:r>
-            <a:endParaRPr lang="en-US" sz="2100" dirty="0"/>
+            <a:endParaRPr lang="en-US" sz="1920" dirty="0"/>
           </a:p>
         </p:txBody>
       </p:sp>
@@ -12486,12 +12486,12 @@
         </p:nvSpPr>
         <p:spPr>
           <a:xfrm>
-            <a:off x="7635240" y="1325880"/>
-            <a:ext cx="3474720" cy="1207008"/>
+            <a:off x="7543800" y="1325880"/>
+            <a:ext cx="3611880" cy="1261872"/>
           </a:xfrm>
           <a:prstGeom prst="roundRect">
             <a:avLst>
-              <a:gd name="adj" fmla="val 9091"/>
+              <a:gd name="adj" fmla="val 8696"/>
             </a:avLst>
           </a:prstGeom>
           <a:solidFill>
@@ -12513,8 +12513,8 @@
         </p:nvSpPr>
         <p:spPr>
           <a:xfrm>
-            <a:off x="7799832" y="1472184"/>
-            <a:ext cx="3145536" cy="256032"/>
+            <a:off x="7708392" y="1453896"/>
+            <a:ext cx="3282696" cy="228600"/>
           </a:xfrm>
           <a:prstGeom prst="rect">
             <a:avLst/>
@@ -12530,7 +12530,7 @@
               <a:buNone/>
             </a:pPr>
             <a:r>
-              <a:rPr lang="en-US" sz="1300" b="1" dirty="0">
+              <a:rPr lang="en-US" sz="1220" b="1" dirty="0">
                 <a:solidFill>
                   <a:srgbClr val="0068B7"/>
                 </a:solidFill>
@@ -12540,7 +12540,7 @@
               </a:rPr>
               <a:t>Public health lens</a:t>
             </a:r>
-            <a:endParaRPr lang="en-US" sz="1300" dirty="0"/>
+            <a:endParaRPr lang="en-US" sz="1220" dirty="0"/>
           </a:p>
         </p:txBody>
       </p:sp>
@@ -12552,8 +12552,8 @@
         </p:nvSpPr>
         <p:spPr>
           <a:xfrm>
-            <a:off x="7799832" y="1801368"/>
-            <a:ext cx="3145536" cy="640080"/>
+            <a:off x="7708392" y="1764792"/>
+            <a:ext cx="3282696" cy="749808"/>
           </a:xfrm>
           <a:prstGeom prst="rect">
             <a:avLst/>
@@ -12571,7 +12571,7 @@
               <a:buNone/>
             </a:pPr>
             <a:r>
-              <a:rPr lang="en-US" sz="1320" dirty="0">
+              <a:rPr lang="en-US" sz="1220" dirty="0">
                 <a:solidFill>
                   <a:srgbClr val="17364A"/>
                 </a:solidFill>
@@ -12581,7 +12581,7 @@
               </a:rPr>
               <a:t>NIST Artificial Intelligence Risk Management Framework:.</a:t>
             </a:r>
-            <a:endParaRPr lang="en-US" sz="1320" dirty="0"/>
+            <a:endParaRPr lang="en-US" sz="1220" dirty="0"/>
           </a:p>
         </p:txBody>
       </p:sp>
@@ -12593,12 +12593,12 @@
         </p:nvSpPr>
         <p:spPr>
           <a:xfrm>
-            <a:off x="7635240" y="2670048"/>
-            <a:ext cx="3474720" cy="1377086"/>
+            <a:off x="7543800" y="2724912"/>
+            <a:ext cx="3611880" cy="1527048"/>
           </a:xfrm>
           <a:prstGeom prst="roundRect">
             <a:avLst>
-              <a:gd name="adj" fmla="val 7968"/>
+              <a:gd name="adj" fmla="val 7186"/>
             </a:avLst>
           </a:prstGeom>
           <a:solidFill>
@@ -12620,8 +12620,8 @@
         </p:nvSpPr>
         <p:spPr>
           <a:xfrm>
-            <a:off x="7799832" y="2816352"/>
-            <a:ext cx="3145536" cy="256032"/>
+            <a:off x="7708392" y="2852928"/>
+            <a:ext cx="3282696" cy="228600"/>
           </a:xfrm>
           <a:prstGeom prst="rect">
             <a:avLst/>
@@ -12637,7 +12637,7 @@
               <a:buNone/>
             </a:pPr>
             <a:r>
-              <a:rPr lang="en-US" sz="1300" b="1" dirty="0">
+              <a:rPr lang="en-US" sz="1220" b="1" dirty="0">
                 <a:solidFill>
                   <a:srgbClr val="0068B7"/>
                 </a:solidFill>
@@ -12647,7 +12647,7 @@
               </a:rPr>
               <a:t>Concept checkpoints</a:t>
             </a:r>
-            <a:endParaRPr lang="en-US" sz="1300" dirty="0"/>
+            <a:endParaRPr lang="en-US" sz="1220" dirty="0"/>
           </a:p>
         </p:txBody>
       </p:sp>
@@ -12659,8 +12659,8 @@
         </p:nvSpPr>
         <p:spPr>
           <a:xfrm>
-            <a:off x="7818120" y="3182112"/>
-            <a:ext cx="3090672" cy="718718"/>
+            <a:off x="7726680" y="3182112"/>
+            <a:ext cx="3227832" cy="960120"/>
           </a:xfrm>
           <a:prstGeom prst="rect">
             <a:avLst/>
@@ -12678,7 +12678,7 @@
               <a:buNone/>
             </a:pPr>
             <a:r>
-              <a:rPr lang="en-US" sz="1220" dirty="0">
+              <a:rPr lang="en-US" sz="1140" dirty="0">
                 <a:solidFill>
                   <a:srgbClr val="17364A"/>
                 </a:solidFill>
@@ -12686,16 +12686,16 @@
                 <a:ea typeface="Aptos" pitchFamily="34" charset="-122"/>
                 <a:cs typeface="Aptos" pitchFamily="34" charset="-120"/>
               </a:rPr>
-              <a:t>NIST Artificial Intelligence Risk Management Framework:.</a:t>
-            </a:r>
-            <a:endParaRPr lang="en-US" sz="1220" dirty="0"/>
-          </a:p>
-          <a:p>
-            <a:pPr indent="0" marL="0">
-              <a:buNone/>
-            </a:pPr>
-            <a:r>
-              <a:rPr lang="en-US" sz="1220" dirty="0">
+              <a:t>NIST Artificial Intelligence Risk Management.</a:t>
+            </a:r>
+            <a:endParaRPr lang="en-US" sz="1140" dirty="0"/>
+          </a:p>
+          <a:p>
+            <a:pPr indent="0" marL="0">
+              <a:buNone/>
+            </a:pPr>
+            <a:r>
+              <a:rPr lang="en-US" sz="1140" dirty="0">
                 <a:solidFill>
                   <a:srgbClr val="17364A"/>
                 </a:solidFill>
@@ -12705,14 +12705,14 @@
               </a:rPr>
               <a:t>OWASP guidance for LLM application security</a:t>
             </a:r>
-            <a:endParaRPr lang="en-US" sz="1220" dirty="0"/>
-          </a:p>
-          <a:p>
-            <a:pPr indent="0" marL="0">
-              <a:buNone/>
-            </a:pPr>
-            <a:r>
-              <a:rPr lang="en-US" sz="1220" dirty="0">
+            <a:endParaRPr lang="en-US" sz="1140" dirty="0"/>
+          </a:p>
+          <a:p>
+            <a:pPr indent="0" marL="0">
+              <a:buNone/>
+            </a:pPr>
+            <a:r>
+              <a:rPr lang="en-US" sz="1140" dirty="0">
                 <a:solidFill>
                   <a:srgbClr val="17364A"/>
                 </a:solidFill>
@@ -12720,9 +12720,9 @@
                 <a:ea typeface="Aptos" pitchFamily="34" charset="-122"/>
                 <a:cs typeface="Aptos" pitchFamily="34" charset="-120"/>
               </a:rPr>
-              <a:t>Agency policies for privacy, cybersecurity, records, procurement,.</a:t>
-            </a:r>
-            <a:endParaRPr lang="en-US" sz="1220" dirty="0"/>
+              <a:t>Agency policies for privacy, cybersecurity,.</a:t>
+            </a:r>
+            <a:endParaRPr lang="en-US" sz="1140" dirty="0"/>
           </a:p>
         </p:txBody>
       </p:sp>
@@ -12734,12 +12734,12 @@
         </p:nvSpPr>
         <p:spPr>
           <a:xfrm>
-            <a:off x="7635240" y="4184294"/>
-            <a:ext cx="3474720" cy="1466698"/>
+            <a:off x="7543800" y="4389120"/>
+            <a:ext cx="3611880" cy="1261872"/>
           </a:xfrm>
           <a:prstGeom prst="roundRect">
             <a:avLst>
-              <a:gd name="adj" fmla="val 7481"/>
+              <a:gd name="adj" fmla="val 8696"/>
             </a:avLst>
           </a:prstGeom>
           <a:solidFill>
@@ -12761,8 +12761,8 @@
         </p:nvSpPr>
         <p:spPr>
           <a:xfrm>
-            <a:off x="7799832" y="4330598"/>
-            <a:ext cx="3145536" cy="256032"/>
+            <a:off x="7708392" y="4517136"/>
+            <a:ext cx="3282696" cy="228600"/>
           </a:xfrm>
           <a:prstGeom prst="rect">
             <a:avLst/>
@@ -12778,7 +12778,7 @@
               <a:buNone/>
             </a:pPr>
             <a:r>
-              <a:rPr lang="en-US" sz="1300" b="1" dirty="0">
+              <a:rPr lang="en-US" sz="1220" b="1" dirty="0">
                 <a:solidFill>
                   <a:srgbClr val="0068B7"/>
                 </a:solidFill>
@@ -12788,7 +12788,7 @@
               </a:rPr>
               <a:t>Engagement move</a:t>
             </a:r>
-            <a:endParaRPr lang="en-US" sz="1300" dirty="0"/>
+            <a:endParaRPr lang="en-US" sz="1220" dirty="0"/>
           </a:p>
         </p:txBody>
       </p:sp>
@@ -12800,8 +12800,8 @@
         </p:nvSpPr>
         <p:spPr>
           <a:xfrm>
-            <a:off x="7799832" y="4659782"/>
-            <a:ext cx="3145536" cy="899770"/>
+            <a:off x="7708392" y="4828032"/>
+            <a:ext cx="3282696" cy="749808"/>
           </a:xfrm>
           <a:prstGeom prst="rect">
             <a:avLst/>
@@ -12819,7 +12819,7 @@
               <a:buNone/>
             </a:pPr>
             <a:r>
-              <a:rPr lang="en-US" sz="1320" dirty="0">
+              <a:rPr lang="en-US" sz="1220" dirty="0">
                 <a:solidFill>
                   <a:srgbClr val="17364A"/>
                 </a:solidFill>
@@ -12827,9 +12827,9 @@
                 <a:ea typeface="Aptos" pitchFamily="34" charset="-122"/>
                 <a:cs typeface="Aptos" pitchFamily="34" charset="-120"/>
               </a:rPr>
-              <a:t>Use the concept to plan transparent communication, gather stakeholder input, protect trust, and make sure affected communities are considered early.</a:t>
-            </a:r>
-            <a:endParaRPr lang="en-US" sz="1320" dirty="0"/>
+              <a:t>Use the concept to plan transparent communication, gather stakeholder input,.</a:t>
+            </a:r>
+            <a:endParaRPr lang="en-US" sz="1220" dirty="0"/>
           </a:p>
         </p:txBody>
       </p:sp>
@@ -13120,8 +13120,8 @@
         </p:nvSpPr>
         <p:spPr>
           <a:xfrm>
-            <a:off x="868680" y="1508760"/>
-            <a:ext cx="6309360" cy="4160520"/>
+            <a:off x="822960" y="1463040"/>
+            <a:ext cx="6565392" cy="4343400"/>
           </a:xfrm>
           <a:prstGeom prst="rect">
             <a:avLst/>
@@ -13139,7 +13139,7 @@
               <a:buNone/>
             </a:pPr>
             <a:r>
-              <a:rPr lang="en-US" sz="2100" dirty="0">
+              <a:rPr lang="en-US" sz="1920" dirty="0">
                 <a:solidFill>
                   <a:srgbClr val="003A63"/>
                 </a:solidFill>
@@ -13147,9 +13147,9 @@
                 <a:ea typeface="Aptos" pitchFamily="34" charset="-122"/>
                 <a:cs typeface="Aptos" pitchFamily="34" charset="-120"/>
               </a:rPr>
-              <a:t>• Relevant public health program SOPs, data governance documentation, and implementation plans</a:t>
-            </a:r>
-            <a:endParaRPr lang="en-US" sz="2100" dirty="0"/>
+              <a:t>• Relevant public health program SOPs, data governance documentation, and.</a:t>
+            </a:r>
+            <a:endParaRPr lang="en-US" sz="1920" dirty="0"/>
           </a:p>
         </p:txBody>
       </p:sp>
@@ -13161,12 +13161,12 @@
         </p:nvSpPr>
         <p:spPr>
           <a:xfrm>
-            <a:off x="7635240" y="1325880"/>
-            <a:ext cx="3474720" cy="1207008"/>
+            <a:off x="7543800" y="1325880"/>
+            <a:ext cx="3611880" cy="1261872"/>
           </a:xfrm>
           <a:prstGeom prst="roundRect">
             <a:avLst>
-              <a:gd name="adj" fmla="val 9091"/>
+              <a:gd name="adj" fmla="val 8696"/>
             </a:avLst>
           </a:prstGeom>
           <a:solidFill>
@@ -13188,8 +13188,8 @@
         </p:nvSpPr>
         <p:spPr>
           <a:xfrm>
-            <a:off x="7799832" y="1472184"/>
-            <a:ext cx="3145536" cy="256032"/>
+            <a:off x="7708392" y="1453896"/>
+            <a:ext cx="3282696" cy="228600"/>
           </a:xfrm>
           <a:prstGeom prst="rect">
             <a:avLst/>
@@ -13205,7 +13205,7 @@
               <a:buNone/>
             </a:pPr>
             <a:r>
-              <a:rPr lang="en-US" sz="1300" b="1" dirty="0">
+              <a:rPr lang="en-US" sz="1220" b="1" dirty="0">
                 <a:solidFill>
                   <a:srgbClr val="0068B7"/>
                 </a:solidFill>
@@ -13215,7 +13215,7 @@
               </a:rPr>
               <a:t>Public health lens</a:t>
             </a:r>
-            <a:endParaRPr lang="en-US" sz="1300" dirty="0"/>
+            <a:endParaRPr lang="en-US" sz="1220" dirty="0"/>
           </a:p>
         </p:txBody>
       </p:sp>
@@ -13227,8 +13227,8 @@
         </p:nvSpPr>
         <p:spPr>
           <a:xfrm>
-            <a:off x="7799832" y="1801368"/>
-            <a:ext cx="3145536" cy="640080"/>
+            <a:off x="7708392" y="1764792"/>
+            <a:ext cx="3282696" cy="749808"/>
           </a:xfrm>
           <a:prstGeom prst="rect">
             <a:avLst/>
@@ -13246,7 +13246,7 @@
               <a:buNone/>
             </a:pPr>
             <a:r>
-              <a:rPr lang="en-US" sz="1320" dirty="0">
+              <a:rPr lang="en-US" sz="1220" dirty="0">
                 <a:solidFill>
                   <a:srgbClr val="17364A"/>
                 </a:solidFill>
@@ -13254,9 +13254,9 @@
                 <a:ea typeface="Aptos" pitchFamily="34" charset="-122"/>
                 <a:cs typeface="Aptos" pitchFamily="34" charset="-120"/>
               </a:rPr>
-              <a:t>Relevant public health program SOPs, data governance documentation, and implementation.</a:t>
-            </a:r>
-            <a:endParaRPr lang="en-US" sz="1320" dirty="0"/>
+              <a:t>Relevant public health program SOPs, data governance documentation, and.</a:t>
+            </a:r>
+            <a:endParaRPr lang="en-US" sz="1220" dirty="0"/>
           </a:p>
         </p:txBody>
       </p:sp>
@@ -13268,12 +13268,12 @@
         </p:nvSpPr>
         <p:spPr>
           <a:xfrm>
-            <a:off x="7635240" y="2670048"/>
-            <a:ext cx="3474720" cy="1377086"/>
+            <a:off x="7543800" y="2724912"/>
+            <a:ext cx="3611880" cy="1527048"/>
           </a:xfrm>
           <a:prstGeom prst="roundRect">
             <a:avLst>
-              <a:gd name="adj" fmla="val 7968"/>
+              <a:gd name="adj" fmla="val 7186"/>
             </a:avLst>
           </a:prstGeom>
           <a:solidFill>
@@ -13295,8 +13295,8 @@
         </p:nvSpPr>
         <p:spPr>
           <a:xfrm>
-            <a:off x="7799832" y="2816352"/>
-            <a:ext cx="3145536" cy="256032"/>
+            <a:off x="7708392" y="2852928"/>
+            <a:ext cx="3282696" cy="228600"/>
           </a:xfrm>
           <a:prstGeom prst="rect">
             <a:avLst/>
@@ -13312,7 +13312,7 @@
               <a:buNone/>
             </a:pPr>
             <a:r>
-              <a:rPr lang="en-US" sz="1300" b="1" dirty="0">
+              <a:rPr lang="en-US" sz="1220" b="1" dirty="0">
                 <a:solidFill>
                   <a:srgbClr val="0068B7"/>
                 </a:solidFill>
@@ -13322,7 +13322,7 @@
               </a:rPr>
               <a:t>Concept checkpoints</a:t>
             </a:r>
-            <a:endParaRPr lang="en-US" sz="1300" dirty="0"/>
+            <a:endParaRPr lang="en-US" sz="1220" dirty="0"/>
           </a:p>
         </p:txBody>
       </p:sp>
@@ -13334,8 +13334,8 @@
         </p:nvSpPr>
         <p:spPr>
           <a:xfrm>
-            <a:off x="7818120" y="3182112"/>
-            <a:ext cx="3090672" cy="718718"/>
+            <a:off x="7726680" y="3182112"/>
+            <a:ext cx="3227832" cy="960120"/>
           </a:xfrm>
           <a:prstGeom prst="rect">
             <a:avLst/>
@@ -13353,7 +13353,7 @@
               <a:buNone/>
             </a:pPr>
             <a:r>
-              <a:rPr lang="en-US" sz="1220" dirty="0">
+              <a:rPr lang="en-US" sz="1140" dirty="0">
                 <a:solidFill>
                   <a:srgbClr val="17364A"/>
                 </a:solidFill>
@@ -13361,9 +13361,9 @@
                 <a:ea typeface="Aptos" pitchFamily="34" charset="-122"/>
                 <a:cs typeface="Aptos" pitchFamily="34" charset="-120"/>
               </a:rPr>
-              <a:t>Relevant public health program SOPs, data governance.</a:t>
-            </a:r>
-            <a:endParaRPr lang="en-US" sz="1220" dirty="0"/>
+              <a:t>Relevant public health program SOPs, data.</a:t>
+            </a:r>
+            <a:endParaRPr lang="en-US" sz="1140" dirty="0"/>
           </a:p>
         </p:txBody>
       </p:sp>
@@ -13375,12 +13375,12 @@
         </p:nvSpPr>
         <p:spPr>
           <a:xfrm>
-            <a:off x="7635240" y="4184294"/>
-            <a:ext cx="3474720" cy="1466698"/>
+            <a:off x="7543800" y="4389120"/>
+            <a:ext cx="3611880" cy="1261872"/>
           </a:xfrm>
           <a:prstGeom prst="roundRect">
             <a:avLst>
-              <a:gd name="adj" fmla="val 7481"/>
+              <a:gd name="adj" fmla="val 8696"/>
             </a:avLst>
           </a:prstGeom>
           <a:solidFill>
@@ -13402,8 +13402,8 @@
         </p:nvSpPr>
         <p:spPr>
           <a:xfrm>
-            <a:off x="7799832" y="4330598"/>
-            <a:ext cx="3145536" cy="256032"/>
+            <a:off x="7708392" y="4517136"/>
+            <a:ext cx="3282696" cy="228600"/>
           </a:xfrm>
           <a:prstGeom prst="rect">
             <a:avLst/>
@@ -13419,7 +13419,7 @@
               <a:buNone/>
             </a:pPr>
             <a:r>
-              <a:rPr lang="en-US" sz="1300" b="1" dirty="0">
+              <a:rPr lang="en-US" sz="1220" b="1" dirty="0">
                 <a:solidFill>
                   <a:srgbClr val="0068B7"/>
                 </a:solidFill>
@@ -13429,7 +13429,7 @@
               </a:rPr>
               <a:t>Engagement move</a:t>
             </a:r>
-            <a:endParaRPr lang="en-US" sz="1300" dirty="0"/>
+            <a:endParaRPr lang="en-US" sz="1220" dirty="0"/>
           </a:p>
         </p:txBody>
       </p:sp>
@@ -13441,8 +13441,8 @@
         </p:nvSpPr>
         <p:spPr>
           <a:xfrm>
-            <a:off x="7799832" y="4659782"/>
-            <a:ext cx="3145536" cy="899770"/>
+            <a:off x="7708392" y="4828032"/>
+            <a:ext cx="3282696" cy="749808"/>
           </a:xfrm>
           <a:prstGeom prst="rect">
             <a:avLst/>
@@ -13460,7 +13460,7 @@
               <a:buNone/>
             </a:pPr>
             <a:r>
-              <a:rPr lang="en-US" sz="1320" dirty="0">
+              <a:rPr lang="en-US" sz="1220" dirty="0">
                 <a:solidFill>
                   <a:srgbClr val="17364A"/>
                 </a:solidFill>
@@ -13468,9 +13468,9 @@
                 <a:ea typeface="Aptos" pitchFamily="34" charset="-122"/>
                 <a:cs typeface="Aptos" pitchFamily="34" charset="-120"/>
               </a:rPr>
-              <a:t>Use the concept to plan transparent communication, gather stakeholder input, protect trust, and make sure affected communities are considered early.</a:t>
-            </a:r>
-            <a:endParaRPr lang="en-US" sz="1320" dirty="0"/>
+              <a:t>Use the concept to plan transparent communication, gather stakeholder input,.</a:t>
+            </a:r>
+            <a:endParaRPr lang="en-US" sz="1220" dirty="0"/>
           </a:p>
         </p:txBody>
       </p:sp>
@@ -13788,7 +13788,7 @@
                 <a:ea typeface="Aptos" pitchFamily="34" charset="-122"/>
                 <a:cs typeface="Aptos" pitchFamily="34" charset="-120"/>
               </a:rPr>
-              <a:t>• Play 11: Build and Deploy AI Solutions - This lesson informs Play 11 by helping learners.</a:t>
+              <a:t>• Play 11: Build and Deploy AI Solutions - This lesson informs Play 11 by.</a:t>
             </a:r>
             <a:endParaRPr lang="en-US" sz="1900" dirty="0"/>
           </a:p>
@@ -13805,7 +13805,7 @@
                 <a:ea typeface="Aptos" pitchFamily="34" charset="-122"/>
                 <a:cs typeface="Aptos" pitchFamily="34" charset="-120"/>
               </a:rPr>
-              <a:t>• Play 3: Establish AI Governance - This lesson informs Play 3 by helping learners connect the.</a:t>
+              <a:t>• Play 3: Establish AI Governance - This lesson informs Play 3 by helping.</a:t>
             </a:r>
             <a:endParaRPr lang="en-US" sz="1900" dirty="0"/>
           </a:p>
@@ -13822,7 +13822,7 @@
                 <a:ea typeface="Aptos" pitchFamily="34" charset="-122"/>
                 <a:cs typeface="Aptos" pitchFamily="34" charset="-120"/>
               </a:rPr>
-              <a:t>• Play 1: Vision &amp; Guardrails - This lesson informs Play 1 by helping learners connect the.</a:t>
+              <a:t>• Play 1: Vision &amp; Guardrails - This lesson informs Play 1 by helping learners.</a:t>
             </a:r>
             <a:endParaRPr lang="en-US" sz="1900" dirty="0"/>
           </a:p>
@@ -13839,7 +13839,7 @@
                 <a:ea typeface="Aptos" pitchFamily="34" charset="-122"/>
                 <a:cs typeface="Aptos" pitchFamily="34" charset="-120"/>
               </a:rPr>
-              <a:t>• Play 2: Readiness Assessment - This lesson informs Play 2 by helping learners connect the.</a:t>
+              <a:t>• Play 2: Readiness Assessment - This lesson informs Play 2 by helping.</a:t>
             </a:r>
             <a:endParaRPr lang="en-US" sz="1900" dirty="0"/>
           </a:p>
@@ -13880,8 +13880,8 @@
         </p:nvSpPr>
         <p:spPr>
           <a:xfrm>
-            <a:off x="8211312" y="1563624"/>
-            <a:ext cx="2734056" cy="256032"/>
+            <a:off x="8211312" y="1545336"/>
+            <a:ext cx="2734056" cy="228600"/>
           </a:xfrm>
           <a:prstGeom prst="rect">
             <a:avLst/>
@@ -13897,7 +13897,7 @@
               <a:buNone/>
             </a:pPr>
             <a:r>
-              <a:rPr lang="en-US" sz="1300" b="1" dirty="0">
+              <a:rPr lang="en-US" sz="1220" b="1" dirty="0">
                 <a:solidFill>
                   <a:srgbClr val="0068B7"/>
                 </a:solidFill>
@@ -13907,7 +13907,7 @@
               </a:rPr>
               <a:t>Apply the lesson</a:t>
             </a:r>
-            <a:endParaRPr lang="en-US" sz="1300" dirty="0"/>
+            <a:endParaRPr lang="en-US" sz="1220" dirty="0"/>
           </a:p>
         </p:txBody>
       </p:sp>
@@ -13919,8 +13919,8 @@
         </p:nvSpPr>
         <p:spPr>
           <a:xfrm>
-            <a:off x="8211312" y="1892808"/>
-            <a:ext cx="2734056" cy="1536192"/>
+            <a:off x="8211312" y="1856232"/>
+            <a:ext cx="2734056" cy="1591056"/>
           </a:xfrm>
           <a:prstGeom prst="rect">
             <a:avLst/>
@@ -13938,7 +13938,7 @@
               <a:buNone/>
             </a:pPr>
             <a:r>
-              <a:rPr lang="en-US" sz="1320" dirty="0">
+              <a:rPr lang="en-US" sz="1220" dirty="0">
                 <a:solidFill>
                   <a:srgbClr val="17364A"/>
                 </a:solidFill>
@@ -13946,9 +13946,9 @@
                 <a:ea typeface="Aptos" pitchFamily="34" charset="-122"/>
                 <a:cs typeface="Aptos" pitchFamily="34" charset="-120"/>
               </a:rPr>
-              <a:t>Use the related plays to identify decisions, participants, timing, approvals, and documentation needed for responsible implementation.</a:t>
-            </a:r>
-            <a:endParaRPr lang="en-US" sz="1320" dirty="0"/>
+              <a:t>Use the related plays to identify decisions, participants, timing, approvals,.</a:t>
+            </a:r>
+            <a:endParaRPr lang="en-US" sz="1220" dirty="0"/>
           </a:p>
         </p:txBody>
       </p:sp>
@@ -13987,8 +13987,8 @@
         </p:nvSpPr>
         <p:spPr>
           <a:xfrm>
-            <a:off x="8211312" y="3941064"/>
-            <a:ext cx="2734056" cy="256032"/>
+            <a:off x="8211312" y="3922776"/>
+            <a:ext cx="2734056" cy="228600"/>
           </a:xfrm>
           <a:prstGeom prst="rect">
             <a:avLst/>
@@ -14004,7 +14004,7 @@
               <a:buNone/>
             </a:pPr>
             <a:r>
-              <a:rPr lang="en-US" sz="1300" b="1" dirty="0">
+              <a:rPr lang="en-US" sz="1220" b="1" dirty="0">
                 <a:solidFill>
                   <a:srgbClr val="0068B7"/>
                 </a:solidFill>
@@ -14014,7 +14014,7 @@
               </a:rPr>
               <a:t>Use the play links to</a:t>
             </a:r>
-            <a:endParaRPr lang="en-US" sz="1300" dirty="0"/>
+            <a:endParaRPr lang="en-US" sz="1220" dirty="0"/>
           </a:p>
         </p:txBody>
       </p:sp>
@@ -14026,8 +14026,8 @@
         </p:nvSpPr>
         <p:spPr>
           <a:xfrm>
-            <a:off x="8229600" y="4306824"/>
-            <a:ext cx="2679192" cy="941832"/>
+            <a:off x="8229600" y="4251960"/>
+            <a:ext cx="2679192" cy="1033272"/>
           </a:xfrm>
           <a:prstGeom prst="rect">
             <a:avLst/>
@@ -14045,7 +14045,7 @@
               <a:buNone/>
             </a:pPr>
             <a:r>
-              <a:rPr lang="en-US" sz="1220" dirty="0">
+              <a:rPr lang="en-US" sz="1140" dirty="0">
                 <a:solidFill>
                   <a:srgbClr val="17364A"/>
                 </a:solidFill>
@@ -14055,14 +14055,14 @@
               </a:rPr>
               <a:t>Locate the decision point in the playbook sequence.</a:t>
             </a:r>
-            <a:endParaRPr lang="en-US" sz="1220" dirty="0"/>
-          </a:p>
-          <a:p>
-            <a:pPr indent="0" marL="0">
-              <a:buNone/>
-            </a:pPr>
-            <a:r>
-              <a:rPr lang="en-US" sz="1220" dirty="0">
+            <a:endParaRPr lang="en-US" sz="1140" dirty="0"/>
+          </a:p>
+          <a:p>
+            <a:pPr indent="0" marL="0">
+              <a:buNone/>
+            </a:pPr>
+            <a:r>
+              <a:rPr lang="en-US" sz="1140" dirty="0">
                 <a:solidFill>
                   <a:srgbClr val="17364A"/>
                 </a:solidFill>
@@ -14072,14 +14072,14 @@
               </a:rPr>
               <a:t>Identify who should participate in the work.</a:t>
             </a:r>
-            <a:endParaRPr lang="en-US" sz="1220" dirty="0"/>
-          </a:p>
-          <a:p>
-            <a:pPr indent="0" marL="0">
-              <a:buNone/>
-            </a:pPr>
-            <a:r>
-              <a:rPr lang="en-US" sz="1220" dirty="0">
+            <a:endParaRPr lang="en-US" sz="1140" dirty="0"/>
+          </a:p>
+          <a:p>
+            <a:pPr indent="0" marL="0">
+              <a:buNone/>
+            </a:pPr>
+            <a:r>
+              <a:rPr lang="en-US" sz="1140" dirty="0">
                 <a:solidFill>
                   <a:srgbClr val="17364A"/>
                 </a:solidFill>
@@ -14087,9 +14087,9 @@
                 <a:ea typeface="Aptos" pitchFamily="34" charset="-122"/>
                 <a:cs typeface="Aptos" pitchFamily="34" charset="-120"/>
               </a:rPr>
-              <a:t>Document the review, approval, or implementation step.</a:t>
-            </a:r>
-            <a:endParaRPr lang="en-US" sz="1220" dirty="0"/>
+              <a:t>Document the review, approval, or implementation.</a:t>
+            </a:r>
+            <a:endParaRPr lang="en-US" sz="1140" dirty="0"/>
           </a:p>
         </p:txBody>
       </p:sp>
@@ -14407,7 +14407,7 @@
                 <a:ea typeface="Aptos" pitchFamily="34" charset="-122"/>
                 <a:cs typeface="Aptos" pitchFamily="34" charset="-120"/>
               </a:rPr>
-              <a:t>• Tool 4: AI Policy Landscape Scan (Worksheet) - Use AI Policy Landscape Scan to translate this.</a:t>
+              <a:t>• Tool 4: AI Policy Landscape Scan (Worksheet) - Use AI Policy Landscape Scan.</a:t>
             </a:r>
             <a:endParaRPr lang="en-US" sz="1850" dirty="0"/>
           </a:p>
@@ -14424,7 +14424,7 @@
                 <a:ea typeface="Aptos" pitchFamily="34" charset="-122"/>
                 <a:cs typeface="Aptos" pitchFamily="34" charset="-120"/>
               </a:rPr>
-              <a:t>• Tool 5: AI Environmental and Resource Impact Review (Checklist) - Use AI Environmental and.</a:t>
+              <a:t>• Tool 5: AI Environmental and Resource Impact Review (Checklist) - Use AI.</a:t>
             </a:r>
             <a:endParaRPr lang="en-US" sz="1850" dirty="0"/>
           </a:p>
@@ -14441,7 +14441,7 @@
                 <a:ea typeface="Aptos" pitchFamily="34" charset="-122"/>
                 <a:cs typeface="Aptos" pitchFamily="34" charset="-120"/>
               </a:rPr>
-              <a:t>• Tool 6: Human-Centered AI Decision Rule Checklist (Checklist) - Use this tool to complete or.</a:t>
+              <a:t>• Tool 6: Human-Centered AI Decision Rule Checklist (Checklist) - Use this.</a:t>
             </a:r>
             <a:endParaRPr lang="en-US" sz="1850" dirty="0"/>
           </a:p>
@@ -14458,7 +14458,7 @@
                 <a:ea typeface="Aptos" pitchFamily="34" charset="-122"/>
                 <a:cs typeface="Aptos" pitchFamily="34" charset="-120"/>
               </a:rPr>
-              <a:t>• Tool 8: AI Project Charter (Planning) - Use AI Project Charter to translate this lesson into a.</a:t>
+              <a:t>• Tool 8: AI Project Charter (Planning) - Use AI Project Charter to translate.</a:t>
             </a:r>
             <a:endParaRPr lang="en-US" sz="1850" dirty="0"/>
           </a:p>
@@ -14499,8 +14499,8 @@
         </p:nvSpPr>
         <p:spPr>
           <a:xfrm>
-            <a:off x="8211312" y="1563624"/>
-            <a:ext cx="2734056" cy="256032"/>
+            <a:off x="8211312" y="1545336"/>
+            <a:ext cx="2734056" cy="228600"/>
           </a:xfrm>
           <a:prstGeom prst="rect">
             <a:avLst/>
@@ -14516,7 +14516,7 @@
               <a:buNone/>
             </a:pPr>
             <a:r>
-              <a:rPr lang="en-US" sz="1300" b="1" dirty="0">
+              <a:rPr lang="en-US" sz="1220" b="1" dirty="0">
                 <a:solidFill>
                   <a:srgbClr val="0068B7"/>
                 </a:solidFill>
@@ -14526,7 +14526,7 @@
               </a:rPr>
               <a:t>Use the tools</a:t>
             </a:r>
-            <a:endParaRPr lang="en-US" sz="1300" dirty="0"/>
+            <a:endParaRPr lang="en-US" sz="1220" dirty="0"/>
           </a:p>
         </p:txBody>
       </p:sp>
@@ -14538,8 +14538,8 @@
         </p:nvSpPr>
         <p:spPr>
           <a:xfrm>
-            <a:off x="8211312" y="1892808"/>
-            <a:ext cx="2734056" cy="1536192"/>
+            <a:off x="8211312" y="1856232"/>
+            <a:ext cx="2734056" cy="1591056"/>
           </a:xfrm>
           <a:prstGeom prst="rect">
             <a:avLst/>
@@ -14557,7 +14557,7 @@
               <a:buNone/>
             </a:pPr>
             <a:r>
-              <a:rPr lang="en-US" sz="1320" dirty="0">
+              <a:rPr lang="en-US" sz="1220" dirty="0">
                 <a:solidFill>
                   <a:srgbClr val="17364A"/>
                 </a:solidFill>
@@ -14565,9 +14565,9 @@
                 <a:ea typeface="Aptos" pitchFamily="34" charset="-122"/>
                 <a:cs typeface="Aptos" pitchFamily="34" charset="-120"/>
               </a:rPr>
-              <a:t>Use linked tools when your department needs a structured worksheet, template, checklist, review process, or documentation artifact.</a:t>
-            </a:r>
-            <a:endParaRPr lang="en-US" sz="1320" dirty="0"/>
+              <a:t>Use linked tools when your department needs a structured worksheet, template,.</a:t>
+            </a:r>
+            <a:endParaRPr lang="en-US" sz="1220" dirty="0"/>
           </a:p>
         </p:txBody>
       </p:sp>
@@ -14606,8 +14606,8 @@
         </p:nvSpPr>
         <p:spPr>
           <a:xfrm>
-            <a:off x="8211312" y="3941064"/>
-            <a:ext cx="2734056" cy="256032"/>
+            <a:off x="8211312" y="3922776"/>
+            <a:ext cx="2734056" cy="228600"/>
           </a:xfrm>
           <a:prstGeom prst="rect">
             <a:avLst/>
@@ -14623,7 +14623,7 @@
               <a:buNone/>
             </a:pPr>
             <a:r>
-              <a:rPr lang="en-US" sz="1300" b="1" dirty="0">
+              <a:rPr lang="en-US" sz="1220" b="1" dirty="0">
                 <a:solidFill>
                   <a:srgbClr val="0068B7"/>
                 </a:solidFill>
@@ -14633,7 +14633,7 @@
               </a:rPr>
               <a:t>Tool selection cues</a:t>
             </a:r>
-            <a:endParaRPr lang="en-US" sz="1300" dirty="0"/>
+            <a:endParaRPr lang="en-US" sz="1220" dirty="0"/>
           </a:p>
         </p:txBody>
       </p:sp>
@@ -14645,8 +14645,8 @@
         </p:nvSpPr>
         <p:spPr>
           <a:xfrm>
-            <a:off x="8229600" y="4306824"/>
-            <a:ext cx="2679192" cy="941832"/>
+            <a:off x="8229600" y="4251960"/>
+            <a:ext cx="2679192" cy="1033272"/>
           </a:xfrm>
           <a:prstGeom prst="rect">
             <a:avLst/>
@@ -14664,7 +14664,7 @@
               <a:buNone/>
             </a:pPr>
             <a:r>
-              <a:rPr lang="en-US" sz="1220" dirty="0">
+              <a:rPr lang="en-US" sz="1140" dirty="0">
                 <a:solidFill>
                   <a:srgbClr val="17364A"/>
                 </a:solidFill>
@@ -14674,14 +14674,14 @@
               </a:rPr>
               <a:t>Use a tool when no comparable local process exists.</a:t>
             </a:r>
-            <a:endParaRPr lang="en-US" sz="1220" dirty="0"/>
-          </a:p>
-          <a:p>
-            <a:pPr indent="0" marL="0">
-              <a:buNone/>
-            </a:pPr>
-            <a:r>
-              <a:rPr lang="en-US" sz="1220" dirty="0">
+            <a:endParaRPr lang="en-US" sz="1140" dirty="0"/>
+          </a:p>
+          <a:p>
+            <a:pPr indent="0" marL="0">
+              <a:buNone/>
+            </a:pPr>
+            <a:r>
+              <a:rPr lang="en-US" sz="1140" dirty="0">
                 <a:solidFill>
                   <a:srgbClr val="17364A"/>
                 </a:solidFill>
@@ -14689,16 +14689,16 @@
                 <a:ea typeface="Aptos" pitchFamily="34" charset="-122"/>
                 <a:cs typeface="Aptos" pitchFamily="34" charset="-120"/>
               </a:rPr>
-              <a:t>Adapt existing department templates when they already fit the.</a:t>
-            </a:r>
-            <a:endParaRPr lang="en-US" sz="1220" dirty="0"/>
-          </a:p>
-          <a:p>
-            <a:pPr indent="0" marL="0">
-              <a:buNone/>
-            </a:pPr>
-            <a:r>
-              <a:rPr lang="en-US" sz="1220" dirty="0">
+              <a:t>Adapt existing department templates when they.</a:t>
+            </a:r>
+            <a:endParaRPr lang="en-US" sz="1140" dirty="0"/>
+          </a:p>
+          <a:p>
+            <a:pPr indent="0" marL="0">
+              <a:buNone/>
+            </a:pPr>
+            <a:r>
+              <a:rPr lang="en-US" sz="1140" dirty="0">
                 <a:solidFill>
                   <a:srgbClr val="17364A"/>
                 </a:solidFill>
@@ -14706,9 +14706,9 @@
                 <a:ea typeface="Aptos" pitchFamily="34" charset="-122"/>
                 <a:cs typeface="Aptos" pitchFamily="34" charset="-120"/>
               </a:rPr>
-              <a:t>Save the completed artifact as evidence of the decision.</a:t>
-            </a:r>
-            <a:endParaRPr lang="en-US" sz="1220" dirty="0"/>
+              <a:t>Save the completed artifact as evidence of the.</a:t>
+            </a:r>
+            <a:endParaRPr lang="en-US" sz="1140" dirty="0"/>
           </a:p>
         </p:txBody>
       </p:sp>
@@ -14999,8 +14999,8 @@
         </p:nvSpPr>
         <p:spPr>
           <a:xfrm>
-            <a:off x="868680" y="1508760"/>
-            <a:ext cx="6309360" cy="4160520"/>
+            <a:off x="822960" y="1463040"/>
+            <a:ext cx="6565392" cy="4343400"/>
           </a:xfrm>
           <a:prstGeom prst="rect">
             <a:avLst/>
@@ -15018,7 +15018,7 @@
               <a:buNone/>
             </a:pPr>
             <a:r>
-              <a:rPr lang="en-US" sz="2100" dirty="0">
+              <a:rPr lang="en-US" sz="1920" dirty="0">
                 <a:solidFill>
                   <a:srgbClr val="003A63"/>
                 </a:solidFill>
@@ -15026,16 +15026,16 @@
                 <a:ea typeface="Aptos" pitchFamily="34" charset="-122"/>
                 <a:cs typeface="Aptos" pitchFamily="34" charset="-120"/>
               </a:rPr>
-              <a:t>• Identify appropriate and inappropriate uses of AI in public health communications.</a:t>
-            </a:r>
-            <a:endParaRPr lang="en-US" sz="2100" dirty="0"/>
-          </a:p>
-          <a:p>
-            <a:pPr indent="0" marL="0">
-              <a:buNone/>
-            </a:pPr>
-            <a:r>
-              <a:rPr lang="en-US" sz="2100" dirty="0">
+              <a:t>• Identify appropriate and inappropriate uses of AI in public health.</a:t>
+            </a:r>
+            <a:endParaRPr lang="en-US" sz="1920" dirty="0"/>
+          </a:p>
+          <a:p>
+            <a:pPr indent="0" marL="0">
+              <a:buNone/>
+            </a:pPr>
+            <a:r>
+              <a:rPr lang="en-US" sz="1920" dirty="0">
                 <a:solidFill>
                   <a:srgbClr val="003A63"/>
                 </a:solidFill>
@@ -15043,16 +15043,16 @@
                 <a:ea typeface="Aptos" pitchFamily="34" charset="-122"/>
                 <a:cs typeface="Aptos" pitchFamily="34" charset="-120"/>
               </a:rPr>
-              <a:t>• Apply source verification, plain language, accessibility, and equity review to AI-generated.</a:t>
-            </a:r>
-            <a:endParaRPr lang="en-US" sz="2100" dirty="0"/>
-          </a:p>
-          <a:p>
-            <a:pPr indent="0" marL="0">
-              <a:buNone/>
-            </a:pPr>
-            <a:r>
-              <a:rPr lang="en-US" sz="2100" dirty="0">
+              <a:t>• Apply source verification, plain language, accessibility, and equity review.</a:t>
+            </a:r>
+            <a:endParaRPr lang="en-US" sz="1920" dirty="0"/>
+          </a:p>
+          <a:p>
+            <a:pPr indent="0" marL="0">
+              <a:buNone/>
+            </a:pPr>
+            <a:r>
+              <a:rPr lang="en-US" sz="1920" dirty="0">
                 <a:solidFill>
                   <a:srgbClr val="003A63"/>
                 </a:solidFill>
@@ -15062,7 +15062,7 @@
               </a:rPr>
               <a:t>• Design a human review workflow for AI-assisted public-facing communications.</a:t>
             </a:r>
-            <a:endParaRPr lang="en-US" sz="2100" dirty="0"/>
+            <a:endParaRPr lang="en-US" sz="1920" dirty="0"/>
           </a:p>
         </p:txBody>
       </p:sp>
@@ -15074,12 +15074,12 @@
         </p:nvSpPr>
         <p:spPr>
           <a:xfrm>
-            <a:off x="7635240" y="1325880"/>
-            <a:ext cx="3474720" cy="1207008"/>
+            <a:off x="7543800" y="1325880"/>
+            <a:ext cx="3611880" cy="1261872"/>
           </a:xfrm>
           <a:prstGeom prst="roundRect">
             <a:avLst>
-              <a:gd name="adj" fmla="val 9091"/>
+              <a:gd name="adj" fmla="val 8696"/>
             </a:avLst>
           </a:prstGeom>
           <a:solidFill>
@@ -15101,8 +15101,8 @@
         </p:nvSpPr>
         <p:spPr>
           <a:xfrm>
-            <a:off x="7799832" y="1472184"/>
-            <a:ext cx="3145536" cy="256032"/>
+            <a:off x="7708392" y="1453896"/>
+            <a:ext cx="3282696" cy="228600"/>
           </a:xfrm>
           <a:prstGeom prst="rect">
             <a:avLst/>
@@ -15118,7 +15118,7 @@
               <a:buNone/>
             </a:pPr>
             <a:r>
-              <a:rPr lang="en-US" sz="1300" b="1" dirty="0">
+              <a:rPr lang="en-US" sz="1220" b="1" dirty="0">
                 <a:solidFill>
                   <a:srgbClr val="0068B7"/>
                 </a:solidFill>
@@ -15128,7 +15128,7 @@
               </a:rPr>
               <a:t>Public health lens</a:t>
             </a:r>
-            <a:endParaRPr lang="en-US" sz="1300" dirty="0"/>
+            <a:endParaRPr lang="en-US" sz="1220" dirty="0"/>
           </a:p>
         </p:txBody>
       </p:sp>
@@ -15140,8 +15140,8 @@
         </p:nvSpPr>
         <p:spPr>
           <a:xfrm>
-            <a:off x="7799832" y="1801368"/>
-            <a:ext cx="3145536" cy="640080"/>
+            <a:off x="7708392" y="1764792"/>
+            <a:ext cx="3282696" cy="749808"/>
           </a:xfrm>
           <a:prstGeom prst="rect">
             <a:avLst/>
@@ -15159,7 +15159,7 @@
               <a:buNone/>
             </a:pPr>
             <a:r>
-              <a:rPr lang="en-US" sz="1320" dirty="0">
+              <a:rPr lang="en-US" sz="1220" dirty="0">
                 <a:solidFill>
                   <a:srgbClr val="17364A"/>
                 </a:solidFill>
@@ -15169,7 +15169,7 @@
               </a:rPr>
               <a:t>Identify appropriate and inappropriate uses of AI in public health communications.</a:t>
             </a:r>
-            <a:endParaRPr lang="en-US" sz="1320" dirty="0"/>
+            <a:endParaRPr lang="en-US" sz="1220" dirty="0"/>
           </a:p>
         </p:txBody>
       </p:sp>
@@ -15181,12 +15181,12 @@
         </p:nvSpPr>
         <p:spPr>
           <a:xfrm>
-            <a:off x="7635240" y="2670048"/>
-            <a:ext cx="3474720" cy="1377086"/>
+            <a:off x="7543800" y="2724912"/>
+            <a:ext cx="3611880" cy="1527048"/>
           </a:xfrm>
           <a:prstGeom prst="roundRect">
             <a:avLst>
-              <a:gd name="adj" fmla="val 7968"/>
+              <a:gd name="adj" fmla="val 7186"/>
             </a:avLst>
           </a:prstGeom>
           <a:solidFill>
@@ -15208,8 +15208,8 @@
         </p:nvSpPr>
         <p:spPr>
           <a:xfrm>
-            <a:off x="7799832" y="2816352"/>
-            <a:ext cx="3145536" cy="256032"/>
+            <a:off x="7708392" y="2852928"/>
+            <a:ext cx="3282696" cy="228600"/>
           </a:xfrm>
           <a:prstGeom prst="rect">
             <a:avLst/>
@@ -15225,7 +15225,7 @@
               <a:buNone/>
             </a:pPr>
             <a:r>
-              <a:rPr lang="en-US" sz="1300" b="1" dirty="0">
+              <a:rPr lang="en-US" sz="1220" b="1" dirty="0">
                 <a:solidFill>
                   <a:srgbClr val="0068B7"/>
                 </a:solidFill>
@@ -15235,7 +15235,7 @@
               </a:rPr>
               <a:t>Concept checkpoints</a:t>
             </a:r>
-            <a:endParaRPr lang="en-US" sz="1300" dirty="0"/>
+            <a:endParaRPr lang="en-US" sz="1220" dirty="0"/>
           </a:p>
         </p:txBody>
       </p:sp>
@@ -15247,8 +15247,8 @@
         </p:nvSpPr>
         <p:spPr>
           <a:xfrm>
-            <a:off x="7818120" y="3182112"/>
-            <a:ext cx="3090672" cy="718718"/>
+            <a:off x="7726680" y="3182112"/>
+            <a:ext cx="3227832" cy="960120"/>
           </a:xfrm>
           <a:prstGeom prst="rect">
             <a:avLst/>
@@ -15266,7 +15266,7 @@
               <a:buNone/>
             </a:pPr>
             <a:r>
-              <a:rPr lang="en-US" sz="1220" dirty="0">
+              <a:rPr lang="en-US" sz="1140" dirty="0">
                 <a:solidFill>
                   <a:srgbClr val="17364A"/>
                 </a:solidFill>
@@ -15274,16 +15274,16 @@
                 <a:ea typeface="Aptos" pitchFamily="34" charset="-122"/>
                 <a:cs typeface="Aptos" pitchFamily="34" charset="-120"/>
               </a:rPr>
-              <a:t>Recognize misinformation, overstatement, missing uncertainty, and.</a:t>
-            </a:r>
-            <a:endParaRPr lang="en-US" sz="1220" dirty="0"/>
-          </a:p>
-          <a:p>
-            <a:pPr indent="0" marL="0">
-              <a:buNone/>
-            </a:pPr>
-            <a:r>
-              <a:rPr lang="en-US" sz="1220" dirty="0">
+              <a:t>Recognize misinformation, overstatement, missing.</a:t>
+            </a:r>
+            <a:endParaRPr lang="en-US" sz="1140" dirty="0"/>
+          </a:p>
+          <a:p>
+            <a:pPr indent="0" marL="0">
+              <a:buNone/>
+            </a:pPr>
+            <a:r>
+              <a:rPr lang="en-US" sz="1140" dirty="0">
                 <a:solidFill>
                   <a:srgbClr val="17364A"/>
                 </a:solidFill>
@@ -15291,9 +15291,9 @@
                 <a:ea typeface="Aptos" pitchFamily="34" charset="-122"/>
                 <a:cs typeface="Aptos" pitchFamily="34" charset="-120"/>
               </a:rPr>
-              <a:t>Produce an AI-assisted communications review checklist.</a:t>
-            </a:r>
-            <a:endParaRPr lang="en-US" sz="1220" dirty="0"/>
+              <a:t>Produce an AI-assisted communications review.</a:t>
+            </a:r>
+            <a:endParaRPr lang="en-US" sz="1140" dirty="0"/>
           </a:p>
         </p:txBody>
       </p:sp>
@@ -15305,12 +15305,12 @@
         </p:nvSpPr>
         <p:spPr>
           <a:xfrm>
-            <a:off x="7635240" y="4184294"/>
-            <a:ext cx="3474720" cy="1466698"/>
+            <a:off x="7543800" y="4389120"/>
+            <a:ext cx="3611880" cy="1261872"/>
           </a:xfrm>
           <a:prstGeom prst="roundRect">
             <a:avLst>
-              <a:gd name="adj" fmla="val 7481"/>
+              <a:gd name="adj" fmla="val 8696"/>
             </a:avLst>
           </a:prstGeom>
           <a:solidFill>
@@ -15332,8 +15332,8 @@
         </p:nvSpPr>
         <p:spPr>
           <a:xfrm>
-            <a:off x="7799832" y="4330598"/>
-            <a:ext cx="3145536" cy="256032"/>
+            <a:off x="7708392" y="4517136"/>
+            <a:ext cx="3282696" cy="228600"/>
           </a:xfrm>
           <a:prstGeom prst="rect">
             <a:avLst/>
@@ -15349,7 +15349,7 @@
               <a:buNone/>
             </a:pPr>
             <a:r>
-              <a:rPr lang="en-US" sz="1300" b="1" dirty="0">
+              <a:rPr lang="en-US" sz="1220" b="1" dirty="0">
                 <a:solidFill>
                   <a:srgbClr val="0068B7"/>
                 </a:solidFill>
@@ -15359,7 +15359,7 @@
               </a:rPr>
               <a:t>Engagement move</a:t>
             </a:r>
-            <a:endParaRPr lang="en-US" sz="1300" dirty="0"/>
+            <a:endParaRPr lang="en-US" sz="1220" dirty="0"/>
           </a:p>
         </p:txBody>
       </p:sp>
@@ -15371,8 +15371,8 @@
         </p:nvSpPr>
         <p:spPr>
           <a:xfrm>
-            <a:off x="7799832" y="4659782"/>
-            <a:ext cx="3145536" cy="899770"/>
+            <a:off x="7708392" y="4828032"/>
+            <a:ext cx="3282696" cy="749808"/>
           </a:xfrm>
           <a:prstGeom prst="rect">
             <a:avLst/>
@@ -15390,7 +15390,7 @@
               <a:buNone/>
             </a:pPr>
             <a:r>
-              <a:rPr lang="en-US" sz="1320" dirty="0">
+              <a:rPr lang="en-US" sz="1220" dirty="0">
                 <a:solidFill>
                   <a:srgbClr val="17364A"/>
                 </a:solidFill>
@@ -15398,9 +15398,9 @@
                 <a:ea typeface="Aptos" pitchFamily="34" charset="-122"/>
                 <a:cs typeface="Aptos" pitchFamily="34" charset="-120"/>
               </a:rPr>
-              <a:t>Use the assignment to test whether you can explain the concept, apply it to a realistic public health situation, and identify what would need review before the work moves forward.</a:t>
-            </a:r>
-            <a:endParaRPr lang="en-US" sz="1320" dirty="0"/>
+              <a:t>Use the assignment to test whether you can explain the concept, apply it to a.</a:t>
+            </a:r>
+            <a:endParaRPr lang="en-US" sz="1220" dirty="0"/>
           </a:p>
         </p:txBody>
       </p:sp>
@@ -15691,8 +15691,8 @@
         </p:nvSpPr>
         <p:spPr>
           <a:xfrm>
-            <a:off x="868680" y="1508760"/>
-            <a:ext cx="6309360" cy="4160520"/>
+            <a:off x="822960" y="1463040"/>
+            <a:ext cx="6565392" cy="4343400"/>
           </a:xfrm>
           <a:prstGeom prst="rect">
             <a:avLst/>
@@ -15710,7 +15710,7 @@
               <a:buNone/>
             </a:pPr>
             <a:r>
-              <a:rPr lang="en-US" sz="2100" dirty="0">
+              <a:rPr lang="en-US" sz="1920" dirty="0">
                 <a:solidFill>
                   <a:srgbClr val="003A63"/>
                 </a:solidFill>
@@ -15718,16 +15718,16 @@
                 <a:ea typeface="Aptos" pitchFamily="34" charset="-122"/>
                 <a:cs typeface="Aptos" pitchFamily="34" charset="-120"/>
               </a:rPr>
-              <a:t>• Generative AI can support public health communications by helping staff draft, revise,.</a:t>
-            </a:r>
-            <a:endParaRPr lang="en-US" sz="2100" dirty="0"/>
-          </a:p>
-          <a:p>
-            <a:pPr indent="0" marL="0">
-              <a:buNone/>
-            </a:pPr>
-            <a:r>
-              <a:rPr lang="en-US" sz="2100" dirty="0">
+              <a:t>• Generative AI can support public health communications by helping staff.</a:t>
+            </a:r>
+            <a:endParaRPr lang="en-US" sz="1920" dirty="0"/>
+          </a:p>
+          <a:p>
+            <a:pPr indent="0" marL="0">
+              <a:buNone/>
+            </a:pPr>
+            <a:r>
+              <a:rPr lang="en-US" sz="1920" dirty="0">
                 <a:solidFill>
                   <a:srgbClr val="003A63"/>
                 </a:solidFill>
@@ -15735,16 +15735,16 @@
                 <a:ea typeface="Aptos" pitchFamily="34" charset="-122"/>
                 <a:cs typeface="Aptos" pitchFamily="34" charset="-120"/>
               </a:rPr>
-              <a:t>• However, public health communication carries high trust, equity, accessibility, and accuracy.</a:t>
-            </a:r>
-            <a:endParaRPr lang="en-US" sz="2100" dirty="0"/>
-          </a:p>
-          <a:p>
-            <a:pPr indent="0" marL="0">
-              <a:buNone/>
-            </a:pPr>
-            <a:r>
-              <a:rPr lang="en-US" sz="2100" dirty="0">
+              <a:t>• However, public health communication carries high trust, equity,.</a:t>
+            </a:r>
+            <a:endParaRPr lang="en-US" sz="1920" dirty="0"/>
+          </a:p>
+          <a:p>
+            <a:pPr indent="0" marL="0">
+              <a:buNone/>
+            </a:pPr>
+            <a:r>
+              <a:rPr lang="en-US" sz="1920" dirty="0">
                 <a:solidFill>
                   <a:srgbClr val="003A63"/>
                 </a:solidFill>
@@ -15752,9 +15752,9 @@
                 <a:ea typeface="Aptos" pitchFamily="34" charset="-122"/>
                 <a:cs typeface="Aptos" pitchFamily="34" charset="-120"/>
               </a:rPr>
-              <a:t>• AI-generated text can sound clear and authoritative while misstating evidence, omitting.</a:t>
-            </a:r>
-            <a:endParaRPr lang="en-US" sz="2100" dirty="0"/>
+              <a:t>• AI-generated text can sound clear and authoritative while misstating.</a:t>
+            </a:r>
+            <a:endParaRPr lang="en-US" sz="1920" dirty="0"/>
           </a:p>
         </p:txBody>
       </p:sp>
@@ -15766,12 +15766,12 @@
         </p:nvSpPr>
         <p:spPr>
           <a:xfrm>
-            <a:off x="7635240" y="1325880"/>
-            <a:ext cx="3474720" cy="1255471"/>
+            <a:off x="7543800" y="1325880"/>
+            <a:ext cx="3611880" cy="1261872"/>
           </a:xfrm>
           <a:prstGeom prst="roundRect">
             <a:avLst>
-              <a:gd name="adj" fmla="val 8740"/>
+              <a:gd name="adj" fmla="val 8696"/>
             </a:avLst>
           </a:prstGeom>
           <a:solidFill>
@@ -15793,8 +15793,8 @@
         </p:nvSpPr>
         <p:spPr>
           <a:xfrm>
-            <a:off x="7799832" y="1472184"/>
-            <a:ext cx="3145536" cy="256032"/>
+            <a:off x="7708392" y="1453896"/>
+            <a:ext cx="3282696" cy="228600"/>
           </a:xfrm>
           <a:prstGeom prst="rect">
             <a:avLst/>
@@ -15810,7 +15810,7 @@
               <a:buNone/>
             </a:pPr>
             <a:r>
-              <a:rPr lang="en-US" sz="1300" b="1" dirty="0">
+              <a:rPr lang="en-US" sz="1220" b="1" dirty="0">
                 <a:solidFill>
                   <a:srgbClr val="0068B7"/>
                 </a:solidFill>
@@ -15820,7 +15820,7 @@
               </a:rPr>
               <a:t>Public health lens</a:t>
             </a:r>
-            <a:endParaRPr lang="en-US" sz="1300" dirty="0"/>
+            <a:endParaRPr lang="en-US" sz="1220" dirty="0"/>
           </a:p>
         </p:txBody>
       </p:sp>
@@ -15832,8 +15832,8 @@
         </p:nvSpPr>
         <p:spPr>
           <a:xfrm>
-            <a:off x="7799832" y="1801368"/>
-            <a:ext cx="3145536" cy="688543"/>
+            <a:off x="7708392" y="1764792"/>
+            <a:ext cx="3282696" cy="749808"/>
           </a:xfrm>
           <a:prstGeom prst="rect">
             <a:avLst/>
@@ -15851,7 +15851,7 @@
               <a:buNone/>
             </a:pPr>
             <a:r>
-              <a:rPr lang="en-US" sz="1320" dirty="0">
+              <a:rPr lang="en-US" sz="1220" dirty="0">
                 <a:solidFill>
                   <a:srgbClr val="17364A"/>
                 </a:solidFill>
@@ -15859,9 +15859,9 @@
                 <a:ea typeface="Aptos" pitchFamily="34" charset="-122"/>
                 <a:cs typeface="Aptos" pitchFamily="34" charset="-120"/>
               </a:rPr>
-              <a:t>Generative AI can support public health communications by helping staff draft, revise, simplify,.</a:t>
-            </a:r>
-            <a:endParaRPr lang="en-US" sz="1320" dirty="0"/>
+              <a:t>Generative AI can support public health communications by helping staff draft,.</a:t>
+            </a:r>
+            <a:endParaRPr lang="en-US" sz="1220" dirty="0"/>
           </a:p>
         </p:txBody>
       </p:sp>
@@ -15873,12 +15873,12 @@
         </p:nvSpPr>
         <p:spPr>
           <a:xfrm>
-            <a:off x="7635240" y="2718511"/>
-            <a:ext cx="3474720" cy="1328623"/>
+            <a:off x="7543800" y="2724912"/>
+            <a:ext cx="3611880" cy="1527048"/>
           </a:xfrm>
           <a:prstGeom prst="roundRect">
             <a:avLst>
-              <a:gd name="adj" fmla="val 8259"/>
+              <a:gd name="adj" fmla="val 7186"/>
             </a:avLst>
           </a:prstGeom>
           <a:solidFill>
@@ -15900,24 +15900,26 @@
         </p:nvSpPr>
         <p:spPr>
           <a:xfrm>
-            <a:off x="7799832" y="2846527"/>
-            <a:ext cx="3145536" cy="237744"/>
-          </a:xfrm>
-          <a:prstGeom prst="rect">
-            <a:avLst/>
-          </a:prstGeom>
-          <a:noFill/>
-          <a:ln/>
-        </p:spPr>
-        <p:txBody>
-          <a:bodyPr wrap="square" lIns="0" tIns="0" rIns="0" bIns="0" rtlCol="0" anchor="ctr"/>
-          <a:lstStyle/>
-          <a:p>
-            <a:pPr indent="0" marL="0">
-              <a:buNone/>
-            </a:pPr>
-            <a:r>
-              <a:rPr lang="en-US" sz="1250" b="1" dirty="0">
+            <a:off x="7708392" y="2852928"/>
+            <a:ext cx="3282696" cy="219456"/>
+          </a:xfrm>
+          <a:prstGeom prst="rect">
+            <a:avLst/>
+          </a:prstGeom>
+          <a:noFill/>
+          <a:ln/>
+        </p:spPr>
+        <p:txBody>
+          <a:bodyPr wrap="square" lIns="0" tIns="0" rIns="0" bIns="0" rtlCol="0" anchor="ctr">
+            <a:normAutofit/>
+          </a:bodyPr>
+          <a:lstStyle/>
+          <a:p>
+            <a:pPr indent="0" marL="0">
+              <a:buNone/>
+            </a:pPr>
+            <a:r>
+              <a:rPr lang="en-US" sz="1160" b="1" dirty="0">
                 <a:solidFill>
                   <a:srgbClr val="0068B7"/>
                 </a:solidFill>
@@ -15927,7 +15929,7 @@
               </a:rPr>
               <a:t>Trust cycle</a:t>
             </a:r>
-            <a:endParaRPr lang="en-US" sz="1250" dirty="0"/>
+            <a:endParaRPr lang="en-US" sz="1160" dirty="0"/>
           </a:p>
         </p:txBody>
       </p:sp>
@@ -15939,7 +15941,7 @@
         </p:nvSpPr>
         <p:spPr>
           <a:xfrm>
-            <a:off x="8763000" y="3399739"/>
+            <a:off x="8717280" y="3406140"/>
             <a:ext cx="164592" cy="0"/>
           </a:xfrm>
           <a:prstGeom prst="line">
@@ -15962,8 +15964,8 @@
         </p:nvSpPr>
         <p:spPr>
           <a:xfrm>
-            <a:off x="7872984" y="3248863"/>
-            <a:ext cx="890016" cy="301752"/>
+            <a:off x="7781544" y="3255264"/>
+            <a:ext cx="935736" cy="301752"/>
           </a:xfrm>
           <a:prstGeom prst="roundRect">
             <a:avLst>
@@ -15989,8 +15991,8 @@
         </p:nvSpPr>
         <p:spPr>
           <a:xfrm>
-            <a:off x="7909560" y="3322015"/>
-            <a:ext cx="816864" cy="146304"/>
+            <a:off x="7818120" y="3328416"/>
+            <a:ext cx="862584" cy="146304"/>
           </a:xfrm>
           <a:prstGeom prst="rect">
             <a:avLst/>
@@ -16030,7 +16032,7 @@
         </p:nvSpPr>
         <p:spPr>
           <a:xfrm>
-            <a:off x="9817608" y="3399739"/>
+            <a:off x="9817608" y="3406140"/>
             <a:ext cx="164592" cy="0"/>
           </a:xfrm>
           <a:prstGeom prst="line">
@@ -16053,8 +16055,8 @@
         </p:nvSpPr>
         <p:spPr>
           <a:xfrm>
-            <a:off x="8927592" y="3248863"/>
-            <a:ext cx="890016" cy="301752"/>
+            <a:off x="8881872" y="3255264"/>
+            <a:ext cx="935736" cy="301752"/>
           </a:xfrm>
           <a:prstGeom prst="roundRect">
             <a:avLst>
@@ -16080,8 +16082,8 @@
         </p:nvSpPr>
         <p:spPr>
           <a:xfrm>
-            <a:off x="8964168" y="3322015"/>
-            <a:ext cx="816864" cy="146304"/>
+            <a:off x="8918448" y="3328416"/>
+            <a:ext cx="862584" cy="146304"/>
           </a:xfrm>
           <a:prstGeom prst="rect">
             <a:avLst/>
@@ -16121,8 +16123,8 @@
         </p:nvSpPr>
         <p:spPr>
           <a:xfrm>
-            <a:off x="9982200" y="3248863"/>
-            <a:ext cx="890016" cy="301752"/>
+            <a:off x="9982200" y="3255264"/>
+            <a:ext cx="935736" cy="301752"/>
           </a:xfrm>
           <a:prstGeom prst="roundRect">
             <a:avLst>
@@ -16148,8 +16150,8 @@
         </p:nvSpPr>
         <p:spPr>
           <a:xfrm>
-            <a:off x="10018776" y="3322015"/>
-            <a:ext cx="816864" cy="146304"/>
+            <a:off x="10018776" y="3328416"/>
+            <a:ext cx="862584" cy="146304"/>
           </a:xfrm>
           <a:prstGeom prst="rect">
             <a:avLst/>
@@ -16189,8 +16191,8 @@
         </p:nvSpPr>
         <p:spPr>
           <a:xfrm>
-            <a:off x="7854696" y="3742639"/>
-            <a:ext cx="3035808" cy="158191"/>
+            <a:off x="7763256" y="3749040"/>
+            <a:ext cx="3172968" cy="356616"/>
           </a:xfrm>
           <a:prstGeom prst="rect">
             <a:avLst/>
@@ -16208,7 +16210,7 @@
               <a:buNone/>
             </a:pPr>
             <a:r>
-              <a:rPr lang="en-US" sz="1120" dirty="0">
+              <a:rPr lang="en-US" sz="1040" dirty="0">
                 <a:solidFill>
                   <a:srgbClr val="17364A"/>
                 </a:solidFill>
@@ -16216,9 +16218,9 @@
                 <a:ea typeface="Aptos" pitchFamily="34" charset="-122"/>
                 <a:cs typeface="Aptos" pitchFamily="34" charset="-120"/>
               </a:rPr>
-              <a:t>Communication and engagement are stronger when feedback changes the work and the department reports what.</a:t>
-            </a:r>
-            <a:endParaRPr lang="en-US" sz="1120" dirty="0"/>
+              <a:t>Communication and engagement are stronger when feedback changes the.</a:t>
+            </a:r>
+            <a:endParaRPr lang="en-US" sz="1040" dirty="0"/>
           </a:p>
         </p:txBody>
       </p:sp>
@@ -16230,12 +16232,12 @@
         </p:nvSpPr>
         <p:spPr>
           <a:xfrm>
-            <a:off x="7635240" y="4184294"/>
-            <a:ext cx="3474720" cy="1466698"/>
+            <a:off x="7543800" y="4389120"/>
+            <a:ext cx="3611880" cy="1261872"/>
           </a:xfrm>
           <a:prstGeom prst="roundRect">
             <a:avLst>
-              <a:gd name="adj" fmla="val 7481"/>
+              <a:gd name="adj" fmla="val 8696"/>
             </a:avLst>
           </a:prstGeom>
           <a:solidFill>
@@ -16257,8 +16259,8 @@
         </p:nvSpPr>
         <p:spPr>
           <a:xfrm>
-            <a:off x="7799832" y="4330598"/>
-            <a:ext cx="3145536" cy="256032"/>
+            <a:off x="7708392" y="4517136"/>
+            <a:ext cx="3282696" cy="228600"/>
           </a:xfrm>
           <a:prstGeom prst="rect">
             <a:avLst/>
@@ -16274,7 +16276,7 @@
               <a:buNone/>
             </a:pPr>
             <a:r>
-              <a:rPr lang="en-US" sz="1300" b="1" dirty="0">
+              <a:rPr lang="en-US" sz="1220" b="1" dirty="0">
                 <a:solidFill>
                   <a:srgbClr val="0068B7"/>
                 </a:solidFill>
@@ -16284,7 +16286,7 @@
               </a:rPr>
               <a:t>Engagement move</a:t>
             </a:r>
-            <a:endParaRPr lang="en-US" sz="1300" dirty="0"/>
+            <a:endParaRPr lang="en-US" sz="1220" dirty="0"/>
           </a:p>
         </p:txBody>
       </p:sp>
@@ -16296,8 +16298,8 @@
         </p:nvSpPr>
         <p:spPr>
           <a:xfrm>
-            <a:off x="7799832" y="4659782"/>
-            <a:ext cx="3145536" cy="899770"/>
+            <a:off x="7708392" y="4828032"/>
+            <a:ext cx="3282696" cy="749808"/>
           </a:xfrm>
           <a:prstGeom prst="rect">
             <a:avLst/>
@@ -16315,7 +16317,7 @@
               <a:buNone/>
             </a:pPr>
             <a:r>
-              <a:rPr lang="en-US" sz="1320" dirty="0">
+              <a:rPr lang="en-US" sz="1220" dirty="0">
                 <a:solidFill>
                   <a:srgbClr val="17364A"/>
                 </a:solidFill>
@@ -16323,9 +16325,9 @@
                 <a:ea typeface="Aptos" pitchFamily="34" charset="-122"/>
                 <a:cs typeface="Aptos" pitchFamily="34" charset="-120"/>
               </a:rPr>
-              <a:t>Use the concept to plan transparent communication, gather stakeholder input, protect trust, and make sure affected communities are considered early.</a:t>
-            </a:r>
-            <a:endParaRPr lang="en-US" sz="1320" dirty="0"/>
+              <a:t>Use the concept to plan transparent communication, gather stakeholder input,.</a:t>
+            </a:r>
+            <a:endParaRPr lang="en-US" sz="1220" dirty="0"/>
           </a:p>
         </p:txBody>
       </p:sp>
@@ -16616,8 +16618,8 @@
         </p:nvSpPr>
         <p:spPr>
           <a:xfrm>
-            <a:off x="868680" y="1508760"/>
-            <a:ext cx="6309360" cy="4160520"/>
+            <a:off x="822960" y="1463040"/>
+            <a:ext cx="6565392" cy="4343400"/>
           </a:xfrm>
           <a:prstGeom prst="rect">
             <a:avLst/>
@@ -16635,7 +16637,7 @@
               <a:buNone/>
             </a:pPr>
             <a:r>
-              <a:rPr lang="en-US" sz="2100" dirty="0">
+              <a:rPr lang="en-US" sz="1920" dirty="0">
                 <a:solidFill>
                   <a:srgbClr val="003A63"/>
                 </a:solidFill>
@@ -16645,14 +16647,14 @@
               </a:rPr>
               <a:t>• This national-level module is intended for training and planning purposes.</a:t>
             </a:r>
-            <a:endParaRPr lang="en-US" sz="2100" dirty="0"/>
-          </a:p>
-          <a:p>
-            <a:pPr indent="0" marL="0">
-              <a:buNone/>
-            </a:pPr>
-            <a:r>
-              <a:rPr lang="en-US" sz="2100" dirty="0">
+            <a:endParaRPr lang="en-US" sz="1920" dirty="0"/>
+          </a:p>
+          <a:p>
+            <a:pPr indent="0" marL="0">
+              <a:buNone/>
+            </a:pPr>
+            <a:r>
+              <a:rPr lang="en-US" sz="1920" dirty="0">
                 <a:solidFill>
                   <a:srgbClr val="003A63"/>
                 </a:solidFill>
@@ -16660,16 +16662,16 @@
                 <a:ea typeface="Aptos" pitchFamily="34" charset="-122"/>
                 <a:cs typeface="Aptos" pitchFamily="34" charset="-120"/>
               </a:rPr>
-              <a:t>• It does not replace legal, privacy, procurement, civil rights, records, or agency policy review.</a:t>
-            </a:r>
-            <a:endParaRPr lang="en-US" sz="2100" dirty="0"/>
-          </a:p>
-          <a:p>
-            <a:pPr indent="0" marL="0">
-              <a:buNone/>
-            </a:pPr>
-            <a:r>
-              <a:rPr lang="en-US" sz="2100" dirty="0">
+              <a:t>• It does not replace legal, privacy, procurement, civil rights, records, or.</a:t>
+            </a:r>
+            <a:endParaRPr lang="en-US" sz="1920" dirty="0"/>
+          </a:p>
+          <a:p>
+            <a:pPr indent="0" marL="0">
+              <a:buNone/>
+            </a:pPr>
+            <a:r>
+              <a:rPr lang="en-US" sz="1920" dirty="0">
                 <a:solidFill>
                   <a:srgbClr val="003A63"/>
                 </a:solidFill>
@@ -16677,9 +16679,9 @@
                 <a:ea typeface="Aptos" pitchFamily="34" charset="-122"/>
                 <a:cs typeface="Aptos" pitchFamily="34" charset="-120"/>
               </a:rPr>
-              <a:t>• Learners should confirm applicable requirements in their own jurisdiction and organization.</a:t>
-            </a:r>
-            <a:endParaRPr lang="en-US" sz="2100" dirty="0"/>
+              <a:t>• Learners should confirm applicable requirements in their own jurisdiction.</a:t>
+            </a:r>
+            <a:endParaRPr lang="en-US" sz="1920" dirty="0"/>
           </a:p>
         </p:txBody>
       </p:sp>
@@ -16691,12 +16693,12 @@
         </p:nvSpPr>
         <p:spPr>
           <a:xfrm>
-            <a:off x="7635240" y="1325880"/>
-            <a:ext cx="3474720" cy="1207008"/>
+            <a:off x="7543800" y="1325880"/>
+            <a:ext cx="3611880" cy="1261872"/>
           </a:xfrm>
           <a:prstGeom prst="roundRect">
             <a:avLst>
-              <a:gd name="adj" fmla="val 9091"/>
+              <a:gd name="adj" fmla="val 8696"/>
             </a:avLst>
           </a:prstGeom>
           <a:solidFill>
@@ -16718,8 +16720,8 @@
         </p:nvSpPr>
         <p:spPr>
           <a:xfrm>
-            <a:off x="7799832" y="1472184"/>
-            <a:ext cx="3145536" cy="256032"/>
+            <a:off x="7708392" y="1453896"/>
+            <a:ext cx="3282696" cy="228600"/>
           </a:xfrm>
           <a:prstGeom prst="rect">
             <a:avLst/>
@@ -16735,7 +16737,7 @@
               <a:buNone/>
             </a:pPr>
             <a:r>
-              <a:rPr lang="en-US" sz="1300" b="1" dirty="0">
+              <a:rPr lang="en-US" sz="1220" b="1" dirty="0">
                 <a:solidFill>
                   <a:srgbClr val="0068B7"/>
                 </a:solidFill>
@@ -16745,7 +16747,7 @@
               </a:rPr>
               <a:t>Governance lens</a:t>
             </a:r>
-            <a:endParaRPr lang="en-US" sz="1300" dirty="0"/>
+            <a:endParaRPr lang="en-US" sz="1220" dirty="0"/>
           </a:p>
         </p:txBody>
       </p:sp>
@@ -16757,8 +16759,8 @@
         </p:nvSpPr>
         <p:spPr>
           <a:xfrm>
-            <a:off x="7799832" y="1801368"/>
-            <a:ext cx="3145536" cy="640080"/>
+            <a:off x="7708392" y="1764792"/>
+            <a:ext cx="3282696" cy="749808"/>
           </a:xfrm>
           <a:prstGeom prst="rect">
             <a:avLst/>
@@ -16776,7 +16778,7 @@
               <a:buNone/>
             </a:pPr>
             <a:r>
-              <a:rPr lang="en-US" sz="1320" dirty="0">
+              <a:rPr lang="en-US" sz="1220" dirty="0">
                 <a:solidFill>
                   <a:srgbClr val="17364A"/>
                 </a:solidFill>
@@ -16786,7 +16788,7 @@
               </a:rPr>
               <a:t>This national-level module is intended for training and planning purposes.</a:t>
             </a:r>
-            <a:endParaRPr lang="en-US" sz="1320" dirty="0"/>
+            <a:endParaRPr lang="en-US" sz="1220" dirty="0"/>
           </a:p>
         </p:txBody>
       </p:sp>
@@ -16798,12 +16800,12 @@
         </p:nvSpPr>
         <p:spPr>
           <a:xfrm>
-            <a:off x="7635240" y="2670048"/>
-            <a:ext cx="3474720" cy="1377086"/>
+            <a:off x="7543800" y="2724912"/>
+            <a:ext cx="3611880" cy="1527048"/>
           </a:xfrm>
           <a:prstGeom prst="roundRect">
             <a:avLst>
-              <a:gd name="adj" fmla="val 7968"/>
+              <a:gd name="adj" fmla="val 7186"/>
             </a:avLst>
           </a:prstGeom>
           <a:solidFill>
@@ -16825,24 +16827,26 @@
         </p:nvSpPr>
         <p:spPr>
           <a:xfrm>
-            <a:off x="7799832" y="2798064"/>
-            <a:ext cx="3145536" cy="237744"/>
-          </a:xfrm>
-          <a:prstGeom prst="rect">
-            <a:avLst/>
-          </a:prstGeom>
-          <a:noFill/>
-          <a:ln/>
-        </p:spPr>
-        <p:txBody>
-          <a:bodyPr wrap="square" lIns="0" tIns="0" rIns="0" bIns="0" rtlCol="0" anchor="ctr"/>
-          <a:lstStyle/>
-          <a:p>
-            <a:pPr indent="0" marL="0">
-              <a:buNone/>
-            </a:pPr>
-            <a:r>
-              <a:rPr lang="en-US" sz="1250" b="1" dirty="0">
+            <a:off x="7708392" y="2852928"/>
+            <a:ext cx="3282696" cy="219456"/>
+          </a:xfrm>
+          <a:prstGeom prst="rect">
+            <a:avLst/>
+          </a:prstGeom>
+          <a:noFill/>
+          <a:ln/>
+        </p:spPr>
+        <p:txBody>
+          <a:bodyPr wrap="square" lIns="0" tIns="0" rIns="0" bIns="0" rtlCol="0" anchor="ctr">
+            <a:normAutofit/>
+          </a:bodyPr>
+          <a:lstStyle/>
+          <a:p>
+            <a:pPr indent="0" marL="0">
+              <a:buNone/>
+            </a:pPr>
+            <a:r>
+              <a:rPr lang="en-US" sz="1160" b="1" dirty="0">
                 <a:solidFill>
                   <a:srgbClr val="0068B7"/>
                 </a:solidFill>
@@ -16852,7 +16856,7 @@
               </a:rPr>
               <a:t>Governance pathway</a:t>
             </a:r>
-            <a:endParaRPr lang="en-US" sz="1250" dirty="0"/>
+            <a:endParaRPr lang="en-US" sz="1160" dirty="0"/>
           </a:p>
         </p:txBody>
       </p:sp>
@@ -16864,7 +16868,7 @@
         </p:nvSpPr>
         <p:spPr>
           <a:xfrm>
-            <a:off x="8763000" y="3351276"/>
+            <a:off x="8717280" y="3406140"/>
             <a:ext cx="164592" cy="0"/>
           </a:xfrm>
           <a:prstGeom prst="line">
@@ -16887,8 +16891,8 @@
         </p:nvSpPr>
         <p:spPr>
           <a:xfrm>
-            <a:off x="7872984" y="3200400"/>
-            <a:ext cx="890016" cy="301752"/>
+            <a:off x="7781544" y="3255264"/>
+            <a:ext cx="935736" cy="301752"/>
           </a:xfrm>
           <a:prstGeom prst="roundRect">
             <a:avLst>
@@ -16914,8 +16918,8 @@
         </p:nvSpPr>
         <p:spPr>
           <a:xfrm>
-            <a:off x="7909560" y="3273552"/>
-            <a:ext cx="816864" cy="146304"/>
+            <a:off x="7818120" y="3328416"/>
+            <a:ext cx="862584" cy="146304"/>
           </a:xfrm>
           <a:prstGeom prst="rect">
             <a:avLst/>
@@ -16955,7 +16959,7 @@
         </p:nvSpPr>
         <p:spPr>
           <a:xfrm>
-            <a:off x="9817608" y="3351276"/>
+            <a:off x="9817608" y="3406140"/>
             <a:ext cx="164592" cy="0"/>
           </a:xfrm>
           <a:prstGeom prst="line">
@@ -16978,8 +16982,8 @@
         </p:nvSpPr>
         <p:spPr>
           <a:xfrm>
-            <a:off x="8927592" y="3200400"/>
-            <a:ext cx="890016" cy="301752"/>
+            <a:off x="8881872" y="3255264"/>
+            <a:ext cx="935736" cy="301752"/>
           </a:xfrm>
           <a:prstGeom prst="roundRect">
             <a:avLst>
@@ -17005,8 +17009,8 @@
         </p:nvSpPr>
         <p:spPr>
           <a:xfrm>
-            <a:off x="8964168" y="3273552"/>
-            <a:ext cx="816864" cy="146304"/>
+            <a:off x="8918448" y="3328416"/>
+            <a:ext cx="862584" cy="146304"/>
           </a:xfrm>
           <a:prstGeom prst="rect">
             <a:avLst/>
@@ -17046,8 +17050,8 @@
         </p:nvSpPr>
         <p:spPr>
           <a:xfrm>
-            <a:off x="9982200" y="3200400"/>
-            <a:ext cx="890016" cy="301752"/>
+            <a:off x="9982200" y="3255264"/>
+            <a:ext cx="935736" cy="301752"/>
           </a:xfrm>
           <a:prstGeom prst="roundRect">
             <a:avLst>
@@ -17073,8 +17077,8 @@
         </p:nvSpPr>
         <p:spPr>
           <a:xfrm>
-            <a:off x="10018776" y="3273552"/>
-            <a:ext cx="816864" cy="146304"/>
+            <a:off x="10018776" y="3328416"/>
+            <a:ext cx="862584" cy="146304"/>
           </a:xfrm>
           <a:prstGeom prst="rect">
             <a:avLst/>
@@ -17114,8 +17118,8 @@
         </p:nvSpPr>
         <p:spPr>
           <a:xfrm>
-            <a:off x="7854696" y="3694176"/>
-            <a:ext cx="3035808" cy="206654"/>
+            <a:off x="7763256" y="3749040"/>
+            <a:ext cx="3172968" cy="356616"/>
           </a:xfrm>
           <a:prstGeom prst="rect">
             <a:avLst/>
@@ -17133,7 +17137,7 @@
               <a:buNone/>
             </a:pPr>
             <a:r>
-              <a:rPr lang="en-US" sz="1120" dirty="0">
+              <a:rPr lang="en-US" sz="1040" dirty="0">
                 <a:solidFill>
                   <a:srgbClr val="17364A"/>
                 </a:solidFill>
@@ -17141,9 +17145,9 @@
                 <a:ea typeface="Aptos" pitchFamily="34" charset="-122"/>
                 <a:cs typeface="Aptos" pitchFamily="34" charset="-120"/>
               </a:rPr>
-              <a:t>A proposed AI use should move through documented review before it becomes an operational workflow.</a:t>
-            </a:r>
-            <a:endParaRPr lang="en-US" sz="1120" dirty="0"/>
+              <a:t>A proposed AI use should move through documented review before it.</a:t>
+            </a:r>
+            <a:endParaRPr lang="en-US" sz="1040" dirty="0"/>
           </a:p>
         </p:txBody>
       </p:sp>
@@ -17155,12 +17159,12 @@
         </p:nvSpPr>
         <p:spPr>
           <a:xfrm>
-            <a:off x="7635240" y="4184294"/>
-            <a:ext cx="3474720" cy="1466698"/>
+            <a:off x="7543800" y="4389120"/>
+            <a:ext cx="3611880" cy="1261872"/>
           </a:xfrm>
           <a:prstGeom prst="roundRect">
             <a:avLst>
-              <a:gd name="adj" fmla="val 7481"/>
+              <a:gd name="adj" fmla="val 8696"/>
             </a:avLst>
           </a:prstGeom>
           <a:solidFill>
@@ -17182,8 +17186,8 @@
         </p:nvSpPr>
         <p:spPr>
           <a:xfrm>
-            <a:off x="7799832" y="4330598"/>
-            <a:ext cx="3145536" cy="256032"/>
+            <a:off x="7708392" y="4517136"/>
+            <a:ext cx="3282696" cy="228600"/>
           </a:xfrm>
           <a:prstGeom prst="rect">
             <a:avLst/>
@@ -17199,7 +17203,7 @@
               <a:buNone/>
             </a:pPr>
             <a:r>
-              <a:rPr lang="en-US" sz="1300" b="1" dirty="0">
+              <a:rPr lang="en-US" sz="1220" b="1" dirty="0">
                 <a:solidFill>
                   <a:srgbClr val="0068B7"/>
                 </a:solidFill>
@@ -17209,7 +17213,7 @@
               </a:rPr>
               <a:t>What to document</a:t>
             </a:r>
-            <a:endParaRPr lang="en-US" sz="1300" dirty="0"/>
+            <a:endParaRPr lang="en-US" sz="1220" dirty="0"/>
           </a:p>
         </p:txBody>
       </p:sp>
@@ -17221,8 +17225,8 @@
         </p:nvSpPr>
         <p:spPr>
           <a:xfrm>
-            <a:off x="7799832" y="4659782"/>
-            <a:ext cx="3145536" cy="899770"/>
+            <a:off x="7708392" y="4828032"/>
+            <a:ext cx="3282696" cy="749808"/>
           </a:xfrm>
           <a:prstGeom prst="rect">
             <a:avLst/>
@@ -17240,7 +17244,7 @@
               <a:buNone/>
             </a:pPr>
             <a:r>
-              <a:rPr lang="en-US" sz="1320" dirty="0">
+              <a:rPr lang="en-US" sz="1220" dirty="0">
                 <a:solidFill>
                   <a:srgbClr val="17364A"/>
                 </a:solidFill>
@@ -17248,9 +17252,9 @@
                 <a:ea typeface="Aptos" pitchFamily="34" charset="-122"/>
                 <a:cs typeface="Aptos" pitchFamily="34" charset="-120"/>
               </a:rPr>
-              <a:t>Translate this concept into clear decision rights, review steps, documentation expectations, and escalation paths before an AI-supported workflow is approved.</a:t>
-            </a:r>
-            <a:endParaRPr lang="en-US" sz="1320" dirty="0"/>
+              <a:t>Translate this concept into clear decision rights, review steps, documentation.</a:t>
+            </a:r>
+            <a:endParaRPr lang="en-US" sz="1220" dirty="0"/>
           </a:p>
         </p:txBody>
       </p:sp>
@@ -17541,8 +17545,8 @@
         </p:nvSpPr>
         <p:spPr>
           <a:xfrm>
-            <a:off x="868680" y="1508760"/>
-            <a:ext cx="6309360" cy="4160520"/>
+            <a:off x="822960" y="1463040"/>
+            <a:ext cx="6565392" cy="4343400"/>
           </a:xfrm>
           <a:prstGeom prst="rect">
             <a:avLst/>
@@ -17560,7 +17564,7 @@
               <a:buNone/>
             </a:pPr>
             <a:r>
-              <a:rPr lang="en-US" sz="2100" dirty="0">
+              <a:rPr lang="en-US" sz="1920" dirty="0">
                 <a:solidFill>
                   <a:srgbClr val="003A63"/>
                 </a:solidFill>
@@ -17568,16 +17572,16 @@
                 <a:ea typeface="Aptos" pitchFamily="34" charset="-122"/>
                 <a:cs typeface="Aptos" pitchFamily="34" charset="-120"/>
               </a:rPr>
-              <a:t>• A health department uses AI to draft a heat safety message for older adults, outdoor workers,.</a:t>
-            </a:r>
-            <a:endParaRPr lang="en-US" sz="2100" dirty="0"/>
-          </a:p>
-          <a:p>
-            <a:pPr indent="0" marL="0">
-              <a:buNone/>
-            </a:pPr>
-            <a:r>
-              <a:rPr lang="en-US" sz="2100" dirty="0">
+              <a:t>• A health department uses AI to draft a heat safety message for older adults,.</a:t>
+            </a:r>
+            <a:endParaRPr lang="en-US" sz="1920" dirty="0"/>
+          </a:p>
+          <a:p>
+            <a:pPr indent="0" marL="0">
+              <a:buNone/>
+            </a:pPr>
+            <a:r>
+              <a:rPr lang="en-US" sz="1920" dirty="0">
                 <a:solidFill>
                   <a:srgbClr val="003A63"/>
                 </a:solidFill>
@@ -17585,9 +17589,9 @@
                 <a:ea typeface="Aptos" pitchFamily="34" charset="-122"/>
                 <a:cs typeface="Aptos" pitchFamily="34" charset="-120"/>
               </a:rPr>
-              <a:t>• Communications staff verify the recommendations against official guidance, rewrite the message.</a:t>
-            </a:r>
-            <a:endParaRPr lang="en-US" sz="2100" dirty="0"/>
+              <a:t>• Communications staff verify the recommendations against official guidance,.</a:t>
+            </a:r>
+            <a:endParaRPr lang="en-US" sz="1920" dirty="0"/>
           </a:p>
         </p:txBody>
       </p:sp>
@@ -17599,12 +17603,12 @@
         </p:nvSpPr>
         <p:spPr>
           <a:xfrm>
-            <a:off x="7635240" y="1325880"/>
-            <a:ext cx="3474720" cy="1255471"/>
+            <a:off x="7543800" y="1325880"/>
+            <a:ext cx="3611880" cy="1261872"/>
           </a:xfrm>
           <a:prstGeom prst="roundRect">
             <a:avLst>
-              <a:gd name="adj" fmla="val 8740"/>
+              <a:gd name="adj" fmla="val 8696"/>
             </a:avLst>
           </a:prstGeom>
           <a:solidFill>
@@ -17626,8 +17630,8 @@
         </p:nvSpPr>
         <p:spPr>
           <a:xfrm>
-            <a:off x="7799832" y="1472184"/>
-            <a:ext cx="3145536" cy="256032"/>
+            <a:off x="7708392" y="1453896"/>
+            <a:ext cx="3282696" cy="228600"/>
           </a:xfrm>
           <a:prstGeom prst="rect">
             <a:avLst/>
@@ -17643,7 +17647,7 @@
               <a:buNone/>
             </a:pPr>
             <a:r>
-              <a:rPr lang="en-US" sz="1300" b="1" dirty="0">
+              <a:rPr lang="en-US" sz="1220" b="1" dirty="0">
                 <a:solidFill>
                   <a:srgbClr val="0068B7"/>
                 </a:solidFill>
@@ -17653,7 +17657,7 @@
               </a:rPr>
               <a:t>Public health lens</a:t>
             </a:r>
-            <a:endParaRPr lang="en-US" sz="1300" dirty="0"/>
+            <a:endParaRPr lang="en-US" sz="1220" dirty="0"/>
           </a:p>
         </p:txBody>
       </p:sp>
@@ -17665,8 +17669,8 @@
         </p:nvSpPr>
         <p:spPr>
           <a:xfrm>
-            <a:off x="7799832" y="1801368"/>
-            <a:ext cx="3145536" cy="688543"/>
+            <a:off x="7708392" y="1764792"/>
+            <a:ext cx="3282696" cy="749808"/>
           </a:xfrm>
           <a:prstGeom prst="rect">
             <a:avLst/>
@@ -17684,7 +17688,7 @@
               <a:buNone/>
             </a:pPr>
             <a:r>
-              <a:rPr lang="en-US" sz="1320" dirty="0">
+              <a:rPr lang="en-US" sz="1220" dirty="0">
                 <a:solidFill>
                   <a:srgbClr val="17364A"/>
                 </a:solidFill>
@@ -17692,9 +17696,9 @@
                 <a:ea typeface="Aptos" pitchFamily="34" charset="-122"/>
                 <a:cs typeface="Aptos" pitchFamily="34" charset="-120"/>
               </a:rPr>
-              <a:t>A health department uses AI to draft a heat safety message for older adults, outdoor workers, and.</a:t>
-            </a:r>
-            <a:endParaRPr lang="en-US" sz="1320" dirty="0"/>
+              <a:t>A health department uses AI to draft a heat safety message for older adults,.</a:t>
+            </a:r>
+            <a:endParaRPr lang="en-US" sz="1220" dirty="0"/>
           </a:p>
         </p:txBody>
       </p:sp>
@@ -17706,12 +17710,12 @@
         </p:nvSpPr>
         <p:spPr>
           <a:xfrm>
-            <a:off x="7635240" y="2718511"/>
-            <a:ext cx="3474720" cy="1328623"/>
+            <a:off x="7543800" y="2724912"/>
+            <a:ext cx="3611880" cy="1527048"/>
           </a:xfrm>
           <a:prstGeom prst="roundRect">
             <a:avLst>
-              <a:gd name="adj" fmla="val 8259"/>
+              <a:gd name="adj" fmla="val 7186"/>
             </a:avLst>
           </a:prstGeom>
           <a:solidFill>
@@ -17733,8 +17737,8 @@
         </p:nvSpPr>
         <p:spPr>
           <a:xfrm>
-            <a:off x="7799832" y="2864815"/>
-            <a:ext cx="3145536" cy="256032"/>
+            <a:off x="7708392" y="2852928"/>
+            <a:ext cx="3282696" cy="228600"/>
           </a:xfrm>
           <a:prstGeom prst="rect">
             <a:avLst/>
@@ -17750,7 +17754,7 @@
               <a:buNone/>
             </a:pPr>
             <a:r>
-              <a:rPr lang="en-US" sz="1300" b="1" dirty="0">
+              <a:rPr lang="en-US" sz="1220" b="1" dirty="0">
                 <a:solidFill>
                   <a:srgbClr val="0068B7"/>
                 </a:solidFill>
@@ -17760,7 +17764,7 @@
               </a:rPr>
               <a:t>Concept checkpoints</a:t>
             </a:r>
-            <a:endParaRPr lang="en-US" sz="1300" dirty="0"/>
+            <a:endParaRPr lang="en-US" sz="1220" dirty="0"/>
           </a:p>
         </p:txBody>
       </p:sp>
@@ -17772,8 +17776,8 @@
         </p:nvSpPr>
         <p:spPr>
           <a:xfrm>
-            <a:off x="7818120" y="3230575"/>
-            <a:ext cx="3090672" cy="670255"/>
+            <a:off x="7726680" y="3182112"/>
+            <a:ext cx="3227832" cy="960120"/>
           </a:xfrm>
           <a:prstGeom prst="rect">
             <a:avLst/>
@@ -17791,7 +17795,7 @@
               <a:buNone/>
             </a:pPr>
             <a:r>
-              <a:rPr lang="en-US" sz="1220" dirty="0">
+              <a:rPr lang="en-US" sz="1140" dirty="0">
                 <a:solidFill>
                   <a:srgbClr val="17364A"/>
                 </a:solidFill>
@@ -17799,16 +17803,16 @@
                 <a:ea typeface="Aptos" pitchFamily="34" charset="-122"/>
                 <a:cs typeface="Aptos" pitchFamily="34" charset="-120"/>
               </a:rPr>
-              <a:t>A health department uses AI to draft a heat safety message for.</a:t>
-            </a:r>
-            <a:endParaRPr lang="en-US" sz="1220" dirty="0"/>
-          </a:p>
-          <a:p>
-            <a:pPr indent="0" marL="0">
-              <a:buNone/>
-            </a:pPr>
-            <a:r>
-              <a:rPr lang="en-US" sz="1220" dirty="0">
+              <a:t>A health department uses AI to draft a heat safety.</a:t>
+            </a:r>
+            <a:endParaRPr lang="en-US" sz="1140" dirty="0"/>
+          </a:p>
+          <a:p>
+            <a:pPr indent="0" marL="0">
+              <a:buNone/>
+            </a:pPr>
+            <a:r>
+              <a:rPr lang="en-US" sz="1140" dirty="0">
                 <a:solidFill>
                   <a:srgbClr val="17364A"/>
                 </a:solidFill>
@@ -17816,9 +17820,9 @@
                 <a:ea typeface="Aptos" pitchFamily="34" charset="-122"/>
                 <a:cs typeface="Aptos" pitchFamily="34" charset="-120"/>
               </a:rPr>
-              <a:t>Communications staff verify the recommendations against official.</a:t>
-            </a:r>
-            <a:endParaRPr lang="en-US" sz="1220" dirty="0"/>
+              <a:t>Communications staff verify the recommendations.</a:t>
+            </a:r>
+            <a:endParaRPr lang="en-US" sz="1140" dirty="0"/>
           </a:p>
         </p:txBody>
       </p:sp>
@@ -17830,12 +17834,12 @@
         </p:nvSpPr>
         <p:spPr>
           <a:xfrm>
-            <a:off x="7635240" y="4184294"/>
-            <a:ext cx="3474720" cy="1466698"/>
+            <a:off x="7543800" y="4389120"/>
+            <a:ext cx="3611880" cy="1261872"/>
           </a:xfrm>
           <a:prstGeom prst="roundRect">
             <a:avLst>
-              <a:gd name="adj" fmla="val 7481"/>
+              <a:gd name="adj" fmla="val 8696"/>
             </a:avLst>
           </a:prstGeom>
           <a:solidFill>
@@ -17857,8 +17861,8 @@
         </p:nvSpPr>
         <p:spPr>
           <a:xfrm>
-            <a:off x="7799832" y="4330598"/>
-            <a:ext cx="3145536" cy="256032"/>
+            <a:off x="7708392" y="4517136"/>
+            <a:ext cx="3282696" cy="228600"/>
           </a:xfrm>
           <a:prstGeom prst="rect">
             <a:avLst/>
@@ -17874,7 +17878,7 @@
               <a:buNone/>
             </a:pPr>
             <a:r>
-              <a:rPr lang="en-US" sz="1300" b="1" dirty="0">
+              <a:rPr lang="en-US" sz="1220" b="1" dirty="0">
                 <a:solidFill>
                   <a:srgbClr val="0068B7"/>
                 </a:solidFill>
@@ -17884,7 +17888,7 @@
               </a:rPr>
               <a:t>Engagement move</a:t>
             </a:r>
-            <a:endParaRPr lang="en-US" sz="1300" dirty="0"/>
+            <a:endParaRPr lang="en-US" sz="1220" dirty="0"/>
           </a:p>
         </p:txBody>
       </p:sp>
@@ -17896,8 +17900,8 @@
         </p:nvSpPr>
         <p:spPr>
           <a:xfrm>
-            <a:off x="7799832" y="4659782"/>
-            <a:ext cx="3145536" cy="899770"/>
+            <a:off x="7708392" y="4828032"/>
+            <a:ext cx="3282696" cy="749808"/>
           </a:xfrm>
           <a:prstGeom prst="rect">
             <a:avLst/>
@@ -17915,7 +17919,7 @@
               <a:buNone/>
             </a:pPr>
             <a:r>
-              <a:rPr lang="en-US" sz="1320" dirty="0">
+              <a:rPr lang="en-US" sz="1220" dirty="0">
                 <a:solidFill>
                   <a:srgbClr val="17364A"/>
                 </a:solidFill>
@@ -17923,9 +17927,9 @@
                 <a:ea typeface="Aptos" pitchFamily="34" charset="-122"/>
                 <a:cs typeface="Aptos" pitchFamily="34" charset="-120"/>
               </a:rPr>
-              <a:t>Use the concept to plan transparent communication, gather stakeholder input, protect trust, and make sure affected communities are considered early.</a:t>
-            </a:r>
-            <a:endParaRPr lang="en-US" sz="1320" dirty="0"/>
+              <a:t>Use the concept to plan transparent communication, gather stakeholder input,.</a:t>
+            </a:r>
+            <a:endParaRPr lang="en-US" sz="1220" dirty="0"/>
           </a:p>
         </p:txBody>
       </p:sp>
@@ -18216,8 +18220,8 @@
         </p:nvSpPr>
         <p:spPr>
           <a:xfrm>
-            <a:off x="868680" y="1508760"/>
-            <a:ext cx="6309360" cy="4160520"/>
+            <a:off x="822960" y="1463040"/>
+            <a:ext cx="6565392" cy="4343400"/>
           </a:xfrm>
           <a:prstGeom prst="rect">
             <a:avLst/>
@@ -18235,7 +18239,7 @@
               <a:buNone/>
             </a:pPr>
             <a:r>
-              <a:rPr lang="en-US" sz="2100" dirty="0">
+              <a:rPr lang="en-US" sz="1920" dirty="0">
                 <a:solidFill>
                   <a:srgbClr val="003A63"/>
                 </a:solidFill>
@@ -18245,14 +18249,14 @@
               </a:rPr>
               <a:t>• AI can be useful early in the message development process.</a:t>
             </a:r>
-            <a:endParaRPr lang="en-US" sz="2100" dirty="0"/>
-          </a:p>
-          <a:p>
-            <a:pPr indent="0" marL="0">
-              <a:buNone/>
-            </a:pPr>
-            <a:r>
-              <a:rPr lang="en-US" sz="2100" dirty="0">
+            <a:endParaRPr lang="en-US" sz="1920" dirty="0"/>
+          </a:p>
+          <a:p>
+            <a:pPr indent="0" marL="0">
+              <a:buNone/>
+            </a:pPr>
+            <a:r>
+              <a:rPr lang="en-US" sz="1920" dirty="0">
                 <a:solidFill>
                   <a:srgbClr val="003A63"/>
                 </a:solidFill>
@@ -18260,16 +18264,16 @@
                 <a:ea typeface="Aptos" pitchFamily="34" charset="-122"/>
                 <a:cs typeface="Aptos" pitchFamily="34" charset="-120"/>
               </a:rPr>
-              <a:t>• It can generate first drafts, propose alternative tones, simplify technical language, identify.</a:t>
-            </a:r>
-            <a:endParaRPr lang="en-US" sz="2100" dirty="0"/>
-          </a:p>
-          <a:p>
-            <a:pPr indent="0" marL="0">
-              <a:buNone/>
-            </a:pPr>
-            <a:r>
-              <a:rPr lang="en-US" sz="2100" dirty="0">
+              <a:t>• It can generate first drafts, propose alternative tones, simplify technical.</a:t>
+            </a:r>
+            <a:endParaRPr lang="en-US" sz="1920" dirty="0"/>
+          </a:p>
+          <a:p>
+            <a:pPr indent="0" marL="0">
+              <a:buNone/>
+            </a:pPr>
+            <a:r>
+              <a:rPr lang="en-US" sz="1920" dirty="0">
                 <a:solidFill>
                   <a:srgbClr val="003A63"/>
                 </a:solidFill>
@@ -18277,9 +18281,9 @@
                 <a:ea typeface="Aptos" pitchFamily="34" charset="-122"/>
                 <a:cs typeface="Aptos" pitchFamily="34" charset="-120"/>
               </a:rPr>
-              <a:t>• These uses can save time, especially when communications staff support multiple programs.</a:t>
-            </a:r>
-            <a:endParaRPr lang="en-US" sz="2100" dirty="0"/>
+              <a:t>• These uses can save time, especially when communications staff support.</a:t>
+            </a:r>
+            <a:endParaRPr lang="en-US" sz="1920" dirty="0"/>
           </a:p>
         </p:txBody>
       </p:sp>
@@ -18291,12 +18295,12 @@
         </p:nvSpPr>
         <p:spPr>
           <a:xfrm>
-            <a:off x="7635240" y="1325880"/>
-            <a:ext cx="3474720" cy="1207008"/>
+            <a:off x="7543800" y="1325880"/>
+            <a:ext cx="3611880" cy="1261872"/>
           </a:xfrm>
           <a:prstGeom prst="roundRect">
             <a:avLst>
-              <a:gd name="adj" fmla="val 9091"/>
+              <a:gd name="adj" fmla="val 8696"/>
             </a:avLst>
           </a:prstGeom>
           <a:solidFill>
@@ -18318,8 +18322,8 @@
         </p:nvSpPr>
         <p:spPr>
           <a:xfrm>
-            <a:off x="7799832" y="1472184"/>
-            <a:ext cx="3145536" cy="256032"/>
+            <a:off x="7708392" y="1453896"/>
+            <a:ext cx="3282696" cy="228600"/>
           </a:xfrm>
           <a:prstGeom prst="rect">
             <a:avLst/>
@@ -18335,7 +18339,7 @@
               <a:buNone/>
             </a:pPr>
             <a:r>
-              <a:rPr lang="en-US" sz="1300" b="1" dirty="0">
+              <a:rPr lang="en-US" sz="1220" b="1" dirty="0">
                 <a:solidFill>
                   <a:srgbClr val="0068B7"/>
                 </a:solidFill>
@@ -18345,7 +18349,7 @@
               </a:rPr>
               <a:t>Public health lens</a:t>
             </a:r>
-            <a:endParaRPr lang="en-US" sz="1300" dirty="0"/>
+            <a:endParaRPr lang="en-US" sz="1220" dirty="0"/>
           </a:p>
         </p:txBody>
       </p:sp>
@@ -18357,8 +18361,8 @@
         </p:nvSpPr>
         <p:spPr>
           <a:xfrm>
-            <a:off x="7799832" y="1801368"/>
-            <a:ext cx="3145536" cy="640080"/>
+            <a:off x="7708392" y="1764792"/>
+            <a:ext cx="3282696" cy="749808"/>
           </a:xfrm>
           <a:prstGeom prst="rect">
             <a:avLst/>
@@ -18376,7 +18380,7 @@
               <a:buNone/>
             </a:pPr>
             <a:r>
-              <a:rPr lang="en-US" sz="1320" dirty="0">
+              <a:rPr lang="en-US" sz="1220" dirty="0">
                 <a:solidFill>
                   <a:srgbClr val="17364A"/>
                 </a:solidFill>
@@ -18386,7 +18390,7 @@
               </a:rPr>
               <a:t>AI can be useful early in the message development process.</a:t>
             </a:r>
-            <a:endParaRPr lang="en-US" sz="1320" dirty="0"/>
+            <a:endParaRPr lang="en-US" sz="1220" dirty="0"/>
           </a:p>
         </p:txBody>
       </p:sp>
@@ -18398,12 +18402,12 @@
         </p:nvSpPr>
         <p:spPr>
           <a:xfrm>
-            <a:off x="7635240" y="2670048"/>
-            <a:ext cx="3474720" cy="1377086"/>
+            <a:off x="7543800" y="2724912"/>
+            <a:ext cx="3611880" cy="1527048"/>
           </a:xfrm>
           <a:prstGeom prst="roundRect">
             <a:avLst>
-              <a:gd name="adj" fmla="val 7968"/>
+              <a:gd name="adj" fmla="val 7186"/>
             </a:avLst>
           </a:prstGeom>
           <a:solidFill>
@@ -18425,24 +18429,26 @@
         </p:nvSpPr>
         <p:spPr>
           <a:xfrm>
-            <a:off x="7799832" y="2798064"/>
-            <a:ext cx="3145536" cy="237744"/>
-          </a:xfrm>
-          <a:prstGeom prst="rect">
-            <a:avLst/>
-          </a:prstGeom>
-          <a:noFill/>
-          <a:ln/>
-        </p:spPr>
-        <p:txBody>
-          <a:bodyPr wrap="square" lIns="0" tIns="0" rIns="0" bIns="0" rtlCol="0" anchor="ctr"/>
-          <a:lstStyle/>
-          <a:p>
-            <a:pPr indent="0" marL="0">
-              <a:buNone/>
-            </a:pPr>
-            <a:r>
-              <a:rPr lang="en-US" sz="1250" b="1" dirty="0">
+            <a:off x="7708392" y="2852928"/>
+            <a:ext cx="3282696" cy="219456"/>
+          </a:xfrm>
+          <a:prstGeom prst="rect">
+            <a:avLst/>
+          </a:prstGeom>
+          <a:noFill/>
+          <a:ln/>
+        </p:spPr>
+        <p:txBody>
+          <a:bodyPr wrap="square" lIns="0" tIns="0" rIns="0" bIns="0" rtlCol="0" anchor="ctr">
+            <a:normAutofit/>
+          </a:bodyPr>
+          <a:lstStyle/>
+          <a:p>
+            <a:pPr indent="0" marL="0">
+              <a:buNone/>
+            </a:pPr>
+            <a:r>
+              <a:rPr lang="en-US" sz="1160" b="1" dirty="0">
                 <a:solidFill>
                   <a:srgbClr val="0068B7"/>
                 </a:solidFill>
@@ -18452,7 +18458,7 @@
               </a:rPr>
               <a:t>Trust cycle</a:t>
             </a:r>
-            <a:endParaRPr lang="en-US" sz="1250" dirty="0"/>
+            <a:endParaRPr lang="en-US" sz="1160" dirty="0"/>
           </a:p>
         </p:txBody>
       </p:sp>
@@ -18464,7 +18470,7 @@
         </p:nvSpPr>
         <p:spPr>
           <a:xfrm>
-            <a:off x="8763000" y="3351276"/>
+            <a:off x="8717280" y="3406140"/>
             <a:ext cx="164592" cy="0"/>
           </a:xfrm>
           <a:prstGeom prst="line">
@@ -18487,8 +18493,8 @@
         </p:nvSpPr>
         <p:spPr>
           <a:xfrm>
-            <a:off x="7872984" y="3200400"/>
-            <a:ext cx="890016" cy="301752"/>
+            <a:off x="7781544" y="3255264"/>
+            <a:ext cx="935736" cy="301752"/>
           </a:xfrm>
           <a:prstGeom prst="roundRect">
             <a:avLst>
@@ -18514,8 +18520,8 @@
         </p:nvSpPr>
         <p:spPr>
           <a:xfrm>
-            <a:off x="7909560" y="3273552"/>
-            <a:ext cx="816864" cy="146304"/>
+            <a:off x="7818120" y="3328416"/>
+            <a:ext cx="862584" cy="146304"/>
           </a:xfrm>
           <a:prstGeom prst="rect">
             <a:avLst/>
@@ -18555,7 +18561,7 @@
         </p:nvSpPr>
         <p:spPr>
           <a:xfrm>
-            <a:off x="9817608" y="3351276"/>
+            <a:off x="9817608" y="3406140"/>
             <a:ext cx="164592" cy="0"/>
           </a:xfrm>
           <a:prstGeom prst="line">
@@ -18578,8 +18584,8 @@
         </p:nvSpPr>
         <p:spPr>
           <a:xfrm>
-            <a:off x="8927592" y="3200400"/>
-            <a:ext cx="890016" cy="301752"/>
+            <a:off x="8881872" y="3255264"/>
+            <a:ext cx="935736" cy="301752"/>
           </a:xfrm>
           <a:prstGeom prst="roundRect">
             <a:avLst>
@@ -18605,8 +18611,8 @@
         </p:nvSpPr>
         <p:spPr>
           <a:xfrm>
-            <a:off x="8964168" y="3273552"/>
-            <a:ext cx="816864" cy="146304"/>
+            <a:off x="8918448" y="3328416"/>
+            <a:ext cx="862584" cy="146304"/>
           </a:xfrm>
           <a:prstGeom prst="rect">
             <a:avLst/>
@@ -18646,8 +18652,8 @@
         </p:nvSpPr>
         <p:spPr>
           <a:xfrm>
-            <a:off x="9982200" y="3200400"/>
-            <a:ext cx="890016" cy="301752"/>
+            <a:off x="9982200" y="3255264"/>
+            <a:ext cx="935736" cy="301752"/>
           </a:xfrm>
           <a:prstGeom prst="roundRect">
             <a:avLst>
@@ -18673,8 +18679,8 @@
         </p:nvSpPr>
         <p:spPr>
           <a:xfrm>
-            <a:off x="10018776" y="3273552"/>
-            <a:ext cx="816864" cy="146304"/>
+            <a:off x="10018776" y="3328416"/>
+            <a:ext cx="862584" cy="146304"/>
           </a:xfrm>
           <a:prstGeom prst="rect">
             <a:avLst/>
@@ -18714,8 +18720,8 @@
         </p:nvSpPr>
         <p:spPr>
           <a:xfrm>
-            <a:off x="7854696" y="3694176"/>
-            <a:ext cx="3035808" cy="206654"/>
+            <a:off x="7763256" y="3749040"/>
+            <a:ext cx="3172968" cy="356616"/>
           </a:xfrm>
           <a:prstGeom prst="rect">
             <a:avLst/>
@@ -18733,7 +18739,7 @@
               <a:buNone/>
             </a:pPr>
             <a:r>
-              <a:rPr lang="en-US" sz="1120" dirty="0">
+              <a:rPr lang="en-US" sz="1040" dirty="0">
                 <a:solidFill>
                   <a:srgbClr val="17364A"/>
                 </a:solidFill>
@@ -18741,9 +18747,9 @@
                 <a:ea typeface="Aptos" pitchFamily="34" charset="-122"/>
                 <a:cs typeface="Aptos" pitchFamily="34" charset="-120"/>
               </a:rPr>
-              <a:t>Communication and engagement are stronger when feedback changes the work and the department reports what.</a:t>
-            </a:r>
-            <a:endParaRPr lang="en-US" sz="1120" dirty="0"/>
+              <a:t>Communication and engagement are stronger when feedback changes the.</a:t>
+            </a:r>
+            <a:endParaRPr lang="en-US" sz="1040" dirty="0"/>
           </a:p>
         </p:txBody>
       </p:sp>
@@ -18755,12 +18761,12 @@
         </p:nvSpPr>
         <p:spPr>
           <a:xfrm>
-            <a:off x="7635240" y="4184294"/>
-            <a:ext cx="3474720" cy="1466698"/>
+            <a:off x="7543800" y="4389120"/>
+            <a:ext cx="3611880" cy="1261872"/>
           </a:xfrm>
           <a:prstGeom prst="roundRect">
             <a:avLst>
-              <a:gd name="adj" fmla="val 7481"/>
+              <a:gd name="adj" fmla="val 8696"/>
             </a:avLst>
           </a:prstGeom>
           <a:solidFill>
@@ -18782,8 +18788,8 @@
         </p:nvSpPr>
         <p:spPr>
           <a:xfrm>
-            <a:off x="7799832" y="4330598"/>
-            <a:ext cx="3145536" cy="256032"/>
+            <a:off x="7708392" y="4517136"/>
+            <a:ext cx="3282696" cy="228600"/>
           </a:xfrm>
           <a:prstGeom prst="rect">
             <a:avLst/>
@@ -18799,7 +18805,7 @@
               <a:buNone/>
             </a:pPr>
             <a:r>
-              <a:rPr lang="en-US" sz="1300" b="1" dirty="0">
+              <a:rPr lang="en-US" sz="1220" b="1" dirty="0">
                 <a:solidFill>
                   <a:srgbClr val="0068B7"/>
                 </a:solidFill>
@@ -18809,7 +18815,7 @@
               </a:rPr>
               <a:t>Engagement move</a:t>
             </a:r>
-            <a:endParaRPr lang="en-US" sz="1300" dirty="0"/>
+            <a:endParaRPr lang="en-US" sz="1220" dirty="0"/>
           </a:p>
         </p:txBody>
       </p:sp>
@@ -18821,8 +18827,8 @@
         </p:nvSpPr>
         <p:spPr>
           <a:xfrm>
-            <a:off x="7799832" y="4659782"/>
-            <a:ext cx="3145536" cy="899770"/>
+            <a:off x="7708392" y="4828032"/>
+            <a:ext cx="3282696" cy="749808"/>
           </a:xfrm>
           <a:prstGeom prst="rect">
             <a:avLst/>
@@ -18840,7 +18846,7 @@
               <a:buNone/>
             </a:pPr>
             <a:r>
-              <a:rPr lang="en-US" sz="1320" dirty="0">
+              <a:rPr lang="en-US" sz="1220" dirty="0">
                 <a:solidFill>
                   <a:srgbClr val="17364A"/>
                 </a:solidFill>
@@ -18848,9 +18854,9 @@
                 <a:ea typeface="Aptos" pitchFamily="34" charset="-122"/>
                 <a:cs typeface="Aptos" pitchFamily="34" charset="-120"/>
               </a:rPr>
-              <a:t>Use the concept to plan transparent communication, gather stakeholder input, protect trust, and make sure affected communities are considered early.</a:t>
-            </a:r>
-            <a:endParaRPr lang="en-US" sz="1320" dirty="0"/>
+              <a:t>Use the concept to plan transparent communication, gather stakeholder input,.</a:t>
+            </a:r>
+            <a:endParaRPr lang="en-US" sz="1220" dirty="0"/>
           </a:p>
         </p:txBody>
       </p:sp>

--- a/downloads/presentations/modules/com-200.pptx
+++ b/downloads/presentations/modules/com-200.pptx
@@ -11729,7 +11729,7 @@
                 <a:ea typeface="Aptos" pitchFamily="34" charset="-122"/>
                 <a:cs typeface="Aptos" pitchFamily="34" charset="-120"/>
               </a:rPr>
-              <a:t>• 1. What is an appropriate role for AI in public health communications?</a:t>
+              <a:t>1. What is an appropriate role for AI in public health communications?</a:t>
             </a:r>
             <a:endParaRPr lang="en-US" sz="1920" dirty="0"/>
           </a:p>
@@ -11746,7 +11746,7 @@
                 <a:ea typeface="Aptos" pitchFamily="34" charset="-122"/>
                 <a:cs typeface="Aptos" pitchFamily="34" charset="-120"/>
               </a:rPr>
-              <a:t>• 2. Why is source verification necessary?</a:t>
+              <a:t>2. Why is source verification necessary?</a:t>
             </a:r>
             <a:endParaRPr lang="en-US" sz="1920" dirty="0"/>
           </a:p>
@@ -11763,7 +11763,7 @@
                 <a:ea typeface="Aptos" pitchFamily="34" charset="-122"/>
                 <a:cs typeface="Aptos" pitchFamily="34" charset="-120"/>
               </a:rPr>
-              <a:t>• 3. Which review is especially important for public-facing AI-assisted.</a:t>
+              <a:t>3. Which review is especially important for public-facing AI-assisted.</a:t>
             </a:r>
             <a:endParaRPr lang="en-US" sz="1920" dirty="0"/>
           </a:p>
@@ -11870,7 +11870,7 @@
                 <a:ea typeface="Aptos" pitchFamily="34" charset="-122"/>
                 <a:cs typeface="Aptos" pitchFamily="34" charset="-120"/>
               </a:rPr>
-              <a:t>1. What is an appropriate role for AI in public health communications?</a:t>
+              <a:t>What is an appropriate role for AI in public health communications?</a:t>
             </a:r>
             <a:endParaRPr lang="en-US" sz="1220" dirty="0"/>
           </a:p>
@@ -11977,41 +11977,7 @@
                 <a:ea typeface="Aptos" pitchFamily="34" charset="-122"/>
                 <a:cs typeface="Aptos" pitchFamily="34" charset="-120"/>
               </a:rPr>
-              <a:t>1.</a:t>
-            </a:r>
-            <a:endParaRPr lang="en-US" sz="1140" dirty="0"/>
-          </a:p>
-          <a:p>
-            <a:pPr indent="0" marL="0">
-              <a:buNone/>
-            </a:pPr>
-            <a:r>
-              <a:rPr lang="en-US" sz="1140" dirty="0">
-                <a:solidFill>
-                  <a:srgbClr val="17364A"/>
-                </a:solidFill>
-                <a:latin typeface="Aptos" pitchFamily="34" charset="0"/>
-                <a:ea typeface="Aptos" pitchFamily="34" charset="-122"/>
-                <a:cs typeface="Aptos" pitchFamily="34" charset="-120"/>
-              </a:rPr>
               <a:t>What is an appropriate role for AI in public.</a:t>
-            </a:r>
-            <a:endParaRPr lang="en-US" sz="1140" dirty="0"/>
-          </a:p>
-          <a:p>
-            <a:pPr indent="0" marL="0">
-              <a:buNone/>
-            </a:pPr>
-            <a:r>
-              <a:rPr lang="en-US" sz="1140" dirty="0">
-                <a:solidFill>
-                  <a:srgbClr val="17364A"/>
-                </a:solidFill>
-                <a:latin typeface="Aptos" pitchFamily="34" charset="0"/>
-                <a:ea typeface="Aptos" pitchFamily="34" charset="-122"/>
-                <a:cs typeface="Aptos" pitchFamily="34" charset="-120"/>
-              </a:rPr>
-              <a:t>2.</a:t>
             </a:r>
             <a:endParaRPr lang="en-US" sz="1140" dirty="0"/>
           </a:p>
